--- a/第六单元PPT/第22课 皇帝的新装.pptx
+++ b/第六单元PPT/第22课 皇帝的新装.pptx
@@ -3128,17 +3128,17 @@
         </p:nvSpPr>
         <p:spPr>
           <a:xfrm>
-            <a:off x="0" y="0"/>
-            <a:ext cx="12191695" cy="6858000"/>
-          </a:xfrm>
-          <a:prstGeom prst="rect">
-            <a:avLst/>
-          </a:prstGeom>
-          <a:solidFill>
-            <a:srgbClr val="FCFAF7"/>
-          </a:solidFill>
-          <a:ln>
-            <a:noFill/>
+            <a:off x="292608" y="274320"/>
+            <a:ext cx="11594592" cy="6300216"/>
+          </a:xfrm>
+          <a:prstGeom prst="rect">
+            <a:avLst/>
+          </a:prstGeom>
+          <a:noFill/>
+          <a:ln w="31750">
+            <a:solidFill>
+              <a:srgbClr val="825AA0"/>
+            </a:solidFill>
           </a:ln>
         </p:spPr>
         <p:style>
@@ -3163,25 +3163,73 @@
           </a:p>
         </p:txBody>
       </p:sp>
-      <p:sp>
-        <p:nvSpPr>
-          <p:cNvPr id="4" name="Rectangle 3"/>
+      <p:pic>
+        <p:nvPicPr>
+          <p:cNvPr id="4" name="Picture 3" descr="corner_emperor_tl.png"/>
+          <p:cNvPicPr>
+            <a:picLocks noChangeAspect="1"/>
+          </p:cNvPicPr>
+          <p:nvPr/>
+        </p:nvPicPr>
+        <p:blipFill>
+          <a:blip r:embed="rId3"/>
+          <a:stretch>
+            <a:fillRect/>
+          </a:stretch>
+        </p:blipFill>
+        <p:spPr>
+          <a:xfrm>
+            <a:off x="-45720" y="-45720"/>
+            <a:ext cx="2011680" cy="2011680"/>
+          </a:xfrm>
+          <a:prstGeom prst="rect">
+            <a:avLst/>
+          </a:prstGeom>
+        </p:spPr>
+      </p:pic>
+      <p:pic>
+        <p:nvPicPr>
+          <p:cNvPr id="5" name="Picture 4" descr="corner_emperor_tr.png"/>
+          <p:cNvPicPr>
+            <a:picLocks noChangeAspect="1"/>
+          </p:cNvPicPr>
+          <p:nvPr/>
+        </p:nvPicPr>
+        <p:blipFill>
+          <a:blip r:embed="rId4"/>
+          <a:stretch>
+            <a:fillRect/>
+          </a:stretch>
+        </p:blipFill>
+        <p:spPr>
+          <a:xfrm>
+            <a:off x="9875520" y="-45720"/>
+            <a:ext cx="2011680" cy="2011680"/>
+          </a:xfrm>
+          <a:prstGeom prst="rect">
+            <a:avLst/>
+          </a:prstGeom>
+        </p:spPr>
+      </p:pic>
+      <p:sp>
+        <p:nvSpPr>
+          <p:cNvPr id="6" name="Rectangle 5"/>
           <p:cNvSpPr/>
           <p:nvPr/>
         </p:nvSpPr>
         <p:spPr>
           <a:xfrm>
-            <a:off x="0" y="2926080"/>
-            <a:ext cx="12191695" cy="73152"/>
-          </a:xfrm>
-          <a:prstGeom prst="rect">
-            <a:avLst/>
-          </a:prstGeom>
-          <a:solidFill>
-            <a:srgbClr val="B4AAC4"/>
-          </a:solidFill>
-          <a:ln>
-            <a:noFill/>
+            <a:off x="292608" y="274320"/>
+            <a:ext cx="11594592" cy="6300216"/>
+          </a:xfrm>
+          <a:prstGeom prst="rect">
+            <a:avLst/>
+          </a:prstGeom>
+          <a:noFill/>
+          <a:ln w="31750">
+            <a:solidFill>
+              <a:srgbClr val="825AA0"/>
+            </a:solidFill>
           </a:ln>
         </p:spPr>
         <p:style>
@@ -3208,14 +3256,57 @@
       </p:sp>
       <p:sp>
         <p:nvSpPr>
-          <p:cNvPr id="5" name="TextBox 4"/>
+          <p:cNvPr id="7" name="Rectangle 6"/>
+          <p:cNvSpPr/>
+          <p:nvPr/>
+        </p:nvSpPr>
+        <p:spPr>
+          <a:xfrm>
+            <a:off x="347472" y="329184"/>
+            <a:ext cx="11484864" cy="6190488"/>
+          </a:xfrm>
+          <a:prstGeom prst="rect">
+            <a:avLst/>
+          </a:prstGeom>
+          <a:noFill/>
+          <a:ln w="12700">
+            <a:solidFill>
+              <a:srgbClr val="C8AADC"/>
+            </a:solidFill>
+          </a:ln>
+        </p:spPr>
+        <p:style>
+          <a:lnRef idx="1">
+            <a:schemeClr val="accent1"/>
+          </a:lnRef>
+          <a:fillRef idx="3">
+            <a:schemeClr val="accent1"/>
+          </a:fillRef>
+          <a:effectRef idx="2">
+            <a:schemeClr val="accent1"/>
+          </a:effectRef>
+          <a:fontRef idx="minor">
+            <a:schemeClr val="lt1"/>
+          </a:fontRef>
+        </p:style>
+        <p:txBody>
+          <a:bodyPr rtlCol="0" anchor="ctr"/>
+          <a:lstStyle/>
+          <a:p>
+            <a:pPr algn="ctr"/>
+          </a:p>
+        </p:txBody>
+      </p:sp>
+      <p:sp>
+        <p:nvSpPr>
+          <p:cNvPr id="8" name="TextBox 7"/>
           <p:cNvSpPr txBox="1"/>
           <p:nvPr/>
         </p:nvSpPr>
         <p:spPr>
           <a:xfrm>
-            <a:off x="914400" y="2286000"/>
-            <a:ext cx="10058400" cy="1371600"/>
+            <a:off x="1371600" y="2011680"/>
+            <a:ext cx="9418320" cy="1645920"/>
           </a:xfrm>
           <a:prstGeom prst="rect">
             <a:avLst/>
@@ -3228,51 +3319,79 @@
           </a:bodyPr>
           <a:lstStyle/>
           <a:p>
-            <a:pPr algn="ctr"/>
+            <a:pPr algn="ctr">
+              <a:spcAft>
+                <a:spcPts val="1000"/>
+              </a:spcAft>
+            </a:pPr>
             <a:r>
               <a:rPr sz="5200" b="1">
                 <a:solidFill>
-                  <a:srgbClr val="5A606E"/>
+                  <a:srgbClr val="784696"/>
                 </a:solidFill>
                 <a:latin typeface="Microsoft YaHei"/>
               </a:rPr>
               <a:t>皇帝的新装</a:t>
             </a:r>
           </a:p>
-        </p:txBody>
-      </p:sp>
-      <p:sp>
-        <p:nvSpPr>
-          <p:cNvPr id="6" name="TextBox 5"/>
-          <p:cNvSpPr txBox="1"/>
-          <p:nvPr/>
-        </p:nvSpPr>
-        <p:spPr>
-          <a:xfrm>
-            <a:off x="914400" y="3657600"/>
-            <a:ext cx="10058400" cy="914400"/>
-          </a:xfrm>
-          <a:prstGeom prst="rect">
-            <a:avLst/>
-          </a:prstGeom>
-          <a:noFill/>
-        </p:spPr>
-        <p:txBody>
-          <a:bodyPr wrap="none">
-            <a:spAutoFit/>
-          </a:bodyPr>
-          <a:lstStyle/>
-          <a:p>
-            <a:pPr algn="ctr"/>
-            <a:r>
-              <a:rPr sz="2800" b="0">
+          <a:p>
+            <a:pPr algn="ctr">
+              <a:spcAft>
+                <a:spcPts val="1000"/>
+              </a:spcAft>
+            </a:pPr>
+            <a:r>
+              <a:rPr sz="2600" b="0">
                 <a:solidFill>
-                  <a:srgbClr val="B4AAC4"/>
+                  <a:srgbClr val="3C2850"/>
                 </a:solidFill>
                 <a:latin typeface="Microsoft YaHei"/>
               </a:rPr>
               <a:t>第22课 · 第四、五课时 · 真实与虚假</a:t>
             </a:r>
+          </a:p>
+        </p:txBody>
+      </p:sp>
+      <p:sp>
+        <p:nvSpPr>
+          <p:cNvPr id="9" name="Rectangle 8"/>
+          <p:cNvSpPr/>
+          <p:nvPr/>
+        </p:nvSpPr>
+        <p:spPr>
+          <a:xfrm>
+            <a:off x="3200400" y="5029200"/>
+            <a:ext cx="5760720" cy="27432"/>
+          </a:xfrm>
+          <a:prstGeom prst="rect">
+            <a:avLst/>
+          </a:prstGeom>
+          <a:solidFill>
+            <a:srgbClr val="C8AADC"/>
+          </a:solidFill>
+          <a:ln>
+            <a:noFill/>
+          </a:ln>
+        </p:spPr>
+        <p:style>
+          <a:lnRef idx="1">
+            <a:schemeClr val="accent1"/>
+          </a:lnRef>
+          <a:fillRef idx="3">
+            <a:schemeClr val="accent1"/>
+          </a:fillRef>
+          <a:effectRef idx="2">
+            <a:schemeClr val="accent1"/>
+          </a:effectRef>
+          <a:fontRef idx="minor">
+            <a:schemeClr val="lt1"/>
+          </a:fontRef>
+        </p:style>
+        <p:txBody>
+          <a:bodyPr rtlCol="0" anchor="ctr"/>
+          <a:lstStyle/>
+          <a:p>
+            <a:pPr algn="ctr"/>
           </a:p>
         </p:txBody>
       </p:sp>
@@ -3326,17 +3445,17 @@
         </p:nvSpPr>
         <p:spPr>
           <a:xfrm>
-            <a:off x="0" y="0"/>
-            <a:ext cx="12191695" cy="6858000"/>
-          </a:xfrm>
-          <a:prstGeom prst="rect">
-            <a:avLst/>
-          </a:prstGeom>
-          <a:solidFill>
-            <a:srgbClr val="FCFAF7"/>
-          </a:solidFill>
-          <a:ln>
-            <a:noFill/>
+            <a:off x="292608" y="274320"/>
+            <a:ext cx="11594592" cy="6300216"/>
+          </a:xfrm>
+          <a:prstGeom prst="rect">
+            <a:avLst/>
+          </a:prstGeom>
+          <a:noFill/>
+          <a:ln w="31750">
+            <a:solidFill>
+              <a:srgbClr val="825AA0"/>
+            </a:solidFill>
           </a:ln>
         </p:spPr>
         <p:style>
@@ -3361,22 +3480,70 @@
           </a:p>
         </p:txBody>
       </p:sp>
-      <p:sp>
-        <p:nvSpPr>
-          <p:cNvPr id="4" name="Rectangle 3"/>
+      <p:pic>
+        <p:nvPicPr>
+          <p:cNvPr id="4" name="Picture 3" descr="corner_emperor_tl.png"/>
+          <p:cNvPicPr>
+            <a:picLocks noChangeAspect="1"/>
+          </p:cNvPicPr>
+          <p:nvPr/>
+        </p:nvPicPr>
+        <p:blipFill>
+          <a:blip r:embed="rId3"/>
+          <a:stretch>
+            <a:fillRect/>
+          </a:stretch>
+        </p:blipFill>
+        <p:spPr>
+          <a:xfrm>
+            <a:off x="-45720" y="-45720"/>
+            <a:ext cx="2011680" cy="2011680"/>
+          </a:xfrm>
+          <a:prstGeom prst="rect">
+            <a:avLst/>
+          </a:prstGeom>
+        </p:spPr>
+      </p:pic>
+      <p:pic>
+        <p:nvPicPr>
+          <p:cNvPr id="5" name="Picture 4" descr="corner_emperor_tr.png"/>
+          <p:cNvPicPr>
+            <a:picLocks noChangeAspect="1"/>
+          </p:cNvPicPr>
+          <p:nvPr/>
+        </p:nvPicPr>
+        <p:blipFill>
+          <a:blip r:embed="rId4"/>
+          <a:stretch>
+            <a:fillRect/>
+          </a:stretch>
+        </p:blipFill>
+        <p:spPr>
+          <a:xfrm>
+            <a:off x="9875520" y="-45720"/>
+            <a:ext cx="2011680" cy="2011680"/>
+          </a:xfrm>
+          <a:prstGeom prst="rect">
+            <a:avLst/>
+          </a:prstGeom>
+        </p:spPr>
+      </p:pic>
+      <p:sp>
+        <p:nvSpPr>
+          <p:cNvPr id="6" name="Rounded Rectangle 5"/>
           <p:cNvSpPr/>
           <p:nvPr/>
         </p:nvSpPr>
         <p:spPr>
           <a:xfrm>
-            <a:off x="0" y="0"/>
-            <a:ext cx="12191695" cy="91440"/>
-          </a:xfrm>
-          <a:prstGeom prst="rect">
+            <a:off x="4953304" y="502920"/>
+            <a:ext cx="2286000" cy="411480"/>
+          </a:xfrm>
+          <a:prstGeom prst="roundRect">
             <a:avLst/>
           </a:prstGeom>
           <a:solidFill>
-            <a:srgbClr val="B4AAC4"/>
+            <a:srgbClr val="C8AADC"/>
           </a:solidFill>
           <a:ln>
             <a:noFill/>
@@ -3406,14 +3573,14 @@
       </p:sp>
       <p:sp>
         <p:nvSpPr>
-          <p:cNvPr id="5" name="TextBox 4"/>
+          <p:cNvPr id="7" name="TextBox 6"/>
           <p:cNvSpPr txBox="1"/>
           <p:nvPr/>
         </p:nvSpPr>
         <p:spPr>
           <a:xfrm>
-            <a:off x="640080" y="228600"/>
-            <a:ext cx="2743200" cy="457200"/>
+            <a:off x="4953304" y="521208"/>
+            <a:ext cx="2286000" cy="384048"/>
           </a:xfrm>
           <a:prstGeom prst="rect">
             <a:avLst/>
@@ -3426,10 +3593,15 @@
           </a:bodyPr>
           <a:lstStyle/>
           <a:p>
-            <a:r>
-              <a:rPr sz="2000" b="1">
+            <a:pPr algn="ctr">
+              <a:spcAft>
+                <a:spcPts val="1000"/>
+              </a:spcAft>
+            </a:pPr>
+            <a:r>
+              <a:rPr sz="1800" b="1">
                 <a:solidFill>
-                  <a:srgbClr val="B4AAC4"/>
+                  <a:srgbClr val="3C2850"/>
                 </a:solidFill>
                 <a:latin typeface="Microsoft YaHei"/>
               </a:rPr>
@@ -3440,14 +3612,14 @@
       </p:sp>
       <p:sp>
         <p:nvSpPr>
-          <p:cNvPr id="6" name="TextBox 5"/>
+          <p:cNvPr id="8" name="TextBox 7"/>
           <p:cNvSpPr txBox="1"/>
           <p:nvPr/>
         </p:nvSpPr>
         <p:spPr>
           <a:xfrm>
-            <a:off x="640080" y="685800"/>
-            <a:ext cx="10515600" cy="914400"/>
+            <a:off x="1371600" y="960120"/>
+            <a:ext cx="9418320" cy="822960"/>
           </a:xfrm>
           <a:prstGeom prst="rect">
             <a:avLst/>
@@ -3455,15 +3627,20 @@
           <a:noFill/>
         </p:spPr>
         <p:txBody>
-          <a:bodyPr wrap="none">
+          <a:bodyPr wrap="square">
             <a:spAutoFit/>
           </a:bodyPr>
           <a:lstStyle/>
           <a:p>
+            <a:pPr algn="ctr">
+              <a:spcAft>
+                <a:spcPts val="1000"/>
+              </a:spcAft>
+            </a:pPr>
             <a:r>
               <a:rPr sz="3600" b="1">
                 <a:solidFill>
-                  <a:srgbClr val="5A606E"/>
+                  <a:srgbClr val="784696"/>
                 </a:solidFill>
                 <a:latin typeface="Microsoft YaHei"/>
               </a:rPr>
@@ -3474,14 +3651,145 @@
       </p:sp>
       <p:sp>
         <p:nvSpPr>
-          <p:cNvPr id="7" name="TextBox 6"/>
+          <p:cNvPr id="9" name="Rectangle 8"/>
+          <p:cNvSpPr/>
+          <p:nvPr/>
+        </p:nvSpPr>
+        <p:spPr>
+          <a:xfrm>
+            <a:off x="3200400" y="1600200"/>
+            <a:ext cx="5760720" cy="27432"/>
+          </a:xfrm>
+          <a:prstGeom prst="rect">
+            <a:avLst/>
+          </a:prstGeom>
+          <a:solidFill>
+            <a:srgbClr val="C8AADC"/>
+          </a:solidFill>
+          <a:ln>
+            <a:noFill/>
+          </a:ln>
+        </p:spPr>
+        <p:style>
+          <a:lnRef idx="1">
+            <a:schemeClr val="accent1"/>
+          </a:lnRef>
+          <a:fillRef idx="3">
+            <a:schemeClr val="accent1"/>
+          </a:fillRef>
+          <a:effectRef idx="2">
+            <a:schemeClr val="accent1"/>
+          </a:effectRef>
+          <a:fontRef idx="minor">
+            <a:schemeClr val="lt1"/>
+          </a:fontRef>
+        </p:style>
+        <p:txBody>
+          <a:bodyPr rtlCol="0" anchor="ctr"/>
+          <a:lstStyle/>
+          <a:p>
+            <a:pPr algn="ctr"/>
+          </a:p>
+        </p:txBody>
+      </p:sp>
+      <p:sp>
+        <p:nvSpPr>
+          <p:cNvPr id="10" name="Rounded Rectangle 9"/>
+          <p:cNvSpPr/>
+          <p:nvPr/>
+        </p:nvSpPr>
+        <p:spPr>
+          <a:xfrm>
+            <a:off x="1295704" y="1645920"/>
+            <a:ext cx="9601200" cy="2240280"/>
+          </a:xfrm>
+          <a:prstGeom prst="roundRect">
+            <a:avLst/>
+          </a:prstGeom>
+          <a:solidFill>
+            <a:srgbClr val="FCF8FF"/>
+          </a:solidFill>
+          <a:ln w="19050">
+            <a:solidFill>
+              <a:srgbClr val="C8AADC"/>
+            </a:solidFill>
+          </a:ln>
+        </p:spPr>
+        <p:style>
+          <a:lnRef idx="1">
+            <a:schemeClr val="accent1"/>
+          </a:lnRef>
+          <a:fillRef idx="3">
+            <a:schemeClr val="accent1"/>
+          </a:fillRef>
+          <a:effectRef idx="2">
+            <a:schemeClr val="accent1"/>
+          </a:effectRef>
+          <a:fontRef idx="minor">
+            <a:schemeClr val="lt1"/>
+          </a:fontRef>
+        </p:style>
+        <p:txBody>
+          <a:bodyPr rtlCol="0" anchor="ctr"/>
+          <a:lstStyle/>
+          <a:p>
+            <a:pPr algn="ctr"/>
+          </a:p>
+        </p:txBody>
+      </p:sp>
+      <p:sp>
+        <p:nvSpPr>
+          <p:cNvPr id="11" name="Oval 10"/>
+          <p:cNvSpPr/>
+          <p:nvPr/>
+        </p:nvSpPr>
+        <p:spPr>
+          <a:xfrm>
+            <a:off x="2255824" y="1828800"/>
+            <a:ext cx="384048" cy="384048"/>
+          </a:xfrm>
+          <a:prstGeom prst="ellipse">
+            <a:avLst/>
+          </a:prstGeom>
+          <a:solidFill>
+            <a:srgbClr val="784696"/>
+          </a:solidFill>
+          <a:ln>
+            <a:noFill/>
+          </a:ln>
+        </p:spPr>
+        <p:style>
+          <a:lnRef idx="1">
+            <a:schemeClr val="accent1"/>
+          </a:lnRef>
+          <a:fillRef idx="3">
+            <a:schemeClr val="accent1"/>
+          </a:fillRef>
+          <a:effectRef idx="2">
+            <a:schemeClr val="accent1"/>
+          </a:effectRef>
+          <a:fontRef idx="minor">
+            <a:schemeClr val="lt1"/>
+          </a:fontRef>
+        </p:style>
+        <p:txBody>
+          <a:bodyPr rtlCol="0" anchor="ctr"/>
+          <a:lstStyle/>
+          <a:p>
+            <a:pPr algn="ctr"/>
+          </a:p>
+        </p:txBody>
+      </p:sp>
+      <p:sp>
+        <p:nvSpPr>
+          <p:cNvPr id="12" name="TextBox 11"/>
           <p:cNvSpPr txBox="1"/>
           <p:nvPr/>
         </p:nvSpPr>
         <p:spPr>
           <a:xfrm>
-            <a:off x="822960" y="1691640"/>
-            <a:ext cx="10241280" cy="4389120"/>
+            <a:off x="2255824" y="1847088"/>
+            <a:ext cx="384048" cy="365760"/>
           </a:xfrm>
           <a:prstGeom prst="rect">
             <a:avLst/>
@@ -3489,83 +3797,305 @@
           <a:noFill/>
         </p:spPr>
         <p:txBody>
-          <a:bodyPr wrap="square" anchor="t">
+          <a:bodyPr wrap="none">
             <a:spAutoFit/>
           </a:bodyPr>
           <a:lstStyle/>
           <a:p>
-            <a:pPr>
+            <a:pPr algn="ctr">
               <a:spcAft>
-                <a:spcPts val="1600"/>
+                <a:spcPts val="1000"/>
               </a:spcAft>
             </a:pPr>
             <a:r>
-              <a:rPr sz="2600" b="1">
+              <a:rPr sz="1600" b="1">
                 <a:solidFill>
-                  <a:srgbClr val="B4AAC4"/>
+                  <a:srgbClr val="FFFFFF"/>
                 </a:solidFill>
                 <a:latin typeface="Microsoft YaHei"/>
               </a:rPr>
-              <a:t>目标1  </a:t>
-            </a:r>
-            <a:r>
-              <a:rPr sz="2600" b="0">
+              <a:t>1</a:t>
+            </a:r>
+          </a:p>
+        </p:txBody>
+      </p:sp>
+      <p:sp>
+        <p:nvSpPr>
+          <p:cNvPr id="13" name="TextBox 12"/>
+          <p:cNvSpPr txBox="1"/>
+          <p:nvPr/>
+        </p:nvSpPr>
+        <p:spPr>
+          <a:xfrm>
+            <a:off x="2758744" y="1810512"/>
+            <a:ext cx="7772400" cy="502920"/>
+          </a:xfrm>
+          <a:prstGeom prst="rect">
+            <a:avLst/>
+          </a:prstGeom>
+          <a:noFill/>
+        </p:spPr>
+        <p:txBody>
+          <a:bodyPr wrap="none">
+            <a:spAutoFit/>
+          </a:bodyPr>
+          <a:lstStyle/>
+          <a:p>
+            <a:pPr algn="l">
+              <a:spcAft>
+                <a:spcPts val="1000"/>
+              </a:spcAft>
+            </a:pPr>
+            <a:r>
+              <a:rPr sz="2400" b="0">
                 <a:solidFill>
-                  <a:srgbClr val="5A606E"/>
+                  <a:srgbClr val="3C2850"/>
                 </a:solidFill>
                 <a:latin typeface="Microsoft YaHei"/>
               </a:rPr>
-              <a:t>梳理童话情节，简洁复述</a:t>
-            </a:r>
-          </a:p>
-          <a:p>
-            <a:pPr>
+              <a:t>梳理童话情节，用简洁语言复述故事</a:t>
+            </a:r>
+          </a:p>
+        </p:txBody>
+      </p:sp>
+      <p:sp>
+        <p:nvSpPr>
+          <p:cNvPr id="14" name="Oval 13"/>
+          <p:cNvSpPr/>
+          <p:nvPr/>
+        </p:nvSpPr>
+        <p:spPr>
+          <a:xfrm>
+            <a:off x="2255824" y="2395728"/>
+            <a:ext cx="384048" cy="384048"/>
+          </a:xfrm>
+          <a:prstGeom prst="ellipse">
+            <a:avLst/>
+          </a:prstGeom>
+          <a:solidFill>
+            <a:srgbClr val="784696"/>
+          </a:solidFill>
+          <a:ln>
+            <a:noFill/>
+          </a:ln>
+        </p:spPr>
+        <p:style>
+          <a:lnRef idx="1">
+            <a:schemeClr val="accent1"/>
+          </a:lnRef>
+          <a:fillRef idx="3">
+            <a:schemeClr val="accent1"/>
+          </a:fillRef>
+          <a:effectRef idx="2">
+            <a:schemeClr val="accent1"/>
+          </a:effectRef>
+          <a:fontRef idx="minor">
+            <a:schemeClr val="lt1"/>
+          </a:fontRef>
+        </p:style>
+        <p:txBody>
+          <a:bodyPr rtlCol="0" anchor="ctr"/>
+          <a:lstStyle/>
+          <a:p>
+            <a:pPr algn="ctr"/>
+          </a:p>
+        </p:txBody>
+      </p:sp>
+      <p:sp>
+        <p:nvSpPr>
+          <p:cNvPr id="15" name="TextBox 14"/>
+          <p:cNvSpPr txBox="1"/>
+          <p:nvPr/>
+        </p:nvSpPr>
+        <p:spPr>
+          <a:xfrm>
+            <a:off x="2255824" y="2414016"/>
+            <a:ext cx="384048" cy="365760"/>
+          </a:xfrm>
+          <a:prstGeom prst="rect">
+            <a:avLst/>
+          </a:prstGeom>
+          <a:noFill/>
+        </p:spPr>
+        <p:txBody>
+          <a:bodyPr wrap="none">
+            <a:spAutoFit/>
+          </a:bodyPr>
+          <a:lstStyle/>
+          <a:p>
+            <a:pPr algn="ctr">
               <a:spcAft>
-                <a:spcPts val="1600"/>
+                <a:spcPts val="1000"/>
               </a:spcAft>
             </a:pPr>
             <a:r>
-              <a:rPr sz="2600" b="1">
+              <a:rPr sz="1600" b="1">
                 <a:solidFill>
-                  <a:srgbClr val="B4AAC4"/>
+                  <a:srgbClr val="FFFFFF"/>
                 </a:solidFill>
                 <a:latin typeface="Microsoft YaHei"/>
               </a:rPr>
-              <a:t>目标2  </a:t>
-            </a:r>
-            <a:r>
-              <a:rPr sz="2600" b="0">
+              <a:t>2</a:t>
+            </a:r>
+          </a:p>
+        </p:txBody>
+      </p:sp>
+      <p:sp>
+        <p:nvSpPr>
+          <p:cNvPr id="16" name="TextBox 15"/>
+          <p:cNvSpPr txBox="1"/>
+          <p:nvPr/>
+        </p:nvSpPr>
+        <p:spPr>
+          <a:xfrm>
+            <a:off x="2758744" y="2377440"/>
+            <a:ext cx="7772400" cy="502920"/>
+          </a:xfrm>
+          <a:prstGeom prst="rect">
+            <a:avLst/>
+          </a:prstGeom>
+          <a:noFill/>
+        </p:spPr>
+        <p:txBody>
+          <a:bodyPr wrap="none">
+            <a:spAutoFit/>
+          </a:bodyPr>
+          <a:lstStyle/>
+          <a:p>
+            <a:pPr algn="l">
+              <a:spcAft>
+                <a:spcPts val="1000"/>
+              </a:spcAft>
+            </a:pPr>
+            <a:r>
+              <a:rPr sz="2400" b="0">
                 <a:solidFill>
-                  <a:srgbClr val="5A606E"/>
+                  <a:srgbClr val="3C2850"/>
                 </a:solidFill>
                 <a:latin typeface="Microsoft YaHei"/>
               </a:rPr>
-              <a:t>赏析夸张、反讽等手法</a:t>
-            </a:r>
-          </a:p>
-          <a:p>
-            <a:pPr>
+              <a:t>赏析夸张、反讽等手法，理解讽刺艺术</a:t>
+            </a:r>
+          </a:p>
+        </p:txBody>
+      </p:sp>
+      <p:sp>
+        <p:nvSpPr>
+          <p:cNvPr id="17" name="Oval 16"/>
+          <p:cNvSpPr/>
+          <p:nvPr/>
+        </p:nvSpPr>
+        <p:spPr>
+          <a:xfrm>
+            <a:off x="2255824" y="2962656"/>
+            <a:ext cx="384048" cy="384048"/>
+          </a:xfrm>
+          <a:prstGeom prst="ellipse">
+            <a:avLst/>
+          </a:prstGeom>
+          <a:solidFill>
+            <a:srgbClr val="784696"/>
+          </a:solidFill>
+          <a:ln>
+            <a:noFill/>
+          </a:ln>
+        </p:spPr>
+        <p:style>
+          <a:lnRef idx="1">
+            <a:schemeClr val="accent1"/>
+          </a:lnRef>
+          <a:fillRef idx="3">
+            <a:schemeClr val="accent1"/>
+          </a:fillRef>
+          <a:effectRef idx="2">
+            <a:schemeClr val="accent1"/>
+          </a:effectRef>
+          <a:fontRef idx="minor">
+            <a:schemeClr val="lt1"/>
+          </a:fontRef>
+        </p:style>
+        <p:txBody>
+          <a:bodyPr rtlCol="0" anchor="ctr"/>
+          <a:lstStyle/>
+          <a:p>
+            <a:pPr algn="ctr"/>
+          </a:p>
+        </p:txBody>
+      </p:sp>
+      <p:sp>
+        <p:nvSpPr>
+          <p:cNvPr id="18" name="TextBox 17"/>
+          <p:cNvSpPr txBox="1"/>
+          <p:nvPr/>
+        </p:nvSpPr>
+        <p:spPr>
+          <a:xfrm>
+            <a:off x="2255824" y="2980944"/>
+            <a:ext cx="384048" cy="365760"/>
+          </a:xfrm>
+          <a:prstGeom prst="rect">
+            <a:avLst/>
+          </a:prstGeom>
+          <a:noFill/>
+        </p:spPr>
+        <p:txBody>
+          <a:bodyPr wrap="none">
+            <a:spAutoFit/>
+          </a:bodyPr>
+          <a:lstStyle/>
+          <a:p>
+            <a:pPr algn="ctr">
               <a:spcAft>
-                <a:spcPts val="1600"/>
+                <a:spcPts val="1000"/>
               </a:spcAft>
             </a:pPr>
             <a:r>
-              <a:rPr sz="2600" b="1">
+              <a:rPr sz="1600" b="1">
                 <a:solidFill>
-                  <a:srgbClr val="B4AAC4"/>
+                  <a:srgbClr val="FFFFFF"/>
                 </a:solidFill>
                 <a:latin typeface="Microsoft YaHei"/>
               </a:rPr>
-              <a:t>目标3  </a:t>
-            </a:r>
-            <a:r>
-              <a:rPr sz="2600" b="0">
+              <a:t>3</a:t>
+            </a:r>
+          </a:p>
+        </p:txBody>
+      </p:sp>
+      <p:sp>
+        <p:nvSpPr>
+          <p:cNvPr id="19" name="TextBox 18"/>
+          <p:cNvSpPr txBox="1"/>
+          <p:nvPr/>
+        </p:nvSpPr>
+        <p:spPr>
+          <a:xfrm>
+            <a:off x="2758744" y="2944368"/>
+            <a:ext cx="7772400" cy="502920"/>
+          </a:xfrm>
+          <a:prstGeom prst="rect">
+            <a:avLst/>
+          </a:prstGeom>
+          <a:noFill/>
+        </p:spPr>
+        <p:txBody>
+          <a:bodyPr wrap="none">
+            <a:spAutoFit/>
+          </a:bodyPr>
+          <a:lstStyle/>
+          <a:p>
+            <a:pPr algn="l">
+              <a:spcAft>
+                <a:spcPts val="1000"/>
+              </a:spcAft>
+            </a:pPr>
+            <a:r>
+              <a:rPr sz="2400" b="0">
                 <a:solidFill>
-                  <a:srgbClr val="5A606E"/>
+                  <a:srgbClr val="3C2850"/>
                 </a:solidFill>
                 <a:latin typeface="Microsoft YaHei"/>
               </a:rPr>
-              <a:t>探究「真话为何难以说出口」</a:t>
+              <a:t>探究「真话为何难以说出口」，树立独立判断</a:t>
             </a:r>
           </a:p>
         </p:txBody>
@@ -3620,17 +4150,17 @@
         </p:nvSpPr>
         <p:spPr>
           <a:xfrm>
-            <a:off x="0" y="0"/>
-            <a:ext cx="12191695" cy="6858000"/>
-          </a:xfrm>
-          <a:prstGeom prst="rect">
-            <a:avLst/>
-          </a:prstGeom>
-          <a:solidFill>
-            <a:srgbClr val="FCFAF7"/>
-          </a:solidFill>
-          <a:ln>
-            <a:noFill/>
+            <a:off x="292608" y="274320"/>
+            <a:ext cx="11594592" cy="6300216"/>
+          </a:xfrm>
+          <a:prstGeom prst="rect">
+            <a:avLst/>
+          </a:prstGeom>
+          <a:noFill/>
+          <a:ln w="31750">
+            <a:solidFill>
+              <a:srgbClr val="825AA0"/>
+            </a:solidFill>
           </a:ln>
         </p:spPr>
         <p:style>
@@ -3655,22 +4185,70 @@
           </a:p>
         </p:txBody>
       </p:sp>
-      <p:sp>
-        <p:nvSpPr>
-          <p:cNvPr id="4" name="Rectangle 3"/>
+      <p:pic>
+        <p:nvPicPr>
+          <p:cNvPr id="4" name="Picture 3" descr="corner_emperor_tl.png"/>
+          <p:cNvPicPr>
+            <a:picLocks noChangeAspect="1"/>
+          </p:cNvPicPr>
+          <p:nvPr/>
+        </p:nvPicPr>
+        <p:blipFill>
+          <a:blip r:embed="rId3"/>
+          <a:stretch>
+            <a:fillRect/>
+          </a:stretch>
+        </p:blipFill>
+        <p:spPr>
+          <a:xfrm>
+            <a:off x="-45720" y="-45720"/>
+            <a:ext cx="2011680" cy="2011680"/>
+          </a:xfrm>
+          <a:prstGeom prst="rect">
+            <a:avLst/>
+          </a:prstGeom>
+        </p:spPr>
+      </p:pic>
+      <p:pic>
+        <p:nvPicPr>
+          <p:cNvPr id="5" name="Picture 4" descr="corner_emperor_tr.png"/>
+          <p:cNvPicPr>
+            <a:picLocks noChangeAspect="1"/>
+          </p:cNvPicPr>
+          <p:nvPr/>
+        </p:nvPicPr>
+        <p:blipFill>
+          <a:blip r:embed="rId4"/>
+          <a:stretch>
+            <a:fillRect/>
+          </a:stretch>
+        </p:blipFill>
+        <p:spPr>
+          <a:xfrm>
+            <a:off x="9875520" y="-45720"/>
+            <a:ext cx="2011680" cy="2011680"/>
+          </a:xfrm>
+          <a:prstGeom prst="rect">
+            <a:avLst/>
+          </a:prstGeom>
+        </p:spPr>
+      </p:pic>
+      <p:sp>
+        <p:nvSpPr>
+          <p:cNvPr id="6" name="Rounded Rectangle 5"/>
           <p:cNvSpPr/>
           <p:nvPr/>
         </p:nvSpPr>
         <p:spPr>
           <a:xfrm>
-            <a:off x="0" y="0"/>
-            <a:ext cx="12191695" cy="109728"/>
-          </a:xfrm>
-          <a:prstGeom prst="rect">
+            <a:off x="4953304" y="1005840"/>
+            <a:ext cx="2286000" cy="411480"/>
+          </a:xfrm>
+          <a:prstGeom prst="roundRect">
             <a:avLst/>
           </a:prstGeom>
           <a:solidFill>
-            <a:srgbClr val="FF7F66"/>
+            <a:srgbClr val="C8AADC"/>
           </a:solidFill>
           <a:ln>
             <a:noFill/>
@@ -3700,14 +4278,53 @@
       </p:sp>
       <p:sp>
         <p:nvSpPr>
-          <p:cNvPr id="5" name="TextBox 4"/>
+          <p:cNvPr id="7" name="TextBox 6"/>
           <p:cNvSpPr txBox="1"/>
           <p:nvPr/>
         </p:nvSpPr>
         <p:spPr>
           <a:xfrm>
-            <a:off x="914400" y="1828800"/>
-            <a:ext cx="10058400" cy="2286000"/>
+            <a:off x="4953304" y="1024128"/>
+            <a:ext cx="2286000" cy="384048"/>
+          </a:xfrm>
+          <a:prstGeom prst="rect">
+            <a:avLst/>
+          </a:prstGeom>
+          <a:noFill/>
+        </p:spPr>
+        <p:txBody>
+          <a:bodyPr wrap="none">
+            <a:spAutoFit/>
+          </a:bodyPr>
+          <a:lstStyle/>
+          <a:p>
+            <a:pPr algn="ctr">
+              <a:spcAft>
+                <a:spcPts val="1000"/>
+              </a:spcAft>
+            </a:pPr>
+            <a:r>
+              <a:rPr sz="1800" b="1">
+                <a:solidFill>
+                  <a:srgbClr val="3C2850"/>
+                </a:solidFill>
+                <a:latin typeface="Microsoft YaHei"/>
+              </a:rPr>
+              <a:t>想一想</a:t>
+            </a:r>
+          </a:p>
+        </p:txBody>
+      </p:sp>
+      <p:sp>
+        <p:nvSpPr>
+          <p:cNvPr id="8" name="TextBox 7"/>
+          <p:cNvSpPr txBox="1"/>
+          <p:nvPr/>
+        </p:nvSpPr>
+        <p:spPr>
+          <a:xfrm>
+            <a:off x="1371600" y="1600200"/>
+            <a:ext cx="9418320" cy="822960"/>
           </a:xfrm>
           <a:prstGeom prst="rect">
             <a:avLst/>
@@ -3720,68 +4337,102 @@
           </a:bodyPr>
           <a:lstStyle/>
           <a:p>
-            <a:pPr algn="ctr"/>
-            <a:r>
-              <a:rPr sz="3000" b="1">
+            <a:pPr algn="ctr">
+              <a:spcAft>
+                <a:spcPts val="1000"/>
+              </a:spcAft>
+            </a:pPr>
+            <a:r>
+              <a:rPr sz="3200" b="1">
                 <a:solidFill>
-                  <a:srgbClr val="FF7F66"/>
+                  <a:srgbClr val="784696"/>
                 </a:solidFill>
                 <a:latin typeface="Microsoft YaHei"/>
               </a:rPr>
-              <a:t>💭 想一想</a:t>
-            </a:r>
-          </a:p>
+              <a:t>爱新衣的皇帝、织空布的骗子
+不敢说真话的大人、说真话的孩子</a:t>
+            </a:r>
+          </a:p>
+        </p:txBody>
+      </p:sp>
+      <p:sp>
+        <p:nvSpPr>
+          <p:cNvPr id="9" name="Rectangle 8"/>
+          <p:cNvSpPr/>
+          <p:nvPr/>
+        </p:nvSpPr>
+        <p:spPr>
+          <a:xfrm>
+            <a:off x="3200400" y="4389120"/>
+            <a:ext cx="5760720" cy="27432"/>
+          </a:xfrm>
+          <a:prstGeom prst="rect">
+            <a:avLst/>
+          </a:prstGeom>
+          <a:solidFill>
+            <a:srgbClr val="C8AADC"/>
+          </a:solidFill>
+          <a:ln>
+            <a:noFill/>
+          </a:ln>
+        </p:spPr>
+        <p:style>
+          <a:lnRef idx="1">
+            <a:schemeClr val="accent1"/>
+          </a:lnRef>
+          <a:fillRef idx="3">
+            <a:schemeClr val="accent1"/>
+          </a:fillRef>
+          <a:effectRef idx="2">
+            <a:schemeClr val="accent1"/>
+          </a:effectRef>
+          <a:fontRef idx="minor">
+            <a:schemeClr val="lt1"/>
+          </a:fontRef>
+        </p:style>
+        <p:txBody>
+          <a:bodyPr rtlCol="0" anchor="ctr"/>
+          <a:lstStyle/>
+          <a:p>
+            <a:pPr algn="ctr"/>
+          </a:p>
+        </p:txBody>
+      </p:sp>
+      <p:sp>
+        <p:nvSpPr>
+          <p:cNvPr id="10" name="TextBox 9"/>
+          <p:cNvSpPr txBox="1"/>
+          <p:nvPr/>
+        </p:nvSpPr>
+        <p:spPr>
+          <a:xfrm>
+            <a:off x="1828800" y="4663440"/>
+            <a:ext cx="8503920" cy="914400"/>
+          </a:xfrm>
+          <a:prstGeom prst="rect">
+            <a:avLst/>
+          </a:prstGeom>
+          <a:noFill/>
+        </p:spPr>
+        <p:txBody>
+          <a:bodyPr wrap="none">
+            <a:spAutoFit/>
+          </a:bodyPr>
+          <a:lstStyle/>
           <a:p>
             <a:pPr algn="ctr">
-              <a:spcBef>
-                <a:spcPts val="2000"/>
-              </a:spcBef>
+              <a:spcAft>
+                <a:spcPts val="1000"/>
+              </a:spcAft>
             </a:pPr>
             <a:r>
-              <a:rPr sz="3400" b="1">
+              <a:rPr sz="2200" b="0">
                 <a:solidFill>
-                  <a:srgbClr val="5A606E"/>
+                  <a:srgbClr val="784696"/>
                 </a:solidFill>
                 <a:latin typeface="Microsoft YaHei"/>
               </a:rPr>
-              <a:t>爱新衣的皇帝、织空布的骗子、
-不敢说真话的大人、说真话的孩子——
-闹剧背后藏着什么？</a:t>
-            </a:r>
-          </a:p>
-        </p:txBody>
-      </p:sp>
-      <p:sp>
-        <p:nvSpPr>
-          <p:cNvPr id="6" name="TextBox 5"/>
-          <p:cNvSpPr txBox="1"/>
-          <p:nvPr/>
-        </p:nvSpPr>
-        <p:spPr>
-          <a:xfrm>
-            <a:off x="1371600" y="4572000"/>
-            <a:ext cx="9144000" cy="1097280"/>
-          </a:xfrm>
-          <a:prstGeom prst="rect">
-            <a:avLst/>
-          </a:prstGeom>
-          <a:noFill/>
-        </p:spPr>
-        <p:txBody>
-          <a:bodyPr wrap="none">
-            <a:spAutoFit/>
-          </a:bodyPr>
-          <a:lstStyle/>
-          <a:p>
-            <a:pPr algn="ctr"/>
-            <a:r>
-              <a:rPr sz="2400" b="0">
-                <a:solidFill>
-                  <a:srgbClr val="FF7F66"/>
-                </a:solidFill>
-                <a:latin typeface="Microsoft YaHei"/>
-              </a:rPr>
-              <a:t>课前热身：真实与虚假的较量</a:t>
+              <a:t>闹剧背后，藏着怎样的真相？</a:t>
             </a:r>
           </a:p>
         </p:txBody>
@@ -3836,17 +4487,17 @@
         </p:nvSpPr>
         <p:spPr>
           <a:xfrm>
-            <a:off x="0" y="0"/>
-            <a:ext cx="12191695" cy="6858000"/>
-          </a:xfrm>
-          <a:prstGeom prst="rect">
-            <a:avLst/>
-          </a:prstGeom>
-          <a:solidFill>
-            <a:srgbClr val="FCFAF7"/>
-          </a:solidFill>
-          <a:ln>
-            <a:noFill/>
+            <a:off x="292608" y="274320"/>
+            <a:ext cx="11594592" cy="6300216"/>
+          </a:xfrm>
+          <a:prstGeom prst="rect">
+            <a:avLst/>
+          </a:prstGeom>
+          <a:noFill/>
+          <a:ln w="31750">
+            <a:solidFill>
+              <a:srgbClr val="825AA0"/>
+            </a:solidFill>
           </a:ln>
         </p:spPr>
         <p:style>
@@ -3871,22 +4522,70 @@
           </a:p>
         </p:txBody>
       </p:sp>
-      <p:sp>
-        <p:nvSpPr>
-          <p:cNvPr id="4" name="Rectangle 3"/>
+      <p:pic>
+        <p:nvPicPr>
+          <p:cNvPr id="4" name="Picture 3" descr="corner_emperor_tl.png"/>
+          <p:cNvPicPr>
+            <a:picLocks noChangeAspect="1"/>
+          </p:cNvPicPr>
+          <p:nvPr/>
+        </p:nvPicPr>
+        <p:blipFill>
+          <a:blip r:embed="rId3"/>
+          <a:stretch>
+            <a:fillRect/>
+          </a:stretch>
+        </p:blipFill>
+        <p:spPr>
+          <a:xfrm>
+            <a:off x="-45720" y="-45720"/>
+            <a:ext cx="2011680" cy="2011680"/>
+          </a:xfrm>
+          <a:prstGeom prst="rect">
+            <a:avLst/>
+          </a:prstGeom>
+        </p:spPr>
+      </p:pic>
+      <p:pic>
+        <p:nvPicPr>
+          <p:cNvPr id="5" name="Picture 4" descr="corner_emperor_tr.png"/>
+          <p:cNvPicPr>
+            <a:picLocks noChangeAspect="1"/>
+          </p:cNvPicPr>
+          <p:nvPr/>
+        </p:nvPicPr>
+        <p:blipFill>
+          <a:blip r:embed="rId4"/>
+          <a:stretch>
+            <a:fillRect/>
+          </a:stretch>
+        </p:blipFill>
+        <p:spPr>
+          <a:xfrm>
+            <a:off x="9875520" y="-45720"/>
+            <a:ext cx="2011680" cy="2011680"/>
+          </a:xfrm>
+          <a:prstGeom prst="rect">
+            <a:avLst/>
+          </a:prstGeom>
+        </p:spPr>
+      </p:pic>
+      <p:sp>
+        <p:nvSpPr>
+          <p:cNvPr id="6" name="Rounded Rectangle 5"/>
           <p:cNvSpPr/>
           <p:nvPr/>
         </p:nvSpPr>
         <p:spPr>
           <a:xfrm>
-            <a:off x="0" y="0"/>
-            <a:ext cx="12191695" cy="91440"/>
-          </a:xfrm>
-          <a:prstGeom prst="rect">
+            <a:off x="4953304" y="502920"/>
+            <a:ext cx="2286000" cy="411480"/>
+          </a:xfrm>
+          <a:prstGeom prst="roundRect">
             <a:avLst/>
           </a:prstGeom>
           <a:solidFill>
-            <a:srgbClr val="B4AAC4"/>
+            <a:srgbClr val="C8AADC"/>
           </a:solidFill>
           <a:ln>
             <a:noFill/>
@@ -3916,14 +4615,14 @@
       </p:sp>
       <p:sp>
         <p:nvSpPr>
-          <p:cNvPr id="5" name="TextBox 4"/>
+          <p:cNvPr id="7" name="TextBox 6"/>
           <p:cNvSpPr txBox="1"/>
           <p:nvPr/>
         </p:nvSpPr>
         <p:spPr>
           <a:xfrm>
-            <a:off x="640080" y="228600"/>
-            <a:ext cx="2743200" cy="457200"/>
+            <a:off x="4953304" y="521208"/>
+            <a:ext cx="2286000" cy="384048"/>
           </a:xfrm>
           <a:prstGeom prst="rect">
             <a:avLst/>
@@ -3936,28 +4635,203 @@
           </a:bodyPr>
           <a:lstStyle/>
           <a:p>
-            <a:r>
-              <a:rPr sz="2000" b="1">
+            <a:pPr algn="ctr">
+              <a:spcAft>
+                <a:spcPts val="1000"/>
+              </a:spcAft>
+            </a:pPr>
+            <a:r>
+              <a:rPr sz="1800" b="1">
                 <a:solidFill>
-                  <a:srgbClr val="B4AAC4"/>
+                  <a:srgbClr val="3C2850"/>
                 </a:solidFill>
                 <a:latin typeface="Microsoft YaHei"/>
               </a:rPr>
-              <a:t>以生为主</a:t>
-            </a:r>
-          </a:p>
-        </p:txBody>
-      </p:sp>
-      <p:sp>
-        <p:nvSpPr>
-          <p:cNvPr id="6" name="TextBox 5"/>
+              <a:t>画流程图</a:t>
+            </a:r>
+          </a:p>
+        </p:txBody>
+      </p:sp>
+      <p:sp>
+        <p:nvSpPr>
+          <p:cNvPr id="8" name="TextBox 7"/>
           <p:cNvSpPr txBox="1"/>
           <p:nvPr/>
         </p:nvSpPr>
         <p:spPr>
           <a:xfrm>
-            <a:off x="640080" y="685800"/>
-            <a:ext cx="10515600" cy="914400"/>
+            <a:off x="1371600" y="960120"/>
+            <a:ext cx="9418320" cy="822960"/>
+          </a:xfrm>
+          <a:prstGeom prst="rect">
+            <a:avLst/>
+          </a:prstGeom>
+          <a:noFill/>
+        </p:spPr>
+        <p:txBody>
+          <a:bodyPr wrap="square">
+            <a:spAutoFit/>
+          </a:bodyPr>
+          <a:lstStyle/>
+          <a:p>
+            <a:pPr algn="ctr">
+              <a:spcAft>
+                <a:spcPts val="1000"/>
+              </a:spcAft>
+            </a:pPr>
+            <a:r>
+              <a:rPr sz="3600" b="1">
+                <a:solidFill>
+                  <a:srgbClr val="784696"/>
+                </a:solidFill>
+                <a:latin typeface="Microsoft YaHei"/>
+              </a:rPr>
+              <a:t>学习任务一</a:t>
+            </a:r>
+          </a:p>
+        </p:txBody>
+      </p:sp>
+      <p:sp>
+        <p:nvSpPr>
+          <p:cNvPr id="9" name="Rectangle 8"/>
+          <p:cNvSpPr/>
+          <p:nvPr/>
+        </p:nvSpPr>
+        <p:spPr>
+          <a:xfrm>
+            <a:off x="3200400" y="1600200"/>
+            <a:ext cx="5760720" cy="27432"/>
+          </a:xfrm>
+          <a:prstGeom prst="rect">
+            <a:avLst/>
+          </a:prstGeom>
+          <a:solidFill>
+            <a:srgbClr val="C8AADC"/>
+          </a:solidFill>
+          <a:ln>
+            <a:noFill/>
+          </a:ln>
+        </p:spPr>
+        <p:style>
+          <a:lnRef idx="1">
+            <a:schemeClr val="accent1"/>
+          </a:lnRef>
+          <a:fillRef idx="3">
+            <a:schemeClr val="accent1"/>
+          </a:fillRef>
+          <a:effectRef idx="2">
+            <a:schemeClr val="accent1"/>
+          </a:effectRef>
+          <a:fontRef idx="minor">
+            <a:schemeClr val="lt1"/>
+          </a:fontRef>
+        </p:style>
+        <p:txBody>
+          <a:bodyPr rtlCol="0" anchor="ctr"/>
+          <a:lstStyle/>
+          <a:p>
+            <a:pPr algn="ctr"/>
+          </a:p>
+        </p:txBody>
+      </p:sp>
+      <p:sp>
+        <p:nvSpPr>
+          <p:cNvPr id="10" name="Rounded Rectangle 9"/>
+          <p:cNvSpPr/>
+          <p:nvPr/>
+        </p:nvSpPr>
+        <p:spPr>
+          <a:xfrm>
+            <a:off x="1295704" y="1645920"/>
+            <a:ext cx="9601200" cy="2240280"/>
+          </a:xfrm>
+          <a:prstGeom prst="roundRect">
+            <a:avLst/>
+          </a:prstGeom>
+          <a:solidFill>
+            <a:srgbClr val="FCF8FF"/>
+          </a:solidFill>
+          <a:ln w="19050">
+            <a:solidFill>
+              <a:srgbClr val="C8AADC"/>
+            </a:solidFill>
+          </a:ln>
+        </p:spPr>
+        <p:style>
+          <a:lnRef idx="1">
+            <a:schemeClr val="accent1"/>
+          </a:lnRef>
+          <a:fillRef idx="3">
+            <a:schemeClr val="accent1"/>
+          </a:fillRef>
+          <a:effectRef idx="2">
+            <a:schemeClr val="accent1"/>
+          </a:effectRef>
+          <a:fontRef idx="minor">
+            <a:schemeClr val="lt1"/>
+          </a:fontRef>
+        </p:style>
+        <p:txBody>
+          <a:bodyPr rtlCol="0" anchor="ctr"/>
+          <a:lstStyle/>
+          <a:p>
+            <a:pPr algn="ctr"/>
+          </a:p>
+        </p:txBody>
+      </p:sp>
+      <p:sp>
+        <p:nvSpPr>
+          <p:cNvPr id="11" name="Oval 10"/>
+          <p:cNvSpPr/>
+          <p:nvPr/>
+        </p:nvSpPr>
+        <p:spPr>
+          <a:xfrm>
+            <a:off x="2255824" y="1828800"/>
+            <a:ext cx="384048" cy="384048"/>
+          </a:xfrm>
+          <a:prstGeom prst="ellipse">
+            <a:avLst/>
+          </a:prstGeom>
+          <a:solidFill>
+            <a:srgbClr val="784696"/>
+          </a:solidFill>
+          <a:ln>
+            <a:noFill/>
+          </a:ln>
+        </p:spPr>
+        <p:style>
+          <a:lnRef idx="1">
+            <a:schemeClr val="accent1"/>
+          </a:lnRef>
+          <a:fillRef idx="3">
+            <a:schemeClr val="accent1"/>
+          </a:fillRef>
+          <a:effectRef idx="2">
+            <a:schemeClr val="accent1"/>
+          </a:effectRef>
+          <a:fontRef idx="minor">
+            <a:schemeClr val="lt1"/>
+          </a:fontRef>
+        </p:style>
+        <p:txBody>
+          <a:bodyPr rtlCol="0" anchor="ctr"/>
+          <a:lstStyle/>
+          <a:p>
+            <a:pPr algn="ctr"/>
+          </a:p>
+        </p:txBody>
+      </p:sp>
+      <p:sp>
+        <p:nvSpPr>
+          <p:cNvPr id="12" name="TextBox 11"/>
+          <p:cNvSpPr txBox="1"/>
+          <p:nvPr/>
+        </p:nvSpPr>
+        <p:spPr>
+          <a:xfrm>
+            <a:off x="2255824" y="1847088"/>
+            <a:ext cx="384048" cy="365760"/>
           </a:xfrm>
           <a:prstGeom prst="rect">
             <a:avLst/>
@@ -3970,28 +4844,33 @@
           </a:bodyPr>
           <a:lstStyle/>
           <a:p>
-            <a:r>
-              <a:rPr sz="3600" b="1">
+            <a:pPr algn="ctr">
+              <a:spcAft>
+                <a:spcPts val="1000"/>
+              </a:spcAft>
+            </a:pPr>
+            <a:r>
+              <a:rPr sz="1600" b="1">
                 <a:solidFill>
-                  <a:srgbClr val="5A606E"/>
+                  <a:srgbClr val="FFFFFF"/>
                 </a:solidFill>
                 <a:latin typeface="Microsoft YaHei"/>
               </a:rPr>
-              <a:t>学习任务一 · 画流程图</a:t>
-            </a:r>
-          </a:p>
-        </p:txBody>
-      </p:sp>
-      <p:sp>
-        <p:nvSpPr>
-          <p:cNvPr id="7" name="TextBox 6"/>
+              <a:t>1</a:t>
+            </a:r>
+          </a:p>
+        </p:txBody>
+      </p:sp>
+      <p:sp>
+        <p:nvSpPr>
+          <p:cNvPr id="13" name="TextBox 12"/>
           <p:cNvSpPr txBox="1"/>
           <p:nvPr/>
         </p:nvSpPr>
         <p:spPr>
           <a:xfrm>
-            <a:off x="822960" y="1691640"/>
-            <a:ext cx="10241280" cy="4389120"/>
+            <a:off x="2758744" y="1810512"/>
+            <a:ext cx="7772400" cy="502920"/>
           </a:xfrm>
           <a:prstGeom prst="rect">
             <a:avLst/>
@@ -3999,56 +4878,266 @@
           <a:noFill/>
         </p:spPr>
         <p:txBody>
-          <a:bodyPr wrap="square" anchor="t">
+          <a:bodyPr wrap="none">
             <a:spAutoFit/>
           </a:bodyPr>
           <a:lstStyle/>
           <a:p>
-            <a:pPr>
+            <a:pPr algn="l">
               <a:spcAft>
-                <a:spcPts val="1600"/>
+                <a:spcPts val="1000"/>
               </a:spcAft>
             </a:pPr>
             <a:r>
-              <a:rPr sz="2800" b="0">
+              <a:rPr sz="2400" b="0">
                 <a:solidFill>
-                  <a:srgbClr val="5A606E"/>
+                  <a:srgbClr val="3C2850"/>
                 </a:solidFill>
                 <a:latin typeface="Microsoft YaHei"/>
               </a:rPr>
-              <a:t>每读完一段，记下「谁做了什么」</a:t>
-            </a:r>
-          </a:p>
-          <a:p>
-            <a:pPr>
+              <a:t>快速阅读，每读完一段记下「谁做了什么」</a:t>
+            </a:r>
+          </a:p>
+        </p:txBody>
+      </p:sp>
+      <p:sp>
+        <p:nvSpPr>
+          <p:cNvPr id="14" name="Oval 13"/>
+          <p:cNvSpPr/>
+          <p:nvPr/>
+        </p:nvSpPr>
+        <p:spPr>
+          <a:xfrm>
+            <a:off x="2255824" y="2395728"/>
+            <a:ext cx="384048" cy="384048"/>
+          </a:xfrm>
+          <a:prstGeom prst="ellipse">
+            <a:avLst/>
+          </a:prstGeom>
+          <a:solidFill>
+            <a:srgbClr val="784696"/>
+          </a:solidFill>
+          <a:ln>
+            <a:noFill/>
+          </a:ln>
+        </p:spPr>
+        <p:style>
+          <a:lnRef idx="1">
+            <a:schemeClr val="accent1"/>
+          </a:lnRef>
+          <a:fillRef idx="3">
+            <a:schemeClr val="accent1"/>
+          </a:fillRef>
+          <a:effectRef idx="2">
+            <a:schemeClr val="accent1"/>
+          </a:effectRef>
+          <a:fontRef idx="minor">
+            <a:schemeClr val="lt1"/>
+          </a:fontRef>
+        </p:style>
+        <p:txBody>
+          <a:bodyPr rtlCol="0" anchor="ctr"/>
+          <a:lstStyle/>
+          <a:p>
+            <a:pPr algn="ctr"/>
+          </a:p>
+        </p:txBody>
+      </p:sp>
+      <p:sp>
+        <p:nvSpPr>
+          <p:cNvPr id="15" name="TextBox 14"/>
+          <p:cNvSpPr txBox="1"/>
+          <p:nvPr/>
+        </p:nvSpPr>
+        <p:spPr>
+          <a:xfrm>
+            <a:off x="2255824" y="2414016"/>
+            <a:ext cx="384048" cy="365760"/>
+          </a:xfrm>
+          <a:prstGeom prst="rect">
+            <a:avLst/>
+          </a:prstGeom>
+          <a:noFill/>
+        </p:spPr>
+        <p:txBody>
+          <a:bodyPr wrap="none">
+            <a:spAutoFit/>
+          </a:bodyPr>
+          <a:lstStyle/>
+          <a:p>
+            <a:pPr algn="ctr">
               <a:spcAft>
-                <a:spcPts val="1600"/>
+                <a:spcPts val="1000"/>
               </a:spcAft>
             </a:pPr>
             <a:r>
-              <a:rPr sz="2800" b="0">
+              <a:rPr sz="1600" b="1">
                 <a:solidFill>
-                  <a:srgbClr val="5A606E"/>
+                  <a:srgbClr val="FFFFFF"/>
+                </a:solidFill>
+                <a:latin typeface="Microsoft YaHei"/>
+              </a:rPr>
+              <a:t>2</a:t>
+            </a:r>
+          </a:p>
+        </p:txBody>
+      </p:sp>
+      <p:sp>
+        <p:nvSpPr>
+          <p:cNvPr id="16" name="TextBox 15"/>
+          <p:cNvSpPr txBox="1"/>
+          <p:nvPr/>
+        </p:nvSpPr>
+        <p:spPr>
+          <a:xfrm>
+            <a:off x="2758744" y="2377440"/>
+            <a:ext cx="7772400" cy="502920"/>
+          </a:xfrm>
+          <a:prstGeom prst="rect">
+            <a:avLst/>
+          </a:prstGeom>
+          <a:noFill/>
+        </p:spPr>
+        <p:txBody>
+          <a:bodyPr wrap="none">
+            <a:spAutoFit/>
+          </a:bodyPr>
+          <a:lstStyle/>
+          <a:p>
+            <a:pPr algn="l">
+              <a:spcAft>
+                <a:spcPts val="1000"/>
+              </a:spcAft>
+            </a:pPr>
+            <a:r>
+              <a:rPr sz="2400" b="0">
+                <a:solidFill>
+                  <a:srgbClr val="3C2850"/>
                 </a:solidFill>
                 <a:latin typeface="Microsoft YaHei"/>
               </a:rPr>
               <a:t>用箭头串联骗局全过程</a:t>
             </a:r>
           </a:p>
-          <a:p>
-            <a:pPr>
+        </p:txBody>
+      </p:sp>
+      <p:sp>
+        <p:nvSpPr>
+          <p:cNvPr id="17" name="Oval 16"/>
+          <p:cNvSpPr/>
+          <p:nvPr/>
+        </p:nvSpPr>
+        <p:spPr>
+          <a:xfrm>
+            <a:off x="2255824" y="2962656"/>
+            <a:ext cx="384048" cy="384048"/>
+          </a:xfrm>
+          <a:prstGeom prst="ellipse">
+            <a:avLst/>
+          </a:prstGeom>
+          <a:solidFill>
+            <a:srgbClr val="784696"/>
+          </a:solidFill>
+          <a:ln>
+            <a:noFill/>
+          </a:ln>
+        </p:spPr>
+        <p:style>
+          <a:lnRef idx="1">
+            <a:schemeClr val="accent1"/>
+          </a:lnRef>
+          <a:fillRef idx="3">
+            <a:schemeClr val="accent1"/>
+          </a:fillRef>
+          <a:effectRef idx="2">
+            <a:schemeClr val="accent1"/>
+          </a:effectRef>
+          <a:fontRef idx="minor">
+            <a:schemeClr val="lt1"/>
+          </a:fontRef>
+        </p:style>
+        <p:txBody>
+          <a:bodyPr rtlCol="0" anchor="ctr"/>
+          <a:lstStyle/>
+          <a:p>
+            <a:pPr algn="ctr"/>
+          </a:p>
+        </p:txBody>
+      </p:sp>
+      <p:sp>
+        <p:nvSpPr>
+          <p:cNvPr id="18" name="TextBox 17"/>
+          <p:cNvSpPr txBox="1"/>
+          <p:nvPr/>
+        </p:nvSpPr>
+        <p:spPr>
+          <a:xfrm>
+            <a:off x="2255824" y="2980944"/>
+            <a:ext cx="384048" cy="365760"/>
+          </a:xfrm>
+          <a:prstGeom prst="rect">
+            <a:avLst/>
+          </a:prstGeom>
+          <a:noFill/>
+        </p:spPr>
+        <p:txBody>
+          <a:bodyPr wrap="none">
+            <a:spAutoFit/>
+          </a:bodyPr>
+          <a:lstStyle/>
+          <a:p>
+            <a:pPr algn="ctr">
               <a:spcAft>
-                <a:spcPts val="1600"/>
+                <a:spcPts val="1000"/>
               </a:spcAft>
             </a:pPr>
             <a:r>
-              <a:rPr sz="2800" b="0">
+              <a:rPr sz="1600" b="1">
                 <a:solidFill>
-                  <a:srgbClr val="5A606E"/>
+                  <a:srgbClr val="FFFFFF"/>
                 </a:solidFill>
                 <a:latin typeface="Microsoft YaHei"/>
               </a:rPr>
-              <a:t>骗子谎言→＿＿→＿＿→孩子说真话</a:t>
+              <a:t>3</a:t>
+            </a:r>
+          </a:p>
+        </p:txBody>
+      </p:sp>
+      <p:sp>
+        <p:nvSpPr>
+          <p:cNvPr id="19" name="TextBox 18"/>
+          <p:cNvSpPr txBox="1"/>
+          <p:nvPr/>
+        </p:nvSpPr>
+        <p:spPr>
+          <a:xfrm>
+            <a:off x="2758744" y="2944368"/>
+            <a:ext cx="7772400" cy="502920"/>
+          </a:xfrm>
+          <a:prstGeom prst="rect">
+            <a:avLst/>
+          </a:prstGeom>
+          <a:noFill/>
+        </p:spPr>
+        <p:txBody>
+          <a:bodyPr wrap="none">
+            <a:spAutoFit/>
+          </a:bodyPr>
+          <a:lstStyle/>
+          <a:p>
+            <a:pPr algn="l">
+              <a:spcAft>
+                <a:spcPts val="1000"/>
+              </a:spcAft>
+            </a:pPr>
+            <a:r>
+              <a:rPr sz="2400" b="0">
+                <a:solidFill>
+                  <a:srgbClr val="3C2850"/>
+                </a:solidFill>
+                <a:latin typeface="Microsoft YaHei"/>
+              </a:rPr>
+              <a:t>骗子谎言 → 大臣附和 → 游行 → 孩子说真话</a:t>
             </a:r>
           </a:p>
         </p:txBody>
@@ -4103,17 +5192,17 @@
         </p:nvSpPr>
         <p:spPr>
           <a:xfrm>
-            <a:off x="0" y="0"/>
-            <a:ext cx="12191695" cy="6858000"/>
-          </a:xfrm>
-          <a:prstGeom prst="rect">
-            <a:avLst/>
-          </a:prstGeom>
-          <a:solidFill>
-            <a:srgbClr val="FCFAF7"/>
-          </a:solidFill>
-          <a:ln>
-            <a:noFill/>
+            <a:off x="292608" y="274320"/>
+            <a:ext cx="11594592" cy="6300216"/>
+          </a:xfrm>
+          <a:prstGeom prst="rect">
+            <a:avLst/>
+          </a:prstGeom>
+          <a:noFill/>
+          <a:ln w="31750">
+            <a:solidFill>
+              <a:srgbClr val="825AA0"/>
+            </a:solidFill>
           </a:ln>
         </p:spPr>
         <p:style>
@@ -4138,22 +5227,70 @@
           </a:p>
         </p:txBody>
       </p:sp>
-      <p:sp>
-        <p:nvSpPr>
-          <p:cNvPr id="4" name="Rectangle 3"/>
+      <p:pic>
+        <p:nvPicPr>
+          <p:cNvPr id="4" name="Picture 3" descr="corner_emperor_tl.png"/>
+          <p:cNvPicPr>
+            <a:picLocks noChangeAspect="1"/>
+          </p:cNvPicPr>
+          <p:nvPr/>
+        </p:nvPicPr>
+        <p:blipFill>
+          <a:blip r:embed="rId3"/>
+          <a:stretch>
+            <a:fillRect/>
+          </a:stretch>
+        </p:blipFill>
+        <p:spPr>
+          <a:xfrm>
+            <a:off x="-45720" y="-45720"/>
+            <a:ext cx="2011680" cy="2011680"/>
+          </a:xfrm>
+          <a:prstGeom prst="rect">
+            <a:avLst/>
+          </a:prstGeom>
+        </p:spPr>
+      </p:pic>
+      <p:pic>
+        <p:nvPicPr>
+          <p:cNvPr id="5" name="Picture 4" descr="corner_emperor_tr.png"/>
+          <p:cNvPicPr>
+            <a:picLocks noChangeAspect="1"/>
+          </p:cNvPicPr>
+          <p:nvPr/>
+        </p:nvPicPr>
+        <p:blipFill>
+          <a:blip r:embed="rId4"/>
+          <a:stretch>
+            <a:fillRect/>
+          </a:stretch>
+        </p:blipFill>
+        <p:spPr>
+          <a:xfrm>
+            <a:off x="9875520" y="-45720"/>
+            <a:ext cx="2011680" cy="2011680"/>
+          </a:xfrm>
+          <a:prstGeom prst="rect">
+            <a:avLst/>
+          </a:prstGeom>
+        </p:spPr>
+      </p:pic>
+      <p:sp>
+        <p:nvSpPr>
+          <p:cNvPr id="6" name="Rounded Rectangle 5"/>
           <p:cNvSpPr/>
           <p:nvPr/>
         </p:nvSpPr>
         <p:spPr>
           <a:xfrm>
-            <a:off x="0" y="0"/>
-            <a:ext cx="12191695" cy="91440"/>
-          </a:xfrm>
-          <a:prstGeom prst="rect">
+            <a:off x="4953304" y="502920"/>
+            <a:ext cx="2286000" cy="411480"/>
+          </a:xfrm>
+          <a:prstGeom prst="roundRect">
             <a:avLst/>
           </a:prstGeom>
           <a:solidFill>
-            <a:srgbClr val="66CDAA"/>
+            <a:srgbClr val="C8AADC"/>
           </a:solidFill>
           <a:ln>
             <a:noFill/>
@@ -4183,14 +5320,14 @@
       </p:sp>
       <p:sp>
         <p:nvSpPr>
-          <p:cNvPr id="5" name="TextBox 4"/>
+          <p:cNvPr id="7" name="TextBox 6"/>
           <p:cNvSpPr txBox="1"/>
           <p:nvPr/>
         </p:nvSpPr>
         <p:spPr>
           <a:xfrm>
-            <a:off x="640080" y="228600"/>
-            <a:ext cx="2743200" cy="457200"/>
+            <a:off x="4953304" y="521208"/>
+            <a:ext cx="2286000" cy="384048"/>
           </a:xfrm>
           <a:prstGeom prst="rect">
             <a:avLst/>
@@ -4203,28 +5340,203 @@
           </a:bodyPr>
           <a:lstStyle/>
           <a:p>
-            <a:r>
-              <a:rPr sz="2000" b="1">
+            <a:pPr algn="ctr">
+              <a:spcAft>
+                <a:spcPts val="1000"/>
+              </a:spcAft>
+            </a:pPr>
+            <a:r>
+              <a:rPr sz="1800" b="1">
                 <a:solidFill>
-                  <a:srgbClr val="66CDAA"/>
+                  <a:srgbClr val="3C2850"/>
                 </a:solidFill>
                 <a:latin typeface="Microsoft YaHei"/>
               </a:rPr>
-              <a:t>细读品味</a:t>
-            </a:r>
-          </a:p>
-        </p:txBody>
-      </p:sp>
-      <p:sp>
-        <p:nvSpPr>
-          <p:cNvPr id="6" name="TextBox 5"/>
+              <a:t>拆心理机关</a:t>
+            </a:r>
+          </a:p>
+        </p:txBody>
+      </p:sp>
+      <p:sp>
+        <p:nvSpPr>
+          <p:cNvPr id="8" name="TextBox 7"/>
           <p:cNvSpPr txBox="1"/>
           <p:nvPr/>
         </p:nvSpPr>
         <p:spPr>
           <a:xfrm>
-            <a:off x="640080" y="685800"/>
-            <a:ext cx="10515600" cy="914400"/>
+            <a:off x="1371600" y="960120"/>
+            <a:ext cx="9418320" cy="822960"/>
+          </a:xfrm>
+          <a:prstGeom prst="rect">
+            <a:avLst/>
+          </a:prstGeom>
+          <a:noFill/>
+        </p:spPr>
+        <p:txBody>
+          <a:bodyPr wrap="square">
+            <a:spAutoFit/>
+          </a:bodyPr>
+          <a:lstStyle/>
+          <a:p>
+            <a:pPr algn="ctr">
+              <a:spcAft>
+                <a:spcPts val="1000"/>
+              </a:spcAft>
+            </a:pPr>
+            <a:r>
+              <a:rPr sz="3600" b="1">
+                <a:solidFill>
+                  <a:srgbClr val="784696"/>
+                </a:solidFill>
+                <a:latin typeface="Microsoft YaHei"/>
+              </a:rPr>
+              <a:t>学习任务二</a:t>
+            </a:r>
+          </a:p>
+        </p:txBody>
+      </p:sp>
+      <p:sp>
+        <p:nvSpPr>
+          <p:cNvPr id="9" name="Rectangle 8"/>
+          <p:cNvSpPr/>
+          <p:nvPr/>
+        </p:nvSpPr>
+        <p:spPr>
+          <a:xfrm>
+            <a:off x="3200400" y="1600200"/>
+            <a:ext cx="5760720" cy="27432"/>
+          </a:xfrm>
+          <a:prstGeom prst="rect">
+            <a:avLst/>
+          </a:prstGeom>
+          <a:solidFill>
+            <a:srgbClr val="C8AADC"/>
+          </a:solidFill>
+          <a:ln>
+            <a:noFill/>
+          </a:ln>
+        </p:spPr>
+        <p:style>
+          <a:lnRef idx="1">
+            <a:schemeClr val="accent1"/>
+          </a:lnRef>
+          <a:fillRef idx="3">
+            <a:schemeClr val="accent1"/>
+          </a:fillRef>
+          <a:effectRef idx="2">
+            <a:schemeClr val="accent1"/>
+          </a:effectRef>
+          <a:fontRef idx="minor">
+            <a:schemeClr val="lt1"/>
+          </a:fontRef>
+        </p:style>
+        <p:txBody>
+          <a:bodyPr rtlCol="0" anchor="ctr"/>
+          <a:lstStyle/>
+          <a:p>
+            <a:pPr algn="ctr"/>
+          </a:p>
+        </p:txBody>
+      </p:sp>
+      <p:sp>
+        <p:nvSpPr>
+          <p:cNvPr id="10" name="Rounded Rectangle 9"/>
+          <p:cNvSpPr/>
+          <p:nvPr/>
+        </p:nvSpPr>
+        <p:spPr>
+          <a:xfrm>
+            <a:off x="1295704" y="1645920"/>
+            <a:ext cx="9601200" cy="2240280"/>
+          </a:xfrm>
+          <a:prstGeom prst="roundRect">
+            <a:avLst/>
+          </a:prstGeom>
+          <a:solidFill>
+            <a:srgbClr val="FCF8FF"/>
+          </a:solidFill>
+          <a:ln w="19050">
+            <a:solidFill>
+              <a:srgbClr val="C8AADC"/>
+            </a:solidFill>
+          </a:ln>
+        </p:spPr>
+        <p:style>
+          <a:lnRef idx="1">
+            <a:schemeClr val="accent1"/>
+          </a:lnRef>
+          <a:fillRef idx="3">
+            <a:schemeClr val="accent1"/>
+          </a:fillRef>
+          <a:effectRef idx="2">
+            <a:schemeClr val="accent1"/>
+          </a:effectRef>
+          <a:fontRef idx="minor">
+            <a:schemeClr val="lt1"/>
+          </a:fontRef>
+        </p:style>
+        <p:txBody>
+          <a:bodyPr rtlCol="0" anchor="ctr"/>
+          <a:lstStyle/>
+          <a:p>
+            <a:pPr algn="ctr"/>
+          </a:p>
+        </p:txBody>
+      </p:sp>
+      <p:sp>
+        <p:nvSpPr>
+          <p:cNvPr id="11" name="Oval 10"/>
+          <p:cNvSpPr/>
+          <p:nvPr/>
+        </p:nvSpPr>
+        <p:spPr>
+          <a:xfrm>
+            <a:off x="2255824" y="1828800"/>
+            <a:ext cx="384048" cy="384048"/>
+          </a:xfrm>
+          <a:prstGeom prst="ellipse">
+            <a:avLst/>
+          </a:prstGeom>
+          <a:solidFill>
+            <a:srgbClr val="784696"/>
+          </a:solidFill>
+          <a:ln>
+            <a:noFill/>
+          </a:ln>
+        </p:spPr>
+        <p:style>
+          <a:lnRef idx="1">
+            <a:schemeClr val="accent1"/>
+          </a:lnRef>
+          <a:fillRef idx="3">
+            <a:schemeClr val="accent1"/>
+          </a:fillRef>
+          <a:effectRef idx="2">
+            <a:schemeClr val="accent1"/>
+          </a:effectRef>
+          <a:fontRef idx="minor">
+            <a:schemeClr val="lt1"/>
+          </a:fontRef>
+        </p:style>
+        <p:txBody>
+          <a:bodyPr rtlCol="0" anchor="ctr"/>
+          <a:lstStyle/>
+          <a:p>
+            <a:pPr algn="ctr"/>
+          </a:p>
+        </p:txBody>
+      </p:sp>
+      <p:sp>
+        <p:nvSpPr>
+          <p:cNvPr id="12" name="TextBox 11"/>
+          <p:cNvSpPr txBox="1"/>
+          <p:nvPr/>
+        </p:nvSpPr>
+        <p:spPr>
+          <a:xfrm>
+            <a:off x="2255824" y="1847088"/>
+            <a:ext cx="384048" cy="365760"/>
           </a:xfrm>
           <a:prstGeom prst="rect">
             <a:avLst/>
@@ -4237,28 +5549,33 @@
           </a:bodyPr>
           <a:lstStyle/>
           <a:p>
-            <a:r>
-              <a:rPr sz="3600" b="1">
+            <a:pPr algn="ctr">
+              <a:spcAft>
+                <a:spcPts val="1000"/>
+              </a:spcAft>
+            </a:pPr>
+            <a:r>
+              <a:rPr sz="1600" b="1">
                 <a:solidFill>
-                  <a:srgbClr val="5A606E"/>
+                  <a:srgbClr val="FFFFFF"/>
                 </a:solidFill>
                 <a:latin typeface="Microsoft YaHei"/>
               </a:rPr>
-              <a:t>学习任务二 · 拆心理机关</a:t>
-            </a:r>
-          </a:p>
-        </p:txBody>
-      </p:sp>
-      <p:sp>
-        <p:nvSpPr>
-          <p:cNvPr id="7" name="TextBox 6"/>
+              <a:t>1</a:t>
+            </a:r>
+          </a:p>
+        </p:txBody>
+      </p:sp>
+      <p:sp>
+        <p:nvSpPr>
+          <p:cNvPr id="13" name="TextBox 12"/>
           <p:cNvSpPr txBox="1"/>
           <p:nvPr/>
         </p:nvSpPr>
         <p:spPr>
           <a:xfrm>
-            <a:off x="822960" y="1691640"/>
-            <a:ext cx="10241280" cy="4389120"/>
+            <a:off x="2758744" y="1810512"/>
+            <a:ext cx="7772400" cy="502920"/>
           </a:xfrm>
           <a:prstGeom prst="rect">
             <a:avLst/>
@@ -4266,52 +5583,262 @@
           <a:noFill/>
         </p:spPr>
         <p:txBody>
-          <a:bodyPr wrap="square" anchor="t">
+          <a:bodyPr wrap="none">
             <a:spAutoFit/>
           </a:bodyPr>
           <a:lstStyle/>
           <a:p>
-            <a:pPr>
+            <a:pPr algn="l">
               <a:spcAft>
-                <a:spcPts val="1600"/>
+                <a:spcPts val="1000"/>
               </a:spcAft>
             </a:pPr>
             <a:r>
-              <a:rPr sz="2800" b="0">
+              <a:rPr sz="2400" b="0">
                 <a:solidFill>
-                  <a:srgbClr val="5A606E"/>
+                  <a:srgbClr val="3C2850"/>
                 </a:solidFill>
                 <a:latin typeface="Microsoft YaHei"/>
               </a:rPr>
-              <a:t>勾画老大臣、官员、皇帝的心理</a:t>
-            </a:r>
-          </a:p>
-          <a:p>
-            <a:pPr>
+              <a:t>勾画老大臣、官员、皇帝的心理和语言</a:t>
+            </a:r>
+          </a:p>
+        </p:txBody>
+      </p:sp>
+      <p:sp>
+        <p:nvSpPr>
+          <p:cNvPr id="14" name="Oval 13"/>
+          <p:cNvSpPr/>
+          <p:nvPr/>
+        </p:nvSpPr>
+        <p:spPr>
+          <a:xfrm>
+            <a:off x="2255824" y="2395728"/>
+            <a:ext cx="384048" cy="384048"/>
+          </a:xfrm>
+          <a:prstGeom prst="ellipse">
+            <a:avLst/>
+          </a:prstGeom>
+          <a:solidFill>
+            <a:srgbClr val="784696"/>
+          </a:solidFill>
+          <a:ln>
+            <a:noFill/>
+          </a:ln>
+        </p:spPr>
+        <p:style>
+          <a:lnRef idx="1">
+            <a:schemeClr val="accent1"/>
+          </a:lnRef>
+          <a:fillRef idx="3">
+            <a:schemeClr val="accent1"/>
+          </a:fillRef>
+          <a:effectRef idx="2">
+            <a:schemeClr val="accent1"/>
+          </a:effectRef>
+          <a:fontRef idx="minor">
+            <a:schemeClr val="lt1"/>
+          </a:fontRef>
+        </p:style>
+        <p:txBody>
+          <a:bodyPr rtlCol="0" anchor="ctr"/>
+          <a:lstStyle/>
+          <a:p>
+            <a:pPr algn="ctr"/>
+          </a:p>
+        </p:txBody>
+      </p:sp>
+      <p:sp>
+        <p:nvSpPr>
+          <p:cNvPr id="15" name="TextBox 14"/>
+          <p:cNvSpPr txBox="1"/>
+          <p:nvPr/>
+        </p:nvSpPr>
+        <p:spPr>
+          <a:xfrm>
+            <a:off x="2255824" y="2414016"/>
+            <a:ext cx="384048" cy="365760"/>
+          </a:xfrm>
+          <a:prstGeom prst="rect">
+            <a:avLst/>
+          </a:prstGeom>
+          <a:noFill/>
+        </p:spPr>
+        <p:txBody>
+          <a:bodyPr wrap="none">
+            <a:spAutoFit/>
+          </a:bodyPr>
+          <a:lstStyle/>
+          <a:p>
+            <a:pPr algn="ctr">
               <a:spcAft>
-                <a:spcPts val="1600"/>
+                <a:spcPts val="1000"/>
               </a:spcAft>
             </a:pPr>
             <a:r>
-              <a:rPr sz="2800" b="0">
+              <a:rPr sz="1600" b="1">
                 <a:solidFill>
-                  <a:srgbClr val="5A606E"/>
+                  <a:srgbClr val="FFFFFF"/>
+                </a:solidFill>
+                <a:latin typeface="Microsoft YaHei"/>
+              </a:rPr>
+              <a:t>2</a:t>
+            </a:r>
+          </a:p>
+        </p:txBody>
+      </p:sp>
+      <p:sp>
+        <p:nvSpPr>
+          <p:cNvPr id="16" name="TextBox 15"/>
+          <p:cNvSpPr txBox="1"/>
+          <p:nvPr/>
+        </p:nvSpPr>
+        <p:spPr>
+          <a:xfrm>
+            <a:off x="2758744" y="2377440"/>
+            <a:ext cx="7772400" cy="502920"/>
+          </a:xfrm>
+          <a:prstGeom prst="rect">
+            <a:avLst/>
+          </a:prstGeom>
+          <a:noFill/>
+        </p:spPr>
+        <p:txBody>
+          <a:bodyPr wrap="none">
+            <a:spAutoFit/>
+          </a:bodyPr>
+          <a:lstStyle/>
+          <a:p>
+            <a:pPr algn="l">
+              <a:spcAft>
+                <a:spcPts val="1000"/>
+              </a:spcAft>
+            </a:pPr>
+            <a:r>
+              <a:rPr sz="2400" b="0">
+                <a:solidFill>
+                  <a:srgbClr val="3C2850"/>
                 </a:solidFill>
                 <a:latin typeface="Microsoft YaHei"/>
               </a:rPr>
               <a:t>品味夸张语句的讽刺效果</a:t>
             </a:r>
           </a:p>
-          <a:p>
-            <a:pPr>
+        </p:txBody>
+      </p:sp>
+      <p:sp>
+        <p:nvSpPr>
+          <p:cNvPr id="17" name="Oval 16"/>
+          <p:cNvSpPr/>
+          <p:nvPr/>
+        </p:nvSpPr>
+        <p:spPr>
+          <a:xfrm>
+            <a:off x="2255824" y="2962656"/>
+            <a:ext cx="384048" cy="384048"/>
+          </a:xfrm>
+          <a:prstGeom prst="ellipse">
+            <a:avLst/>
+          </a:prstGeom>
+          <a:solidFill>
+            <a:srgbClr val="784696"/>
+          </a:solidFill>
+          <a:ln>
+            <a:noFill/>
+          </a:ln>
+        </p:spPr>
+        <p:style>
+          <a:lnRef idx="1">
+            <a:schemeClr val="accent1"/>
+          </a:lnRef>
+          <a:fillRef idx="3">
+            <a:schemeClr val="accent1"/>
+          </a:fillRef>
+          <a:effectRef idx="2">
+            <a:schemeClr val="accent1"/>
+          </a:effectRef>
+          <a:fontRef idx="minor">
+            <a:schemeClr val="lt1"/>
+          </a:fontRef>
+        </p:style>
+        <p:txBody>
+          <a:bodyPr rtlCol="0" anchor="ctr"/>
+          <a:lstStyle/>
+          <a:p>
+            <a:pPr algn="ctr"/>
+          </a:p>
+        </p:txBody>
+      </p:sp>
+      <p:sp>
+        <p:nvSpPr>
+          <p:cNvPr id="18" name="TextBox 17"/>
+          <p:cNvSpPr txBox="1"/>
+          <p:nvPr/>
+        </p:nvSpPr>
+        <p:spPr>
+          <a:xfrm>
+            <a:off x="2255824" y="2980944"/>
+            <a:ext cx="384048" cy="365760"/>
+          </a:xfrm>
+          <a:prstGeom prst="rect">
+            <a:avLst/>
+          </a:prstGeom>
+          <a:noFill/>
+        </p:spPr>
+        <p:txBody>
+          <a:bodyPr wrap="none">
+            <a:spAutoFit/>
+          </a:bodyPr>
+          <a:lstStyle/>
+          <a:p>
+            <a:pPr algn="ctr">
               <a:spcAft>
-                <a:spcPts val="1600"/>
+                <a:spcPts val="1000"/>
               </a:spcAft>
             </a:pPr>
             <a:r>
-              <a:rPr sz="2800" b="0">
+              <a:rPr sz="1600" b="1">
                 <a:solidFill>
-                  <a:srgbClr val="5A606E"/>
+                  <a:srgbClr val="FFFFFF"/>
+                </a:solidFill>
+                <a:latin typeface="Microsoft YaHei"/>
+              </a:rPr>
+              <a:t>3</a:t>
+            </a:r>
+          </a:p>
+        </p:txBody>
+      </p:sp>
+      <p:sp>
+        <p:nvSpPr>
+          <p:cNvPr id="19" name="TextBox 18"/>
+          <p:cNvSpPr txBox="1"/>
+          <p:nvPr/>
+        </p:nvSpPr>
+        <p:spPr>
+          <a:xfrm>
+            <a:off x="2758744" y="2944368"/>
+            <a:ext cx="7772400" cy="502920"/>
+          </a:xfrm>
+          <a:prstGeom prst="rect">
+            <a:avLst/>
+          </a:prstGeom>
+          <a:noFill/>
+        </p:spPr>
+        <p:txBody>
+          <a:bodyPr wrap="none">
+            <a:spAutoFit/>
+          </a:bodyPr>
+          <a:lstStyle/>
+          <a:p>
+            <a:pPr algn="l">
+              <a:spcAft>
+                <a:spcPts val="1000"/>
+              </a:spcAft>
+            </a:pPr>
+            <a:r>
+              <a:rPr sz="2400" b="0">
+                <a:solidFill>
+                  <a:srgbClr val="3C2850"/>
                 </a:solidFill>
                 <a:latin typeface="Microsoft YaHei"/>
               </a:rPr>
@@ -4370,17 +5897,17 @@
         </p:nvSpPr>
         <p:spPr>
           <a:xfrm>
-            <a:off x="0" y="0"/>
-            <a:ext cx="12191695" cy="6858000"/>
-          </a:xfrm>
-          <a:prstGeom prst="rect">
-            <a:avLst/>
-          </a:prstGeom>
-          <a:solidFill>
-            <a:srgbClr val="FCFAF7"/>
-          </a:solidFill>
-          <a:ln>
-            <a:noFill/>
+            <a:off x="292608" y="274320"/>
+            <a:ext cx="11594592" cy="6300216"/>
+          </a:xfrm>
+          <a:prstGeom prst="rect">
+            <a:avLst/>
+          </a:prstGeom>
+          <a:noFill/>
+          <a:ln w="31750">
+            <a:solidFill>
+              <a:srgbClr val="825AA0"/>
+            </a:solidFill>
           </a:ln>
         </p:spPr>
         <p:style>
@@ -4405,22 +5932,70 @@
           </a:p>
         </p:txBody>
       </p:sp>
-      <p:sp>
-        <p:nvSpPr>
-          <p:cNvPr id="4" name="Rectangle 3"/>
+      <p:pic>
+        <p:nvPicPr>
+          <p:cNvPr id="4" name="Picture 3" descr="corner_emperor_tl.png"/>
+          <p:cNvPicPr>
+            <a:picLocks noChangeAspect="1"/>
+          </p:cNvPicPr>
+          <p:nvPr/>
+        </p:nvPicPr>
+        <p:blipFill>
+          <a:blip r:embed="rId3"/>
+          <a:stretch>
+            <a:fillRect/>
+          </a:stretch>
+        </p:blipFill>
+        <p:spPr>
+          <a:xfrm>
+            <a:off x="-45720" y="-45720"/>
+            <a:ext cx="2011680" cy="2011680"/>
+          </a:xfrm>
+          <a:prstGeom prst="rect">
+            <a:avLst/>
+          </a:prstGeom>
+        </p:spPr>
+      </p:pic>
+      <p:pic>
+        <p:nvPicPr>
+          <p:cNvPr id="5" name="Picture 4" descr="corner_emperor_tr.png"/>
+          <p:cNvPicPr>
+            <a:picLocks noChangeAspect="1"/>
+          </p:cNvPicPr>
+          <p:nvPr/>
+        </p:nvPicPr>
+        <p:blipFill>
+          <a:blip r:embed="rId4"/>
+          <a:stretch>
+            <a:fillRect/>
+          </a:stretch>
+        </p:blipFill>
+        <p:spPr>
+          <a:xfrm>
+            <a:off x="9875520" y="-45720"/>
+            <a:ext cx="2011680" cy="2011680"/>
+          </a:xfrm>
+          <a:prstGeom prst="rect">
+            <a:avLst/>
+          </a:prstGeom>
+        </p:spPr>
+      </p:pic>
+      <p:sp>
+        <p:nvSpPr>
+          <p:cNvPr id="6" name="Rounded Rectangle 5"/>
           <p:cNvSpPr/>
           <p:nvPr/>
         </p:nvSpPr>
         <p:spPr>
           <a:xfrm>
-            <a:off x="0" y="0"/>
-            <a:ext cx="12191695" cy="109728"/>
-          </a:xfrm>
-          <a:prstGeom prst="rect">
+            <a:off x="4953304" y="1005840"/>
+            <a:ext cx="2286000" cy="411480"/>
+          </a:xfrm>
+          <a:prstGeom prst="roundRect">
             <a:avLst/>
           </a:prstGeom>
           <a:solidFill>
-            <a:srgbClr val="B4AAC4"/>
+            <a:srgbClr val="C8AADC"/>
           </a:solidFill>
           <a:ln>
             <a:noFill/>
@@ -4450,14 +6025,53 @@
       </p:sp>
       <p:sp>
         <p:nvSpPr>
-          <p:cNvPr id="5" name="TextBox 4"/>
+          <p:cNvPr id="7" name="TextBox 6"/>
           <p:cNvSpPr txBox="1"/>
           <p:nvPr/>
         </p:nvSpPr>
         <p:spPr>
           <a:xfrm>
-            <a:off x="914400" y="1828800"/>
-            <a:ext cx="10058400" cy="2286000"/>
+            <a:off x="4953304" y="1024128"/>
+            <a:ext cx="2286000" cy="384048"/>
+          </a:xfrm>
+          <a:prstGeom prst="rect">
+            <a:avLst/>
+          </a:prstGeom>
+          <a:noFill/>
+        </p:spPr>
+        <p:txBody>
+          <a:bodyPr wrap="none">
+            <a:spAutoFit/>
+          </a:bodyPr>
+          <a:lstStyle/>
+          <a:p>
+            <a:pPr algn="ctr">
+              <a:spcAft>
+                <a:spcPts val="1000"/>
+              </a:spcAft>
+            </a:pPr>
+            <a:r>
+              <a:rPr sz="1800" b="1">
+                <a:solidFill>
+                  <a:srgbClr val="3C2850"/>
+                </a:solidFill>
+                <a:latin typeface="Microsoft YaHei"/>
+              </a:rPr>
+              <a:t>想一想</a:t>
+            </a:r>
+          </a:p>
+        </p:txBody>
+      </p:sp>
+      <p:sp>
+        <p:nvSpPr>
+          <p:cNvPr id="8" name="TextBox 7"/>
+          <p:cNvSpPr txBox="1"/>
+          <p:nvPr/>
+        </p:nvSpPr>
+        <p:spPr>
+          <a:xfrm>
+            <a:off x="1371600" y="1600200"/>
+            <a:ext cx="9418320" cy="822960"/>
           </a:xfrm>
           <a:prstGeom prst="rect">
             <a:avLst/>
@@ -4470,46 +6084,76 @@
           </a:bodyPr>
           <a:lstStyle/>
           <a:p>
-            <a:pPr algn="ctr"/>
-            <a:r>
-              <a:rPr sz="3000" b="1">
+            <a:pPr algn="ctr">
+              <a:spcAft>
+                <a:spcPts val="1000"/>
+              </a:spcAft>
+            </a:pPr>
+            <a:r>
+              <a:rPr sz="3200" b="1">
                 <a:solidFill>
-                  <a:srgbClr val="B4AAC4"/>
+                  <a:srgbClr val="784696"/>
                 </a:solidFill>
                 <a:latin typeface="Microsoft YaHei"/>
               </a:rPr>
-              <a:t>💭 想一想</a:t>
-            </a:r>
-          </a:p>
-          <a:p>
-            <a:pPr algn="ctr">
-              <a:spcBef>
-                <a:spcPts val="2000"/>
-              </a:spcBef>
-            </a:pPr>
-            <a:r>
-              <a:rPr sz="3400" b="1">
-                <a:solidFill>
-                  <a:srgbClr val="5A606E"/>
-                </a:solidFill>
-                <a:latin typeface="Microsoft YaHei"/>
-              </a:rPr>
-              <a:t>人们都不敢说自己看不见，
-这是为什么？</a:t>
-            </a:r>
-          </a:p>
-        </p:txBody>
-      </p:sp>
-      <p:sp>
-        <p:nvSpPr>
-          <p:cNvPr id="6" name="TextBox 5"/>
+              <a:t>人们都不敢说自己看不见，这是为什么？</a:t>
+            </a:r>
+          </a:p>
+        </p:txBody>
+      </p:sp>
+      <p:sp>
+        <p:nvSpPr>
+          <p:cNvPr id="9" name="Rectangle 8"/>
+          <p:cNvSpPr/>
+          <p:nvPr/>
+        </p:nvSpPr>
+        <p:spPr>
+          <a:xfrm>
+            <a:off x="3200400" y="4389120"/>
+            <a:ext cx="5760720" cy="27432"/>
+          </a:xfrm>
+          <a:prstGeom prst="rect">
+            <a:avLst/>
+          </a:prstGeom>
+          <a:solidFill>
+            <a:srgbClr val="C8AADC"/>
+          </a:solidFill>
+          <a:ln>
+            <a:noFill/>
+          </a:ln>
+        </p:spPr>
+        <p:style>
+          <a:lnRef idx="1">
+            <a:schemeClr val="accent1"/>
+          </a:lnRef>
+          <a:fillRef idx="3">
+            <a:schemeClr val="accent1"/>
+          </a:fillRef>
+          <a:effectRef idx="2">
+            <a:schemeClr val="accent1"/>
+          </a:effectRef>
+          <a:fontRef idx="minor">
+            <a:schemeClr val="lt1"/>
+          </a:fontRef>
+        </p:style>
+        <p:txBody>
+          <a:bodyPr rtlCol="0" anchor="ctr"/>
+          <a:lstStyle/>
+          <a:p>
+            <a:pPr algn="ctr"/>
+          </a:p>
+        </p:txBody>
+      </p:sp>
+      <p:sp>
+        <p:nvSpPr>
+          <p:cNvPr id="10" name="TextBox 9"/>
           <p:cNvSpPr txBox="1"/>
           <p:nvPr/>
         </p:nvSpPr>
         <p:spPr>
           <a:xfrm>
-            <a:off x="1371600" y="4572000"/>
-            <a:ext cx="9144000" cy="1097280"/>
+            <a:off x="1828800" y="4663440"/>
+            <a:ext cx="8503920" cy="914400"/>
           </a:xfrm>
           <a:prstGeom prst="rect">
             <a:avLst/>
@@ -4522,11 +6166,15 @@
           </a:bodyPr>
           <a:lstStyle/>
           <a:p>
-            <a:pPr algn="ctr"/>
-            <a:r>
-              <a:rPr sz="2400" b="0">
+            <a:pPr algn="ctr">
+              <a:spcAft>
+                <a:spcPts val="1000"/>
+              </a:spcAft>
+            </a:pPr>
+            <a:r>
+              <a:rPr sz="2200" b="0">
                 <a:solidFill>
-                  <a:srgbClr val="B4AAC4"/>
+                  <a:srgbClr val="784696"/>
                 </a:solidFill>
                 <a:latin typeface="Microsoft YaHei"/>
               </a:rPr>
@@ -4585,17 +6233,17 @@
         </p:nvSpPr>
         <p:spPr>
           <a:xfrm>
-            <a:off x="0" y="0"/>
-            <a:ext cx="12191695" cy="6858000"/>
-          </a:xfrm>
-          <a:prstGeom prst="rect">
-            <a:avLst/>
-          </a:prstGeom>
-          <a:solidFill>
-            <a:srgbClr val="FCFAF7"/>
-          </a:solidFill>
-          <a:ln>
-            <a:noFill/>
+            <a:off x="292608" y="274320"/>
+            <a:ext cx="11594592" cy="6300216"/>
+          </a:xfrm>
+          <a:prstGeom prst="rect">
+            <a:avLst/>
+          </a:prstGeom>
+          <a:noFill/>
+          <a:ln w="31750">
+            <a:solidFill>
+              <a:srgbClr val="825AA0"/>
+            </a:solidFill>
           </a:ln>
         </p:spPr>
         <p:style>
@@ -4620,22 +6268,70 @@
           </a:p>
         </p:txBody>
       </p:sp>
-      <p:sp>
-        <p:nvSpPr>
-          <p:cNvPr id="4" name="Rectangle 3"/>
+      <p:pic>
+        <p:nvPicPr>
+          <p:cNvPr id="4" name="Picture 3" descr="corner_emperor_tl.png"/>
+          <p:cNvPicPr>
+            <a:picLocks noChangeAspect="1"/>
+          </p:cNvPicPr>
+          <p:nvPr/>
+        </p:nvPicPr>
+        <p:blipFill>
+          <a:blip r:embed="rId3"/>
+          <a:stretch>
+            <a:fillRect/>
+          </a:stretch>
+        </p:blipFill>
+        <p:spPr>
+          <a:xfrm>
+            <a:off x="-45720" y="-45720"/>
+            <a:ext cx="2011680" cy="2011680"/>
+          </a:xfrm>
+          <a:prstGeom prst="rect">
+            <a:avLst/>
+          </a:prstGeom>
+        </p:spPr>
+      </p:pic>
+      <p:pic>
+        <p:nvPicPr>
+          <p:cNvPr id="5" name="Picture 4" descr="corner_emperor_tr.png"/>
+          <p:cNvPicPr>
+            <a:picLocks noChangeAspect="1"/>
+          </p:cNvPicPr>
+          <p:nvPr/>
+        </p:nvPicPr>
+        <p:blipFill>
+          <a:blip r:embed="rId4"/>
+          <a:stretch>
+            <a:fillRect/>
+          </a:stretch>
+        </p:blipFill>
+        <p:spPr>
+          <a:xfrm>
+            <a:off x="9875520" y="-45720"/>
+            <a:ext cx="2011680" cy="2011680"/>
+          </a:xfrm>
+          <a:prstGeom prst="rect">
+            <a:avLst/>
+          </a:prstGeom>
+        </p:spPr>
+      </p:pic>
+      <p:sp>
+        <p:nvSpPr>
+          <p:cNvPr id="6" name="Rounded Rectangle 5"/>
           <p:cNvSpPr/>
           <p:nvPr/>
         </p:nvSpPr>
         <p:spPr>
           <a:xfrm>
-            <a:off x="0" y="0"/>
-            <a:ext cx="12191695" cy="91440"/>
-          </a:xfrm>
-          <a:prstGeom prst="rect">
+            <a:off x="4953304" y="502920"/>
+            <a:ext cx="2286000" cy="411480"/>
+          </a:xfrm>
+          <a:prstGeom prst="roundRect">
             <a:avLst/>
           </a:prstGeom>
           <a:solidFill>
-            <a:srgbClr val="FFD166"/>
+            <a:srgbClr val="C8AADC"/>
           </a:solidFill>
           <a:ln>
             <a:noFill/>
@@ -4665,14 +6361,14 @@
       </p:sp>
       <p:sp>
         <p:nvSpPr>
-          <p:cNvPr id="5" name="TextBox 4"/>
+          <p:cNvPr id="7" name="TextBox 6"/>
           <p:cNvSpPr txBox="1"/>
           <p:nvPr/>
         </p:nvSpPr>
         <p:spPr>
           <a:xfrm>
-            <a:off x="640080" y="228600"/>
-            <a:ext cx="2743200" cy="457200"/>
+            <a:off x="4953304" y="521208"/>
+            <a:ext cx="2286000" cy="384048"/>
           </a:xfrm>
           <a:prstGeom prst="rect">
             <a:avLst/>
@@ -4685,28 +6381,203 @@
           </a:bodyPr>
           <a:lstStyle/>
           <a:p>
-            <a:r>
-              <a:rPr sz="2000" b="1">
+            <a:pPr algn="ctr">
+              <a:spcAft>
+                <a:spcPts val="1000"/>
+              </a:spcAft>
+            </a:pPr>
+            <a:r>
+              <a:rPr sz="1800" b="1">
                 <a:solidFill>
-                  <a:srgbClr val="FFD166"/>
+                  <a:srgbClr val="3C2850"/>
                 </a:solidFill>
                 <a:latin typeface="Microsoft YaHei"/>
               </a:rPr>
-              <a:t>主题探究</a:t>
-            </a:r>
-          </a:p>
-        </p:txBody>
-      </p:sp>
-      <p:sp>
-        <p:nvSpPr>
-          <p:cNvPr id="6" name="TextBox 5"/>
+              <a:t>学会判断</a:t>
+            </a:r>
+          </a:p>
+        </p:txBody>
+      </p:sp>
+      <p:sp>
+        <p:nvSpPr>
+          <p:cNvPr id="8" name="TextBox 7"/>
           <p:cNvSpPr txBox="1"/>
           <p:nvPr/>
         </p:nvSpPr>
         <p:spPr>
           <a:xfrm>
-            <a:off x="640080" y="685800"/>
-            <a:ext cx="10515600" cy="914400"/>
+            <a:off x="1371600" y="960120"/>
+            <a:ext cx="9418320" cy="822960"/>
+          </a:xfrm>
+          <a:prstGeom prst="rect">
+            <a:avLst/>
+          </a:prstGeom>
+          <a:noFill/>
+        </p:spPr>
+        <p:txBody>
+          <a:bodyPr wrap="square">
+            <a:spAutoFit/>
+          </a:bodyPr>
+          <a:lstStyle/>
+          <a:p>
+            <a:pPr algn="ctr">
+              <a:spcAft>
+                <a:spcPts val="1000"/>
+              </a:spcAft>
+            </a:pPr>
+            <a:r>
+              <a:rPr sz="3600" b="1">
+                <a:solidFill>
+                  <a:srgbClr val="784696"/>
+                </a:solidFill>
+                <a:latin typeface="Microsoft YaHei"/>
+              </a:rPr>
+              <a:t>学习任务三</a:t>
+            </a:r>
+          </a:p>
+        </p:txBody>
+      </p:sp>
+      <p:sp>
+        <p:nvSpPr>
+          <p:cNvPr id="9" name="Rectangle 8"/>
+          <p:cNvSpPr/>
+          <p:nvPr/>
+        </p:nvSpPr>
+        <p:spPr>
+          <a:xfrm>
+            <a:off x="3200400" y="1600200"/>
+            <a:ext cx="5760720" cy="27432"/>
+          </a:xfrm>
+          <a:prstGeom prst="rect">
+            <a:avLst/>
+          </a:prstGeom>
+          <a:solidFill>
+            <a:srgbClr val="C8AADC"/>
+          </a:solidFill>
+          <a:ln>
+            <a:noFill/>
+          </a:ln>
+        </p:spPr>
+        <p:style>
+          <a:lnRef idx="1">
+            <a:schemeClr val="accent1"/>
+          </a:lnRef>
+          <a:fillRef idx="3">
+            <a:schemeClr val="accent1"/>
+          </a:fillRef>
+          <a:effectRef idx="2">
+            <a:schemeClr val="accent1"/>
+          </a:effectRef>
+          <a:fontRef idx="minor">
+            <a:schemeClr val="lt1"/>
+          </a:fontRef>
+        </p:style>
+        <p:txBody>
+          <a:bodyPr rtlCol="0" anchor="ctr"/>
+          <a:lstStyle/>
+          <a:p>
+            <a:pPr algn="ctr"/>
+          </a:p>
+        </p:txBody>
+      </p:sp>
+      <p:sp>
+        <p:nvSpPr>
+          <p:cNvPr id="10" name="Rounded Rectangle 9"/>
+          <p:cNvSpPr/>
+          <p:nvPr/>
+        </p:nvSpPr>
+        <p:spPr>
+          <a:xfrm>
+            <a:off x="1295704" y="1645920"/>
+            <a:ext cx="9601200" cy="2240280"/>
+          </a:xfrm>
+          <a:prstGeom prst="roundRect">
+            <a:avLst/>
+          </a:prstGeom>
+          <a:solidFill>
+            <a:srgbClr val="FCF8FF"/>
+          </a:solidFill>
+          <a:ln w="19050">
+            <a:solidFill>
+              <a:srgbClr val="C8AADC"/>
+            </a:solidFill>
+          </a:ln>
+        </p:spPr>
+        <p:style>
+          <a:lnRef idx="1">
+            <a:schemeClr val="accent1"/>
+          </a:lnRef>
+          <a:fillRef idx="3">
+            <a:schemeClr val="accent1"/>
+          </a:fillRef>
+          <a:effectRef idx="2">
+            <a:schemeClr val="accent1"/>
+          </a:effectRef>
+          <a:fontRef idx="minor">
+            <a:schemeClr val="lt1"/>
+          </a:fontRef>
+        </p:style>
+        <p:txBody>
+          <a:bodyPr rtlCol="0" anchor="ctr"/>
+          <a:lstStyle/>
+          <a:p>
+            <a:pPr algn="ctr"/>
+          </a:p>
+        </p:txBody>
+      </p:sp>
+      <p:sp>
+        <p:nvSpPr>
+          <p:cNvPr id="11" name="Oval 10"/>
+          <p:cNvSpPr/>
+          <p:nvPr/>
+        </p:nvSpPr>
+        <p:spPr>
+          <a:xfrm>
+            <a:off x="2255824" y="1828800"/>
+            <a:ext cx="384048" cy="384048"/>
+          </a:xfrm>
+          <a:prstGeom prst="ellipse">
+            <a:avLst/>
+          </a:prstGeom>
+          <a:solidFill>
+            <a:srgbClr val="784696"/>
+          </a:solidFill>
+          <a:ln>
+            <a:noFill/>
+          </a:ln>
+        </p:spPr>
+        <p:style>
+          <a:lnRef idx="1">
+            <a:schemeClr val="accent1"/>
+          </a:lnRef>
+          <a:fillRef idx="3">
+            <a:schemeClr val="accent1"/>
+          </a:fillRef>
+          <a:effectRef idx="2">
+            <a:schemeClr val="accent1"/>
+          </a:effectRef>
+          <a:fontRef idx="minor">
+            <a:schemeClr val="lt1"/>
+          </a:fontRef>
+        </p:style>
+        <p:txBody>
+          <a:bodyPr rtlCol="0" anchor="ctr"/>
+          <a:lstStyle/>
+          <a:p>
+            <a:pPr algn="ctr"/>
+          </a:p>
+        </p:txBody>
+      </p:sp>
+      <p:sp>
+        <p:nvSpPr>
+          <p:cNvPr id="12" name="TextBox 11"/>
+          <p:cNvSpPr txBox="1"/>
+          <p:nvPr/>
+        </p:nvSpPr>
+        <p:spPr>
+          <a:xfrm>
+            <a:off x="2255824" y="1847088"/>
+            <a:ext cx="384048" cy="365760"/>
           </a:xfrm>
           <a:prstGeom prst="rect">
             <a:avLst/>
@@ -4719,28 +6590,33 @@
           </a:bodyPr>
           <a:lstStyle/>
           <a:p>
-            <a:r>
-              <a:rPr sz="3600" b="1">
+            <a:pPr algn="ctr">
+              <a:spcAft>
+                <a:spcPts val="1000"/>
+              </a:spcAft>
+            </a:pPr>
+            <a:r>
+              <a:rPr sz="1600" b="1">
                 <a:solidFill>
-                  <a:srgbClr val="5A606E"/>
+                  <a:srgbClr val="FFFFFF"/>
                 </a:solidFill>
                 <a:latin typeface="Microsoft YaHei"/>
               </a:rPr>
-              <a:t>学习任务三 · 学会判断</a:t>
-            </a:r>
-          </a:p>
-        </p:txBody>
-      </p:sp>
-      <p:sp>
-        <p:nvSpPr>
-          <p:cNvPr id="7" name="TextBox 6"/>
+              <a:t>1</a:t>
+            </a:r>
+          </a:p>
+        </p:txBody>
+      </p:sp>
+      <p:sp>
+        <p:nvSpPr>
+          <p:cNvPr id="13" name="TextBox 12"/>
           <p:cNvSpPr txBox="1"/>
           <p:nvPr/>
         </p:nvSpPr>
         <p:spPr>
           <a:xfrm>
-            <a:off x="822960" y="1691640"/>
-            <a:ext cx="10241280" cy="4389120"/>
+            <a:off x="2758744" y="1810512"/>
+            <a:ext cx="7772400" cy="502920"/>
           </a:xfrm>
           <a:prstGeom prst="rect">
             <a:avLst/>
@@ -4748,56 +6624,266 @@
           <a:noFill/>
         </p:spPr>
         <p:txBody>
-          <a:bodyPr wrap="square" anchor="t">
+          <a:bodyPr wrap="none">
             <a:spAutoFit/>
           </a:bodyPr>
           <a:lstStyle/>
           <a:p>
-            <a:pPr>
+            <a:pPr algn="l">
               <a:spcAft>
-                <a:spcPts val="1600"/>
+                <a:spcPts val="1000"/>
               </a:spcAft>
             </a:pPr>
             <a:r>
-              <a:rPr sz="2800" b="0">
+              <a:rPr sz="2400" b="0">
                 <a:solidFill>
-                  <a:srgbClr val="5A606E"/>
+                  <a:srgbClr val="3C2850"/>
                 </a:solidFill>
                 <a:latin typeface="Microsoft YaHei"/>
               </a:rPr>
-              <a:t>完成课后「思考·探究·积累」</a:t>
-            </a:r>
-          </a:p>
-          <a:p>
-            <a:pPr>
+              <a:t>完成课后「思考·探究·积累」三道思考题</a:t>
+            </a:r>
+          </a:p>
+        </p:txBody>
+      </p:sp>
+      <p:sp>
+        <p:nvSpPr>
+          <p:cNvPr id="14" name="Oval 13"/>
+          <p:cNvSpPr/>
+          <p:nvPr/>
+        </p:nvSpPr>
+        <p:spPr>
+          <a:xfrm>
+            <a:off x="2255824" y="2395728"/>
+            <a:ext cx="384048" cy="384048"/>
+          </a:xfrm>
+          <a:prstGeom prst="ellipse">
+            <a:avLst/>
+          </a:prstGeom>
+          <a:solidFill>
+            <a:srgbClr val="784696"/>
+          </a:solidFill>
+          <a:ln>
+            <a:noFill/>
+          </a:ln>
+        </p:spPr>
+        <p:style>
+          <a:lnRef idx="1">
+            <a:schemeClr val="accent1"/>
+          </a:lnRef>
+          <a:fillRef idx="3">
+            <a:schemeClr val="accent1"/>
+          </a:fillRef>
+          <a:effectRef idx="2">
+            <a:schemeClr val="accent1"/>
+          </a:effectRef>
+          <a:fontRef idx="minor">
+            <a:schemeClr val="lt1"/>
+          </a:fontRef>
+        </p:style>
+        <p:txBody>
+          <a:bodyPr rtlCol="0" anchor="ctr"/>
+          <a:lstStyle/>
+          <a:p>
+            <a:pPr algn="ctr"/>
+          </a:p>
+        </p:txBody>
+      </p:sp>
+      <p:sp>
+        <p:nvSpPr>
+          <p:cNvPr id="15" name="TextBox 14"/>
+          <p:cNvSpPr txBox="1"/>
+          <p:nvPr/>
+        </p:nvSpPr>
+        <p:spPr>
+          <a:xfrm>
+            <a:off x="2255824" y="2414016"/>
+            <a:ext cx="384048" cy="365760"/>
+          </a:xfrm>
+          <a:prstGeom prst="rect">
+            <a:avLst/>
+          </a:prstGeom>
+          <a:noFill/>
+        </p:spPr>
+        <p:txBody>
+          <a:bodyPr wrap="none">
+            <a:spAutoFit/>
+          </a:bodyPr>
+          <a:lstStyle/>
+          <a:p>
+            <a:pPr algn="ctr">
               <a:spcAft>
-                <a:spcPts val="1600"/>
+                <a:spcPts val="1000"/>
               </a:spcAft>
             </a:pPr>
             <a:r>
-              <a:rPr sz="2800" b="0">
+              <a:rPr sz="1600" b="1">
                 <a:solidFill>
-                  <a:srgbClr val="5A606E"/>
+                  <a:srgbClr val="FFFFFF"/>
+                </a:solidFill>
+                <a:latin typeface="Microsoft YaHei"/>
+              </a:rPr>
+              <a:t>2</a:t>
+            </a:r>
+          </a:p>
+        </p:txBody>
+      </p:sp>
+      <p:sp>
+        <p:nvSpPr>
+          <p:cNvPr id="16" name="TextBox 15"/>
+          <p:cNvSpPr txBox="1"/>
+          <p:nvPr/>
+        </p:nvSpPr>
+        <p:spPr>
+          <a:xfrm>
+            <a:off x="2758744" y="2377440"/>
+            <a:ext cx="7772400" cy="502920"/>
+          </a:xfrm>
+          <a:prstGeom prst="rect">
+            <a:avLst/>
+          </a:prstGeom>
+          <a:noFill/>
+        </p:spPr>
+        <p:txBody>
+          <a:bodyPr wrap="none">
+            <a:spAutoFit/>
+          </a:bodyPr>
+          <a:lstStyle/>
+          <a:p>
+            <a:pPr algn="l">
+              <a:spcAft>
+                <a:spcPts val="1000"/>
+              </a:spcAft>
+            </a:pPr>
+            <a:r>
+              <a:rPr sz="2400" b="0">
+                <a:solidFill>
+                  <a:srgbClr val="3C2850"/>
                 </a:solidFill>
                 <a:latin typeface="Microsoft YaHei"/>
               </a:rPr>
               <a:t>联系生活：你有没有「随大流」的经历？</a:t>
             </a:r>
           </a:p>
-          <a:p>
-            <a:pPr>
+        </p:txBody>
+      </p:sp>
+      <p:sp>
+        <p:nvSpPr>
+          <p:cNvPr id="17" name="Oval 16"/>
+          <p:cNvSpPr/>
+          <p:nvPr/>
+        </p:nvSpPr>
+        <p:spPr>
+          <a:xfrm>
+            <a:off x="2255824" y="2962656"/>
+            <a:ext cx="384048" cy="384048"/>
+          </a:xfrm>
+          <a:prstGeom prst="ellipse">
+            <a:avLst/>
+          </a:prstGeom>
+          <a:solidFill>
+            <a:srgbClr val="784696"/>
+          </a:solidFill>
+          <a:ln>
+            <a:noFill/>
+          </a:ln>
+        </p:spPr>
+        <p:style>
+          <a:lnRef idx="1">
+            <a:schemeClr val="accent1"/>
+          </a:lnRef>
+          <a:fillRef idx="3">
+            <a:schemeClr val="accent1"/>
+          </a:fillRef>
+          <a:effectRef idx="2">
+            <a:schemeClr val="accent1"/>
+          </a:effectRef>
+          <a:fontRef idx="minor">
+            <a:schemeClr val="lt1"/>
+          </a:fontRef>
+        </p:style>
+        <p:txBody>
+          <a:bodyPr rtlCol="0" anchor="ctr"/>
+          <a:lstStyle/>
+          <a:p>
+            <a:pPr algn="ctr"/>
+          </a:p>
+        </p:txBody>
+      </p:sp>
+      <p:sp>
+        <p:nvSpPr>
+          <p:cNvPr id="18" name="TextBox 17"/>
+          <p:cNvSpPr txBox="1"/>
+          <p:nvPr/>
+        </p:nvSpPr>
+        <p:spPr>
+          <a:xfrm>
+            <a:off x="2255824" y="2980944"/>
+            <a:ext cx="384048" cy="365760"/>
+          </a:xfrm>
+          <a:prstGeom prst="rect">
+            <a:avLst/>
+          </a:prstGeom>
+          <a:noFill/>
+        </p:spPr>
+        <p:txBody>
+          <a:bodyPr wrap="none">
+            <a:spAutoFit/>
+          </a:bodyPr>
+          <a:lstStyle/>
+          <a:p>
+            <a:pPr algn="ctr">
               <a:spcAft>
-                <a:spcPts val="1600"/>
+                <a:spcPts val="1000"/>
               </a:spcAft>
             </a:pPr>
             <a:r>
-              <a:rPr sz="2800" b="0">
+              <a:rPr sz="1600" b="1">
                 <a:solidFill>
-                  <a:srgbClr val="5A606E"/>
+                  <a:srgbClr val="FFFFFF"/>
                 </a:solidFill>
                 <a:latin typeface="Microsoft YaHei"/>
               </a:rPr>
-              <a:t>主题二：面对虚假，要＿＿，不做沉默的大多数</a:t>
+              <a:t>3</a:t>
+            </a:r>
+          </a:p>
+        </p:txBody>
+      </p:sp>
+      <p:sp>
+        <p:nvSpPr>
+          <p:cNvPr id="19" name="TextBox 18"/>
+          <p:cNvSpPr txBox="1"/>
+          <p:nvPr/>
+        </p:nvSpPr>
+        <p:spPr>
+          <a:xfrm>
+            <a:off x="2758744" y="2944368"/>
+            <a:ext cx="7772400" cy="502920"/>
+          </a:xfrm>
+          <a:prstGeom prst="rect">
+            <a:avLst/>
+          </a:prstGeom>
+          <a:noFill/>
+        </p:spPr>
+        <p:txBody>
+          <a:bodyPr wrap="none">
+            <a:spAutoFit/>
+          </a:bodyPr>
+          <a:lstStyle/>
+          <a:p>
+            <a:pPr algn="l">
+              <a:spcAft>
+                <a:spcPts val="1000"/>
+              </a:spcAft>
+            </a:pPr>
+            <a:r>
+              <a:rPr sz="2400" b="0">
+                <a:solidFill>
+                  <a:srgbClr val="3C2850"/>
+                </a:solidFill>
+                <a:latin typeface="Microsoft YaHei"/>
+              </a:rPr>
+              <a:t>策展主题二：面对虚假，要敢于说真话</a:t>
             </a:r>
           </a:p>
         </p:txBody>
@@ -4852,17 +6938,17 @@
         </p:nvSpPr>
         <p:spPr>
           <a:xfrm>
-            <a:off x="0" y="0"/>
-            <a:ext cx="12191695" cy="6858000"/>
-          </a:xfrm>
-          <a:prstGeom prst="rect">
-            <a:avLst/>
-          </a:prstGeom>
-          <a:solidFill>
-            <a:srgbClr val="FCFAF7"/>
-          </a:solidFill>
-          <a:ln>
-            <a:noFill/>
+            <a:off x="292608" y="274320"/>
+            <a:ext cx="11594592" cy="6300216"/>
+          </a:xfrm>
+          <a:prstGeom prst="rect">
+            <a:avLst/>
+          </a:prstGeom>
+          <a:noFill/>
+          <a:ln w="31750">
+            <a:solidFill>
+              <a:srgbClr val="825AA0"/>
+            </a:solidFill>
           </a:ln>
         </p:spPr>
         <p:style>
@@ -4887,22 +6973,70 @@
           </a:p>
         </p:txBody>
       </p:sp>
-      <p:sp>
-        <p:nvSpPr>
-          <p:cNvPr id="4" name="Rectangle 3"/>
+      <p:pic>
+        <p:nvPicPr>
+          <p:cNvPr id="4" name="Picture 3" descr="corner_emperor_tl.png"/>
+          <p:cNvPicPr>
+            <a:picLocks noChangeAspect="1"/>
+          </p:cNvPicPr>
+          <p:nvPr/>
+        </p:nvPicPr>
+        <p:blipFill>
+          <a:blip r:embed="rId3"/>
+          <a:stretch>
+            <a:fillRect/>
+          </a:stretch>
+        </p:blipFill>
+        <p:spPr>
+          <a:xfrm>
+            <a:off x="-45720" y="-45720"/>
+            <a:ext cx="2011680" cy="2011680"/>
+          </a:xfrm>
+          <a:prstGeom prst="rect">
+            <a:avLst/>
+          </a:prstGeom>
+        </p:spPr>
+      </p:pic>
+      <p:pic>
+        <p:nvPicPr>
+          <p:cNvPr id="5" name="Picture 4" descr="corner_emperor_tr.png"/>
+          <p:cNvPicPr>
+            <a:picLocks noChangeAspect="1"/>
+          </p:cNvPicPr>
+          <p:nvPr/>
+        </p:nvPicPr>
+        <p:blipFill>
+          <a:blip r:embed="rId4"/>
+          <a:stretch>
+            <a:fillRect/>
+          </a:stretch>
+        </p:blipFill>
+        <p:spPr>
+          <a:xfrm>
+            <a:off x="9875520" y="-45720"/>
+            <a:ext cx="2011680" cy="2011680"/>
+          </a:xfrm>
+          <a:prstGeom prst="rect">
+            <a:avLst/>
+          </a:prstGeom>
+        </p:spPr>
+      </p:pic>
+      <p:sp>
+        <p:nvSpPr>
+          <p:cNvPr id="6" name="Rounded Rectangle 5"/>
           <p:cNvSpPr/>
           <p:nvPr/>
         </p:nvSpPr>
         <p:spPr>
           <a:xfrm>
-            <a:off x="0" y="0"/>
-            <a:ext cx="12191695" cy="91440"/>
-          </a:xfrm>
-          <a:prstGeom prst="rect">
+            <a:off x="4953304" y="502920"/>
+            <a:ext cx="2286000" cy="411480"/>
+          </a:xfrm>
+          <a:prstGeom prst="roundRect">
             <a:avLst/>
           </a:prstGeom>
           <a:solidFill>
-            <a:srgbClr val="B4AAC4"/>
+            <a:srgbClr val="C8AADC"/>
           </a:solidFill>
           <a:ln>
             <a:noFill/>
@@ -4932,14 +7066,14 @@
       </p:sp>
       <p:sp>
         <p:nvSpPr>
-          <p:cNvPr id="5" name="TextBox 4"/>
+          <p:cNvPr id="7" name="TextBox 6"/>
           <p:cNvSpPr txBox="1"/>
           <p:nvPr/>
         </p:nvSpPr>
         <p:spPr>
           <a:xfrm>
-            <a:off x="640080" y="228600"/>
-            <a:ext cx="2743200" cy="457200"/>
+            <a:off x="4953304" y="521208"/>
+            <a:ext cx="2286000" cy="384048"/>
           </a:xfrm>
           <a:prstGeom prst="rect">
             <a:avLst/>
@@ -4952,10 +7086,15 @@
           </a:bodyPr>
           <a:lstStyle/>
           <a:p>
-            <a:r>
-              <a:rPr sz="2000" b="1">
+            <a:pPr algn="ctr">
+              <a:spcAft>
+                <a:spcPts val="1000"/>
+              </a:spcAft>
+            </a:pPr>
+            <a:r>
+              <a:rPr sz="1800" b="1">
                 <a:solidFill>
-                  <a:srgbClr val="B4AAC4"/>
+                  <a:srgbClr val="3C2850"/>
                 </a:solidFill>
                 <a:latin typeface="Microsoft YaHei"/>
               </a:rPr>
@@ -4966,14 +7105,14 @@
       </p:sp>
       <p:sp>
         <p:nvSpPr>
-          <p:cNvPr id="6" name="TextBox 5"/>
+          <p:cNvPr id="8" name="TextBox 7"/>
           <p:cNvSpPr txBox="1"/>
           <p:nvPr/>
         </p:nvSpPr>
         <p:spPr>
           <a:xfrm>
-            <a:off x="640080" y="685800"/>
-            <a:ext cx="10515600" cy="914400"/>
+            <a:off x="1371600" y="960120"/>
+            <a:ext cx="9418320" cy="822960"/>
           </a:xfrm>
           <a:prstGeom prst="rect">
             <a:avLst/>
@@ -4981,15 +7120,20 @@
           <a:noFill/>
         </p:spPr>
         <p:txBody>
-          <a:bodyPr wrap="none">
+          <a:bodyPr wrap="square">
             <a:spAutoFit/>
           </a:bodyPr>
           <a:lstStyle/>
           <a:p>
+            <a:pPr algn="ctr">
+              <a:spcAft>
+                <a:spcPts val="1000"/>
+              </a:spcAft>
+            </a:pPr>
             <a:r>
               <a:rPr sz="3600" b="1">
                 <a:solidFill>
-                  <a:srgbClr val="5A606E"/>
+                  <a:srgbClr val="784696"/>
                 </a:solidFill>
                 <a:latin typeface="Microsoft YaHei"/>
               </a:rPr>
@@ -5000,14 +7144,145 @@
       </p:sp>
       <p:sp>
         <p:nvSpPr>
-          <p:cNvPr id="7" name="TextBox 6"/>
+          <p:cNvPr id="9" name="Rectangle 8"/>
+          <p:cNvSpPr/>
+          <p:nvPr/>
+        </p:nvSpPr>
+        <p:spPr>
+          <a:xfrm>
+            <a:off x="3200400" y="1600200"/>
+            <a:ext cx="5760720" cy="27432"/>
+          </a:xfrm>
+          <a:prstGeom prst="rect">
+            <a:avLst/>
+          </a:prstGeom>
+          <a:solidFill>
+            <a:srgbClr val="C8AADC"/>
+          </a:solidFill>
+          <a:ln>
+            <a:noFill/>
+          </a:ln>
+        </p:spPr>
+        <p:style>
+          <a:lnRef idx="1">
+            <a:schemeClr val="accent1"/>
+          </a:lnRef>
+          <a:fillRef idx="3">
+            <a:schemeClr val="accent1"/>
+          </a:fillRef>
+          <a:effectRef idx="2">
+            <a:schemeClr val="accent1"/>
+          </a:effectRef>
+          <a:fontRef idx="minor">
+            <a:schemeClr val="lt1"/>
+          </a:fontRef>
+        </p:style>
+        <p:txBody>
+          <a:bodyPr rtlCol="0" anchor="ctr"/>
+          <a:lstStyle/>
+          <a:p>
+            <a:pPr algn="ctr"/>
+          </a:p>
+        </p:txBody>
+      </p:sp>
+      <p:sp>
+        <p:nvSpPr>
+          <p:cNvPr id="10" name="Rounded Rectangle 9"/>
+          <p:cNvSpPr/>
+          <p:nvPr/>
+        </p:nvSpPr>
+        <p:spPr>
+          <a:xfrm>
+            <a:off x="1295704" y="1645920"/>
+            <a:ext cx="9601200" cy="2240280"/>
+          </a:xfrm>
+          <a:prstGeom prst="roundRect">
+            <a:avLst/>
+          </a:prstGeom>
+          <a:solidFill>
+            <a:srgbClr val="FCF8FF"/>
+          </a:solidFill>
+          <a:ln w="19050">
+            <a:solidFill>
+              <a:srgbClr val="C8AADC"/>
+            </a:solidFill>
+          </a:ln>
+        </p:spPr>
+        <p:style>
+          <a:lnRef idx="1">
+            <a:schemeClr val="accent1"/>
+          </a:lnRef>
+          <a:fillRef idx="3">
+            <a:schemeClr val="accent1"/>
+          </a:fillRef>
+          <a:effectRef idx="2">
+            <a:schemeClr val="accent1"/>
+          </a:effectRef>
+          <a:fontRef idx="minor">
+            <a:schemeClr val="lt1"/>
+          </a:fontRef>
+        </p:style>
+        <p:txBody>
+          <a:bodyPr rtlCol="0" anchor="ctr"/>
+          <a:lstStyle/>
+          <a:p>
+            <a:pPr algn="ctr"/>
+          </a:p>
+        </p:txBody>
+      </p:sp>
+      <p:sp>
+        <p:nvSpPr>
+          <p:cNvPr id="11" name="Oval 10"/>
+          <p:cNvSpPr/>
+          <p:nvPr/>
+        </p:nvSpPr>
+        <p:spPr>
+          <a:xfrm>
+            <a:off x="2255824" y="1828800"/>
+            <a:ext cx="384048" cy="384048"/>
+          </a:xfrm>
+          <a:prstGeom prst="ellipse">
+            <a:avLst/>
+          </a:prstGeom>
+          <a:solidFill>
+            <a:srgbClr val="784696"/>
+          </a:solidFill>
+          <a:ln>
+            <a:noFill/>
+          </a:ln>
+        </p:spPr>
+        <p:style>
+          <a:lnRef idx="1">
+            <a:schemeClr val="accent1"/>
+          </a:lnRef>
+          <a:fillRef idx="3">
+            <a:schemeClr val="accent1"/>
+          </a:fillRef>
+          <a:effectRef idx="2">
+            <a:schemeClr val="accent1"/>
+          </a:effectRef>
+          <a:fontRef idx="minor">
+            <a:schemeClr val="lt1"/>
+          </a:fontRef>
+        </p:style>
+        <p:txBody>
+          <a:bodyPr rtlCol="0" anchor="ctr"/>
+          <a:lstStyle/>
+          <a:p>
+            <a:pPr algn="ctr"/>
+          </a:p>
+        </p:txBody>
+      </p:sp>
+      <p:sp>
+        <p:nvSpPr>
+          <p:cNvPr id="12" name="TextBox 11"/>
           <p:cNvSpPr txBox="1"/>
           <p:nvPr/>
         </p:nvSpPr>
         <p:spPr>
           <a:xfrm>
-            <a:off x="822960" y="1691640"/>
-            <a:ext cx="10241280" cy="4389120"/>
+            <a:off x="2255824" y="1847088"/>
+            <a:ext cx="384048" cy="365760"/>
           </a:xfrm>
           <a:prstGeom prst="rect">
             <a:avLst/>
@@ -5015,56 +7290,305 @@
           <a:noFill/>
         </p:spPr>
         <p:txBody>
-          <a:bodyPr wrap="square" anchor="t">
+          <a:bodyPr wrap="none">
             <a:spAutoFit/>
           </a:bodyPr>
           <a:lstStyle/>
           <a:p>
-            <a:pPr>
+            <a:pPr algn="ctr">
               <a:spcAft>
-                <a:spcPts val="1600"/>
+                <a:spcPts val="1000"/>
               </a:spcAft>
             </a:pPr>
             <a:r>
-              <a:rPr sz="2800" b="0">
+              <a:rPr sz="1600" b="1">
                 <a:solidFill>
-                  <a:srgbClr val="5A606E"/>
+                  <a:srgbClr val="FFFFFF"/>
                 </a:solidFill>
                 <a:latin typeface="Microsoft YaHei"/>
               </a:rPr>
-              <a:t>夸张、重复、反差制造笑声</a:t>
-            </a:r>
-          </a:p>
-          <a:p>
-            <a:pPr>
+              <a:t>1</a:t>
+            </a:r>
+          </a:p>
+        </p:txBody>
+      </p:sp>
+      <p:sp>
+        <p:nvSpPr>
+          <p:cNvPr id="13" name="TextBox 12"/>
+          <p:cNvSpPr txBox="1"/>
+          <p:nvPr/>
+        </p:nvSpPr>
+        <p:spPr>
+          <a:xfrm>
+            <a:off x="2758744" y="1810512"/>
+            <a:ext cx="7772400" cy="502920"/>
+          </a:xfrm>
+          <a:prstGeom prst="rect">
+            <a:avLst/>
+          </a:prstGeom>
+          <a:noFill/>
+        </p:spPr>
+        <p:txBody>
+          <a:bodyPr wrap="none">
+            <a:spAutoFit/>
+          </a:bodyPr>
+          <a:lstStyle/>
+          <a:p>
+            <a:pPr algn="l">
               <a:spcAft>
-                <a:spcPts val="1600"/>
+                <a:spcPts val="1000"/>
               </a:spcAft>
             </a:pPr>
             <a:r>
-              <a:rPr sz="2800" b="0">
+              <a:rPr sz="2400" b="0">
                 <a:solidFill>
-                  <a:srgbClr val="5A606E"/>
+                  <a:srgbClr val="3C2850"/>
                 </a:solidFill>
                 <a:latin typeface="Microsoft YaHei"/>
               </a:rPr>
-              <a:t>笑声指向盲从与虚伪</a:t>
-            </a:r>
-          </a:p>
-          <a:p>
-            <a:pPr>
+              <a:t>夸张、重复、反差制造笑声，指向盲从与虚伪</a:t>
+            </a:r>
+          </a:p>
+        </p:txBody>
+      </p:sp>
+      <p:sp>
+        <p:nvSpPr>
+          <p:cNvPr id="14" name="Oval 13"/>
+          <p:cNvSpPr/>
+          <p:nvPr/>
+        </p:nvSpPr>
+        <p:spPr>
+          <a:xfrm>
+            <a:off x="2255824" y="2395728"/>
+            <a:ext cx="384048" cy="384048"/>
+          </a:xfrm>
+          <a:prstGeom prst="ellipse">
+            <a:avLst/>
+          </a:prstGeom>
+          <a:solidFill>
+            <a:srgbClr val="784696"/>
+          </a:solidFill>
+          <a:ln>
+            <a:noFill/>
+          </a:ln>
+        </p:spPr>
+        <p:style>
+          <a:lnRef idx="1">
+            <a:schemeClr val="accent1"/>
+          </a:lnRef>
+          <a:fillRef idx="3">
+            <a:schemeClr val="accent1"/>
+          </a:fillRef>
+          <a:effectRef idx="2">
+            <a:schemeClr val="accent1"/>
+          </a:effectRef>
+          <a:fontRef idx="minor">
+            <a:schemeClr val="lt1"/>
+          </a:fontRef>
+        </p:style>
+        <p:txBody>
+          <a:bodyPr rtlCol="0" anchor="ctr"/>
+          <a:lstStyle/>
+          <a:p>
+            <a:pPr algn="ctr"/>
+          </a:p>
+        </p:txBody>
+      </p:sp>
+      <p:sp>
+        <p:nvSpPr>
+          <p:cNvPr id="15" name="TextBox 14"/>
+          <p:cNvSpPr txBox="1"/>
+          <p:nvPr/>
+        </p:nvSpPr>
+        <p:spPr>
+          <a:xfrm>
+            <a:off x="2255824" y="2414016"/>
+            <a:ext cx="384048" cy="365760"/>
+          </a:xfrm>
+          <a:prstGeom prst="rect">
+            <a:avLst/>
+          </a:prstGeom>
+          <a:noFill/>
+        </p:spPr>
+        <p:txBody>
+          <a:bodyPr wrap="none">
+            <a:spAutoFit/>
+          </a:bodyPr>
+          <a:lstStyle/>
+          <a:p>
+            <a:pPr algn="ctr">
               <a:spcAft>
-                <a:spcPts val="1600"/>
+                <a:spcPts val="1000"/>
               </a:spcAft>
             </a:pPr>
             <a:r>
-              <a:rPr sz="2800" b="0">
+              <a:rPr sz="1600" b="1">
                 <a:solidFill>
-                  <a:srgbClr val="5A606E"/>
+                  <a:srgbClr val="FFFFFF"/>
                 </a:solidFill>
                 <a:latin typeface="Microsoft YaHei"/>
               </a:rPr>
-              <a:t>孩子的天真是不被虚假束缚的诚实</a:t>
+              <a:t>2</a:t>
+            </a:r>
+          </a:p>
+        </p:txBody>
+      </p:sp>
+      <p:sp>
+        <p:nvSpPr>
+          <p:cNvPr id="16" name="TextBox 15"/>
+          <p:cNvSpPr txBox="1"/>
+          <p:nvPr/>
+        </p:nvSpPr>
+        <p:spPr>
+          <a:xfrm>
+            <a:off x="2758744" y="2377440"/>
+            <a:ext cx="7772400" cy="502920"/>
+          </a:xfrm>
+          <a:prstGeom prst="rect">
+            <a:avLst/>
+          </a:prstGeom>
+          <a:noFill/>
+        </p:spPr>
+        <p:txBody>
+          <a:bodyPr wrap="none">
+            <a:spAutoFit/>
+          </a:bodyPr>
+          <a:lstStyle/>
+          <a:p>
+            <a:pPr algn="l">
+              <a:spcAft>
+                <a:spcPts val="1000"/>
+              </a:spcAft>
+            </a:pPr>
+            <a:r>
+              <a:rPr sz="2400" b="0">
+                <a:solidFill>
+                  <a:srgbClr val="3C2850"/>
+                </a:solidFill>
+                <a:latin typeface="Microsoft YaHei"/>
+              </a:rPr>
+              <a:t>孩子的天真，是不被虚假规则束缚的诚实</a:t>
+            </a:r>
+          </a:p>
+        </p:txBody>
+      </p:sp>
+      <p:sp>
+        <p:nvSpPr>
+          <p:cNvPr id="17" name="Oval 16"/>
+          <p:cNvSpPr/>
+          <p:nvPr/>
+        </p:nvSpPr>
+        <p:spPr>
+          <a:xfrm>
+            <a:off x="2255824" y="2962656"/>
+            <a:ext cx="384048" cy="384048"/>
+          </a:xfrm>
+          <a:prstGeom prst="ellipse">
+            <a:avLst/>
+          </a:prstGeom>
+          <a:solidFill>
+            <a:srgbClr val="784696"/>
+          </a:solidFill>
+          <a:ln>
+            <a:noFill/>
+          </a:ln>
+        </p:spPr>
+        <p:style>
+          <a:lnRef idx="1">
+            <a:schemeClr val="accent1"/>
+          </a:lnRef>
+          <a:fillRef idx="3">
+            <a:schemeClr val="accent1"/>
+          </a:fillRef>
+          <a:effectRef idx="2">
+            <a:schemeClr val="accent1"/>
+          </a:effectRef>
+          <a:fontRef idx="minor">
+            <a:schemeClr val="lt1"/>
+          </a:fontRef>
+        </p:style>
+        <p:txBody>
+          <a:bodyPr rtlCol="0" anchor="ctr"/>
+          <a:lstStyle/>
+          <a:p>
+            <a:pPr algn="ctr"/>
+          </a:p>
+        </p:txBody>
+      </p:sp>
+      <p:sp>
+        <p:nvSpPr>
+          <p:cNvPr id="18" name="TextBox 17"/>
+          <p:cNvSpPr txBox="1"/>
+          <p:nvPr/>
+        </p:nvSpPr>
+        <p:spPr>
+          <a:xfrm>
+            <a:off x="2255824" y="2980944"/>
+            <a:ext cx="384048" cy="365760"/>
+          </a:xfrm>
+          <a:prstGeom prst="rect">
+            <a:avLst/>
+          </a:prstGeom>
+          <a:noFill/>
+        </p:spPr>
+        <p:txBody>
+          <a:bodyPr wrap="none">
+            <a:spAutoFit/>
+          </a:bodyPr>
+          <a:lstStyle/>
+          <a:p>
+            <a:pPr algn="ctr">
+              <a:spcAft>
+                <a:spcPts val="1000"/>
+              </a:spcAft>
+            </a:pPr>
+            <a:r>
+              <a:rPr sz="1600" b="1">
+                <a:solidFill>
+                  <a:srgbClr val="FFFFFF"/>
+                </a:solidFill>
+                <a:latin typeface="Microsoft YaHei"/>
+              </a:rPr>
+              <a:t>3</a:t>
+            </a:r>
+          </a:p>
+        </p:txBody>
+      </p:sp>
+      <p:sp>
+        <p:nvSpPr>
+          <p:cNvPr id="19" name="TextBox 18"/>
+          <p:cNvSpPr txBox="1"/>
+          <p:nvPr/>
+        </p:nvSpPr>
+        <p:spPr>
+          <a:xfrm>
+            <a:off x="2758744" y="2944368"/>
+            <a:ext cx="7772400" cy="502920"/>
+          </a:xfrm>
+          <a:prstGeom prst="rect">
+            <a:avLst/>
+          </a:prstGeom>
+          <a:noFill/>
+        </p:spPr>
+        <p:txBody>
+          <a:bodyPr wrap="none">
+            <a:spAutoFit/>
+          </a:bodyPr>
+          <a:lstStyle/>
+          <a:p>
+            <a:pPr algn="l">
+              <a:spcAft>
+                <a:spcPts val="1000"/>
+              </a:spcAft>
+            </a:pPr>
+            <a:r>
+              <a:rPr sz="2400" b="0">
+                <a:solidFill>
+                  <a:srgbClr val="3C2850"/>
+                </a:solidFill>
+                <a:latin typeface="Microsoft YaHei"/>
+              </a:rPr>
+              <a:t>策展主题：真实与虚假</a:t>
             </a:r>
           </a:p>
         </p:txBody>
@@ -5119,17 +7643,17 @@
         </p:nvSpPr>
         <p:spPr>
           <a:xfrm>
-            <a:off x="0" y="0"/>
-            <a:ext cx="12191695" cy="6858000"/>
-          </a:xfrm>
-          <a:prstGeom prst="rect">
-            <a:avLst/>
-          </a:prstGeom>
-          <a:solidFill>
-            <a:srgbClr val="FCFAF7"/>
-          </a:solidFill>
-          <a:ln>
-            <a:noFill/>
+            <a:off x="292608" y="274320"/>
+            <a:ext cx="11594592" cy="6300216"/>
+          </a:xfrm>
+          <a:prstGeom prst="rect">
+            <a:avLst/>
+          </a:prstGeom>
+          <a:noFill/>
+          <a:ln w="31750">
+            <a:solidFill>
+              <a:srgbClr val="825AA0"/>
+            </a:solidFill>
           </a:ln>
         </p:spPr>
         <p:style>
@@ -5154,22 +7678,70 @@
           </a:p>
         </p:txBody>
       </p:sp>
-      <p:sp>
-        <p:nvSpPr>
-          <p:cNvPr id="4" name="Rectangle 3"/>
+      <p:pic>
+        <p:nvPicPr>
+          <p:cNvPr id="4" name="Picture 3" descr="corner_emperor_tl.png"/>
+          <p:cNvPicPr>
+            <a:picLocks noChangeAspect="1"/>
+          </p:cNvPicPr>
+          <p:nvPr/>
+        </p:nvPicPr>
+        <p:blipFill>
+          <a:blip r:embed="rId3"/>
+          <a:stretch>
+            <a:fillRect/>
+          </a:stretch>
+        </p:blipFill>
+        <p:spPr>
+          <a:xfrm>
+            <a:off x="-45720" y="-45720"/>
+            <a:ext cx="2011680" cy="2011680"/>
+          </a:xfrm>
+          <a:prstGeom prst="rect">
+            <a:avLst/>
+          </a:prstGeom>
+        </p:spPr>
+      </p:pic>
+      <p:pic>
+        <p:nvPicPr>
+          <p:cNvPr id="5" name="Picture 4" descr="corner_emperor_tr.png"/>
+          <p:cNvPicPr>
+            <a:picLocks noChangeAspect="1"/>
+          </p:cNvPicPr>
+          <p:nvPr/>
+        </p:nvPicPr>
+        <p:blipFill>
+          <a:blip r:embed="rId4"/>
+          <a:stretch>
+            <a:fillRect/>
+          </a:stretch>
+        </p:blipFill>
+        <p:spPr>
+          <a:xfrm>
+            <a:off x="9875520" y="-45720"/>
+            <a:ext cx="2011680" cy="2011680"/>
+          </a:xfrm>
+          <a:prstGeom prst="rect">
+            <a:avLst/>
+          </a:prstGeom>
+        </p:spPr>
+      </p:pic>
+      <p:sp>
+        <p:nvSpPr>
+          <p:cNvPr id="6" name="Rounded Rectangle 5"/>
           <p:cNvSpPr/>
           <p:nvPr/>
         </p:nvSpPr>
         <p:spPr>
           <a:xfrm>
-            <a:off x="0" y="0"/>
-            <a:ext cx="12191695" cy="91440"/>
-          </a:xfrm>
-          <a:prstGeom prst="rect">
+            <a:off x="4953304" y="502920"/>
+            <a:ext cx="2286000" cy="411480"/>
+          </a:xfrm>
+          <a:prstGeom prst="roundRect">
             <a:avLst/>
           </a:prstGeom>
           <a:solidFill>
-            <a:srgbClr val="FFB799"/>
+            <a:srgbClr val="C8AADC"/>
           </a:solidFill>
           <a:ln>
             <a:noFill/>
@@ -5199,14 +7771,14 @@
       </p:sp>
       <p:sp>
         <p:nvSpPr>
-          <p:cNvPr id="5" name="TextBox 4"/>
+          <p:cNvPr id="7" name="TextBox 6"/>
           <p:cNvSpPr txBox="1"/>
           <p:nvPr/>
         </p:nvSpPr>
         <p:spPr>
           <a:xfrm>
-            <a:off x="640080" y="228600"/>
-            <a:ext cx="2743200" cy="457200"/>
+            <a:off x="4953304" y="521208"/>
+            <a:ext cx="2286000" cy="384048"/>
           </a:xfrm>
           <a:prstGeom prst="rect">
             <a:avLst/>
@@ -5219,10 +7791,15 @@
           </a:bodyPr>
           <a:lstStyle/>
           <a:p>
-            <a:r>
-              <a:rPr sz="2000" b="1">
+            <a:pPr algn="ctr">
+              <a:spcAft>
+                <a:spcPts val="1000"/>
+              </a:spcAft>
+            </a:pPr>
+            <a:r>
+              <a:rPr sz="1800" b="1">
                 <a:solidFill>
-                  <a:srgbClr val="FFB799"/>
+                  <a:srgbClr val="3C2850"/>
                 </a:solidFill>
                 <a:latin typeface="Microsoft YaHei"/>
               </a:rPr>
@@ -5233,14 +7810,184 @@
       </p:sp>
       <p:sp>
         <p:nvSpPr>
-          <p:cNvPr id="6" name="TextBox 5"/>
+          <p:cNvPr id="8" name="TextBox 7"/>
           <p:cNvSpPr txBox="1"/>
           <p:nvPr/>
         </p:nvSpPr>
         <p:spPr>
           <a:xfrm>
-            <a:off x="640080" y="685800"/>
-            <a:ext cx="10515600" cy="914400"/>
+            <a:off x="1371600" y="960120"/>
+            <a:ext cx="9418320" cy="822960"/>
+          </a:xfrm>
+          <a:prstGeom prst="rect">
+            <a:avLst/>
+          </a:prstGeom>
+          <a:noFill/>
+        </p:spPr>
+        <p:txBody>
+          <a:bodyPr wrap="square">
+            <a:spAutoFit/>
+          </a:bodyPr>
+          <a:lstStyle/>
+          <a:p>
+            <a:pPr algn="ctr">
+              <a:spcAft>
+                <a:spcPts val="1000"/>
+              </a:spcAft>
+            </a:pPr>
+            <a:r>
+              <a:rPr sz="3600" b="1">
+                <a:solidFill>
+                  <a:srgbClr val="784696"/>
+                </a:solidFill>
+                <a:latin typeface="Microsoft YaHei"/>
+              </a:rPr>
+              <a:t>课后作业</a:t>
+            </a:r>
+          </a:p>
+        </p:txBody>
+      </p:sp>
+      <p:sp>
+        <p:nvSpPr>
+          <p:cNvPr id="9" name="Rectangle 8"/>
+          <p:cNvSpPr/>
+          <p:nvPr/>
+        </p:nvSpPr>
+        <p:spPr>
+          <a:xfrm>
+            <a:off x="3200400" y="1600200"/>
+            <a:ext cx="5760720" cy="27432"/>
+          </a:xfrm>
+          <a:prstGeom prst="rect">
+            <a:avLst/>
+          </a:prstGeom>
+          <a:solidFill>
+            <a:srgbClr val="C8AADC"/>
+          </a:solidFill>
+          <a:ln>
+            <a:noFill/>
+          </a:ln>
+        </p:spPr>
+        <p:style>
+          <a:lnRef idx="1">
+            <a:schemeClr val="accent1"/>
+          </a:lnRef>
+          <a:fillRef idx="3">
+            <a:schemeClr val="accent1"/>
+          </a:fillRef>
+          <a:effectRef idx="2">
+            <a:schemeClr val="accent1"/>
+          </a:effectRef>
+          <a:fontRef idx="minor">
+            <a:schemeClr val="lt1"/>
+          </a:fontRef>
+        </p:style>
+        <p:txBody>
+          <a:bodyPr rtlCol="0" anchor="ctr"/>
+          <a:lstStyle/>
+          <a:p>
+            <a:pPr algn="ctr"/>
+          </a:p>
+        </p:txBody>
+      </p:sp>
+      <p:sp>
+        <p:nvSpPr>
+          <p:cNvPr id="10" name="Rounded Rectangle 9"/>
+          <p:cNvSpPr/>
+          <p:nvPr/>
+        </p:nvSpPr>
+        <p:spPr>
+          <a:xfrm>
+            <a:off x="1295704" y="1645920"/>
+            <a:ext cx="9601200" cy="1645920"/>
+          </a:xfrm>
+          <a:prstGeom prst="roundRect">
+            <a:avLst/>
+          </a:prstGeom>
+          <a:solidFill>
+            <a:srgbClr val="FCF8FF"/>
+          </a:solidFill>
+          <a:ln w="19050">
+            <a:solidFill>
+              <a:srgbClr val="C8AADC"/>
+            </a:solidFill>
+          </a:ln>
+        </p:spPr>
+        <p:style>
+          <a:lnRef idx="1">
+            <a:schemeClr val="accent1"/>
+          </a:lnRef>
+          <a:fillRef idx="3">
+            <a:schemeClr val="accent1"/>
+          </a:fillRef>
+          <a:effectRef idx="2">
+            <a:schemeClr val="accent1"/>
+          </a:effectRef>
+          <a:fontRef idx="minor">
+            <a:schemeClr val="lt1"/>
+          </a:fontRef>
+        </p:style>
+        <p:txBody>
+          <a:bodyPr rtlCol="0" anchor="ctr"/>
+          <a:lstStyle/>
+          <a:p>
+            <a:pPr algn="ctr"/>
+          </a:p>
+        </p:txBody>
+      </p:sp>
+      <p:sp>
+        <p:nvSpPr>
+          <p:cNvPr id="11" name="Oval 10"/>
+          <p:cNvSpPr/>
+          <p:nvPr/>
+        </p:nvSpPr>
+        <p:spPr>
+          <a:xfrm>
+            <a:off x="2255824" y="1828800"/>
+            <a:ext cx="384048" cy="384048"/>
+          </a:xfrm>
+          <a:prstGeom prst="ellipse">
+            <a:avLst/>
+          </a:prstGeom>
+          <a:solidFill>
+            <a:srgbClr val="784696"/>
+          </a:solidFill>
+          <a:ln>
+            <a:noFill/>
+          </a:ln>
+        </p:spPr>
+        <p:style>
+          <a:lnRef idx="1">
+            <a:schemeClr val="accent1"/>
+          </a:lnRef>
+          <a:fillRef idx="3">
+            <a:schemeClr val="accent1"/>
+          </a:fillRef>
+          <a:effectRef idx="2">
+            <a:schemeClr val="accent1"/>
+          </a:effectRef>
+          <a:fontRef idx="minor">
+            <a:schemeClr val="lt1"/>
+          </a:fontRef>
+        </p:style>
+        <p:txBody>
+          <a:bodyPr rtlCol="0" anchor="ctr"/>
+          <a:lstStyle/>
+          <a:p>
+            <a:pPr algn="ctr"/>
+          </a:p>
+        </p:txBody>
+      </p:sp>
+      <p:sp>
+        <p:nvSpPr>
+          <p:cNvPr id="12" name="TextBox 11"/>
+          <p:cNvSpPr txBox="1"/>
+          <p:nvPr/>
+        </p:nvSpPr>
+        <p:spPr>
+          <a:xfrm>
+            <a:off x="2255824" y="1847088"/>
+            <a:ext cx="384048" cy="365760"/>
           </a:xfrm>
           <a:prstGeom prst="rect">
             <a:avLst/>
@@ -5253,28 +8000,33 @@
           </a:bodyPr>
           <a:lstStyle/>
           <a:p>
-            <a:r>
-              <a:rPr sz="3600" b="1">
+            <a:pPr algn="ctr">
+              <a:spcAft>
+                <a:spcPts val="1000"/>
+              </a:spcAft>
+            </a:pPr>
+            <a:r>
+              <a:rPr sz="1600" b="1">
                 <a:solidFill>
-                  <a:srgbClr val="5A606E"/>
+                  <a:srgbClr val="FFFFFF"/>
                 </a:solidFill>
                 <a:latin typeface="Microsoft YaHei"/>
               </a:rPr>
-              <a:t>作业</a:t>
-            </a:r>
-          </a:p>
-        </p:txBody>
-      </p:sp>
-      <p:sp>
-        <p:nvSpPr>
-          <p:cNvPr id="7" name="TextBox 6"/>
+              <a:t>1</a:t>
+            </a:r>
+          </a:p>
+        </p:txBody>
+      </p:sp>
+      <p:sp>
+        <p:nvSpPr>
+          <p:cNvPr id="13" name="TextBox 12"/>
           <p:cNvSpPr txBox="1"/>
           <p:nvPr/>
         </p:nvSpPr>
         <p:spPr>
           <a:xfrm>
-            <a:off x="822960" y="1691640"/>
-            <a:ext cx="10241280" cy="4389120"/>
+            <a:off x="2758744" y="1810512"/>
+            <a:ext cx="7772400" cy="502920"/>
           </a:xfrm>
           <a:prstGeom prst="rect">
             <a:avLst/>
@@ -5282,58 +8034,145 @@
           <a:noFill/>
         </p:spPr>
         <p:txBody>
-          <a:bodyPr wrap="square" anchor="t">
+          <a:bodyPr wrap="none">
             <a:spAutoFit/>
           </a:bodyPr>
           <a:lstStyle/>
           <a:p>
-            <a:pPr>
+            <a:pPr algn="l">
               <a:spcAft>
-                <a:spcPts val="1600"/>
+                <a:spcPts val="1000"/>
               </a:spcAft>
             </a:pPr>
             <a:r>
-              <a:rPr sz="2600" b="1">
+              <a:rPr sz="2400" b="0">
                 <a:solidFill>
-                  <a:srgbClr val="FFB799"/>
+                  <a:srgbClr val="3C2850"/>
                 </a:solidFill>
                 <a:latin typeface="Microsoft YaHei"/>
               </a:rPr>
-              <a:t>必做  </a:t>
-            </a:r>
-            <a:r>
-              <a:rPr sz="2600" b="0">
+              <a:t>必做：用150字概括《皇帝的新装》的故事</a:t>
+            </a:r>
+          </a:p>
+        </p:txBody>
+      </p:sp>
+      <p:sp>
+        <p:nvSpPr>
+          <p:cNvPr id="14" name="Oval 13"/>
+          <p:cNvSpPr/>
+          <p:nvPr/>
+        </p:nvSpPr>
+        <p:spPr>
+          <a:xfrm>
+            <a:off x="2255824" y="2395728"/>
+            <a:ext cx="384048" cy="384048"/>
+          </a:xfrm>
+          <a:prstGeom prst="ellipse">
+            <a:avLst/>
+          </a:prstGeom>
+          <a:solidFill>
+            <a:srgbClr val="784696"/>
+          </a:solidFill>
+          <a:ln>
+            <a:noFill/>
+          </a:ln>
+        </p:spPr>
+        <p:style>
+          <a:lnRef idx="1">
+            <a:schemeClr val="accent1"/>
+          </a:lnRef>
+          <a:fillRef idx="3">
+            <a:schemeClr val="accent1"/>
+          </a:fillRef>
+          <a:effectRef idx="2">
+            <a:schemeClr val="accent1"/>
+          </a:effectRef>
+          <a:fontRef idx="minor">
+            <a:schemeClr val="lt1"/>
+          </a:fontRef>
+        </p:style>
+        <p:txBody>
+          <a:bodyPr rtlCol="0" anchor="ctr"/>
+          <a:lstStyle/>
+          <a:p>
+            <a:pPr algn="ctr"/>
+          </a:p>
+        </p:txBody>
+      </p:sp>
+      <p:sp>
+        <p:nvSpPr>
+          <p:cNvPr id="15" name="TextBox 14"/>
+          <p:cNvSpPr txBox="1"/>
+          <p:nvPr/>
+        </p:nvSpPr>
+        <p:spPr>
+          <a:xfrm>
+            <a:off x="2255824" y="2414016"/>
+            <a:ext cx="384048" cy="365760"/>
+          </a:xfrm>
+          <a:prstGeom prst="rect">
+            <a:avLst/>
+          </a:prstGeom>
+          <a:noFill/>
+        </p:spPr>
+        <p:txBody>
+          <a:bodyPr wrap="none">
+            <a:spAutoFit/>
+          </a:bodyPr>
+          <a:lstStyle/>
+          <a:p>
+            <a:pPr algn="ctr">
+              <a:spcAft>
+                <a:spcPts val="1000"/>
+              </a:spcAft>
+            </a:pPr>
+            <a:r>
+              <a:rPr sz="1600" b="1">
                 <a:solidFill>
-                  <a:srgbClr val="5A606E"/>
+                  <a:srgbClr val="FFFFFF"/>
                 </a:solidFill>
                 <a:latin typeface="Microsoft YaHei"/>
               </a:rPr>
-              <a:t>150字概括故事</a:t>
-            </a:r>
-          </a:p>
-          <a:p>
-            <a:pPr>
+              <a:t>2</a:t>
+            </a:r>
+          </a:p>
+        </p:txBody>
+      </p:sp>
+      <p:sp>
+        <p:nvSpPr>
+          <p:cNvPr id="16" name="TextBox 15"/>
+          <p:cNvSpPr txBox="1"/>
+          <p:nvPr/>
+        </p:nvSpPr>
+        <p:spPr>
+          <a:xfrm>
+            <a:off x="2758744" y="2377440"/>
+            <a:ext cx="7772400" cy="502920"/>
+          </a:xfrm>
+          <a:prstGeom prst="rect">
+            <a:avLst/>
+          </a:prstGeom>
+          <a:noFill/>
+        </p:spPr>
+        <p:txBody>
+          <a:bodyPr wrap="none">
+            <a:spAutoFit/>
+          </a:bodyPr>
+          <a:lstStyle/>
+          <a:p>
+            <a:pPr algn="l">
               <a:spcAft>
-                <a:spcPts val="1600"/>
+                <a:spcPts val="1000"/>
               </a:spcAft>
             </a:pPr>
             <a:r>
-              <a:rPr sz="2600" b="1">
+              <a:rPr sz="2400" b="0">
                 <a:solidFill>
-                  <a:srgbClr val="FFB799"/>
+                  <a:srgbClr val="3C2850"/>
                 </a:solidFill>
                 <a:latin typeface="Microsoft YaHei"/>
               </a:rPr>
-              <a:t>情境  </a:t>
-            </a:r>
-            <a:r>
-              <a:rPr sz="2600" b="0">
-                <a:solidFill>
-                  <a:srgbClr val="5A606E"/>
-                </a:solidFill>
-                <a:latin typeface="Microsoft YaHei"/>
-              </a:rPr>
-              <a:t>班级群「震惊」消息，你会怎么做？（50字）</a:t>
+              <a:t>情境：班级群流传「震惊」消息，你会怎么做？（50字）</a:t>
             </a:r>
           </a:p>
         </p:txBody>

--- a/第六单元PPT/第22课 皇帝的新装.pptx
+++ b/第六单元PPT/第22课 皇帝的新装.pptx
@@ -13,7 +13,6 @@
     <p:sldId id="261" r:id="rId12"/>
     <p:sldId id="262" r:id="rId13"/>
     <p:sldId id="263" r:id="rId14"/>
-    <p:sldId id="264" r:id="rId15"/>
   </p:sldIdLst>
   <p:sldSz cx="12191695" cy="6858000" type="screen4x3"/>
   <p:notesSz cx="6858000" cy="9144000"/>
@@ -3605,7 +3604,7 @@
                 </a:solidFill>
                 <a:latin typeface="Microsoft YaHei"/>
               </a:rPr>
-              <a:t>课时目标</a:t>
+              <a:t>记笔记</a:t>
             </a:r>
           </a:p>
         </p:txBody>
@@ -3638,13 +3637,13 @@
               </a:spcAft>
             </a:pPr>
             <a:r>
-              <a:rPr sz="3600" b="1">
+              <a:rPr sz="3400" b="1">
                 <a:solidFill>
                   <a:srgbClr val="784696"/>
                 </a:solidFill>
                 <a:latin typeface="Microsoft YaHei"/>
               </a:rPr>
-              <a:t>本课目标</a:t>
+              <a:t>文学常识</a:t>
             </a:r>
           </a:p>
         </p:txBody>
@@ -3700,8 +3699,8 @@
         </p:nvSpPr>
         <p:spPr>
           <a:xfrm>
-            <a:off x="1295704" y="1645920"/>
-            <a:ext cx="9601200" cy="2240280"/>
+            <a:off x="1158544" y="1645920"/>
+            <a:ext cx="9875520" cy="2953512"/>
           </a:xfrm>
           <a:prstGeom prst="roundRect">
             <a:avLst/>
@@ -3739,57 +3738,14 @@
       </p:sp>
       <p:sp>
         <p:nvSpPr>
-          <p:cNvPr id="11" name="Oval 10"/>
-          <p:cNvSpPr/>
-          <p:nvPr/>
-        </p:nvSpPr>
-        <p:spPr>
-          <a:xfrm>
-            <a:off x="2255824" y="1828800"/>
-            <a:ext cx="384048" cy="384048"/>
-          </a:xfrm>
-          <a:prstGeom prst="ellipse">
-            <a:avLst/>
-          </a:prstGeom>
-          <a:solidFill>
-            <a:srgbClr val="784696"/>
-          </a:solidFill>
-          <a:ln>
-            <a:noFill/>
-          </a:ln>
-        </p:spPr>
-        <p:style>
-          <a:lnRef idx="1">
-            <a:schemeClr val="accent1"/>
-          </a:lnRef>
-          <a:fillRef idx="3">
-            <a:schemeClr val="accent1"/>
-          </a:fillRef>
-          <a:effectRef idx="2">
-            <a:schemeClr val="accent1"/>
-          </a:effectRef>
-          <a:fontRef idx="minor">
-            <a:schemeClr val="lt1"/>
-          </a:fontRef>
-        </p:style>
-        <p:txBody>
-          <a:bodyPr rtlCol="0" anchor="ctr"/>
-          <a:lstStyle/>
-          <a:p>
-            <a:pPr algn="ctr"/>
-          </a:p>
-        </p:txBody>
-      </p:sp>
-      <p:sp>
-        <p:nvSpPr>
-          <p:cNvPr id="12" name="TextBox 11"/>
+          <p:cNvPr id="11" name="TextBox 10"/>
           <p:cNvSpPr txBox="1"/>
           <p:nvPr/>
         </p:nvSpPr>
         <p:spPr>
           <a:xfrm>
-            <a:off x="2255824" y="1847088"/>
-            <a:ext cx="384048" cy="365760"/>
+            <a:off x="1234440" y="1783080"/>
+            <a:ext cx="2377440" cy="502920"/>
           </a:xfrm>
           <a:prstGeom prst="rect">
             <a:avLst/>
@@ -3802,33 +3758,33 @@
           </a:bodyPr>
           <a:lstStyle/>
           <a:p>
-            <a:pPr algn="ctr">
+            <a:pPr algn="r">
               <a:spcAft>
                 <a:spcPts val="1000"/>
               </a:spcAft>
             </a:pPr>
             <a:r>
-              <a:rPr sz="1600" b="1">
-                <a:solidFill>
-                  <a:srgbClr val="FFFFFF"/>
+              <a:rPr sz="2200" b="1">
+                <a:solidFill>
+                  <a:srgbClr val="784696"/>
                 </a:solidFill>
                 <a:latin typeface="Microsoft YaHei"/>
               </a:rPr>
-              <a:t>1</a:t>
-            </a:r>
-          </a:p>
-        </p:txBody>
-      </p:sp>
-      <p:sp>
-        <p:nvSpPr>
-          <p:cNvPr id="13" name="TextBox 12"/>
+              <a:t>作者</a:t>
+            </a:r>
+          </a:p>
+        </p:txBody>
+      </p:sp>
+      <p:sp>
+        <p:nvSpPr>
+          <p:cNvPr id="12" name="TextBox 11"/>
           <p:cNvSpPr txBox="1"/>
           <p:nvPr/>
         </p:nvSpPr>
         <p:spPr>
           <a:xfrm>
-            <a:off x="2758744" y="1810512"/>
-            <a:ext cx="7772400" cy="502920"/>
+            <a:off x="3749039" y="1783080"/>
+            <a:ext cx="7589520" cy="594360"/>
           </a:xfrm>
           <a:prstGeom prst="rect">
             <a:avLst/>
@@ -3847,70 +3803,27 @@
               </a:spcAft>
             </a:pPr>
             <a:r>
-              <a:rPr sz="2400" b="0">
+              <a:rPr sz="2200" b="0">
                 <a:solidFill>
                   <a:srgbClr val="3C2850"/>
                 </a:solidFill>
                 <a:latin typeface="Microsoft YaHei"/>
               </a:rPr>
-              <a:t>梳理童话情节，用简洁语言复述故事</a:t>
-            </a:r>
-          </a:p>
-        </p:txBody>
-      </p:sp>
-      <p:sp>
-        <p:nvSpPr>
-          <p:cNvPr id="14" name="Oval 13"/>
-          <p:cNvSpPr/>
-          <p:nvPr/>
-        </p:nvSpPr>
-        <p:spPr>
-          <a:xfrm>
-            <a:off x="2255824" y="2395728"/>
-            <a:ext cx="384048" cy="384048"/>
-          </a:xfrm>
-          <a:prstGeom prst="ellipse">
-            <a:avLst/>
-          </a:prstGeom>
-          <a:solidFill>
-            <a:srgbClr val="784696"/>
-          </a:solidFill>
-          <a:ln>
-            <a:noFill/>
-          </a:ln>
-        </p:spPr>
-        <p:style>
-          <a:lnRef idx="1">
-            <a:schemeClr val="accent1"/>
-          </a:lnRef>
-          <a:fillRef idx="3">
-            <a:schemeClr val="accent1"/>
-          </a:fillRef>
-          <a:effectRef idx="2">
-            <a:schemeClr val="accent1"/>
-          </a:effectRef>
-          <a:fontRef idx="minor">
-            <a:schemeClr val="lt1"/>
-          </a:fontRef>
-        </p:style>
-        <p:txBody>
-          <a:bodyPr rtlCol="0" anchor="ctr"/>
-          <a:lstStyle/>
-          <a:p>
-            <a:pPr algn="ctr"/>
-          </a:p>
-        </p:txBody>
-      </p:sp>
-      <p:sp>
-        <p:nvSpPr>
-          <p:cNvPr id="15" name="TextBox 14"/>
+              <a:t>安徒生，丹麦童话作家</a:t>
+            </a:r>
+          </a:p>
+        </p:txBody>
+      </p:sp>
+      <p:sp>
+        <p:nvSpPr>
+          <p:cNvPr id="13" name="TextBox 12"/>
           <p:cNvSpPr txBox="1"/>
           <p:nvPr/>
         </p:nvSpPr>
         <p:spPr>
           <a:xfrm>
-            <a:off x="2255824" y="2414016"/>
-            <a:ext cx="384048" cy="365760"/>
+            <a:off x="1234440" y="2441448"/>
+            <a:ext cx="2377440" cy="502920"/>
           </a:xfrm>
           <a:prstGeom prst="rect">
             <a:avLst/>
@@ -3923,33 +3836,33 @@
           </a:bodyPr>
           <a:lstStyle/>
           <a:p>
-            <a:pPr algn="ctr">
+            <a:pPr algn="r">
               <a:spcAft>
                 <a:spcPts val="1000"/>
               </a:spcAft>
             </a:pPr>
             <a:r>
-              <a:rPr sz="1600" b="1">
-                <a:solidFill>
-                  <a:srgbClr val="FFFFFF"/>
+              <a:rPr sz="2200" b="1">
+                <a:solidFill>
+                  <a:srgbClr val="784696"/>
                 </a:solidFill>
                 <a:latin typeface="Microsoft YaHei"/>
               </a:rPr>
-              <a:t>2</a:t>
-            </a:r>
-          </a:p>
-        </p:txBody>
-      </p:sp>
-      <p:sp>
-        <p:nvSpPr>
-          <p:cNvPr id="16" name="TextBox 15"/>
+              <a:t>文体</a:t>
+            </a:r>
+          </a:p>
+        </p:txBody>
+      </p:sp>
+      <p:sp>
+        <p:nvSpPr>
+          <p:cNvPr id="14" name="TextBox 13"/>
           <p:cNvSpPr txBox="1"/>
           <p:nvPr/>
         </p:nvSpPr>
         <p:spPr>
           <a:xfrm>
-            <a:off x="2758744" y="2377440"/>
-            <a:ext cx="7772400" cy="502920"/>
+            <a:off x="3749039" y="2441448"/>
+            <a:ext cx="7589520" cy="594360"/>
           </a:xfrm>
           <a:prstGeom prst="rect">
             <a:avLst/>
@@ -3968,70 +3881,27 @@
               </a:spcAft>
             </a:pPr>
             <a:r>
-              <a:rPr sz="2400" b="0">
+              <a:rPr sz="2200" b="0">
                 <a:solidFill>
                   <a:srgbClr val="3C2850"/>
                 </a:solidFill>
                 <a:latin typeface="Microsoft YaHei"/>
               </a:rPr>
-              <a:t>赏析夸张、反讽等手法，理解讽刺艺术</a:t>
-            </a:r>
-          </a:p>
-        </p:txBody>
-      </p:sp>
-      <p:sp>
-        <p:nvSpPr>
-          <p:cNvPr id="17" name="Oval 16"/>
-          <p:cNvSpPr/>
-          <p:nvPr/>
-        </p:nvSpPr>
-        <p:spPr>
-          <a:xfrm>
-            <a:off x="2255824" y="2962656"/>
-            <a:ext cx="384048" cy="384048"/>
-          </a:xfrm>
-          <a:prstGeom prst="ellipse">
-            <a:avLst/>
-          </a:prstGeom>
-          <a:solidFill>
-            <a:srgbClr val="784696"/>
-          </a:solidFill>
-          <a:ln>
-            <a:noFill/>
-          </a:ln>
-        </p:spPr>
-        <p:style>
-          <a:lnRef idx="1">
-            <a:schemeClr val="accent1"/>
-          </a:lnRef>
-          <a:fillRef idx="3">
-            <a:schemeClr val="accent1"/>
-          </a:fillRef>
-          <a:effectRef idx="2">
-            <a:schemeClr val="accent1"/>
-          </a:effectRef>
-          <a:fontRef idx="minor">
-            <a:schemeClr val="lt1"/>
-          </a:fontRef>
-        </p:style>
-        <p:txBody>
-          <a:bodyPr rtlCol="0" anchor="ctr"/>
-          <a:lstStyle/>
-          <a:p>
-            <a:pPr algn="ctr"/>
-          </a:p>
-        </p:txBody>
-      </p:sp>
-      <p:sp>
-        <p:nvSpPr>
-          <p:cNvPr id="18" name="TextBox 17"/>
+              <a:t>童话——用虚构故事反映现实生活</a:t>
+            </a:r>
+          </a:p>
+        </p:txBody>
+      </p:sp>
+      <p:sp>
+        <p:nvSpPr>
+          <p:cNvPr id="15" name="TextBox 14"/>
           <p:cNvSpPr txBox="1"/>
           <p:nvPr/>
         </p:nvSpPr>
         <p:spPr>
           <a:xfrm>
-            <a:off x="2255824" y="2980944"/>
-            <a:ext cx="384048" cy="365760"/>
+            <a:off x="1234440" y="3099815"/>
+            <a:ext cx="2377440" cy="502920"/>
           </a:xfrm>
           <a:prstGeom prst="rect">
             <a:avLst/>
@@ -4044,33 +3914,33 @@
           </a:bodyPr>
           <a:lstStyle/>
           <a:p>
-            <a:pPr algn="ctr">
+            <a:pPr algn="r">
               <a:spcAft>
                 <a:spcPts val="1000"/>
               </a:spcAft>
             </a:pPr>
             <a:r>
-              <a:rPr sz="1600" b="1">
-                <a:solidFill>
-                  <a:srgbClr val="FFFFFF"/>
+              <a:rPr sz="2200" b="1">
+                <a:solidFill>
+                  <a:srgbClr val="784696"/>
                 </a:solidFill>
                 <a:latin typeface="Microsoft YaHei"/>
               </a:rPr>
-              <a:t>3</a:t>
-            </a:r>
-          </a:p>
-        </p:txBody>
-      </p:sp>
-      <p:sp>
-        <p:nvSpPr>
-          <p:cNvPr id="19" name="TextBox 18"/>
+              <a:t>本文特点</a:t>
+            </a:r>
+          </a:p>
+        </p:txBody>
+      </p:sp>
+      <p:sp>
+        <p:nvSpPr>
+          <p:cNvPr id="16" name="TextBox 15"/>
           <p:cNvSpPr txBox="1"/>
           <p:nvPr/>
         </p:nvSpPr>
         <p:spPr>
           <a:xfrm>
-            <a:off x="2758744" y="2944368"/>
-            <a:ext cx="7772400" cy="502920"/>
+            <a:off x="3749039" y="3099815"/>
+            <a:ext cx="7589520" cy="594360"/>
           </a:xfrm>
           <a:prstGeom prst="rect">
             <a:avLst/>
@@ -4089,13 +3959,91 @@
               </a:spcAft>
             </a:pPr>
             <a:r>
-              <a:rPr sz="2400" b="0">
+              <a:rPr sz="2200" b="0">
                 <a:solidFill>
                   <a:srgbClr val="3C2850"/>
                 </a:solidFill>
                 <a:latin typeface="Microsoft YaHei"/>
               </a:rPr>
-              <a:t>探究「真话为何难以说出口」，树立独立判断</a:t>
+              <a:t>以「新装」为线索，写一个荒唐的骗局</a:t>
+            </a:r>
+          </a:p>
+        </p:txBody>
+      </p:sp>
+      <p:sp>
+        <p:nvSpPr>
+          <p:cNvPr id="17" name="TextBox 16"/>
+          <p:cNvSpPr txBox="1"/>
+          <p:nvPr/>
+        </p:nvSpPr>
+        <p:spPr>
+          <a:xfrm>
+            <a:off x="1234440" y="3758184"/>
+            <a:ext cx="2377440" cy="502920"/>
+          </a:xfrm>
+          <a:prstGeom prst="rect">
+            <a:avLst/>
+          </a:prstGeom>
+          <a:noFill/>
+        </p:spPr>
+        <p:txBody>
+          <a:bodyPr wrap="none">
+            <a:spAutoFit/>
+          </a:bodyPr>
+          <a:lstStyle/>
+          <a:p>
+            <a:pPr algn="r">
+              <a:spcAft>
+                <a:spcPts val="1000"/>
+              </a:spcAft>
+            </a:pPr>
+            <a:r>
+              <a:rPr sz="2200" b="1">
+                <a:solidFill>
+                  <a:srgbClr val="784696"/>
+                </a:solidFill>
+                <a:latin typeface="Microsoft YaHei"/>
+              </a:rPr>
+              <a:t>核心问题</a:t>
+            </a:r>
+          </a:p>
+        </p:txBody>
+      </p:sp>
+      <p:sp>
+        <p:nvSpPr>
+          <p:cNvPr id="18" name="TextBox 17"/>
+          <p:cNvSpPr txBox="1"/>
+          <p:nvPr/>
+        </p:nvSpPr>
+        <p:spPr>
+          <a:xfrm>
+            <a:off x="3749039" y="3758184"/>
+            <a:ext cx="7589520" cy="594360"/>
+          </a:xfrm>
+          <a:prstGeom prst="rect">
+            <a:avLst/>
+          </a:prstGeom>
+          <a:noFill/>
+        </p:spPr>
+        <p:txBody>
+          <a:bodyPr wrap="none">
+            <a:spAutoFit/>
+          </a:bodyPr>
+          <a:lstStyle/>
+          <a:p>
+            <a:pPr algn="l">
+              <a:spcAft>
+                <a:spcPts val="1000"/>
+              </a:spcAft>
+            </a:pPr>
+            <a:r>
+              <a:rPr sz="2200" b="0">
+                <a:solidFill>
+                  <a:srgbClr val="3C2850"/>
+                </a:solidFill>
+                <a:latin typeface="Microsoft YaHei"/>
+              </a:rPr>
+              <a:t>为什么人们都不敢说自己看不见？</a:t>
             </a:r>
           </a:p>
         </p:txBody>
@@ -4241,7 +4189,7 @@
         </p:nvSpPr>
         <p:spPr>
           <a:xfrm>
-            <a:off x="4953304" y="1005840"/>
+            <a:off x="4953304" y="502920"/>
             <a:ext cx="2286000" cy="411480"/>
           </a:xfrm>
           <a:prstGeom prst="roundRect">
@@ -4284,7 +4232,7 @@
         </p:nvSpPr>
         <p:spPr>
           <a:xfrm>
-            <a:off x="4953304" y="1024128"/>
+            <a:off x="4953304" y="521208"/>
             <a:ext cx="2286000" cy="384048"/>
           </a:xfrm>
           <a:prstGeom prst="rect">
@@ -4310,7 +4258,7 @@
                 </a:solidFill>
                 <a:latin typeface="Microsoft YaHei"/>
               </a:rPr>
-              <a:t>想一想</a:t>
+              <a:t>情节笔记</a:t>
             </a:r>
           </a:p>
         </p:txBody>
@@ -4323,7 +4271,7 @@
         </p:nvSpPr>
         <p:spPr>
           <a:xfrm>
-            <a:off x="1371600" y="1600200"/>
+            <a:off x="1371600" y="960120"/>
             <a:ext cx="9418320" cy="822960"/>
           </a:xfrm>
           <a:prstGeom prst="rect">
@@ -4343,14 +4291,13 @@
               </a:spcAft>
             </a:pPr>
             <a:r>
-              <a:rPr sz="3200" b="1">
+              <a:rPr sz="3400" b="1">
                 <a:solidFill>
                   <a:srgbClr val="784696"/>
                 </a:solidFill>
                 <a:latin typeface="Microsoft YaHei"/>
               </a:rPr>
-              <a:t>爱新衣的皇帝、织空布的骗子
-不敢说真话的大人、说真话的孩子</a:t>
+              <a:t>情节结构</a:t>
             </a:r>
           </a:p>
         </p:txBody>
@@ -4363,7 +4310,7 @@
         </p:nvSpPr>
         <p:spPr>
           <a:xfrm>
-            <a:off x="3200400" y="4389120"/>
+            <a:off x="3200400" y="1600200"/>
             <a:ext cx="5760720" cy="27432"/>
           </a:xfrm>
           <a:prstGeom prst="rect">
@@ -4400,14 +4347,59 @@
       </p:sp>
       <p:sp>
         <p:nvSpPr>
-          <p:cNvPr id="10" name="TextBox 9"/>
+          <p:cNvPr id="10" name="Rounded Rectangle 9"/>
+          <p:cNvSpPr/>
+          <p:nvPr/>
+        </p:nvSpPr>
+        <p:spPr>
+          <a:xfrm>
+            <a:off x="1158544" y="1645920"/>
+            <a:ext cx="9875520" cy="2953512"/>
+          </a:xfrm>
+          <a:prstGeom prst="roundRect">
+            <a:avLst/>
+          </a:prstGeom>
+          <a:solidFill>
+            <a:srgbClr val="FCF8FF"/>
+          </a:solidFill>
+          <a:ln w="19050">
+            <a:solidFill>
+              <a:srgbClr val="C8AADC"/>
+            </a:solidFill>
+          </a:ln>
+        </p:spPr>
+        <p:style>
+          <a:lnRef idx="1">
+            <a:schemeClr val="accent1"/>
+          </a:lnRef>
+          <a:fillRef idx="3">
+            <a:schemeClr val="accent1"/>
+          </a:fillRef>
+          <a:effectRef idx="2">
+            <a:schemeClr val="accent1"/>
+          </a:effectRef>
+          <a:fontRef idx="minor">
+            <a:schemeClr val="lt1"/>
+          </a:fontRef>
+        </p:style>
+        <p:txBody>
+          <a:bodyPr rtlCol="0" anchor="ctr"/>
+          <a:lstStyle/>
+          <a:p>
+            <a:pPr algn="ctr"/>
+          </a:p>
+        </p:txBody>
+      </p:sp>
+      <p:sp>
+        <p:nvSpPr>
+          <p:cNvPr id="11" name="TextBox 10"/>
           <p:cNvSpPr txBox="1"/>
           <p:nvPr/>
         </p:nvSpPr>
         <p:spPr>
           <a:xfrm>
-            <a:off x="1828800" y="4663440"/>
-            <a:ext cx="8503920" cy="914400"/>
+            <a:off x="1234440" y="1783080"/>
+            <a:ext cx="2377440" cy="502920"/>
           </a:xfrm>
           <a:prstGeom prst="rect">
             <a:avLst/>
@@ -4420,19 +4412,292 @@
           </a:bodyPr>
           <a:lstStyle/>
           <a:p>
-            <a:pPr algn="ctr">
+            <a:pPr algn="r">
               <a:spcAft>
                 <a:spcPts val="1000"/>
               </a:spcAft>
             </a:pPr>
             <a:r>
-              <a:rPr sz="2200" b="0">
+              <a:rPr sz="2200" b="1">
                 <a:solidFill>
                   <a:srgbClr val="784696"/>
                 </a:solidFill>
                 <a:latin typeface="Microsoft YaHei"/>
               </a:rPr>
-              <a:t>闹剧背后，藏着怎样的真相？</a:t>
+              <a:t>开端</a:t>
+            </a:r>
+          </a:p>
+        </p:txBody>
+      </p:sp>
+      <p:sp>
+        <p:nvSpPr>
+          <p:cNvPr id="12" name="TextBox 11"/>
+          <p:cNvSpPr txBox="1"/>
+          <p:nvPr/>
+        </p:nvSpPr>
+        <p:spPr>
+          <a:xfrm>
+            <a:off x="3749039" y="1783080"/>
+            <a:ext cx="7589520" cy="594360"/>
+          </a:xfrm>
+          <a:prstGeom prst="rect">
+            <a:avLst/>
+          </a:prstGeom>
+          <a:noFill/>
+        </p:spPr>
+        <p:txBody>
+          <a:bodyPr wrap="none">
+            <a:spAutoFit/>
+          </a:bodyPr>
+          <a:lstStyle/>
+          <a:p>
+            <a:pPr algn="l">
+              <a:spcAft>
+                <a:spcPts val="1000"/>
+              </a:spcAft>
+            </a:pPr>
+            <a:r>
+              <a:rPr sz="2200" b="0">
+                <a:solidFill>
+                  <a:srgbClr val="3C2850"/>
+                </a:solidFill>
+                <a:latin typeface="Microsoft YaHei"/>
+              </a:rPr>
+              <a:t>两个骗子说能织出只有聪明人才能看见的衣服</a:t>
+            </a:r>
+          </a:p>
+        </p:txBody>
+      </p:sp>
+      <p:sp>
+        <p:nvSpPr>
+          <p:cNvPr id="13" name="TextBox 12"/>
+          <p:cNvSpPr txBox="1"/>
+          <p:nvPr/>
+        </p:nvSpPr>
+        <p:spPr>
+          <a:xfrm>
+            <a:off x="1234440" y="2441448"/>
+            <a:ext cx="2377440" cy="502920"/>
+          </a:xfrm>
+          <a:prstGeom prst="rect">
+            <a:avLst/>
+          </a:prstGeom>
+          <a:noFill/>
+        </p:spPr>
+        <p:txBody>
+          <a:bodyPr wrap="none">
+            <a:spAutoFit/>
+          </a:bodyPr>
+          <a:lstStyle/>
+          <a:p>
+            <a:pPr algn="r">
+              <a:spcAft>
+                <a:spcPts val="1000"/>
+              </a:spcAft>
+            </a:pPr>
+            <a:r>
+              <a:rPr sz="2200" b="1">
+                <a:solidFill>
+                  <a:srgbClr val="784696"/>
+                </a:solidFill>
+                <a:latin typeface="Microsoft YaHei"/>
+              </a:rPr>
+              <a:t>发展</a:t>
+            </a:r>
+          </a:p>
+        </p:txBody>
+      </p:sp>
+      <p:sp>
+        <p:nvSpPr>
+          <p:cNvPr id="14" name="TextBox 13"/>
+          <p:cNvSpPr txBox="1"/>
+          <p:nvPr/>
+        </p:nvSpPr>
+        <p:spPr>
+          <a:xfrm>
+            <a:off x="3749039" y="2441448"/>
+            <a:ext cx="7589520" cy="594360"/>
+          </a:xfrm>
+          <a:prstGeom prst="rect">
+            <a:avLst/>
+          </a:prstGeom>
+          <a:noFill/>
+        </p:spPr>
+        <p:txBody>
+          <a:bodyPr wrap="none">
+            <a:spAutoFit/>
+          </a:bodyPr>
+          <a:lstStyle/>
+          <a:p>
+            <a:pPr algn="l">
+              <a:spcAft>
+                <a:spcPts val="1000"/>
+              </a:spcAft>
+            </a:pPr>
+            <a:r>
+              <a:rPr sz="2200" b="0">
+                <a:solidFill>
+                  <a:srgbClr val="3C2850"/>
+                </a:solidFill>
+                <a:latin typeface="Microsoft YaHei"/>
+              </a:rPr>
+              <a:t>皇帝、老大臣、官员先后「看布」，都不敢说真话</a:t>
+            </a:r>
+          </a:p>
+        </p:txBody>
+      </p:sp>
+      <p:sp>
+        <p:nvSpPr>
+          <p:cNvPr id="15" name="TextBox 14"/>
+          <p:cNvSpPr txBox="1"/>
+          <p:nvPr/>
+        </p:nvSpPr>
+        <p:spPr>
+          <a:xfrm>
+            <a:off x="1234440" y="3099815"/>
+            <a:ext cx="2377440" cy="502920"/>
+          </a:xfrm>
+          <a:prstGeom prst="rect">
+            <a:avLst/>
+          </a:prstGeom>
+          <a:noFill/>
+        </p:spPr>
+        <p:txBody>
+          <a:bodyPr wrap="none">
+            <a:spAutoFit/>
+          </a:bodyPr>
+          <a:lstStyle/>
+          <a:p>
+            <a:pPr algn="r">
+              <a:spcAft>
+                <a:spcPts val="1000"/>
+              </a:spcAft>
+            </a:pPr>
+            <a:r>
+              <a:rPr sz="2200" b="1">
+                <a:solidFill>
+                  <a:srgbClr val="784696"/>
+                </a:solidFill>
+                <a:latin typeface="Microsoft YaHei"/>
+              </a:rPr>
+              <a:t>高潮</a:t>
+            </a:r>
+          </a:p>
+        </p:txBody>
+      </p:sp>
+      <p:sp>
+        <p:nvSpPr>
+          <p:cNvPr id="16" name="TextBox 15"/>
+          <p:cNvSpPr txBox="1"/>
+          <p:nvPr/>
+        </p:nvSpPr>
+        <p:spPr>
+          <a:xfrm>
+            <a:off x="3749039" y="3099815"/>
+            <a:ext cx="7589520" cy="594360"/>
+          </a:xfrm>
+          <a:prstGeom prst="rect">
+            <a:avLst/>
+          </a:prstGeom>
+          <a:noFill/>
+        </p:spPr>
+        <p:txBody>
+          <a:bodyPr wrap="none">
+            <a:spAutoFit/>
+          </a:bodyPr>
+          <a:lstStyle/>
+          <a:p>
+            <a:pPr algn="l">
+              <a:spcAft>
+                <a:spcPts val="1000"/>
+              </a:spcAft>
+            </a:pPr>
+            <a:r>
+              <a:rPr sz="2200" b="0">
+                <a:solidFill>
+                  <a:srgbClr val="3C2850"/>
+                </a:solidFill>
+                <a:latin typeface="Microsoft YaHei"/>
+              </a:rPr>
+              <a:t>皇帝穿上「新装」游行，百姓假装看见</a:t>
+            </a:r>
+          </a:p>
+        </p:txBody>
+      </p:sp>
+      <p:sp>
+        <p:nvSpPr>
+          <p:cNvPr id="17" name="TextBox 16"/>
+          <p:cNvSpPr txBox="1"/>
+          <p:nvPr/>
+        </p:nvSpPr>
+        <p:spPr>
+          <a:xfrm>
+            <a:off x="1234440" y="3758184"/>
+            <a:ext cx="2377440" cy="502920"/>
+          </a:xfrm>
+          <a:prstGeom prst="rect">
+            <a:avLst/>
+          </a:prstGeom>
+          <a:noFill/>
+        </p:spPr>
+        <p:txBody>
+          <a:bodyPr wrap="none">
+            <a:spAutoFit/>
+          </a:bodyPr>
+          <a:lstStyle/>
+          <a:p>
+            <a:pPr algn="r">
+              <a:spcAft>
+                <a:spcPts val="1000"/>
+              </a:spcAft>
+            </a:pPr>
+            <a:r>
+              <a:rPr sz="2200" b="1">
+                <a:solidFill>
+                  <a:srgbClr val="784696"/>
+                </a:solidFill>
+                <a:latin typeface="Microsoft YaHei"/>
+              </a:rPr>
+              <a:t>结局</a:t>
+            </a:r>
+          </a:p>
+        </p:txBody>
+      </p:sp>
+      <p:sp>
+        <p:nvSpPr>
+          <p:cNvPr id="18" name="TextBox 17"/>
+          <p:cNvSpPr txBox="1"/>
+          <p:nvPr/>
+        </p:nvSpPr>
+        <p:spPr>
+          <a:xfrm>
+            <a:off x="3749039" y="3758184"/>
+            <a:ext cx="7589520" cy="594360"/>
+          </a:xfrm>
+          <a:prstGeom prst="rect">
+            <a:avLst/>
+          </a:prstGeom>
+          <a:noFill/>
+        </p:spPr>
+        <p:txBody>
+          <a:bodyPr wrap="none">
+            <a:spAutoFit/>
+          </a:bodyPr>
+          <a:lstStyle/>
+          <a:p>
+            <a:pPr algn="l">
+              <a:spcAft>
+                <a:spcPts val="1000"/>
+              </a:spcAft>
+            </a:pPr>
+            <a:r>
+              <a:rPr sz="2200" b="0">
+                <a:solidFill>
+                  <a:srgbClr val="3C2850"/>
+                </a:solidFill>
+                <a:latin typeface="Microsoft YaHei"/>
+              </a:rPr>
+              <a:t>小孩子说「他没穿衣服」，百姓跟着说，皇帝仍装模作样</a:t>
             </a:r>
           </a:p>
         </p:txBody>
@@ -4647,7 +4912,7 @@
                 </a:solidFill>
                 <a:latin typeface="Microsoft YaHei"/>
               </a:rPr>
-              <a:t>画流程图</a:t>
+              <a:t>手法笔记</a:t>
             </a:r>
           </a:p>
         </p:txBody>
@@ -4680,13 +4945,13 @@
               </a:spcAft>
             </a:pPr>
             <a:r>
-              <a:rPr sz="3600" b="1">
+              <a:rPr sz="3400" b="1">
                 <a:solidFill>
                   <a:srgbClr val="784696"/>
                 </a:solidFill>
                 <a:latin typeface="Microsoft YaHei"/>
               </a:rPr>
-              <a:t>学习任务一</a:t>
+              <a:t>艺术手法</a:t>
             </a:r>
           </a:p>
         </p:txBody>
@@ -4742,8 +5007,8 @@
         </p:nvSpPr>
         <p:spPr>
           <a:xfrm>
-            <a:off x="1295704" y="1645920"/>
-            <a:ext cx="9601200" cy="2240280"/>
+            <a:off x="1158544" y="1645920"/>
+            <a:ext cx="9875520" cy="2953512"/>
           </a:xfrm>
           <a:prstGeom prst="roundRect">
             <a:avLst/>
@@ -4781,57 +5046,14 @@
       </p:sp>
       <p:sp>
         <p:nvSpPr>
-          <p:cNvPr id="11" name="Oval 10"/>
-          <p:cNvSpPr/>
-          <p:nvPr/>
-        </p:nvSpPr>
-        <p:spPr>
-          <a:xfrm>
-            <a:off x="2255824" y="1828800"/>
-            <a:ext cx="384048" cy="384048"/>
-          </a:xfrm>
-          <a:prstGeom prst="ellipse">
-            <a:avLst/>
-          </a:prstGeom>
-          <a:solidFill>
-            <a:srgbClr val="784696"/>
-          </a:solidFill>
-          <a:ln>
-            <a:noFill/>
-          </a:ln>
-        </p:spPr>
-        <p:style>
-          <a:lnRef idx="1">
-            <a:schemeClr val="accent1"/>
-          </a:lnRef>
-          <a:fillRef idx="3">
-            <a:schemeClr val="accent1"/>
-          </a:fillRef>
-          <a:effectRef idx="2">
-            <a:schemeClr val="accent1"/>
-          </a:effectRef>
-          <a:fontRef idx="minor">
-            <a:schemeClr val="lt1"/>
-          </a:fontRef>
-        </p:style>
-        <p:txBody>
-          <a:bodyPr rtlCol="0" anchor="ctr"/>
-          <a:lstStyle/>
-          <a:p>
-            <a:pPr algn="ctr"/>
-          </a:p>
-        </p:txBody>
-      </p:sp>
-      <p:sp>
-        <p:nvSpPr>
-          <p:cNvPr id="12" name="TextBox 11"/>
+          <p:cNvPr id="11" name="TextBox 10"/>
           <p:cNvSpPr txBox="1"/>
           <p:nvPr/>
         </p:nvSpPr>
         <p:spPr>
           <a:xfrm>
-            <a:off x="2255824" y="1847088"/>
-            <a:ext cx="384048" cy="365760"/>
+            <a:off x="1234440" y="1783080"/>
+            <a:ext cx="2377440" cy="502920"/>
           </a:xfrm>
           <a:prstGeom prst="rect">
             <a:avLst/>
@@ -4844,33 +5066,33 @@
           </a:bodyPr>
           <a:lstStyle/>
           <a:p>
-            <a:pPr algn="ctr">
+            <a:pPr algn="r">
               <a:spcAft>
                 <a:spcPts val="1000"/>
               </a:spcAft>
             </a:pPr>
             <a:r>
-              <a:rPr sz="1600" b="1">
-                <a:solidFill>
-                  <a:srgbClr val="FFFFFF"/>
+              <a:rPr sz="2200" b="1">
+                <a:solidFill>
+                  <a:srgbClr val="784696"/>
                 </a:solidFill>
                 <a:latin typeface="Microsoft YaHei"/>
               </a:rPr>
-              <a:t>1</a:t>
-            </a:r>
-          </a:p>
-        </p:txBody>
-      </p:sp>
-      <p:sp>
-        <p:nvSpPr>
-          <p:cNvPr id="13" name="TextBox 12"/>
+              <a:t>夸张</a:t>
+            </a:r>
+          </a:p>
+        </p:txBody>
+      </p:sp>
+      <p:sp>
+        <p:nvSpPr>
+          <p:cNvPr id="12" name="TextBox 11"/>
           <p:cNvSpPr txBox="1"/>
           <p:nvPr/>
         </p:nvSpPr>
         <p:spPr>
           <a:xfrm>
-            <a:off x="2758744" y="1810512"/>
-            <a:ext cx="7772400" cy="502920"/>
+            <a:off x="3749039" y="1783080"/>
+            <a:ext cx="7589520" cy="594360"/>
           </a:xfrm>
           <a:prstGeom prst="rect">
             <a:avLst/>
@@ -4889,70 +5111,27 @@
               </a:spcAft>
             </a:pPr>
             <a:r>
-              <a:rPr sz="2400" b="0">
+              <a:rPr sz="2200" b="0">
                 <a:solidFill>
                   <a:srgbClr val="3C2850"/>
                 </a:solidFill>
                 <a:latin typeface="Microsoft YaHei"/>
               </a:rPr>
-              <a:t>快速阅读，每读完一段记下「谁做了什么」</a:t>
-            </a:r>
-          </a:p>
-        </p:txBody>
-      </p:sp>
-      <p:sp>
-        <p:nvSpPr>
-          <p:cNvPr id="14" name="Oval 13"/>
-          <p:cNvSpPr/>
-          <p:nvPr/>
-        </p:nvSpPr>
-        <p:spPr>
-          <a:xfrm>
-            <a:off x="2255824" y="2395728"/>
-            <a:ext cx="384048" cy="384048"/>
-          </a:xfrm>
-          <a:prstGeom prst="ellipse">
-            <a:avLst/>
-          </a:prstGeom>
-          <a:solidFill>
-            <a:srgbClr val="784696"/>
-          </a:solidFill>
-          <a:ln>
-            <a:noFill/>
-          </a:ln>
-        </p:spPr>
-        <p:style>
-          <a:lnRef idx="1">
-            <a:schemeClr val="accent1"/>
-          </a:lnRef>
-          <a:fillRef idx="3">
-            <a:schemeClr val="accent1"/>
-          </a:fillRef>
-          <a:effectRef idx="2">
-            <a:schemeClr val="accent1"/>
-          </a:effectRef>
-          <a:fontRef idx="minor">
-            <a:schemeClr val="lt1"/>
-          </a:fontRef>
-        </p:style>
-        <p:txBody>
-          <a:bodyPr rtlCol="0" anchor="ctr"/>
-          <a:lstStyle/>
-          <a:p>
-            <a:pPr algn="ctr"/>
-          </a:p>
-        </p:txBody>
-      </p:sp>
-      <p:sp>
-        <p:nvSpPr>
-          <p:cNvPr id="15" name="TextBox 14"/>
+              <a:t>把皇帝爱新衣写到极致：「除非为了炫耀新衣服」</a:t>
+            </a:r>
+          </a:p>
+        </p:txBody>
+      </p:sp>
+      <p:sp>
+        <p:nvSpPr>
+          <p:cNvPr id="13" name="TextBox 12"/>
           <p:cNvSpPr txBox="1"/>
           <p:nvPr/>
         </p:nvSpPr>
         <p:spPr>
           <a:xfrm>
-            <a:off x="2255824" y="2414016"/>
-            <a:ext cx="384048" cy="365760"/>
+            <a:off x="1234440" y="2441448"/>
+            <a:ext cx="2377440" cy="502920"/>
           </a:xfrm>
           <a:prstGeom prst="rect">
             <a:avLst/>
@@ -4965,33 +5144,33 @@
           </a:bodyPr>
           <a:lstStyle/>
           <a:p>
-            <a:pPr algn="ctr">
+            <a:pPr algn="r">
               <a:spcAft>
                 <a:spcPts val="1000"/>
               </a:spcAft>
             </a:pPr>
             <a:r>
-              <a:rPr sz="1600" b="1">
-                <a:solidFill>
-                  <a:srgbClr val="FFFFFF"/>
+              <a:rPr sz="2200" b="1">
+                <a:solidFill>
+                  <a:srgbClr val="784696"/>
                 </a:solidFill>
                 <a:latin typeface="Microsoft YaHei"/>
               </a:rPr>
-              <a:t>2</a:t>
-            </a:r>
-          </a:p>
-        </p:txBody>
-      </p:sp>
-      <p:sp>
-        <p:nvSpPr>
-          <p:cNvPr id="16" name="TextBox 15"/>
+              <a:t>反讽</a:t>
+            </a:r>
+          </a:p>
+        </p:txBody>
+      </p:sp>
+      <p:sp>
+        <p:nvSpPr>
+          <p:cNvPr id="14" name="TextBox 13"/>
           <p:cNvSpPr txBox="1"/>
           <p:nvPr/>
         </p:nvSpPr>
         <p:spPr>
           <a:xfrm>
-            <a:off x="2758744" y="2377440"/>
-            <a:ext cx="7772400" cy="502920"/>
+            <a:off x="3749039" y="2441448"/>
+            <a:ext cx="7589520" cy="594360"/>
           </a:xfrm>
           <a:prstGeom prst="rect">
             <a:avLst/>
@@ -5010,70 +5189,27 @@
               </a:spcAft>
             </a:pPr>
             <a:r>
-              <a:rPr sz="2400" b="0">
+              <a:rPr sz="2200" b="0">
                 <a:solidFill>
                   <a:srgbClr val="3C2850"/>
                 </a:solidFill>
                 <a:latin typeface="Microsoft YaHei"/>
               </a:rPr>
-              <a:t>用箭头串联骗局全过程</a:t>
-            </a:r>
-          </a:p>
-        </p:txBody>
-      </p:sp>
-      <p:sp>
-        <p:nvSpPr>
-          <p:cNvPr id="17" name="Oval 16"/>
-          <p:cNvSpPr/>
-          <p:nvPr/>
-        </p:nvSpPr>
-        <p:spPr>
-          <a:xfrm>
-            <a:off x="2255824" y="2962656"/>
-            <a:ext cx="384048" cy="384048"/>
-          </a:xfrm>
-          <a:prstGeom prst="ellipse">
-            <a:avLst/>
-          </a:prstGeom>
-          <a:solidFill>
-            <a:srgbClr val="784696"/>
-          </a:solidFill>
-          <a:ln>
-            <a:noFill/>
-          </a:ln>
-        </p:spPr>
-        <p:style>
-          <a:lnRef idx="1">
-            <a:schemeClr val="accent1"/>
-          </a:lnRef>
-          <a:fillRef idx="3">
-            <a:schemeClr val="accent1"/>
-          </a:fillRef>
-          <a:effectRef idx="2">
-            <a:schemeClr val="accent1"/>
-          </a:effectRef>
-          <a:fontRef idx="minor">
-            <a:schemeClr val="lt1"/>
-          </a:fontRef>
-        </p:style>
-        <p:txBody>
-          <a:bodyPr rtlCol="0" anchor="ctr"/>
-          <a:lstStyle/>
-          <a:p>
-            <a:pPr algn="ctr"/>
-          </a:p>
-        </p:txBody>
-      </p:sp>
-      <p:sp>
-        <p:nvSpPr>
-          <p:cNvPr id="18" name="TextBox 17"/>
+              <a:t>说「看见了」其实什么也没看见，讽刺虚伪</a:t>
+            </a:r>
+          </a:p>
+        </p:txBody>
+      </p:sp>
+      <p:sp>
+        <p:nvSpPr>
+          <p:cNvPr id="15" name="TextBox 14"/>
           <p:cNvSpPr txBox="1"/>
           <p:nvPr/>
         </p:nvSpPr>
         <p:spPr>
           <a:xfrm>
-            <a:off x="2255824" y="2980944"/>
-            <a:ext cx="384048" cy="365760"/>
+            <a:off x="1234440" y="3099815"/>
+            <a:ext cx="2377440" cy="502920"/>
           </a:xfrm>
           <a:prstGeom prst="rect">
             <a:avLst/>
@@ -5086,33 +5222,33 @@
           </a:bodyPr>
           <a:lstStyle/>
           <a:p>
-            <a:pPr algn="ctr">
+            <a:pPr algn="r">
               <a:spcAft>
                 <a:spcPts val="1000"/>
               </a:spcAft>
             </a:pPr>
             <a:r>
-              <a:rPr sz="1600" b="1">
-                <a:solidFill>
-                  <a:srgbClr val="FFFFFF"/>
+              <a:rPr sz="2200" b="1">
+                <a:solidFill>
+                  <a:srgbClr val="784696"/>
                 </a:solidFill>
                 <a:latin typeface="Microsoft YaHei"/>
               </a:rPr>
-              <a:t>3</a:t>
-            </a:r>
-          </a:p>
-        </p:txBody>
-      </p:sp>
-      <p:sp>
-        <p:nvSpPr>
-          <p:cNvPr id="19" name="TextBox 18"/>
+              <a:t>对比</a:t>
+            </a:r>
+          </a:p>
+        </p:txBody>
+      </p:sp>
+      <p:sp>
+        <p:nvSpPr>
+          <p:cNvPr id="16" name="TextBox 15"/>
           <p:cNvSpPr txBox="1"/>
           <p:nvPr/>
         </p:nvSpPr>
         <p:spPr>
           <a:xfrm>
-            <a:off x="2758744" y="2944368"/>
-            <a:ext cx="7772400" cy="502920"/>
+            <a:off x="3749039" y="3099815"/>
+            <a:ext cx="7589520" cy="594360"/>
           </a:xfrm>
           <a:prstGeom prst="rect">
             <a:avLst/>
@@ -5131,13 +5267,91 @@
               </a:spcAft>
             </a:pPr>
             <a:r>
-              <a:rPr sz="2400" b="0">
+              <a:rPr sz="2200" b="0">
                 <a:solidFill>
                   <a:srgbClr val="3C2850"/>
                 </a:solidFill>
                 <a:latin typeface="Microsoft YaHei"/>
               </a:rPr>
-              <a:t>骗子谎言 → 大臣附和 → 游行 → 孩子说真话</a:t>
+              <a:t>大人的怯懦 vs 孩子的天真诚实</a:t>
+            </a:r>
+          </a:p>
+        </p:txBody>
+      </p:sp>
+      <p:sp>
+        <p:nvSpPr>
+          <p:cNvPr id="17" name="TextBox 16"/>
+          <p:cNvSpPr txBox="1"/>
+          <p:nvPr/>
+        </p:nvSpPr>
+        <p:spPr>
+          <a:xfrm>
+            <a:off x="1234440" y="3758184"/>
+            <a:ext cx="2377440" cy="502920"/>
+          </a:xfrm>
+          <a:prstGeom prst="rect">
+            <a:avLst/>
+          </a:prstGeom>
+          <a:noFill/>
+        </p:spPr>
+        <p:txBody>
+          <a:bodyPr wrap="none">
+            <a:spAutoFit/>
+          </a:bodyPr>
+          <a:lstStyle/>
+          <a:p>
+            <a:pPr algn="r">
+              <a:spcAft>
+                <a:spcPts val="1000"/>
+              </a:spcAft>
+            </a:pPr>
+            <a:r>
+              <a:rPr sz="2200" b="1">
+                <a:solidFill>
+                  <a:srgbClr val="784696"/>
+                </a:solidFill>
+                <a:latin typeface="Microsoft YaHei"/>
+              </a:rPr>
+              <a:t>反复</a:t>
+            </a:r>
+          </a:p>
+        </p:txBody>
+      </p:sp>
+      <p:sp>
+        <p:nvSpPr>
+          <p:cNvPr id="18" name="TextBox 17"/>
+          <p:cNvSpPr txBox="1"/>
+          <p:nvPr/>
+        </p:nvSpPr>
+        <p:spPr>
+          <a:xfrm>
+            <a:off x="3749039" y="3758184"/>
+            <a:ext cx="7589520" cy="594360"/>
+          </a:xfrm>
+          <a:prstGeom prst="rect">
+            <a:avLst/>
+          </a:prstGeom>
+          <a:noFill/>
+        </p:spPr>
+        <p:txBody>
+          <a:bodyPr wrap="none">
+            <a:spAutoFit/>
+          </a:bodyPr>
+          <a:lstStyle/>
+          <a:p>
+            <a:pPr algn="l">
+              <a:spcAft>
+                <a:spcPts val="1000"/>
+              </a:spcAft>
+            </a:pPr>
+            <a:r>
+              <a:rPr sz="2200" b="0">
+                <a:solidFill>
+                  <a:srgbClr val="3C2850"/>
+                </a:solidFill>
+                <a:latin typeface="Microsoft YaHei"/>
+              </a:rPr>
+              <a:t>「我什么也没有看见」反复出现，强化讽刺效果</a:t>
             </a:r>
           </a:p>
         </p:txBody>
@@ -5352,7 +5566,7 @@
                 </a:solidFill>
                 <a:latin typeface="Microsoft YaHei"/>
               </a:rPr>
-              <a:t>拆心理机关</a:t>
+              <a:t>主题笔记</a:t>
             </a:r>
           </a:p>
         </p:txBody>
@@ -5385,13 +5599,13 @@
               </a:spcAft>
             </a:pPr>
             <a:r>
-              <a:rPr sz="3600" b="1">
+              <a:rPr sz="3400" b="1">
                 <a:solidFill>
                   <a:srgbClr val="784696"/>
                 </a:solidFill>
                 <a:latin typeface="Microsoft YaHei"/>
               </a:rPr>
-              <a:t>学习任务二</a:t>
+              <a:t>主题理解</a:t>
             </a:r>
           </a:p>
         </p:txBody>
@@ -5447,8 +5661,8 @@
         </p:nvSpPr>
         <p:spPr>
           <a:xfrm>
-            <a:off x="1295704" y="1645920"/>
-            <a:ext cx="9601200" cy="2240280"/>
+            <a:off x="1158544" y="1645920"/>
+            <a:ext cx="9875520" cy="2953512"/>
           </a:xfrm>
           <a:prstGeom prst="roundRect">
             <a:avLst/>
@@ -5486,57 +5700,14 @@
       </p:sp>
       <p:sp>
         <p:nvSpPr>
-          <p:cNvPr id="11" name="Oval 10"/>
-          <p:cNvSpPr/>
-          <p:nvPr/>
-        </p:nvSpPr>
-        <p:spPr>
-          <a:xfrm>
-            <a:off x="2255824" y="1828800"/>
-            <a:ext cx="384048" cy="384048"/>
-          </a:xfrm>
-          <a:prstGeom prst="ellipse">
-            <a:avLst/>
-          </a:prstGeom>
-          <a:solidFill>
-            <a:srgbClr val="784696"/>
-          </a:solidFill>
-          <a:ln>
-            <a:noFill/>
-          </a:ln>
-        </p:spPr>
-        <p:style>
-          <a:lnRef idx="1">
-            <a:schemeClr val="accent1"/>
-          </a:lnRef>
-          <a:fillRef idx="3">
-            <a:schemeClr val="accent1"/>
-          </a:fillRef>
-          <a:effectRef idx="2">
-            <a:schemeClr val="accent1"/>
-          </a:effectRef>
-          <a:fontRef idx="minor">
-            <a:schemeClr val="lt1"/>
-          </a:fontRef>
-        </p:style>
-        <p:txBody>
-          <a:bodyPr rtlCol="0" anchor="ctr"/>
-          <a:lstStyle/>
-          <a:p>
-            <a:pPr algn="ctr"/>
-          </a:p>
-        </p:txBody>
-      </p:sp>
-      <p:sp>
-        <p:nvSpPr>
-          <p:cNvPr id="12" name="TextBox 11"/>
+          <p:cNvPr id="11" name="TextBox 10"/>
           <p:cNvSpPr txBox="1"/>
           <p:nvPr/>
         </p:nvSpPr>
         <p:spPr>
           <a:xfrm>
-            <a:off x="2255824" y="1847088"/>
-            <a:ext cx="384048" cy="365760"/>
+            <a:off x="1234440" y="1783080"/>
+            <a:ext cx="2377440" cy="502920"/>
           </a:xfrm>
           <a:prstGeom prst="rect">
             <a:avLst/>
@@ -5549,33 +5720,33 @@
           </a:bodyPr>
           <a:lstStyle/>
           <a:p>
-            <a:pPr algn="ctr">
+            <a:pPr algn="r">
               <a:spcAft>
                 <a:spcPts val="1000"/>
               </a:spcAft>
             </a:pPr>
             <a:r>
-              <a:rPr sz="1600" b="1">
-                <a:solidFill>
-                  <a:srgbClr val="FFFFFF"/>
+              <a:rPr sz="2200" b="1">
+                <a:solidFill>
+                  <a:srgbClr val="784696"/>
                 </a:solidFill>
                 <a:latin typeface="Microsoft YaHei"/>
               </a:rPr>
-              <a:t>1</a:t>
-            </a:r>
-          </a:p>
-        </p:txBody>
-      </p:sp>
-      <p:sp>
-        <p:nvSpPr>
-          <p:cNvPr id="13" name="TextBox 12"/>
+              <a:t>心理机制</a:t>
+            </a:r>
+          </a:p>
+        </p:txBody>
+      </p:sp>
+      <p:sp>
+        <p:nvSpPr>
+          <p:cNvPr id="12" name="TextBox 11"/>
           <p:cNvSpPr txBox="1"/>
           <p:nvPr/>
         </p:nvSpPr>
         <p:spPr>
           <a:xfrm>
-            <a:off x="2758744" y="1810512"/>
-            <a:ext cx="7772400" cy="502920"/>
+            <a:off x="3749039" y="1783080"/>
+            <a:ext cx="7589520" cy="594360"/>
           </a:xfrm>
           <a:prstGeom prst="rect">
             <a:avLst/>
@@ -5594,70 +5765,27 @@
               </a:spcAft>
             </a:pPr>
             <a:r>
-              <a:rPr sz="2400" b="0">
+              <a:rPr sz="2200" b="0">
                 <a:solidFill>
                   <a:srgbClr val="3C2850"/>
                 </a:solidFill>
                 <a:latin typeface="Microsoft YaHei"/>
               </a:rPr>
-              <a:t>勾画老大臣、官员、皇帝的心理和语言</a:t>
-            </a:r>
-          </a:p>
-        </p:txBody>
-      </p:sp>
-      <p:sp>
-        <p:nvSpPr>
-          <p:cNvPr id="14" name="Oval 13"/>
-          <p:cNvSpPr/>
-          <p:nvPr/>
-        </p:nvSpPr>
-        <p:spPr>
-          <a:xfrm>
-            <a:off x="2255824" y="2395728"/>
-            <a:ext cx="384048" cy="384048"/>
-          </a:xfrm>
-          <a:prstGeom prst="ellipse">
-            <a:avLst/>
-          </a:prstGeom>
-          <a:solidFill>
-            <a:srgbClr val="784696"/>
-          </a:solidFill>
-          <a:ln>
-            <a:noFill/>
-          </a:ln>
-        </p:spPr>
-        <p:style>
-          <a:lnRef idx="1">
-            <a:schemeClr val="accent1"/>
-          </a:lnRef>
-          <a:fillRef idx="3">
-            <a:schemeClr val="accent1"/>
-          </a:fillRef>
-          <a:effectRef idx="2">
-            <a:schemeClr val="accent1"/>
-          </a:effectRef>
-          <a:fontRef idx="minor">
-            <a:schemeClr val="lt1"/>
-          </a:fontRef>
-        </p:style>
-        <p:txBody>
-          <a:bodyPr rtlCol="0" anchor="ctr"/>
-          <a:lstStyle/>
-          <a:p>
-            <a:pPr algn="ctr"/>
-          </a:p>
-        </p:txBody>
-      </p:sp>
-      <p:sp>
-        <p:nvSpPr>
-          <p:cNvPr id="15" name="TextBox 14"/>
+              <a:t>害怕被认为「不聪明」或「不称职」而丢失地位</a:t>
+            </a:r>
+          </a:p>
+        </p:txBody>
+      </p:sp>
+      <p:sp>
+        <p:nvSpPr>
+          <p:cNvPr id="13" name="TextBox 12"/>
           <p:cNvSpPr txBox="1"/>
           <p:nvPr/>
         </p:nvSpPr>
         <p:spPr>
           <a:xfrm>
-            <a:off x="2255824" y="2414016"/>
-            <a:ext cx="384048" cy="365760"/>
+            <a:off x="1234440" y="2441448"/>
+            <a:ext cx="2377440" cy="502920"/>
           </a:xfrm>
           <a:prstGeom prst="rect">
             <a:avLst/>
@@ -5670,33 +5798,33 @@
           </a:bodyPr>
           <a:lstStyle/>
           <a:p>
-            <a:pPr algn="ctr">
+            <a:pPr algn="r">
               <a:spcAft>
                 <a:spcPts val="1000"/>
               </a:spcAft>
             </a:pPr>
             <a:r>
-              <a:rPr sz="1600" b="1">
-                <a:solidFill>
-                  <a:srgbClr val="FFFFFF"/>
+              <a:rPr sz="2200" b="1">
+                <a:solidFill>
+                  <a:srgbClr val="784696"/>
                 </a:solidFill>
                 <a:latin typeface="Microsoft YaHei"/>
               </a:rPr>
-              <a:t>2</a:t>
-            </a:r>
-          </a:p>
-        </p:txBody>
-      </p:sp>
-      <p:sp>
-        <p:nvSpPr>
-          <p:cNvPr id="16" name="TextBox 15"/>
+              <a:t>社会批判</a:t>
+            </a:r>
+          </a:p>
+        </p:txBody>
+      </p:sp>
+      <p:sp>
+        <p:nvSpPr>
+          <p:cNvPr id="14" name="TextBox 13"/>
           <p:cNvSpPr txBox="1"/>
           <p:nvPr/>
         </p:nvSpPr>
         <p:spPr>
           <a:xfrm>
-            <a:off x="2758744" y="2377440"/>
-            <a:ext cx="7772400" cy="502920"/>
+            <a:off x="3749039" y="2441448"/>
+            <a:ext cx="7589520" cy="594360"/>
           </a:xfrm>
           <a:prstGeom prst="rect">
             <a:avLst/>
@@ -5715,70 +5843,27 @@
               </a:spcAft>
             </a:pPr>
             <a:r>
-              <a:rPr sz="2400" b="0">
+              <a:rPr sz="2200" b="0">
                 <a:solidFill>
                   <a:srgbClr val="3C2850"/>
                 </a:solidFill>
                 <a:latin typeface="Microsoft YaHei"/>
               </a:rPr>
-              <a:t>品味夸张语句的讽刺效果</a:t>
-            </a:r>
-          </a:p>
-        </p:txBody>
-      </p:sp>
-      <p:sp>
-        <p:nvSpPr>
-          <p:cNvPr id="17" name="Oval 16"/>
-          <p:cNvSpPr/>
-          <p:nvPr/>
-        </p:nvSpPr>
-        <p:spPr>
-          <a:xfrm>
-            <a:off x="2255824" y="2962656"/>
-            <a:ext cx="384048" cy="384048"/>
-          </a:xfrm>
-          <a:prstGeom prst="ellipse">
-            <a:avLst/>
-          </a:prstGeom>
-          <a:solidFill>
-            <a:srgbClr val="784696"/>
-          </a:solidFill>
-          <a:ln>
-            <a:noFill/>
-          </a:ln>
-        </p:spPr>
-        <p:style>
-          <a:lnRef idx="1">
-            <a:schemeClr val="accent1"/>
-          </a:lnRef>
-          <a:fillRef idx="3">
-            <a:schemeClr val="accent1"/>
-          </a:fillRef>
-          <a:effectRef idx="2">
-            <a:schemeClr val="accent1"/>
-          </a:effectRef>
-          <a:fontRef idx="minor">
-            <a:schemeClr val="lt1"/>
-          </a:fontRef>
-        </p:style>
-        <p:txBody>
-          <a:bodyPr rtlCol="0" anchor="ctr"/>
-          <a:lstStyle/>
-          <a:p>
-            <a:pPr algn="ctr"/>
-          </a:p>
-        </p:txBody>
-      </p:sp>
-      <p:sp>
-        <p:nvSpPr>
-          <p:cNvPr id="18" name="TextBox 17"/>
+              <a:t>讽刺盲从权威、虚伪逢迎的官场风气</a:t>
+            </a:r>
+          </a:p>
+        </p:txBody>
+      </p:sp>
+      <p:sp>
+        <p:nvSpPr>
+          <p:cNvPr id="15" name="TextBox 14"/>
           <p:cNvSpPr txBox="1"/>
           <p:nvPr/>
         </p:nvSpPr>
         <p:spPr>
           <a:xfrm>
-            <a:off x="2255824" y="2980944"/>
-            <a:ext cx="384048" cy="365760"/>
+            <a:off x="1234440" y="3099815"/>
+            <a:ext cx="2377440" cy="502920"/>
           </a:xfrm>
           <a:prstGeom prst="rect">
             <a:avLst/>
@@ -5791,33 +5876,33 @@
           </a:bodyPr>
           <a:lstStyle/>
           <a:p>
-            <a:pPr algn="ctr">
+            <a:pPr algn="r">
               <a:spcAft>
                 <a:spcPts val="1000"/>
               </a:spcAft>
             </a:pPr>
             <a:r>
-              <a:rPr sz="1600" b="1">
-                <a:solidFill>
-                  <a:srgbClr val="FFFFFF"/>
+              <a:rPr sz="2200" b="1">
+                <a:solidFill>
+                  <a:srgbClr val="784696"/>
                 </a:solidFill>
                 <a:latin typeface="Microsoft YaHei"/>
               </a:rPr>
-              <a:t>3</a:t>
-            </a:r>
-          </a:p>
-        </p:txBody>
-      </p:sp>
-      <p:sp>
-        <p:nvSpPr>
-          <p:cNvPr id="19" name="TextBox 18"/>
+              <a:t>孩子作用</a:t>
+            </a:r>
+          </a:p>
+        </p:txBody>
+      </p:sp>
+      <p:sp>
+        <p:nvSpPr>
+          <p:cNvPr id="16" name="TextBox 15"/>
           <p:cNvSpPr txBox="1"/>
           <p:nvPr/>
         </p:nvSpPr>
         <p:spPr>
           <a:xfrm>
-            <a:off x="2758744" y="2944368"/>
-            <a:ext cx="7772400" cy="502920"/>
+            <a:off x="3749039" y="3099815"/>
+            <a:ext cx="7589520" cy="594360"/>
           </a:xfrm>
           <a:prstGeom prst="rect">
             <a:avLst/>
@@ -5836,13 +5921,91 @@
               </a:spcAft>
             </a:pPr>
             <a:r>
-              <a:rPr sz="2400" b="0">
+              <a:rPr sz="2200" b="0">
                 <a:solidFill>
                   <a:srgbClr val="3C2850"/>
                 </a:solidFill>
                 <a:latin typeface="Microsoft YaHei"/>
               </a:rPr>
-              <a:t>完成人物分析卡（证据—特点—作用）</a:t>
+              <a:t>天真不受虚假规则束缚，一语道破真相</a:t>
+            </a:r>
+          </a:p>
+        </p:txBody>
+      </p:sp>
+      <p:sp>
+        <p:nvSpPr>
+          <p:cNvPr id="17" name="TextBox 16"/>
+          <p:cNvSpPr txBox="1"/>
+          <p:nvPr/>
+        </p:nvSpPr>
+        <p:spPr>
+          <a:xfrm>
+            <a:off x="1234440" y="3758184"/>
+            <a:ext cx="2377440" cy="502920"/>
+          </a:xfrm>
+          <a:prstGeom prst="rect">
+            <a:avLst/>
+          </a:prstGeom>
+          <a:noFill/>
+        </p:spPr>
+        <p:txBody>
+          <a:bodyPr wrap="none">
+            <a:spAutoFit/>
+          </a:bodyPr>
+          <a:lstStyle/>
+          <a:p>
+            <a:pPr algn="r">
+              <a:spcAft>
+                <a:spcPts val="1000"/>
+              </a:spcAft>
+            </a:pPr>
+            <a:r>
+              <a:rPr sz="2200" b="1">
+                <a:solidFill>
+                  <a:srgbClr val="784696"/>
+                </a:solidFill>
+                <a:latin typeface="Microsoft YaHei"/>
+              </a:rPr>
+              <a:t>策展主题</a:t>
+            </a:r>
+          </a:p>
+        </p:txBody>
+      </p:sp>
+      <p:sp>
+        <p:nvSpPr>
+          <p:cNvPr id="18" name="TextBox 17"/>
+          <p:cNvSpPr txBox="1"/>
+          <p:nvPr/>
+        </p:nvSpPr>
+        <p:spPr>
+          <a:xfrm>
+            <a:off x="3749039" y="3758184"/>
+            <a:ext cx="7589520" cy="594360"/>
+          </a:xfrm>
+          <a:prstGeom prst="rect">
+            <a:avLst/>
+          </a:prstGeom>
+          <a:noFill/>
+        </p:spPr>
+        <p:txBody>
+          <a:bodyPr wrap="none">
+            <a:spAutoFit/>
+          </a:bodyPr>
+          <a:lstStyle/>
+          <a:p>
+            <a:pPr algn="l">
+              <a:spcAft>
+                <a:spcPts val="1000"/>
+              </a:spcAft>
+            </a:pPr>
+            <a:r>
+              <a:rPr sz="2200" b="0">
+                <a:solidFill>
+                  <a:srgbClr val="3C2850"/>
+                </a:solidFill>
+                <a:latin typeface="Microsoft YaHei"/>
+              </a:rPr>
+              <a:t>面对虚假，要敢于说真话，不做沉默的大多数</a:t>
             </a:r>
           </a:p>
         </p:txBody>
@@ -5988,7 +6151,7 @@
         </p:nvSpPr>
         <p:spPr>
           <a:xfrm>
-            <a:off x="4953304" y="1005840"/>
+            <a:off x="4953304" y="502920"/>
             <a:ext cx="2286000" cy="411480"/>
           </a:xfrm>
           <a:prstGeom prst="roundRect">
@@ -6031,7 +6194,7 @@
         </p:nvSpPr>
         <p:spPr>
           <a:xfrm>
-            <a:off x="4953304" y="1024128"/>
+            <a:off x="4953304" y="521208"/>
             <a:ext cx="2286000" cy="384048"/>
           </a:xfrm>
           <a:prstGeom prst="rect">
@@ -6057,7 +6220,7 @@
                 </a:solidFill>
                 <a:latin typeface="Microsoft YaHei"/>
               </a:rPr>
-              <a:t>想一想</a:t>
+              <a:t>课堂活动</a:t>
             </a:r>
           </a:p>
         </p:txBody>
@@ -6070,7 +6233,7 @@
         </p:nvSpPr>
         <p:spPr>
           <a:xfrm>
-            <a:off x="1371600" y="1600200"/>
+            <a:off x="1371600" y="960120"/>
             <a:ext cx="9418320" cy="822960"/>
           </a:xfrm>
           <a:prstGeom prst="rect">
@@ -6090,13 +6253,13 @@
               </a:spcAft>
             </a:pPr>
             <a:r>
-              <a:rPr sz="3200" b="1">
+              <a:rPr sz="3600" b="1">
                 <a:solidFill>
                   <a:srgbClr val="784696"/>
                 </a:solidFill>
                 <a:latin typeface="Microsoft YaHei"/>
               </a:rPr>
-              <a:t>人们都不敢说自己看不见，这是为什么？</a:t>
+              <a:t>学习任务</a:t>
             </a:r>
           </a:p>
         </p:txBody>
@@ -6109,7 +6272,7 @@
         </p:nvSpPr>
         <p:spPr>
           <a:xfrm>
-            <a:off x="3200400" y="4389120"/>
+            <a:off x="3200400" y="1600200"/>
             <a:ext cx="5760720" cy="27432"/>
           </a:xfrm>
           <a:prstGeom prst="rect">
@@ -6146,14 +6309,102 @@
       </p:sp>
       <p:sp>
         <p:nvSpPr>
-          <p:cNvPr id="10" name="TextBox 9"/>
+          <p:cNvPr id="10" name="Rounded Rectangle 9"/>
+          <p:cNvSpPr/>
+          <p:nvPr/>
+        </p:nvSpPr>
+        <p:spPr>
+          <a:xfrm>
+            <a:off x="1295704" y="1645920"/>
+            <a:ext cx="9601200" cy="2112264"/>
+          </a:xfrm>
+          <a:prstGeom prst="roundRect">
+            <a:avLst/>
+          </a:prstGeom>
+          <a:solidFill>
+            <a:srgbClr val="FCF8FF"/>
+          </a:solidFill>
+          <a:ln w="19050">
+            <a:solidFill>
+              <a:srgbClr val="C8AADC"/>
+            </a:solidFill>
+          </a:ln>
+        </p:spPr>
+        <p:style>
+          <a:lnRef idx="1">
+            <a:schemeClr val="accent1"/>
+          </a:lnRef>
+          <a:fillRef idx="3">
+            <a:schemeClr val="accent1"/>
+          </a:fillRef>
+          <a:effectRef idx="2">
+            <a:schemeClr val="accent1"/>
+          </a:effectRef>
+          <a:fontRef idx="minor">
+            <a:schemeClr val="lt1"/>
+          </a:fontRef>
+        </p:style>
+        <p:txBody>
+          <a:bodyPr rtlCol="0" anchor="ctr"/>
+          <a:lstStyle/>
+          <a:p>
+            <a:pPr algn="ctr"/>
+          </a:p>
+        </p:txBody>
+      </p:sp>
+      <p:sp>
+        <p:nvSpPr>
+          <p:cNvPr id="11" name="Oval 10"/>
+          <p:cNvSpPr/>
+          <p:nvPr/>
+        </p:nvSpPr>
+        <p:spPr>
+          <a:xfrm>
+            <a:off x="2255824" y="1828800"/>
+            <a:ext cx="347472" cy="347472"/>
+          </a:xfrm>
+          <a:prstGeom prst="ellipse">
+            <a:avLst/>
+          </a:prstGeom>
+          <a:solidFill>
+            <a:srgbClr val="784696"/>
+          </a:solidFill>
+          <a:ln>
+            <a:noFill/>
+          </a:ln>
+        </p:spPr>
+        <p:style>
+          <a:lnRef idx="1">
+            <a:schemeClr val="accent1"/>
+          </a:lnRef>
+          <a:fillRef idx="3">
+            <a:schemeClr val="accent1"/>
+          </a:fillRef>
+          <a:effectRef idx="2">
+            <a:schemeClr val="accent1"/>
+          </a:effectRef>
+          <a:fontRef idx="minor">
+            <a:schemeClr val="lt1"/>
+          </a:fontRef>
+        </p:style>
+        <p:txBody>
+          <a:bodyPr rtlCol="0" anchor="ctr"/>
+          <a:lstStyle/>
+          <a:p>
+            <a:pPr algn="ctr"/>
+          </a:p>
+        </p:txBody>
+      </p:sp>
+      <p:sp>
+        <p:nvSpPr>
+          <p:cNvPr id="12" name="TextBox 11"/>
           <p:cNvSpPr txBox="1"/>
           <p:nvPr/>
         </p:nvSpPr>
         <p:spPr>
           <a:xfrm>
-            <a:off x="1828800" y="4663440"/>
-            <a:ext cx="8503920" cy="914400"/>
+            <a:off x="2255824" y="1847088"/>
+            <a:ext cx="347472" cy="329184"/>
           </a:xfrm>
           <a:prstGeom prst="rect">
             <a:avLst/>
@@ -6172,13 +6423,294 @@
               </a:spcAft>
             </a:pPr>
             <a:r>
-              <a:rPr sz="2200" b="0">
-                <a:solidFill>
-                  <a:srgbClr val="784696"/>
+              <a:rPr sz="1400" b="1">
+                <a:solidFill>
+                  <a:srgbClr val="FFFFFF"/>
                 </a:solidFill>
                 <a:latin typeface="Microsoft YaHei"/>
               </a:rPr>
-              <a:t>思考：他们共同害怕失去什么？</a:t>
+              <a:t>1</a:t>
+            </a:r>
+          </a:p>
+        </p:txBody>
+      </p:sp>
+      <p:sp>
+        <p:nvSpPr>
+          <p:cNvPr id="13" name="TextBox 12"/>
+          <p:cNvSpPr txBox="1"/>
+          <p:nvPr/>
+        </p:nvSpPr>
+        <p:spPr>
+          <a:xfrm>
+            <a:off x="2713024" y="1810512"/>
+            <a:ext cx="7863840" cy="457200"/>
+          </a:xfrm>
+          <a:prstGeom prst="rect">
+            <a:avLst/>
+          </a:prstGeom>
+          <a:noFill/>
+        </p:spPr>
+        <p:txBody>
+          <a:bodyPr wrap="none">
+            <a:spAutoFit/>
+          </a:bodyPr>
+          <a:lstStyle/>
+          <a:p>
+            <a:pPr algn="l">
+              <a:spcAft>
+                <a:spcPts val="1000"/>
+              </a:spcAft>
+            </a:pPr>
+            <a:r>
+              <a:rPr sz="2400" b="0">
+                <a:solidFill>
+                  <a:srgbClr val="3C2850"/>
+                </a:solidFill>
+                <a:latin typeface="Microsoft YaHei"/>
+              </a:rPr>
+              <a:t>画骗局流程图，用箭头串联各环节</a:t>
+            </a:r>
+          </a:p>
+        </p:txBody>
+      </p:sp>
+      <p:sp>
+        <p:nvSpPr>
+          <p:cNvPr id="14" name="Oval 13"/>
+          <p:cNvSpPr/>
+          <p:nvPr/>
+        </p:nvSpPr>
+        <p:spPr>
+          <a:xfrm>
+            <a:off x="2255824" y="2395728"/>
+            <a:ext cx="347472" cy="347472"/>
+          </a:xfrm>
+          <a:prstGeom prst="ellipse">
+            <a:avLst/>
+          </a:prstGeom>
+          <a:solidFill>
+            <a:srgbClr val="784696"/>
+          </a:solidFill>
+          <a:ln>
+            <a:noFill/>
+          </a:ln>
+        </p:spPr>
+        <p:style>
+          <a:lnRef idx="1">
+            <a:schemeClr val="accent1"/>
+          </a:lnRef>
+          <a:fillRef idx="3">
+            <a:schemeClr val="accent1"/>
+          </a:fillRef>
+          <a:effectRef idx="2">
+            <a:schemeClr val="accent1"/>
+          </a:effectRef>
+          <a:fontRef idx="minor">
+            <a:schemeClr val="lt1"/>
+          </a:fontRef>
+        </p:style>
+        <p:txBody>
+          <a:bodyPr rtlCol="0" anchor="ctr"/>
+          <a:lstStyle/>
+          <a:p>
+            <a:pPr algn="ctr"/>
+          </a:p>
+        </p:txBody>
+      </p:sp>
+      <p:sp>
+        <p:nvSpPr>
+          <p:cNvPr id="15" name="TextBox 14"/>
+          <p:cNvSpPr txBox="1"/>
+          <p:nvPr/>
+        </p:nvSpPr>
+        <p:spPr>
+          <a:xfrm>
+            <a:off x="2255824" y="2414016"/>
+            <a:ext cx="347472" cy="329184"/>
+          </a:xfrm>
+          <a:prstGeom prst="rect">
+            <a:avLst/>
+          </a:prstGeom>
+          <a:noFill/>
+        </p:spPr>
+        <p:txBody>
+          <a:bodyPr wrap="none">
+            <a:spAutoFit/>
+          </a:bodyPr>
+          <a:lstStyle/>
+          <a:p>
+            <a:pPr algn="ctr">
+              <a:spcAft>
+                <a:spcPts val="1000"/>
+              </a:spcAft>
+            </a:pPr>
+            <a:r>
+              <a:rPr sz="1400" b="1">
+                <a:solidFill>
+                  <a:srgbClr val="FFFFFF"/>
+                </a:solidFill>
+                <a:latin typeface="Microsoft YaHei"/>
+              </a:rPr>
+              <a:t>2</a:t>
+            </a:r>
+          </a:p>
+        </p:txBody>
+      </p:sp>
+      <p:sp>
+        <p:nvSpPr>
+          <p:cNvPr id="16" name="TextBox 15"/>
+          <p:cNvSpPr txBox="1"/>
+          <p:nvPr/>
+        </p:nvSpPr>
+        <p:spPr>
+          <a:xfrm>
+            <a:off x="2713024" y="2377440"/>
+            <a:ext cx="7863840" cy="457200"/>
+          </a:xfrm>
+          <a:prstGeom prst="rect">
+            <a:avLst/>
+          </a:prstGeom>
+          <a:noFill/>
+        </p:spPr>
+        <p:txBody>
+          <a:bodyPr wrap="none">
+            <a:spAutoFit/>
+          </a:bodyPr>
+          <a:lstStyle/>
+          <a:p>
+            <a:pPr algn="l">
+              <a:spcAft>
+                <a:spcPts val="1000"/>
+              </a:spcAft>
+            </a:pPr>
+            <a:r>
+              <a:rPr sz="2400" b="0">
+                <a:solidFill>
+                  <a:srgbClr val="3C2850"/>
+                </a:solidFill>
+                <a:latin typeface="Microsoft YaHei"/>
+              </a:rPr>
+              <a:t>勾画老大臣、官员、皇帝的心理和语言</a:t>
+            </a:r>
+          </a:p>
+        </p:txBody>
+      </p:sp>
+      <p:sp>
+        <p:nvSpPr>
+          <p:cNvPr id="17" name="Oval 16"/>
+          <p:cNvSpPr/>
+          <p:nvPr/>
+        </p:nvSpPr>
+        <p:spPr>
+          <a:xfrm>
+            <a:off x="2255824" y="2962656"/>
+            <a:ext cx="347472" cy="347472"/>
+          </a:xfrm>
+          <a:prstGeom prst="ellipse">
+            <a:avLst/>
+          </a:prstGeom>
+          <a:solidFill>
+            <a:srgbClr val="784696"/>
+          </a:solidFill>
+          <a:ln>
+            <a:noFill/>
+          </a:ln>
+        </p:spPr>
+        <p:style>
+          <a:lnRef idx="1">
+            <a:schemeClr val="accent1"/>
+          </a:lnRef>
+          <a:fillRef idx="3">
+            <a:schemeClr val="accent1"/>
+          </a:fillRef>
+          <a:effectRef idx="2">
+            <a:schemeClr val="accent1"/>
+          </a:effectRef>
+          <a:fontRef idx="minor">
+            <a:schemeClr val="lt1"/>
+          </a:fontRef>
+        </p:style>
+        <p:txBody>
+          <a:bodyPr rtlCol="0" anchor="ctr"/>
+          <a:lstStyle/>
+          <a:p>
+            <a:pPr algn="ctr"/>
+          </a:p>
+        </p:txBody>
+      </p:sp>
+      <p:sp>
+        <p:nvSpPr>
+          <p:cNvPr id="18" name="TextBox 17"/>
+          <p:cNvSpPr txBox="1"/>
+          <p:nvPr/>
+        </p:nvSpPr>
+        <p:spPr>
+          <a:xfrm>
+            <a:off x="2255824" y="2980944"/>
+            <a:ext cx="347472" cy="329184"/>
+          </a:xfrm>
+          <a:prstGeom prst="rect">
+            <a:avLst/>
+          </a:prstGeom>
+          <a:noFill/>
+        </p:spPr>
+        <p:txBody>
+          <a:bodyPr wrap="none">
+            <a:spAutoFit/>
+          </a:bodyPr>
+          <a:lstStyle/>
+          <a:p>
+            <a:pPr algn="ctr">
+              <a:spcAft>
+                <a:spcPts val="1000"/>
+              </a:spcAft>
+            </a:pPr>
+            <a:r>
+              <a:rPr sz="1400" b="1">
+                <a:solidFill>
+                  <a:srgbClr val="FFFFFF"/>
+                </a:solidFill>
+                <a:latin typeface="Microsoft YaHei"/>
+              </a:rPr>
+              <a:t>3</a:t>
+            </a:r>
+          </a:p>
+        </p:txBody>
+      </p:sp>
+      <p:sp>
+        <p:nvSpPr>
+          <p:cNvPr id="19" name="TextBox 18"/>
+          <p:cNvSpPr txBox="1"/>
+          <p:nvPr/>
+        </p:nvSpPr>
+        <p:spPr>
+          <a:xfrm>
+            <a:off x="2713024" y="2944368"/>
+            <a:ext cx="7863840" cy="457200"/>
+          </a:xfrm>
+          <a:prstGeom prst="rect">
+            <a:avLst/>
+          </a:prstGeom>
+          <a:noFill/>
+        </p:spPr>
+        <p:txBody>
+          <a:bodyPr wrap="none">
+            <a:spAutoFit/>
+          </a:bodyPr>
+          <a:lstStyle/>
+          <a:p>
+            <a:pPr algn="l">
+              <a:spcAft>
+                <a:spcPts val="1000"/>
+              </a:spcAft>
+            </a:pPr>
+            <a:r>
+              <a:rPr sz="2400" b="0">
+                <a:solidFill>
+                  <a:srgbClr val="3C2850"/>
+                </a:solidFill>
+                <a:latin typeface="Microsoft YaHei"/>
+              </a:rPr>
+              <a:t>完成人物分析卡（证据—特点—作用）</a:t>
             </a:r>
           </a:p>
         </p:txBody>
@@ -6393,7 +6925,7 @@
                 </a:solidFill>
                 <a:latin typeface="Microsoft YaHei"/>
               </a:rPr>
-              <a:t>学会判断</a:t>
+              <a:t>回顾收获</a:t>
             </a:r>
           </a:p>
         </p:txBody>
@@ -6432,7 +6964,7 @@
                 </a:solidFill>
                 <a:latin typeface="Microsoft YaHei"/>
               </a:rPr>
-              <a:t>学习任务三</a:t>
+              <a:t>课堂小结</a:t>
             </a:r>
           </a:p>
         </p:txBody>
@@ -6489,7 +7021,7 @@
         <p:spPr>
           <a:xfrm>
             <a:off x="1295704" y="1645920"/>
-            <a:ext cx="9601200" cy="2240280"/>
+            <a:ext cx="9601200" cy="1837944"/>
           </a:xfrm>
           <a:prstGeom prst="roundRect">
             <a:avLst/>
@@ -6534,7 +7066,7 @@
         <p:spPr>
           <a:xfrm>
             <a:off x="2255824" y="1828800"/>
-            <a:ext cx="384048" cy="384048"/>
+            <a:ext cx="347472" cy="347472"/>
           </a:xfrm>
           <a:prstGeom prst="ellipse">
             <a:avLst/>
@@ -6577,7 +7109,7 @@
         <p:spPr>
           <a:xfrm>
             <a:off x="2255824" y="1847088"/>
-            <a:ext cx="384048" cy="365760"/>
+            <a:ext cx="347472" cy="329184"/>
           </a:xfrm>
           <a:prstGeom prst="rect">
             <a:avLst/>
@@ -6596,7 +7128,7 @@
               </a:spcAft>
             </a:pPr>
             <a:r>
-              <a:rPr sz="1600" b="1">
+              <a:rPr sz="1400" b="1">
                 <a:solidFill>
                   <a:srgbClr val="FFFFFF"/>
                 </a:solidFill>
@@ -6615,8 +7147,8 @@
         </p:nvSpPr>
         <p:spPr>
           <a:xfrm>
-            <a:off x="2758744" y="1810512"/>
-            <a:ext cx="7772400" cy="502920"/>
+            <a:off x="2713024" y="1810512"/>
+            <a:ext cx="7863840" cy="457200"/>
           </a:xfrm>
           <a:prstGeom prst="rect">
             <a:avLst/>
@@ -6635,13 +7167,13 @@
               </a:spcAft>
             </a:pPr>
             <a:r>
-              <a:rPr sz="2400" b="0">
+              <a:rPr sz="2200" b="0">
                 <a:solidFill>
                   <a:srgbClr val="3C2850"/>
                 </a:solidFill>
                 <a:latin typeface="Microsoft YaHei"/>
               </a:rPr>
-              <a:t>完成课后「思考·探究·积累」三道思考题</a:t>
+              <a:t>夸张+反讽+对比，让笑声指向盲从与虚伪</a:t>
             </a:r>
           </a:p>
         </p:txBody>
@@ -6654,8 +7186,8 @@
         </p:nvSpPr>
         <p:spPr>
           <a:xfrm>
-            <a:off x="2255824" y="2395728"/>
-            <a:ext cx="384048" cy="384048"/>
+            <a:off x="2255824" y="2304288"/>
+            <a:ext cx="347472" cy="347472"/>
           </a:xfrm>
           <a:prstGeom prst="ellipse">
             <a:avLst/>
@@ -6697,8 +7229,8 @@
         </p:nvSpPr>
         <p:spPr>
           <a:xfrm>
-            <a:off x="2255824" y="2414016"/>
-            <a:ext cx="384048" cy="365760"/>
+            <a:off x="2255824" y="2322576"/>
+            <a:ext cx="347472" cy="329184"/>
           </a:xfrm>
           <a:prstGeom prst="rect">
             <a:avLst/>
@@ -6717,7 +7249,7 @@
               </a:spcAft>
             </a:pPr>
             <a:r>
-              <a:rPr sz="1600" b="1">
+              <a:rPr sz="1400" b="1">
                 <a:solidFill>
                   <a:srgbClr val="FFFFFF"/>
                 </a:solidFill>
@@ -6736,8 +7268,8 @@
         </p:nvSpPr>
         <p:spPr>
           <a:xfrm>
-            <a:off x="2758744" y="2377440"/>
-            <a:ext cx="7772400" cy="502920"/>
+            <a:off x="2713024" y="2286000"/>
+            <a:ext cx="7863840" cy="457200"/>
           </a:xfrm>
           <a:prstGeom prst="rect">
             <a:avLst/>
@@ -6756,13 +7288,13 @@
               </a:spcAft>
             </a:pPr>
             <a:r>
-              <a:rPr sz="2400" b="0">
+              <a:rPr sz="2200" b="0">
                 <a:solidFill>
                   <a:srgbClr val="3C2850"/>
                 </a:solidFill>
                 <a:latin typeface="Microsoft YaHei"/>
               </a:rPr>
-              <a:t>联系生活：你有没有「随大流」的经历？</a:t>
+              <a:t>「新装」是谎言，更是照见人性的镜子</a:t>
             </a:r>
           </a:p>
         </p:txBody>
@@ -6775,8 +7307,8 @@
         </p:nvSpPr>
         <p:spPr>
           <a:xfrm>
-            <a:off x="2255824" y="2962656"/>
-            <a:ext cx="384048" cy="384048"/>
+            <a:off x="2255824" y="2779776"/>
+            <a:ext cx="347472" cy="347472"/>
           </a:xfrm>
           <a:prstGeom prst="ellipse">
             <a:avLst/>
@@ -6818,8 +7350,8 @@
         </p:nvSpPr>
         <p:spPr>
           <a:xfrm>
-            <a:off x="2255824" y="2980944"/>
-            <a:ext cx="384048" cy="365760"/>
+            <a:off x="2255824" y="2798064"/>
+            <a:ext cx="347472" cy="329184"/>
           </a:xfrm>
           <a:prstGeom prst="rect">
             <a:avLst/>
@@ -6838,7 +7370,7 @@
               </a:spcAft>
             </a:pPr>
             <a:r>
-              <a:rPr sz="1600" b="1">
+              <a:rPr sz="1400" b="1">
                 <a:solidFill>
                   <a:srgbClr val="FFFFFF"/>
                 </a:solidFill>
@@ -6857,8 +7389,8 @@
         </p:nvSpPr>
         <p:spPr>
           <a:xfrm>
-            <a:off x="2758744" y="2944368"/>
-            <a:ext cx="7772400" cy="502920"/>
+            <a:off x="2713024" y="2761488"/>
+            <a:ext cx="7863840" cy="457200"/>
           </a:xfrm>
           <a:prstGeom prst="rect">
             <a:avLst/>
@@ -6877,13 +7409,13 @@
               </a:spcAft>
             </a:pPr>
             <a:r>
-              <a:rPr sz="2400" b="0">
+              <a:rPr sz="2200" b="0">
                 <a:solidFill>
                   <a:srgbClr val="3C2850"/>
                 </a:solidFill>
                 <a:latin typeface="Microsoft YaHei"/>
               </a:rPr>
-              <a:t>策展主题二：面对虚假，要敢于说真话</a:t>
+              <a:t>策展主题二：真实与虚假</a:t>
             </a:r>
           </a:p>
         </p:txBody>
@@ -7098,7 +7630,7 @@
                 </a:solidFill>
                 <a:latin typeface="Microsoft YaHei"/>
               </a:rPr>
-              <a:t>回顾收获</a:t>
+              <a:t>课后延伸</a:t>
             </a:r>
           </a:p>
         </p:txBody>
@@ -7137,7 +7669,7 @@
                 </a:solidFill>
                 <a:latin typeface="Microsoft YaHei"/>
               </a:rPr>
-              <a:t>课堂小结</a:t>
+              <a:t>课后作业</a:t>
             </a:r>
           </a:p>
         </p:txBody>
@@ -7194,7 +7726,7 @@
         <p:spPr>
           <a:xfrm>
             <a:off x="1295704" y="1645920"/>
-            <a:ext cx="9601200" cy="2240280"/>
+            <a:ext cx="9601200" cy="1545336"/>
           </a:xfrm>
           <a:prstGeom prst="roundRect">
             <a:avLst/>
@@ -7239,7 +7771,7 @@
         <p:spPr>
           <a:xfrm>
             <a:off x="2255824" y="1828800"/>
-            <a:ext cx="384048" cy="384048"/>
+            <a:ext cx="347472" cy="347472"/>
           </a:xfrm>
           <a:prstGeom prst="ellipse">
             <a:avLst/>
@@ -7282,7 +7814,7 @@
         <p:spPr>
           <a:xfrm>
             <a:off x="2255824" y="1847088"/>
-            <a:ext cx="384048" cy="365760"/>
+            <a:ext cx="347472" cy="329184"/>
           </a:xfrm>
           <a:prstGeom prst="rect">
             <a:avLst/>
@@ -7301,7 +7833,7 @@
               </a:spcAft>
             </a:pPr>
             <a:r>
-              <a:rPr sz="1600" b="1">
+              <a:rPr sz="1400" b="1">
                 <a:solidFill>
                   <a:srgbClr val="FFFFFF"/>
                 </a:solidFill>
@@ -7320,8 +7852,8 @@
         </p:nvSpPr>
         <p:spPr>
           <a:xfrm>
-            <a:off x="2758744" y="1810512"/>
-            <a:ext cx="7772400" cy="502920"/>
+            <a:off x="2713024" y="1810512"/>
+            <a:ext cx="7863840" cy="457200"/>
           </a:xfrm>
           <a:prstGeom prst="rect">
             <a:avLst/>
@@ -7346,7 +7878,7 @@
                 </a:solidFill>
                 <a:latin typeface="Microsoft YaHei"/>
               </a:rPr>
-              <a:t>夸张、重复、反差制造笑声，指向盲从与虚伪</a:t>
+              <a:t>必做：用150字概括故事</a:t>
             </a:r>
           </a:p>
         </p:txBody>
@@ -7360,7 +7892,7 @@
         <p:spPr>
           <a:xfrm>
             <a:off x="2255824" y="2395728"/>
-            <a:ext cx="384048" cy="384048"/>
+            <a:ext cx="347472" cy="347472"/>
           </a:xfrm>
           <a:prstGeom prst="ellipse">
             <a:avLst/>
@@ -7403,7 +7935,7 @@
         <p:spPr>
           <a:xfrm>
             <a:off x="2255824" y="2414016"/>
-            <a:ext cx="384048" cy="365760"/>
+            <a:ext cx="347472" cy="329184"/>
           </a:xfrm>
           <a:prstGeom prst="rect">
             <a:avLst/>
@@ -7422,7 +7954,7 @@
               </a:spcAft>
             </a:pPr>
             <a:r>
-              <a:rPr sz="1600" b="1">
+              <a:rPr sz="1400" b="1">
                 <a:solidFill>
                   <a:srgbClr val="FFFFFF"/>
                 </a:solidFill>
@@ -7441,713 +7973,8 @@
         </p:nvSpPr>
         <p:spPr>
           <a:xfrm>
-            <a:off x="2758744" y="2377440"/>
-            <a:ext cx="7772400" cy="502920"/>
-          </a:xfrm>
-          <a:prstGeom prst="rect">
-            <a:avLst/>
-          </a:prstGeom>
-          <a:noFill/>
-        </p:spPr>
-        <p:txBody>
-          <a:bodyPr wrap="none">
-            <a:spAutoFit/>
-          </a:bodyPr>
-          <a:lstStyle/>
-          <a:p>
-            <a:pPr algn="l">
-              <a:spcAft>
-                <a:spcPts val="1000"/>
-              </a:spcAft>
-            </a:pPr>
-            <a:r>
-              <a:rPr sz="2400" b="0">
-                <a:solidFill>
-                  <a:srgbClr val="3C2850"/>
-                </a:solidFill>
-                <a:latin typeface="Microsoft YaHei"/>
-              </a:rPr>
-              <a:t>孩子的天真，是不被虚假规则束缚的诚实</a:t>
-            </a:r>
-          </a:p>
-        </p:txBody>
-      </p:sp>
-      <p:sp>
-        <p:nvSpPr>
-          <p:cNvPr id="17" name="Oval 16"/>
-          <p:cNvSpPr/>
-          <p:nvPr/>
-        </p:nvSpPr>
-        <p:spPr>
-          <a:xfrm>
-            <a:off x="2255824" y="2962656"/>
-            <a:ext cx="384048" cy="384048"/>
-          </a:xfrm>
-          <a:prstGeom prst="ellipse">
-            <a:avLst/>
-          </a:prstGeom>
-          <a:solidFill>
-            <a:srgbClr val="784696"/>
-          </a:solidFill>
-          <a:ln>
-            <a:noFill/>
-          </a:ln>
-        </p:spPr>
-        <p:style>
-          <a:lnRef idx="1">
-            <a:schemeClr val="accent1"/>
-          </a:lnRef>
-          <a:fillRef idx="3">
-            <a:schemeClr val="accent1"/>
-          </a:fillRef>
-          <a:effectRef idx="2">
-            <a:schemeClr val="accent1"/>
-          </a:effectRef>
-          <a:fontRef idx="minor">
-            <a:schemeClr val="lt1"/>
-          </a:fontRef>
-        </p:style>
-        <p:txBody>
-          <a:bodyPr rtlCol="0" anchor="ctr"/>
-          <a:lstStyle/>
-          <a:p>
-            <a:pPr algn="ctr"/>
-          </a:p>
-        </p:txBody>
-      </p:sp>
-      <p:sp>
-        <p:nvSpPr>
-          <p:cNvPr id="18" name="TextBox 17"/>
-          <p:cNvSpPr txBox="1"/>
-          <p:nvPr/>
-        </p:nvSpPr>
-        <p:spPr>
-          <a:xfrm>
-            <a:off x="2255824" y="2980944"/>
-            <a:ext cx="384048" cy="365760"/>
-          </a:xfrm>
-          <a:prstGeom prst="rect">
-            <a:avLst/>
-          </a:prstGeom>
-          <a:noFill/>
-        </p:spPr>
-        <p:txBody>
-          <a:bodyPr wrap="none">
-            <a:spAutoFit/>
-          </a:bodyPr>
-          <a:lstStyle/>
-          <a:p>
-            <a:pPr algn="ctr">
-              <a:spcAft>
-                <a:spcPts val="1000"/>
-              </a:spcAft>
-            </a:pPr>
-            <a:r>
-              <a:rPr sz="1600" b="1">
-                <a:solidFill>
-                  <a:srgbClr val="FFFFFF"/>
-                </a:solidFill>
-                <a:latin typeface="Microsoft YaHei"/>
-              </a:rPr>
-              <a:t>3</a:t>
-            </a:r>
-          </a:p>
-        </p:txBody>
-      </p:sp>
-      <p:sp>
-        <p:nvSpPr>
-          <p:cNvPr id="19" name="TextBox 18"/>
-          <p:cNvSpPr txBox="1"/>
-          <p:nvPr/>
-        </p:nvSpPr>
-        <p:spPr>
-          <a:xfrm>
-            <a:off x="2758744" y="2944368"/>
-            <a:ext cx="7772400" cy="502920"/>
-          </a:xfrm>
-          <a:prstGeom prst="rect">
-            <a:avLst/>
-          </a:prstGeom>
-          <a:noFill/>
-        </p:spPr>
-        <p:txBody>
-          <a:bodyPr wrap="none">
-            <a:spAutoFit/>
-          </a:bodyPr>
-          <a:lstStyle/>
-          <a:p>
-            <a:pPr algn="l">
-              <a:spcAft>
-                <a:spcPts val="1000"/>
-              </a:spcAft>
-            </a:pPr>
-            <a:r>
-              <a:rPr sz="2400" b="0">
-                <a:solidFill>
-                  <a:srgbClr val="3C2850"/>
-                </a:solidFill>
-                <a:latin typeface="Microsoft YaHei"/>
-              </a:rPr>
-              <a:t>策展主题：真实与虚假</a:t>
-            </a:r>
-          </a:p>
-        </p:txBody>
-      </p:sp>
-    </p:spTree>
-  </p:cSld>
-  <p:clrMapOvr>
-    <a:masterClrMapping/>
-  </p:clrMapOvr>
-</p:sld>
-</file>
-
-<file path=ppt/slides/slide9.xml><?xml version="1.0" encoding="utf-8"?>
-<p:sld xmlns:a="http://schemas.openxmlformats.org/drawingml/2006/main" xmlns:p="http://schemas.openxmlformats.org/presentationml/2006/main" xmlns:r="http://schemas.openxmlformats.org/officeDocument/2006/relationships">
-  <p:cSld>
-    <p:spTree>
-      <p:nvGrpSpPr>
-        <p:cNvPr id="1" name=""/>
-        <p:cNvGrpSpPr/>
-        <p:nvPr/>
-      </p:nvGrpSpPr>
-      <p:grpSpPr/>
-      <p:pic>
-        <p:nvPicPr>
-          <p:cNvPr id="2" name="Picture 1" descr="bg_emperor.png"/>
-          <p:cNvPicPr>
-            <a:picLocks noChangeAspect="1"/>
-          </p:cNvPicPr>
-          <p:nvPr/>
-        </p:nvPicPr>
-        <p:blipFill>
-          <a:blip r:embed="rId2"/>
-          <a:stretch>
-            <a:fillRect/>
-          </a:stretch>
-        </p:blipFill>
-        <p:spPr>
-          <a:xfrm>
-            <a:off x="0" y="0"/>
-            <a:ext cx="12191695" cy="6858000"/>
-          </a:xfrm>
-          <a:prstGeom prst="rect">
-            <a:avLst/>
-          </a:prstGeom>
-        </p:spPr>
-      </p:pic>
-      <p:sp>
-        <p:nvSpPr>
-          <p:cNvPr id="3" name="Rectangle 2"/>
-          <p:cNvSpPr/>
-          <p:nvPr/>
-        </p:nvSpPr>
-        <p:spPr>
-          <a:xfrm>
-            <a:off x="292608" y="274320"/>
-            <a:ext cx="11594592" cy="6300216"/>
-          </a:xfrm>
-          <a:prstGeom prst="rect">
-            <a:avLst/>
-          </a:prstGeom>
-          <a:noFill/>
-          <a:ln w="31750">
-            <a:solidFill>
-              <a:srgbClr val="825AA0"/>
-            </a:solidFill>
-          </a:ln>
-        </p:spPr>
-        <p:style>
-          <a:lnRef idx="1">
-            <a:schemeClr val="accent1"/>
-          </a:lnRef>
-          <a:fillRef idx="3">
-            <a:schemeClr val="accent1"/>
-          </a:fillRef>
-          <a:effectRef idx="2">
-            <a:schemeClr val="accent1"/>
-          </a:effectRef>
-          <a:fontRef idx="minor">
-            <a:schemeClr val="lt1"/>
-          </a:fontRef>
-        </p:style>
-        <p:txBody>
-          <a:bodyPr rtlCol="0" anchor="ctr"/>
-          <a:lstStyle/>
-          <a:p>
-            <a:pPr algn="ctr"/>
-          </a:p>
-        </p:txBody>
-      </p:sp>
-      <p:pic>
-        <p:nvPicPr>
-          <p:cNvPr id="4" name="Picture 3" descr="corner_emperor_tl.png"/>
-          <p:cNvPicPr>
-            <a:picLocks noChangeAspect="1"/>
-          </p:cNvPicPr>
-          <p:nvPr/>
-        </p:nvPicPr>
-        <p:blipFill>
-          <a:blip r:embed="rId3"/>
-          <a:stretch>
-            <a:fillRect/>
-          </a:stretch>
-        </p:blipFill>
-        <p:spPr>
-          <a:xfrm>
-            <a:off x="-45720" y="-45720"/>
-            <a:ext cx="2011680" cy="2011680"/>
-          </a:xfrm>
-          <a:prstGeom prst="rect">
-            <a:avLst/>
-          </a:prstGeom>
-        </p:spPr>
-      </p:pic>
-      <p:pic>
-        <p:nvPicPr>
-          <p:cNvPr id="5" name="Picture 4" descr="corner_emperor_tr.png"/>
-          <p:cNvPicPr>
-            <a:picLocks noChangeAspect="1"/>
-          </p:cNvPicPr>
-          <p:nvPr/>
-        </p:nvPicPr>
-        <p:blipFill>
-          <a:blip r:embed="rId4"/>
-          <a:stretch>
-            <a:fillRect/>
-          </a:stretch>
-        </p:blipFill>
-        <p:spPr>
-          <a:xfrm>
-            <a:off x="9875520" y="-45720"/>
-            <a:ext cx="2011680" cy="2011680"/>
-          </a:xfrm>
-          <a:prstGeom prst="rect">
-            <a:avLst/>
-          </a:prstGeom>
-        </p:spPr>
-      </p:pic>
-      <p:sp>
-        <p:nvSpPr>
-          <p:cNvPr id="6" name="Rounded Rectangle 5"/>
-          <p:cNvSpPr/>
-          <p:nvPr/>
-        </p:nvSpPr>
-        <p:spPr>
-          <a:xfrm>
-            <a:off x="4953304" y="502920"/>
-            <a:ext cx="2286000" cy="411480"/>
-          </a:xfrm>
-          <a:prstGeom prst="roundRect">
-            <a:avLst/>
-          </a:prstGeom>
-          <a:solidFill>
-            <a:srgbClr val="C8AADC"/>
-          </a:solidFill>
-          <a:ln>
-            <a:noFill/>
-          </a:ln>
-        </p:spPr>
-        <p:style>
-          <a:lnRef idx="1">
-            <a:schemeClr val="accent1"/>
-          </a:lnRef>
-          <a:fillRef idx="3">
-            <a:schemeClr val="accent1"/>
-          </a:fillRef>
-          <a:effectRef idx="2">
-            <a:schemeClr val="accent1"/>
-          </a:effectRef>
-          <a:fontRef idx="minor">
-            <a:schemeClr val="lt1"/>
-          </a:fontRef>
-        </p:style>
-        <p:txBody>
-          <a:bodyPr rtlCol="0" anchor="ctr"/>
-          <a:lstStyle/>
-          <a:p>
-            <a:pPr algn="ctr"/>
-          </a:p>
-        </p:txBody>
-      </p:sp>
-      <p:sp>
-        <p:nvSpPr>
-          <p:cNvPr id="7" name="TextBox 6"/>
-          <p:cNvSpPr txBox="1"/>
-          <p:nvPr/>
-        </p:nvSpPr>
-        <p:spPr>
-          <a:xfrm>
-            <a:off x="4953304" y="521208"/>
-            <a:ext cx="2286000" cy="384048"/>
-          </a:xfrm>
-          <a:prstGeom prst="rect">
-            <a:avLst/>
-          </a:prstGeom>
-          <a:noFill/>
-        </p:spPr>
-        <p:txBody>
-          <a:bodyPr wrap="none">
-            <a:spAutoFit/>
-          </a:bodyPr>
-          <a:lstStyle/>
-          <a:p>
-            <a:pPr algn="ctr">
-              <a:spcAft>
-                <a:spcPts val="1000"/>
-              </a:spcAft>
-            </a:pPr>
-            <a:r>
-              <a:rPr sz="1800" b="1">
-                <a:solidFill>
-                  <a:srgbClr val="3C2850"/>
-                </a:solidFill>
-                <a:latin typeface="Microsoft YaHei"/>
-              </a:rPr>
-              <a:t>课后延伸</a:t>
-            </a:r>
-          </a:p>
-        </p:txBody>
-      </p:sp>
-      <p:sp>
-        <p:nvSpPr>
-          <p:cNvPr id="8" name="TextBox 7"/>
-          <p:cNvSpPr txBox="1"/>
-          <p:nvPr/>
-        </p:nvSpPr>
-        <p:spPr>
-          <a:xfrm>
-            <a:off x="1371600" y="960120"/>
-            <a:ext cx="9418320" cy="822960"/>
-          </a:xfrm>
-          <a:prstGeom prst="rect">
-            <a:avLst/>
-          </a:prstGeom>
-          <a:noFill/>
-        </p:spPr>
-        <p:txBody>
-          <a:bodyPr wrap="square">
-            <a:spAutoFit/>
-          </a:bodyPr>
-          <a:lstStyle/>
-          <a:p>
-            <a:pPr algn="ctr">
-              <a:spcAft>
-                <a:spcPts val="1000"/>
-              </a:spcAft>
-            </a:pPr>
-            <a:r>
-              <a:rPr sz="3600" b="1">
-                <a:solidFill>
-                  <a:srgbClr val="784696"/>
-                </a:solidFill>
-                <a:latin typeface="Microsoft YaHei"/>
-              </a:rPr>
-              <a:t>课后作业</a:t>
-            </a:r>
-          </a:p>
-        </p:txBody>
-      </p:sp>
-      <p:sp>
-        <p:nvSpPr>
-          <p:cNvPr id="9" name="Rectangle 8"/>
-          <p:cNvSpPr/>
-          <p:nvPr/>
-        </p:nvSpPr>
-        <p:spPr>
-          <a:xfrm>
-            <a:off x="3200400" y="1600200"/>
-            <a:ext cx="5760720" cy="27432"/>
-          </a:xfrm>
-          <a:prstGeom prst="rect">
-            <a:avLst/>
-          </a:prstGeom>
-          <a:solidFill>
-            <a:srgbClr val="C8AADC"/>
-          </a:solidFill>
-          <a:ln>
-            <a:noFill/>
-          </a:ln>
-        </p:spPr>
-        <p:style>
-          <a:lnRef idx="1">
-            <a:schemeClr val="accent1"/>
-          </a:lnRef>
-          <a:fillRef idx="3">
-            <a:schemeClr val="accent1"/>
-          </a:fillRef>
-          <a:effectRef idx="2">
-            <a:schemeClr val="accent1"/>
-          </a:effectRef>
-          <a:fontRef idx="minor">
-            <a:schemeClr val="lt1"/>
-          </a:fontRef>
-        </p:style>
-        <p:txBody>
-          <a:bodyPr rtlCol="0" anchor="ctr"/>
-          <a:lstStyle/>
-          <a:p>
-            <a:pPr algn="ctr"/>
-          </a:p>
-        </p:txBody>
-      </p:sp>
-      <p:sp>
-        <p:nvSpPr>
-          <p:cNvPr id="10" name="Rounded Rectangle 9"/>
-          <p:cNvSpPr/>
-          <p:nvPr/>
-        </p:nvSpPr>
-        <p:spPr>
-          <a:xfrm>
-            <a:off x="1295704" y="1645920"/>
-            <a:ext cx="9601200" cy="1645920"/>
-          </a:xfrm>
-          <a:prstGeom prst="roundRect">
-            <a:avLst/>
-          </a:prstGeom>
-          <a:solidFill>
-            <a:srgbClr val="FCF8FF"/>
-          </a:solidFill>
-          <a:ln w="19050">
-            <a:solidFill>
-              <a:srgbClr val="C8AADC"/>
-            </a:solidFill>
-          </a:ln>
-        </p:spPr>
-        <p:style>
-          <a:lnRef idx="1">
-            <a:schemeClr val="accent1"/>
-          </a:lnRef>
-          <a:fillRef idx="3">
-            <a:schemeClr val="accent1"/>
-          </a:fillRef>
-          <a:effectRef idx="2">
-            <a:schemeClr val="accent1"/>
-          </a:effectRef>
-          <a:fontRef idx="minor">
-            <a:schemeClr val="lt1"/>
-          </a:fontRef>
-        </p:style>
-        <p:txBody>
-          <a:bodyPr rtlCol="0" anchor="ctr"/>
-          <a:lstStyle/>
-          <a:p>
-            <a:pPr algn="ctr"/>
-          </a:p>
-        </p:txBody>
-      </p:sp>
-      <p:sp>
-        <p:nvSpPr>
-          <p:cNvPr id="11" name="Oval 10"/>
-          <p:cNvSpPr/>
-          <p:nvPr/>
-        </p:nvSpPr>
-        <p:spPr>
-          <a:xfrm>
-            <a:off x="2255824" y="1828800"/>
-            <a:ext cx="384048" cy="384048"/>
-          </a:xfrm>
-          <a:prstGeom prst="ellipse">
-            <a:avLst/>
-          </a:prstGeom>
-          <a:solidFill>
-            <a:srgbClr val="784696"/>
-          </a:solidFill>
-          <a:ln>
-            <a:noFill/>
-          </a:ln>
-        </p:spPr>
-        <p:style>
-          <a:lnRef idx="1">
-            <a:schemeClr val="accent1"/>
-          </a:lnRef>
-          <a:fillRef idx="3">
-            <a:schemeClr val="accent1"/>
-          </a:fillRef>
-          <a:effectRef idx="2">
-            <a:schemeClr val="accent1"/>
-          </a:effectRef>
-          <a:fontRef idx="minor">
-            <a:schemeClr val="lt1"/>
-          </a:fontRef>
-        </p:style>
-        <p:txBody>
-          <a:bodyPr rtlCol="0" anchor="ctr"/>
-          <a:lstStyle/>
-          <a:p>
-            <a:pPr algn="ctr"/>
-          </a:p>
-        </p:txBody>
-      </p:sp>
-      <p:sp>
-        <p:nvSpPr>
-          <p:cNvPr id="12" name="TextBox 11"/>
-          <p:cNvSpPr txBox="1"/>
-          <p:nvPr/>
-        </p:nvSpPr>
-        <p:spPr>
-          <a:xfrm>
-            <a:off x="2255824" y="1847088"/>
-            <a:ext cx="384048" cy="365760"/>
-          </a:xfrm>
-          <a:prstGeom prst="rect">
-            <a:avLst/>
-          </a:prstGeom>
-          <a:noFill/>
-        </p:spPr>
-        <p:txBody>
-          <a:bodyPr wrap="none">
-            <a:spAutoFit/>
-          </a:bodyPr>
-          <a:lstStyle/>
-          <a:p>
-            <a:pPr algn="ctr">
-              <a:spcAft>
-                <a:spcPts val="1000"/>
-              </a:spcAft>
-            </a:pPr>
-            <a:r>
-              <a:rPr sz="1600" b="1">
-                <a:solidFill>
-                  <a:srgbClr val="FFFFFF"/>
-                </a:solidFill>
-                <a:latin typeface="Microsoft YaHei"/>
-              </a:rPr>
-              <a:t>1</a:t>
-            </a:r>
-          </a:p>
-        </p:txBody>
-      </p:sp>
-      <p:sp>
-        <p:nvSpPr>
-          <p:cNvPr id="13" name="TextBox 12"/>
-          <p:cNvSpPr txBox="1"/>
-          <p:nvPr/>
-        </p:nvSpPr>
-        <p:spPr>
-          <a:xfrm>
-            <a:off x="2758744" y="1810512"/>
-            <a:ext cx="7772400" cy="502920"/>
-          </a:xfrm>
-          <a:prstGeom prst="rect">
-            <a:avLst/>
-          </a:prstGeom>
-          <a:noFill/>
-        </p:spPr>
-        <p:txBody>
-          <a:bodyPr wrap="none">
-            <a:spAutoFit/>
-          </a:bodyPr>
-          <a:lstStyle/>
-          <a:p>
-            <a:pPr algn="l">
-              <a:spcAft>
-                <a:spcPts val="1000"/>
-              </a:spcAft>
-            </a:pPr>
-            <a:r>
-              <a:rPr sz="2400" b="0">
-                <a:solidFill>
-                  <a:srgbClr val="3C2850"/>
-                </a:solidFill>
-                <a:latin typeface="Microsoft YaHei"/>
-              </a:rPr>
-              <a:t>必做：用150字概括《皇帝的新装》的故事</a:t>
-            </a:r>
-          </a:p>
-        </p:txBody>
-      </p:sp>
-      <p:sp>
-        <p:nvSpPr>
-          <p:cNvPr id="14" name="Oval 13"/>
-          <p:cNvSpPr/>
-          <p:nvPr/>
-        </p:nvSpPr>
-        <p:spPr>
-          <a:xfrm>
-            <a:off x="2255824" y="2395728"/>
-            <a:ext cx="384048" cy="384048"/>
-          </a:xfrm>
-          <a:prstGeom prst="ellipse">
-            <a:avLst/>
-          </a:prstGeom>
-          <a:solidFill>
-            <a:srgbClr val="784696"/>
-          </a:solidFill>
-          <a:ln>
-            <a:noFill/>
-          </a:ln>
-        </p:spPr>
-        <p:style>
-          <a:lnRef idx="1">
-            <a:schemeClr val="accent1"/>
-          </a:lnRef>
-          <a:fillRef idx="3">
-            <a:schemeClr val="accent1"/>
-          </a:fillRef>
-          <a:effectRef idx="2">
-            <a:schemeClr val="accent1"/>
-          </a:effectRef>
-          <a:fontRef idx="minor">
-            <a:schemeClr val="lt1"/>
-          </a:fontRef>
-        </p:style>
-        <p:txBody>
-          <a:bodyPr rtlCol="0" anchor="ctr"/>
-          <a:lstStyle/>
-          <a:p>
-            <a:pPr algn="ctr"/>
-          </a:p>
-        </p:txBody>
-      </p:sp>
-      <p:sp>
-        <p:nvSpPr>
-          <p:cNvPr id="15" name="TextBox 14"/>
-          <p:cNvSpPr txBox="1"/>
-          <p:nvPr/>
-        </p:nvSpPr>
-        <p:spPr>
-          <a:xfrm>
-            <a:off x="2255824" y="2414016"/>
-            <a:ext cx="384048" cy="365760"/>
-          </a:xfrm>
-          <a:prstGeom prst="rect">
-            <a:avLst/>
-          </a:prstGeom>
-          <a:noFill/>
-        </p:spPr>
-        <p:txBody>
-          <a:bodyPr wrap="none">
-            <a:spAutoFit/>
-          </a:bodyPr>
-          <a:lstStyle/>
-          <a:p>
-            <a:pPr algn="ctr">
-              <a:spcAft>
-                <a:spcPts val="1000"/>
-              </a:spcAft>
-            </a:pPr>
-            <a:r>
-              <a:rPr sz="1600" b="1">
-                <a:solidFill>
-                  <a:srgbClr val="FFFFFF"/>
-                </a:solidFill>
-                <a:latin typeface="Microsoft YaHei"/>
-              </a:rPr>
-              <a:t>2</a:t>
-            </a:r>
-          </a:p>
-        </p:txBody>
-      </p:sp>
-      <p:sp>
-        <p:nvSpPr>
-          <p:cNvPr id="16" name="TextBox 15"/>
-          <p:cNvSpPr txBox="1"/>
-          <p:nvPr/>
-        </p:nvSpPr>
-        <p:spPr>
-          <a:xfrm>
-            <a:off x="2758744" y="2377440"/>
-            <a:ext cx="7772400" cy="502920"/>
+            <a:off x="2713024" y="2377440"/>
+            <a:ext cx="7863840" cy="457200"/>
           </a:xfrm>
           <a:prstGeom prst="rect">
             <a:avLst/>

--- a/第六单元PPT/第22课 皇帝的新装.pptx
+++ b/第六单元PPT/第22课 皇帝的新装.pptx
@@ -11,6 +11,8 @@
     <p:sldId id="259" r:id="rId10"/>
     <p:sldId id="260" r:id="rId11"/>
     <p:sldId id="261" r:id="rId12"/>
+    <p:sldId id="262" r:id="rId13"/>
+    <p:sldId id="263" r:id="rId14"/>
   </p:sldIdLst>
   <p:sldSz cx="12191695" cy="6858000" type="screen4x3"/>
   <p:notesSz cx="6858000" cy="9144000"/>
@@ -3095,7 +3097,7 @@
       <p:grpSpPr/>
       <p:pic>
         <p:nvPicPr>
-          <p:cNvPr id="2" name="Picture 1" descr="bg_jinan.png"/>
+          <p:cNvPr id="2" name="Picture 1" descr="bg_emperor.png"/>
           <p:cNvPicPr>
             <a:picLocks noChangeAspect="1"/>
           </p:cNvPicPr>
@@ -3119,62 +3121,23 @@
       </p:pic>
       <p:sp>
         <p:nvSpPr>
-          <p:cNvPr id="3" name="TextBox 2"/>
-          <p:cNvSpPr txBox="1"/>
-          <p:nvPr/>
-        </p:nvSpPr>
-        <p:spPr>
-          <a:xfrm>
-            <a:off x="2286000" y="2103120"/>
-            <a:ext cx="7589520" cy="1097280"/>
+          <p:cNvPr id="3" name="Rectangle 2"/>
+          <p:cNvSpPr/>
+          <p:nvPr/>
+        </p:nvSpPr>
+        <p:spPr>
+          <a:xfrm>
+            <a:off x="292608" y="274320"/>
+            <a:ext cx="11594592" cy="6300216"/>
           </a:xfrm>
           <a:prstGeom prst="rect">
             <a:avLst/>
           </a:prstGeom>
           <a:noFill/>
-        </p:spPr>
-        <p:txBody>
-          <a:bodyPr wrap="none">
-            <a:spAutoFit/>
-          </a:bodyPr>
-          <a:lstStyle/>
-          <a:p>
-            <a:pPr algn="ctr">
-              <a:spcAft>
-                <a:spcPts val="800"/>
-              </a:spcAft>
-            </a:pPr>
-            <a:r>
-              <a:rPr sz="5200" b="1">
-                <a:solidFill>
-                  <a:srgbClr val="1E325A"/>
-                </a:solidFill>
-                <a:latin typeface="Microsoft YaHei"/>
-              </a:rPr>
-              <a:t>皇 帝 的 新 装</a:t>
-            </a:r>
-          </a:p>
-        </p:txBody>
-      </p:sp>
-      <p:sp>
-        <p:nvSpPr>
-          <p:cNvPr id="4" name="Rectangle 3"/>
-          <p:cNvSpPr/>
-          <p:nvPr/>
-        </p:nvSpPr>
-        <p:spPr>
-          <a:xfrm>
-            <a:off x="3200400" y="3200400"/>
-            <a:ext cx="5760720" cy="36576"/>
-          </a:xfrm>
-          <a:prstGeom prst="rect">
-            <a:avLst/>
-          </a:prstGeom>
-          <a:solidFill>
-            <a:srgbClr val="3264B4"/>
-          </a:solidFill>
-          <a:ln>
-            <a:noFill/>
+          <a:ln w="31750">
+            <a:solidFill>
+              <a:srgbClr val="825AA0"/>
+            </a:solidFill>
           </a:ln>
         </p:spPr>
         <p:style>
@@ -3199,103 +3162,73 @@
           </a:p>
         </p:txBody>
       </p:sp>
-      <p:sp>
-        <p:nvSpPr>
-          <p:cNvPr id="5" name="TextBox 4"/>
-          <p:cNvSpPr txBox="1"/>
-          <p:nvPr/>
-        </p:nvSpPr>
-        <p:spPr>
-          <a:xfrm>
-            <a:off x="7772400" y="3337560"/>
-            <a:ext cx="1828800" cy="457200"/>
+      <p:pic>
+        <p:nvPicPr>
+          <p:cNvPr id="4" name="Picture 3" descr="corner_emperor_tl.png"/>
+          <p:cNvPicPr>
+            <a:picLocks noChangeAspect="1"/>
+          </p:cNvPicPr>
+          <p:nvPr/>
+        </p:nvPicPr>
+        <p:blipFill>
+          <a:blip r:embed="rId3"/>
+          <a:stretch>
+            <a:fillRect/>
+          </a:stretch>
+        </p:blipFill>
+        <p:spPr>
+          <a:xfrm>
+            <a:off x="-45720" y="-45720"/>
+            <a:ext cx="2011680" cy="2011680"/>
+          </a:xfrm>
+          <a:prstGeom prst="rect">
+            <a:avLst/>
+          </a:prstGeom>
+        </p:spPr>
+      </p:pic>
+      <p:pic>
+        <p:nvPicPr>
+          <p:cNvPr id="5" name="Picture 4" descr="corner_emperor_tr.png"/>
+          <p:cNvPicPr>
+            <a:picLocks noChangeAspect="1"/>
+          </p:cNvPicPr>
+          <p:nvPr/>
+        </p:nvPicPr>
+        <p:blipFill>
+          <a:blip r:embed="rId4"/>
+          <a:stretch>
+            <a:fillRect/>
+          </a:stretch>
+        </p:blipFill>
+        <p:spPr>
+          <a:xfrm>
+            <a:off x="9875520" y="-45720"/>
+            <a:ext cx="2011680" cy="2011680"/>
+          </a:xfrm>
+          <a:prstGeom prst="rect">
+            <a:avLst/>
+          </a:prstGeom>
+        </p:spPr>
+      </p:pic>
+      <p:sp>
+        <p:nvSpPr>
+          <p:cNvPr id="6" name="Rectangle 5"/>
+          <p:cNvSpPr/>
+          <p:nvPr/>
+        </p:nvSpPr>
+        <p:spPr>
+          <a:xfrm>
+            <a:off x="292608" y="274320"/>
+            <a:ext cx="11594592" cy="6300216"/>
           </a:xfrm>
           <a:prstGeom prst="rect">
             <a:avLst/>
           </a:prstGeom>
           <a:noFill/>
-        </p:spPr>
-        <p:txBody>
-          <a:bodyPr wrap="none">
-            <a:spAutoFit/>
-          </a:bodyPr>
-          <a:lstStyle/>
-          <a:p>
-            <a:pPr algn="r">
-              <a:spcAft>
-                <a:spcPts val="800"/>
-              </a:spcAft>
-            </a:pPr>
-            <a:r>
-              <a:rPr sz="2800" b="0">
-                <a:solidFill>
-                  <a:srgbClr val="3264B4"/>
-                </a:solidFill>
-                <a:latin typeface="Microsoft YaHei"/>
-              </a:rPr>
-              <a:t>安徒生</a:t>
-            </a:r>
-          </a:p>
-        </p:txBody>
-      </p:sp>
-      <p:sp>
-        <p:nvSpPr>
-          <p:cNvPr id="6" name="TextBox 5"/>
-          <p:cNvSpPr txBox="1"/>
-          <p:nvPr/>
-        </p:nvSpPr>
-        <p:spPr>
-          <a:xfrm>
-            <a:off x="2286000" y="3931920"/>
-            <a:ext cx="7589520" cy="548640"/>
-          </a:xfrm>
-          <a:prstGeom prst="rect">
-            <a:avLst/>
-          </a:prstGeom>
-          <a:noFill/>
-        </p:spPr>
-        <p:txBody>
-          <a:bodyPr wrap="none">
-            <a:spAutoFit/>
-          </a:bodyPr>
-          <a:lstStyle/>
-          <a:p>
-            <a:pPr algn="ctr">
-              <a:spcAft>
-                <a:spcPts val="800"/>
-              </a:spcAft>
-            </a:pPr>
-            <a:r>
-              <a:rPr sz="2200" b="0">
-                <a:solidFill>
-                  <a:srgbClr val="1E325A"/>
-                </a:solidFill>
-                <a:latin typeface="Microsoft YaHei"/>
-              </a:rPr>
-              <a:t>母题：真实与虚假</a:t>
-            </a:r>
-          </a:p>
-        </p:txBody>
-      </p:sp>
-      <p:sp>
-        <p:nvSpPr>
-          <p:cNvPr id="7" name="Oval 6"/>
-          <p:cNvSpPr/>
-          <p:nvPr/>
-        </p:nvSpPr>
-        <p:spPr>
-          <a:xfrm>
-            <a:off x="2560320" y="2286000"/>
-            <a:ext cx="137160" cy="137160"/>
-          </a:xfrm>
-          <a:prstGeom prst="ellipse">
-            <a:avLst/>
-          </a:prstGeom>
-          <a:solidFill>
-            <a:srgbClr val="B4D2F0"/>
-          </a:solidFill>
-          <a:ln>
-            <a:noFill/>
+          <a:ln w="31750">
+            <a:solidFill>
+              <a:srgbClr val="825AA0"/>
+            </a:solidFill>
           </a:ln>
         </p:spPr>
         <p:style>
@@ -3322,23 +3255,23 @@
       </p:sp>
       <p:sp>
         <p:nvSpPr>
-          <p:cNvPr id="8" name="Oval 7"/>
+          <p:cNvPr id="7" name="Rectangle 6"/>
           <p:cNvSpPr/>
           <p:nvPr/>
         </p:nvSpPr>
         <p:spPr>
           <a:xfrm>
-            <a:off x="2377440" y="2651760"/>
-            <a:ext cx="91440" cy="91440"/>
-          </a:xfrm>
-          <a:prstGeom prst="ellipse">
-            <a:avLst/>
-          </a:prstGeom>
-          <a:solidFill>
-            <a:srgbClr val="B4D2F0"/>
-          </a:solidFill>
-          <a:ln>
-            <a:noFill/>
+            <a:off x="347472" y="329184"/>
+            <a:ext cx="11484864" cy="6190488"/>
+          </a:xfrm>
+          <a:prstGeom prst="rect">
+            <a:avLst/>
+          </a:prstGeom>
+          <a:noFill/>
+          <a:ln w="12700">
+            <a:solidFill>
+              <a:srgbClr val="C8AADC"/>
+            </a:solidFill>
           </a:ln>
         </p:spPr>
         <p:style>
@@ -3365,20 +3298,75 @@
       </p:sp>
       <p:sp>
         <p:nvSpPr>
-          <p:cNvPr id="9" name="Oval 8"/>
+          <p:cNvPr id="8" name="TextBox 7"/>
+          <p:cNvSpPr txBox="1"/>
+          <p:nvPr/>
+        </p:nvSpPr>
+        <p:spPr>
+          <a:xfrm>
+            <a:off x="1371600" y="1828800"/>
+            <a:ext cx="9418320" cy="1828800"/>
+          </a:xfrm>
+          <a:prstGeom prst="rect">
+            <a:avLst/>
+          </a:prstGeom>
+          <a:noFill/>
+        </p:spPr>
+        <p:txBody>
+          <a:bodyPr wrap="none">
+            <a:spAutoFit/>
+          </a:bodyPr>
+          <a:lstStyle/>
+          <a:p>
+            <a:pPr algn="ctr">
+              <a:spcAft>
+                <a:spcPts val="1000"/>
+              </a:spcAft>
+            </a:pPr>
+            <a:r>
+              <a:rPr sz="5200" b="1">
+                <a:solidFill>
+                  <a:srgbClr val="784696"/>
+                </a:solidFill>
+                <a:latin typeface="Microsoft YaHei"/>
+              </a:rPr>
+              <a:t>皇帝的新装</a:t>
+            </a:r>
+          </a:p>
+          <a:p>
+            <a:pPr algn="ctr">
+              <a:spcAft>
+                <a:spcPts val="1000"/>
+              </a:spcAft>
+            </a:pPr>
+            <a:r>
+              <a:rPr sz="2600" b="0">
+                <a:solidFill>
+                  <a:srgbClr val="3C2850"/>
+                </a:solidFill>
+                <a:latin typeface="Microsoft YaHei"/>
+              </a:rPr>
+              <a:t>第22课 · 第四、五课时 · 真实与虚假</a:t>
+            </a:r>
+          </a:p>
+        </p:txBody>
+      </p:sp>
+      <p:sp>
+        <p:nvSpPr>
+          <p:cNvPr id="9" name="Rectangle 8"/>
           <p:cNvSpPr/>
           <p:nvPr/>
         </p:nvSpPr>
         <p:spPr>
           <a:xfrm>
-            <a:off x="2743200" y="2834640"/>
-            <a:ext cx="182880" cy="182880"/>
-          </a:xfrm>
-          <a:prstGeom prst="ellipse">
+            <a:off x="3200400" y="5029200"/>
+            <a:ext cx="5760720" cy="27432"/>
+          </a:xfrm>
+          <a:prstGeom prst="rect">
             <a:avLst/>
           </a:prstGeom>
           <a:solidFill>
-            <a:srgbClr val="B4D2F0"/>
+            <a:srgbClr val="C8AADC"/>
           </a:solidFill>
           <a:ln>
             <a:noFill/>
@@ -3426,7 +3414,7 @@
       <p:grpSpPr/>
       <p:pic>
         <p:nvPicPr>
-          <p:cNvPr id="2" name="Picture 1" descr="bg_jinan.png"/>
+          <p:cNvPr id="2" name="Picture 1" descr="bg_emperor.png"/>
           <p:cNvPicPr>
             <a:picLocks noChangeAspect="1"/>
           </p:cNvPicPr>
@@ -3456,17 +3444,17 @@
         </p:nvSpPr>
         <p:spPr>
           <a:xfrm>
-            <a:off x="457200" y="320040"/>
-            <a:ext cx="11247120" cy="502920"/>
-          </a:xfrm>
-          <a:prstGeom prst="rect">
-            <a:avLst/>
-          </a:prstGeom>
-          <a:solidFill>
-            <a:srgbClr val="3264B4"/>
-          </a:solidFill>
-          <a:ln>
-            <a:noFill/>
+            <a:off x="292608" y="274320"/>
+            <a:ext cx="11594592" cy="6300216"/>
+          </a:xfrm>
+          <a:prstGeom prst="rect">
+            <a:avLst/>
+          </a:prstGeom>
+          <a:noFill/>
+          <a:ln w="31750">
+            <a:solidFill>
+              <a:srgbClr val="825AA0"/>
+            </a:solidFill>
           </a:ln>
         </p:spPr>
         <p:style>
@@ -3491,105 +3479,73 @@
           </a:p>
         </p:txBody>
       </p:sp>
-      <p:sp>
-        <p:nvSpPr>
-          <p:cNvPr id="4" name="TextBox 3"/>
-          <p:cNvSpPr txBox="1"/>
-          <p:nvPr/>
-        </p:nvSpPr>
-        <p:spPr>
-          <a:xfrm>
-            <a:off x="640080" y="347472"/>
-            <a:ext cx="10972800" cy="457200"/>
-          </a:xfrm>
-          <a:prstGeom prst="rect">
-            <a:avLst/>
-          </a:prstGeom>
-          <a:noFill/>
-        </p:spPr>
-        <p:txBody>
-          <a:bodyPr wrap="none">
-            <a:spAutoFit/>
-          </a:bodyPr>
-          <a:lstStyle/>
-          <a:p>
-            <a:pPr algn="l">
-              <a:spcAft>
-                <a:spcPts val="800"/>
-              </a:spcAft>
-            </a:pPr>
-            <a:r>
-              <a:rPr sz="2200" b="1">
-                <a:solidFill>
-                  <a:srgbClr val="FFFFFF"/>
-                </a:solidFill>
-                <a:latin typeface="Microsoft YaHei"/>
-              </a:rPr>
-              <a:t>文学常识</a:t>
-            </a:r>
-          </a:p>
-        </p:txBody>
-      </p:sp>
-      <p:sp>
-        <p:nvSpPr>
-          <p:cNvPr id="5" name="TextBox 4"/>
-          <p:cNvSpPr txBox="1"/>
-          <p:nvPr/>
-        </p:nvSpPr>
-        <p:spPr>
-          <a:xfrm>
-            <a:off x="1371600" y="1005840"/>
-            <a:ext cx="9144000" cy="640080"/>
-          </a:xfrm>
-          <a:prstGeom prst="rect">
-            <a:avLst/>
-          </a:prstGeom>
-          <a:noFill/>
-        </p:spPr>
-        <p:txBody>
-          <a:bodyPr wrap="none">
-            <a:spAutoFit/>
-          </a:bodyPr>
-          <a:lstStyle/>
-          <a:p>
-            <a:pPr algn="ctr">
-              <a:spcAft>
-                <a:spcPts val="800"/>
-              </a:spcAft>
-            </a:pPr>
-            <a:r>
-              <a:rPr sz="3600" b="1">
-                <a:solidFill>
-                  <a:srgbClr val="1E325A"/>
-                </a:solidFill>
-                <a:latin typeface="Microsoft YaHei"/>
-              </a:rPr>
-              <a:t>知人论世</a:t>
-            </a:r>
-          </a:p>
-        </p:txBody>
-      </p:sp>
-      <p:sp>
-        <p:nvSpPr>
-          <p:cNvPr id="6" name="Rectangle 5"/>
+      <p:pic>
+        <p:nvPicPr>
+          <p:cNvPr id="4" name="Picture 3" descr="corner_emperor_tl.png"/>
+          <p:cNvPicPr>
+            <a:picLocks noChangeAspect="1"/>
+          </p:cNvPicPr>
+          <p:nvPr/>
+        </p:nvPicPr>
+        <p:blipFill>
+          <a:blip r:embed="rId3"/>
+          <a:stretch>
+            <a:fillRect/>
+          </a:stretch>
+        </p:blipFill>
+        <p:spPr>
+          <a:xfrm>
+            <a:off x="-45720" y="-45720"/>
+            <a:ext cx="2011680" cy="2011680"/>
+          </a:xfrm>
+          <a:prstGeom prst="rect">
+            <a:avLst/>
+          </a:prstGeom>
+        </p:spPr>
+      </p:pic>
+      <p:pic>
+        <p:nvPicPr>
+          <p:cNvPr id="5" name="Picture 4" descr="corner_emperor_tr.png"/>
+          <p:cNvPicPr>
+            <a:picLocks noChangeAspect="1"/>
+          </p:cNvPicPr>
+          <p:nvPr/>
+        </p:nvPicPr>
+        <p:blipFill>
+          <a:blip r:embed="rId4"/>
+          <a:stretch>
+            <a:fillRect/>
+          </a:stretch>
+        </p:blipFill>
+        <p:spPr>
+          <a:xfrm>
+            <a:off x="9875520" y="-45720"/>
+            <a:ext cx="2011680" cy="2011680"/>
+          </a:xfrm>
+          <a:prstGeom prst="rect">
+            <a:avLst/>
+          </a:prstGeom>
+        </p:spPr>
+      </p:pic>
+      <p:sp>
+        <p:nvSpPr>
+          <p:cNvPr id="6" name="Rounded Rectangle 5"/>
           <p:cNvSpPr/>
           <p:nvPr/>
         </p:nvSpPr>
         <p:spPr>
           <a:xfrm>
-            <a:off x="822960" y="1828800"/>
-            <a:ext cx="10515600" cy="4206240"/>
-          </a:xfrm>
-          <a:prstGeom prst="rect">
+            <a:off x="4953304" y="502920"/>
+            <a:ext cx="2286000" cy="411480"/>
+          </a:xfrm>
+          <a:prstGeom prst="roundRect">
             <a:avLst/>
           </a:prstGeom>
           <a:solidFill>
-            <a:srgbClr val="FFFFFF"/>
+            <a:srgbClr val="C8AADC"/>
           </a:solidFill>
-          <a:ln w="25400">
-            <a:solidFill>
-              <a:srgbClr val="B4D2F0"/>
-            </a:solidFill>
+          <a:ln>
+            <a:noFill/>
           </a:ln>
         </p:spPr>
         <p:style>
@@ -3622,8 +3578,8 @@
         </p:nvSpPr>
         <p:spPr>
           <a:xfrm>
-            <a:off x="1097280" y="2011680"/>
-            <a:ext cx="10058400" cy="731520"/>
+            <a:off x="4953304" y="521208"/>
+            <a:ext cx="2286000" cy="384048"/>
           </a:xfrm>
           <a:prstGeom prst="rect">
             <a:avLst/>
@@ -3636,24 +3592,220 @@
           </a:bodyPr>
           <a:lstStyle/>
           <a:p>
+            <a:pPr algn="ctr">
+              <a:spcAft>
+                <a:spcPts val="1000"/>
+              </a:spcAft>
+            </a:pPr>
+            <a:r>
+              <a:rPr sz="1800" b="1">
+                <a:solidFill>
+                  <a:srgbClr val="3C2850"/>
+                </a:solidFill>
+                <a:latin typeface="Microsoft YaHei"/>
+              </a:rPr>
+              <a:t>课堂笔记</a:t>
+            </a:r>
+          </a:p>
+        </p:txBody>
+      </p:sp>
+      <p:sp>
+        <p:nvSpPr>
+          <p:cNvPr id="8" name="TextBox 7"/>
+          <p:cNvSpPr txBox="1"/>
+          <p:nvPr/>
+        </p:nvSpPr>
+        <p:spPr>
+          <a:xfrm>
+            <a:off x="1371600" y="1051560"/>
+            <a:ext cx="9418320" cy="822960"/>
+          </a:xfrm>
+          <a:prstGeom prst="rect">
+            <a:avLst/>
+          </a:prstGeom>
+          <a:noFill/>
+        </p:spPr>
+        <p:txBody>
+          <a:bodyPr wrap="square">
+            <a:spAutoFit/>
+          </a:bodyPr>
+          <a:lstStyle/>
+          <a:p>
+            <a:pPr algn="ctr">
+              <a:spcAft>
+                <a:spcPts val="1000"/>
+              </a:spcAft>
+            </a:pPr>
+            <a:r>
+              <a:rPr sz="3600" b="1">
+                <a:solidFill>
+                  <a:srgbClr val="784696"/>
+                </a:solidFill>
+                <a:latin typeface="Microsoft YaHei"/>
+              </a:rPr>
+              <a:t>文学常识</a:t>
+            </a:r>
+          </a:p>
+        </p:txBody>
+      </p:sp>
+      <p:sp>
+        <p:nvSpPr>
+          <p:cNvPr id="9" name="Rectangle 8"/>
+          <p:cNvSpPr/>
+          <p:nvPr/>
+        </p:nvSpPr>
+        <p:spPr>
+          <a:xfrm>
+            <a:off x="3200400" y="1691640"/>
+            <a:ext cx="5760720" cy="27432"/>
+          </a:xfrm>
+          <a:prstGeom prst="rect">
+            <a:avLst/>
+          </a:prstGeom>
+          <a:solidFill>
+            <a:srgbClr val="C8AADC"/>
+          </a:solidFill>
+          <a:ln>
+            <a:noFill/>
+          </a:ln>
+        </p:spPr>
+        <p:style>
+          <a:lnRef idx="1">
+            <a:schemeClr val="accent1"/>
+          </a:lnRef>
+          <a:fillRef idx="3">
+            <a:schemeClr val="accent1"/>
+          </a:fillRef>
+          <a:effectRef idx="2">
+            <a:schemeClr val="accent1"/>
+          </a:effectRef>
+          <a:fontRef idx="minor">
+            <a:schemeClr val="lt1"/>
+          </a:fontRef>
+        </p:style>
+        <p:txBody>
+          <a:bodyPr rtlCol="0" anchor="ctr"/>
+          <a:lstStyle/>
+          <a:p>
+            <a:pPr algn="ctr"/>
+          </a:p>
+        </p:txBody>
+      </p:sp>
+      <p:sp>
+        <p:nvSpPr>
+          <p:cNvPr id="10" name="Rounded Rectangle 9"/>
+          <p:cNvSpPr/>
+          <p:nvPr/>
+        </p:nvSpPr>
+        <p:spPr>
+          <a:xfrm>
+            <a:off x="1249984" y="1810512"/>
+            <a:ext cx="9692640" cy="3319272"/>
+          </a:xfrm>
+          <a:prstGeom prst="roundRect">
+            <a:avLst/>
+          </a:prstGeom>
+          <a:solidFill>
+            <a:srgbClr val="FCF8FF"/>
+          </a:solidFill>
+          <a:ln w="19050">
+            <a:solidFill>
+              <a:srgbClr val="C8AADC"/>
+            </a:solidFill>
+          </a:ln>
+        </p:spPr>
+        <p:style>
+          <a:lnRef idx="1">
+            <a:schemeClr val="accent1"/>
+          </a:lnRef>
+          <a:fillRef idx="3">
+            <a:schemeClr val="accent1"/>
+          </a:fillRef>
+          <a:effectRef idx="2">
+            <a:schemeClr val="accent1"/>
+          </a:effectRef>
+          <a:fontRef idx="minor">
+            <a:schemeClr val="lt1"/>
+          </a:fontRef>
+        </p:style>
+        <p:txBody>
+          <a:bodyPr rtlCol="0" anchor="ctr"/>
+          <a:lstStyle/>
+          <a:p>
+            <a:pPr algn="ctr"/>
+          </a:p>
+        </p:txBody>
+      </p:sp>
+      <p:sp>
+        <p:nvSpPr>
+          <p:cNvPr id="11" name="TextBox 10"/>
+          <p:cNvSpPr txBox="1"/>
+          <p:nvPr/>
+        </p:nvSpPr>
+        <p:spPr>
+          <a:xfrm>
+            <a:off x="1463040" y="1920240"/>
+            <a:ext cx="2103120" cy="502920"/>
+          </a:xfrm>
+          <a:prstGeom prst="rect">
+            <a:avLst/>
+          </a:prstGeom>
+          <a:noFill/>
+        </p:spPr>
+        <p:txBody>
+          <a:bodyPr wrap="none">
+            <a:spAutoFit/>
+          </a:bodyPr>
+          <a:lstStyle/>
+          <a:p>
+            <a:pPr algn="r">
+              <a:spcAft>
+                <a:spcPts val="1000"/>
+              </a:spcAft>
+            </a:pPr>
+            <a:r>
+              <a:rPr sz="2200" b="1">
+                <a:solidFill>
+                  <a:srgbClr val="784696"/>
+                </a:solidFill>
+                <a:latin typeface="Microsoft YaHei"/>
+              </a:rPr>
+              <a:t>作者</a:t>
+            </a:r>
+          </a:p>
+        </p:txBody>
+      </p:sp>
+      <p:sp>
+        <p:nvSpPr>
+          <p:cNvPr id="12" name="TextBox 11"/>
+          <p:cNvSpPr txBox="1"/>
+          <p:nvPr/>
+        </p:nvSpPr>
+        <p:spPr>
+          <a:xfrm>
+            <a:off x="3749039" y="1920240"/>
+            <a:ext cx="7132320" cy="685800"/>
+          </a:xfrm>
+          <a:prstGeom prst="rect">
+            <a:avLst/>
+          </a:prstGeom>
+          <a:noFill/>
+        </p:spPr>
+        <p:txBody>
+          <a:bodyPr wrap="none">
+            <a:spAutoFit/>
+          </a:bodyPr>
+          <a:lstStyle/>
+          <a:p>
             <a:pPr algn="l">
               <a:spcAft>
-                <a:spcPts val="800"/>
+                <a:spcPts val="1000"/>
               </a:spcAft>
             </a:pPr>
             <a:r>
-              <a:rPr sz="2400" b="1">
-                <a:solidFill>
-                  <a:srgbClr val="3264B4"/>
-                </a:solidFill>
-                <a:latin typeface="Microsoft YaHei"/>
-              </a:rPr>
-              <a:t>【作者】</a:t>
-            </a:r>
-            <a:r>
-              <a:rPr sz="2400" b="0">
-                <a:solidFill>
-                  <a:srgbClr val="1E325A"/>
+              <a:rPr sz="2200" b="0">
+                <a:solidFill>
+                  <a:srgbClr val="3C2850"/>
                 </a:solidFill>
                 <a:latin typeface="Microsoft YaHei"/>
               </a:rPr>
@@ -3664,14 +3816,14 @@
       </p:sp>
       <p:sp>
         <p:nvSpPr>
-          <p:cNvPr id="8" name="TextBox 7"/>
+          <p:cNvPr id="13" name="TextBox 12"/>
           <p:cNvSpPr txBox="1"/>
           <p:nvPr/>
         </p:nvSpPr>
         <p:spPr>
           <a:xfrm>
-            <a:off x="1097280" y="2651760"/>
-            <a:ext cx="10058400" cy="731520"/>
+            <a:off x="1463040" y="2670048"/>
+            <a:ext cx="2103120" cy="502920"/>
           </a:xfrm>
           <a:prstGeom prst="rect">
             <a:avLst/>
@@ -3684,24 +3836,54 @@
           </a:bodyPr>
           <a:lstStyle/>
           <a:p>
+            <a:pPr algn="r">
+              <a:spcAft>
+                <a:spcPts val="1000"/>
+              </a:spcAft>
+            </a:pPr>
+            <a:r>
+              <a:rPr sz="2200" b="1">
+                <a:solidFill>
+                  <a:srgbClr val="784696"/>
+                </a:solidFill>
+                <a:latin typeface="Microsoft YaHei"/>
+              </a:rPr>
+              <a:t>文体</a:t>
+            </a:r>
+          </a:p>
+        </p:txBody>
+      </p:sp>
+      <p:sp>
+        <p:nvSpPr>
+          <p:cNvPr id="14" name="TextBox 13"/>
+          <p:cNvSpPr txBox="1"/>
+          <p:nvPr/>
+        </p:nvSpPr>
+        <p:spPr>
+          <a:xfrm>
+            <a:off x="3749039" y="2670048"/>
+            <a:ext cx="7132320" cy="685800"/>
+          </a:xfrm>
+          <a:prstGeom prst="rect">
+            <a:avLst/>
+          </a:prstGeom>
+          <a:noFill/>
+        </p:spPr>
+        <p:txBody>
+          <a:bodyPr wrap="none">
+            <a:spAutoFit/>
+          </a:bodyPr>
+          <a:lstStyle/>
+          <a:p>
             <a:pPr algn="l">
               <a:spcAft>
-                <a:spcPts val="800"/>
+                <a:spcPts val="1000"/>
               </a:spcAft>
             </a:pPr>
             <a:r>
-              <a:rPr sz="2400" b="1">
-                <a:solidFill>
-                  <a:srgbClr val="3264B4"/>
-                </a:solidFill>
-                <a:latin typeface="Microsoft YaHei"/>
-              </a:rPr>
-              <a:t>【文体】</a:t>
-            </a:r>
-            <a:r>
-              <a:rPr sz="2400" b="0">
-                <a:solidFill>
-                  <a:srgbClr val="1E325A"/>
+              <a:rPr sz="2200" b="0">
+                <a:solidFill>
+                  <a:srgbClr val="3C2850"/>
                 </a:solidFill>
                 <a:latin typeface="Microsoft YaHei"/>
               </a:rPr>
@@ -3712,14 +3894,14 @@
       </p:sp>
       <p:sp>
         <p:nvSpPr>
-          <p:cNvPr id="9" name="TextBox 8"/>
+          <p:cNvPr id="15" name="TextBox 14"/>
           <p:cNvSpPr txBox="1"/>
           <p:nvPr/>
         </p:nvSpPr>
         <p:spPr>
           <a:xfrm>
-            <a:off x="1097280" y="3291840"/>
-            <a:ext cx="10058400" cy="731520"/>
+            <a:off x="1463040" y="3419856"/>
+            <a:ext cx="2103120" cy="502920"/>
           </a:xfrm>
           <a:prstGeom prst="rect">
             <a:avLst/>
@@ -3732,24 +3914,54 @@
           </a:bodyPr>
           <a:lstStyle/>
           <a:p>
+            <a:pPr algn="r">
+              <a:spcAft>
+                <a:spcPts val="1000"/>
+              </a:spcAft>
+            </a:pPr>
+            <a:r>
+              <a:rPr sz="2200" b="1">
+                <a:solidFill>
+                  <a:srgbClr val="784696"/>
+                </a:solidFill>
+                <a:latin typeface="Microsoft YaHei"/>
+              </a:rPr>
+              <a:t>本文特点</a:t>
+            </a:r>
+          </a:p>
+        </p:txBody>
+      </p:sp>
+      <p:sp>
+        <p:nvSpPr>
+          <p:cNvPr id="16" name="TextBox 15"/>
+          <p:cNvSpPr txBox="1"/>
+          <p:nvPr/>
+        </p:nvSpPr>
+        <p:spPr>
+          <a:xfrm>
+            <a:off x="3749039" y="3419856"/>
+            <a:ext cx="7132320" cy="685800"/>
+          </a:xfrm>
+          <a:prstGeom prst="rect">
+            <a:avLst/>
+          </a:prstGeom>
+          <a:noFill/>
+        </p:spPr>
+        <p:txBody>
+          <a:bodyPr wrap="none">
+            <a:spAutoFit/>
+          </a:bodyPr>
+          <a:lstStyle/>
+          <a:p>
             <a:pPr algn="l">
               <a:spcAft>
-                <a:spcPts val="800"/>
+                <a:spcPts val="1000"/>
               </a:spcAft>
             </a:pPr>
             <a:r>
-              <a:rPr sz="2400" b="1">
-                <a:solidFill>
-                  <a:srgbClr val="3264B4"/>
-                </a:solidFill>
-                <a:latin typeface="Microsoft YaHei"/>
-              </a:rPr>
-              <a:t>【特点】</a:t>
-            </a:r>
-            <a:r>
-              <a:rPr sz="2400" b="0">
-                <a:solidFill>
-                  <a:srgbClr val="1E325A"/>
+              <a:rPr sz="2200" b="0">
+                <a:solidFill>
+                  <a:srgbClr val="3C2850"/>
                 </a:solidFill>
                 <a:latin typeface="Microsoft YaHei"/>
               </a:rPr>
@@ -3760,14 +3972,14 @@
       </p:sp>
       <p:sp>
         <p:nvSpPr>
-          <p:cNvPr id="10" name="TextBox 9"/>
+          <p:cNvPr id="17" name="TextBox 16"/>
           <p:cNvSpPr txBox="1"/>
           <p:nvPr/>
         </p:nvSpPr>
         <p:spPr>
           <a:xfrm>
-            <a:off x="1097280" y="3931920"/>
-            <a:ext cx="10058400" cy="731520"/>
+            <a:off x="1463040" y="4169664"/>
+            <a:ext cx="2103120" cy="502920"/>
           </a:xfrm>
           <a:prstGeom prst="rect">
             <a:avLst/>
@@ -3780,24 +3992,54 @@
           </a:bodyPr>
           <a:lstStyle/>
           <a:p>
+            <a:pPr algn="r">
+              <a:spcAft>
+                <a:spcPts val="1000"/>
+              </a:spcAft>
+            </a:pPr>
+            <a:r>
+              <a:rPr sz="2200" b="1">
+                <a:solidFill>
+                  <a:srgbClr val="784696"/>
+                </a:solidFill>
+                <a:latin typeface="Microsoft YaHei"/>
+              </a:rPr>
+              <a:t>核心问题</a:t>
+            </a:r>
+          </a:p>
+        </p:txBody>
+      </p:sp>
+      <p:sp>
+        <p:nvSpPr>
+          <p:cNvPr id="18" name="TextBox 17"/>
+          <p:cNvSpPr txBox="1"/>
+          <p:nvPr/>
+        </p:nvSpPr>
+        <p:spPr>
+          <a:xfrm>
+            <a:off x="3749039" y="4169664"/>
+            <a:ext cx="7132320" cy="685800"/>
+          </a:xfrm>
+          <a:prstGeom prst="rect">
+            <a:avLst/>
+          </a:prstGeom>
+          <a:noFill/>
+        </p:spPr>
+        <p:txBody>
+          <a:bodyPr wrap="none">
+            <a:spAutoFit/>
+          </a:bodyPr>
+          <a:lstStyle/>
+          <a:p>
             <a:pPr algn="l">
               <a:spcAft>
-                <a:spcPts val="800"/>
+                <a:spcPts val="1000"/>
               </a:spcAft>
             </a:pPr>
             <a:r>
-              <a:rPr sz="2400" b="1">
-                <a:solidFill>
-                  <a:srgbClr val="3264B4"/>
-                </a:solidFill>
-                <a:latin typeface="Microsoft YaHei"/>
-              </a:rPr>
-              <a:t>【核心】</a:t>
-            </a:r>
-            <a:r>
-              <a:rPr sz="2400" b="0">
-                <a:solidFill>
-                  <a:srgbClr val="1E325A"/>
+              <a:rPr sz="2200" b="0">
+                <a:solidFill>
+                  <a:srgbClr val="3C2850"/>
                 </a:solidFill>
                 <a:latin typeface="Microsoft YaHei"/>
               </a:rPr>
@@ -3826,7 +4068,7 @@
       <p:grpSpPr/>
       <p:pic>
         <p:nvPicPr>
-          <p:cNvPr id="2" name="Picture 1" descr="bg_jinan.png"/>
+          <p:cNvPr id="2" name="Picture 1" descr="bg_emperor.png"/>
           <p:cNvPicPr>
             <a:picLocks noChangeAspect="1"/>
           </p:cNvPicPr>
@@ -3856,17 +4098,17 @@
         </p:nvSpPr>
         <p:spPr>
           <a:xfrm>
-            <a:off x="457200" y="320040"/>
-            <a:ext cx="11247120" cy="502920"/>
-          </a:xfrm>
-          <a:prstGeom prst="rect">
-            <a:avLst/>
-          </a:prstGeom>
-          <a:solidFill>
-            <a:srgbClr val="3264B4"/>
-          </a:solidFill>
-          <a:ln>
-            <a:noFill/>
+            <a:off x="292608" y="274320"/>
+            <a:ext cx="11594592" cy="6300216"/>
+          </a:xfrm>
+          <a:prstGeom prst="rect">
+            <a:avLst/>
+          </a:prstGeom>
+          <a:noFill/>
+          <a:ln w="31750">
+            <a:solidFill>
+              <a:srgbClr val="825AA0"/>
+            </a:solidFill>
           </a:ln>
         </p:spPr>
         <p:style>
@@ -3891,105 +4133,73 @@
           </a:p>
         </p:txBody>
       </p:sp>
-      <p:sp>
-        <p:nvSpPr>
-          <p:cNvPr id="4" name="TextBox 3"/>
-          <p:cNvSpPr txBox="1"/>
-          <p:nvPr/>
-        </p:nvSpPr>
-        <p:spPr>
-          <a:xfrm>
-            <a:off x="640080" y="347472"/>
-            <a:ext cx="10972800" cy="457200"/>
-          </a:xfrm>
-          <a:prstGeom prst="rect">
-            <a:avLst/>
-          </a:prstGeom>
-          <a:noFill/>
-        </p:spPr>
-        <p:txBody>
-          <a:bodyPr wrap="none">
-            <a:spAutoFit/>
-          </a:bodyPr>
-          <a:lstStyle/>
-          <a:p>
-            <a:pPr algn="l">
-              <a:spcAft>
-                <a:spcPts val="800"/>
-              </a:spcAft>
-            </a:pPr>
-            <a:r>
-              <a:rPr sz="2200" b="1">
-                <a:solidFill>
-                  <a:srgbClr val="FFFFFF"/>
-                </a:solidFill>
-                <a:latin typeface="Microsoft YaHei"/>
-              </a:rPr>
-              <a:t>构建逻辑：梳理情节</a:t>
-            </a:r>
-          </a:p>
-        </p:txBody>
-      </p:sp>
-      <p:sp>
-        <p:nvSpPr>
-          <p:cNvPr id="5" name="TextBox 4"/>
-          <p:cNvSpPr txBox="1"/>
-          <p:nvPr/>
-        </p:nvSpPr>
-        <p:spPr>
-          <a:xfrm>
-            <a:off x="1371600" y="1005840"/>
-            <a:ext cx="9144000" cy="640080"/>
-          </a:xfrm>
-          <a:prstGeom prst="rect">
-            <a:avLst/>
-          </a:prstGeom>
-          <a:noFill/>
-        </p:spPr>
-        <p:txBody>
-          <a:bodyPr wrap="none">
-            <a:spAutoFit/>
-          </a:bodyPr>
-          <a:lstStyle/>
-          <a:p>
-            <a:pPr algn="ctr">
-              <a:spcAft>
-                <a:spcPts val="800"/>
-              </a:spcAft>
-            </a:pPr>
-            <a:r>
-              <a:rPr sz="3600" b="1">
-                <a:solidFill>
-                  <a:srgbClr val="1E325A"/>
-                </a:solidFill>
-                <a:latin typeface="Microsoft YaHei"/>
-              </a:rPr>
-              <a:t>给骗局画流程图</a:t>
-            </a:r>
-          </a:p>
-        </p:txBody>
-      </p:sp>
-      <p:sp>
-        <p:nvSpPr>
-          <p:cNvPr id="6" name="Rectangle 5"/>
+      <p:pic>
+        <p:nvPicPr>
+          <p:cNvPr id="4" name="Picture 3" descr="corner_emperor_tl.png"/>
+          <p:cNvPicPr>
+            <a:picLocks noChangeAspect="1"/>
+          </p:cNvPicPr>
+          <p:nvPr/>
+        </p:nvPicPr>
+        <p:blipFill>
+          <a:blip r:embed="rId3"/>
+          <a:stretch>
+            <a:fillRect/>
+          </a:stretch>
+        </p:blipFill>
+        <p:spPr>
+          <a:xfrm>
+            <a:off x="-45720" y="-45720"/>
+            <a:ext cx="2011680" cy="2011680"/>
+          </a:xfrm>
+          <a:prstGeom prst="rect">
+            <a:avLst/>
+          </a:prstGeom>
+        </p:spPr>
+      </p:pic>
+      <p:pic>
+        <p:nvPicPr>
+          <p:cNvPr id="5" name="Picture 4" descr="corner_emperor_tr.png"/>
+          <p:cNvPicPr>
+            <a:picLocks noChangeAspect="1"/>
+          </p:cNvPicPr>
+          <p:nvPr/>
+        </p:nvPicPr>
+        <p:blipFill>
+          <a:blip r:embed="rId4"/>
+          <a:stretch>
+            <a:fillRect/>
+          </a:stretch>
+        </p:blipFill>
+        <p:spPr>
+          <a:xfrm>
+            <a:off x="9875520" y="-45720"/>
+            <a:ext cx="2011680" cy="2011680"/>
+          </a:xfrm>
+          <a:prstGeom prst="rect">
+            <a:avLst/>
+          </a:prstGeom>
+        </p:spPr>
+      </p:pic>
+      <p:sp>
+        <p:nvSpPr>
+          <p:cNvPr id="6" name="Rounded Rectangle 5"/>
           <p:cNvSpPr/>
           <p:nvPr/>
         </p:nvSpPr>
         <p:spPr>
           <a:xfrm>
-            <a:off x="731520" y="1828800"/>
-            <a:ext cx="6858000" cy="4206240"/>
-          </a:xfrm>
-          <a:prstGeom prst="rect">
+            <a:off x="4953304" y="502920"/>
+            <a:ext cx="2286000" cy="411480"/>
+          </a:xfrm>
+          <a:prstGeom prst="roundRect">
             <a:avLst/>
           </a:prstGeom>
           <a:solidFill>
-            <a:srgbClr val="FFFFFF"/>
+            <a:srgbClr val="C8AADC"/>
           </a:solidFill>
-          <a:ln w="25400">
-            <a:solidFill>
-              <a:srgbClr val="B4D2F0"/>
-            </a:solidFill>
+          <a:ln>
+            <a:noFill/>
           </a:ln>
         </p:spPr>
         <p:style>
@@ -4022,8 +4232,8 @@
         </p:nvSpPr>
         <p:spPr>
           <a:xfrm>
-            <a:off x="1005840" y="2011680"/>
-            <a:ext cx="6400800" cy="640080"/>
+            <a:off x="4953304" y="521208"/>
+            <a:ext cx="2286000" cy="384048"/>
           </a:xfrm>
           <a:prstGeom prst="rect">
             <a:avLst/>
@@ -4036,19 +4246,19 @@
           </a:bodyPr>
           <a:lstStyle/>
           <a:p>
-            <a:pPr algn="l">
+            <a:pPr algn="ctr">
               <a:spcAft>
-                <a:spcPts val="800"/>
+                <a:spcPts val="1000"/>
               </a:spcAft>
             </a:pPr>
             <a:r>
-              <a:rPr sz="2800" b="0">
-                <a:solidFill>
-                  <a:srgbClr val="1E325A"/>
+              <a:rPr sz="1800" b="1">
+                <a:solidFill>
+                  <a:srgbClr val="3C2850"/>
                 </a:solidFill>
                 <a:latin typeface="Microsoft YaHei"/>
               </a:rPr>
-              <a:t>两个骗子：能织出只有聪明人才能看见的衣服</a:t>
+              <a:t>情节笔记</a:t>
             </a:r>
           </a:p>
         </p:txBody>
@@ -4061,8 +4271,135 @@
         </p:nvSpPr>
         <p:spPr>
           <a:xfrm>
-            <a:off x="1005840" y="2788920"/>
-            <a:ext cx="6400800" cy="640080"/>
+            <a:off x="1371600" y="1051560"/>
+            <a:ext cx="9418320" cy="822960"/>
+          </a:xfrm>
+          <a:prstGeom prst="rect">
+            <a:avLst/>
+          </a:prstGeom>
+          <a:noFill/>
+        </p:spPr>
+        <p:txBody>
+          <a:bodyPr wrap="square">
+            <a:spAutoFit/>
+          </a:bodyPr>
+          <a:lstStyle/>
+          <a:p>
+            <a:pPr algn="ctr">
+              <a:spcAft>
+                <a:spcPts val="1000"/>
+              </a:spcAft>
+            </a:pPr>
+            <a:r>
+              <a:rPr sz="3600" b="1">
+                <a:solidFill>
+                  <a:srgbClr val="784696"/>
+                </a:solidFill>
+                <a:latin typeface="Microsoft YaHei"/>
+              </a:rPr>
+              <a:t>情节结构</a:t>
+            </a:r>
+          </a:p>
+        </p:txBody>
+      </p:sp>
+      <p:sp>
+        <p:nvSpPr>
+          <p:cNvPr id="9" name="Rectangle 8"/>
+          <p:cNvSpPr/>
+          <p:nvPr/>
+        </p:nvSpPr>
+        <p:spPr>
+          <a:xfrm>
+            <a:off x="3200400" y="1691640"/>
+            <a:ext cx="5760720" cy="27432"/>
+          </a:xfrm>
+          <a:prstGeom prst="rect">
+            <a:avLst/>
+          </a:prstGeom>
+          <a:solidFill>
+            <a:srgbClr val="C8AADC"/>
+          </a:solidFill>
+          <a:ln>
+            <a:noFill/>
+          </a:ln>
+        </p:spPr>
+        <p:style>
+          <a:lnRef idx="1">
+            <a:schemeClr val="accent1"/>
+          </a:lnRef>
+          <a:fillRef idx="3">
+            <a:schemeClr val="accent1"/>
+          </a:fillRef>
+          <a:effectRef idx="2">
+            <a:schemeClr val="accent1"/>
+          </a:effectRef>
+          <a:fontRef idx="minor">
+            <a:schemeClr val="lt1"/>
+          </a:fontRef>
+        </p:style>
+        <p:txBody>
+          <a:bodyPr rtlCol="0" anchor="ctr"/>
+          <a:lstStyle/>
+          <a:p>
+            <a:pPr algn="ctr"/>
+          </a:p>
+        </p:txBody>
+      </p:sp>
+      <p:sp>
+        <p:nvSpPr>
+          <p:cNvPr id="10" name="Rounded Rectangle 9"/>
+          <p:cNvSpPr/>
+          <p:nvPr/>
+        </p:nvSpPr>
+        <p:spPr>
+          <a:xfrm>
+            <a:off x="1249984" y="1810512"/>
+            <a:ext cx="9692640" cy="3319272"/>
+          </a:xfrm>
+          <a:prstGeom prst="roundRect">
+            <a:avLst/>
+          </a:prstGeom>
+          <a:solidFill>
+            <a:srgbClr val="FCF8FF"/>
+          </a:solidFill>
+          <a:ln w="19050">
+            <a:solidFill>
+              <a:srgbClr val="C8AADC"/>
+            </a:solidFill>
+          </a:ln>
+        </p:spPr>
+        <p:style>
+          <a:lnRef idx="1">
+            <a:schemeClr val="accent1"/>
+          </a:lnRef>
+          <a:fillRef idx="3">
+            <a:schemeClr val="accent1"/>
+          </a:fillRef>
+          <a:effectRef idx="2">
+            <a:schemeClr val="accent1"/>
+          </a:effectRef>
+          <a:fontRef idx="minor">
+            <a:schemeClr val="lt1"/>
+          </a:fontRef>
+        </p:style>
+        <p:txBody>
+          <a:bodyPr rtlCol="0" anchor="ctr"/>
+          <a:lstStyle/>
+          <a:p>
+            <a:pPr algn="ctr"/>
+          </a:p>
+        </p:txBody>
+      </p:sp>
+      <p:sp>
+        <p:nvSpPr>
+          <p:cNvPr id="11" name="TextBox 10"/>
+          <p:cNvSpPr txBox="1"/>
+          <p:nvPr/>
+        </p:nvSpPr>
+        <p:spPr>
+          <a:xfrm>
+            <a:off x="1463040" y="1920240"/>
+            <a:ext cx="2103120" cy="502920"/>
           </a:xfrm>
           <a:prstGeom prst="rect">
             <a:avLst/>
@@ -4075,33 +4412,33 @@
           </a:bodyPr>
           <a:lstStyle/>
           <a:p>
-            <a:pPr algn="l">
+            <a:pPr algn="r">
               <a:spcAft>
-                <a:spcPts val="800"/>
+                <a:spcPts val="1000"/>
               </a:spcAft>
             </a:pPr>
             <a:r>
-              <a:rPr sz="2800" b="0">
-                <a:solidFill>
-                  <a:srgbClr val="1E325A"/>
+              <a:rPr sz="2200" b="1">
+                <a:solidFill>
+                  <a:srgbClr val="784696"/>
                 </a:solidFill>
                 <a:latin typeface="Microsoft YaHei"/>
               </a:rPr>
-              <a:t>老大臣、官员、皇帝：先后「看布」，不敢说真话</a:t>
-            </a:r>
-          </a:p>
-        </p:txBody>
-      </p:sp>
-      <p:sp>
-        <p:nvSpPr>
-          <p:cNvPr id="9" name="TextBox 8"/>
+              <a:t>开端</a:t>
+            </a:r>
+          </a:p>
+        </p:txBody>
+      </p:sp>
+      <p:sp>
+        <p:nvSpPr>
+          <p:cNvPr id="12" name="TextBox 11"/>
           <p:cNvSpPr txBox="1"/>
           <p:nvPr/>
         </p:nvSpPr>
         <p:spPr>
           <a:xfrm>
-            <a:off x="1005840" y="3566160"/>
-            <a:ext cx="6400800" cy="640080"/>
+            <a:off x="3749039" y="1920240"/>
+            <a:ext cx="7132320" cy="685800"/>
           </a:xfrm>
           <a:prstGeom prst="rect">
             <a:avLst/>
@@ -4116,31 +4453,31 @@
           <a:p>
             <a:pPr algn="l">
               <a:spcAft>
-                <a:spcPts val="800"/>
+                <a:spcPts val="1000"/>
               </a:spcAft>
             </a:pPr>
             <a:r>
-              <a:rPr sz="2800" b="0">
-                <a:solidFill>
-                  <a:srgbClr val="1E325A"/>
+              <a:rPr sz="2200" b="0">
+                <a:solidFill>
+                  <a:srgbClr val="3C2850"/>
                 </a:solidFill>
                 <a:latin typeface="Microsoft YaHei"/>
               </a:rPr>
-              <a:t>全城游行：百姓假装看见新装</a:t>
-            </a:r>
-          </a:p>
-        </p:txBody>
-      </p:sp>
-      <p:sp>
-        <p:nvSpPr>
-          <p:cNvPr id="10" name="TextBox 9"/>
+              <a:t>两个骗子说能织出只有聪明人才能看见的衣服</a:t>
+            </a:r>
+          </a:p>
+        </p:txBody>
+      </p:sp>
+      <p:sp>
+        <p:nvSpPr>
+          <p:cNvPr id="13" name="TextBox 12"/>
           <p:cNvSpPr txBox="1"/>
           <p:nvPr/>
         </p:nvSpPr>
         <p:spPr>
           <a:xfrm>
-            <a:off x="1005840" y="4343400"/>
-            <a:ext cx="6400800" cy="640080"/>
+            <a:off x="1463040" y="2670048"/>
+            <a:ext cx="2103120" cy="502920"/>
           </a:xfrm>
           <a:prstGeom prst="rect">
             <a:avLst/>
@@ -4153,33 +4490,33 @@
           </a:bodyPr>
           <a:lstStyle/>
           <a:p>
-            <a:pPr algn="l">
+            <a:pPr algn="r">
               <a:spcAft>
-                <a:spcPts val="800"/>
+                <a:spcPts val="1000"/>
               </a:spcAft>
             </a:pPr>
             <a:r>
-              <a:rPr sz="2800" b="0">
-                <a:solidFill>
-                  <a:srgbClr val="1E325A"/>
+              <a:rPr sz="2200" b="1">
+                <a:solidFill>
+                  <a:srgbClr val="784696"/>
                 </a:solidFill>
                 <a:latin typeface="Microsoft YaHei"/>
               </a:rPr>
-              <a:t>小孩说真话→百姓跟着说→皇帝仍装模作样</a:t>
-            </a:r>
-          </a:p>
-        </p:txBody>
-      </p:sp>
-      <p:sp>
-        <p:nvSpPr>
-          <p:cNvPr id="11" name="TextBox 10"/>
+              <a:t>发展</a:t>
+            </a:r>
+          </a:p>
+        </p:txBody>
+      </p:sp>
+      <p:sp>
+        <p:nvSpPr>
+          <p:cNvPr id="14" name="TextBox 13"/>
           <p:cNvSpPr txBox="1"/>
           <p:nvPr/>
         </p:nvSpPr>
         <p:spPr>
           <a:xfrm>
-            <a:off x="8046720" y="2011680"/>
-            <a:ext cx="3474720" cy="3840480"/>
+            <a:off x="3749039" y="2670048"/>
+            <a:ext cx="7132320" cy="685800"/>
           </a:xfrm>
           <a:prstGeom prst="rect">
             <a:avLst/>
@@ -4192,22 +4529,175 @@
           </a:bodyPr>
           <a:lstStyle/>
           <a:p>
-            <a:pPr algn="ctr">
+            <a:pPr algn="l">
               <a:spcAft>
-                <a:spcPts val="800"/>
+                <a:spcPts val="1000"/>
               </a:spcAft>
             </a:pPr>
             <a:r>
-              <a:rPr sz="3200" b="1">
-                <a:solidFill>
-                  <a:srgbClr val="3264B4"/>
+              <a:rPr sz="2200" b="0">
+                <a:solidFill>
+                  <a:srgbClr val="3C2850"/>
                 </a:solidFill>
                 <a:latin typeface="Microsoft YaHei"/>
               </a:rPr>
-              <a:t>全
-文
-主
-线</a:t>
+              <a:t>皇帝、老大臣、官员先后「看布」，都不敢说真话</a:t>
+            </a:r>
+          </a:p>
+        </p:txBody>
+      </p:sp>
+      <p:sp>
+        <p:nvSpPr>
+          <p:cNvPr id="15" name="TextBox 14"/>
+          <p:cNvSpPr txBox="1"/>
+          <p:nvPr/>
+        </p:nvSpPr>
+        <p:spPr>
+          <a:xfrm>
+            <a:off x="1463040" y="3419856"/>
+            <a:ext cx="2103120" cy="502920"/>
+          </a:xfrm>
+          <a:prstGeom prst="rect">
+            <a:avLst/>
+          </a:prstGeom>
+          <a:noFill/>
+        </p:spPr>
+        <p:txBody>
+          <a:bodyPr wrap="none">
+            <a:spAutoFit/>
+          </a:bodyPr>
+          <a:lstStyle/>
+          <a:p>
+            <a:pPr algn="r">
+              <a:spcAft>
+                <a:spcPts val="1000"/>
+              </a:spcAft>
+            </a:pPr>
+            <a:r>
+              <a:rPr sz="2200" b="1">
+                <a:solidFill>
+                  <a:srgbClr val="784696"/>
+                </a:solidFill>
+                <a:latin typeface="Microsoft YaHei"/>
+              </a:rPr>
+              <a:t>高潮</a:t>
+            </a:r>
+          </a:p>
+        </p:txBody>
+      </p:sp>
+      <p:sp>
+        <p:nvSpPr>
+          <p:cNvPr id="16" name="TextBox 15"/>
+          <p:cNvSpPr txBox="1"/>
+          <p:nvPr/>
+        </p:nvSpPr>
+        <p:spPr>
+          <a:xfrm>
+            <a:off x="3749039" y="3419856"/>
+            <a:ext cx="7132320" cy="685800"/>
+          </a:xfrm>
+          <a:prstGeom prst="rect">
+            <a:avLst/>
+          </a:prstGeom>
+          <a:noFill/>
+        </p:spPr>
+        <p:txBody>
+          <a:bodyPr wrap="none">
+            <a:spAutoFit/>
+          </a:bodyPr>
+          <a:lstStyle/>
+          <a:p>
+            <a:pPr algn="l">
+              <a:spcAft>
+                <a:spcPts val="1000"/>
+              </a:spcAft>
+            </a:pPr>
+            <a:r>
+              <a:rPr sz="2200" b="0">
+                <a:solidFill>
+                  <a:srgbClr val="3C2850"/>
+                </a:solidFill>
+                <a:latin typeface="Microsoft YaHei"/>
+              </a:rPr>
+              <a:t>皇帝穿上「新装」游行，百姓假装看见</a:t>
+            </a:r>
+          </a:p>
+        </p:txBody>
+      </p:sp>
+      <p:sp>
+        <p:nvSpPr>
+          <p:cNvPr id="17" name="TextBox 16"/>
+          <p:cNvSpPr txBox="1"/>
+          <p:nvPr/>
+        </p:nvSpPr>
+        <p:spPr>
+          <a:xfrm>
+            <a:off x="1463040" y="4169664"/>
+            <a:ext cx="2103120" cy="502920"/>
+          </a:xfrm>
+          <a:prstGeom prst="rect">
+            <a:avLst/>
+          </a:prstGeom>
+          <a:noFill/>
+        </p:spPr>
+        <p:txBody>
+          <a:bodyPr wrap="none">
+            <a:spAutoFit/>
+          </a:bodyPr>
+          <a:lstStyle/>
+          <a:p>
+            <a:pPr algn="r">
+              <a:spcAft>
+                <a:spcPts val="1000"/>
+              </a:spcAft>
+            </a:pPr>
+            <a:r>
+              <a:rPr sz="2200" b="1">
+                <a:solidFill>
+                  <a:srgbClr val="784696"/>
+                </a:solidFill>
+                <a:latin typeface="Microsoft YaHei"/>
+              </a:rPr>
+              <a:t>结局</a:t>
+            </a:r>
+          </a:p>
+        </p:txBody>
+      </p:sp>
+      <p:sp>
+        <p:nvSpPr>
+          <p:cNvPr id="18" name="TextBox 17"/>
+          <p:cNvSpPr txBox="1"/>
+          <p:nvPr/>
+        </p:nvSpPr>
+        <p:spPr>
+          <a:xfrm>
+            <a:off x="3749039" y="4169664"/>
+            <a:ext cx="7132320" cy="685800"/>
+          </a:xfrm>
+          <a:prstGeom prst="rect">
+            <a:avLst/>
+          </a:prstGeom>
+          <a:noFill/>
+        </p:spPr>
+        <p:txBody>
+          <a:bodyPr wrap="none">
+            <a:spAutoFit/>
+          </a:bodyPr>
+          <a:lstStyle/>
+          <a:p>
+            <a:pPr algn="l">
+              <a:spcAft>
+                <a:spcPts val="1000"/>
+              </a:spcAft>
+            </a:pPr>
+            <a:r>
+              <a:rPr sz="2200" b="0">
+                <a:solidFill>
+                  <a:srgbClr val="3C2850"/>
+                </a:solidFill>
+                <a:latin typeface="Microsoft YaHei"/>
+              </a:rPr>
+              <a:t>小孩子说「他没穿衣服」，百姓跟着说，皇帝仍装模作样</a:t>
             </a:r>
           </a:p>
         </p:txBody>
@@ -4232,7 +4722,7 @@
       <p:grpSpPr/>
       <p:pic>
         <p:nvPicPr>
-          <p:cNvPr id="2" name="Picture 1" descr="bg_jinan.png"/>
+          <p:cNvPr id="2" name="Picture 1" descr="bg_emperor.png"/>
           <p:cNvPicPr>
             <a:picLocks noChangeAspect="1"/>
           </p:cNvPicPr>
@@ -4262,17 +4752,17 @@
         </p:nvSpPr>
         <p:spPr>
           <a:xfrm>
-            <a:off x="457200" y="320040"/>
-            <a:ext cx="11247120" cy="502920"/>
-          </a:xfrm>
-          <a:prstGeom prst="rect">
-            <a:avLst/>
-          </a:prstGeom>
-          <a:solidFill>
-            <a:srgbClr val="3264B4"/>
-          </a:solidFill>
-          <a:ln>
-            <a:noFill/>
+            <a:off x="292608" y="274320"/>
+            <a:ext cx="11594592" cy="6300216"/>
+          </a:xfrm>
+          <a:prstGeom prst="rect">
+            <a:avLst/>
+          </a:prstGeom>
+          <a:noFill/>
+          <a:ln w="31750">
+            <a:solidFill>
+              <a:srgbClr val="825AA0"/>
+            </a:solidFill>
           </a:ln>
         </p:spPr>
         <p:style>
@@ -4297,105 +4787,73 @@
           </a:p>
         </p:txBody>
       </p:sp>
-      <p:sp>
-        <p:nvSpPr>
-          <p:cNvPr id="4" name="TextBox 3"/>
-          <p:cNvSpPr txBox="1"/>
-          <p:nvPr/>
-        </p:nvSpPr>
-        <p:spPr>
-          <a:xfrm>
-            <a:off x="640080" y="347472"/>
-            <a:ext cx="10972800" cy="457200"/>
-          </a:xfrm>
-          <a:prstGeom prst="rect">
-            <a:avLst/>
-          </a:prstGeom>
-          <a:noFill/>
-        </p:spPr>
-        <p:txBody>
-          <a:bodyPr wrap="none">
-            <a:spAutoFit/>
-          </a:bodyPr>
-          <a:lstStyle/>
-          <a:p>
-            <a:pPr algn="l">
-              <a:spcAft>
-                <a:spcPts val="800"/>
-              </a:spcAft>
-            </a:pPr>
-            <a:r>
-              <a:rPr sz="2200" b="1">
-                <a:solidFill>
-                  <a:srgbClr val="FFFFFF"/>
-                </a:solidFill>
-                <a:latin typeface="Microsoft YaHei"/>
-              </a:rPr>
-              <a:t>构建逻辑：品味手法</a:t>
-            </a:r>
-          </a:p>
-        </p:txBody>
-      </p:sp>
-      <p:sp>
-        <p:nvSpPr>
-          <p:cNvPr id="5" name="TextBox 4"/>
-          <p:cNvSpPr txBox="1"/>
-          <p:nvPr/>
-        </p:nvSpPr>
-        <p:spPr>
-          <a:xfrm>
-            <a:off x="1371600" y="1005840"/>
-            <a:ext cx="9144000" cy="640080"/>
-          </a:xfrm>
-          <a:prstGeom prst="rect">
-            <a:avLst/>
-          </a:prstGeom>
-          <a:noFill/>
-        </p:spPr>
-        <p:txBody>
-          <a:bodyPr wrap="none">
-            <a:spAutoFit/>
-          </a:bodyPr>
-          <a:lstStyle/>
-          <a:p>
-            <a:pPr algn="ctr">
-              <a:spcAft>
-                <a:spcPts val="800"/>
-              </a:spcAft>
-            </a:pPr>
-            <a:r>
-              <a:rPr sz="3600" b="1">
-                <a:solidFill>
-                  <a:srgbClr val="1E325A"/>
-                </a:solidFill>
-                <a:latin typeface="Microsoft YaHei"/>
-              </a:rPr>
-              <a:t>拆解心理机关</a:t>
-            </a:r>
-          </a:p>
-        </p:txBody>
-      </p:sp>
-      <p:sp>
-        <p:nvSpPr>
-          <p:cNvPr id="6" name="Rectangle 5"/>
+      <p:pic>
+        <p:nvPicPr>
+          <p:cNvPr id="4" name="Picture 3" descr="corner_emperor_tl.png"/>
+          <p:cNvPicPr>
+            <a:picLocks noChangeAspect="1"/>
+          </p:cNvPicPr>
+          <p:nvPr/>
+        </p:nvPicPr>
+        <p:blipFill>
+          <a:blip r:embed="rId3"/>
+          <a:stretch>
+            <a:fillRect/>
+          </a:stretch>
+        </p:blipFill>
+        <p:spPr>
+          <a:xfrm>
+            <a:off x="-45720" y="-45720"/>
+            <a:ext cx="2011680" cy="2011680"/>
+          </a:xfrm>
+          <a:prstGeom prst="rect">
+            <a:avLst/>
+          </a:prstGeom>
+        </p:spPr>
+      </p:pic>
+      <p:pic>
+        <p:nvPicPr>
+          <p:cNvPr id="5" name="Picture 4" descr="corner_emperor_tr.png"/>
+          <p:cNvPicPr>
+            <a:picLocks noChangeAspect="1"/>
+          </p:cNvPicPr>
+          <p:nvPr/>
+        </p:nvPicPr>
+        <p:blipFill>
+          <a:blip r:embed="rId4"/>
+          <a:stretch>
+            <a:fillRect/>
+          </a:stretch>
+        </p:blipFill>
+        <p:spPr>
+          <a:xfrm>
+            <a:off x="9875520" y="-45720"/>
+            <a:ext cx="2011680" cy="2011680"/>
+          </a:xfrm>
+          <a:prstGeom prst="rect">
+            <a:avLst/>
+          </a:prstGeom>
+        </p:spPr>
+      </p:pic>
+      <p:sp>
+        <p:nvSpPr>
+          <p:cNvPr id="6" name="Rounded Rectangle 5"/>
           <p:cNvSpPr/>
           <p:nvPr/>
         </p:nvSpPr>
         <p:spPr>
           <a:xfrm>
-            <a:off x="822960" y="1828800"/>
-            <a:ext cx="10515600" cy="4206240"/>
-          </a:xfrm>
-          <a:prstGeom prst="rect">
+            <a:off x="4953304" y="502920"/>
+            <a:ext cx="2286000" cy="411480"/>
+          </a:xfrm>
+          <a:prstGeom prst="roundRect">
             <a:avLst/>
           </a:prstGeom>
           <a:solidFill>
-            <a:srgbClr val="FFFFFF"/>
+            <a:srgbClr val="C8AADC"/>
           </a:solidFill>
-          <a:ln w="25400">
-            <a:solidFill>
-              <a:srgbClr val="B4D2F0"/>
-            </a:solidFill>
+          <a:ln>
+            <a:noFill/>
           </a:ln>
         </p:spPr>
         <p:style>
@@ -4428,8 +4886,8 @@
         </p:nvSpPr>
         <p:spPr>
           <a:xfrm>
-            <a:off x="1097280" y="2011680"/>
-            <a:ext cx="10058400" cy="731520"/>
+            <a:off x="4953304" y="521208"/>
+            <a:ext cx="2286000" cy="384048"/>
           </a:xfrm>
           <a:prstGeom prst="rect">
             <a:avLst/>
@@ -4442,42 +4900,160 @@
           </a:bodyPr>
           <a:lstStyle/>
           <a:p>
-            <a:pPr algn="l">
+            <a:pPr algn="ctr">
               <a:spcAft>
-                <a:spcPts val="800"/>
+                <a:spcPts val="1000"/>
               </a:spcAft>
             </a:pPr>
             <a:r>
-              <a:rPr sz="2400" b="1">
-                <a:solidFill>
-                  <a:srgbClr val="3264B4"/>
+              <a:rPr sz="1800" b="1">
+                <a:solidFill>
+                  <a:srgbClr val="3C2850"/>
                 </a:solidFill>
                 <a:latin typeface="Microsoft YaHei"/>
               </a:rPr>
-              <a:t>【夸张】</a:t>
-            </a:r>
-            <a:r>
-              <a:rPr sz="2400" b="0">
-                <a:solidFill>
-                  <a:srgbClr val="1E325A"/>
+              <a:t>手法笔记</a:t>
+            </a:r>
+          </a:p>
+        </p:txBody>
+      </p:sp>
+      <p:sp>
+        <p:nvSpPr>
+          <p:cNvPr id="8" name="TextBox 7"/>
+          <p:cNvSpPr txBox="1"/>
+          <p:nvPr/>
+        </p:nvSpPr>
+        <p:spPr>
+          <a:xfrm>
+            <a:off x="1371600" y="1051560"/>
+            <a:ext cx="9418320" cy="822960"/>
+          </a:xfrm>
+          <a:prstGeom prst="rect">
+            <a:avLst/>
+          </a:prstGeom>
+          <a:noFill/>
+        </p:spPr>
+        <p:txBody>
+          <a:bodyPr wrap="square">
+            <a:spAutoFit/>
+          </a:bodyPr>
+          <a:lstStyle/>
+          <a:p>
+            <a:pPr algn="ctr">
+              <a:spcAft>
+                <a:spcPts val="1000"/>
+              </a:spcAft>
+            </a:pPr>
+            <a:r>
+              <a:rPr sz="3600" b="1">
+                <a:solidFill>
+                  <a:srgbClr val="784696"/>
                 </a:solidFill>
                 <a:latin typeface="Microsoft YaHei"/>
               </a:rPr>
-              <a:t>把皇帝爱新衣写到极致</a:t>
-            </a:r>
-          </a:p>
-        </p:txBody>
-      </p:sp>
-      <p:sp>
-        <p:nvSpPr>
-          <p:cNvPr id="8" name="TextBox 7"/>
+              <a:t>艺术手法</a:t>
+            </a:r>
+          </a:p>
+        </p:txBody>
+      </p:sp>
+      <p:sp>
+        <p:nvSpPr>
+          <p:cNvPr id="9" name="Rectangle 8"/>
+          <p:cNvSpPr/>
+          <p:nvPr/>
+        </p:nvSpPr>
+        <p:spPr>
+          <a:xfrm>
+            <a:off x="3200400" y="1691640"/>
+            <a:ext cx="5760720" cy="27432"/>
+          </a:xfrm>
+          <a:prstGeom prst="rect">
+            <a:avLst/>
+          </a:prstGeom>
+          <a:solidFill>
+            <a:srgbClr val="C8AADC"/>
+          </a:solidFill>
+          <a:ln>
+            <a:noFill/>
+          </a:ln>
+        </p:spPr>
+        <p:style>
+          <a:lnRef idx="1">
+            <a:schemeClr val="accent1"/>
+          </a:lnRef>
+          <a:fillRef idx="3">
+            <a:schemeClr val="accent1"/>
+          </a:fillRef>
+          <a:effectRef idx="2">
+            <a:schemeClr val="accent1"/>
+          </a:effectRef>
+          <a:fontRef idx="minor">
+            <a:schemeClr val="lt1"/>
+          </a:fontRef>
+        </p:style>
+        <p:txBody>
+          <a:bodyPr rtlCol="0" anchor="ctr"/>
+          <a:lstStyle/>
+          <a:p>
+            <a:pPr algn="ctr"/>
+          </a:p>
+        </p:txBody>
+      </p:sp>
+      <p:sp>
+        <p:nvSpPr>
+          <p:cNvPr id="10" name="Rounded Rectangle 9"/>
+          <p:cNvSpPr/>
+          <p:nvPr/>
+        </p:nvSpPr>
+        <p:spPr>
+          <a:xfrm>
+            <a:off x="1249984" y="1810512"/>
+            <a:ext cx="9692640" cy="3319272"/>
+          </a:xfrm>
+          <a:prstGeom prst="roundRect">
+            <a:avLst/>
+          </a:prstGeom>
+          <a:solidFill>
+            <a:srgbClr val="FCF8FF"/>
+          </a:solidFill>
+          <a:ln w="19050">
+            <a:solidFill>
+              <a:srgbClr val="C8AADC"/>
+            </a:solidFill>
+          </a:ln>
+        </p:spPr>
+        <p:style>
+          <a:lnRef idx="1">
+            <a:schemeClr val="accent1"/>
+          </a:lnRef>
+          <a:fillRef idx="3">
+            <a:schemeClr val="accent1"/>
+          </a:fillRef>
+          <a:effectRef idx="2">
+            <a:schemeClr val="accent1"/>
+          </a:effectRef>
+          <a:fontRef idx="minor">
+            <a:schemeClr val="lt1"/>
+          </a:fontRef>
+        </p:style>
+        <p:txBody>
+          <a:bodyPr rtlCol="0" anchor="ctr"/>
+          <a:lstStyle/>
+          <a:p>
+            <a:pPr algn="ctr"/>
+          </a:p>
+        </p:txBody>
+      </p:sp>
+      <p:sp>
+        <p:nvSpPr>
+          <p:cNvPr id="11" name="TextBox 10"/>
           <p:cNvSpPr txBox="1"/>
           <p:nvPr/>
         </p:nvSpPr>
         <p:spPr>
           <a:xfrm>
-            <a:off x="1097280" y="2651760"/>
-            <a:ext cx="10058400" cy="731520"/>
+            <a:off x="1463040" y="1920240"/>
+            <a:ext cx="2103120" cy="502920"/>
           </a:xfrm>
           <a:prstGeom prst="rect">
             <a:avLst/>
@@ -4490,42 +5066,33 @@
           </a:bodyPr>
           <a:lstStyle/>
           <a:p>
-            <a:pPr algn="l">
+            <a:pPr algn="r">
               <a:spcAft>
-                <a:spcPts val="800"/>
+                <a:spcPts val="1000"/>
               </a:spcAft>
             </a:pPr>
             <a:r>
-              <a:rPr sz="2400" b="1">
-                <a:solidFill>
-                  <a:srgbClr val="3264B4"/>
+              <a:rPr sz="2200" b="1">
+                <a:solidFill>
+                  <a:srgbClr val="784696"/>
                 </a:solidFill>
                 <a:latin typeface="Microsoft YaHei"/>
               </a:rPr>
-              <a:t>【反讽】</a:t>
-            </a:r>
-            <a:r>
-              <a:rPr sz="2400" b="0">
-                <a:solidFill>
-                  <a:srgbClr val="1E325A"/>
-                </a:solidFill>
-                <a:latin typeface="Microsoft YaHei"/>
-              </a:rPr>
-              <a:t>说「看见了」其实什么也没看见</a:t>
-            </a:r>
-          </a:p>
-        </p:txBody>
-      </p:sp>
-      <p:sp>
-        <p:nvSpPr>
-          <p:cNvPr id="9" name="TextBox 8"/>
+              <a:t>夸张</a:t>
+            </a:r>
+          </a:p>
+        </p:txBody>
+      </p:sp>
+      <p:sp>
+        <p:nvSpPr>
+          <p:cNvPr id="12" name="TextBox 11"/>
           <p:cNvSpPr txBox="1"/>
           <p:nvPr/>
         </p:nvSpPr>
         <p:spPr>
           <a:xfrm>
-            <a:off x="1097280" y="3291840"/>
-            <a:ext cx="10058400" cy="731520"/>
+            <a:off x="3749039" y="1920240"/>
+            <a:ext cx="7132320" cy="685800"/>
           </a:xfrm>
           <a:prstGeom prst="rect">
             <a:avLst/>
@@ -4540,22 +5107,169 @@
           <a:p>
             <a:pPr algn="l">
               <a:spcAft>
-                <a:spcPts val="800"/>
+                <a:spcPts val="1000"/>
               </a:spcAft>
             </a:pPr>
             <a:r>
-              <a:rPr sz="2400" b="1">
-                <a:solidFill>
-                  <a:srgbClr val="3264B4"/>
+              <a:rPr sz="2200" b="0">
+                <a:solidFill>
+                  <a:srgbClr val="3C2850"/>
                 </a:solidFill>
                 <a:latin typeface="Microsoft YaHei"/>
               </a:rPr>
-              <a:t>【对比】</a:t>
-            </a:r>
-            <a:r>
-              <a:rPr sz="2400" b="0">
-                <a:solidFill>
-                  <a:srgbClr val="1E325A"/>
+              <a:t>把皇帝爱新衣写到极致：「除非为了炫耀新衣服」</a:t>
+            </a:r>
+          </a:p>
+        </p:txBody>
+      </p:sp>
+      <p:sp>
+        <p:nvSpPr>
+          <p:cNvPr id="13" name="TextBox 12"/>
+          <p:cNvSpPr txBox="1"/>
+          <p:nvPr/>
+        </p:nvSpPr>
+        <p:spPr>
+          <a:xfrm>
+            <a:off x="1463040" y="2670048"/>
+            <a:ext cx="2103120" cy="502920"/>
+          </a:xfrm>
+          <a:prstGeom prst="rect">
+            <a:avLst/>
+          </a:prstGeom>
+          <a:noFill/>
+        </p:spPr>
+        <p:txBody>
+          <a:bodyPr wrap="none">
+            <a:spAutoFit/>
+          </a:bodyPr>
+          <a:lstStyle/>
+          <a:p>
+            <a:pPr algn="r">
+              <a:spcAft>
+                <a:spcPts val="1000"/>
+              </a:spcAft>
+            </a:pPr>
+            <a:r>
+              <a:rPr sz="2200" b="1">
+                <a:solidFill>
+                  <a:srgbClr val="784696"/>
+                </a:solidFill>
+                <a:latin typeface="Microsoft YaHei"/>
+              </a:rPr>
+              <a:t>反讽</a:t>
+            </a:r>
+          </a:p>
+        </p:txBody>
+      </p:sp>
+      <p:sp>
+        <p:nvSpPr>
+          <p:cNvPr id="14" name="TextBox 13"/>
+          <p:cNvSpPr txBox="1"/>
+          <p:nvPr/>
+        </p:nvSpPr>
+        <p:spPr>
+          <a:xfrm>
+            <a:off x="3749039" y="2670048"/>
+            <a:ext cx="7132320" cy="685800"/>
+          </a:xfrm>
+          <a:prstGeom prst="rect">
+            <a:avLst/>
+          </a:prstGeom>
+          <a:noFill/>
+        </p:spPr>
+        <p:txBody>
+          <a:bodyPr wrap="none">
+            <a:spAutoFit/>
+          </a:bodyPr>
+          <a:lstStyle/>
+          <a:p>
+            <a:pPr algn="l">
+              <a:spcAft>
+                <a:spcPts val="1000"/>
+              </a:spcAft>
+            </a:pPr>
+            <a:r>
+              <a:rPr sz="2200" b="0">
+                <a:solidFill>
+                  <a:srgbClr val="3C2850"/>
+                </a:solidFill>
+                <a:latin typeface="Microsoft YaHei"/>
+              </a:rPr>
+              <a:t>说「看见了」其实什么也没看见，讽刺虚伪</a:t>
+            </a:r>
+          </a:p>
+        </p:txBody>
+      </p:sp>
+      <p:sp>
+        <p:nvSpPr>
+          <p:cNvPr id="15" name="TextBox 14"/>
+          <p:cNvSpPr txBox="1"/>
+          <p:nvPr/>
+        </p:nvSpPr>
+        <p:spPr>
+          <a:xfrm>
+            <a:off x="1463040" y="3419856"/>
+            <a:ext cx="2103120" cy="502920"/>
+          </a:xfrm>
+          <a:prstGeom prst="rect">
+            <a:avLst/>
+          </a:prstGeom>
+          <a:noFill/>
+        </p:spPr>
+        <p:txBody>
+          <a:bodyPr wrap="none">
+            <a:spAutoFit/>
+          </a:bodyPr>
+          <a:lstStyle/>
+          <a:p>
+            <a:pPr algn="r">
+              <a:spcAft>
+                <a:spcPts val="1000"/>
+              </a:spcAft>
+            </a:pPr>
+            <a:r>
+              <a:rPr sz="2200" b="1">
+                <a:solidFill>
+                  <a:srgbClr val="784696"/>
+                </a:solidFill>
+                <a:latin typeface="Microsoft YaHei"/>
+              </a:rPr>
+              <a:t>对比</a:t>
+            </a:r>
+          </a:p>
+        </p:txBody>
+      </p:sp>
+      <p:sp>
+        <p:nvSpPr>
+          <p:cNvPr id="16" name="TextBox 15"/>
+          <p:cNvSpPr txBox="1"/>
+          <p:nvPr/>
+        </p:nvSpPr>
+        <p:spPr>
+          <a:xfrm>
+            <a:off x="3749039" y="3419856"/>
+            <a:ext cx="7132320" cy="685800"/>
+          </a:xfrm>
+          <a:prstGeom prst="rect">
+            <a:avLst/>
+          </a:prstGeom>
+          <a:noFill/>
+        </p:spPr>
+        <p:txBody>
+          <a:bodyPr wrap="none">
+            <a:spAutoFit/>
+          </a:bodyPr>
+          <a:lstStyle/>
+          <a:p>
+            <a:pPr algn="l">
+              <a:spcAft>
+                <a:spcPts val="1000"/>
+              </a:spcAft>
+            </a:pPr>
+            <a:r>
+              <a:rPr sz="2200" b="0">
+                <a:solidFill>
+                  <a:srgbClr val="3C2850"/>
                 </a:solidFill>
                 <a:latin typeface="Microsoft YaHei"/>
               </a:rPr>
@@ -4566,14 +5280,14 @@
       </p:sp>
       <p:sp>
         <p:nvSpPr>
-          <p:cNvPr id="10" name="TextBox 9"/>
+          <p:cNvPr id="17" name="TextBox 16"/>
           <p:cNvSpPr txBox="1"/>
           <p:nvPr/>
         </p:nvSpPr>
         <p:spPr>
           <a:xfrm>
-            <a:off x="1097280" y="3931920"/>
-            <a:ext cx="10058400" cy="731520"/>
+            <a:off x="1463040" y="4169664"/>
+            <a:ext cx="2103120" cy="502920"/>
           </a:xfrm>
           <a:prstGeom prst="rect">
             <a:avLst/>
@@ -4586,28 +5300,58 @@
           </a:bodyPr>
           <a:lstStyle/>
           <a:p>
+            <a:pPr algn="r">
+              <a:spcAft>
+                <a:spcPts val="1000"/>
+              </a:spcAft>
+            </a:pPr>
+            <a:r>
+              <a:rPr sz="2200" b="1">
+                <a:solidFill>
+                  <a:srgbClr val="784696"/>
+                </a:solidFill>
+                <a:latin typeface="Microsoft YaHei"/>
+              </a:rPr>
+              <a:t>反复</a:t>
+            </a:r>
+          </a:p>
+        </p:txBody>
+      </p:sp>
+      <p:sp>
+        <p:nvSpPr>
+          <p:cNvPr id="18" name="TextBox 17"/>
+          <p:cNvSpPr txBox="1"/>
+          <p:nvPr/>
+        </p:nvSpPr>
+        <p:spPr>
+          <a:xfrm>
+            <a:off x="3749039" y="4169664"/>
+            <a:ext cx="7132320" cy="685800"/>
+          </a:xfrm>
+          <a:prstGeom prst="rect">
+            <a:avLst/>
+          </a:prstGeom>
+          <a:noFill/>
+        </p:spPr>
+        <p:txBody>
+          <a:bodyPr wrap="none">
+            <a:spAutoFit/>
+          </a:bodyPr>
+          <a:lstStyle/>
+          <a:p>
             <a:pPr algn="l">
               <a:spcAft>
-                <a:spcPts val="800"/>
+                <a:spcPts val="1000"/>
               </a:spcAft>
             </a:pPr>
             <a:r>
-              <a:rPr sz="2400" b="1">
-                <a:solidFill>
-                  <a:srgbClr val="3264B4"/>
+              <a:rPr sz="2200" b="0">
+                <a:solidFill>
+                  <a:srgbClr val="3C2850"/>
                 </a:solidFill>
                 <a:latin typeface="Microsoft YaHei"/>
               </a:rPr>
-              <a:t>【反复】</a:t>
-            </a:r>
-            <a:r>
-              <a:rPr sz="2400" b="0">
-                <a:solidFill>
-                  <a:srgbClr val="1E325A"/>
-                </a:solidFill>
-                <a:latin typeface="Microsoft YaHei"/>
-              </a:rPr>
-              <a:t>「我什么也没有看见」强化讽刺</a:t>
+              <a:t>「我什么也没有看见」反复出现，强化讽刺效果</a:t>
             </a:r>
           </a:p>
         </p:txBody>
@@ -4632,7 +5376,7 @@
       <p:grpSpPr/>
       <p:pic>
         <p:nvPicPr>
-          <p:cNvPr id="2" name="Picture 1" descr="bg_jinan.png"/>
+          <p:cNvPr id="2" name="Picture 1" descr="bg_emperor.png"/>
           <p:cNvPicPr>
             <a:picLocks noChangeAspect="1"/>
           </p:cNvPicPr>
@@ -4662,17 +5406,17 @@
         </p:nvSpPr>
         <p:spPr>
           <a:xfrm>
-            <a:off x="457200" y="320040"/>
-            <a:ext cx="11247120" cy="502920"/>
-          </a:xfrm>
-          <a:prstGeom prst="rect">
-            <a:avLst/>
-          </a:prstGeom>
-          <a:solidFill>
-            <a:srgbClr val="3264B4"/>
-          </a:solidFill>
-          <a:ln>
-            <a:noFill/>
+            <a:off x="292608" y="274320"/>
+            <a:ext cx="11594592" cy="6300216"/>
+          </a:xfrm>
+          <a:prstGeom prst="rect">
+            <a:avLst/>
+          </a:prstGeom>
+          <a:noFill/>
+          <a:ln w="31750">
+            <a:solidFill>
+              <a:srgbClr val="825AA0"/>
+            </a:solidFill>
           </a:ln>
         </p:spPr>
         <p:style>
@@ -4697,105 +5441,73 @@
           </a:p>
         </p:txBody>
       </p:sp>
-      <p:sp>
-        <p:nvSpPr>
-          <p:cNvPr id="4" name="TextBox 3"/>
-          <p:cNvSpPr txBox="1"/>
-          <p:nvPr/>
-        </p:nvSpPr>
-        <p:spPr>
-          <a:xfrm>
-            <a:off x="640080" y="347472"/>
-            <a:ext cx="10972800" cy="457200"/>
-          </a:xfrm>
-          <a:prstGeom prst="rect">
-            <a:avLst/>
-          </a:prstGeom>
-          <a:noFill/>
-        </p:spPr>
-        <p:txBody>
-          <a:bodyPr wrap="none">
-            <a:spAutoFit/>
-          </a:bodyPr>
-          <a:lstStyle/>
-          <a:p>
-            <a:pPr algn="l">
-              <a:spcAft>
-                <a:spcPts val="800"/>
-              </a:spcAft>
-            </a:pPr>
-            <a:r>
-              <a:rPr sz="2200" b="1">
-                <a:solidFill>
-                  <a:srgbClr val="FFFFFF"/>
-                </a:solidFill>
-                <a:latin typeface="Microsoft YaHei"/>
-              </a:rPr>
-              <a:t>构建逻辑：探究主题</a:t>
-            </a:r>
-          </a:p>
-        </p:txBody>
-      </p:sp>
-      <p:sp>
-        <p:nvSpPr>
-          <p:cNvPr id="5" name="TextBox 4"/>
-          <p:cNvSpPr txBox="1"/>
-          <p:nvPr/>
-        </p:nvSpPr>
-        <p:spPr>
-          <a:xfrm>
-            <a:off x="1371600" y="1005840"/>
-            <a:ext cx="9144000" cy="640080"/>
-          </a:xfrm>
-          <a:prstGeom prst="rect">
-            <a:avLst/>
-          </a:prstGeom>
-          <a:noFill/>
-        </p:spPr>
-        <p:txBody>
-          <a:bodyPr wrap="none">
-            <a:spAutoFit/>
-          </a:bodyPr>
-          <a:lstStyle/>
-          <a:p>
-            <a:pPr algn="ctr">
-              <a:spcAft>
-                <a:spcPts val="800"/>
-              </a:spcAft>
-            </a:pPr>
-            <a:r>
-              <a:rPr sz="3600" b="1">
-                <a:solidFill>
-                  <a:srgbClr val="1E325A"/>
-                </a:solidFill>
-                <a:latin typeface="Microsoft YaHei"/>
-              </a:rPr>
-              <a:t>真话为何难以说出口</a:t>
-            </a:r>
-          </a:p>
-        </p:txBody>
-      </p:sp>
-      <p:sp>
-        <p:nvSpPr>
-          <p:cNvPr id="6" name="Rectangle 5"/>
+      <p:pic>
+        <p:nvPicPr>
+          <p:cNvPr id="4" name="Picture 3" descr="corner_emperor_tl.png"/>
+          <p:cNvPicPr>
+            <a:picLocks noChangeAspect="1"/>
+          </p:cNvPicPr>
+          <p:nvPr/>
+        </p:nvPicPr>
+        <p:blipFill>
+          <a:blip r:embed="rId3"/>
+          <a:stretch>
+            <a:fillRect/>
+          </a:stretch>
+        </p:blipFill>
+        <p:spPr>
+          <a:xfrm>
+            <a:off x="-45720" y="-45720"/>
+            <a:ext cx="2011680" cy="2011680"/>
+          </a:xfrm>
+          <a:prstGeom prst="rect">
+            <a:avLst/>
+          </a:prstGeom>
+        </p:spPr>
+      </p:pic>
+      <p:pic>
+        <p:nvPicPr>
+          <p:cNvPr id="5" name="Picture 4" descr="corner_emperor_tr.png"/>
+          <p:cNvPicPr>
+            <a:picLocks noChangeAspect="1"/>
+          </p:cNvPicPr>
+          <p:nvPr/>
+        </p:nvPicPr>
+        <p:blipFill>
+          <a:blip r:embed="rId4"/>
+          <a:stretch>
+            <a:fillRect/>
+          </a:stretch>
+        </p:blipFill>
+        <p:spPr>
+          <a:xfrm>
+            <a:off x="9875520" y="-45720"/>
+            <a:ext cx="2011680" cy="2011680"/>
+          </a:xfrm>
+          <a:prstGeom prst="rect">
+            <a:avLst/>
+          </a:prstGeom>
+        </p:spPr>
+      </p:pic>
+      <p:sp>
+        <p:nvSpPr>
+          <p:cNvPr id="6" name="Rounded Rectangle 5"/>
           <p:cNvSpPr/>
           <p:nvPr/>
         </p:nvSpPr>
         <p:spPr>
           <a:xfrm>
-            <a:off x="822960" y="1828800"/>
-            <a:ext cx="10515600" cy="4206240"/>
-          </a:xfrm>
-          <a:prstGeom prst="rect">
+            <a:off x="4953304" y="502920"/>
+            <a:ext cx="2286000" cy="411480"/>
+          </a:xfrm>
+          <a:prstGeom prst="roundRect">
             <a:avLst/>
           </a:prstGeom>
           <a:solidFill>
-            <a:srgbClr val="FFFFFF"/>
+            <a:srgbClr val="C8AADC"/>
           </a:solidFill>
-          <a:ln w="25400">
-            <a:solidFill>
-              <a:srgbClr val="B4D2F0"/>
-            </a:solidFill>
+          <a:ln>
+            <a:noFill/>
           </a:ln>
         </p:spPr>
         <p:style>
@@ -4828,8 +5540,8 @@
         </p:nvSpPr>
         <p:spPr>
           <a:xfrm>
-            <a:off x="1097280" y="2011680"/>
-            <a:ext cx="10058400" cy="640080"/>
+            <a:off x="4953304" y="521208"/>
+            <a:ext cx="2286000" cy="384048"/>
           </a:xfrm>
           <a:prstGeom prst="rect">
             <a:avLst/>
@@ -4842,19 +5554,19 @@
           </a:bodyPr>
           <a:lstStyle/>
           <a:p>
-            <a:pPr algn="l">
+            <a:pPr algn="ctr">
               <a:spcAft>
-                <a:spcPts val="800"/>
+                <a:spcPts val="1000"/>
               </a:spcAft>
             </a:pPr>
             <a:r>
-              <a:rPr sz="2400" b="0">
-                <a:solidFill>
-                  <a:srgbClr val="1E325A"/>
+              <a:rPr sz="1800" b="1">
+                <a:solidFill>
+                  <a:srgbClr val="3C2850"/>
                 </a:solidFill>
                 <a:latin typeface="Microsoft YaHei"/>
               </a:rPr>
-              <a:t>害怕被认为「不聪明」或「不称职」</a:t>
+              <a:t>主题笔记</a:t>
             </a:r>
           </a:p>
         </p:txBody>
@@ -4867,8 +5579,135 @@
         </p:nvSpPr>
         <p:spPr>
           <a:xfrm>
-            <a:off x="1097280" y="2651760"/>
-            <a:ext cx="10058400" cy="640080"/>
+            <a:off x="1371600" y="1051560"/>
+            <a:ext cx="9418320" cy="822960"/>
+          </a:xfrm>
+          <a:prstGeom prst="rect">
+            <a:avLst/>
+          </a:prstGeom>
+          <a:noFill/>
+        </p:spPr>
+        <p:txBody>
+          <a:bodyPr wrap="square">
+            <a:spAutoFit/>
+          </a:bodyPr>
+          <a:lstStyle/>
+          <a:p>
+            <a:pPr algn="ctr">
+              <a:spcAft>
+                <a:spcPts val="1000"/>
+              </a:spcAft>
+            </a:pPr>
+            <a:r>
+              <a:rPr sz="3600" b="1">
+                <a:solidFill>
+                  <a:srgbClr val="784696"/>
+                </a:solidFill>
+                <a:latin typeface="Microsoft YaHei"/>
+              </a:rPr>
+              <a:t>主题理解</a:t>
+            </a:r>
+          </a:p>
+        </p:txBody>
+      </p:sp>
+      <p:sp>
+        <p:nvSpPr>
+          <p:cNvPr id="9" name="Rectangle 8"/>
+          <p:cNvSpPr/>
+          <p:nvPr/>
+        </p:nvSpPr>
+        <p:spPr>
+          <a:xfrm>
+            <a:off x="3200400" y="1691640"/>
+            <a:ext cx="5760720" cy="27432"/>
+          </a:xfrm>
+          <a:prstGeom prst="rect">
+            <a:avLst/>
+          </a:prstGeom>
+          <a:solidFill>
+            <a:srgbClr val="C8AADC"/>
+          </a:solidFill>
+          <a:ln>
+            <a:noFill/>
+          </a:ln>
+        </p:spPr>
+        <p:style>
+          <a:lnRef idx="1">
+            <a:schemeClr val="accent1"/>
+          </a:lnRef>
+          <a:fillRef idx="3">
+            <a:schemeClr val="accent1"/>
+          </a:fillRef>
+          <a:effectRef idx="2">
+            <a:schemeClr val="accent1"/>
+          </a:effectRef>
+          <a:fontRef idx="minor">
+            <a:schemeClr val="lt1"/>
+          </a:fontRef>
+        </p:style>
+        <p:txBody>
+          <a:bodyPr rtlCol="0" anchor="ctr"/>
+          <a:lstStyle/>
+          <a:p>
+            <a:pPr algn="ctr"/>
+          </a:p>
+        </p:txBody>
+      </p:sp>
+      <p:sp>
+        <p:nvSpPr>
+          <p:cNvPr id="10" name="Rounded Rectangle 9"/>
+          <p:cNvSpPr/>
+          <p:nvPr/>
+        </p:nvSpPr>
+        <p:spPr>
+          <a:xfrm>
+            <a:off x="1249984" y="1810512"/>
+            <a:ext cx="9692640" cy="3319272"/>
+          </a:xfrm>
+          <a:prstGeom prst="roundRect">
+            <a:avLst/>
+          </a:prstGeom>
+          <a:solidFill>
+            <a:srgbClr val="FCF8FF"/>
+          </a:solidFill>
+          <a:ln w="19050">
+            <a:solidFill>
+              <a:srgbClr val="C8AADC"/>
+            </a:solidFill>
+          </a:ln>
+        </p:spPr>
+        <p:style>
+          <a:lnRef idx="1">
+            <a:schemeClr val="accent1"/>
+          </a:lnRef>
+          <a:fillRef idx="3">
+            <a:schemeClr val="accent1"/>
+          </a:fillRef>
+          <a:effectRef idx="2">
+            <a:schemeClr val="accent1"/>
+          </a:effectRef>
+          <a:fontRef idx="minor">
+            <a:schemeClr val="lt1"/>
+          </a:fontRef>
+        </p:style>
+        <p:txBody>
+          <a:bodyPr rtlCol="0" anchor="ctr"/>
+          <a:lstStyle/>
+          <a:p>
+            <a:pPr algn="ctr"/>
+          </a:p>
+        </p:txBody>
+      </p:sp>
+      <p:sp>
+        <p:nvSpPr>
+          <p:cNvPr id="11" name="TextBox 10"/>
+          <p:cNvSpPr txBox="1"/>
+          <p:nvPr/>
+        </p:nvSpPr>
+        <p:spPr>
+          <a:xfrm>
+            <a:off x="1463040" y="1920240"/>
+            <a:ext cx="2103120" cy="502920"/>
           </a:xfrm>
           <a:prstGeom prst="rect">
             <a:avLst/>
@@ -4881,15 +5720,132 @@
           </a:bodyPr>
           <a:lstStyle/>
           <a:p>
+            <a:pPr algn="r">
+              <a:spcAft>
+                <a:spcPts val="1000"/>
+              </a:spcAft>
+            </a:pPr>
+            <a:r>
+              <a:rPr sz="2200" b="1">
+                <a:solidFill>
+                  <a:srgbClr val="784696"/>
+                </a:solidFill>
+                <a:latin typeface="Microsoft YaHei"/>
+              </a:rPr>
+              <a:t>心理机制</a:t>
+            </a:r>
+          </a:p>
+        </p:txBody>
+      </p:sp>
+      <p:sp>
+        <p:nvSpPr>
+          <p:cNvPr id="12" name="TextBox 11"/>
+          <p:cNvSpPr txBox="1"/>
+          <p:nvPr/>
+        </p:nvSpPr>
+        <p:spPr>
+          <a:xfrm>
+            <a:off x="3749039" y="1920240"/>
+            <a:ext cx="7132320" cy="685800"/>
+          </a:xfrm>
+          <a:prstGeom prst="rect">
+            <a:avLst/>
+          </a:prstGeom>
+          <a:noFill/>
+        </p:spPr>
+        <p:txBody>
+          <a:bodyPr wrap="none">
+            <a:spAutoFit/>
+          </a:bodyPr>
+          <a:lstStyle/>
+          <a:p>
             <a:pPr algn="l">
               <a:spcAft>
-                <a:spcPts val="800"/>
+                <a:spcPts val="1000"/>
               </a:spcAft>
             </a:pPr>
             <a:r>
-              <a:rPr sz="2400" b="0">
-                <a:solidFill>
-                  <a:srgbClr val="1E325A"/>
+              <a:rPr sz="2200" b="0">
+                <a:solidFill>
+                  <a:srgbClr val="3C2850"/>
+                </a:solidFill>
+                <a:latin typeface="Microsoft YaHei"/>
+              </a:rPr>
+              <a:t>害怕被认为「不聪明」或「不称职」而丢失地位</a:t>
+            </a:r>
+          </a:p>
+        </p:txBody>
+      </p:sp>
+      <p:sp>
+        <p:nvSpPr>
+          <p:cNvPr id="13" name="TextBox 12"/>
+          <p:cNvSpPr txBox="1"/>
+          <p:nvPr/>
+        </p:nvSpPr>
+        <p:spPr>
+          <a:xfrm>
+            <a:off x="1463040" y="2670048"/>
+            <a:ext cx="2103120" cy="502920"/>
+          </a:xfrm>
+          <a:prstGeom prst="rect">
+            <a:avLst/>
+          </a:prstGeom>
+          <a:noFill/>
+        </p:spPr>
+        <p:txBody>
+          <a:bodyPr wrap="none">
+            <a:spAutoFit/>
+          </a:bodyPr>
+          <a:lstStyle/>
+          <a:p>
+            <a:pPr algn="r">
+              <a:spcAft>
+                <a:spcPts val="1000"/>
+              </a:spcAft>
+            </a:pPr>
+            <a:r>
+              <a:rPr sz="2200" b="1">
+                <a:solidFill>
+                  <a:srgbClr val="784696"/>
+                </a:solidFill>
+                <a:latin typeface="Microsoft YaHei"/>
+              </a:rPr>
+              <a:t>社会批判</a:t>
+            </a:r>
+          </a:p>
+        </p:txBody>
+      </p:sp>
+      <p:sp>
+        <p:nvSpPr>
+          <p:cNvPr id="14" name="TextBox 13"/>
+          <p:cNvSpPr txBox="1"/>
+          <p:nvPr/>
+        </p:nvSpPr>
+        <p:spPr>
+          <a:xfrm>
+            <a:off x="3749039" y="2670048"/>
+            <a:ext cx="7132320" cy="685800"/>
+          </a:xfrm>
+          <a:prstGeom prst="rect">
+            <a:avLst/>
+          </a:prstGeom>
+          <a:noFill/>
+        </p:spPr>
+        <p:txBody>
+          <a:bodyPr wrap="none">
+            <a:spAutoFit/>
+          </a:bodyPr>
+          <a:lstStyle/>
+          <a:p>
+            <a:pPr algn="l">
+              <a:spcAft>
+                <a:spcPts val="1000"/>
+              </a:spcAft>
+            </a:pPr>
+            <a:r>
+              <a:rPr sz="2200" b="0">
+                <a:solidFill>
+                  <a:srgbClr val="3C2850"/>
                 </a:solidFill>
                 <a:latin typeface="Microsoft YaHei"/>
               </a:rPr>
@@ -4900,14 +5856,14 @@
       </p:sp>
       <p:sp>
         <p:nvSpPr>
-          <p:cNvPr id="9" name="TextBox 8"/>
+          <p:cNvPr id="15" name="TextBox 14"/>
           <p:cNvSpPr txBox="1"/>
           <p:nvPr/>
         </p:nvSpPr>
         <p:spPr>
           <a:xfrm>
-            <a:off x="1097280" y="3291840"/>
-            <a:ext cx="10058400" cy="640080"/>
+            <a:off x="1463040" y="3419856"/>
+            <a:ext cx="2103120" cy="502920"/>
           </a:xfrm>
           <a:prstGeom prst="rect">
             <a:avLst/>
@@ -4920,33 +5876,33 @@
           </a:bodyPr>
           <a:lstStyle/>
           <a:p>
-            <a:pPr algn="l">
+            <a:pPr algn="r">
               <a:spcAft>
-                <a:spcPts val="800"/>
+                <a:spcPts val="1000"/>
               </a:spcAft>
             </a:pPr>
             <a:r>
-              <a:rPr sz="2400" b="0">
-                <a:solidFill>
-                  <a:srgbClr val="1E325A"/>
+              <a:rPr sz="2200" b="1">
+                <a:solidFill>
+                  <a:srgbClr val="784696"/>
                 </a:solidFill>
                 <a:latin typeface="Microsoft YaHei"/>
               </a:rPr>
-              <a:t>孩子的天真是不被虚假规则束缚的诚实</a:t>
-            </a:r>
-          </a:p>
-        </p:txBody>
-      </p:sp>
-      <p:sp>
-        <p:nvSpPr>
-          <p:cNvPr id="10" name="TextBox 9"/>
+              <a:t>孩子作用</a:t>
+            </a:r>
+          </a:p>
+        </p:txBody>
+      </p:sp>
+      <p:sp>
+        <p:nvSpPr>
+          <p:cNvPr id="16" name="TextBox 15"/>
           <p:cNvSpPr txBox="1"/>
           <p:nvPr/>
         </p:nvSpPr>
         <p:spPr>
           <a:xfrm>
-            <a:off x="1097280" y="3931920"/>
-            <a:ext cx="10058400" cy="640080"/>
+            <a:off x="3749039" y="3419856"/>
+            <a:ext cx="7132320" cy="685800"/>
           </a:xfrm>
           <a:prstGeom prst="rect">
             <a:avLst/>
@@ -4961,17 +5917,95 @@
           <a:p>
             <a:pPr algn="l">
               <a:spcAft>
-                <a:spcPts val="800"/>
+                <a:spcPts val="1000"/>
               </a:spcAft>
             </a:pPr>
             <a:r>
-              <a:rPr sz="2400" b="0">
-                <a:solidFill>
-                  <a:srgbClr val="1E325A"/>
+              <a:rPr sz="2200" b="0">
+                <a:solidFill>
+                  <a:srgbClr val="3C2850"/>
                 </a:solidFill>
                 <a:latin typeface="Microsoft YaHei"/>
               </a:rPr>
-              <a:t>策展主题：面对虚假，要敢于说真话</a:t>
+              <a:t>天真不受虚假规则束缚，一语道破真相</a:t>
+            </a:r>
+          </a:p>
+        </p:txBody>
+      </p:sp>
+      <p:sp>
+        <p:nvSpPr>
+          <p:cNvPr id="17" name="TextBox 16"/>
+          <p:cNvSpPr txBox="1"/>
+          <p:nvPr/>
+        </p:nvSpPr>
+        <p:spPr>
+          <a:xfrm>
+            <a:off x="1463040" y="4169664"/>
+            <a:ext cx="2103120" cy="502920"/>
+          </a:xfrm>
+          <a:prstGeom prst="rect">
+            <a:avLst/>
+          </a:prstGeom>
+          <a:noFill/>
+        </p:spPr>
+        <p:txBody>
+          <a:bodyPr wrap="none">
+            <a:spAutoFit/>
+          </a:bodyPr>
+          <a:lstStyle/>
+          <a:p>
+            <a:pPr algn="r">
+              <a:spcAft>
+                <a:spcPts val="1000"/>
+              </a:spcAft>
+            </a:pPr>
+            <a:r>
+              <a:rPr sz="2200" b="1">
+                <a:solidFill>
+                  <a:srgbClr val="784696"/>
+                </a:solidFill>
+                <a:latin typeface="Microsoft YaHei"/>
+              </a:rPr>
+              <a:t>策展主题</a:t>
+            </a:r>
+          </a:p>
+        </p:txBody>
+      </p:sp>
+      <p:sp>
+        <p:nvSpPr>
+          <p:cNvPr id="18" name="TextBox 17"/>
+          <p:cNvSpPr txBox="1"/>
+          <p:nvPr/>
+        </p:nvSpPr>
+        <p:spPr>
+          <a:xfrm>
+            <a:off x="3749039" y="4169664"/>
+            <a:ext cx="7132320" cy="685800"/>
+          </a:xfrm>
+          <a:prstGeom prst="rect">
+            <a:avLst/>
+          </a:prstGeom>
+          <a:noFill/>
+        </p:spPr>
+        <p:txBody>
+          <a:bodyPr wrap="none">
+            <a:spAutoFit/>
+          </a:bodyPr>
+          <a:lstStyle/>
+          <a:p>
+            <a:pPr algn="l">
+              <a:spcAft>
+                <a:spcPts val="1000"/>
+              </a:spcAft>
+            </a:pPr>
+            <a:r>
+              <a:rPr sz="2200" b="0">
+                <a:solidFill>
+                  <a:srgbClr val="3C2850"/>
+                </a:solidFill>
+                <a:latin typeface="Microsoft YaHei"/>
+              </a:rPr>
+              <a:t>面对虚假，要敢于说真话，不做沉默的大多数</a:t>
             </a:r>
           </a:p>
         </p:txBody>
@@ -4996,7 +6030,7 @@
       <p:grpSpPr/>
       <p:pic>
         <p:nvPicPr>
-          <p:cNvPr id="2" name="Picture 1" descr="bg_jinan.png"/>
+          <p:cNvPr id="2" name="Picture 1" descr="bg_emperor.png"/>
           <p:cNvPicPr>
             <a:picLocks noChangeAspect="1"/>
           </p:cNvPicPr>
@@ -5026,17 +6060,17 @@
         </p:nvSpPr>
         <p:spPr>
           <a:xfrm>
-            <a:off x="457200" y="320040"/>
-            <a:ext cx="11247120" cy="502920"/>
-          </a:xfrm>
-          <a:prstGeom prst="rect">
-            <a:avLst/>
-          </a:prstGeom>
-          <a:solidFill>
-            <a:srgbClr val="3264B4"/>
-          </a:solidFill>
-          <a:ln>
-            <a:noFill/>
+            <a:off x="292608" y="274320"/>
+            <a:ext cx="11594592" cy="6300216"/>
+          </a:xfrm>
+          <a:prstGeom prst="rect">
+            <a:avLst/>
+          </a:prstGeom>
+          <a:noFill/>
+          <a:ln w="31750">
+            <a:solidFill>
+              <a:srgbClr val="825AA0"/>
+            </a:solidFill>
           </a:ln>
         </p:spPr>
         <p:style>
@@ -5061,105 +6095,73 @@
           </a:p>
         </p:txBody>
       </p:sp>
-      <p:sp>
-        <p:nvSpPr>
-          <p:cNvPr id="4" name="TextBox 3"/>
-          <p:cNvSpPr txBox="1"/>
-          <p:nvPr/>
-        </p:nvSpPr>
-        <p:spPr>
-          <a:xfrm>
-            <a:off x="640080" y="347472"/>
-            <a:ext cx="10972800" cy="457200"/>
-          </a:xfrm>
-          <a:prstGeom prst="rect">
-            <a:avLst/>
-          </a:prstGeom>
-          <a:noFill/>
-        </p:spPr>
-        <p:txBody>
-          <a:bodyPr wrap="none">
-            <a:spAutoFit/>
-          </a:bodyPr>
-          <a:lstStyle/>
-          <a:p>
-            <a:pPr algn="l">
-              <a:spcAft>
-                <a:spcPts val="800"/>
-              </a:spcAft>
-            </a:pPr>
-            <a:r>
-              <a:rPr sz="2200" b="1">
-                <a:solidFill>
-                  <a:srgbClr val="FFFFFF"/>
-                </a:solidFill>
-                <a:latin typeface="Microsoft YaHei"/>
-              </a:rPr>
-              <a:t>课堂活动</a:t>
-            </a:r>
-          </a:p>
-        </p:txBody>
-      </p:sp>
-      <p:sp>
-        <p:nvSpPr>
-          <p:cNvPr id="5" name="TextBox 4"/>
-          <p:cNvSpPr txBox="1"/>
-          <p:nvPr/>
-        </p:nvSpPr>
-        <p:spPr>
-          <a:xfrm>
-            <a:off x="1371600" y="1005840"/>
-            <a:ext cx="9144000" cy="640080"/>
-          </a:xfrm>
-          <a:prstGeom prst="rect">
-            <a:avLst/>
-          </a:prstGeom>
-          <a:noFill/>
-        </p:spPr>
-        <p:txBody>
-          <a:bodyPr wrap="none">
-            <a:spAutoFit/>
-          </a:bodyPr>
-          <a:lstStyle/>
-          <a:p>
-            <a:pPr algn="ctr">
-              <a:spcAft>
-                <a:spcPts val="800"/>
-              </a:spcAft>
-            </a:pPr>
-            <a:r>
-              <a:rPr sz="3600" b="1">
-                <a:solidFill>
-                  <a:srgbClr val="1E325A"/>
-                </a:solidFill>
-                <a:latin typeface="Microsoft YaHei"/>
-              </a:rPr>
-              <a:t>学习任务</a:t>
-            </a:r>
-          </a:p>
-        </p:txBody>
-      </p:sp>
-      <p:sp>
-        <p:nvSpPr>
-          <p:cNvPr id="6" name="Rectangle 5"/>
+      <p:pic>
+        <p:nvPicPr>
+          <p:cNvPr id="4" name="Picture 3" descr="corner_emperor_tl.png"/>
+          <p:cNvPicPr>
+            <a:picLocks noChangeAspect="1"/>
+          </p:cNvPicPr>
+          <p:nvPr/>
+        </p:nvPicPr>
+        <p:blipFill>
+          <a:blip r:embed="rId3"/>
+          <a:stretch>
+            <a:fillRect/>
+          </a:stretch>
+        </p:blipFill>
+        <p:spPr>
+          <a:xfrm>
+            <a:off x="-45720" y="-45720"/>
+            <a:ext cx="2011680" cy="2011680"/>
+          </a:xfrm>
+          <a:prstGeom prst="rect">
+            <a:avLst/>
+          </a:prstGeom>
+        </p:spPr>
+      </p:pic>
+      <p:pic>
+        <p:nvPicPr>
+          <p:cNvPr id="5" name="Picture 4" descr="corner_emperor_tr.png"/>
+          <p:cNvPicPr>
+            <a:picLocks noChangeAspect="1"/>
+          </p:cNvPicPr>
+          <p:nvPr/>
+        </p:nvPicPr>
+        <p:blipFill>
+          <a:blip r:embed="rId4"/>
+          <a:stretch>
+            <a:fillRect/>
+          </a:stretch>
+        </p:blipFill>
+        <p:spPr>
+          <a:xfrm>
+            <a:off x="9875520" y="-45720"/>
+            <a:ext cx="2011680" cy="2011680"/>
+          </a:xfrm>
+          <a:prstGeom prst="rect">
+            <a:avLst/>
+          </a:prstGeom>
+        </p:spPr>
+      </p:pic>
+      <p:sp>
+        <p:nvSpPr>
+          <p:cNvPr id="6" name="Rounded Rectangle 5"/>
           <p:cNvSpPr/>
           <p:nvPr/>
         </p:nvSpPr>
         <p:spPr>
           <a:xfrm>
-            <a:off x="822960" y="1828800"/>
-            <a:ext cx="10515600" cy="4206240"/>
-          </a:xfrm>
-          <a:prstGeom prst="rect">
+            <a:off x="4953304" y="502920"/>
+            <a:ext cx="2286000" cy="411480"/>
+          </a:xfrm>
+          <a:prstGeom prst="roundRect">
             <a:avLst/>
           </a:prstGeom>
           <a:solidFill>
-            <a:srgbClr val="FFFFFF"/>
+            <a:srgbClr val="C8AADC"/>
           </a:solidFill>
-          <a:ln w="25400">
-            <a:solidFill>
-              <a:srgbClr val="B4D2F0"/>
-            </a:solidFill>
+          <a:ln>
+            <a:noFill/>
           </a:ln>
         </p:spPr>
         <p:style>
@@ -5192,8 +6194,8 @@
         </p:nvSpPr>
         <p:spPr>
           <a:xfrm>
-            <a:off x="1097280" y="2011680"/>
-            <a:ext cx="10058400" cy="640080"/>
+            <a:off x="4953304" y="521208"/>
+            <a:ext cx="2286000" cy="384048"/>
           </a:xfrm>
           <a:prstGeom prst="rect">
             <a:avLst/>
@@ -5206,19 +6208,19 @@
           </a:bodyPr>
           <a:lstStyle/>
           <a:p>
-            <a:pPr algn="l">
+            <a:pPr algn="ctr">
               <a:spcAft>
-                <a:spcPts val="800"/>
+                <a:spcPts val="1000"/>
               </a:spcAft>
             </a:pPr>
             <a:r>
-              <a:rPr sz="2400" b="0">
-                <a:solidFill>
-                  <a:srgbClr val="1E325A"/>
+              <a:rPr sz="1800" b="1">
+                <a:solidFill>
+                  <a:srgbClr val="3C2850"/>
                 </a:solidFill>
                 <a:latin typeface="Microsoft YaHei"/>
               </a:rPr>
-              <a:t>画骗局流程图，勾画人物心理</a:t>
+              <a:t>课堂活动</a:t>
             </a:r>
           </a:p>
         </p:txBody>
@@ -5231,8 +6233,178 @@
         </p:nvSpPr>
         <p:spPr>
           <a:xfrm>
-            <a:off x="1097280" y="2651760"/>
-            <a:ext cx="10058400" cy="640080"/>
+            <a:off x="1371600" y="1051560"/>
+            <a:ext cx="9418320" cy="822960"/>
+          </a:xfrm>
+          <a:prstGeom prst="rect">
+            <a:avLst/>
+          </a:prstGeom>
+          <a:noFill/>
+        </p:spPr>
+        <p:txBody>
+          <a:bodyPr wrap="square">
+            <a:spAutoFit/>
+          </a:bodyPr>
+          <a:lstStyle/>
+          <a:p>
+            <a:pPr algn="ctr">
+              <a:spcAft>
+                <a:spcPts val="1000"/>
+              </a:spcAft>
+            </a:pPr>
+            <a:r>
+              <a:rPr sz="3600" b="1">
+                <a:solidFill>
+                  <a:srgbClr val="784696"/>
+                </a:solidFill>
+                <a:latin typeface="Microsoft YaHei"/>
+              </a:rPr>
+              <a:t>学习任务</a:t>
+            </a:r>
+          </a:p>
+        </p:txBody>
+      </p:sp>
+      <p:sp>
+        <p:nvSpPr>
+          <p:cNvPr id="9" name="Rectangle 8"/>
+          <p:cNvSpPr/>
+          <p:nvPr/>
+        </p:nvSpPr>
+        <p:spPr>
+          <a:xfrm>
+            <a:off x="3200400" y="1691640"/>
+            <a:ext cx="5760720" cy="27432"/>
+          </a:xfrm>
+          <a:prstGeom prst="rect">
+            <a:avLst/>
+          </a:prstGeom>
+          <a:solidFill>
+            <a:srgbClr val="C8AADC"/>
+          </a:solidFill>
+          <a:ln>
+            <a:noFill/>
+          </a:ln>
+        </p:spPr>
+        <p:style>
+          <a:lnRef idx="1">
+            <a:schemeClr val="accent1"/>
+          </a:lnRef>
+          <a:fillRef idx="3">
+            <a:schemeClr val="accent1"/>
+          </a:fillRef>
+          <a:effectRef idx="2">
+            <a:schemeClr val="accent1"/>
+          </a:effectRef>
+          <a:fontRef idx="minor">
+            <a:schemeClr val="lt1"/>
+          </a:fontRef>
+        </p:style>
+        <p:txBody>
+          <a:bodyPr rtlCol="0" anchor="ctr"/>
+          <a:lstStyle/>
+          <a:p>
+            <a:pPr algn="ctr"/>
+          </a:p>
+        </p:txBody>
+      </p:sp>
+      <p:sp>
+        <p:nvSpPr>
+          <p:cNvPr id="10" name="Rounded Rectangle 9"/>
+          <p:cNvSpPr/>
+          <p:nvPr/>
+        </p:nvSpPr>
+        <p:spPr>
+          <a:xfrm>
+            <a:off x="1295704" y="1737360"/>
+            <a:ext cx="9601200" cy="2112264"/>
+          </a:xfrm>
+          <a:prstGeom prst="roundRect">
+            <a:avLst/>
+          </a:prstGeom>
+          <a:solidFill>
+            <a:srgbClr val="FCF8FF"/>
+          </a:solidFill>
+          <a:ln w="19050">
+            <a:solidFill>
+              <a:srgbClr val="C8AADC"/>
+            </a:solidFill>
+          </a:ln>
+        </p:spPr>
+        <p:style>
+          <a:lnRef idx="1">
+            <a:schemeClr val="accent1"/>
+          </a:lnRef>
+          <a:fillRef idx="3">
+            <a:schemeClr val="accent1"/>
+          </a:fillRef>
+          <a:effectRef idx="2">
+            <a:schemeClr val="accent1"/>
+          </a:effectRef>
+          <a:fontRef idx="minor">
+            <a:schemeClr val="lt1"/>
+          </a:fontRef>
+        </p:style>
+        <p:txBody>
+          <a:bodyPr rtlCol="0" anchor="ctr"/>
+          <a:lstStyle/>
+          <a:p>
+            <a:pPr algn="ctr"/>
+          </a:p>
+        </p:txBody>
+      </p:sp>
+      <p:sp>
+        <p:nvSpPr>
+          <p:cNvPr id="11" name="Oval 10"/>
+          <p:cNvSpPr/>
+          <p:nvPr/>
+        </p:nvSpPr>
+        <p:spPr>
+          <a:xfrm>
+            <a:off x="2621584" y="1920240"/>
+            <a:ext cx="347472" cy="347472"/>
+          </a:xfrm>
+          <a:prstGeom prst="ellipse">
+            <a:avLst/>
+          </a:prstGeom>
+          <a:solidFill>
+            <a:srgbClr val="784696"/>
+          </a:solidFill>
+          <a:ln>
+            <a:noFill/>
+          </a:ln>
+        </p:spPr>
+        <p:style>
+          <a:lnRef idx="1">
+            <a:schemeClr val="accent1"/>
+          </a:lnRef>
+          <a:fillRef idx="3">
+            <a:schemeClr val="accent1"/>
+          </a:fillRef>
+          <a:effectRef idx="2">
+            <a:schemeClr val="accent1"/>
+          </a:effectRef>
+          <a:fontRef idx="minor">
+            <a:schemeClr val="lt1"/>
+          </a:fontRef>
+        </p:style>
+        <p:txBody>
+          <a:bodyPr rtlCol="0" anchor="ctr"/>
+          <a:lstStyle/>
+          <a:p>
+            <a:pPr algn="ctr"/>
+          </a:p>
+        </p:txBody>
+      </p:sp>
+      <p:sp>
+        <p:nvSpPr>
+          <p:cNvPr id="12" name="TextBox 11"/>
+          <p:cNvSpPr txBox="1"/>
+          <p:nvPr/>
+        </p:nvSpPr>
+        <p:spPr>
+          <a:xfrm>
+            <a:off x="2621584" y="1938528"/>
+            <a:ext cx="347472" cy="329184"/>
           </a:xfrm>
           <a:prstGeom prst="rect">
             <a:avLst/>
@@ -5245,15 +6417,296 @@
           </a:bodyPr>
           <a:lstStyle/>
           <a:p>
+            <a:pPr algn="ctr">
+              <a:spcAft>
+                <a:spcPts val="1000"/>
+              </a:spcAft>
+            </a:pPr>
+            <a:r>
+              <a:rPr sz="1400" b="1">
+                <a:solidFill>
+                  <a:srgbClr val="FFFFFF"/>
+                </a:solidFill>
+                <a:latin typeface="Microsoft YaHei"/>
+              </a:rPr>
+              <a:t>1</a:t>
+            </a:r>
+          </a:p>
+        </p:txBody>
+      </p:sp>
+      <p:sp>
+        <p:nvSpPr>
+          <p:cNvPr id="13" name="TextBox 12"/>
+          <p:cNvSpPr txBox="1"/>
+          <p:nvPr/>
+        </p:nvSpPr>
+        <p:spPr>
+          <a:xfrm>
+            <a:off x="3078784" y="1901952"/>
+            <a:ext cx="7863840" cy="457200"/>
+          </a:xfrm>
+          <a:prstGeom prst="rect">
+            <a:avLst/>
+          </a:prstGeom>
+          <a:noFill/>
+        </p:spPr>
+        <p:txBody>
+          <a:bodyPr wrap="none">
+            <a:spAutoFit/>
+          </a:bodyPr>
+          <a:lstStyle/>
+          <a:p>
             <a:pPr algn="l">
               <a:spcAft>
-                <a:spcPts val="800"/>
+                <a:spcPts val="1000"/>
               </a:spcAft>
             </a:pPr>
             <a:r>
               <a:rPr sz="2400" b="0">
                 <a:solidFill>
-                  <a:srgbClr val="1E325A"/>
+                  <a:srgbClr val="3C2850"/>
+                </a:solidFill>
+                <a:latin typeface="Microsoft YaHei"/>
+              </a:rPr>
+              <a:t>画骗局流程图，用箭头串联各环节</a:t>
+            </a:r>
+          </a:p>
+        </p:txBody>
+      </p:sp>
+      <p:sp>
+        <p:nvSpPr>
+          <p:cNvPr id="14" name="Oval 13"/>
+          <p:cNvSpPr/>
+          <p:nvPr/>
+        </p:nvSpPr>
+        <p:spPr>
+          <a:xfrm>
+            <a:off x="2621584" y="2487168"/>
+            <a:ext cx="347472" cy="347472"/>
+          </a:xfrm>
+          <a:prstGeom prst="ellipse">
+            <a:avLst/>
+          </a:prstGeom>
+          <a:solidFill>
+            <a:srgbClr val="784696"/>
+          </a:solidFill>
+          <a:ln>
+            <a:noFill/>
+          </a:ln>
+        </p:spPr>
+        <p:style>
+          <a:lnRef idx="1">
+            <a:schemeClr val="accent1"/>
+          </a:lnRef>
+          <a:fillRef idx="3">
+            <a:schemeClr val="accent1"/>
+          </a:fillRef>
+          <a:effectRef idx="2">
+            <a:schemeClr val="accent1"/>
+          </a:effectRef>
+          <a:fontRef idx="minor">
+            <a:schemeClr val="lt1"/>
+          </a:fontRef>
+        </p:style>
+        <p:txBody>
+          <a:bodyPr rtlCol="0" anchor="ctr"/>
+          <a:lstStyle/>
+          <a:p>
+            <a:pPr algn="ctr"/>
+          </a:p>
+        </p:txBody>
+      </p:sp>
+      <p:sp>
+        <p:nvSpPr>
+          <p:cNvPr id="15" name="TextBox 14"/>
+          <p:cNvSpPr txBox="1"/>
+          <p:nvPr/>
+        </p:nvSpPr>
+        <p:spPr>
+          <a:xfrm>
+            <a:off x="2621584" y="2505456"/>
+            <a:ext cx="347472" cy="329184"/>
+          </a:xfrm>
+          <a:prstGeom prst="rect">
+            <a:avLst/>
+          </a:prstGeom>
+          <a:noFill/>
+        </p:spPr>
+        <p:txBody>
+          <a:bodyPr wrap="none">
+            <a:spAutoFit/>
+          </a:bodyPr>
+          <a:lstStyle/>
+          <a:p>
+            <a:pPr algn="ctr">
+              <a:spcAft>
+                <a:spcPts val="1000"/>
+              </a:spcAft>
+            </a:pPr>
+            <a:r>
+              <a:rPr sz="1400" b="1">
+                <a:solidFill>
+                  <a:srgbClr val="FFFFFF"/>
+                </a:solidFill>
+                <a:latin typeface="Microsoft YaHei"/>
+              </a:rPr>
+              <a:t>2</a:t>
+            </a:r>
+          </a:p>
+        </p:txBody>
+      </p:sp>
+      <p:sp>
+        <p:nvSpPr>
+          <p:cNvPr id="16" name="TextBox 15"/>
+          <p:cNvSpPr txBox="1"/>
+          <p:nvPr/>
+        </p:nvSpPr>
+        <p:spPr>
+          <a:xfrm>
+            <a:off x="3078784" y="2468880"/>
+            <a:ext cx="7863840" cy="457200"/>
+          </a:xfrm>
+          <a:prstGeom prst="rect">
+            <a:avLst/>
+          </a:prstGeom>
+          <a:noFill/>
+        </p:spPr>
+        <p:txBody>
+          <a:bodyPr wrap="none">
+            <a:spAutoFit/>
+          </a:bodyPr>
+          <a:lstStyle/>
+          <a:p>
+            <a:pPr algn="l">
+              <a:spcAft>
+                <a:spcPts val="1000"/>
+              </a:spcAft>
+            </a:pPr>
+            <a:r>
+              <a:rPr sz="2400" b="0">
+                <a:solidFill>
+                  <a:srgbClr val="3C2850"/>
+                </a:solidFill>
+                <a:latin typeface="Microsoft YaHei"/>
+              </a:rPr>
+              <a:t>勾画老大臣、官员、皇帝的心理和语言</a:t>
+            </a:r>
+          </a:p>
+        </p:txBody>
+      </p:sp>
+      <p:sp>
+        <p:nvSpPr>
+          <p:cNvPr id="17" name="Oval 16"/>
+          <p:cNvSpPr/>
+          <p:nvPr/>
+        </p:nvSpPr>
+        <p:spPr>
+          <a:xfrm>
+            <a:off x="2621584" y="3054096"/>
+            <a:ext cx="347472" cy="347472"/>
+          </a:xfrm>
+          <a:prstGeom prst="ellipse">
+            <a:avLst/>
+          </a:prstGeom>
+          <a:solidFill>
+            <a:srgbClr val="784696"/>
+          </a:solidFill>
+          <a:ln>
+            <a:noFill/>
+          </a:ln>
+        </p:spPr>
+        <p:style>
+          <a:lnRef idx="1">
+            <a:schemeClr val="accent1"/>
+          </a:lnRef>
+          <a:fillRef idx="3">
+            <a:schemeClr val="accent1"/>
+          </a:fillRef>
+          <a:effectRef idx="2">
+            <a:schemeClr val="accent1"/>
+          </a:effectRef>
+          <a:fontRef idx="minor">
+            <a:schemeClr val="lt1"/>
+          </a:fontRef>
+        </p:style>
+        <p:txBody>
+          <a:bodyPr rtlCol="0" anchor="ctr"/>
+          <a:lstStyle/>
+          <a:p>
+            <a:pPr algn="ctr"/>
+          </a:p>
+        </p:txBody>
+      </p:sp>
+      <p:sp>
+        <p:nvSpPr>
+          <p:cNvPr id="18" name="TextBox 17"/>
+          <p:cNvSpPr txBox="1"/>
+          <p:nvPr/>
+        </p:nvSpPr>
+        <p:spPr>
+          <a:xfrm>
+            <a:off x="2621584" y="3072384"/>
+            <a:ext cx="347472" cy="329184"/>
+          </a:xfrm>
+          <a:prstGeom prst="rect">
+            <a:avLst/>
+          </a:prstGeom>
+          <a:noFill/>
+        </p:spPr>
+        <p:txBody>
+          <a:bodyPr wrap="none">
+            <a:spAutoFit/>
+          </a:bodyPr>
+          <a:lstStyle/>
+          <a:p>
+            <a:pPr algn="ctr">
+              <a:spcAft>
+                <a:spcPts val="1000"/>
+              </a:spcAft>
+            </a:pPr>
+            <a:r>
+              <a:rPr sz="1400" b="1">
+                <a:solidFill>
+                  <a:srgbClr val="FFFFFF"/>
+                </a:solidFill>
+                <a:latin typeface="Microsoft YaHei"/>
+              </a:rPr>
+              <a:t>3</a:t>
+            </a:r>
+          </a:p>
+        </p:txBody>
+      </p:sp>
+      <p:sp>
+        <p:nvSpPr>
+          <p:cNvPr id="19" name="TextBox 18"/>
+          <p:cNvSpPr txBox="1"/>
+          <p:nvPr/>
+        </p:nvSpPr>
+        <p:spPr>
+          <a:xfrm>
+            <a:off x="3078784" y="3035808"/>
+            <a:ext cx="7863840" cy="457200"/>
+          </a:xfrm>
+          <a:prstGeom prst="rect">
+            <a:avLst/>
+          </a:prstGeom>
+          <a:noFill/>
+        </p:spPr>
+        <p:txBody>
+          <a:bodyPr wrap="none">
+            <a:spAutoFit/>
+          </a:bodyPr>
+          <a:lstStyle/>
+          <a:p>
+            <a:pPr algn="l">
+              <a:spcAft>
+                <a:spcPts val="1000"/>
+              </a:spcAft>
+            </a:pPr>
+            <a:r>
+              <a:rPr sz="2400" b="0">
+                <a:solidFill>
+                  <a:srgbClr val="3C2850"/>
                 </a:solidFill>
                 <a:latin typeface="Microsoft YaHei"/>
               </a:rPr>
@@ -5262,16 +6715,192 @@
           </a:p>
         </p:txBody>
       </p:sp>
-      <p:sp>
-        <p:nvSpPr>
-          <p:cNvPr id="9" name="TextBox 8"/>
+    </p:spTree>
+  </p:cSld>
+  <p:clrMapOvr>
+    <a:masterClrMapping/>
+  </p:clrMapOvr>
+</p:sld>
+</file>
+
+<file path=ppt/slides/slide7.xml><?xml version="1.0" encoding="utf-8"?>
+<p:sld xmlns:a="http://schemas.openxmlformats.org/drawingml/2006/main" xmlns:p="http://schemas.openxmlformats.org/presentationml/2006/main" xmlns:r="http://schemas.openxmlformats.org/officeDocument/2006/relationships">
+  <p:cSld>
+    <p:spTree>
+      <p:nvGrpSpPr>
+        <p:cNvPr id="1" name=""/>
+        <p:cNvGrpSpPr/>
+        <p:nvPr/>
+      </p:nvGrpSpPr>
+      <p:grpSpPr/>
+      <p:pic>
+        <p:nvPicPr>
+          <p:cNvPr id="2" name="Picture 1" descr="bg_emperor.png"/>
+          <p:cNvPicPr>
+            <a:picLocks noChangeAspect="1"/>
+          </p:cNvPicPr>
+          <p:nvPr/>
+        </p:nvPicPr>
+        <p:blipFill>
+          <a:blip r:embed="rId2"/>
+          <a:stretch>
+            <a:fillRect/>
+          </a:stretch>
+        </p:blipFill>
+        <p:spPr>
+          <a:xfrm>
+            <a:off x="0" y="0"/>
+            <a:ext cx="12191695" cy="6858000"/>
+          </a:xfrm>
+          <a:prstGeom prst="rect">
+            <a:avLst/>
+          </a:prstGeom>
+        </p:spPr>
+      </p:pic>
+      <p:sp>
+        <p:nvSpPr>
+          <p:cNvPr id="3" name="Rectangle 2"/>
+          <p:cNvSpPr/>
+          <p:nvPr/>
+        </p:nvSpPr>
+        <p:spPr>
+          <a:xfrm>
+            <a:off x="292608" y="274320"/>
+            <a:ext cx="11594592" cy="6300216"/>
+          </a:xfrm>
+          <a:prstGeom prst="rect">
+            <a:avLst/>
+          </a:prstGeom>
+          <a:noFill/>
+          <a:ln w="31750">
+            <a:solidFill>
+              <a:srgbClr val="825AA0"/>
+            </a:solidFill>
+          </a:ln>
+        </p:spPr>
+        <p:style>
+          <a:lnRef idx="1">
+            <a:schemeClr val="accent1"/>
+          </a:lnRef>
+          <a:fillRef idx="3">
+            <a:schemeClr val="accent1"/>
+          </a:fillRef>
+          <a:effectRef idx="2">
+            <a:schemeClr val="accent1"/>
+          </a:effectRef>
+          <a:fontRef idx="minor">
+            <a:schemeClr val="lt1"/>
+          </a:fontRef>
+        </p:style>
+        <p:txBody>
+          <a:bodyPr rtlCol="0" anchor="ctr"/>
+          <a:lstStyle/>
+          <a:p>
+            <a:pPr algn="ctr"/>
+          </a:p>
+        </p:txBody>
+      </p:sp>
+      <p:pic>
+        <p:nvPicPr>
+          <p:cNvPr id="4" name="Picture 3" descr="corner_emperor_tl.png"/>
+          <p:cNvPicPr>
+            <a:picLocks noChangeAspect="1"/>
+          </p:cNvPicPr>
+          <p:nvPr/>
+        </p:nvPicPr>
+        <p:blipFill>
+          <a:blip r:embed="rId3"/>
+          <a:stretch>
+            <a:fillRect/>
+          </a:stretch>
+        </p:blipFill>
+        <p:spPr>
+          <a:xfrm>
+            <a:off x="-45720" y="-45720"/>
+            <a:ext cx="2011680" cy="2011680"/>
+          </a:xfrm>
+          <a:prstGeom prst="rect">
+            <a:avLst/>
+          </a:prstGeom>
+        </p:spPr>
+      </p:pic>
+      <p:pic>
+        <p:nvPicPr>
+          <p:cNvPr id="5" name="Picture 4" descr="corner_emperor_tr.png"/>
+          <p:cNvPicPr>
+            <a:picLocks noChangeAspect="1"/>
+          </p:cNvPicPr>
+          <p:nvPr/>
+        </p:nvPicPr>
+        <p:blipFill>
+          <a:blip r:embed="rId4"/>
+          <a:stretch>
+            <a:fillRect/>
+          </a:stretch>
+        </p:blipFill>
+        <p:spPr>
+          <a:xfrm>
+            <a:off x="9875520" y="-45720"/>
+            <a:ext cx="2011680" cy="2011680"/>
+          </a:xfrm>
+          <a:prstGeom prst="rect">
+            <a:avLst/>
+          </a:prstGeom>
+        </p:spPr>
+      </p:pic>
+      <p:sp>
+        <p:nvSpPr>
+          <p:cNvPr id="6" name="Rounded Rectangle 5"/>
+          <p:cNvSpPr/>
+          <p:nvPr/>
+        </p:nvSpPr>
+        <p:spPr>
+          <a:xfrm>
+            <a:off x="4953304" y="502920"/>
+            <a:ext cx="2286000" cy="411480"/>
+          </a:xfrm>
+          <a:prstGeom prst="roundRect">
+            <a:avLst/>
+          </a:prstGeom>
+          <a:solidFill>
+            <a:srgbClr val="C8AADC"/>
+          </a:solidFill>
+          <a:ln>
+            <a:noFill/>
+          </a:ln>
+        </p:spPr>
+        <p:style>
+          <a:lnRef idx="1">
+            <a:schemeClr val="accent1"/>
+          </a:lnRef>
+          <a:fillRef idx="3">
+            <a:schemeClr val="accent1"/>
+          </a:fillRef>
+          <a:effectRef idx="2">
+            <a:schemeClr val="accent1"/>
+          </a:effectRef>
+          <a:fontRef idx="minor">
+            <a:schemeClr val="lt1"/>
+          </a:fontRef>
+        </p:style>
+        <p:txBody>
+          <a:bodyPr rtlCol="0" anchor="ctr"/>
+          <a:lstStyle/>
+          <a:p>
+            <a:pPr algn="ctr"/>
+          </a:p>
+        </p:txBody>
+      </p:sp>
+      <p:sp>
+        <p:nvSpPr>
+          <p:cNvPr id="7" name="TextBox 6"/>
           <p:cNvSpPr txBox="1"/>
           <p:nvPr/>
         </p:nvSpPr>
         <p:spPr>
           <a:xfrm>
-            <a:off x="1097280" y="3291840"/>
-            <a:ext cx="10058400" cy="640080"/>
+            <a:off x="4953304" y="521208"/>
+            <a:ext cx="2286000" cy="384048"/>
           </a:xfrm>
           <a:prstGeom prst="rect">
             <a:avLst/>
@@ -5284,19 +6913,1093 @@
           </a:bodyPr>
           <a:lstStyle/>
           <a:p>
+            <a:pPr algn="ctr">
+              <a:spcAft>
+                <a:spcPts val="1000"/>
+              </a:spcAft>
+            </a:pPr>
+            <a:r>
+              <a:rPr sz="1800" b="1">
+                <a:solidFill>
+                  <a:srgbClr val="3C2850"/>
+                </a:solidFill>
+                <a:latin typeface="Microsoft YaHei"/>
+              </a:rPr>
+              <a:t>回顾收获</a:t>
+            </a:r>
+          </a:p>
+        </p:txBody>
+      </p:sp>
+      <p:sp>
+        <p:nvSpPr>
+          <p:cNvPr id="8" name="TextBox 7"/>
+          <p:cNvSpPr txBox="1"/>
+          <p:nvPr/>
+        </p:nvSpPr>
+        <p:spPr>
+          <a:xfrm>
+            <a:off x="1371600" y="1051560"/>
+            <a:ext cx="9418320" cy="822960"/>
+          </a:xfrm>
+          <a:prstGeom prst="rect">
+            <a:avLst/>
+          </a:prstGeom>
+          <a:noFill/>
+        </p:spPr>
+        <p:txBody>
+          <a:bodyPr wrap="square">
+            <a:spAutoFit/>
+          </a:bodyPr>
+          <a:lstStyle/>
+          <a:p>
+            <a:pPr algn="ctr">
+              <a:spcAft>
+                <a:spcPts val="1000"/>
+              </a:spcAft>
+            </a:pPr>
+            <a:r>
+              <a:rPr sz="3600" b="1">
+                <a:solidFill>
+                  <a:srgbClr val="784696"/>
+                </a:solidFill>
+                <a:latin typeface="Microsoft YaHei"/>
+              </a:rPr>
+              <a:t>课堂小结</a:t>
+            </a:r>
+          </a:p>
+        </p:txBody>
+      </p:sp>
+      <p:sp>
+        <p:nvSpPr>
+          <p:cNvPr id="9" name="Rectangle 8"/>
+          <p:cNvSpPr/>
+          <p:nvPr/>
+        </p:nvSpPr>
+        <p:spPr>
+          <a:xfrm>
+            <a:off x="3200400" y="1691640"/>
+            <a:ext cx="5760720" cy="27432"/>
+          </a:xfrm>
+          <a:prstGeom prst="rect">
+            <a:avLst/>
+          </a:prstGeom>
+          <a:solidFill>
+            <a:srgbClr val="C8AADC"/>
+          </a:solidFill>
+          <a:ln>
+            <a:noFill/>
+          </a:ln>
+        </p:spPr>
+        <p:style>
+          <a:lnRef idx="1">
+            <a:schemeClr val="accent1"/>
+          </a:lnRef>
+          <a:fillRef idx="3">
+            <a:schemeClr val="accent1"/>
+          </a:fillRef>
+          <a:effectRef idx="2">
+            <a:schemeClr val="accent1"/>
+          </a:effectRef>
+          <a:fontRef idx="minor">
+            <a:schemeClr val="lt1"/>
+          </a:fontRef>
+        </p:style>
+        <p:txBody>
+          <a:bodyPr rtlCol="0" anchor="ctr"/>
+          <a:lstStyle/>
+          <a:p>
+            <a:pPr algn="ctr"/>
+          </a:p>
+        </p:txBody>
+      </p:sp>
+      <p:sp>
+        <p:nvSpPr>
+          <p:cNvPr id="10" name="Rounded Rectangle 9"/>
+          <p:cNvSpPr/>
+          <p:nvPr/>
+        </p:nvSpPr>
+        <p:spPr>
+          <a:xfrm>
+            <a:off x="1295704" y="1737360"/>
+            <a:ext cx="9601200" cy="1837944"/>
+          </a:xfrm>
+          <a:prstGeom prst="roundRect">
+            <a:avLst/>
+          </a:prstGeom>
+          <a:solidFill>
+            <a:srgbClr val="FCF8FF"/>
+          </a:solidFill>
+          <a:ln w="19050">
+            <a:solidFill>
+              <a:srgbClr val="C8AADC"/>
+            </a:solidFill>
+          </a:ln>
+        </p:spPr>
+        <p:style>
+          <a:lnRef idx="1">
+            <a:schemeClr val="accent1"/>
+          </a:lnRef>
+          <a:fillRef idx="3">
+            <a:schemeClr val="accent1"/>
+          </a:fillRef>
+          <a:effectRef idx="2">
+            <a:schemeClr val="accent1"/>
+          </a:effectRef>
+          <a:fontRef idx="minor">
+            <a:schemeClr val="lt1"/>
+          </a:fontRef>
+        </p:style>
+        <p:txBody>
+          <a:bodyPr rtlCol="0" anchor="ctr"/>
+          <a:lstStyle/>
+          <a:p>
+            <a:pPr algn="ctr"/>
+          </a:p>
+        </p:txBody>
+      </p:sp>
+      <p:sp>
+        <p:nvSpPr>
+          <p:cNvPr id="11" name="Oval 10"/>
+          <p:cNvSpPr/>
+          <p:nvPr/>
+        </p:nvSpPr>
+        <p:spPr>
+          <a:xfrm>
+            <a:off x="2621584" y="1920240"/>
+            <a:ext cx="347472" cy="347472"/>
+          </a:xfrm>
+          <a:prstGeom prst="ellipse">
+            <a:avLst/>
+          </a:prstGeom>
+          <a:solidFill>
+            <a:srgbClr val="784696"/>
+          </a:solidFill>
+          <a:ln>
+            <a:noFill/>
+          </a:ln>
+        </p:spPr>
+        <p:style>
+          <a:lnRef idx="1">
+            <a:schemeClr val="accent1"/>
+          </a:lnRef>
+          <a:fillRef idx="3">
+            <a:schemeClr val="accent1"/>
+          </a:fillRef>
+          <a:effectRef idx="2">
+            <a:schemeClr val="accent1"/>
+          </a:effectRef>
+          <a:fontRef idx="minor">
+            <a:schemeClr val="lt1"/>
+          </a:fontRef>
+        </p:style>
+        <p:txBody>
+          <a:bodyPr rtlCol="0" anchor="ctr"/>
+          <a:lstStyle/>
+          <a:p>
+            <a:pPr algn="ctr"/>
+          </a:p>
+        </p:txBody>
+      </p:sp>
+      <p:sp>
+        <p:nvSpPr>
+          <p:cNvPr id="12" name="TextBox 11"/>
+          <p:cNvSpPr txBox="1"/>
+          <p:nvPr/>
+        </p:nvSpPr>
+        <p:spPr>
+          <a:xfrm>
+            <a:off x="2621584" y="1938528"/>
+            <a:ext cx="347472" cy="329184"/>
+          </a:xfrm>
+          <a:prstGeom prst="rect">
+            <a:avLst/>
+          </a:prstGeom>
+          <a:noFill/>
+        </p:spPr>
+        <p:txBody>
+          <a:bodyPr wrap="none">
+            <a:spAutoFit/>
+          </a:bodyPr>
+          <a:lstStyle/>
+          <a:p>
+            <a:pPr algn="ctr">
+              <a:spcAft>
+                <a:spcPts val="1000"/>
+              </a:spcAft>
+            </a:pPr>
+            <a:r>
+              <a:rPr sz="1400" b="1">
+                <a:solidFill>
+                  <a:srgbClr val="FFFFFF"/>
+                </a:solidFill>
+                <a:latin typeface="Microsoft YaHei"/>
+              </a:rPr>
+              <a:t>1</a:t>
+            </a:r>
+          </a:p>
+        </p:txBody>
+      </p:sp>
+      <p:sp>
+        <p:nvSpPr>
+          <p:cNvPr id="13" name="TextBox 12"/>
+          <p:cNvSpPr txBox="1"/>
+          <p:nvPr/>
+        </p:nvSpPr>
+        <p:spPr>
+          <a:xfrm>
+            <a:off x="3078784" y="1901952"/>
+            <a:ext cx="7863840" cy="457200"/>
+          </a:xfrm>
+          <a:prstGeom prst="rect">
+            <a:avLst/>
+          </a:prstGeom>
+          <a:noFill/>
+        </p:spPr>
+        <p:txBody>
+          <a:bodyPr wrap="none">
+            <a:spAutoFit/>
+          </a:bodyPr>
+          <a:lstStyle/>
+          <a:p>
             <a:pPr algn="l">
               <a:spcAft>
-                <a:spcPts val="800"/>
+                <a:spcPts val="1000"/>
               </a:spcAft>
             </a:pPr>
             <a:r>
-              <a:rPr sz="2400" b="0">
-                <a:solidFill>
-                  <a:srgbClr val="1E325A"/>
+              <a:rPr sz="2200" b="0">
+                <a:solidFill>
+                  <a:srgbClr val="3C2850"/>
                 </a:solidFill>
                 <a:latin typeface="Microsoft YaHei"/>
               </a:rPr>
-              <a:t>用150字概括故事，写50字情境运用</a:t>
+              <a:t>夸张+反讽+对比，让笑声指向盲从与虚伪</a:t>
+            </a:r>
+          </a:p>
+        </p:txBody>
+      </p:sp>
+      <p:sp>
+        <p:nvSpPr>
+          <p:cNvPr id="14" name="Oval 13"/>
+          <p:cNvSpPr/>
+          <p:nvPr/>
+        </p:nvSpPr>
+        <p:spPr>
+          <a:xfrm>
+            <a:off x="2621584" y="2395728"/>
+            <a:ext cx="347472" cy="347472"/>
+          </a:xfrm>
+          <a:prstGeom prst="ellipse">
+            <a:avLst/>
+          </a:prstGeom>
+          <a:solidFill>
+            <a:srgbClr val="784696"/>
+          </a:solidFill>
+          <a:ln>
+            <a:noFill/>
+          </a:ln>
+        </p:spPr>
+        <p:style>
+          <a:lnRef idx="1">
+            <a:schemeClr val="accent1"/>
+          </a:lnRef>
+          <a:fillRef idx="3">
+            <a:schemeClr val="accent1"/>
+          </a:fillRef>
+          <a:effectRef idx="2">
+            <a:schemeClr val="accent1"/>
+          </a:effectRef>
+          <a:fontRef idx="minor">
+            <a:schemeClr val="lt1"/>
+          </a:fontRef>
+        </p:style>
+        <p:txBody>
+          <a:bodyPr rtlCol="0" anchor="ctr"/>
+          <a:lstStyle/>
+          <a:p>
+            <a:pPr algn="ctr"/>
+          </a:p>
+        </p:txBody>
+      </p:sp>
+      <p:sp>
+        <p:nvSpPr>
+          <p:cNvPr id="15" name="TextBox 14"/>
+          <p:cNvSpPr txBox="1"/>
+          <p:nvPr/>
+        </p:nvSpPr>
+        <p:spPr>
+          <a:xfrm>
+            <a:off x="2621584" y="2414016"/>
+            <a:ext cx="347472" cy="329184"/>
+          </a:xfrm>
+          <a:prstGeom prst="rect">
+            <a:avLst/>
+          </a:prstGeom>
+          <a:noFill/>
+        </p:spPr>
+        <p:txBody>
+          <a:bodyPr wrap="none">
+            <a:spAutoFit/>
+          </a:bodyPr>
+          <a:lstStyle/>
+          <a:p>
+            <a:pPr algn="ctr">
+              <a:spcAft>
+                <a:spcPts val="1000"/>
+              </a:spcAft>
+            </a:pPr>
+            <a:r>
+              <a:rPr sz="1400" b="1">
+                <a:solidFill>
+                  <a:srgbClr val="FFFFFF"/>
+                </a:solidFill>
+                <a:latin typeface="Microsoft YaHei"/>
+              </a:rPr>
+              <a:t>2</a:t>
+            </a:r>
+          </a:p>
+        </p:txBody>
+      </p:sp>
+      <p:sp>
+        <p:nvSpPr>
+          <p:cNvPr id="16" name="TextBox 15"/>
+          <p:cNvSpPr txBox="1"/>
+          <p:nvPr/>
+        </p:nvSpPr>
+        <p:spPr>
+          <a:xfrm>
+            <a:off x="3078784" y="2377440"/>
+            <a:ext cx="7863840" cy="457200"/>
+          </a:xfrm>
+          <a:prstGeom prst="rect">
+            <a:avLst/>
+          </a:prstGeom>
+          <a:noFill/>
+        </p:spPr>
+        <p:txBody>
+          <a:bodyPr wrap="none">
+            <a:spAutoFit/>
+          </a:bodyPr>
+          <a:lstStyle/>
+          <a:p>
+            <a:pPr algn="l">
+              <a:spcAft>
+                <a:spcPts val="1000"/>
+              </a:spcAft>
+            </a:pPr>
+            <a:r>
+              <a:rPr sz="2200" b="0">
+                <a:solidFill>
+                  <a:srgbClr val="3C2850"/>
+                </a:solidFill>
+                <a:latin typeface="Microsoft YaHei"/>
+              </a:rPr>
+              <a:t>「新装」是谎言，更是照见人性的镜子</a:t>
+            </a:r>
+          </a:p>
+        </p:txBody>
+      </p:sp>
+      <p:sp>
+        <p:nvSpPr>
+          <p:cNvPr id="17" name="Oval 16"/>
+          <p:cNvSpPr/>
+          <p:nvPr/>
+        </p:nvSpPr>
+        <p:spPr>
+          <a:xfrm>
+            <a:off x="2621584" y="2871216"/>
+            <a:ext cx="347472" cy="347472"/>
+          </a:xfrm>
+          <a:prstGeom prst="ellipse">
+            <a:avLst/>
+          </a:prstGeom>
+          <a:solidFill>
+            <a:srgbClr val="784696"/>
+          </a:solidFill>
+          <a:ln>
+            <a:noFill/>
+          </a:ln>
+        </p:spPr>
+        <p:style>
+          <a:lnRef idx="1">
+            <a:schemeClr val="accent1"/>
+          </a:lnRef>
+          <a:fillRef idx="3">
+            <a:schemeClr val="accent1"/>
+          </a:fillRef>
+          <a:effectRef idx="2">
+            <a:schemeClr val="accent1"/>
+          </a:effectRef>
+          <a:fontRef idx="minor">
+            <a:schemeClr val="lt1"/>
+          </a:fontRef>
+        </p:style>
+        <p:txBody>
+          <a:bodyPr rtlCol="0" anchor="ctr"/>
+          <a:lstStyle/>
+          <a:p>
+            <a:pPr algn="ctr"/>
+          </a:p>
+        </p:txBody>
+      </p:sp>
+      <p:sp>
+        <p:nvSpPr>
+          <p:cNvPr id="18" name="TextBox 17"/>
+          <p:cNvSpPr txBox="1"/>
+          <p:nvPr/>
+        </p:nvSpPr>
+        <p:spPr>
+          <a:xfrm>
+            <a:off x="2621584" y="2889504"/>
+            <a:ext cx="347472" cy="329184"/>
+          </a:xfrm>
+          <a:prstGeom prst="rect">
+            <a:avLst/>
+          </a:prstGeom>
+          <a:noFill/>
+        </p:spPr>
+        <p:txBody>
+          <a:bodyPr wrap="none">
+            <a:spAutoFit/>
+          </a:bodyPr>
+          <a:lstStyle/>
+          <a:p>
+            <a:pPr algn="ctr">
+              <a:spcAft>
+                <a:spcPts val="1000"/>
+              </a:spcAft>
+            </a:pPr>
+            <a:r>
+              <a:rPr sz="1400" b="1">
+                <a:solidFill>
+                  <a:srgbClr val="FFFFFF"/>
+                </a:solidFill>
+                <a:latin typeface="Microsoft YaHei"/>
+              </a:rPr>
+              <a:t>3</a:t>
+            </a:r>
+          </a:p>
+        </p:txBody>
+      </p:sp>
+      <p:sp>
+        <p:nvSpPr>
+          <p:cNvPr id="19" name="TextBox 18"/>
+          <p:cNvSpPr txBox="1"/>
+          <p:nvPr/>
+        </p:nvSpPr>
+        <p:spPr>
+          <a:xfrm>
+            <a:off x="3078784" y="2852928"/>
+            <a:ext cx="7863840" cy="457200"/>
+          </a:xfrm>
+          <a:prstGeom prst="rect">
+            <a:avLst/>
+          </a:prstGeom>
+          <a:noFill/>
+        </p:spPr>
+        <p:txBody>
+          <a:bodyPr wrap="none">
+            <a:spAutoFit/>
+          </a:bodyPr>
+          <a:lstStyle/>
+          <a:p>
+            <a:pPr algn="l">
+              <a:spcAft>
+                <a:spcPts val="1000"/>
+              </a:spcAft>
+            </a:pPr>
+            <a:r>
+              <a:rPr sz="2200" b="0">
+                <a:solidFill>
+                  <a:srgbClr val="3C2850"/>
+                </a:solidFill>
+                <a:latin typeface="Microsoft YaHei"/>
+              </a:rPr>
+              <a:t>策展主题二：真实与虚假</a:t>
+            </a:r>
+          </a:p>
+        </p:txBody>
+      </p:sp>
+    </p:spTree>
+  </p:cSld>
+  <p:clrMapOvr>
+    <a:masterClrMapping/>
+  </p:clrMapOvr>
+</p:sld>
+</file>
+
+<file path=ppt/slides/slide8.xml><?xml version="1.0" encoding="utf-8"?>
+<p:sld xmlns:a="http://schemas.openxmlformats.org/drawingml/2006/main" xmlns:p="http://schemas.openxmlformats.org/presentationml/2006/main" xmlns:r="http://schemas.openxmlformats.org/officeDocument/2006/relationships">
+  <p:cSld>
+    <p:spTree>
+      <p:nvGrpSpPr>
+        <p:cNvPr id="1" name=""/>
+        <p:cNvGrpSpPr/>
+        <p:nvPr/>
+      </p:nvGrpSpPr>
+      <p:grpSpPr/>
+      <p:pic>
+        <p:nvPicPr>
+          <p:cNvPr id="2" name="Picture 1" descr="bg_emperor.png"/>
+          <p:cNvPicPr>
+            <a:picLocks noChangeAspect="1"/>
+          </p:cNvPicPr>
+          <p:nvPr/>
+        </p:nvPicPr>
+        <p:blipFill>
+          <a:blip r:embed="rId2"/>
+          <a:stretch>
+            <a:fillRect/>
+          </a:stretch>
+        </p:blipFill>
+        <p:spPr>
+          <a:xfrm>
+            <a:off x="0" y="0"/>
+            <a:ext cx="12191695" cy="6858000"/>
+          </a:xfrm>
+          <a:prstGeom prst="rect">
+            <a:avLst/>
+          </a:prstGeom>
+        </p:spPr>
+      </p:pic>
+      <p:sp>
+        <p:nvSpPr>
+          <p:cNvPr id="3" name="Rectangle 2"/>
+          <p:cNvSpPr/>
+          <p:nvPr/>
+        </p:nvSpPr>
+        <p:spPr>
+          <a:xfrm>
+            <a:off x="292608" y="274320"/>
+            <a:ext cx="11594592" cy="6300216"/>
+          </a:xfrm>
+          <a:prstGeom prst="rect">
+            <a:avLst/>
+          </a:prstGeom>
+          <a:noFill/>
+          <a:ln w="31750">
+            <a:solidFill>
+              <a:srgbClr val="825AA0"/>
+            </a:solidFill>
+          </a:ln>
+        </p:spPr>
+        <p:style>
+          <a:lnRef idx="1">
+            <a:schemeClr val="accent1"/>
+          </a:lnRef>
+          <a:fillRef idx="3">
+            <a:schemeClr val="accent1"/>
+          </a:fillRef>
+          <a:effectRef idx="2">
+            <a:schemeClr val="accent1"/>
+          </a:effectRef>
+          <a:fontRef idx="minor">
+            <a:schemeClr val="lt1"/>
+          </a:fontRef>
+        </p:style>
+        <p:txBody>
+          <a:bodyPr rtlCol="0" anchor="ctr"/>
+          <a:lstStyle/>
+          <a:p>
+            <a:pPr algn="ctr"/>
+          </a:p>
+        </p:txBody>
+      </p:sp>
+      <p:pic>
+        <p:nvPicPr>
+          <p:cNvPr id="4" name="Picture 3" descr="corner_emperor_tl.png"/>
+          <p:cNvPicPr>
+            <a:picLocks noChangeAspect="1"/>
+          </p:cNvPicPr>
+          <p:nvPr/>
+        </p:nvPicPr>
+        <p:blipFill>
+          <a:blip r:embed="rId3"/>
+          <a:stretch>
+            <a:fillRect/>
+          </a:stretch>
+        </p:blipFill>
+        <p:spPr>
+          <a:xfrm>
+            <a:off x="-45720" y="-45720"/>
+            <a:ext cx="2011680" cy="2011680"/>
+          </a:xfrm>
+          <a:prstGeom prst="rect">
+            <a:avLst/>
+          </a:prstGeom>
+        </p:spPr>
+      </p:pic>
+      <p:pic>
+        <p:nvPicPr>
+          <p:cNvPr id="5" name="Picture 4" descr="corner_emperor_tr.png"/>
+          <p:cNvPicPr>
+            <a:picLocks noChangeAspect="1"/>
+          </p:cNvPicPr>
+          <p:nvPr/>
+        </p:nvPicPr>
+        <p:blipFill>
+          <a:blip r:embed="rId4"/>
+          <a:stretch>
+            <a:fillRect/>
+          </a:stretch>
+        </p:blipFill>
+        <p:spPr>
+          <a:xfrm>
+            <a:off x="9875520" y="-45720"/>
+            <a:ext cx="2011680" cy="2011680"/>
+          </a:xfrm>
+          <a:prstGeom prst="rect">
+            <a:avLst/>
+          </a:prstGeom>
+        </p:spPr>
+      </p:pic>
+      <p:sp>
+        <p:nvSpPr>
+          <p:cNvPr id="6" name="Rounded Rectangle 5"/>
+          <p:cNvSpPr/>
+          <p:nvPr/>
+        </p:nvSpPr>
+        <p:spPr>
+          <a:xfrm>
+            <a:off x="4953304" y="502920"/>
+            <a:ext cx="2286000" cy="411480"/>
+          </a:xfrm>
+          <a:prstGeom prst="roundRect">
+            <a:avLst/>
+          </a:prstGeom>
+          <a:solidFill>
+            <a:srgbClr val="C8AADC"/>
+          </a:solidFill>
+          <a:ln>
+            <a:noFill/>
+          </a:ln>
+        </p:spPr>
+        <p:style>
+          <a:lnRef idx="1">
+            <a:schemeClr val="accent1"/>
+          </a:lnRef>
+          <a:fillRef idx="3">
+            <a:schemeClr val="accent1"/>
+          </a:fillRef>
+          <a:effectRef idx="2">
+            <a:schemeClr val="accent1"/>
+          </a:effectRef>
+          <a:fontRef idx="minor">
+            <a:schemeClr val="lt1"/>
+          </a:fontRef>
+        </p:style>
+        <p:txBody>
+          <a:bodyPr rtlCol="0" anchor="ctr"/>
+          <a:lstStyle/>
+          <a:p>
+            <a:pPr algn="ctr"/>
+          </a:p>
+        </p:txBody>
+      </p:sp>
+      <p:sp>
+        <p:nvSpPr>
+          <p:cNvPr id="7" name="TextBox 6"/>
+          <p:cNvSpPr txBox="1"/>
+          <p:nvPr/>
+        </p:nvSpPr>
+        <p:spPr>
+          <a:xfrm>
+            <a:off x="4953304" y="521208"/>
+            <a:ext cx="2286000" cy="384048"/>
+          </a:xfrm>
+          <a:prstGeom prst="rect">
+            <a:avLst/>
+          </a:prstGeom>
+          <a:noFill/>
+        </p:spPr>
+        <p:txBody>
+          <a:bodyPr wrap="none">
+            <a:spAutoFit/>
+          </a:bodyPr>
+          <a:lstStyle/>
+          <a:p>
+            <a:pPr algn="ctr">
+              <a:spcAft>
+                <a:spcPts val="1000"/>
+              </a:spcAft>
+            </a:pPr>
+            <a:r>
+              <a:rPr sz="1800" b="1">
+                <a:solidFill>
+                  <a:srgbClr val="3C2850"/>
+                </a:solidFill>
+                <a:latin typeface="Microsoft YaHei"/>
+              </a:rPr>
+              <a:t>课后延伸</a:t>
+            </a:r>
+          </a:p>
+        </p:txBody>
+      </p:sp>
+      <p:sp>
+        <p:nvSpPr>
+          <p:cNvPr id="8" name="TextBox 7"/>
+          <p:cNvSpPr txBox="1"/>
+          <p:nvPr/>
+        </p:nvSpPr>
+        <p:spPr>
+          <a:xfrm>
+            <a:off x="1371600" y="1051560"/>
+            <a:ext cx="9418320" cy="822960"/>
+          </a:xfrm>
+          <a:prstGeom prst="rect">
+            <a:avLst/>
+          </a:prstGeom>
+          <a:noFill/>
+        </p:spPr>
+        <p:txBody>
+          <a:bodyPr wrap="square">
+            <a:spAutoFit/>
+          </a:bodyPr>
+          <a:lstStyle/>
+          <a:p>
+            <a:pPr algn="ctr">
+              <a:spcAft>
+                <a:spcPts val="1000"/>
+              </a:spcAft>
+            </a:pPr>
+            <a:r>
+              <a:rPr sz="3600" b="1">
+                <a:solidFill>
+                  <a:srgbClr val="784696"/>
+                </a:solidFill>
+                <a:latin typeface="Microsoft YaHei"/>
+              </a:rPr>
+              <a:t>课后作业</a:t>
+            </a:r>
+          </a:p>
+        </p:txBody>
+      </p:sp>
+      <p:sp>
+        <p:nvSpPr>
+          <p:cNvPr id="9" name="Rectangle 8"/>
+          <p:cNvSpPr/>
+          <p:nvPr/>
+        </p:nvSpPr>
+        <p:spPr>
+          <a:xfrm>
+            <a:off x="3200400" y="1691640"/>
+            <a:ext cx="5760720" cy="27432"/>
+          </a:xfrm>
+          <a:prstGeom prst="rect">
+            <a:avLst/>
+          </a:prstGeom>
+          <a:solidFill>
+            <a:srgbClr val="C8AADC"/>
+          </a:solidFill>
+          <a:ln>
+            <a:noFill/>
+          </a:ln>
+        </p:spPr>
+        <p:style>
+          <a:lnRef idx="1">
+            <a:schemeClr val="accent1"/>
+          </a:lnRef>
+          <a:fillRef idx="3">
+            <a:schemeClr val="accent1"/>
+          </a:fillRef>
+          <a:effectRef idx="2">
+            <a:schemeClr val="accent1"/>
+          </a:effectRef>
+          <a:fontRef idx="minor">
+            <a:schemeClr val="lt1"/>
+          </a:fontRef>
+        </p:style>
+        <p:txBody>
+          <a:bodyPr rtlCol="0" anchor="ctr"/>
+          <a:lstStyle/>
+          <a:p>
+            <a:pPr algn="ctr"/>
+          </a:p>
+        </p:txBody>
+      </p:sp>
+      <p:sp>
+        <p:nvSpPr>
+          <p:cNvPr id="10" name="Rounded Rectangle 9"/>
+          <p:cNvSpPr/>
+          <p:nvPr/>
+        </p:nvSpPr>
+        <p:spPr>
+          <a:xfrm>
+            <a:off x="1295704" y="1737360"/>
+            <a:ext cx="9601200" cy="1545336"/>
+          </a:xfrm>
+          <a:prstGeom prst="roundRect">
+            <a:avLst/>
+          </a:prstGeom>
+          <a:solidFill>
+            <a:srgbClr val="FCF8FF"/>
+          </a:solidFill>
+          <a:ln w="19050">
+            <a:solidFill>
+              <a:srgbClr val="C8AADC"/>
+            </a:solidFill>
+          </a:ln>
+        </p:spPr>
+        <p:style>
+          <a:lnRef idx="1">
+            <a:schemeClr val="accent1"/>
+          </a:lnRef>
+          <a:fillRef idx="3">
+            <a:schemeClr val="accent1"/>
+          </a:fillRef>
+          <a:effectRef idx="2">
+            <a:schemeClr val="accent1"/>
+          </a:effectRef>
+          <a:fontRef idx="minor">
+            <a:schemeClr val="lt1"/>
+          </a:fontRef>
+        </p:style>
+        <p:txBody>
+          <a:bodyPr rtlCol="0" anchor="ctr"/>
+          <a:lstStyle/>
+          <a:p>
+            <a:pPr algn="ctr"/>
+          </a:p>
+        </p:txBody>
+      </p:sp>
+      <p:sp>
+        <p:nvSpPr>
+          <p:cNvPr id="11" name="Oval 10"/>
+          <p:cNvSpPr/>
+          <p:nvPr/>
+        </p:nvSpPr>
+        <p:spPr>
+          <a:xfrm>
+            <a:off x="2621584" y="1920240"/>
+            <a:ext cx="347472" cy="347472"/>
+          </a:xfrm>
+          <a:prstGeom prst="ellipse">
+            <a:avLst/>
+          </a:prstGeom>
+          <a:solidFill>
+            <a:srgbClr val="784696"/>
+          </a:solidFill>
+          <a:ln>
+            <a:noFill/>
+          </a:ln>
+        </p:spPr>
+        <p:style>
+          <a:lnRef idx="1">
+            <a:schemeClr val="accent1"/>
+          </a:lnRef>
+          <a:fillRef idx="3">
+            <a:schemeClr val="accent1"/>
+          </a:fillRef>
+          <a:effectRef idx="2">
+            <a:schemeClr val="accent1"/>
+          </a:effectRef>
+          <a:fontRef idx="minor">
+            <a:schemeClr val="lt1"/>
+          </a:fontRef>
+        </p:style>
+        <p:txBody>
+          <a:bodyPr rtlCol="0" anchor="ctr"/>
+          <a:lstStyle/>
+          <a:p>
+            <a:pPr algn="ctr"/>
+          </a:p>
+        </p:txBody>
+      </p:sp>
+      <p:sp>
+        <p:nvSpPr>
+          <p:cNvPr id="12" name="TextBox 11"/>
+          <p:cNvSpPr txBox="1"/>
+          <p:nvPr/>
+        </p:nvSpPr>
+        <p:spPr>
+          <a:xfrm>
+            <a:off x="2621584" y="1938528"/>
+            <a:ext cx="347472" cy="329184"/>
+          </a:xfrm>
+          <a:prstGeom prst="rect">
+            <a:avLst/>
+          </a:prstGeom>
+          <a:noFill/>
+        </p:spPr>
+        <p:txBody>
+          <a:bodyPr wrap="none">
+            <a:spAutoFit/>
+          </a:bodyPr>
+          <a:lstStyle/>
+          <a:p>
+            <a:pPr algn="ctr">
+              <a:spcAft>
+                <a:spcPts val="1000"/>
+              </a:spcAft>
+            </a:pPr>
+            <a:r>
+              <a:rPr sz="1400" b="1">
+                <a:solidFill>
+                  <a:srgbClr val="FFFFFF"/>
+                </a:solidFill>
+                <a:latin typeface="Microsoft YaHei"/>
+              </a:rPr>
+              <a:t>1</a:t>
+            </a:r>
+          </a:p>
+        </p:txBody>
+      </p:sp>
+      <p:sp>
+        <p:nvSpPr>
+          <p:cNvPr id="13" name="TextBox 12"/>
+          <p:cNvSpPr txBox="1"/>
+          <p:nvPr/>
+        </p:nvSpPr>
+        <p:spPr>
+          <a:xfrm>
+            <a:off x="3078784" y="1901952"/>
+            <a:ext cx="7863840" cy="457200"/>
+          </a:xfrm>
+          <a:prstGeom prst="rect">
+            <a:avLst/>
+          </a:prstGeom>
+          <a:noFill/>
+        </p:spPr>
+        <p:txBody>
+          <a:bodyPr wrap="none">
+            <a:spAutoFit/>
+          </a:bodyPr>
+          <a:lstStyle/>
+          <a:p>
+            <a:pPr algn="l">
+              <a:spcAft>
+                <a:spcPts val="1000"/>
+              </a:spcAft>
+            </a:pPr>
+            <a:r>
+              <a:rPr sz="2400" b="0">
+                <a:solidFill>
+                  <a:srgbClr val="3C2850"/>
+                </a:solidFill>
+                <a:latin typeface="Microsoft YaHei"/>
+              </a:rPr>
+              <a:t>必做：用150字概括故事</a:t>
+            </a:r>
+          </a:p>
+        </p:txBody>
+      </p:sp>
+      <p:sp>
+        <p:nvSpPr>
+          <p:cNvPr id="14" name="Oval 13"/>
+          <p:cNvSpPr/>
+          <p:nvPr/>
+        </p:nvSpPr>
+        <p:spPr>
+          <a:xfrm>
+            <a:off x="2621584" y="2487168"/>
+            <a:ext cx="347472" cy="347472"/>
+          </a:xfrm>
+          <a:prstGeom prst="ellipse">
+            <a:avLst/>
+          </a:prstGeom>
+          <a:solidFill>
+            <a:srgbClr val="784696"/>
+          </a:solidFill>
+          <a:ln>
+            <a:noFill/>
+          </a:ln>
+        </p:spPr>
+        <p:style>
+          <a:lnRef idx="1">
+            <a:schemeClr val="accent1"/>
+          </a:lnRef>
+          <a:fillRef idx="3">
+            <a:schemeClr val="accent1"/>
+          </a:fillRef>
+          <a:effectRef idx="2">
+            <a:schemeClr val="accent1"/>
+          </a:effectRef>
+          <a:fontRef idx="minor">
+            <a:schemeClr val="lt1"/>
+          </a:fontRef>
+        </p:style>
+        <p:txBody>
+          <a:bodyPr rtlCol="0" anchor="ctr"/>
+          <a:lstStyle/>
+          <a:p>
+            <a:pPr algn="ctr"/>
+          </a:p>
+        </p:txBody>
+      </p:sp>
+      <p:sp>
+        <p:nvSpPr>
+          <p:cNvPr id="15" name="TextBox 14"/>
+          <p:cNvSpPr txBox="1"/>
+          <p:nvPr/>
+        </p:nvSpPr>
+        <p:spPr>
+          <a:xfrm>
+            <a:off x="2621584" y="2505456"/>
+            <a:ext cx="347472" cy="329184"/>
+          </a:xfrm>
+          <a:prstGeom prst="rect">
+            <a:avLst/>
+          </a:prstGeom>
+          <a:noFill/>
+        </p:spPr>
+        <p:txBody>
+          <a:bodyPr wrap="none">
+            <a:spAutoFit/>
+          </a:bodyPr>
+          <a:lstStyle/>
+          <a:p>
+            <a:pPr algn="ctr">
+              <a:spcAft>
+                <a:spcPts val="1000"/>
+              </a:spcAft>
+            </a:pPr>
+            <a:r>
+              <a:rPr sz="1400" b="1">
+                <a:solidFill>
+                  <a:srgbClr val="FFFFFF"/>
+                </a:solidFill>
+                <a:latin typeface="Microsoft YaHei"/>
+              </a:rPr>
+              <a:t>2</a:t>
+            </a:r>
+          </a:p>
+        </p:txBody>
+      </p:sp>
+      <p:sp>
+        <p:nvSpPr>
+          <p:cNvPr id="16" name="TextBox 15"/>
+          <p:cNvSpPr txBox="1"/>
+          <p:nvPr/>
+        </p:nvSpPr>
+        <p:spPr>
+          <a:xfrm>
+            <a:off x="3078784" y="2468880"/>
+            <a:ext cx="7863840" cy="457200"/>
+          </a:xfrm>
+          <a:prstGeom prst="rect">
+            <a:avLst/>
+          </a:prstGeom>
+          <a:noFill/>
+        </p:spPr>
+        <p:txBody>
+          <a:bodyPr wrap="none">
+            <a:spAutoFit/>
+          </a:bodyPr>
+          <a:lstStyle/>
+          <a:p>
+            <a:pPr algn="l">
+              <a:spcAft>
+                <a:spcPts val="1000"/>
+              </a:spcAft>
+            </a:pPr>
+            <a:r>
+              <a:rPr sz="2400" b="0">
+                <a:solidFill>
+                  <a:srgbClr val="3C2850"/>
+                </a:solidFill>
+                <a:latin typeface="Microsoft YaHei"/>
+              </a:rPr>
+              <a:t>情境：班级群流传「震惊」消息，你会怎么做？（50字）</a:t>
             </a:r>
           </a:p>
         </p:txBody>

--- a/第六单元PPT/第22课 皇帝的新装.pptx
+++ b/第六单元PPT/第22课 皇帝的新装.pptx
@@ -13,6 +13,7 @@
     <p:sldId id="261" r:id="rId12"/>
     <p:sldId id="262" r:id="rId13"/>
     <p:sldId id="263" r:id="rId14"/>
+    <p:sldId id="264" r:id="rId15"/>
   </p:sldIdLst>
   <p:sldSz cx="12191695" cy="6858000" type="screen4x3"/>
   <p:notesSz cx="6858000" cy="9144000"/>
@@ -3304,8 +3305,8 @@
         </p:nvSpPr>
         <p:spPr>
           <a:xfrm>
-            <a:off x="1371600" y="1828800"/>
-            <a:ext cx="9418320" cy="1828800"/>
+            <a:off x="1371600" y="2011680"/>
+            <a:ext cx="9418320" cy="1645920"/>
           </a:xfrm>
           <a:prstGeom prst="rect">
             <a:avLst/>
@@ -3604,7 +3605,7 @@
                 </a:solidFill>
                 <a:latin typeface="Microsoft YaHei"/>
               </a:rPr>
-              <a:t>课堂笔记</a:t>
+              <a:t>课时目标</a:t>
             </a:r>
           </a:p>
         </p:txBody>
@@ -3617,7 +3618,7 @@
         </p:nvSpPr>
         <p:spPr>
           <a:xfrm>
-            <a:off x="1371600" y="1051560"/>
+            <a:off x="1371600" y="960120"/>
             <a:ext cx="9418320" cy="822960"/>
           </a:xfrm>
           <a:prstGeom prst="rect">
@@ -3643,7 +3644,7 @@
                 </a:solidFill>
                 <a:latin typeface="Microsoft YaHei"/>
               </a:rPr>
-              <a:t>文学常识</a:t>
+              <a:t>本课目标</a:t>
             </a:r>
           </a:p>
         </p:txBody>
@@ -3656,7 +3657,7 @@
         </p:nvSpPr>
         <p:spPr>
           <a:xfrm>
-            <a:off x="3200400" y="1691640"/>
+            <a:off x="3200400" y="1600200"/>
             <a:ext cx="5760720" cy="27432"/>
           </a:xfrm>
           <a:prstGeom prst="rect">
@@ -3699,8 +3700,8 @@
         </p:nvSpPr>
         <p:spPr>
           <a:xfrm>
-            <a:off x="1249984" y="1810512"/>
-            <a:ext cx="9692640" cy="3319272"/>
+            <a:off x="1295704" y="1645920"/>
+            <a:ext cx="9601200" cy="2240280"/>
           </a:xfrm>
           <a:prstGeom prst="roundRect">
             <a:avLst/>
@@ -3738,14 +3739,57 @@
       </p:sp>
       <p:sp>
         <p:nvSpPr>
-          <p:cNvPr id="11" name="TextBox 10"/>
+          <p:cNvPr id="11" name="Oval 10"/>
+          <p:cNvSpPr/>
+          <p:nvPr/>
+        </p:nvSpPr>
+        <p:spPr>
+          <a:xfrm>
+            <a:off x="2255824" y="1828800"/>
+            <a:ext cx="384048" cy="384048"/>
+          </a:xfrm>
+          <a:prstGeom prst="ellipse">
+            <a:avLst/>
+          </a:prstGeom>
+          <a:solidFill>
+            <a:srgbClr val="784696"/>
+          </a:solidFill>
+          <a:ln>
+            <a:noFill/>
+          </a:ln>
+        </p:spPr>
+        <p:style>
+          <a:lnRef idx="1">
+            <a:schemeClr val="accent1"/>
+          </a:lnRef>
+          <a:fillRef idx="3">
+            <a:schemeClr val="accent1"/>
+          </a:fillRef>
+          <a:effectRef idx="2">
+            <a:schemeClr val="accent1"/>
+          </a:effectRef>
+          <a:fontRef idx="minor">
+            <a:schemeClr val="lt1"/>
+          </a:fontRef>
+        </p:style>
+        <p:txBody>
+          <a:bodyPr rtlCol="0" anchor="ctr"/>
+          <a:lstStyle/>
+          <a:p>
+            <a:pPr algn="ctr"/>
+          </a:p>
+        </p:txBody>
+      </p:sp>
+      <p:sp>
+        <p:nvSpPr>
+          <p:cNvPr id="12" name="TextBox 11"/>
           <p:cNvSpPr txBox="1"/>
           <p:nvPr/>
         </p:nvSpPr>
         <p:spPr>
           <a:xfrm>
-            <a:off x="1463040" y="1920240"/>
-            <a:ext cx="2103120" cy="502920"/>
+            <a:off x="2255824" y="1847088"/>
+            <a:ext cx="384048" cy="365760"/>
           </a:xfrm>
           <a:prstGeom prst="rect">
             <a:avLst/>
@@ -3758,33 +3802,33 @@
           </a:bodyPr>
           <a:lstStyle/>
           <a:p>
-            <a:pPr algn="r">
+            <a:pPr algn="ctr">
               <a:spcAft>
                 <a:spcPts val="1000"/>
               </a:spcAft>
             </a:pPr>
             <a:r>
-              <a:rPr sz="2200" b="1">
+              <a:rPr sz="1600" b="1">
                 <a:solidFill>
-                  <a:srgbClr val="784696"/>
+                  <a:srgbClr val="FFFFFF"/>
                 </a:solidFill>
                 <a:latin typeface="Microsoft YaHei"/>
               </a:rPr>
-              <a:t>作者</a:t>
-            </a:r>
-          </a:p>
-        </p:txBody>
-      </p:sp>
-      <p:sp>
-        <p:nvSpPr>
-          <p:cNvPr id="12" name="TextBox 11"/>
+              <a:t>1</a:t>
+            </a:r>
+          </a:p>
+        </p:txBody>
+      </p:sp>
+      <p:sp>
+        <p:nvSpPr>
+          <p:cNvPr id="13" name="TextBox 12"/>
           <p:cNvSpPr txBox="1"/>
           <p:nvPr/>
         </p:nvSpPr>
         <p:spPr>
           <a:xfrm>
-            <a:off x="3749039" y="1920240"/>
-            <a:ext cx="7132320" cy="685800"/>
+            <a:off x="2758744" y="1810512"/>
+            <a:ext cx="7772400" cy="502920"/>
           </a:xfrm>
           <a:prstGeom prst="rect">
             <a:avLst/>
@@ -3803,27 +3847,70 @@
               </a:spcAft>
             </a:pPr>
             <a:r>
-              <a:rPr sz="2200" b="0">
+              <a:rPr sz="2400" b="0">
                 <a:solidFill>
                   <a:srgbClr val="3C2850"/>
                 </a:solidFill>
                 <a:latin typeface="Microsoft YaHei"/>
               </a:rPr>
-              <a:t>安徒生，丹麦童话作家</a:t>
-            </a:r>
-          </a:p>
-        </p:txBody>
-      </p:sp>
-      <p:sp>
-        <p:nvSpPr>
-          <p:cNvPr id="13" name="TextBox 12"/>
+              <a:t>梳理童话情节，用简洁语言复述故事</a:t>
+            </a:r>
+          </a:p>
+        </p:txBody>
+      </p:sp>
+      <p:sp>
+        <p:nvSpPr>
+          <p:cNvPr id="14" name="Oval 13"/>
+          <p:cNvSpPr/>
+          <p:nvPr/>
+        </p:nvSpPr>
+        <p:spPr>
+          <a:xfrm>
+            <a:off x="2255824" y="2395728"/>
+            <a:ext cx="384048" cy="384048"/>
+          </a:xfrm>
+          <a:prstGeom prst="ellipse">
+            <a:avLst/>
+          </a:prstGeom>
+          <a:solidFill>
+            <a:srgbClr val="784696"/>
+          </a:solidFill>
+          <a:ln>
+            <a:noFill/>
+          </a:ln>
+        </p:spPr>
+        <p:style>
+          <a:lnRef idx="1">
+            <a:schemeClr val="accent1"/>
+          </a:lnRef>
+          <a:fillRef idx="3">
+            <a:schemeClr val="accent1"/>
+          </a:fillRef>
+          <a:effectRef idx="2">
+            <a:schemeClr val="accent1"/>
+          </a:effectRef>
+          <a:fontRef idx="minor">
+            <a:schemeClr val="lt1"/>
+          </a:fontRef>
+        </p:style>
+        <p:txBody>
+          <a:bodyPr rtlCol="0" anchor="ctr"/>
+          <a:lstStyle/>
+          <a:p>
+            <a:pPr algn="ctr"/>
+          </a:p>
+        </p:txBody>
+      </p:sp>
+      <p:sp>
+        <p:nvSpPr>
+          <p:cNvPr id="15" name="TextBox 14"/>
           <p:cNvSpPr txBox="1"/>
           <p:nvPr/>
         </p:nvSpPr>
         <p:spPr>
           <a:xfrm>
-            <a:off x="1463040" y="2670048"/>
-            <a:ext cx="2103120" cy="502920"/>
+            <a:off x="2255824" y="2414016"/>
+            <a:ext cx="384048" cy="365760"/>
           </a:xfrm>
           <a:prstGeom prst="rect">
             <a:avLst/>
@@ -3836,33 +3923,33 @@
           </a:bodyPr>
           <a:lstStyle/>
           <a:p>
-            <a:pPr algn="r">
+            <a:pPr algn="ctr">
               <a:spcAft>
                 <a:spcPts val="1000"/>
               </a:spcAft>
             </a:pPr>
             <a:r>
-              <a:rPr sz="2200" b="1">
+              <a:rPr sz="1600" b="1">
                 <a:solidFill>
-                  <a:srgbClr val="784696"/>
+                  <a:srgbClr val="FFFFFF"/>
                 </a:solidFill>
                 <a:latin typeface="Microsoft YaHei"/>
               </a:rPr>
-              <a:t>文体</a:t>
-            </a:r>
-          </a:p>
-        </p:txBody>
-      </p:sp>
-      <p:sp>
-        <p:nvSpPr>
-          <p:cNvPr id="14" name="TextBox 13"/>
+              <a:t>2</a:t>
+            </a:r>
+          </a:p>
+        </p:txBody>
+      </p:sp>
+      <p:sp>
+        <p:nvSpPr>
+          <p:cNvPr id="16" name="TextBox 15"/>
           <p:cNvSpPr txBox="1"/>
           <p:nvPr/>
         </p:nvSpPr>
         <p:spPr>
           <a:xfrm>
-            <a:off x="3749039" y="2670048"/>
-            <a:ext cx="7132320" cy="685800"/>
+            <a:off x="2758744" y="2377440"/>
+            <a:ext cx="7772400" cy="502920"/>
           </a:xfrm>
           <a:prstGeom prst="rect">
             <a:avLst/>
@@ -3881,27 +3968,70 @@
               </a:spcAft>
             </a:pPr>
             <a:r>
-              <a:rPr sz="2200" b="0">
+              <a:rPr sz="2400" b="0">
                 <a:solidFill>
                   <a:srgbClr val="3C2850"/>
                 </a:solidFill>
                 <a:latin typeface="Microsoft YaHei"/>
               </a:rPr>
-              <a:t>童话——用虚构故事反映现实生活</a:t>
-            </a:r>
-          </a:p>
-        </p:txBody>
-      </p:sp>
-      <p:sp>
-        <p:nvSpPr>
-          <p:cNvPr id="15" name="TextBox 14"/>
+              <a:t>赏析夸张、反讽等手法，理解讽刺艺术</a:t>
+            </a:r>
+          </a:p>
+        </p:txBody>
+      </p:sp>
+      <p:sp>
+        <p:nvSpPr>
+          <p:cNvPr id="17" name="Oval 16"/>
+          <p:cNvSpPr/>
+          <p:nvPr/>
+        </p:nvSpPr>
+        <p:spPr>
+          <a:xfrm>
+            <a:off x="2255824" y="2962656"/>
+            <a:ext cx="384048" cy="384048"/>
+          </a:xfrm>
+          <a:prstGeom prst="ellipse">
+            <a:avLst/>
+          </a:prstGeom>
+          <a:solidFill>
+            <a:srgbClr val="784696"/>
+          </a:solidFill>
+          <a:ln>
+            <a:noFill/>
+          </a:ln>
+        </p:spPr>
+        <p:style>
+          <a:lnRef idx="1">
+            <a:schemeClr val="accent1"/>
+          </a:lnRef>
+          <a:fillRef idx="3">
+            <a:schemeClr val="accent1"/>
+          </a:fillRef>
+          <a:effectRef idx="2">
+            <a:schemeClr val="accent1"/>
+          </a:effectRef>
+          <a:fontRef idx="minor">
+            <a:schemeClr val="lt1"/>
+          </a:fontRef>
+        </p:style>
+        <p:txBody>
+          <a:bodyPr rtlCol="0" anchor="ctr"/>
+          <a:lstStyle/>
+          <a:p>
+            <a:pPr algn="ctr"/>
+          </a:p>
+        </p:txBody>
+      </p:sp>
+      <p:sp>
+        <p:nvSpPr>
+          <p:cNvPr id="18" name="TextBox 17"/>
           <p:cNvSpPr txBox="1"/>
           <p:nvPr/>
         </p:nvSpPr>
         <p:spPr>
           <a:xfrm>
-            <a:off x="1463040" y="3419856"/>
-            <a:ext cx="2103120" cy="502920"/>
+            <a:off x="2255824" y="2980944"/>
+            <a:ext cx="384048" cy="365760"/>
           </a:xfrm>
           <a:prstGeom prst="rect">
             <a:avLst/>
@@ -3914,33 +4044,33 @@
           </a:bodyPr>
           <a:lstStyle/>
           <a:p>
-            <a:pPr algn="r">
+            <a:pPr algn="ctr">
               <a:spcAft>
                 <a:spcPts val="1000"/>
               </a:spcAft>
             </a:pPr>
             <a:r>
-              <a:rPr sz="2200" b="1">
+              <a:rPr sz="1600" b="1">
                 <a:solidFill>
-                  <a:srgbClr val="784696"/>
+                  <a:srgbClr val="FFFFFF"/>
                 </a:solidFill>
                 <a:latin typeface="Microsoft YaHei"/>
               </a:rPr>
-              <a:t>本文特点</a:t>
-            </a:r>
-          </a:p>
-        </p:txBody>
-      </p:sp>
-      <p:sp>
-        <p:nvSpPr>
-          <p:cNvPr id="16" name="TextBox 15"/>
+              <a:t>3</a:t>
+            </a:r>
+          </a:p>
+        </p:txBody>
+      </p:sp>
+      <p:sp>
+        <p:nvSpPr>
+          <p:cNvPr id="19" name="TextBox 18"/>
           <p:cNvSpPr txBox="1"/>
           <p:nvPr/>
         </p:nvSpPr>
         <p:spPr>
           <a:xfrm>
-            <a:off x="3749039" y="3419856"/>
-            <a:ext cx="7132320" cy="685800"/>
+            <a:off x="2758744" y="2944368"/>
+            <a:ext cx="7772400" cy="502920"/>
           </a:xfrm>
           <a:prstGeom prst="rect">
             <a:avLst/>
@@ -3959,91 +4089,13 @@
               </a:spcAft>
             </a:pPr>
             <a:r>
-              <a:rPr sz="2200" b="0">
+              <a:rPr sz="2400" b="0">
                 <a:solidFill>
                   <a:srgbClr val="3C2850"/>
                 </a:solidFill>
                 <a:latin typeface="Microsoft YaHei"/>
               </a:rPr>
-              <a:t>以「新装」为线索，写一个荒唐的骗局</a:t>
-            </a:r>
-          </a:p>
-        </p:txBody>
-      </p:sp>
-      <p:sp>
-        <p:nvSpPr>
-          <p:cNvPr id="17" name="TextBox 16"/>
-          <p:cNvSpPr txBox="1"/>
-          <p:nvPr/>
-        </p:nvSpPr>
-        <p:spPr>
-          <a:xfrm>
-            <a:off x="1463040" y="4169664"/>
-            <a:ext cx="2103120" cy="502920"/>
-          </a:xfrm>
-          <a:prstGeom prst="rect">
-            <a:avLst/>
-          </a:prstGeom>
-          <a:noFill/>
-        </p:spPr>
-        <p:txBody>
-          <a:bodyPr wrap="none">
-            <a:spAutoFit/>
-          </a:bodyPr>
-          <a:lstStyle/>
-          <a:p>
-            <a:pPr algn="r">
-              <a:spcAft>
-                <a:spcPts val="1000"/>
-              </a:spcAft>
-            </a:pPr>
-            <a:r>
-              <a:rPr sz="2200" b="1">
-                <a:solidFill>
-                  <a:srgbClr val="784696"/>
-                </a:solidFill>
-                <a:latin typeface="Microsoft YaHei"/>
-              </a:rPr>
-              <a:t>核心问题</a:t>
-            </a:r>
-          </a:p>
-        </p:txBody>
-      </p:sp>
-      <p:sp>
-        <p:nvSpPr>
-          <p:cNvPr id="18" name="TextBox 17"/>
-          <p:cNvSpPr txBox="1"/>
-          <p:nvPr/>
-        </p:nvSpPr>
-        <p:spPr>
-          <a:xfrm>
-            <a:off x="3749039" y="4169664"/>
-            <a:ext cx="7132320" cy="685800"/>
-          </a:xfrm>
-          <a:prstGeom prst="rect">
-            <a:avLst/>
-          </a:prstGeom>
-          <a:noFill/>
-        </p:spPr>
-        <p:txBody>
-          <a:bodyPr wrap="none">
-            <a:spAutoFit/>
-          </a:bodyPr>
-          <a:lstStyle/>
-          <a:p>
-            <a:pPr algn="l">
-              <a:spcAft>
-                <a:spcPts val="1000"/>
-              </a:spcAft>
-            </a:pPr>
-            <a:r>
-              <a:rPr sz="2200" b="0">
-                <a:solidFill>
-                  <a:srgbClr val="3C2850"/>
-                </a:solidFill>
-                <a:latin typeface="Microsoft YaHei"/>
-              </a:rPr>
-              <a:t>为什么人们都不敢说自己看不见？</a:t>
+              <a:t>探究「真话为何难以说出口」，树立独立判断</a:t>
             </a:r>
           </a:p>
         </p:txBody>
@@ -4189,7 +4241,7 @@
         </p:nvSpPr>
         <p:spPr>
           <a:xfrm>
-            <a:off x="4953304" y="502920"/>
+            <a:off x="4953304" y="1005840"/>
             <a:ext cx="2286000" cy="411480"/>
           </a:xfrm>
           <a:prstGeom prst="roundRect">
@@ -4232,7 +4284,7 @@
         </p:nvSpPr>
         <p:spPr>
           <a:xfrm>
-            <a:off x="4953304" y="521208"/>
+            <a:off x="4953304" y="1024128"/>
             <a:ext cx="2286000" cy="384048"/>
           </a:xfrm>
           <a:prstGeom prst="rect">
@@ -4258,7 +4310,7 @@
                 </a:solidFill>
                 <a:latin typeface="Microsoft YaHei"/>
               </a:rPr>
-              <a:t>情节笔记</a:t>
+              <a:t>想一想</a:t>
             </a:r>
           </a:p>
         </p:txBody>
@@ -4271,7 +4323,7 @@
         </p:nvSpPr>
         <p:spPr>
           <a:xfrm>
-            <a:off x="1371600" y="1051560"/>
+            <a:off x="1371600" y="1600200"/>
             <a:ext cx="9418320" cy="822960"/>
           </a:xfrm>
           <a:prstGeom prst="rect">
@@ -4291,13 +4343,14 @@
               </a:spcAft>
             </a:pPr>
             <a:r>
-              <a:rPr sz="3600" b="1">
+              <a:rPr sz="3200" b="1">
                 <a:solidFill>
                   <a:srgbClr val="784696"/>
                 </a:solidFill>
                 <a:latin typeface="Microsoft YaHei"/>
               </a:rPr>
-              <a:t>情节结构</a:t>
+              <a:t>爱新衣的皇帝、织空布的骗子
+不敢说真话的大人、说真话的孩子</a:t>
             </a:r>
           </a:p>
         </p:txBody>
@@ -4310,7 +4363,7 @@
         </p:nvSpPr>
         <p:spPr>
           <a:xfrm>
-            <a:off x="3200400" y="1691640"/>
+            <a:off x="3200400" y="4389120"/>
             <a:ext cx="5760720" cy="27432"/>
           </a:xfrm>
           <a:prstGeom prst="rect">
@@ -4347,59 +4400,14 @@
       </p:sp>
       <p:sp>
         <p:nvSpPr>
-          <p:cNvPr id="10" name="Rounded Rectangle 9"/>
-          <p:cNvSpPr/>
-          <p:nvPr/>
-        </p:nvSpPr>
-        <p:spPr>
-          <a:xfrm>
-            <a:off x="1249984" y="1810512"/>
-            <a:ext cx="9692640" cy="3319272"/>
-          </a:xfrm>
-          <a:prstGeom prst="roundRect">
-            <a:avLst/>
-          </a:prstGeom>
-          <a:solidFill>
-            <a:srgbClr val="FCF8FF"/>
-          </a:solidFill>
-          <a:ln w="19050">
-            <a:solidFill>
-              <a:srgbClr val="C8AADC"/>
-            </a:solidFill>
-          </a:ln>
-        </p:spPr>
-        <p:style>
-          <a:lnRef idx="1">
-            <a:schemeClr val="accent1"/>
-          </a:lnRef>
-          <a:fillRef idx="3">
-            <a:schemeClr val="accent1"/>
-          </a:fillRef>
-          <a:effectRef idx="2">
-            <a:schemeClr val="accent1"/>
-          </a:effectRef>
-          <a:fontRef idx="minor">
-            <a:schemeClr val="lt1"/>
-          </a:fontRef>
-        </p:style>
-        <p:txBody>
-          <a:bodyPr rtlCol="0" anchor="ctr"/>
-          <a:lstStyle/>
-          <a:p>
-            <a:pPr algn="ctr"/>
-          </a:p>
-        </p:txBody>
-      </p:sp>
-      <p:sp>
-        <p:nvSpPr>
-          <p:cNvPr id="11" name="TextBox 10"/>
+          <p:cNvPr id="10" name="TextBox 9"/>
           <p:cNvSpPr txBox="1"/>
           <p:nvPr/>
         </p:nvSpPr>
         <p:spPr>
           <a:xfrm>
-            <a:off x="1463040" y="1920240"/>
-            <a:ext cx="2103120" cy="502920"/>
+            <a:off x="1828800" y="4663440"/>
+            <a:ext cx="8503920" cy="914400"/>
           </a:xfrm>
           <a:prstGeom prst="rect">
             <a:avLst/>
@@ -4412,292 +4420,19 @@
           </a:bodyPr>
           <a:lstStyle/>
           <a:p>
-            <a:pPr algn="r">
+            <a:pPr algn="ctr">
               <a:spcAft>
                 <a:spcPts val="1000"/>
               </a:spcAft>
             </a:pPr>
             <a:r>
-              <a:rPr sz="2200" b="1">
+              <a:rPr sz="2200" b="0">
                 <a:solidFill>
                   <a:srgbClr val="784696"/>
                 </a:solidFill>
                 <a:latin typeface="Microsoft YaHei"/>
               </a:rPr>
-              <a:t>开端</a:t>
-            </a:r>
-          </a:p>
-        </p:txBody>
-      </p:sp>
-      <p:sp>
-        <p:nvSpPr>
-          <p:cNvPr id="12" name="TextBox 11"/>
-          <p:cNvSpPr txBox="1"/>
-          <p:nvPr/>
-        </p:nvSpPr>
-        <p:spPr>
-          <a:xfrm>
-            <a:off x="3749039" y="1920240"/>
-            <a:ext cx="7132320" cy="685800"/>
-          </a:xfrm>
-          <a:prstGeom prst="rect">
-            <a:avLst/>
-          </a:prstGeom>
-          <a:noFill/>
-        </p:spPr>
-        <p:txBody>
-          <a:bodyPr wrap="none">
-            <a:spAutoFit/>
-          </a:bodyPr>
-          <a:lstStyle/>
-          <a:p>
-            <a:pPr algn="l">
-              <a:spcAft>
-                <a:spcPts val="1000"/>
-              </a:spcAft>
-            </a:pPr>
-            <a:r>
-              <a:rPr sz="2200" b="0">
-                <a:solidFill>
-                  <a:srgbClr val="3C2850"/>
-                </a:solidFill>
-                <a:latin typeface="Microsoft YaHei"/>
-              </a:rPr>
-              <a:t>两个骗子说能织出只有聪明人才能看见的衣服</a:t>
-            </a:r>
-          </a:p>
-        </p:txBody>
-      </p:sp>
-      <p:sp>
-        <p:nvSpPr>
-          <p:cNvPr id="13" name="TextBox 12"/>
-          <p:cNvSpPr txBox="1"/>
-          <p:nvPr/>
-        </p:nvSpPr>
-        <p:spPr>
-          <a:xfrm>
-            <a:off x="1463040" y="2670048"/>
-            <a:ext cx="2103120" cy="502920"/>
-          </a:xfrm>
-          <a:prstGeom prst="rect">
-            <a:avLst/>
-          </a:prstGeom>
-          <a:noFill/>
-        </p:spPr>
-        <p:txBody>
-          <a:bodyPr wrap="none">
-            <a:spAutoFit/>
-          </a:bodyPr>
-          <a:lstStyle/>
-          <a:p>
-            <a:pPr algn="r">
-              <a:spcAft>
-                <a:spcPts val="1000"/>
-              </a:spcAft>
-            </a:pPr>
-            <a:r>
-              <a:rPr sz="2200" b="1">
-                <a:solidFill>
-                  <a:srgbClr val="784696"/>
-                </a:solidFill>
-                <a:latin typeface="Microsoft YaHei"/>
-              </a:rPr>
-              <a:t>发展</a:t>
-            </a:r>
-          </a:p>
-        </p:txBody>
-      </p:sp>
-      <p:sp>
-        <p:nvSpPr>
-          <p:cNvPr id="14" name="TextBox 13"/>
-          <p:cNvSpPr txBox="1"/>
-          <p:nvPr/>
-        </p:nvSpPr>
-        <p:spPr>
-          <a:xfrm>
-            <a:off x="3749039" y="2670048"/>
-            <a:ext cx="7132320" cy="685800"/>
-          </a:xfrm>
-          <a:prstGeom prst="rect">
-            <a:avLst/>
-          </a:prstGeom>
-          <a:noFill/>
-        </p:spPr>
-        <p:txBody>
-          <a:bodyPr wrap="none">
-            <a:spAutoFit/>
-          </a:bodyPr>
-          <a:lstStyle/>
-          <a:p>
-            <a:pPr algn="l">
-              <a:spcAft>
-                <a:spcPts val="1000"/>
-              </a:spcAft>
-            </a:pPr>
-            <a:r>
-              <a:rPr sz="2200" b="0">
-                <a:solidFill>
-                  <a:srgbClr val="3C2850"/>
-                </a:solidFill>
-                <a:latin typeface="Microsoft YaHei"/>
-              </a:rPr>
-              <a:t>皇帝、老大臣、官员先后「看布」，都不敢说真话</a:t>
-            </a:r>
-          </a:p>
-        </p:txBody>
-      </p:sp>
-      <p:sp>
-        <p:nvSpPr>
-          <p:cNvPr id="15" name="TextBox 14"/>
-          <p:cNvSpPr txBox="1"/>
-          <p:nvPr/>
-        </p:nvSpPr>
-        <p:spPr>
-          <a:xfrm>
-            <a:off x="1463040" y="3419856"/>
-            <a:ext cx="2103120" cy="502920"/>
-          </a:xfrm>
-          <a:prstGeom prst="rect">
-            <a:avLst/>
-          </a:prstGeom>
-          <a:noFill/>
-        </p:spPr>
-        <p:txBody>
-          <a:bodyPr wrap="none">
-            <a:spAutoFit/>
-          </a:bodyPr>
-          <a:lstStyle/>
-          <a:p>
-            <a:pPr algn="r">
-              <a:spcAft>
-                <a:spcPts val="1000"/>
-              </a:spcAft>
-            </a:pPr>
-            <a:r>
-              <a:rPr sz="2200" b="1">
-                <a:solidFill>
-                  <a:srgbClr val="784696"/>
-                </a:solidFill>
-                <a:latin typeface="Microsoft YaHei"/>
-              </a:rPr>
-              <a:t>高潮</a:t>
-            </a:r>
-          </a:p>
-        </p:txBody>
-      </p:sp>
-      <p:sp>
-        <p:nvSpPr>
-          <p:cNvPr id="16" name="TextBox 15"/>
-          <p:cNvSpPr txBox="1"/>
-          <p:nvPr/>
-        </p:nvSpPr>
-        <p:spPr>
-          <a:xfrm>
-            <a:off x="3749039" y="3419856"/>
-            <a:ext cx="7132320" cy="685800"/>
-          </a:xfrm>
-          <a:prstGeom prst="rect">
-            <a:avLst/>
-          </a:prstGeom>
-          <a:noFill/>
-        </p:spPr>
-        <p:txBody>
-          <a:bodyPr wrap="none">
-            <a:spAutoFit/>
-          </a:bodyPr>
-          <a:lstStyle/>
-          <a:p>
-            <a:pPr algn="l">
-              <a:spcAft>
-                <a:spcPts val="1000"/>
-              </a:spcAft>
-            </a:pPr>
-            <a:r>
-              <a:rPr sz="2200" b="0">
-                <a:solidFill>
-                  <a:srgbClr val="3C2850"/>
-                </a:solidFill>
-                <a:latin typeface="Microsoft YaHei"/>
-              </a:rPr>
-              <a:t>皇帝穿上「新装」游行，百姓假装看见</a:t>
-            </a:r>
-          </a:p>
-        </p:txBody>
-      </p:sp>
-      <p:sp>
-        <p:nvSpPr>
-          <p:cNvPr id="17" name="TextBox 16"/>
-          <p:cNvSpPr txBox="1"/>
-          <p:nvPr/>
-        </p:nvSpPr>
-        <p:spPr>
-          <a:xfrm>
-            <a:off x="1463040" y="4169664"/>
-            <a:ext cx="2103120" cy="502920"/>
-          </a:xfrm>
-          <a:prstGeom prst="rect">
-            <a:avLst/>
-          </a:prstGeom>
-          <a:noFill/>
-        </p:spPr>
-        <p:txBody>
-          <a:bodyPr wrap="none">
-            <a:spAutoFit/>
-          </a:bodyPr>
-          <a:lstStyle/>
-          <a:p>
-            <a:pPr algn="r">
-              <a:spcAft>
-                <a:spcPts val="1000"/>
-              </a:spcAft>
-            </a:pPr>
-            <a:r>
-              <a:rPr sz="2200" b="1">
-                <a:solidFill>
-                  <a:srgbClr val="784696"/>
-                </a:solidFill>
-                <a:latin typeface="Microsoft YaHei"/>
-              </a:rPr>
-              <a:t>结局</a:t>
-            </a:r>
-          </a:p>
-        </p:txBody>
-      </p:sp>
-      <p:sp>
-        <p:nvSpPr>
-          <p:cNvPr id="18" name="TextBox 17"/>
-          <p:cNvSpPr txBox="1"/>
-          <p:nvPr/>
-        </p:nvSpPr>
-        <p:spPr>
-          <a:xfrm>
-            <a:off x="3749039" y="4169664"/>
-            <a:ext cx="7132320" cy="685800"/>
-          </a:xfrm>
-          <a:prstGeom prst="rect">
-            <a:avLst/>
-          </a:prstGeom>
-          <a:noFill/>
-        </p:spPr>
-        <p:txBody>
-          <a:bodyPr wrap="none">
-            <a:spAutoFit/>
-          </a:bodyPr>
-          <a:lstStyle/>
-          <a:p>
-            <a:pPr algn="l">
-              <a:spcAft>
-                <a:spcPts val="1000"/>
-              </a:spcAft>
-            </a:pPr>
-            <a:r>
-              <a:rPr sz="2200" b="0">
-                <a:solidFill>
-                  <a:srgbClr val="3C2850"/>
-                </a:solidFill>
-                <a:latin typeface="Microsoft YaHei"/>
-              </a:rPr>
-              <a:t>小孩子说「他没穿衣服」，百姓跟着说，皇帝仍装模作样</a:t>
+              <a:t>闹剧背后，藏着怎样的真相？</a:t>
             </a:r>
           </a:p>
         </p:txBody>
@@ -4912,7 +4647,7 @@
                 </a:solidFill>
                 <a:latin typeface="Microsoft YaHei"/>
               </a:rPr>
-              <a:t>手法笔记</a:t>
+              <a:t>画流程图</a:t>
             </a:r>
           </a:p>
         </p:txBody>
@@ -4925,7 +4660,7 @@
         </p:nvSpPr>
         <p:spPr>
           <a:xfrm>
-            <a:off x="1371600" y="1051560"/>
+            <a:off x="1371600" y="960120"/>
             <a:ext cx="9418320" cy="822960"/>
           </a:xfrm>
           <a:prstGeom prst="rect">
@@ -4951,7 +4686,7 @@
                 </a:solidFill>
                 <a:latin typeface="Microsoft YaHei"/>
               </a:rPr>
-              <a:t>艺术手法</a:t>
+              <a:t>学习任务一</a:t>
             </a:r>
           </a:p>
         </p:txBody>
@@ -4964,7 +4699,7 @@
         </p:nvSpPr>
         <p:spPr>
           <a:xfrm>
-            <a:off x="3200400" y="1691640"/>
+            <a:off x="3200400" y="1600200"/>
             <a:ext cx="5760720" cy="27432"/>
           </a:xfrm>
           <a:prstGeom prst="rect">
@@ -5007,8 +4742,8 @@
         </p:nvSpPr>
         <p:spPr>
           <a:xfrm>
-            <a:off x="1249984" y="1810512"/>
-            <a:ext cx="9692640" cy="3319272"/>
+            <a:off x="1295704" y="1645920"/>
+            <a:ext cx="9601200" cy="2240280"/>
           </a:xfrm>
           <a:prstGeom prst="roundRect">
             <a:avLst/>
@@ -5046,14 +4781,57 @@
       </p:sp>
       <p:sp>
         <p:nvSpPr>
-          <p:cNvPr id="11" name="TextBox 10"/>
+          <p:cNvPr id="11" name="Oval 10"/>
+          <p:cNvSpPr/>
+          <p:nvPr/>
+        </p:nvSpPr>
+        <p:spPr>
+          <a:xfrm>
+            <a:off x="2255824" y="1828800"/>
+            <a:ext cx="384048" cy="384048"/>
+          </a:xfrm>
+          <a:prstGeom prst="ellipse">
+            <a:avLst/>
+          </a:prstGeom>
+          <a:solidFill>
+            <a:srgbClr val="784696"/>
+          </a:solidFill>
+          <a:ln>
+            <a:noFill/>
+          </a:ln>
+        </p:spPr>
+        <p:style>
+          <a:lnRef idx="1">
+            <a:schemeClr val="accent1"/>
+          </a:lnRef>
+          <a:fillRef idx="3">
+            <a:schemeClr val="accent1"/>
+          </a:fillRef>
+          <a:effectRef idx="2">
+            <a:schemeClr val="accent1"/>
+          </a:effectRef>
+          <a:fontRef idx="minor">
+            <a:schemeClr val="lt1"/>
+          </a:fontRef>
+        </p:style>
+        <p:txBody>
+          <a:bodyPr rtlCol="0" anchor="ctr"/>
+          <a:lstStyle/>
+          <a:p>
+            <a:pPr algn="ctr"/>
+          </a:p>
+        </p:txBody>
+      </p:sp>
+      <p:sp>
+        <p:nvSpPr>
+          <p:cNvPr id="12" name="TextBox 11"/>
           <p:cNvSpPr txBox="1"/>
           <p:nvPr/>
         </p:nvSpPr>
         <p:spPr>
           <a:xfrm>
-            <a:off x="1463040" y="1920240"/>
-            <a:ext cx="2103120" cy="502920"/>
+            <a:off x="2255824" y="1847088"/>
+            <a:ext cx="384048" cy="365760"/>
           </a:xfrm>
           <a:prstGeom prst="rect">
             <a:avLst/>
@@ -5066,33 +4844,33 @@
           </a:bodyPr>
           <a:lstStyle/>
           <a:p>
-            <a:pPr algn="r">
+            <a:pPr algn="ctr">
               <a:spcAft>
                 <a:spcPts val="1000"/>
               </a:spcAft>
             </a:pPr>
             <a:r>
-              <a:rPr sz="2200" b="1">
+              <a:rPr sz="1600" b="1">
                 <a:solidFill>
-                  <a:srgbClr val="784696"/>
+                  <a:srgbClr val="FFFFFF"/>
                 </a:solidFill>
                 <a:latin typeface="Microsoft YaHei"/>
               </a:rPr>
-              <a:t>夸张</a:t>
-            </a:r>
-          </a:p>
-        </p:txBody>
-      </p:sp>
-      <p:sp>
-        <p:nvSpPr>
-          <p:cNvPr id="12" name="TextBox 11"/>
+              <a:t>1</a:t>
+            </a:r>
+          </a:p>
+        </p:txBody>
+      </p:sp>
+      <p:sp>
+        <p:nvSpPr>
+          <p:cNvPr id="13" name="TextBox 12"/>
           <p:cNvSpPr txBox="1"/>
           <p:nvPr/>
         </p:nvSpPr>
         <p:spPr>
           <a:xfrm>
-            <a:off x="3749039" y="1920240"/>
-            <a:ext cx="7132320" cy="685800"/>
+            <a:off x="2758744" y="1810512"/>
+            <a:ext cx="7772400" cy="502920"/>
           </a:xfrm>
           <a:prstGeom prst="rect">
             <a:avLst/>
@@ -5111,27 +4889,70 @@
               </a:spcAft>
             </a:pPr>
             <a:r>
-              <a:rPr sz="2200" b="0">
+              <a:rPr sz="2400" b="0">
                 <a:solidFill>
                   <a:srgbClr val="3C2850"/>
                 </a:solidFill>
                 <a:latin typeface="Microsoft YaHei"/>
               </a:rPr>
-              <a:t>把皇帝爱新衣写到极致：「除非为了炫耀新衣服」</a:t>
-            </a:r>
-          </a:p>
-        </p:txBody>
-      </p:sp>
-      <p:sp>
-        <p:nvSpPr>
-          <p:cNvPr id="13" name="TextBox 12"/>
+              <a:t>快速阅读，每读完一段记下「谁做了什么」</a:t>
+            </a:r>
+          </a:p>
+        </p:txBody>
+      </p:sp>
+      <p:sp>
+        <p:nvSpPr>
+          <p:cNvPr id="14" name="Oval 13"/>
+          <p:cNvSpPr/>
+          <p:nvPr/>
+        </p:nvSpPr>
+        <p:spPr>
+          <a:xfrm>
+            <a:off x="2255824" y="2395728"/>
+            <a:ext cx="384048" cy="384048"/>
+          </a:xfrm>
+          <a:prstGeom prst="ellipse">
+            <a:avLst/>
+          </a:prstGeom>
+          <a:solidFill>
+            <a:srgbClr val="784696"/>
+          </a:solidFill>
+          <a:ln>
+            <a:noFill/>
+          </a:ln>
+        </p:spPr>
+        <p:style>
+          <a:lnRef idx="1">
+            <a:schemeClr val="accent1"/>
+          </a:lnRef>
+          <a:fillRef idx="3">
+            <a:schemeClr val="accent1"/>
+          </a:fillRef>
+          <a:effectRef idx="2">
+            <a:schemeClr val="accent1"/>
+          </a:effectRef>
+          <a:fontRef idx="minor">
+            <a:schemeClr val="lt1"/>
+          </a:fontRef>
+        </p:style>
+        <p:txBody>
+          <a:bodyPr rtlCol="0" anchor="ctr"/>
+          <a:lstStyle/>
+          <a:p>
+            <a:pPr algn="ctr"/>
+          </a:p>
+        </p:txBody>
+      </p:sp>
+      <p:sp>
+        <p:nvSpPr>
+          <p:cNvPr id="15" name="TextBox 14"/>
           <p:cNvSpPr txBox="1"/>
           <p:nvPr/>
         </p:nvSpPr>
         <p:spPr>
           <a:xfrm>
-            <a:off x="1463040" y="2670048"/>
-            <a:ext cx="2103120" cy="502920"/>
+            <a:off x="2255824" y="2414016"/>
+            <a:ext cx="384048" cy="365760"/>
           </a:xfrm>
           <a:prstGeom prst="rect">
             <a:avLst/>
@@ -5144,33 +4965,33 @@
           </a:bodyPr>
           <a:lstStyle/>
           <a:p>
-            <a:pPr algn="r">
+            <a:pPr algn="ctr">
               <a:spcAft>
                 <a:spcPts val="1000"/>
               </a:spcAft>
             </a:pPr>
             <a:r>
-              <a:rPr sz="2200" b="1">
+              <a:rPr sz="1600" b="1">
                 <a:solidFill>
-                  <a:srgbClr val="784696"/>
+                  <a:srgbClr val="FFFFFF"/>
                 </a:solidFill>
                 <a:latin typeface="Microsoft YaHei"/>
               </a:rPr>
-              <a:t>反讽</a:t>
-            </a:r>
-          </a:p>
-        </p:txBody>
-      </p:sp>
-      <p:sp>
-        <p:nvSpPr>
-          <p:cNvPr id="14" name="TextBox 13"/>
+              <a:t>2</a:t>
+            </a:r>
+          </a:p>
+        </p:txBody>
+      </p:sp>
+      <p:sp>
+        <p:nvSpPr>
+          <p:cNvPr id="16" name="TextBox 15"/>
           <p:cNvSpPr txBox="1"/>
           <p:nvPr/>
         </p:nvSpPr>
         <p:spPr>
           <a:xfrm>
-            <a:off x="3749039" y="2670048"/>
-            <a:ext cx="7132320" cy="685800"/>
+            <a:off x="2758744" y="2377440"/>
+            <a:ext cx="7772400" cy="502920"/>
           </a:xfrm>
           <a:prstGeom prst="rect">
             <a:avLst/>
@@ -5189,27 +5010,70 @@
               </a:spcAft>
             </a:pPr>
             <a:r>
-              <a:rPr sz="2200" b="0">
+              <a:rPr sz="2400" b="0">
                 <a:solidFill>
                   <a:srgbClr val="3C2850"/>
                 </a:solidFill>
                 <a:latin typeface="Microsoft YaHei"/>
               </a:rPr>
-              <a:t>说「看见了」其实什么也没看见，讽刺虚伪</a:t>
-            </a:r>
-          </a:p>
-        </p:txBody>
-      </p:sp>
-      <p:sp>
-        <p:nvSpPr>
-          <p:cNvPr id="15" name="TextBox 14"/>
+              <a:t>用箭头串联骗局全过程</a:t>
+            </a:r>
+          </a:p>
+        </p:txBody>
+      </p:sp>
+      <p:sp>
+        <p:nvSpPr>
+          <p:cNvPr id="17" name="Oval 16"/>
+          <p:cNvSpPr/>
+          <p:nvPr/>
+        </p:nvSpPr>
+        <p:spPr>
+          <a:xfrm>
+            <a:off x="2255824" y="2962656"/>
+            <a:ext cx="384048" cy="384048"/>
+          </a:xfrm>
+          <a:prstGeom prst="ellipse">
+            <a:avLst/>
+          </a:prstGeom>
+          <a:solidFill>
+            <a:srgbClr val="784696"/>
+          </a:solidFill>
+          <a:ln>
+            <a:noFill/>
+          </a:ln>
+        </p:spPr>
+        <p:style>
+          <a:lnRef idx="1">
+            <a:schemeClr val="accent1"/>
+          </a:lnRef>
+          <a:fillRef idx="3">
+            <a:schemeClr val="accent1"/>
+          </a:fillRef>
+          <a:effectRef idx="2">
+            <a:schemeClr val="accent1"/>
+          </a:effectRef>
+          <a:fontRef idx="minor">
+            <a:schemeClr val="lt1"/>
+          </a:fontRef>
+        </p:style>
+        <p:txBody>
+          <a:bodyPr rtlCol="0" anchor="ctr"/>
+          <a:lstStyle/>
+          <a:p>
+            <a:pPr algn="ctr"/>
+          </a:p>
+        </p:txBody>
+      </p:sp>
+      <p:sp>
+        <p:nvSpPr>
+          <p:cNvPr id="18" name="TextBox 17"/>
           <p:cNvSpPr txBox="1"/>
           <p:nvPr/>
         </p:nvSpPr>
         <p:spPr>
           <a:xfrm>
-            <a:off x="1463040" y="3419856"/>
-            <a:ext cx="2103120" cy="502920"/>
+            <a:off x="2255824" y="2980944"/>
+            <a:ext cx="384048" cy="365760"/>
           </a:xfrm>
           <a:prstGeom prst="rect">
             <a:avLst/>
@@ -5222,33 +5086,33 @@
           </a:bodyPr>
           <a:lstStyle/>
           <a:p>
-            <a:pPr algn="r">
+            <a:pPr algn="ctr">
               <a:spcAft>
                 <a:spcPts val="1000"/>
               </a:spcAft>
             </a:pPr>
             <a:r>
-              <a:rPr sz="2200" b="1">
+              <a:rPr sz="1600" b="1">
                 <a:solidFill>
-                  <a:srgbClr val="784696"/>
+                  <a:srgbClr val="FFFFFF"/>
                 </a:solidFill>
                 <a:latin typeface="Microsoft YaHei"/>
               </a:rPr>
-              <a:t>对比</a:t>
-            </a:r>
-          </a:p>
-        </p:txBody>
-      </p:sp>
-      <p:sp>
-        <p:nvSpPr>
-          <p:cNvPr id="16" name="TextBox 15"/>
+              <a:t>3</a:t>
+            </a:r>
+          </a:p>
+        </p:txBody>
+      </p:sp>
+      <p:sp>
+        <p:nvSpPr>
+          <p:cNvPr id="19" name="TextBox 18"/>
           <p:cNvSpPr txBox="1"/>
           <p:nvPr/>
         </p:nvSpPr>
         <p:spPr>
           <a:xfrm>
-            <a:off x="3749039" y="3419856"/>
-            <a:ext cx="7132320" cy="685800"/>
+            <a:off x="2758744" y="2944368"/>
+            <a:ext cx="7772400" cy="502920"/>
           </a:xfrm>
           <a:prstGeom prst="rect">
             <a:avLst/>
@@ -5267,91 +5131,13 @@
               </a:spcAft>
             </a:pPr>
             <a:r>
-              <a:rPr sz="2200" b="0">
+              <a:rPr sz="2400" b="0">
                 <a:solidFill>
                   <a:srgbClr val="3C2850"/>
                 </a:solidFill>
                 <a:latin typeface="Microsoft YaHei"/>
               </a:rPr>
-              <a:t>大人的怯懦 vs 孩子的天真诚实</a:t>
-            </a:r>
-          </a:p>
-        </p:txBody>
-      </p:sp>
-      <p:sp>
-        <p:nvSpPr>
-          <p:cNvPr id="17" name="TextBox 16"/>
-          <p:cNvSpPr txBox="1"/>
-          <p:nvPr/>
-        </p:nvSpPr>
-        <p:spPr>
-          <a:xfrm>
-            <a:off x="1463040" y="4169664"/>
-            <a:ext cx="2103120" cy="502920"/>
-          </a:xfrm>
-          <a:prstGeom prst="rect">
-            <a:avLst/>
-          </a:prstGeom>
-          <a:noFill/>
-        </p:spPr>
-        <p:txBody>
-          <a:bodyPr wrap="none">
-            <a:spAutoFit/>
-          </a:bodyPr>
-          <a:lstStyle/>
-          <a:p>
-            <a:pPr algn="r">
-              <a:spcAft>
-                <a:spcPts val="1000"/>
-              </a:spcAft>
-            </a:pPr>
-            <a:r>
-              <a:rPr sz="2200" b="1">
-                <a:solidFill>
-                  <a:srgbClr val="784696"/>
-                </a:solidFill>
-                <a:latin typeface="Microsoft YaHei"/>
-              </a:rPr>
-              <a:t>反复</a:t>
-            </a:r>
-          </a:p>
-        </p:txBody>
-      </p:sp>
-      <p:sp>
-        <p:nvSpPr>
-          <p:cNvPr id="18" name="TextBox 17"/>
-          <p:cNvSpPr txBox="1"/>
-          <p:nvPr/>
-        </p:nvSpPr>
-        <p:spPr>
-          <a:xfrm>
-            <a:off x="3749039" y="4169664"/>
-            <a:ext cx="7132320" cy="685800"/>
-          </a:xfrm>
-          <a:prstGeom prst="rect">
-            <a:avLst/>
-          </a:prstGeom>
-          <a:noFill/>
-        </p:spPr>
-        <p:txBody>
-          <a:bodyPr wrap="none">
-            <a:spAutoFit/>
-          </a:bodyPr>
-          <a:lstStyle/>
-          <a:p>
-            <a:pPr algn="l">
-              <a:spcAft>
-                <a:spcPts val="1000"/>
-              </a:spcAft>
-            </a:pPr>
-            <a:r>
-              <a:rPr sz="2200" b="0">
-                <a:solidFill>
-                  <a:srgbClr val="3C2850"/>
-                </a:solidFill>
-                <a:latin typeface="Microsoft YaHei"/>
-              </a:rPr>
-              <a:t>「我什么也没有看见」反复出现，强化讽刺效果</a:t>
+              <a:t>骗子谎言 → 大臣附和 → 游行 → 孩子说真话</a:t>
             </a:r>
           </a:p>
         </p:txBody>
@@ -5566,7 +5352,7 @@
                 </a:solidFill>
                 <a:latin typeface="Microsoft YaHei"/>
               </a:rPr>
-              <a:t>主题笔记</a:t>
+              <a:t>拆心理机关</a:t>
             </a:r>
           </a:p>
         </p:txBody>
@@ -5579,7 +5365,7 @@
         </p:nvSpPr>
         <p:spPr>
           <a:xfrm>
-            <a:off x="1371600" y="1051560"/>
+            <a:off x="1371600" y="960120"/>
             <a:ext cx="9418320" cy="822960"/>
           </a:xfrm>
           <a:prstGeom prst="rect">
@@ -5605,7 +5391,7 @@
                 </a:solidFill>
                 <a:latin typeface="Microsoft YaHei"/>
               </a:rPr>
-              <a:t>主题理解</a:t>
+              <a:t>学习任务二</a:t>
             </a:r>
           </a:p>
         </p:txBody>
@@ -5618,7 +5404,7 @@
         </p:nvSpPr>
         <p:spPr>
           <a:xfrm>
-            <a:off x="3200400" y="1691640"/>
+            <a:off x="3200400" y="1600200"/>
             <a:ext cx="5760720" cy="27432"/>
           </a:xfrm>
           <a:prstGeom prst="rect">
@@ -5661,8 +5447,8 @@
         </p:nvSpPr>
         <p:spPr>
           <a:xfrm>
-            <a:off x="1249984" y="1810512"/>
-            <a:ext cx="9692640" cy="3319272"/>
+            <a:off x="1295704" y="1645920"/>
+            <a:ext cx="9601200" cy="2240280"/>
           </a:xfrm>
           <a:prstGeom prst="roundRect">
             <a:avLst/>
@@ -5700,14 +5486,57 @@
       </p:sp>
       <p:sp>
         <p:nvSpPr>
-          <p:cNvPr id="11" name="TextBox 10"/>
+          <p:cNvPr id="11" name="Oval 10"/>
+          <p:cNvSpPr/>
+          <p:nvPr/>
+        </p:nvSpPr>
+        <p:spPr>
+          <a:xfrm>
+            <a:off x="2255824" y="1828800"/>
+            <a:ext cx="384048" cy="384048"/>
+          </a:xfrm>
+          <a:prstGeom prst="ellipse">
+            <a:avLst/>
+          </a:prstGeom>
+          <a:solidFill>
+            <a:srgbClr val="784696"/>
+          </a:solidFill>
+          <a:ln>
+            <a:noFill/>
+          </a:ln>
+        </p:spPr>
+        <p:style>
+          <a:lnRef idx="1">
+            <a:schemeClr val="accent1"/>
+          </a:lnRef>
+          <a:fillRef idx="3">
+            <a:schemeClr val="accent1"/>
+          </a:fillRef>
+          <a:effectRef idx="2">
+            <a:schemeClr val="accent1"/>
+          </a:effectRef>
+          <a:fontRef idx="minor">
+            <a:schemeClr val="lt1"/>
+          </a:fontRef>
+        </p:style>
+        <p:txBody>
+          <a:bodyPr rtlCol="0" anchor="ctr"/>
+          <a:lstStyle/>
+          <a:p>
+            <a:pPr algn="ctr"/>
+          </a:p>
+        </p:txBody>
+      </p:sp>
+      <p:sp>
+        <p:nvSpPr>
+          <p:cNvPr id="12" name="TextBox 11"/>
           <p:cNvSpPr txBox="1"/>
           <p:nvPr/>
         </p:nvSpPr>
         <p:spPr>
           <a:xfrm>
-            <a:off x="1463040" y="1920240"/>
-            <a:ext cx="2103120" cy="502920"/>
+            <a:off x="2255824" y="1847088"/>
+            <a:ext cx="384048" cy="365760"/>
           </a:xfrm>
           <a:prstGeom prst="rect">
             <a:avLst/>
@@ -5720,33 +5549,33 @@
           </a:bodyPr>
           <a:lstStyle/>
           <a:p>
-            <a:pPr algn="r">
+            <a:pPr algn="ctr">
               <a:spcAft>
                 <a:spcPts val="1000"/>
               </a:spcAft>
             </a:pPr>
             <a:r>
-              <a:rPr sz="2200" b="1">
+              <a:rPr sz="1600" b="1">
                 <a:solidFill>
-                  <a:srgbClr val="784696"/>
+                  <a:srgbClr val="FFFFFF"/>
                 </a:solidFill>
                 <a:latin typeface="Microsoft YaHei"/>
               </a:rPr>
-              <a:t>心理机制</a:t>
-            </a:r>
-          </a:p>
-        </p:txBody>
-      </p:sp>
-      <p:sp>
-        <p:nvSpPr>
-          <p:cNvPr id="12" name="TextBox 11"/>
+              <a:t>1</a:t>
+            </a:r>
+          </a:p>
+        </p:txBody>
+      </p:sp>
+      <p:sp>
+        <p:nvSpPr>
+          <p:cNvPr id="13" name="TextBox 12"/>
           <p:cNvSpPr txBox="1"/>
           <p:nvPr/>
         </p:nvSpPr>
         <p:spPr>
           <a:xfrm>
-            <a:off x="3749039" y="1920240"/>
-            <a:ext cx="7132320" cy="685800"/>
+            <a:off x="2758744" y="1810512"/>
+            <a:ext cx="7772400" cy="502920"/>
           </a:xfrm>
           <a:prstGeom prst="rect">
             <a:avLst/>
@@ -5765,27 +5594,70 @@
               </a:spcAft>
             </a:pPr>
             <a:r>
-              <a:rPr sz="2200" b="0">
+              <a:rPr sz="2400" b="0">
                 <a:solidFill>
                   <a:srgbClr val="3C2850"/>
                 </a:solidFill>
                 <a:latin typeface="Microsoft YaHei"/>
               </a:rPr>
-              <a:t>害怕被认为「不聪明」或「不称职」而丢失地位</a:t>
-            </a:r>
-          </a:p>
-        </p:txBody>
-      </p:sp>
-      <p:sp>
-        <p:nvSpPr>
-          <p:cNvPr id="13" name="TextBox 12"/>
+              <a:t>勾画老大臣、官员、皇帝的心理和语言</a:t>
+            </a:r>
+          </a:p>
+        </p:txBody>
+      </p:sp>
+      <p:sp>
+        <p:nvSpPr>
+          <p:cNvPr id="14" name="Oval 13"/>
+          <p:cNvSpPr/>
+          <p:nvPr/>
+        </p:nvSpPr>
+        <p:spPr>
+          <a:xfrm>
+            <a:off x="2255824" y="2395728"/>
+            <a:ext cx="384048" cy="384048"/>
+          </a:xfrm>
+          <a:prstGeom prst="ellipse">
+            <a:avLst/>
+          </a:prstGeom>
+          <a:solidFill>
+            <a:srgbClr val="784696"/>
+          </a:solidFill>
+          <a:ln>
+            <a:noFill/>
+          </a:ln>
+        </p:spPr>
+        <p:style>
+          <a:lnRef idx="1">
+            <a:schemeClr val="accent1"/>
+          </a:lnRef>
+          <a:fillRef idx="3">
+            <a:schemeClr val="accent1"/>
+          </a:fillRef>
+          <a:effectRef idx="2">
+            <a:schemeClr val="accent1"/>
+          </a:effectRef>
+          <a:fontRef idx="minor">
+            <a:schemeClr val="lt1"/>
+          </a:fontRef>
+        </p:style>
+        <p:txBody>
+          <a:bodyPr rtlCol="0" anchor="ctr"/>
+          <a:lstStyle/>
+          <a:p>
+            <a:pPr algn="ctr"/>
+          </a:p>
+        </p:txBody>
+      </p:sp>
+      <p:sp>
+        <p:nvSpPr>
+          <p:cNvPr id="15" name="TextBox 14"/>
           <p:cNvSpPr txBox="1"/>
           <p:nvPr/>
         </p:nvSpPr>
         <p:spPr>
           <a:xfrm>
-            <a:off x="1463040" y="2670048"/>
-            <a:ext cx="2103120" cy="502920"/>
+            <a:off x="2255824" y="2414016"/>
+            <a:ext cx="384048" cy="365760"/>
           </a:xfrm>
           <a:prstGeom prst="rect">
             <a:avLst/>
@@ -5798,33 +5670,33 @@
           </a:bodyPr>
           <a:lstStyle/>
           <a:p>
-            <a:pPr algn="r">
+            <a:pPr algn="ctr">
               <a:spcAft>
                 <a:spcPts val="1000"/>
               </a:spcAft>
             </a:pPr>
             <a:r>
-              <a:rPr sz="2200" b="1">
+              <a:rPr sz="1600" b="1">
                 <a:solidFill>
-                  <a:srgbClr val="784696"/>
+                  <a:srgbClr val="FFFFFF"/>
                 </a:solidFill>
                 <a:latin typeface="Microsoft YaHei"/>
               </a:rPr>
-              <a:t>社会批判</a:t>
-            </a:r>
-          </a:p>
-        </p:txBody>
-      </p:sp>
-      <p:sp>
-        <p:nvSpPr>
-          <p:cNvPr id="14" name="TextBox 13"/>
+              <a:t>2</a:t>
+            </a:r>
+          </a:p>
+        </p:txBody>
+      </p:sp>
+      <p:sp>
+        <p:nvSpPr>
+          <p:cNvPr id="16" name="TextBox 15"/>
           <p:cNvSpPr txBox="1"/>
           <p:nvPr/>
         </p:nvSpPr>
         <p:spPr>
           <a:xfrm>
-            <a:off x="3749039" y="2670048"/>
-            <a:ext cx="7132320" cy="685800"/>
+            <a:off x="2758744" y="2377440"/>
+            <a:ext cx="7772400" cy="502920"/>
           </a:xfrm>
           <a:prstGeom prst="rect">
             <a:avLst/>
@@ -5843,27 +5715,70 @@
               </a:spcAft>
             </a:pPr>
             <a:r>
-              <a:rPr sz="2200" b="0">
+              <a:rPr sz="2400" b="0">
                 <a:solidFill>
                   <a:srgbClr val="3C2850"/>
                 </a:solidFill>
                 <a:latin typeface="Microsoft YaHei"/>
               </a:rPr>
-              <a:t>讽刺盲从权威、虚伪逢迎的官场风气</a:t>
-            </a:r>
-          </a:p>
-        </p:txBody>
-      </p:sp>
-      <p:sp>
-        <p:nvSpPr>
-          <p:cNvPr id="15" name="TextBox 14"/>
+              <a:t>品味夸张语句的讽刺效果</a:t>
+            </a:r>
+          </a:p>
+        </p:txBody>
+      </p:sp>
+      <p:sp>
+        <p:nvSpPr>
+          <p:cNvPr id="17" name="Oval 16"/>
+          <p:cNvSpPr/>
+          <p:nvPr/>
+        </p:nvSpPr>
+        <p:spPr>
+          <a:xfrm>
+            <a:off x="2255824" y="2962656"/>
+            <a:ext cx="384048" cy="384048"/>
+          </a:xfrm>
+          <a:prstGeom prst="ellipse">
+            <a:avLst/>
+          </a:prstGeom>
+          <a:solidFill>
+            <a:srgbClr val="784696"/>
+          </a:solidFill>
+          <a:ln>
+            <a:noFill/>
+          </a:ln>
+        </p:spPr>
+        <p:style>
+          <a:lnRef idx="1">
+            <a:schemeClr val="accent1"/>
+          </a:lnRef>
+          <a:fillRef idx="3">
+            <a:schemeClr val="accent1"/>
+          </a:fillRef>
+          <a:effectRef idx="2">
+            <a:schemeClr val="accent1"/>
+          </a:effectRef>
+          <a:fontRef idx="minor">
+            <a:schemeClr val="lt1"/>
+          </a:fontRef>
+        </p:style>
+        <p:txBody>
+          <a:bodyPr rtlCol="0" anchor="ctr"/>
+          <a:lstStyle/>
+          <a:p>
+            <a:pPr algn="ctr"/>
+          </a:p>
+        </p:txBody>
+      </p:sp>
+      <p:sp>
+        <p:nvSpPr>
+          <p:cNvPr id="18" name="TextBox 17"/>
           <p:cNvSpPr txBox="1"/>
           <p:nvPr/>
         </p:nvSpPr>
         <p:spPr>
           <a:xfrm>
-            <a:off x="1463040" y="3419856"/>
-            <a:ext cx="2103120" cy="502920"/>
+            <a:off x="2255824" y="2980944"/>
+            <a:ext cx="384048" cy="365760"/>
           </a:xfrm>
           <a:prstGeom prst="rect">
             <a:avLst/>
@@ -5876,33 +5791,33 @@
           </a:bodyPr>
           <a:lstStyle/>
           <a:p>
-            <a:pPr algn="r">
+            <a:pPr algn="ctr">
               <a:spcAft>
                 <a:spcPts val="1000"/>
               </a:spcAft>
             </a:pPr>
             <a:r>
-              <a:rPr sz="2200" b="1">
+              <a:rPr sz="1600" b="1">
                 <a:solidFill>
-                  <a:srgbClr val="784696"/>
+                  <a:srgbClr val="FFFFFF"/>
                 </a:solidFill>
                 <a:latin typeface="Microsoft YaHei"/>
               </a:rPr>
-              <a:t>孩子作用</a:t>
-            </a:r>
-          </a:p>
-        </p:txBody>
-      </p:sp>
-      <p:sp>
-        <p:nvSpPr>
-          <p:cNvPr id="16" name="TextBox 15"/>
+              <a:t>3</a:t>
+            </a:r>
+          </a:p>
+        </p:txBody>
+      </p:sp>
+      <p:sp>
+        <p:nvSpPr>
+          <p:cNvPr id="19" name="TextBox 18"/>
           <p:cNvSpPr txBox="1"/>
           <p:nvPr/>
         </p:nvSpPr>
         <p:spPr>
           <a:xfrm>
-            <a:off x="3749039" y="3419856"/>
-            <a:ext cx="7132320" cy="685800"/>
+            <a:off x="2758744" y="2944368"/>
+            <a:ext cx="7772400" cy="502920"/>
           </a:xfrm>
           <a:prstGeom prst="rect">
             <a:avLst/>
@@ -5921,91 +5836,13 @@
               </a:spcAft>
             </a:pPr>
             <a:r>
-              <a:rPr sz="2200" b="0">
+              <a:rPr sz="2400" b="0">
                 <a:solidFill>
                   <a:srgbClr val="3C2850"/>
                 </a:solidFill>
                 <a:latin typeface="Microsoft YaHei"/>
               </a:rPr>
-              <a:t>天真不受虚假规则束缚，一语道破真相</a:t>
-            </a:r>
-          </a:p>
-        </p:txBody>
-      </p:sp>
-      <p:sp>
-        <p:nvSpPr>
-          <p:cNvPr id="17" name="TextBox 16"/>
-          <p:cNvSpPr txBox="1"/>
-          <p:nvPr/>
-        </p:nvSpPr>
-        <p:spPr>
-          <a:xfrm>
-            <a:off x="1463040" y="4169664"/>
-            <a:ext cx="2103120" cy="502920"/>
-          </a:xfrm>
-          <a:prstGeom prst="rect">
-            <a:avLst/>
-          </a:prstGeom>
-          <a:noFill/>
-        </p:spPr>
-        <p:txBody>
-          <a:bodyPr wrap="none">
-            <a:spAutoFit/>
-          </a:bodyPr>
-          <a:lstStyle/>
-          <a:p>
-            <a:pPr algn="r">
-              <a:spcAft>
-                <a:spcPts val="1000"/>
-              </a:spcAft>
-            </a:pPr>
-            <a:r>
-              <a:rPr sz="2200" b="1">
-                <a:solidFill>
-                  <a:srgbClr val="784696"/>
-                </a:solidFill>
-                <a:latin typeface="Microsoft YaHei"/>
-              </a:rPr>
-              <a:t>策展主题</a:t>
-            </a:r>
-          </a:p>
-        </p:txBody>
-      </p:sp>
-      <p:sp>
-        <p:nvSpPr>
-          <p:cNvPr id="18" name="TextBox 17"/>
-          <p:cNvSpPr txBox="1"/>
-          <p:nvPr/>
-        </p:nvSpPr>
-        <p:spPr>
-          <a:xfrm>
-            <a:off x="3749039" y="4169664"/>
-            <a:ext cx="7132320" cy="685800"/>
-          </a:xfrm>
-          <a:prstGeom prst="rect">
-            <a:avLst/>
-          </a:prstGeom>
-          <a:noFill/>
-        </p:spPr>
-        <p:txBody>
-          <a:bodyPr wrap="none">
-            <a:spAutoFit/>
-          </a:bodyPr>
-          <a:lstStyle/>
-          <a:p>
-            <a:pPr algn="l">
-              <a:spcAft>
-                <a:spcPts val="1000"/>
-              </a:spcAft>
-            </a:pPr>
-            <a:r>
-              <a:rPr sz="2200" b="0">
-                <a:solidFill>
-                  <a:srgbClr val="3C2850"/>
-                </a:solidFill>
-                <a:latin typeface="Microsoft YaHei"/>
-              </a:rPr>
-              <a:t>面对虚假，要敢于说真话，不做沉默的大多数</a:t>
+              <a:t>完成人物分析卡（证据—特点—作用）</a:t>
             </a:r>
           </a:p>
         </p:txBody>
@@ -6151,7 +5988,7 @@
         </p:nvSpPr>
         <p:spPr>
           <a:xfrm>
-            <a:off x="4953304" y="502920"/>
+            <a:off x="4953304" y="1005840"/>
             <a:ext cx="2286000" cy="411480"/>
           </a:xfrm>
           <a:prstGeom prst="roundRect">
@@ -6194,7 +6031,7 @@
         </p:nvSpPr>
         <p:spPr>
           <a:xfrm>
-            <a:off x="4953304" y="521208"/>
+            <a:off x="4953304" y="1024128"/>
             <a:ext cx="2286000" cy="384048"/>
           </a:xfrm>
           <a:prstGeom prst="rect">
@@ -6220,7 +6057,7 @@
                 </a:solidFill>
                 <a:latin typeface="Microsoft YaHei"/>
               </a:rPr>
-              <a:t>课堂活动</a:t>
+              <a:t>想一想</a:t>
             </a:r>
           </a:p>
         </p:txBody>
@@ -6233,7 +6070,7 @@
         </p:nvSpPr>
         <p:spPr>
           <a:xfrm>
-            <a:off x="1371600" y="1051560"/>
+            <a:off x="1371600" y="1600200"/>
             <a:ext cx="9418320" cy="822960"/>
           </a:xfrm>
           <a:prstGeom prst="rect">
@@ -6253,13 +6090,13 @@
               </a:spcAft>
             </a:pPr>
             <a:r>
-              <a:rPr sz="3600" b="1">
+              <a:rPr sz="3200" b="1">
                 <a:solidFill>
                   <a:srgbClr val="784696"/>
                 </a:solidFill>
                 <a:latin typeface="Microsoft YaHei"/>
               </a:rPr>
-              <a:t>学习任务</a:t>
+              <a:t>人们都不敢说自己看不见，这是为什么？</a:t>
             </a:r>
           </a:p>
         </p:txBody>
@@ -6272,7 +6109,7 @@
         </p:nvSpPr>
         <p:spPr>
           <a:xfrm>
-            <a:off x="3200400" y="1691640"/>
+            <a:off x="3200400" y="4389120"/>
             <a:ext cx="5760720" cy="27432"/>
           </a:xfrm>
           <a:prstGeom prst="rect">
@@ -6309,102 +6146,14 @@
       </p:sp>
       <p:sp>
         <p:nvSpPr>
-          <p:cNvPr id="10" name="Rounded Rectangle 9"/>
-          <p:cNvSpPr/>
-          <p:nvPr/>
-        </p:nvSpPr>
-        <p:spPr>
-          <a:xfrm>
-            <a:off x="1295704" y="1737360"/>
-            <a:ext cx="9601200" cy="2112264"/>
-          </a:xfrm>
-          <a:prstGeom prst="roundRect">
-            <a:avLst/>
-          </a:prstGeom>
-          <a:solidFill>
-            <a:srgbClr val="FCF8FF"/>
-          </a:solidFill>
-          <a:ln w="19050">
-            <a:solidFill>
-              <a:srgbClr val="C8AADC"/>
-            </a:solidFill>
-          </a:ln>
-        </p:spPr>
-        <p:style>
-          <a:lnRef idx="1">
-            <a:schemeClr val="accent1"/>
-          </a:lnRef>
-          <a:fillRef idx="3">
-            <a:schemeClr val="accent1"/>
-          </a:fillRef>
-          <a:effectRef idx="2">
-            <a:schemeClr val="accent1"/>
-          </a:effectRef>
-          <a:fontRef idx="minor">
-            <a:schemeClr val="lt1"/>
-          </a:fontRef>
-        </p:style>
-        <p:txBody>
-          <a:bodyPr rtlCol="0" anchor="ctr"/>
-          <a:lstStyle/>
-          <a:p>
-            <a:pPr algn="ctr"/>
-          </a:p>
-        </p:txBody>
-      </p:sp>
-      <p:sp>
-        <p:nvSpPr>
-          <p:cNvPr id="11" name="Oval 10"/>
-          <p:cNvSpPr/>
-          <p:nvPr/>
-        </p:nvSpPr>
-        <p:spPr>
-          <a:xfrm>
-            <a:off x="2621584" y="1920240"/>
-            <a:ext cx="347472" cy="347472"/>
-          </a:xfrm>
-          <a:prstGeom prst="ellipse">
-            <a:avLst/>
-          </a:prstGeom>
-          <a:solidFill>
-            <a:srgbClr val="784696"/>
-          </a:solidFill>
-          <a:ln>
-            <a:noFill/>
-          </a:ln>
-        </p:spPr>
-        <p:style>
-          <a:lnRef idx="1">
-            <a:schemeClr val="accent1"/>
-          </a:lnRef>
-          <a:fillRef idx="3">
-            <a:schemeClr val="accent1"/>
-          </a:fillRef>
-          <a:effectRef idx="2">
-            <a:schemeClr val="accent1"/>
-          </a:effectRef>
-          <a:fontRef idx="minor">
-            <a:schemeClr val="lt1"/>
-          </a:fontRef>
-        </p:style>
-        <p:txBody>
-          <a:bodyPr rtlCol="0" anchor="ctr"/>
-          <a:lstStyle/>
-          <a:p>
-            <a:pPr algn="ctr"/>
-          </a:p>
-        </p:txBody>
-      </p:sp>
-      <p:sp>
-        <p:nvSpPr>
-          <p:cNvPr id="12" name="TextBox 11"/>
+          <p:cNvPr id="10" name="TextBox 9"/>
           <p:cNvSpPr txBox="1"/>
           <p:nvPr/>
         </p:nvSpPr>
         <p:spPr>
           <a:xfrm>
-            <a:off x="2621584" y="1938528"/>
-            <a:ext cx="347472" cy="329184"/>
+            <a:off x="1828800" y="4663440"/>
+            <a:ext cx="8503920" cy="914400"/>
           </a:xfrm>
           <a:prstGeom prst="rect">
             <a:avLst/>
@@ -6423,294 +6172,13 @@
               </a:spcAft>
             </a:pPr>
             <a:r>
-              <a:rPr sz="1400" b="1">
+              <a:rPr sz="2200" b="0">
                 <a:solidFill>
-                  <a:srgbClr val="FFFFFF"/>
+                  <a:srgbClr val="784696"/>
                 </a:solidFill>
                 <a:latin typeface="Microsoft YaHei"/>
               </a:rPr>
-              <a:t>1</a:t>
-            </a:r>
-          </a:p>
-        </p:txBody>
-      </p:sp>
-      <p:sp>
-        <p:nvSpPr>
-          <p:cNvPr id="13" name="TextBox 12"/>
-          <p:cNvSpPr txBox="1"/>
-          <p:nvPr/>
-        </p:nvSpPr>
-        <p:spPr>
-          <a:xfrm>
-            <a:off x="3078784" y="1901952"/>
-            <a:ext cx="7863840" cy="457200"/>
-          </a:xfrm>
-          <a:prstGeom prst="rect">
-            <a:avLst/>
-          </a:prstGeom>
-          <a:noFill/>
-        </p:spPr>
-        <p:txBody>
-          <a:bodyPr wrap="none">
-            <a:spAutoFit/>
-          </a:bodyPr>
-          <a:lstStyle/>
-          <a:p>
-            <a:pPr algn="l">
-              <a:spcAft>
-                <a:spcPts val="1000"/>
-              </a:spcAft>
-            </a:pPr>
-            <a:r>
-              <a:rPr sz="2400" b="0">
-                <a:solidFill>
-                  <a:srgbClr val="3C2850"/>
-                </a:solidFill>
-                <a:latin typeface="Microsoft YaHei"/>
-              </a:rPr>
-              <a:t>画骗局流程图，用箭头串联各环节</a:t>
-            </a:r>
-          </a:p>
-        </p:txBody>
-      </p:sp>
-      <p:sp>
-        <p:nvSpPr>
-          <p:cNvPr id="14" name="Oval 13"/>
-          <p:cNvSpPr/>
-          <p:nvPr/>
-        </p:nvSpPr>
-        <p:spPr>
-          <a:xfrm>
-            <a:off x="2621584" y="2487168"/>
-            <a:ext cx="347472" cy="347472"/>
-          </a:xfrm>
-          <a:prstGeom prst="ellipse">
-            <a:avLst/>
-          </a:prstGeom>
-          <a:solidFill>
-            <a:srgbClr val="784696"/>
-          </a:solidFill>
-          <a:ln>
-            <a:noFill/>
-          </a:ln>
-        </p:spPr>
-        <p:style>
-          <a:lnRef idx="1">
-            <a:schemeClr val="accent1"/>
-          </a:lnRef>
-          <a:fillRef idx="3">
-            <a:schemeClr val="accent1"/>
-          </a:fillRef>
-          <a:effectRef idx="2">
-            <a:schemeClr val="accent1"/>
-          </a:effectRef>
-          <a:fontRef idx="minor">
-            <a:schemeClr val="lt1"/>
-          </a:fontRef>
-        </p:style>
-        <p:txBody>
-          <a:bodyPr rtlCol="0" anchor="ctr"/>
-          <a:lstStyle/>
-          <a:p>
-            <a:pPr algn="ctr"/>
-          </a:p>
-        </p:txBody>
-      </p:sp>
-      <p:sp>
-        <p:nvSpPr>
-          <p:cNvPr id="15" name="TextBox 14"/>
-          <p:cNvSpPr txBox="1"/>
-          <p:nvPr/>
-        </p:nvSpPr>
-        <p:spPr>
-          <a:xfrm>
-            <a:off x="2621584" y="2505456"/>
-            <a:ext cx="347472" cy="329184"/>
-          </a:xfrm>
-          <a:prstGeom prst="rect">
-            <a:avLst/>
-          </a:prstGeom>
-          <a:noFill/>
-        </p:spPr>
-        <p:txBody>
-          <a:bodyPr wrap="none">
-            <a:spAutoFit/>
-          </a:bodyPr>
-          <a:lstStyle/>
-          <a:p>
-            <a:pPr algn="ctr">
-              <a:spcAft>
-                <a:spcPts val="1000"/>
-              </a:spcAft>
-            </a:pPr>
-            <a:r>
-              <a:rPr sz="1400" b="1">
-                <a:solidFill>
-                  <a:srgbClr val="FFFFFF"/>
-                </a:solidFill>
-                <a:latin typeface="Microsoft YaHei"/>
-              </a:rPr>
-              <a:t>2</a:t>
-            </a:r>
-          </a:p>
-        </p:txBody>
-      </p:sp>
-      <p:sp>
-        <p:nvSpPr>
-          <p:cNvPr id="16" name="TextBox 15"/>
-          <p:cNvSpPr txBox="1"/>
-          <p:nvPr/>
-        </p:nvSpPr>
-        <p:spPr>
-          <a:xfrm>
-            <a:off x="3078784" y="2468880"/>
-            <a:ext cx="7863840" cy="457200"/>
-          </a:xfrm>
-          <a:prstGeom prst="rect">
-            <a:avLst/>
-          </a:prstGeom>
-          <a:noFill/>
-        </p:spPr>
-        <p:txBody>
-          <a:bodyPr wrap="none">
-            <a:spAutoFit/>
-          </a:bodyPr>
-          <a:lstStyle/>
-          <a:p>
-            <a:pPr algn="l">
-              <a:spcAft>
-                <a:spcPts val="1000"/>
-              </a:spcAft>
-            </a:pPr>
-            <a:r>
-              <a:rPr sz="2400" b="0">
-                <a:solidFill>
-                  <a:srgbClr val="3C2850"/>
-                </a:solidFill>
-                <a:latin typeface="Microsoft YaHei"/>
-              </a:rPr>
-              <a:t>勾画老大臣、官员、皇帝的心理和语言</a:t>
-            </a:r>
-          </a:p>
-        </p:txBody>
-      </p:sp>
-      <p:sp>
-        <p:nvSpPr>
-          <p:cNvPr id="17" name="Oval 16"/>
-          <p:cNvSpPr/>
-          <p:nvPr/>
-        </p:nvSpPr>
-        <p:spPr>
-          <a:xfrm>
-            <a:off x="2621584" y="3054096"/>
-            <a:ext cx="347472" cy="347472"/>
-          </a:xfrm>
-          <a:prstGeom prst="ellipse">
-            <a:avLst/>
-          </a:prstGeom>
-          <a:solidFill>
-            <a:srgbClr val="784696"/>
-          </a:solidFill>
-          <a:ln>
-            <a:noFill/>
-          </a:ln>
-        </p:spPr>
-        <p:style>
-          <a:lnRef idx="1">
-            <a:schemeClr val="accent1"/>
-          </a:lnRef>
-          <a:fillRef idx="3">
-            <a:schemeClr val="accent1"/>
-          </a:fillRef>
-          <a:effectRef idx="2">
-            <a:schemeClr val="accent1"/>
-          </a:effectRef>
-          <a:fontRef idx="minor">
-            <a:schemeClr val="lt1"/>
-          </a:fontRef>
-        </p:style>
-        <p:txBody>
-          <a:bodyPr rtlCol="0" anchor="ctr"/>
-          <a:lstStyle/>
-          <a:p>
-            <a:pPr algn="ctr"/>
-          </a:p>
-        </p:txBody>
-      </p:sp>
-      <p:sp>
-        <p:nvSpPr>
-          <p:cNvPr id="18" name="TextBox 17"/>
-          <p:cNvSpPr txBox="1"/>
-          <p:nvPr/>
-        </p:nvSpPr>
-        <p:spPr>
-          <a:xfrm>
-            <a:off x="2621584" y="3072384"/>
-            <a:ext cx="347472" cy="329184"/>
-          </a:xfrm>
-          <a:prstGeom prst="rect">
-            <a:avLst/>
-          </a:prstGeom>
-          <a:noFill/>
-        </p:spPr>
-        <p:txBody>
-          <a:bodyPr wrap="none">
-            <a:spAutoFit/>
-          </a:bodyPr>
-          <a:lstStyle/>
-          <a:p>
-            <a:pPr algn="ctr">
-              <a:spcAft>
-                <a:spcPts val="1000"/>
-              </a:spcAft>
-            </a:pPr>
-            <a:r>
-              <a:rPr sz="1400" b="1">
-                <a:solidFill>
-                  <a:srgbClr val="FFFFFF"/>
-                </a:solidFill>
-                <a:latin typeface="Microsoft YaHei"/>
-              </a:rPr>
-              <a:t>3</a:t>
-            </a:r>
-          </a:p>
-        </p:txBody>
-      </p:sp>
-      <p:sp>
-        <p:nvSpPr>
-          <p:cNvPr id="19" name="TextBox 18"/>
-          <p:cNvSpPr txBox="1"/>
-          <p:nvPr/>
-        </p:nvSpPr>
-        <p:spPr>
-          <a:xfrm>
-            <a:off x="3078784" y="3035808"/>
-            <a:ext cx="7863840" cy="457200"/>
-          </a:xfrm>
-          <a:prstGeom prst="rect">
-            <a:avLst/>
-          </a:prstGeom>
-          <a:noFill/>
-        </p:spPr>
-        <p:txBody>
-          <a:bodyPr wrap="none">
-            <a:spAutoFit/>
-          </a:bodyPr>
-          <a:lstStyle/>
-          <a:p>
-            <a:pPr algn="l">
-              <a:spcAft>
-                <a:spcPts val="1000"/>
-              </a:spcAft>
-            </a:pPr>
-            <a:r>
-              <a:rPr sz="2400" b="0">
-                <a:solidFill>
-                  <a:srgbClr val="3C2850"/>
-                </a:solidFill>
-                <a:latin typeface="Microsoft YaHei"/>
-              </a:rPr>
-              <a:t>完成人物分析卡（证据—特点—作用）</a:t>
+              <a:t>思考：他们共同害怕失去什么？</a:t>
             </a:r>
           </a:p>
         </p:txBody>
@@ -6925,7 +6393,7 @@
                 </a:solidFill>
                 <a:latin typeface="Microsoft YaHei"/>
               </a:rPr>
-              <a:t>回顾收获</a:t>
+              <a:t>学会判断</a:t>
             </a:r>
           </a:p>
         </p:txBody>
@@ -6938,7 +6406,7 @@
         </p:nvSpPr>
         <p:spPr>
           <a:xfrm>
-            <a:off x="1371600" y="1051560"/>
+            <a:off x="1371600" y="960120"/>
             <a:ext cx="9418320" cy="822960"/>
           </a:xfrm>
           <a:prstGeom prst="rect">
@@ -6964,7 +6432,7 @@
                 </a:solidFill>
                 <a:latin typeface="Microsoft YaHei"/>
               </a:rPr>
-              <a:t>课堂小结</a:t>
+              <a:t>学习任务三</a:t>
             </a:r>
           </a:p>
         </p:txBody>
@@ -6977,7 +6445,7 @@
         </p:nvSpPr>
         <p:spPr>
           <a:xfrm>
-            <a:off x="3200400" y="1691640"/>
+            <a:off x="3200400" y="1600200"/>
             <a:ext cx="5760720" cy="27432"/>
           </a:xfrm>
           <a:prstGeom prst="rect">
@@ -7020,8 +6488,8 @@
         </p:nvSpPr>
         <p:spPr>
           <a:xfrm>
-            <a:off x="1295704" y="1737360"/>
-            <a:ext cx="9601200" cy="1837944"/>
+            <a:off x="1295704" y="1645920"/>
+            <a:ext cx="9601200" cy="2240280"/>
           </a:xfrm>
           <a:prstGeom prst="roundRect">
             <a:avLst/>
@@ -7065,8 +6533,8 @@
         </p:nvSpPr>
         <p:spPr>
           <a:xfrm>
-            <a:off x="2621584" y="1920240"/>
-            <a:ext cx="347472" cy="347472"/>
+            <a:off x="2255824" y="1828800"/>
+            <a:ext cx="384048" cy="384048"/>
           </a:xfrm>
           <a:prstGeom prst="ellipse">
             <a:avLst/>
@@ -7108,8 +6576,8 @@
         </p:nvSpPr>
         <p:spPr>
           <a:xfrm>
-            <a:off x="2621584" y="1938528"/>
-            <a:ext cx="347472" cy="329184"/>
+            <a:off x="2255824" y="1847088"/>
+            <a:ext cx="384048" cy="365760"/>
           </a:xfrm>
           <a:prstGeom prst="rect">
             <a:avLst/>
@@ -7128,7 +6596,7 @@
               </a:spcAft>
             </a:pPr>
             <a:r>
-              <a:rPr sz="1400" b="1">
+              <a:rPr sz="1600" b="1">
                 <a:solidFill>
                   <a:srgbClr val="FFFFFF"/>
                 </a:solidFill>
@@ -7147,8 +6615,8 @@
         </p:nvSpPr>
         <p:spPr>
           <a:xfrm>
-            <a:off x="3078784" y="1901952"/>
-            <a:ext cx="7863840" cy="457200"/>
+            <a:off x="2758744" y="1810512"/>
+            <a:ext cx="7772400" cy="502920"/>
           </a:xfrm>
           <a:prstGeom prst="rect">
             <a:avLst/>
@@ -7167,13 +6635,13 @@
               </a:spcAft>
             </a:pPr>
             <a:r>
-              <a:rPr sz="2200" b="0">
+              <a:rPr sz="2400" b="0">
                 <a:solidFill>
                   <a:srgbClr val="3C2850"/>
                 </a:solidFill>
                 <a:latin typeface="Microsoft YaHei"/>
               </a:rPr>
-              <a:t>夸张+反讽+对比，让笑声指向盲从与虚伪</a:t>
+              <a:t>完成课后「思考·探究·积累」三道思考题</a:t>
             </a:r>
           </a:p>
         </p:txBody>
@@ -7186,8 +6654,8 @@
         </p:nvSpPr>
         <p:spPr>
           <a:xfrm>
-            <a:off x="2621584" y="2395728"/>
-            <a:ext cx="347472" cy="347472"/>
+            <a:off x="2255824" y="2395728"/>
+            <a:ext cx="384048" cy="384048"/>
           </a:xfrm>
           <a:prstGeom prst="ellipse">
             <a:avLst/>
@@ -7229,8 +6697,8 @@
         </p:nvSpPr>
         <p:spPr>
           <a:xfrm>
-            <a:off x="2621584" y="2414016"/>
-            <a:ext cx="347472" cy="329184"/>
+            <a:off x="2255824" y="2414016"/>
+            <a:ext cx="384048" cy="365760"/>
           </a:xfrm>
           <a:prstGeom prst="rect">
             <a:avLst/>
@@ -7249,7 +6717,7 @@
               </a:spcAft>
             </a:pPr>
             <a:r>
-              <a:rPr sz="1400" b="1">
+              <a:rPr sz="1600" b="1">
                 <a:solidFill>
                   <a:srgbClr val="FFFFFF"/>
                 </a:solidFill>
@@ -7268,8 +6736,8 @@
         </p:nvSpPr>
         <p:spPr>
           <a:xfrm>
-            <a:off x="3078784" y="2377440"/>
-            <a:ext cx="7863840" cy="457200"/>
+            <a:off x="2758744" y="2377440"/>
+            <a:ext cx="7772400" cy="502920"/>
           </a:xfrm>
           <a:prstGeom prst="rect">
             <a:avLst/>
@@ -7288,13 +6756,13 @@
               </a:spcAft>
             </a:pPr>
             <a:r>
-              <a:rPr sz="2200" b="0">
+              <a:rPr sz="2400" b="0">
                 <a:solidFill>
                   <a:srgbClr val="3C2850"/>
                 </a:solidFill>
                 <a:latin typeface="Microsoft YaHei"/>
               </a:rPr>
-              <a:t>「新装」是谎言，更是照见人性的镜子</a:t>
+              <a:t>联系生活：你有没有「随大流」的经历？</a:t>
             </a:r>
           </a:p>
         </p:txBody>
@@ -7307,8 +6775,8 @@
         </p:nvSpPr>
         <p:spPr>
           <a:xfrm>
-            <a:off x="2621584" y="2871216"/>
-            <a:ext cx="347472" cy="347472"/>
+            <a:off x="2255824" y="2962656"/>
+            <a:ext cx="384048" cy="384048"/>
           </a:xfrm>
           <a:prstGeom prst="ellipse">
             <a:avLst/>
@@ -7350,8 +6818,8 @@
         </p:nvSpPr>
         <p:spPr>
           <a:xfrm>
-            <a:off x="2621584" y="2889504"/>
-            <a:ext cx="347472" cy="329184"/>
+            <a:off x="2255824" y="2980944"/>
+            <a:ext cx="384048" cy="365760"/>
           </a:xfrm>
           <a:prstGeom prst="rect">
             <a:avLst/>
@@ -7370,7 +6838,7 @@
               </a:spcAft>
             </a:pPr>
             <a:r>
-              <a:rPr sz="1400" b="1">
+              <a:rPr sz="1600" b="1">
                 <a:solidFill>
                   <a:srgbClr val="FFFFFF"/>
                 </a:solidFill>
@@ -7389,8 +6857,8 @@
         </p:nvSpPr>
         <p:spPr>
           <a:xfrm>
-            <a:off x="3078784" y="2852928"/>
-            <a:ext cx="7863840" cy="457200"/>
+            <a:off x="2758744" y="2944368"/>
+            <a:ext cx="7772400" cy="502920"/>
           </a:xfrm>
           <a:prstGeom prst="rect">
             <a:avLst/>
@@ -7409,13 +6877,13 @@
               </a:spcAft>
             </a:pPr>
             <a:r>
-              <a:rPr sz="2200" b="0">
+              <a:rPr sz="2400" b="0">
                 <a:solidFill>
                   <a:srgbClr val="3C2850"/>
                 </a:solidFill>
                 <a:latin typeface="Microsoft YaHei"/>
               </a:rPr>
-              <a:t>策展主题二：真实与虚假</a:t>
+              <a:t>策展主题二：面对虚假，要敢于说真话</a:t>
             </a:r>
           </a:p>
         </p:txBody>
@@ -7630,7 +7098,7 @@
                 </a:solidFill>
                 <a:latin typeface="Microsoft YaHei"/>
               </a:rPr>
-              <a:t>课后延伸</a:t>
+              <a:t>回顾收获</a:t>
             </a:r>
           </a:p>
         </p:txBody>
@@ -7643,7 +7111,7 @@
         </p:nvSpPr>
         <p:spPr>
           <a:xfrm>
-            <a:off x="1371600" y="1051560"/>
+            <a:off x="1371600" y="960120"/>
             <a:ext cx="9418320" cy="822960"/>
           </a:xfrm>
           <a:prstGeom prst="rect">
@@ -7669,7 +7137,7 @@
                 </a:solidFill>
                 <a:latin typeface="Microsoft YaHei"/>
               </a:rPr>
-              <a:t>课后作业</a:t>
+              <a:t>课堂小结</a:t>
             </a:r>
           </a:p>
         </p:txBody>
@@ -7682,7 +7150,7 @@
         </p:nvSpPr>
         <p:spPr>
           <a:xfrm>
-            <a:off x="3200400" y="1691640"/>
+            <a:off x="3200400" y="1600200"/>
             <a:ext cx="5760720" cy="27432"/>
           </a:xfrm>
           <a:prstGeom prst="rect">
@@ -7725,8 +7193,8 @@
         </p:nvSpPr>
         <p:spPr>
           <a:xfrm>
-            <a:off x="1295704" y="1737360"/>
-            <a:ext cx="9601200" cy="1545336"/>
+            <a:off x="1295704" y="1645920"/>
+            <a:ext cx="9601200" cy="2240280"/>
           </a:xfrm>
           <a:prstGeom prst="roundRect">
             <a:avLst/>
@@ -7770,8 +7238,8 @@
         </p:nvSpPr>
         <p:spPr>
           <a:xfrm>
-            <a:off x="2621584" y="1920240"/>
-            <a:ext cx="347472" cy="347472"/>
+            <a:off x="2255824" y="1828800"/>
+            <a:ext cx="384048" cy="384048"/>
           </a:xfrm>
           <a:prstGeom prst="ellipse">
             <a:avLst/>
@@ -7813,8 +7281,8 @@
         </p:nvSpPr>
         <p:spPr>
           <a:xfrm>
-            <a:off x="2621584" y="1938528"/>
-            <a:ext cx="347472" cy="329184"/>
+            <a:off x="2255824" y="1847088"/>
+            <a:ext cx="384048" cy="365760"/>
           </a:xfrm>
           <a:prstGeom prst="rect">
             <a:avLst/>
@@ -7833,7 +7301,7 @@
               </a:spcAft>
             </a:pPr>
             <a:r>
-              <a:rPr sz="1400" b="1">
+              <a:rPr sz="1600" b="1">
                 <a:solidFill>
                   <a:srgbClr val="FFFFFF"/>
                 </a:solidFill>
@@ -7852,8 +7320,8 @@
         </p:nvSpPr>
         <p:spPr>
           <a:xfrm>
-            <a:off x="3078784" y="1901952"/>
-            <a:ext cx="7863840" cy="457200"/>
+            <a:off x="2758744" y="1810512"/>
+            <a:ext cx="7772400" cy="502920"/>
           </a:xfrm>
           <a:prstGeom prst="rect">
             <a:avLst/>
@@ -7878,7 +7346,7 @@
                 </a:solidFill>
                 <a:latin typeface="Microsoft YaHei"/>
               </a:rPr>
-              <a:t>必做：用150字概括故事</a:t>
+              <a:t>夸张、重复、反差制造笑声，指向盲从与虚伪</a:t>
             </a:r>
           </a:p>
         </p:txBody>
@@ -7891,8 +7359,8 @@
         </p:nvSpPr>
         <p:spPr>
           <a:xfrm>
-            <a:off x="2621584" y="2487168"/>
-            <a:ext cx="347472" cy="347472"/>
+            <a:off x="2255824" y="2395728"/>
+            <a:ext cx="384048" cy="384048"/>
           </a:xfrm>
           <a:prstGeom prst="ellipse">
             <a:avLst/>
@@ -7934,8 +7402,8 @@
         </p:nvSpPr>
         <p:spPr>
           <a:xfrm>
-            <a:off x="2621584" y="2505456"/>
-            <a:ext cx="347472" cy="329184"/>
+            <a:off x="2255824" y="2414016"/>
+            <a:ext cx="384048" cy="365760"/>
           </a:xfrm>
           <a:prstGeom prst="rect">
             <a:avLst/>
@@ -7954,7 +7422,7 @@
               </a:spcAft>
             </a:pPr>
             <a:r>
-              <a:rPr sz="1400" b="1">
+              <a:rPr sz="1600" b="1">
                 <a:solidFill>
                   <a:srgbClr val="FFFFFF"/>
                 </a:solidFill>
@@ -7973,8 +7441,713 @@
         </p:nvSpPr>
         <p:spPr>
           <a:xfrm>
-            <a:off x="3078784" y="2468880"/>
-            <a:ext cx="7863840" cy="457200"/>
+            <a:off x="2758744" y="2377440"/>
+            <a:ext cx="7772400" cy="502920"/>
+          </a:xfrm>
+          <a:prstGeom prst="rect">
+            <a:avLst/>
+          </a:prstGeom>
+          <a:noFill/>
+        </p:spPr>
+        <p:txBody>
+          <a:bodyPr wrap="none">
+            <a:spAutoFit/>
+          </a:bodyPr>
+          <a:lstStyle/>
+          <a:p>
+            <a:pPr algn="l">
+              <a:spcAft>
+                <a:spcPts val="1000"/>
+              </a:spcAft>
+            </a:pPr>
+            <a:r>
+              <a:rPr sz="2400" b="0">
+                <a:solidFill>
+                  <a:srgbClr val="3C2850"/>
+                </a:solidFill>
+                <a:latin typeface="Microsoft YaHei"/>
+              </a:rPr>
+              <a:t>孩子的天真，是不被虚假规则束缚的诚实</a:t>
+            </a:r>
+          </a:p>
+        </p:txBody>
+      </p:sp>
+      <p:sp>
+        <p:nvSpPr>
+          <p:cNvPr id="17" name="Oval 16"/>
+          <p:cNvSpPr/>
+          <p:nvPr/>
+        </p:nvSpPr>
+        <p:spPr>
+          <a:xfrm>
+            <a:off x="2255824" y="2962656"/>
+            <a:ext cx="384048" cy="384048"/>
+          </a:xfrm>
+          <a:prstGeom prst="ellipse">
+            <a:avLst/>
+          </a:prstGeom>
+          <a:solidFill>
+            <a:srgbClr val="784696"/>
+          </a:solidFill>
+          <a:ln>
+            <a:noFill/>
+          </a:ln>
+        </p:spPr>
+        <p:style>
+          <a:lnRef idx="1">
+            <a:schemeClr val="accent1"/>
+          </a:lnRef>
+          <a:fillRef idx="3">
+            <a:schemeClr val="accent1"/>
+          </a:fillRef>
+          <a:effectRef idx="2">
+            <a:schemeClr val="accent1"/>
+          </a:effectRef>
+          <a:fontRef idx="minor">
+            <a:schemeClr val="lt1"/>
+          </a:fontRef>
+        </p:style>
+        <p:txBody>
+          <a:bodyPr rtlCol="0" anchor="ctr"/>
+          <a:lstStyle/>
+          <a:p>
+            <a:pPr algn="ctr"/>
+          </a:p>
+        </p:txBody>
+      </p:sp>
+      <p:sp>
+        <p:nvSpPr>
+          <p:cNvPr id="18" name="TextBox 17"/>
+          <p:cNvSpPr txBox="1"/>
+          <p:nvPr/>
+        </p:nvSpPr>
+        <p:spPr>
+          <a:xfrm>
+            <a:off x="2255824" y="2980944"/>
+            <a:ext cx="384048" cy="365760"/>
+          </a:xfrm>
+          <a:prstGeom prst="rect">
+            <a:avLst/>
+          </a:prstGeom>
+          <a:noFill/>
+        </p:spPr>
+        <p:txBody>
+          <a:bodyPr wrap="none">
+            <a:spAutoFit/>
+          </a:bodyPr>
+          <a:lstStyle/>
+          <a:p>
+            <a:pPr algn="ctr">
+              <a:spcAft>
+                <a:spcPts val="1000"/>
+              </a:spcAft>
+            </a:pPr>
+            <a:r>
+              <a:rPr sz="1600" b="1">
+                <a:solidFill>
+                  <a:srgbClr val="FFFFFF"/>
+                </a:solidFill>
+                <a:latin typeface="Microsoft YaHei"/>
+              </a:rPr>
+              <a:t>3</a:t>
+            </a:r>
+          </a:p>
+        </p:txBody>
+      </p:sp>
+      <p:sp>
+        <p:nvSpPr>
+          <p:cNvPr id="19" name="TextBox 18"/>
+          <p:cNvSpPr txBox="1"/>
+          <p:nvPr/>
+        </p:nvSpPr>
+        <p:spPr>
+          <a:xfrm>
+            <a:off x="2758744" y="2944368"/>
+            <a:ext cx="7772400" cy="502920"/>
+          </a:xfrm>
+          <a:prstGeom prst="rect">
+            <a:avLst/>
+          </a:prstGeom>
+          <a:noFill/>
+        </p:spPr>
+        <p:txBody>
+          <a:bodyPr wrap="none">
+            <a:spAutoFit/>
+          </a:bodyPr>
+          <a:lstStyle/>
+          <a:p>
+            <a:pPr algn="l">
+              <a:spcAft>
+                <a:spcPts val="1000"/>
+              </a:spcAft>
+            </a:pPr>
+            <a:r>
+              <a:rPr sz="2400" b="0">
+                <a:solidFill>
+                  <a:srgbClr val="3C2850"/>
+                </a:solidFill>
+                <a:latin typeface="Microsoft YaHei"/>
+              </a:rPr>
+              <a:t>策展主题：真实与虚假</a:t>
+            </a:r>
+          </a:p>
+        </p:txBody>
+      </p:sp>
+    </p:spTree>
+  </p:cSld>
+  <p:clrMapOvr>
+    <a:masterClrMapping/>
+  </p:clrMapOvr>
+</p:sld>
+</file>
+
+<file path=ppt/slides/slide9.xml><?xml version="1.0" encoding="utf-8"?>
+<p:sld xmlns:a="http://schemas.openxmlformats.org/drawingml/2006/main" xmlns:p="http://schemas.openxmlformats.org/presentationml/2006/main" xmlns:r="http://schemas.openxmlformats.org/officeDocument/2006/relationships">
+  <p:cSld>
+    <p:spTree>
+      <p:nvGrpSpPr>
+        <p:cNvPr id="1" name=""/>
+        <p:cNvGrpSpPr/>
+        <p:nvPr/>
+      </p:nvGrpSpPr>
+      <p:grpSpPr/>
+      <p:pic>
+        <p:nvPicPr>
+          <p:cNvPr id="2" name="Picture 1" descr="bg_emperor.png"/>
+          <p:cNvPicPr>
+            <a:picLocks noChangeAspect="1"/>
+          </p:cNvPicPr>
+          <p:nvPr/>
+        </p:nvPicPr>
+        <p:blipFill>
+          <a:blip r:embed="rId2"/>
+          <a:stretch>
+            <a:fillRect/>
+          </a:stretch>
+        </p:blipFill>
+        <p:spPr>
+          <a:xfrm>
+            <a:off x="0" y="0"/>
+            <a:ext cx="12191695" cy="6858000"/>
+          </a:xfrm>
+          <a:prstGeom prst="rect">
+            <a:avLst/>
+          </a:prstGeom>
+        </p:spPr>
+      </p:pic>
+      <p:sp>
+        <p:nvSpPr>
+          <p:cNvPr id="3" name="Rectangle 2"/>
+          <p:cNvSpPr/>
+          <p:nvPr/>
+        </p:nvSpPr>
+        <p:spPr>
+          <a:xfrm>
+            <a:off x="292608" y="274320"/>
+            <a:ext cx="11594592" cy="6300216"/>
+          </a:xfrm>
+          <a:prstGeom prst="rect">
+            <a:avLst/>
+          </a:prstGeom>
+          <a:noFill/>
+          <a:ln w="31750">
+            <a:solidFill>
+              <a:srgbClr val="825AA0"/>
+            </a:solidFill>
+          </a:ln>
+        </p:spPr>
+        <p:style>
+          <a:lnRef idx="1">
+            <a:schemeClr val="accent1"/>
+          </a:lnRef>
+          <a:fillRef idx="3">
+            <a:schemeClr val="accent1"/>
+          </a:fillRef>
+          <a:effectRef idx="2">
+            <a:schemeClr val="accent1"/>
+          </a:effectRef>
+          <a:fontRef idx="minor">
+            <a:schemeClr val="lt1"/>
+          </a:fontRef>
+        </p:style>
+        <p:txBody>
+          <a:bodyPr rtlCol="0" anchor="ctr"/>
+          <a:lstStyle/>
+          <a:p>
+            <a:pPr algn="ctr"/>
+          </a:p>
+        </p:txBody>
+      </p:sp>
+      <p:pic>
+        <p:nvPicPr>
+          <p:cNvPr id="4" name="Picture 3" descr="corner_emperor_tl.png"/>
+          <p:cNvPicPr>
+            <a:picLocks noChangeAspect="1"/>
+          </p:cNvPicPr>
+          <p:nvPr/>
+        </p:nvPicPr>
+        <p:blipFill>
+          <a:blip r:embed="rId3"/>
+          <a:stretch>
+            <a:fillRect/>
+          </a:stretch>
+        </p:blipFill>
+        <p:spPr>
+          <a:xfrm>
+            <a:off x="-45720" y="-45720"/>
+            <a:ext cx="2011680" cy="2011680"/>
+          </a:xfrm>
+          <a:prstGeom prst="rect">
+            <a:avLst/>
+          </a:prstGeom>
+        </p:spPr>
+      </p:pic>
+      <p:pic>
+        <p:nvPicPr>
+          <p:cNvPr id="5" name="Picture 4" descr="corner_emperor_tr.png"/>
+          <p:cNvPicPr>
+            <a:picLocks noChangeAspect="1"/>
+          </p:cNvPicPr>
+          <p:nvPr/>
+        </p:nvPicPr>
+        <p:blipFill>
+          <a:blip r:embed="rId4"/>
+          <a:stretch>
+            <a:fillRect/>
+          </a:stretch>
+        </p:blipFill>
+        <p:spPr>
+          <a:xfrm>
+            <a:off x="9875520" y="-45720"/>
+            <a:ext cx="2011680" cy="2011680"/>
+          </a:xfrm>
+          <a:prstGeom prst="rect">
+            <a:avLst/>
+          </a:prstGeom>
+        </p:spPr>
+      </p:pic>
+      <p:sp>
+        <p:nvSpPr>
+          <p:cNvPr id="6" name="Rounded Rectangle 5"/>
+          <p:cNvSpPr/>
+          <p:nvPr/>
+        </p:nvSpPr>
+        <p:spPr>
+          <a:xfrm>
+            <a:off x="4953304" y="502920"/>
+            <a:ext cx="2286000" cy="411480"/>
+          </a:xfrm>
+          <a:prstGeom prst="roundRect">
+            <a:avLst/>
+          </a:prstGeom>
+          <a:solidFill>
+            <a:srgbClr val="C8AADC"/>
+          </a:solidFill>
+          <a:ln>
+            <a:noFill/>
+          </a:ln>
+        </p:spPr>
+        <p:style>
+          <a:lnRef idx="1">
+            <a:schemeClr val="accent1"/>
+          </a:lnRef>
+          <a:fillRef idx="3">
+            <a:schemeClr val="accent1"/>
+          </a:fillRef>
+          <a:effectRef idx="2">
+            <a:schemeClr val="accent1"/>
+          </a:effectRef>
+          <a:fontRef idx="minor">
+            <a:schemeClr val="lt1"/>
+          </a:fontRef>
+        </p:style>
+        <p:txBody>
+          <a:bodyPr rtlCol="0" anchor="ctr"/>
+          <a:lstStyle/>
+          <a:p>
+            <a:pPr algn="ctr"/>
+          </a:p>
+        </p:txBody>
+      </p:sp>
+      <p:sp>
+        <p:nvSpPr>
+          <p:cNvPr id="7" name="TextBox 6"/>
+          <p:cNvSpPr txBox="1"/>
+          <p:nvPr/>
+        </p:nvSpPr>
+        <p:spPr>
+          <a:xfrm>
+            <a:off x="4953304" y="521208"/>
+            <a:ext cx="2286000" cy="384048"/>
+          </a:xfrm>
+          <a:prstGeom prst="rect">
+            <a:avLst/>
+          </a:prstGeom>
+          <a:noFill/>
+        </p:spPr>
+        <p:txBody>
+          <a:bodyPr wrap="none">
+            <a:spAutoFit/>
+          </a:bodyPr>
+          <a:lstStyle/>
+          <a:p>
+            <a:pPr algn="ctr">
+              <a:spcAft>
+                <a:spcPts val="1000"/>
+              </a:spcAft>
+            </a:pPr>
+            <a:r>
+              <a:rPr sz="1800" b="1">
+                <a:solidFill>
+                  <a:srgbClr val="3C2850"/>
+                </a:solidFill>
+                <a:latin typeface="Microsoft YaHei"/>
+              </a:rPr>
+              <a:t>课后延伸</a:t>
+            </a:r>
+          </a:p>
+        </p:txBody>
+      </p:sp>
+      <p:sp>
+        <p:nvSpPr>
+          <p:cNvPr id="8" name="TextBox 7"/>
+          <p:cNvSpPr txBox="1"/>
+          <p:nvPr/>
+        </p:nvSpPr>
+        <p:spPr>
+          <a:xfrm>
+            <a:off x="1371600" y="960120"/>
+            <a:ext cx="9418320" cy="822960"/>
+          </a:xfrm>
+          <a:prstGeom prst="rect">
+            <a:avLst/>
+          </a:prstGeom>
+          <a:noFill/>
+        </p:spPr>
+        <p:txBody>
+          <a:bodyPr wrap="square">
+            <a:spAutoFit/>
+          </a:bodyPr>
+          <a:lstStyle/>
+          <a:p>
+            <a:pPr algn="ctr">
+              <a:spcAft>
+                <a:spcPts val="1000"/>
+              </a:spcAft>
+            </a:pPr>
+            <a:r>
+              <a:rPr sz="3600" b="1">
+                <a:solidFill>
+                  <a:srgbClr val="784696"/>
+                </a:solidFill>
+                <a:latin typeface="Microsoft YaHei"/>
+              </a:rPr>
+              <a:t>课后作业</a:t>
+            </a:r>
+          </a:p>
+        </p:txBody>
+      </p:sp>
+      <p:sp>
+        <p:nvSpPr>
+          <p:cNvPr id="9" name="Rectangle 8"/>
+          <p:cNvSpPr/>
+          <p:nvPr/>
+        </p:nvSpPr>
+        <p:spPr>
+          <a:xfrm>
+            <a:off x="3200400" y="1600200"/>
+            <a:ext cx="5760720" cy="27432"/>
+          </a:xfrm>
+          <a:prstGeom prst="rect">
+            <a:avLst/>
+          </a:prstGeom>
+          <a:solidFill>
+            <a:srgbClr val="C8AADC"/>
+          </a:solidFill>
+          <a:ln>
+            <a:noFill/>
+          </a:ln>
+        </p:spPr>
+        <p:style>
+          <a:lnRef idx="1">
+            <a:schemeClr val="accent1"/>
+          </a:lnRef>
+          <a:fillRef idx="3">
+            <a:schemeClr val="accent1"/>
+          </a:fillRef>
+          <a:effectRef idx="2">
+            <a:schemeClr val="accent1"/>
+          </a:effectRef>
+          <a:fontRef idx="minor">
+            <a:schemeClr val="lt1"/>
+          </a:fontRef>
+        </p:style>
+        <p:txBody>
+          <a:bodyPr rtlCol="0" anchor="ctr"/>
+          <a:lstStyle/>
+          <a:p>
+            <a:pPr algn="ctr"/>
+          </a:p>
+        </p:txBody>
+      </p:sp>
+      <p:sp>
+        <p:nvSpPr>
+          <p:cNvPr id="10" name="Rounded Rectangle 9"/>
+          <p:cNvSpPr/>
+          <p:nvPr/>
+        </p:nvSpPr>
+        <p:spPr>
+          <a:xfrm>
+            <a:off x="1295704" y="1645920"/>
+            <a:ext cx="9601200" cy="1645920"/>
+          </a:xfrm>
+          <a:prstGeom prst="roundRect">
+            <a:avLst/>
+          </a:prstGeom>
+          <a:solidFill>
+            <a:srgbClr val="FCF8FF"/>
+          </a:solidFill>
+          <a:ln w="19050">
+            <a:solidFill>
+              <a:srgbClr val="C8AADC"/>
+            </a:solidFill>
+          </a:ln>
+        </p:spPr>
+        <p:style>
+          <a:lnRef idx="1">
+            <a:schemeClr val="accent1"/>
+          </a:lnRef>
+          <a:fillRef idx="3">
+            <a:schemeClr val="accent1"/>
+          </a:fillRef>
+          <a:effectRef idx="2">
+            <a:schemeClr val="accent1"/>
+          </a:effectRef>
+          <a:fontRef idx="minor">
+            <a:schemeClr val="lt1"/>
+          </a:fontRef>
+        </p:style>
+        <p:txBody>
+          <a:bodyPr rtlCol="0" anchor="ctr"/>
+          <a:lstStyle/>
+          <a:p>
+            <a:pPr algn="ctr"/>
+          </a:p>
+        </p:txBody>
+      </p:sp>
+      <p:sp>
+        <p:nvSpPr>
+          <p:cNvPr id="11" name="Oval 10"/>
+          <p:cNvSpPr/>
+          <p:nvPr/>
+        </p:nvSpPr>
+        <p:spPr>
+          <a:xfrm>
+            <a:off x="2255824" y="1828800"/>
+            <a:ext cx="384048" cy="384048"/>
+          </a:xfrm>
+          <a:prstGeom prst="ellipse">
+            <a:avLst/>
+          </a:prstGeom>
+          <a:solidFill>
+            <a:srgbClr val="784696"/>
+          </a:solidFill>
+          <a:ln>
+            <a:noFill/>
+          </a:ln>
+        </p:spPr>
+        <p:style>
+          <a:lnRef idx="1">
+            <a:schemeClr val="accent1"/>
+          </a:lnRef>
+          <a:fillRef idx="3">
+            <a:schemeClr val="accent1"/>
+          </a:fillRef>
+          <a:effectRef idx="2">
+            <a:schemeClr val="accent1"/>
+          </a:effectRef>
+          <a:fontRef idx="minor">
+            <a:schemeClr val="lt1"/>
+          </a:fontRef>
+        </p:style>
+        <p:txBody>
+          <a:bodyPr rtlCol="0" anchor="ctr"/>
+          <a:lstStyle/>
+          <a:p>
+            <a:pPr algn="ctr"/>
+          </a:p>
+        </p:txBody>
+      </p:sp>
+      <p:sp>
+        <p:nvSpPr>
+          <p:cNvPr id="12" name="TextBox 11"/>
+          <p:cNvSpPr txBox="1"/>
+          <p:nvPr/>
+        </p:nvSpPr>
+        <p:spPr>
+          <a:xfrm>
+            <a:off x="2255824" y="1847088"/>
+            <a:ext cx="384048" cy="365760"/>
+          </a:xfrm>
+          <a:prstGeom prst="rect">
+            <a:avLst/>
+          </a:prstGeom>
+          <a:noFill/>
+        </p:spPr>
+        <p:txBody>
+          <a:bodyPr wrap="none">
+            <a:spAutoFit/>
+          </a:bodyPr>
+          <a:lstStyle/>
+          <a:p>
+            <a:pPr algn="ctr">
+              <a:spcAft>
+                <a:spcPts val="1000"/>
+              </a:spcAft>
+            </a:pPr>
+            <a:r>
+              <a:rPr sz="1600" b="1">
+                <a:solidFill>
+                  <a:srgbClr val="FFFFFF"/>
+                </a:solidFill>
+                <a:latin typeface="Microsoft YaHei"/>
+              </a:rPr>
+              <a:t>1</a:t>
+            </a:r>
+          </a:p>
+        </p:txBody>
+      </p:sp>
+      <p:sp>
+        <p:nvSpPr>
+          <p:cNvPr id="13" name="TextBox 12"/>
+          <p:cNvSpPr txBox="1"/>
+          <p:nvPr/>
+        </p:nvSpPr>
+        <p:spPr>
+          <a:xfrm>
+            <a:off x="2758744" y="1810512"/>
+            <a:ext cx="7772400" cy="502920"/>
+          </a:xfrm>
+          <a:prstGeom prst="rect">
+            <a:avLst/>
+          </a:prstGeom>
+          <a:noFill/>
+        </p:spPr>
+        <p:txBody>
+          <a:bodyPr wrap="none">
+            <a:spAutoFit/>
+          </a:bodyPr>
+          <a:lstStyle/>
+          <a:p>
+            <a:pPr algn="l">
+              <a:spcAft>
+                <a:spcPts val="1000"/>
+              </a:spcAft>
+            </a:pPr>
+            <a:r>
+              <a:rPr sz="2400" b="0">
+                <a:solidFill>
+                  <a:srgbClr val="3C2850"/>
+                </a:solidFill>
+                <a:latin typeface="Microsoft YaHei"/>
+              </a:rPr>
+              <a:t>必做：用150字概括《皇帝的新装》的故事</a:t>
+            </a:r>
+          </a:p>
+        </p:txBody>
+      </p:sp>
+      <p:sp>
+        <p:nvSpPr>
+          <p:cNvPr id="14" name="Oval 13"/>
+          <p:cNvSpPr/>
+          <p:nvPr/>
+        </p:nvSpPr>
+        <p:spPr>
+          <a:xfrm>
+            <a:off x="2255824" y="2395728"/>
+            <a:ext cx="384048" cy="384048"/>
+          </a:xfrm>
+          <a:prstGeom prst="ellipse">
+            <a:avLst/>
+          </a:prstGeom>
+          <a:solidFill>
+            <a:srgbClr val="784696"/>
+          </a:solidFill>
+          <a:ln>
+            <a:noFill/>
+          </a:ln>
+        </p:spPr>
+        <p:style>
+          <a:lnRef idx="1">
+            <a:schemeClr val="accent1"/>
+          </a:lnRef>
+          <a:fillRef idx="3">
+            <a:schemeClr val="accent1"/>
+          </a:fillRef>
+          <a:effectRef idx="2">
+            <a:schemeClr val="accent1"/>
+          </a:effectRef>
+          <a:fontRef idx="minor">
+            <a:schemeClr val="lt1"/>
+          </a:fontRef>
+        </p:style>
+        <p:txBody>
+          <a:bodyPr rtlCol="0" anchor="ctr"/>
+          <a:lstStyle/>
+          <a:p>
+            <a:pPr algn="ctr"/>
+          </a:p>
+        </p:txBody>
+      </p:sp>
+      <p:sp>
+        <p:nvSpPr>
+          <p:cNvPr id="15" name="TextBox 14"/>
+          <p:cNvSpPr txBox="1"/>
+          <p:nvPr/>
+        </p:nvSpPr>
+        <p:spPr>
+          <a:xfrm>
+            <a:off x="2255824" y="2414016"/>
+            <a:ext cx="384048" cy="365760"/>
+          </a:xfrm>
+          <a:prstGeom prst="rect">
+            <a:avLst/>
+          </a:prstGeom>
+          <a:noFill/>
+        </p:spPr>
+        <p:txBody>
+          <a:bodyPr wrap="none">
+            <a:spAutoFit/>
+          </a:bodyPr>
+          <a:lstStyle/>
+          <a:p>
+            <a:pPr algn="ctr">
+              <a:spcAft>
+                <a:spcPts val="1000"/>
+              </a:spcAft>
+            </a:pPr>
+            <a:r>
+              <a:rPr sz="1600" b="1">
+                <a:solidFill>
+                  <a:srgbClr val="FFFFFF"/>
+                </a:solidFill>
+                <a:latin typeface="Microsoft YaHei"/>
+              </a:rPr>
+              <a:t>2</a:t>
+            </a:r>
+          </a:p>
+        </p:txBody>
+      </p:sp>
+      <p:sp>
+        <p:nvSpPr>
+          <p:cNvPr id="16" name="TextBox 15"/>
+          <p:cNvSpPr txBox="1"/>
+          <p:nvPr/>
+        </p:nvSpPr>
+        <p:spPr>
+          <a:xfrm>
+            <a:off x="2758744" y="2377440"/>
+            <a:ext cx="7772400" cy="502920"/>
           </a:xfrm>
           <a:prstGeom prst="rect">
             <a:avLst/>

--- a/第六单元PPT/第22课 皇帝的新装.pptx
+++ b/第六单元PPT/第22课 皇帝的新装.pptx
@@ -13,7 +13,6 @@
     <p:sldId id="261" r:id="rId12"/>
     <p:sldId id="262" r:id="rId13"/>
     <p:sldId id="263" r:id="rId14"/>
-    <p:sldId id="264" r:id="rId15"/>
   </p:sldIdLst>
   <p:sldSz cx="12191695" cy="6858000" type="screen4x3"/>
   <p:notesSz cx="6858000" cy="9144000"/>
@@ -3305,8 +3304,8 @@
         </p:nvSpPr>
         <p:spPr>
           <a:xfrm>
-            <a:off x="1371600" y="2011680"/>
-            <a:ext cx="9418320" cy="1645920"/>
+            <a:off x="1371600" y="1828800"/>
+            <a:ext cx="9418320" cy="1828800"/>
           </a:xfrm>
           <a:prstGeom prst="rect">
             <a:avLst/>
@@ -3348,6 +3347,22 @@
                 <a:latin typeface="Microsoft YaHei"/>
               </a:rPr>
               <a:t>第22课 · 第四、五课时 · 真实与虚假</a:t>
+            </a:r>
+          </a:p>
+          <a:p>
+            <a:pPr algn="ctr">
+              <a:spcAft>
+                <a:spcPts val="1000"/>
+              </a:spcAft>
+            </a:pPr>
+            <a:r>
+              <a:rPr sz="2000" b="1">
+                <a:solidFill>
+                  <a:srgbClr val="C8AADC"/>
+                </a:solidFill>
+                <a:latin typeface="Microsoft YaHei"/>
+              </a:rPr>
+              <a:t>含课堂笔记 · 2026版</a:t>
             </a:r>
           </a:p>
         </p:txBody>
@@ -3536,8 +3551,342 @@
         </p:nvSpPr>
         <p:spPr>
           <a:xfrm>
-            <a:off x="4953304" y="502920"/>
-            <a:ext cx="2286000" cy="411480"/>
+            <a:off x="502920" y="384048"/>
+            <a:ext cx="2011680" cy="384048"/>
+          </a:xfrm>
+          <a:prstGeom prst="roundRect">
+            <a:avLst/>
+          </a:prstGeom>
+          <a:solidFill>
+            <a:srgbClr val="784696"/>
+          </a:solidFill>
+          <a:ln>
+            <a:noFill/>
+          </a:ln>
+        </p:spPr>
+        <p:style>
+          <a:lnRef idx="1">
+            <a:schemeClr val="accent1"/>
+          </a:lnRef>
+          <a:fillRef idx="3">
+            <a:schemeClr val="accent1"/>
+          </a:fillRef>
+          <a:effectRef idx="2">
+            <a:schemeClr val="accent1"/>
+          </a:effectRef>
+          <a:fontRef idx="minor">
+            <a:schemeClr val="lt1"/>
+          </a:fontRef>
+        </p:style>
+        <p:txBody>
+          <a:bodyPr rtlCol="0" anchor="ctr"/>
+          <a:lstStyle/>
+          <a:p>
+            <a:pPr algn="ctr"/>
+          </a:p>
+        </p:txBody>
+      </p:sp>
+      <p:sp>
+        <p:nvSpPr>
+          <p:cNvPr id="7" name="TextBox 6"/>
+          <p:cNvSpPr txBox="1"/>
+          <p:nvPr/>
+        </p:nvSpPr>
+        <p:spPr>
+          <a:xfrm>
+            <a:off x="502920" y="402336"/>
+            <a:ext cx="2011680" cy="347472"/>
+          </a:xfrm>
+          <a:prstGeom prst="rect">
+            <a:avLst/>
+          </a:prstGeom>
+          <a:noFill/>
+        </p:spPr>
+        <p:txBody>
+          <a:bodyPr wrap="none">
+            <a:spAutoFit/>
+          </a:bodyPr>
+          <a:lstStyle/>
+          <a:p>
+            <a:pPr algn="ctr">
+              <a:spcAft>
+                <a:spcPts val="1000"/>
+              </a:spcAft>
+            </a:pPr>
+            <a:r>
+              <a:rPr sz="1600" b="1">
+                <a:solidFill>
+                  <a:srgbClr val="FFFFFF"/>
+                </a:solidFill>
+                <a:latin typeface="Microsoft YaHei"/>
+              </a:rPr>
+              <a:t>知识要点</a:t>
+            </a:r>
+          </a:p>
+        </p:txBody>
+      </p:sp>
+      <p:sp>
+        <p:nvSpPr>
+          <p:cNvPr id="8" name="TextBox 7"/>
+          <p:cNvSpPr txBox="1"/>
+          <p:nvPr/>
+        </p:nvSpPr>
+        <p:spPr>
+          <a:xfrm>
+            <a:off x="1371600" y="384048"/>
+            <a:ext cx="9418320" cy="822960"/>
+          </a:xfrm>
+          <a:prstGeom prst="rect">
+            <a:avLst/>
+          </a:prstGeom>
+          <a:noFill/>
+        </p:spPr>
+        <p:txBody>
+          <a:bodyPr wrap="square">
+            <a:spAutoFit/>
+          </a:bodyPr>
+          <a:lstStyle/>
+          <a:p>
+            <a:pPr algn="ctr">
+              <a:spcAft>
+                <a:spcPts val="1000"/>
+              </a:spcAft>
+            </a:pPr>
+            <a:r>
+              <a:rPr sz="3400" b="1">
+                <a:solidFill>
+                  <a:srgbClr val="784696"/>
+                </a:solidFill>
+                <a:latin typeface="Microsoft YaHei"/>
+              </a:rPr>
+              <a:t>文学常识</a:t>
+            </a:r>
+          </a:p>
+        </p:txBody>
+      </p:sp>
+      <p:sp>
+        <p:nvSpPr>
+          <p:cNvPr id="9" name="Rounded Rectangle 8"/>
+          <p:cNvSpPr/>
+          <p:nvPr/>
+        </p:nvSpPr>
+        <p:spPr>
+          <a:xfrm>
+            <a:off x="1067104" y="1143000"/>
+            <a:ext cx="10058400" cy="3721608"/>
+          </a:xfrm>
+          <a:prstGeom prst="roundRect">
+            <a:avLst/>
+          </a:prstGeom>
+          <a:solidFill>
+            <a:srgbClr val="FFFCEB"/>
+          </a:solidFill>
+          <a:ln w="25400">
+            <a:solidFill>
+              <a:srgbClr val="825AA0"/>
+            </a:solidFill>
+          </a:ln>
+        </p:spPr>
+        <p:style>
+          <a:lnRef idx="1">
+            <a:schemeClr val="accent1"/>
+          </a:lnRef>
+          <a:fillRef idx="3">
+            <a:schemeClr val="accent1"/>
+          </a:fillRef>
+          <a:effectRef idx="2">
+            <a:schemeClr val="accent1"/>
+          </a:effectRef>
+          <a:fontRef idx="minor">
+            <a:schemeClr val="lt1"/>
+          </a:fontRef>
+        </p:style>
+        <p:txBody>
+          <a:bodyPr rtlCol="0" anchor="ctr"/>
+          <a:lstStyle/>
+          <a:p>
+            <a:pPr algn="ctr"/>
+          </a:p>
+        </p:txBody>
+      </p:sp>
+      <p:sp>
+        <p:nvSpPr>
+          <p:cNvPr id="10" name="Rectangle 9"/>
+          <p:cNvSpPr/>
+          <p:nvPr/>
+        </p:nvSpPr>
+        <p:spPr>
+          <a:xfrm>
+            <a:off x="1067104" y="1143000"/>
+            <a:ext cx="10058400" cy="384048"/>
+          </a:xfrm>
+          <a:prstGeom prst="rect">
+            <a:avLst/>
+          </a:prstGeom>
+          <a:solidFill>
+            <a:srgbClr val="784696"/>
+          </a:solidFill>
+          <a:ln>
+            <a:noFill/>
+          </a:ln>
+        </p:spPr>
+        <p:style>
+          <a:lnRef idx="1">
+            <a:schemeClr val="accent1"/>
+          </a:lnRef>
+          <a:fillRef idx="3">
+            <a:schemeClr val="accent1"/>
+          </a:fillRef>
+          <a:effectRef idx="2">
+            <a:schemeClr val="accent1"/>
+          </a:effectRef>
+          <a:fontRef idx="minor">
+            <a:schemeClr val="lt1"/>
+          </a:fontRef>
+        </p:style>
+        <p:txBody>
+          <a:bodyPr rtlCol="0" anchor="ctr"/>
+          <a:lstStyle/>
+          <a:p>
+            <a:pPr algn="ctr"/>
+          </a:p>
+        </p:txBody>
+      </p:sp>
+      <p:sp>
+        <p:nvSpPr>
+          <p:cNvPr id="11" name="TextBox 10"/>
+          <p:cNvSpPr txBox="1"/>
+          <p:nvPr/>
+        </p:nvSpPr>
+        <p:spPr>
+          <a:xfrm>
+            <a:off x="1067104" y="1179576"/>
+            <a:ext cx="10058400" cy="347472"/>
+          </a:xfrm>
+          <a:prstGeom prst="rect">
+            <a:avLst/>
+          </a:prstGeom>
+          <a:noFill/>
+        </p:spPr>
+        <p:txBody>
+          <a:bodyPr wrap="none">
+            <a:spAutoFit/>
+          </a:bodyPr>
+          <a:lstStyle/>
+          <a:p>
+            <a:pPr algn="ctr">
+              <a:spcAft>
+                <a:spcPts val="1000"/>
+              </a:spcAft>
+            </a:pPr>
+            <a:r>
+              <a:rPr sz="1800" b="1">
+                <a:solidFill>
+                  <a:srgbClr val="FFFFFF"/>
+                </a:solidFill>
+                <a:latin typeface="Microsoft YaHei"/>
+              </a:rPr>
+              <a:t>📝  课堂笔记  —  请摘抄要点</a:t>
+            </a:r>
+          </a:p>
+        </p:txBody>
+      </p:sp>
+      <p:sp>
+        <p:nvSpPr>
+          <p:cNvPr id="12" name="Rectangle 11"/>
+          <p:cNvSpPr/>
+          <p:nvPr/>
+        </p:nvSpPr>
+        <p:spPr>
+          <a:xfrm>
+            <a:off x="1570024" y="1527048"/>
+            <a:ext cx="27432" cy="3337560"/>
+          </a:xfrm>
+          <a:prstGeom prst="rect">
+            <a:avLst/>
+          </a:prstGeom>
+          <a:solidFill>
+            <a:srgbClr val="DC5050"/>
+          </a:solidFill>
+          <a:ln>
+            <a:noFill/>
+          </a:ln>
+        </p:spPr>
+        <p:style>
+          <a:lnRef idx="1">
+            <a:schemeClr val="accent1"/>
+          </a:lnRef>
+          <a:fillRef idx="3">
+            <a:schemeClr val="accent1"/>
+          </a:fillRef>
+          <a:effectRef idx="2">
+            <a:schemeClr val="accent1"/>
+          </a:effectRef>
+          <a:fontRef idx="minor">
+            <a:schemeClr val="lt1"/>
+          </a:fontRef>
+        </p:style>
+        <p:txBody>
+          <a:bodyPr rtlCol="0" anchor="ctr"/>
+          <a:lstStyle/>
+          <a:p>
+            <a:pPr algn="ctr"/>
+          </a:p>
+        </p:txBody>
+      </p:sp>
+      <p:sp>
+        <p:nvSpPr>
+          <p:cNvPr id="13" name="Rectangle 12"/>
+          <p:cNvSpPr/>
+          <p:nvPr/>
+        </p:nvSpPr>
+        <p:spPr>
+          <a:xfrm>
+            <a:off x="1417320" y="2276856"/>
+            <a:ext cx="9601200" cy="13716"/>
+          </a:xfrm>
+          <a:prstGeom prst="rect">
+            <a:avLst/>
+          </a:prstGeom>
+          <a:solidFill>
+            <a:srgbClr val="D2C8AF"/>
+          </a:solidFill>
+          <a:ln>
+            <a:noFill/>
+          </a:ln>
+        </p:spPr>
+        <p:style>
+          <a:lnRef idx="1">
+            <a:schemeClr val="accent1"/>
+          </a:lnRef>
+          <a:fillRef idx="3">
+            <a:schemeClr val="accent1"/>
+          </a:fillRef>
+          <a:effectRef idx="2">
+            <a:schemeClr val="accent1"/>
+          </a:effectRef>
+          <a:fontRef idx="minor">
+            <a:schemeClr val="lt1"/>
+          </a:fontRef>
+        </p:style>
+        <p:txBody>
+          <a:bodyPr rtlCol="0" anchor="ctr"/>
+          <a:lstStyle/>
+          <a:p>
+            <a:pPr algn="ctr"/>
+          </a:p>
+        </p:txBody>
+      </p:sp>
+      <p:sp>
+        <p:nvSpPr>
+          <p:cNvPr id="14" name="Rounded Rectangle 13"/>
+          <p:cNvSpPr/>
+          <p:nvPr/>
+        </p:nvSpPr>
+        <p:spPr>
+          <a:xfrm>
+            <a:off x="1600200" y="1627632"/>
+            <a:ext cx="1280160" cy="347472"/>
           </a:xfrm>
           <a:prstGeom prst="roundRect">
             <a:avLst/>
@@ -3573,14 +3922,14 @@
       </p:sp>
       <p:sp>
         <p:nvSpPr>
-          <p:cNvPr id="7" name="TextBox 6"/>
+          <p:cNvPr id="15" name="TextBox 14"/>
           <p:cNvSpPr txBox="1"/>
           <p:nvPr/>
         </p:nvSpPr>
         <p:spPr>
           <a:xfrm>
-            <a:off x="4953304" y="521208"/>
-            <a:ext cx="2286000" cy="384048"/>
+            <a:off x="1600200" y="1645920"/>
+            <a:ext cx="1280160" cy="310896"/>
           </a:xfrm>
           <a:prstGeom prst="rect">
             <a:avLst/>
@@ -3605,21 +3954,21 @@
                 </a:solidFill>
                 <a:latin typeface="Microsoft YaHei"/>
               </a:rPr>
-              <a:t>课时目标</a:t>
-            </a:r>
-          </a:p>
-        </p:txBody>
-      </p:sp>
-      <p:sp>
-        <p:nvSpPr>
-          <p:cNvPr id="8" name="TextBox 7"/>
+              <a:t>作者</a:t>
+            </a:r>
+          </a:p>
+        </p:txBody>
+      </p:sp>
+      <p:sp>
+        <p:nvSpPr>
+          <p:cNvPr id="16" name="TextBox 15"/>
           <p:cNvSpPr txBox="1"/>
           <p:nvPr/>
         </p:nvSpPr>
         <p:spPr>
           <a:xfrm>
-            <a:off x="1371600" y="960120"/>
-            <a:ext cx="9418320" cy="822960"/>
+            <a:off x="3017520" y="1627632"/>
+            <a:ext cx="7498079" cy="658368"/>
           </a:xfrm>
           <a:prstGeom prst="rect">
             <a:avLst/>
@@ -3627,40 +3976,83 @@
           <a:noFill/>
         </p:spPr>
         <p:txBody>
-          <a:bodyPr wrap="square">
+          <a:bodyPr wrap="none">
             <a:spAutoFit/>
           </a:bodyPr>
           <a:lstStyle/>
           <a:p>
-            <a:pPr algn="ctr">
+            <a:pPr algn="l">
               <a:spcAft>
                 <a:spcPts val="1000"/>
               </a:spcAft>
             </a:pPr>
             <a:r>
-              <a:rPr sz="3600" b="1">
+              <a:rPr sz="2100" b="0">
                 <a:solidFill>
-                  <a:srgbClr val="784696"/>
+                  <a:srgbClr val="3C2850"/>
                 </a:solidFill>
                 <a:latin typeface="Microsoft YaHei"/>
               </a:rPr>
-              <a:t>本课目标</a:t>
-            </a:r>
-          </a:p>
-        </p:txBody>
-      </p:sp>
-      <p:sp>
-        <p:nvSpPr>
-          <p:cNvPr id="9" name="Rectangle 8"/>
+              <a:t>安徒生，丹麦童话作家</a:t>
+            </a:r>
+          </a:p>
+        </p:txBody>
+      </p:sp>
+      <p:sp>
+        <p:nvSpPr>
+          <p:cNvPr id="17" name="Rectangle 16"/>
           <p:cNvSpPr/>
           <p:nvPr/>
         </p:nvSpPr>
         <p:spPr>
           <a:xfrm>
-            <a:off x="3200400" y="1600200"/>
-            <a:ext cx="5760720" cy="27432"/>
-          </a:xfrm>
-          <a:prstGeom prst="rect">
+            <a:off x="1417320" y="3081527"/>
+            <a:ext cx="9601200" cy="13716"/>
+          </a:xfrm>
+          <a:prstGeom prst="rect">
+            <a:avLst/>
+          </a:prstGeom>
+          <a:solidFill>
+            <a:srgbClr val="D2C8AF"/>
+          </a:solidFill>
+          <a:ln>
+            <a:noFill/>
+          </a:ln>
+        </p:spPr>
+        <p:style>
+          <a:lnRef idx="1">
+            <a:schemeClr val="accent1"/>
+          </a:lnRef>
+          <a:fillRef idx="3">
+            <a:schemeClr val="accent1"/>
+          </a:fillRef>
+          <a:effectRef idx="2">
+            <a:schemeClr val="accent1"/>
+          </a:effectRef>
+          <a:fontRef idx="minor">
+            <a:schemeClr val="lt1"/>
+          </a:fontRef>
+        </p:style>
+        <p:txBody>
+          <a:bodyPr rtlCol="0" anchor="ctr"/>
+          <a:lstStyle/>
+          <a:p>
+            <a:pPr algn="ctr"/>
+          </a:p>
+        </p:txBody>
+      </p:sp>
+      <p:sp>
+        <p:nvSpPr>
+          <p:cNvPr id="18" name="Rounded Rectangle 17"/>
+          <p:cNvSpPr/>
+          <p:nvPr/>
+        </p:nvSpPr>
+        <p:spPr>
+          <a:xfrm>
+            <a:off x="1600200" y="2432303"/>
+            <a:ext cx="1280160" cy="347472"/>
+          </a:xfrm>
+          <a:prstGeom prst="roundRect">
             <a:avLst/>
           </a:prstGeom>
           <a:solidFill>
@@ -3694,25 +4086,101 @@
       </p:sp>
       <p:sp>
         <p:nvSpPr>
-          <p:cNvPr id="10" name="Rounded Rectangle 9"/>
+          <p:cNvPr id="19" name="TextBox 18"/>
+          <p:cNvSpPr txBox="1"/>
+          <p:nvPr/>
+        </p:nvSpPr>
+        <p:spPr>
+          <a:xfrm>
+            <a:off x="1600200" y="2450591"/>
+            <a:ext cx="1280160" cy="310896"/>
+          </a:xfrm>
+          <a:prstGeom prst="rect">
+            <a:avLst/>
+          </a:prstGeom>
+          <a:noFill/>
+        </p:spPr>
+        <p:txBody>
+          <a:bodyPr wrap="none">
+            <a:spAutoFit/>
+          </a:bodyPr>
+          <a:lstStyle/>
+          <a:p>
+            <a:pPr algn="ctr">
+              <a:spcAft>
+                <a:spcPts val="1000"/>
+              </a:spcAft>
+            </a:pPr>
+            <a:r>
+              <a:rPr sz="1800" b="1">
+                <a:solidFill>
+                  <a:srgbClr val="3C2850"/>
+                </a:solidFill>
+                <a:latin typeface="Microsoft YaHei"/>
+              </a:rPr>
+              <a:t>文体</a:t>
+            </a:r>
+          </a:p>
+        </p:txBody>
+      </p:sp>
+      <p:sp>
+        <p:nvSpPr>
+          <p:cNvPr id="20" name="TextBox 19"/>
+          <p:cNvSpPr txBox="1"/>
+          <p:nvPr/>
+        </p:nvSpPr>
+        <p:spPr>
+          <a:xfrm>
+            <a:off x="3017520" y="2432303"/>
+            <a:ext cx="7498079" cy="658368"/>
+          </a:xfrm>
+          <a:prstGeom prst="rect">
+            <a:avLst/>
+          </a:prstGeom>
+          <a:noFill/>
+        </p:spPr>
+        <p:txBody>
+          <a:bodyPr wrap="none">
+            <a:spAutoFit/>
+          </a:bodyPr>
+          <a:lstStyle/>
+          <a:p>
+            <a:pPr algn="l">
+              <a:spcAft>
+                <a:spcPts val="1000"/>
+              </a:spcAft>
+            </a:pPr>
+            <a:r>
+              <a:rPr sz="2100" b="0">
+                <a:solidFill>
+                  <a:srgbClr val="3C2850"/>
+                </a:solidFill>
+                <a:latin typeface="Microsoft YaHei"/>
+              </a:rPr>
+              <a:t>童话——用虚构故事反映现实生活</a:t>
+            </a:r>
+          </a:p>
+        </p:txBody>
+      </p:sp>
+      <p:sp>
+        <p:nvSpPr>
+          <p:cNvPr id="21" name="Rectangle 20"/>
           <p:cNvSpPr/>
           <p:nvPr/>
         </p:nvSpPr>
         <p:spPr>
           <a:xfrm>
-            <a:off x="1295704" y="1645920"/>
-            <a:ext cx="9601200" cy="2240280"/>
-          </a:xfrm>
-          <a:prstGeom prst="roundRect">
+            <a:off x="1417320" y="3886200"/>
+            <a:ext cx="9601200" cy="13716"/>
+          </a:xfrm>
+          <a:prstGeom prst="rect">
             <a:avLst/>
           </a:prstGeom>
           <a:solidFill>
-            <a:srgbClr val="FCF8FF"/>
+            <a:srgbClr val="D2C8AF"/>
           </a:solidFill>
-          <a:ln w="19050">
-            <a:solidFill>
-              <a:srgbClr val="C8AADC"/>
-            </a:solidFill>
+          <a:ln>
+            <a:noFill/>
           </a:ln>
         </p:spPr>
         <p:style>
@@ -3739,20 +4207,20 @@
       </p:sp>
       <p:sp>
         <p:nvSpPr>
-          <p:cNvPr id="11" name="Oval 10"/>
+          <p:cNvPr id="22" name="Rounded Rectangle 21"/>
           <p:cNvSpPr/>
           <p:nvPr/>
         </p:nvSpPr>
         <p:spPr>
           <a:xfrm>
-            <a:off x="2255824" y="1828800"/>
-            <a:ext cx="384048" cy="384048"/>
-          </a:xfrm>
-          <a:prstGeom prst="ellipse">
+            <a:off x="1600200" y="3236976"/>
+            <a:ext cx="1444752" cy="347472"/>
+          </a:xfrm>
+          <a:prstGeom prst="roundRect">
             <a:avLst/>
           </a:prstGeom>
           <a:solidFill>
-            <a:srgbClr val="784696"/>
+            <a:srgbClr val="C8AADC"/>
           </a:solidFill>
           <a:ln>
             <a:noFill/>
@@ -3782,14 +4250,14 @@
       </p:sp>
       <p:sp>
         <p:nvSpPr>
-          <p:cNvPr id="12" name="TextBox 11"/>
+          <p:cNvPr id="23" name="TextBox 22"/>
           <p:cNvSpPr txBox="1"/>
           <p:nvPr/>
         </p:nvSpPr>
         <p:spPr>
           <a:xfrm>
-            <a:off x="2255824" y="1847088"/>
-            <a:ext cx="384048" cy="365760"/>
+            <a:off x="1600200" y="3255264"/>
+            <a:ext cx="1444752" cy="310896"/>
           </a:xfrm>
           <a:prstGeom prst="rect">
             <a:avLst/>
@@ -3808,27 +4276,27 @@
               </a:spcAft>
             </a:pPr>
             <a:r>
-              <a:rPr sz="1600" b="1">
+              <a:rPr sz="1800" b="1">
                 <a:solidFill>
-                  <a:srgbClr val="FFFFFF"/>
+                  <a:srgbClr val="3C2850"/>
                 </a:solidFill>
                 <a:latin typeface="Microsoft YaHei"/>
               </a:rPr>
-              <a:t>1</a:t>
-            </a:r>
-          </a:p>
-        </p:txBody>
-      </p:sp>
-      <p:sp>
-        <p:nvSpPr>
-          <p:cNvPr id="13" name="TextBox 12"/>
+              <a:t>本文特点</a:t>
+            </a:r>
+          </a:p>
+        </p:txBody>
+      </p:sp>
+      <p:sp>
+        <p:nvSpPr>
+          <p:cNvPr id="24" name="TextBox 23"/>
           <p:cNvSpPr txBox="1"/>
           <p:nvPr/>
         </p:nvSpPr>
         <p:spPr>
           <a:xfrm>
-            <a:off x="2758744" y="1810512"/>
-            <a:ext cx="7772400" cy="502920"/>
+            <a:off x="3182112" y="3236976"/>
+            <a:ext cx="7333488" cy="658368"/>
           </a:xfrm>
           <a:prstGeom prst="rect">
             <a:avLst/>
@@ -3847,33 +4315,33 @@
               </a:spcAft>
             </a:pPr>
             <a:r>
-              <a:rPr sz="2400" b="0">
+              <a:rPr sz="2100" b="0">
                 <a:solidFill>
                   <a:srgbClr val="3C2850"/>
                 </a:solidFill>
                 <a:latin typeface="Microsoft YaHei"/>
               </a:rPr>
-              <a:t>梳理童话情节，用简洁语言复述故事</a:t>
-            </a:r>
-          </a:p>
-        </p:txBody>
-      </p:sp>
-      <p:sp>
-        <p:nvSpPr>
-          <p:cNvPr id="14" name="Oval 13"/>
+              <a:t>以「新装」为线索，写一个荒唐的骗局</a:t>
+            </a:r>
+          </a:p>
+        </p:txBody>
+      </p:sp>
+      <p:sp>
+        <p:nvSpPr>
+          <p:cNvPr id="25" name="Rectangle 24"/>
           <p:cNvSpPr/>
           <p:nvPr/>
         </p:nvSpPr>
         <p:spPr>
           <a:xfrm>
-            <a:off x="2255824" y="2395728"/>
-            <a:ext cx="384048" cy="384048"/>
-          </a:xfrm>
-          <a:prstGeom prst="ellipse">
+            <a:off x="1417320" y="4690872"/>
+            <a:ext cx="9601200" cy="13716"/>
+          </a:xfrm>
+          <a:prstGeom prst="rect">
             <a:avLst/>
           </a:prstGeom>
           <a:solidFill>
-            <a:srgbClr val="784696"/>
+            <a:srgbClr val="D2C8AF"/>
           </a:solidFill>
           <a:ln>
             <a:noFill/>
@@ -3903,14 +4371,57 @@
       </p:sp>
       <p:sp>
         <p:nvSpPr>
-          <p:cNvPr id="15" name="TextBox 14"/>
+          <p:cNvPr id="26" name="Rounded Rectangle 25"/>
+          <p:cNvSpPr/>
+          <p:nvPr/>
+        </p:nvSpPr>
+        <p:spPr>
+          <a:xfrm>
+            <a:off x="1600200" y="4041648"/>
+            <a:ext cx="1444752" cy="347472"/>
+          </a:xfrm>
+          <a:prstGeom prst="roundRect">
+            <a:avLst/>
+          </a:prstGeom>
+          <a:solidFill>
+            <a:srgbClr val="C8AADC"/>
+          </a:solidFill>
+          <a:ln>
+            <a:noFill/>
+          </a:ln>
+        </p:spPr>
+        <p:style>
+          <a:lnRef idx="1">
+            <a:schemeClr val="accent1"/>
+          </a:lnRef>
+          <a:fillRef idx="3">
+            <a:schemeClr val="accent1"/>
+          </a:fillRef>
+          <a:effectRef idx="2">
+            <a:schemeClr val="accent1"/>
+          </a:effectRef>
+          <a:fontRef idx="minor">
+            <a:schemeClr val="lt1"/>
+          </a:fontRef>
+        </p:style>
+        <p:txBody>
+          <a:bodyPr rtlCol="0" anchor="ctr"/>
+          <a:lstStyle/>
+          <a:p>
+            <a:pPr algn="ctr"/>
+          </a:p>
+        </p:txBody>
+      </p:sp>
+      <p:sp>
+        <p:nvSpPr>
+          <p:cNvPr id="27" name="TextBox 26"/>
           <p:cNvSpPr txBox="1"/>
           <p:nvPr/>
         </p:nvSpPr>
         <p:spPr>
           <a:xfrm>
-            <a:off x="2255824" y="2414016"/>
-            <a:ext cx="384048" cy="365760"/>
+            <a:off x="1600200" y="4059936"/>
+            <a:ext cx="1444752" cy="310896"/>
           </a:xfrm>
           <a:prstGeom prst="rect">
             <a:avLst/>
@@ -3929,27 +4440,27 @@
               </a:spcAft>
             </a:pPr>
             <a:r>
-              <a:rPr sz="1600" b="1">
+              <a:rPr sz="1800" b="1">
                 <a:solidFill>
-                  <a:srgbClr val="FFFFFF"/>
+                  <a:srgbClr val="3C2850"/>
                 </a:solidFill>
                 <a:latin typeface="Microsoft YaHei"/>
               </a:rPr>
-              <a:t>2</a:t>
-            </a:r>
-          </a:p>
-        </p:txBody>
-      </p:sp>
-      <p:sp>
-        <p:nvSpPr>
-          <p:cNvPr id="16" name="TextBox 15"/>
+              <a:t>核心问题</a:t>
+            </a:r>
+          </a:p>
+        </p:txBody>
+      </p:sp>
+      <p:sp>
+        <p:nvSpPr>
+          <p:cNvPr id="28" name="TextBox 27"/>
           <p:cNvSpPr txBox="1"/>
           <p:nvPr/>
         </p:nvSpPr>
         <p:spPr>
           <a:xfrm>
-            <a:off x="2758744" y="2377440"/>
-            <a:ext cx="7772400" cy="502920"/>
+            <a:off x="3182112" y="4041648"/>
+            <a:ext cx="7333488" cy="658368"/>
           </a:xfrm>
           <a:prstGeom prst="rect">
             <a:avLst/>
@@ -3968,134 +4479,13 @@
               </a:spcAft>
             </a:pPr>
             <a:r>
-              <a:rPr sz="2400" b="0">
+              <a:rPr sz="2100" b="0">
                 <a:solidFill>
                   <a:srgbClr val="3C2850"/>
                 </a:solidFill>
                 <a:latin typeface="Microsoft YaHei"/>
               </a:rPr>
-              <a:t>赏析夸张、反讽等手法，理解讽刺艺术</a:t>
-            </a:r>
-          </a:p>
-        </p:txBody>
-      </p:sp>
-      <p:sp>
-        <p:nvSpPr>
-          <p:cNvPr id="17" name="Oval 16"/>
-          <p:cNvSpPr/>
-          <p:nvPr/>
-        </p:nvSpPr>
-        <p:spPr>
-          <a:xfrm>
-            <a:off x="2255824" y="2962656"/>
-            <a:ext cx="384048" cy="384048"/>
-          </a:xfrm>
-          <a:prstGeom prst="ellipse">
-            <a:avLst/>
-          </a:prstGeom>
-          <a:solidFill>
-            <a:srgbClr val="784696"/>
-          </a:solidFill>
-          <a:ln>
-            <a:noFill/>
-          </a:ln>
-        </p:spPr>
-        <p:style>
-          <a:lnRef idx="1">
-            <a:schemeClr val="accent1"/>
-          </a:lnRef>
-          <a:fillRef idx="3">
-            <a:schemeClr val="accent1"/>
-          </a:fillRef>
-          <a:effectRef idx="2">
-            <a:schemeClr val="accent1"/>
-          </a:effectRef>
-          <a:fontRef idx="minor">
-            <a:schemeClr val="lt1"/>
-          </a:fontRef>
-        </p:style>
-        <p:txBody>
-          <a:bodyPr rtlCol="0" anchor="ctr"/>
-          <a:lstStyle/>
-          <a:p>
-            <a:pPr algn="ctr"/>
-          </a:p>
-        </p:txBody>
-      </p:sp>
-      <p:sp>
-        <p:nvSpPr>
-          <p:cNvPr id="18" name="TextBox 17"/>
-          <p:cNvSpPr txBox="1"/>
-          <p:nvPr/>
-        </p:nvSpPr>
-        <p:spPr>
-          <a:xfrm>
-            <a:off x="2255824" y="2980944"/>
-            <a:ext cx="384048" cy="365760"/>
-          </a:xfrm>
-          <a:prstGeom prst="rect">
-            <a:avLst/>
-          </a:prstGeom>
-          <a:noFill/>
-        </p:spPr>
-        <p:txBody>
-          <a:bodyPr wrap="none">
-            <a:spAutoFit/>
-          </a:bodyPr>
-          <a:lstStyle/>
-          <a:p>
-            <a:pPr algn="ctr">
-              <a:spcAft>
-                <a:spcPts val="1000"/>
-              </a:spcAft>
-            </a:pPr>
-            <a:r>
-              <a:rPr sz="1600" b="1">
-                <a:solidFill>
-                  <a:srgbClr val="FFFFFF"/>
-                </a:solidFill>
-                <a:latin typeface="Microsoft YaHei"/>
-              </a:rPr>
-              <a:t>3</a:t>
-            </a:r>
-          </a:p>
-        </p:txBody>
-      </p:sp>
-      <p:sp>
-        <p:nvSpPr>
-          <p:cNvPr id="19" name="TextBox 18"/>
-          <p:cNvSpPr txBox="1"/>
-          <p:nvPr/>
-        </p:nvSpPr>
-        <p:spPr>
-          <a:xfrm>
-            <a:off x="2758744" y="2944368"/>
-            <a:ext cx="7772400" cy="502920"/>
-          </a:xfrm>
-          <a:prstGeom prst="rect">
-            <a:avLst/>
-          </a:prstGeom>
-          <a:noFill/>
-        </p:spPr>
-        <p:txBody>
-          <a:bodyPr wrap="none">
-            <a:spAutoFit/>
-          </a:bodyPr>
-          <a:lstStyle/>
-          <a:p>
-            <a:pPr algn="l">
-              <a:spcAft>
-                <a:spcPts val="1000"/>
-              </a:spcAft>
-            </a:pPr>
-            <a:r>
-              <a:rPr sz="2400" b="0">
-                <a:solidFill>
-                  <a:srgbClr val="3C2850"/>
-                </a:solidFill>
-                <a:latin typeface="Microsoft YaHei"/>
-              </a:rPr>
-              <a:t>探究「真话为何难以说出口」，树立独立判断</a:t>
+              <a:t>为什么人们都不敢说自己看不见？</a:t>
             </a:r>
           </a:p>
         </p:txBody>
@@ -4241,8 +4631,342 @@
         </p:nvSpPr>
         <p:spPr>
           <a:xfrm>
-            <a:off x="4953304" y="1005840"/>
-            <a:ext cx="2286000" cy="411480"/>
+            <a:off x="502920" y="384048"/>
+            <a:ext cx="2011680" cy="384048"/>
+          </a:xfrm>
+          <a:prstGeom prst="roundRect">
+            <a:avLst/>
+          </a:prstGeom>
+          <a:solidFill>
+            <a:srgbClr val="784696"/>
+          </a:solidFill>
+          <a:ln>
+            <a:noFill/>
+          </a:ln>
+        </p:spPr>
+        <p:style>
+          <a:lnRef idx="1">
+            <a:schemeClr val="accent1"/>
+          </a:lnRef>
+          <a:fillRef idx="3">
+            <a:schemeClr val="accent1"/>
+          </a:fillRef>
+          <a:effectRef idx="2">
+            <a:schemeClr val="accent1"/>
+          </a:effectRef>
+          <a:fontRef idx="minor">
+            <a:schemeClr val="lt1"/>
+          </a:fontRef>
+        </p:style>
+        <p:txBody>
+          <a:bodyPr rtlCol="0" anchor="ctr"/>
+          <a:lstStyle/>
+          <a:p>
+            <a:pPr algn="ctr"/>
+          </a:p>
+        </p:txBody>
+      </p:sp>
+      <p:sp>
+        <p:nvSpPr>
+          <p:cNvPr id="7" name="TextBox 6"/>
+          <p:cNvSpPr txBox="1"/>
+          <p:nvPr/>
+        </p:nvSpPr>
+        <p:spPr>
+          <a:xfrm>
+            <a:off x="502920" y="402336"/>
+            <a:ext cx="2011680" cy="347472"/>
+          </a:xfrm>
+          <a:prstGeom prst="rect">
+            <a:avLst/>
+          </a:prstGeom>
+          <a:noFill/>
+        </p:spPr>
+        <p:txBody>
+          <a:bodyPr wrap="none">
+            <a:spAutoFit/>
+          </a:bodyPr>
+          <a:lstStyle/>
+          <a:p>
+            <a:pPr algn="ctr">
+              <a:spcAft>
+                <a:spcPts val="1000"/>
+              </a:spcAft>
+            </a:pPr>
+            <a:r>
+              <a:rPr sz="1600" b="1">
+                <a:solidFill>
+                  <a:srgbClr val="FFFFFF"/>
+                </a:solidFill>
+                <a:latin typeface="Microsoft YaHei"/>
+              </a:rPr>
+              <a:t>情节笔记</a:t>
+            </a:r>
+          </a:p>
+        </p:txBody>
+      </p:sp>
+      <p:sp>
+        <p:nvSpPr>
+          <p:cNvPr id="8" name="TextBox 7"/>
+          <p:cNvSpPr txBox="1"/>
+          <p:nvPr/>
+        </p:nvSpPr>
+        <p:spPr>
+          <a:xfrm>
+            <a:off x="1371600" y="384048"/>
+            <a:ext cx="9418320" cy="822960"/>
+          </a:xfrm>
+          <a:prstGeom prst="rect">
+            <a:avLst/>
+          </a:prstGeom>
+          <a:noFill/>
+        </p:spPr>
+        <p:txBody>
+          <a:bodyPr wrap="square">
+            <a:spAutoFit/>
+          </a:bodyPr>
+          <a:lstStyle/>
+          <a:p>
+            <a:pPr algn="ctr">
+              <a:spcAft>
+                <a:spcPts val="1000"/>
+              </a:spcAft>
+            </a:pPr>
+            <a:r>
+              <a:rPr sz="3400" b="1">
+                <a:solidFill>
+                  <a:srgbClr val="784696"/>
+                </a:solidFill>
+                <a:latin typeface="Microsoft YaHei"/>
+              </a:rPr>
+              <a:t>情节结构</a:t>
+            </a:r>
+          </a:p>
+        </p:txBody>
+      </p:sp>
+      <p:sp>
+        <p:nvSpPr>
+          <p:cNvPr id="9" name="Rounded Rectangle 8"/>
+          <p:cNvSpPr/>
+          <p:nvPr/>
+        </p:nvSpPr>
+        <p:spPr>
+          <a:xfrm>
+            <a:off x="1067104" y="1143000"/>
+            <a:ext cx="10058400" cy="3721608"/>
+          </a:xfrm>
+          <a:prstGeom prst="roundRect">
+            <a:avLst/>
+          </a:prstGeom>
+          <a:solidFill>
+            <a:srgbClr val="FFFCEB"/>
+          </a:solidFill>
+          <a:ln w="25400">
+            <a:solidFill>
+              <a:srgbClr val="825AA0"/>
+            </a:solidFill>
+          </a:ln>
+        </p:spPr>
+        <p:style>
+          <a:lnRef idx="1">
+            <a:schemeClr val="accent1"/>
+          </a:lnRef>
+          <a:fillRef idx="3">
+            <a:schemeClr val="accent1"/>
+          </a:fillRef>
+          <a:effectRef idx="2">
+            <a:schemeClr val="accent1"/>
+          </a:effectRef>
+          <a:fontRef idx="minor">
+            <a:schemeClr val="lt1"/>
+          </a:fontRef>
+        </p:style>
+        <p:txBody>
+          <a:bodyPr rtlCol="0" anchor="ctr"/>
+          <a:lstStyle/>
+          <a:p>
+            <a:pPr algn="ctr"/>
+          </a:p>
+        </p:txBody>
+      </p:sp>
+      <p:sp>
+        <p:nvSpPr>
+          <p:cNvPr id="10" name="Rectangle 9"/>
+          <p:cNvSpPr/>
+          <p:nvPr/>
+        </p:nvSpPr>
+        <p:spPr>
+          <a:xfrm>
+            <a:off x="1067104" y="1143000"/>
+            <a:ext cx="10058400" cy="384048"/>
+          </a:xfrm>
+          <a:prstGeom prst="rect">
+            <a:avLst/>
+          </a:prstGeom>
+          <a:solidFill>
+            <a:srgbClr val="784696"/>
+          </a:solidFill>
+          <a:ln>
+            <a:noFill/>
+          </a:ln>
+        </p:spPr>
+        <p:style>
+          <a:lnRef idx="1">
+            <a:schemeClr val="accent1"/>
+          </a:lnRef>
+          <a:fillRef idx="3">
+            <a:schemeClr val="accent1"/>
+          </a:fillRef>
+          <a:effectRef idx="2">
+            <a:schemeClr val="accent1"/>
+          </a:effectRef>
+          <a:fontRef idx="minor">
+            <a:schemeClr val="lt1"/>
+          </a:fontRef>
+        </p:style>
+        <p:txBody>
+          <a:bodyPr rtlCol="0" anchor="ctr"/>
+          <a:lstStyle/>
+          <a:p>
+            <a:pPr algn="ctr"/>
+          </a:p>
+        </p:txBody>
+      </p:sp>
+      <p:sp>
+        <p:nvSpPr>
+          <p:cNvPr id="11" name="TextBox 10"/>
+          <p:cNvSpPr txBox="1"/>
+          <p:nvPr/>
+        </p:nvSpPr>
+        <p:spPr>
+          <a:xfrm>
+            <a:off x="1067104" y="1179576"/>
+            <a:ext cx="10058400" cy="347472"/>
+          </a:xfrm>
+          <a:prstGeom prst="rect">
+            <a:avLst/>
+          </a:prstGeom>
+          <a:noFill/>
+        </p:spPr>
+        <p:txBody>
+          <a:bodyPr wrap="none">
+            <a:spAutoFit/>
+          </a:bodyPr>
+          <a:lstStyle/>
+          <a:p>
+            <a:pPr algn="ctr">
+              <a:spcAft>
+                <a:spcPts val="1000"/>
+              </a:spcAft>
+            </a:pPr>
+            <a:r>
+              <a:rPr sz="1800" b="1">
+                <a:solidFill>
+                  <a:srgbClr val="FFFFFF"/>
+                </a:solidFill>
+                <a:latin typeface="Microsoft YaHei"/>
+              </a:rPr>
+              <a:t>📝  课堂笔记  —  请摘抄要点</a:t>
+            </a:r>
+          </a:p>
+        </p:txBody>
+      </p:sp>
+      <p:sp>
+        <p:nvSpPr>
+          <p:cNvPr id="12" name="Rectangle 11"/>
+          <p:cNvSpPr/>
+          <p:nvPr/>
+        </p:nvSpPr>
+        <p:spPr>
+          <a:xfrm>
+            <a:off x="1570024" y="1527048"/>
+            <a:ext cx="27432" cy="3337560"/>
+          </a:xfrm>
+          <a:prstGeom prst="rect">
+            <a:avLst/>
+          </a:prstGeom>
+          <a:solidFill>
+            <a:srgbClr val="DC5050"/>
+          </a:solidFill>
+          <a:ln>
+            <a:noFill/>
+          </a:ln>
+        </p:spPr>
+        <p:style>
+          <a:lnRef idx="1">
+            <a:schemeClr val="accent1"/>
+          </a:lnRef>
+          <a:fillRef idx="3">
+            <a:schemeClr val="accent1"/>
+          </a:fillRef>
+          <a:effectRef idx="2">
+            <a:schemeClr val="accent1"/>
+          </a:effectRef>
+          <a:fontRef idx="minor">
+            <a:schemeClr val="lt1"/>
+          </a:fontRef>
+        </p:style>
+        <p:txBody>
+          <a:bodyPr rtlCol="0" anchor="ctr"/>
+          <a:lstStyle/>
+          <a:p>
+            <a:pPr algn="ctr"/>
+          </a:p>
+        </p:txBody>
+      </p:sp>
+      <p:sp>
+        <p:nvSpPr>
+          <p:cNvPr id="13" name="Rectangle 12"/>
+          <p:cNvSpPr/>
+          <p:nvPr/>
+        </p:nvSpPr>
+        <p:spPr>
+          <a:xfrm>
+            <a:off x="1417320" y="2276856"/>
+            <a:ext cx="9601200" cy="13716"/>
+          </a:xfrm>
+          <a:prstGeom prst="rect">
+            <a:avLst/>
+          </a:prstGeom>
+          <a:solidFill>
+            <a:srgbClr val="D2C8AF"/>
+          </a:solidFill>
+          <a:ln>
+            <a:noFill/>
+          </a:ln>
+        </p:spPr>
+        <p:style>
+          <a:lnRef idx="1">
+            <a:schemeClr val="accent1"/>
+          </a:lnRef>
+          <a:fillRef idx="3">
+            <a:schemeClr val="accent1"/>
+          </a:fillRef>
+          <a:effectRef idx="2">
+            <a:schemeClr val="accent1"/>
+          </a:effectRef>
+          <a:fontRef idx="minor">
+            <a:schemeClr val="lt1"/>
+          </a:fontRef>
+        </p:style>
+        <p:txBody>
+          <a:bodyPr rtlCol="0" anchor="ctr"/>
+          <a:lstStyle/>
+          <a:p>
+            <a:pPr algn="ctr"/>
+          </a:p>
+        </p:txBody>
+      </p:sp>
+      <p:sp>
+        <p:nvSpPr>
+          <p:cNvPr id="14" name="Rounded Rectangle 13"/>
+          <p:cNvSpPr/>
+          <p:nvPr/>
+        </p:nvSpPr>
+        <p:spPr>
+          <a:xfrm>
+            <a:off x="1600200" y="1627632"/>
+            <a:ext cx="1280160" cy="347472"/>
           </a:xfrm>
           <a:prstGeom prst="roundRect">
             <a:avLst/>
@@ -4278,14 +5002,14 @@
       </p:sp>
       <p:sp>
         <p:nvSpPr>
-          <p:cNvPr id="7" name="TextBox 6"/>
+          <p:cNvPr id="15" name="TextBox 14"/>
           <p:cNvSpPr txBox="1"/>
           <p:nvPr/>
         </p:nvSpPr>
         <p:spPr>
           <a:xfrm>
-            <a:off x="4953304" y="1024128"/>
-            <a:ext cx="2286000" cy="384048"/>
+            <a:off x="1600200" y="1645920"/>
+            <a:ext cx="1280160" cy="310896"/>
           </a:xfrm>
           <a:prstGeom prst="rect">
             <a:avLst/>
@@ -4310,21 +5034,21 @@
                 </a:solidFill>
                 <a:latin typeface="Microsoft YaHei"/>
               </a:rPr>
-              <a:t>想一想</a:t>
-            </a:r>
-          </a:p>
-        </p:txBody>
-      </p:sp>
-      <p:sp>
-        <p:nvSpPr>
-          <p:cNvPr id="8" name="TextBox 7"/>
+              <a:t>开端</a:t>
+            </a:r>
+          </a:p>
+        </p:txBody>
+      </p:sp>
+      <p:sp>
+        <p:nvSpPr>
+          <p:cNvPr id="16" name="TextBox 15"/>
           <p:cNvSpPr txBox="1"/>
           <p:nvPr/>
         </p:nvSpPr>
         <p:spPr>
           <a:xfrm>
-            <a:off x="1371600" y="1600200"/>
-            <a:ext cx="9418320" cy="822960"/>
+            <a:off x="3017520" y="1627632"/>
+            <a:ext cx="7498079" cy="658368"/>
           </a:xfrm>
           <a:prstGeom prst="rect">
             <a:avLst/>
@@ -4332,41 +5056,83 @@
           <a:noFill/>
         </p:spPr>
         <p:txBody>
-          <a:bodyPr wrap="square">
+          <a:bodyPr wrap="none">
             <a:spAutoFit/>
           </a:bodyPr>
           <a:lstStyle/>
           <a:p>
-            <a:pPr algn="ctr">
+            <a:pPr algn="l">
               <a:spcAft>
                 <a:spcPts val="1000"/>
               </a:spcAft>
             </a:pPr>
             <a:r>
-              <a:rPr sz="3200" b="1">
+              <a:rPr sz="2100" b="0">
                 <a:solidFill>
-                  <a:srgbClr val="784696"/>
+                  <a:srgbClr val="3C2850"/>
                 </a:solidFill>
                 <a:latin typeface="Microsoft YaHei"/>
               </a:rPr>
-              <a:t>爱新衣的皇帝、织空布的骗子
-不敢说真话的大人、说真话的孩子</a:t>
-            </a:r>
-          </a:p>
-        </p:txBody>
-      </p:sp>
-      <p:sp>
-        <p:nvSpPr>
-          <p:cNvPr id="9" name="Rectangle 8"/>
+              <a:t>两个骗子说能织出只有聪明人才能看见的衣服</a:t>
+            </a:r>
+          </a:p>
+        </p:txBody>
+      </p:sp>
+      <p:sp>
+        <p:nvSpPr>
+          <p:cNvPr id="17" name="Rectangle 16"/>
           <p:cNvSpPr/>
           <p:nvPr/>
         </p:nvSpPr>
         <p:spPr>
           <a:xfrm>
-            <a:off x="3200400" y="4389120"/>
-            <a:ext cx="5760720" cy="27432"/>
-          </a:xfrm>
-          <a:prstGeom prst="rect">
+            <a:off x="1417320" y="3081527"/>
+            <a:ext cx="9601200" cy="13716"/>
+          </a:xfrm>
+          <a:prstGeom prst="rect">
+            <a:avLst/>
+          </a:prstGeom>
+          <a:solidFill>
+            <a:srgbClr val="D2C8AF"/>
+          </a:solidFill>
+          <a:ln>
+            <a:noFill/>
+          </a:ln>
+        </p:spPr>
+        <p:style>
+          <a:lnRef idx="1">
+            <a:schemeClr val="accent1"/>
+          </a:lnRef>
+          <a:fillRef idx="3">
+            <a:schemeClr val="accent1"/>
+          </a:fillRef>
+          <a:effectRef idx="2">
+            <a:schemeClr val="accent1"/>
+          </a:effectRef>
+          <a:fontRef idx="minor">
+            <a:schemeClr val="lt1"/>
+          </a:fontRef>
+        </p:style>
+        <p:txBody>
+          <a:bodyPr rtlCol="0" anchor="ctr"/>
+          <a:lstStyle/>
+          <a:p>
+            <a:pPr algn="ctr"/>
+          </a:p>
+        </p:txBody>
+      </p:sp>
+      <p:sp>
+        <p:nvSpPr>
+          <p:cNvPr id="18" name="Rounded Rectangle 17"/>
+          <p:cNvSpPr/>
+          <p:nvPr/>
+        </p:nvSpPr>
+        <p:spPr>
+          <a:xfrm>
+            <a:off x="1600200" y="2432303"/>
+            <a:ext cx="1280160" cy="347472"/>
+          </a:xfrm>
+          <a:prstGeom prst="roundRect">
             <a:avLst/>
           </a:prstGeom>
           <a:solidFill>
@@ -4400,14 +5166,14 @@
       </p:sp>
       <p:sp>
         <p:nvSpPr>
-          <p:cNvPr id="10" name="TextBox 9"/>
+          <p:cNvPr id="19" name="TextBox 18"/>
           <p:cNvSpPr txBox="1"/>
           <p:nvPr/>
         </p:nvSpPr>
         <p:spPr>
           <a:xfrm>
-            <a:off x="1828800" y="4663440"/>
-            <a:ext cx="8503920" cy="914400"/>
+            <a:off x="1600200" y="2450591"/>
+            <a:ext cx="1280160" cy="310896"/>
           </a:xfrm>
           <a:prstGeom prst="rect">
             <a:avLst/>
@@ -4426,13 +5192,380 @@
               </a:spcAft>
             </a:pPr>
             <a:r>
-              <a:rPr sz="2200" b="0">
+              <a:rPr sz="1800" b="1">
                 <a:solidFill>
-                  <a:srgbClr val="784696"/>
+                  <a:srgbClr val="3C2850"/>
                 </a:solidFill>
                 <a:latin typeface="Microsoft YaHei"/>
               </a:rPr>
-              <a:t>闹剧背后，藏着怎样的真相？</a:t>
+              <a:t>发展</a:t>
+            </a:r>
+          </a:p>
+        </p:txBody>
+      </p:sp>
+      <p:sp>
+        <p:nvSpPr>
+          <p:cNvPr id="20" name="TextBox 19"/>
+          <p:cNvSpPr txBox="1"/>
+          <p:nvPr/>
+        </p:nvSpPr>
+        <p:spPr>
+          <a:xfrm>
+            <a:off x="3017520" y="2432303"/>
+            <a:ext cx="7498079" cy="658368"/>
+          </a:xfrm>
+          <a:prstGeom prst="rect">
+            <a:avLst/>
+          </a:prstGeom>
+          <a:noFill/>
+        </p:spPr>
+        <p:txBody>
+          <a:bodyPr wrap="none">
+            <a:spAutoFit/>
+          </a:bodyPr>
+          <a:lstStyle/>
+          <a:p>
+            <a:pPr algn="l">
+              <a:spcAft>
+                <a:spcPts val="1000"/>
+              </a:spcAft>
+            </a:pPr>
+            <a:r>
+              <a:rPr sz="2100" b="0">
+                <a:solidFill>
+                  <a:srgbClr val="3C2850"/>
+                </a:solidFill>
+                <a:latin typeface="Microsoft YaHei"/>
+              </a:rPr>
+              <a:t>皇帝、老大臣、官员先后「看布」，都不敢说真话</a:t>
+            </a:r>
+          </a:p>
+        </p:txBody>
+      </p:sp>
+      <p:sp>
+        <p:nvSpPr>
+          <p:cNvPr id="21" name="Rectangle 20"/>
+          <p:cNvSpPr/>
+          <p:nvPr/>
+        </p:nvSpPr>
+        <p:spPr>
+          <a:xfrm>
+            <a:off x="1417320" y="3886200"/>
+            <a:ext cx="9601200" cy="13716"/>
+          </a:xfrm>
+          <a:prstGeom prst="rect">
+            <a:avLst/>
+          </a:prstGeom>
+          <a:solidFill>
+            <a:srgbClr val="D2C8AF"/>
+          </a:solidFill>
+          <a:ln>
+            <a:noFill/>
+          </a:ln>
+        </p:spPr>
+        <p:style>
+          <a:lnRef idx="1">
+            <a:schemeClr val="accent1"/>
+          </a:lnRef>
+          <a:fillRef idx="3">
+            <a:schemeClr val="accent1"/>
+          </a:fillRef>
+          <a:effectRef idx="2">
+            <a:schemeClr val="accent1"/>
+          </a:effectRef>
+          <a:fontRef idx="minor">
+            <a:schemeClr val="lt1"/>
+          </a:fontRef>
+        </p:style>
+        <p:txBody>
+          <a:bodyPr rtlCol="0" anchor="ctr"/>
+          <a:lstStyle/>
+          <a:p>
+            <a:pPr algn="ctr"/>
+          </a:p>
+        </p:txBody>
+      </p:sp>
+      <p:sp>
+        <p:nvSpPr>
+          <p:cNvPr id="22" name="Rounded Rectangle 21"/>
+          <p:cNvSpPr/>
+          <p:nvPr/>
+        </p:nvSpPr>
+        <p:spPr>
+          <a:xfrm>
+            <a:off x="1600200" y="3236976"/>
+            <a:ext cx="1280160" cy="347472"/>
+          </a:xfrm>
+          <a:prstGeom prst="roundRect">
+            <a:avLst/>
+          </a:prstGeom>
+          <a:solidFill>
+            <a:srgbClr val="C8AADC"/>
+          </a:solidFill>
+          <a:ln>
+            <a:noFill/>
+          </a:ln>
+        </p:spPr>
+        <p:style>
+          <a:lnRef idx="1">
+            <a:schemeClr val="accent1"/>
+          </a:lnRef>
+          <a:fillRef idx="3">
+            <a:schemeClr val="accent1"/>
+          </a:fillRef>
+          <a:effectRef idx="2">
+            <a:schemeClr val="accent1"/>
+          </a:effectRef>
+          <a:fontRef idx="minor">
+            <a:schemeClr val="lt1"/>
+          </a:fontRef>
+        </p:style>
+        <p:txBody>
+          <a:bodyPr rtlCol="0" anchor="ctr"/>
+          <a:lstStyle/>
+          <a:p>
+            <a:pPr algn="ctr"/>
+          </a:p>
+        </p:txBody>
+      </p:sp>
+      <p:sp>
+        <p:nvSpPr>
+          <p:cNvPr id="23" name="TextBox 22"/>
+          <p:cNvSpPr txBox="1"/>
+          <p:nvPr/>
+        </p:nvSpPr>
+        <p:spPr>
+          <a:xfrm>
+            <a:off x="1600200" y="3255264"/>
+            <a:ext cx="1280160" cy="310896"/>
+          </a:xfrm>
+          <a:prstGeom prst="rect">
+            <a:avLst/>
+          </a:prstGeom>
+          <a:noFill/>
+        </p:spPr>
+        <p:txBody>
+          <a:bodyPr wrap="none">
+            <a:spAutoFit/>
+          </a:bodyPr>
+          <a:lstStyle/>
+          <a:p>
+            <a:pPr algn="ctr">
+              <a:spcAft>
+                <a:spcPts val="1000"/>
+              </a:spcAft>
+            </a:pPr>
+            <a:r>
+              <a:rPr sz="1800" b="1">
+                <a:solidFill>
+                  <a:srgbClr val="3C2850"/>
+                </a:solidFill>
+                <a:latin typeface="Microsoft YaHei"/>
+              </a:rPr>
+              <a:t>高潮</a:t>
+            </a:r>
+          </a:p>
+        </p:txBody>
+      </p:sp>
+      <p:sp>
+        <p:nvSpPr>
+          <p:cNvPr id="24" name="TextBox 23"/>
+          <p:cNvSpPr txBox="1"/>
+          <p:nvPr/>
+        </p:nvSpPr>
+        <p:spPr>
+          <a:xfrm>
+            <a:off x="3017520" y="3236976"/>
+            <a:ext cx="7498079" cy="658368"/>
+          </a:xfrm>
+          <a:prstGeom prst="rect">
+            <a:avLst/>
+          </a:prstGeom>
+          <a:noFill/>
+        </p:spPr>
+        <p:txBody>
+          <a:bodyPr wrap="none">
+            <a:spAutoFit/>
+          </a:bodyPr>
+          <a:lstStyle/>
+          <a:p>
+            <a:pPr algn="l">
+              <a:spcAft>
+                <a:spcPts val="1000"/>
+              </a:spcAft>
+            </a:pPr>
+            <a:r>
+              <a:rPr sz="2100" b="0">
+                <a:solidFill>
+                  <a:srgbClr val="3C2850"/>
+                </a:solidFill>
+                <a:latin typeface="Microsoft YaHei"/>
+              </a:rPr>
+              <a:t>皇帝穿上「新装」游行，百姓假装看见</a:t>
+            </a:r>
+          </a:p>
+        </p:txBody>
+      </p:sp>
+      <p:sp>
+        <p:nvSpPr>
+          <p:cNvPr id="25" name="Rectangle 24"/>
+          <p:cNvSpPr/>
+          <p:nvPr/>
+        </p:nvSpPr>
+        <p:spPr>
+          <a:xfrm>
+            <a:off x="1417320" y="4690872"/>
+            <a:ext cx="9601200" cy="13716"/>
+          </a:xfrm>
+          <a:prstGeom prst="rect">
+            <a:avLst/>
+          </a:prstGeom>
+          <a:solidFill>
+            <a:srgbClr val="D2C8AF"/>
+          </a:solidFill>
+          <a:ln>
+            <a:noFill/>
+          </a:ln>
+        </p:spPr>
+        <p:style>
+          <a:lnRef idx="1">
+            <a:schemeClr val="accent1"/>
+          </a:lnRef>
+          <a:fillRef idx="3">
+            <a:schemeClr val="accent1"/>
+          </a:fillRef>
+          <a:effectRef idx="2">
+            <a:schemeClr val="accent1"/>
+          </a:effectRef>
+          <a:fontRef idx="minor">
+            <a:schemeClr val="lt1"/>
+          </a:fontRef>
+        </p:style>
+        <p:txBody>
+          <a:bodyPr rtlCol="0" anchor="ctr"/>
+          <a:lstStyle/>
+          <a:p>
+            <a:pPr algn="ctr"/>
+          </a:p>
+        </p:txBody>
+      </p:sp>
+      <p:sp>
+        <p:nvSpPr>
+          <p:cNvPr id="26" name="Rounded Rectangle 25"/>
+          <p:cNvSpPr/>
+          <p:nvPr/>
+        </p:nvSpPr>
+        <p:spPr>
+          <a:xfrm>
+            <a:off x="1600200" y="4041648"/>
+            <a:ext cx="1280160" cy="347472"/>
+          </a:xfrm>
+          <a:prstGeom prst="roundRect">
+            <a:avLst/>
+          </a:prstGeom>
+          <a:solidFill>
+            <a:srgbClr val="C8AADC"/>
+          </a:solidFill>
+          <a:ln>
+            <a:noFill/>
+          </a:ln>
+        </p:spPr>
+        <p:style>
+          <a:lnRef idx="1">
+            <a:schemeClr val="accent1"/>
+          </a:lnRef>
+          <a:fillRef idx="3">
+            <a:schemeClr val="accent1"/>
+          </a:fillRef>
+          <a:effectRef idx="2">
+            <a:schemeClr val="accent1"/>
+          </a:effectRef>
+          <a:fontRef idx="minor">
+            <a:schemeClr val="lt1"/>
+          </a:fontRef>
+        </p:style>
+        <p:txBody>
+          <a:bodyPr rtlCol="0" anchor="ctr"/>
+          <a:lstStyle/>
+          <a:p>
+            <a:pPr algn="ctr"/>
+          </a:p>
+        </p:txBody>
+      </p:sp>
+      <p:sp>
+        <p:nvSpPr>
+          <p:cNvPr id="27" name="TextBox 26"/>
+          <p:cNvSpPr txBox="1"/>
+          <p:nvPr/>
+        </p:nvSpPr>
+        <p:spPr>
+          <a:xfrm>
+            <a:off x="1600200" y="4059936"/>
+            <a:ext cx="1280160" cy="310896"/>
+          </a:xfrm>
+          <a:prstGeom prst="rect">
+            <a:avLst/>
+          </a:prstGeom>
+          <a:noFill/>
+        </p:spPr>
+        <p:txBody>
+          <a:bodyPr wrap="none">
+            <a:spAutoFit/>
+          </a:bodyPr>
+          <a:lstStyle/>
+          <a:p>
+            <a:pPr algn="ctr">
+              <a:spcAft>
+                <a:spcPts val="1000"/>
+              </a:spcAft>
+            </a:pPr>
+            <a:r>
+              <a:rPr sz="1800" b="1">
+                <a:solidFill>
+                  <a:srgbClr val="3C2850"/>
+                </a:solidFill>
+                <a:latin typeface="Microsoft YaHei"/>
+              </a:rPr>
+              <a:t>结局</a:t>
+            </a:r>
+          </a:p>
+        </p:txBody>
+      </p:sp>
+      <p:sp>
+        <p:nvSpPr>
+          <p:cNvPr id="28" name="TextBox 27"/>
+          <p:cNvSpPr txBox="1"/>
+          <p:nvPr/>
+        </p:nvSpPr>
+        <p:spPr>
+          <a:xfrm>
+            <a:off x="3017520" y="4041648"/>
+            <a:ext cx="7498079" cy="658368"/>
+          </a:xfrm>
+          <a:prstGeom prst="rect">
+            <a:avLst/>
+          </a:prstGeom>
+          <a:noFill/>
+        </p:spPr>
+        <p:txBody>
+          <a:bodyPr wrap="none">
+            <a:spAutoFit/>
+          </a:bodyPr>
+          <a:lstStyle/>
+          <a:p>
+            <a:pPr algn="l">
+              <a:spcAft>
+                <a:spcPts val="1000"/>
+              </a:spcAft>
+            </a:pPr>
+            <a:r>
+              <a:rPr sz="2100" b="0">
+                <a:solidFill>
+                  <a:srgbClr val="3C2850"/>
+                </a:solidFill>
+                <a:latin typeface="Microsoft YaHei"/>
+              </a:rPr>
+              <a:t>小孩子说「他没穿衣服」，百姓跟着说，皇帝仍装模作样</a:t>
             </a:r>
           </a:p>
         </p:txBody>
@@ -4578,8 +5711,342 @@
         </p:nvSpPr>
         <p:spPr>
           <a:xfrm>
-            <a:off x="4953304" y="502920"/>
-            <a:ext cx="2286000" cy="411480"/>
+            <a:off x="502920" y="384048"/>
+            <a:ext cx="2011680" cy="384048"/>
+          </a:xfrm>
+          <a:prstGeom prst="roundRect">
+            <a:avLst/>
+          </a:prstGeom>
+          <a:solidFill>
+            <a:srgbClr val="784696"/>
+          </a:solidFill>
+          <a:ln>
+            <a:noFill/>
+          </a:ln>
+        </p:spPr>
+        <p:style>
+          <a:lnRef idx="1">
+            <a:schemeClr val="accent1"/>
+          </a:lnRef>
+          <a:fillRef idx="3">
+            <a:schemeClr val="accent1"/>
+          </a:fillRef>
+          <a:effectRef idx="2">
+            <a:schemeClr val="accent1"/>
+          </a:effectRef>
+          <a:fontRef idx="minor">
+            <a:schemeClr val="lt1"/>
+          </a:fontRef>
+        </p:style>
+        <p:txBody>
+          <a:bodyPr rtlCol="0" anchor="ctr"/>
+          <a:lstStyle/>
+          <a:p>
+            <a:pPr algn="ctr"/>
+          </a:p>
+        </p:txBody>
+      </p:sp>
+      <p:sp>
+        <p:nvSpPr>
+          <p:cNvPr id="7" name="TextBox 6"/>
+          <p:cNvSpPr txBox="1"/>
+          <p:nvPr/>
+        </p:nvSpPr>
+        <p:spPr>
+          <a:xfrm>
+            <a:off x="502920" y="402336"/>
+            <a:ext cx="2011680" cy="347472"/>
+          </a:xfrm>
+          <a:prstGeom prst="rect">
+            <a:avLst/>
+          </a:prstGeom>
+          <a:noFill/>
+        </p:spPr>
+        <p:txBody>
+          <a:bodyPr wrap="none">
+            <a:spAutoFit/>
+          </a:bodyPr>
+          <a:lstStyle/>
+          <a:p>
+            <a:pPr algn="ctr">
+              <a:spcAft>
+                <a:spcPts val="1000"/>
+              </a:spcAft>
+            </a:pPr>
+            <a:r>
+              <a:rPr sz="1600" b="1">
+                <a:solidFill>
+                  <a:srgbClr val="FFFFFF"/>
+                </a:solidFill>
+                <a:latin typeface="Microsoft YaHei"/>
+              </a:rPr>
+              <a:t>手法笔记</a:t>
+            </a:r>
+          </a:p>
+        </p:txBody>
+      </p:sp>
+      <p:sp>
+        <p:nvSpPr>
+          <p:cNvPr id="8" name="TextBox 7"/>
+          <p:cNvSpPr txBox="1"/>
+          <p:nvPr/>
+        </p:nvSpPr>
+        <p:spPr>
+          <a:xfrm>
+            <a:off x="1371600" y="384048"/>
+            <a:ext cx="9418320" cy="822960"/>
+          </a:xfrm>
+          <a:prstGeom prst="rect">
+            <a:avLst/>
+          </a:prstGeom>
+          <a:noFill/>
+        </p:spPr>
+        <p:txBody>
+          <a:bodyPr wrap="square">
+            <a:spAutoFit/>
+          </a:bodyPr>
+          <a:lstStyle/>
+          <a:p>
+            <a:pPr algn="ctr">
+              <a:spcAft>
+                <a:spcPts val="1000"/>
+              </a:spcAft>
+            </a:pPr>
+            <a:r>
+              <a:rPr sz="3400" b="1">
+                <a:solidFill>
+                  <a:srgbClr val="784696"/>
+                </a:solidFill>
+                <a:latin typeface="Microsoft YaHei"/>
+              </a:rPr>
+              <a:t>艺术手法</a:t>
+            </a:r>
+          </a:p>
+        </p:txBody>
+      </p:sp>
+      <p:sp>
+        <p:nvSpPr>
+          <p:cNvPr id="9" name="Rounded Rectangle 8"/>
+          <p:cNvSpPr/>
+          <p:nvPr/>
+        </p:nvSpPr>
+        <p:spPr>
+          <a:xfrm>
+            <a:off x="1067104" y="1143000"/>
+            <a:ext cx="10058400" cy="3721608"/>
+          </a:xfrm>
+          <a:prstGeom prst="roundRect">
+            <a:avLst/>
+          </a:prstGeom>
+          <a:solidFill>
+            <a:srgbClr val="FFFCEB"/>
+          </a:solidFill>
+          <a:ln w="25400">
+            <a:solidFill>
+              <a:srgbClr val="825AA0"/>
+            </a:solidFill>
+          </a:ln>
+        </p:spPr>
+        <p:style>
+          <a:lnRef idx="1">
+            <a:schemeClr val="accent1"/>
+          </a:lnRef>
+          <a:fillRef idx="3">
+            <a:schemeClr val="accent1"/>
+          </a:fillRef>
+          <a:effectRef idx="2">
+            <a:schemeClr val="accent1"/>
+          </a:effectRef>
+          <a:fontRef idx="minor">
+            <a:schemeClr val="lt1"/>
+          </a:fontRef>
+        </p:style>
+        <p:txBody>
+          <a:bodyPr rtlCol="0" anchor="ctr"/>
+          <a:lstStyle/>
+          <a:p>
+            <a:pPr algn="ctr"/>
+          </a:p>
+        </p:txBody>
+      </p:sp>
+      <p:sp>
+        <p:nvSpPr>
+          <p:cNvPr id="10" name="Rectangle 9"/>
+          <p:cNvSpPr/>
+          <p:nvPr/>
+        </p:nvSpPr>
+        <p:spPr>
+          <a:xfrm>
+            <a:off x="1067104" y="1143000"/>
+            <a:ext cx="10058400" cy="384048"/>
+          </a:xfrm>
+          <a:prstGeom prst="rect">
+            <a:avLst/>
+          </a:prstGeom>
+          <a:solidFill>
+            <a:srgbClr val="784696"/>
+          </a:solidFill>
+          <a:ln>
+            <a:noFill/>
+          </a:ln>
+        </p:spPr>
+        <p:style>
+          <a:lnRef idx="1">
+            <a:schemeClr val="accent1"/>
+          </a:lnRef>
+          <a:fillRef idx="3">
+            <a:schemeClr val="accent1"/>
+          </a:fillRef>
+          <a:effectRef idx="2">
+            <a:schemeClr val="accent1"/>
+          </a:effectRef>
+          <a:fontRef idx="minor">
+            <a:schemeClr val="lt1"/>
+          </a:fontRef>
+        </p:style>
+        <p:txBody>
+          <a:bodyPr rtlCol="0" anchor="ctr"/>
+          <a:lstStyle/>
+          <a:p>
+            <a:pPr algn="ctr"/>
+          </a:p>
+        </p:txBody>
+      </p:sp>
+      <p:sp>
+        <p:nvSpPr>
+          <p:cNvPr id="11" name="TextBox 10"/>
+          <p:cNvSpPr txBox="1"/>
+          <p:nvPr/>
+        </p:nvSpPr>
+        <p:spPr>
+          <a:xfrm>
+            <a:off x="1067104" y="1179576"/>
+            <a:ext cx="10058400" cy="347472"/>
+          </a:xfrm>
+          <a:prstGeom prst="rect">
+            <a:avLst/>
+          </a:prstGeom>
+          <a:noFill/>
+        </p:spPr>
+        <p:txBody>
+          <a:bodyPr wrap="none">
+            <a:spAutoFit/>
+          </a:bodyPr>
+          <a:lstStyle/>
+          <a:p>
+            <a:pPr algn="ctr">
+              <a:spcAft>
+                <a:spcPts val="1000"/>
+              </a:spcAft>
+            </a:pPr>
+            <a:r>
+              <a:rPr sz="1800" b="1">
+                <a:solidFill>
+                  <a:srgbClr val="FFFFFF"/>
+                </a:solidFill>
+                <a:latin typeface="Microsoft YaHei"/>
+              </a:rPr>
+              <a:t>📝  课堂笔记  —  请摘抄要点</a:t>
+            </a:r>
+          </a:p>
+        </p:txBody>
+      </p:sp>
+      <p:sp>
+        <p:nvSpPr>
+          <p:cNvPr id="12" name="Rectangle 11"/>
+          <p:cNvSpPr/>
+          <p:nvPr/>
+        </p:nvSpPr>
+        <p:spPr>
+          <a:xfrm>
+            <a:off x="1570024" y="1527048"/>
+            <a:ext cx="27432" cy="3337560"/>
+          </a:xfrm>
+          <a:prstGeom prst="rect">
+            <a:avLst/>
+          </a:prstGeom>
+          <a:solidFill>
+            <a:srgbClr val="DC5050"/>
+          </a:solidFill>
+          <a:ln>
+            <a:noFill/>
+          </a:ln>
+        </p:spPr>
+        <p:style>
+          <a:lnRef idx="1">
+            <a:schemeClr val="accent1"/>
+          </a:lnRef>
+          <a:fillRef idx="3">
+            <a:schemeClr val="accent1"/>
+          </a:fillRef>
+          <a:effectRef idx="2">
+            <a:schemeClr val="accent1"/>
+          </a:effectRef>
+          <a:fontRef idx="minor">
+            <a:schemeClr val="lt1"/>
+          </a:fontRef>
+        </p:style>
+        <p:txBody>
+          <a:bodyPr rtlCol="0" anchor="ctr"/>
+          <a:lstStyle/>
+          <a:p>
+            <a:pPr algn="ctr"/>
+          </a:p>
+        </p:txBody>
+      </p:sp>
+      <p:sp>
+        <p:nvSpPr>
+          <p:cNvPr id="13" name="Rectangle 12"/>
+          <p:cNvSpPr/>
+          <p:nvPr/>
+        </p:nvSpPr>
+        <p:spPr>
+          <a:xfrm>
+            <a:off x="1417320" y="2276856"/>
+            <a:ext cx="9601200" cy="13716"/>
+          </a:xfrm>
+          <a:prstGeom prst="rect">
+            <a:avLst/>
+          </a:prstGeom>
+          <a:solidFill>
+            <a:srgbClr val="D2C8AF"/>
+          </a:solidFill>
+          <a:ln>
+            <a:noFill/>
+          </a:ln>
+        </p:spPr>
+        <p:style>
+          <a:lnRef idx="1">
+            <a:schemeClr val="accent1"/>
+          </a:lnRef>
+          <a:fillRef idx="3">
+            <a:schemeClr val="accent1"/>
+          </a:fillRef>
+          <a:effectRef idx="2">
+            <a:schemeClr val="accent1"/>
+          </a:effectRef>
+          <a:fontRef idx="minor">
+            <a:schemeClr val="lt1"/>
+          </a:fontRef>
+        </p:style>
+        <p:txBody>
+          <a:bodyPr rtlCol="0" anchor="ctr"/>
+          <a:lstStyle/>
+          <a:p>
+            <a:pPr algn="ctr"/>
+          </a:p>
+        </p:txBody>
+      </p:sp>
+      <p:sp>
+        <p:nvSpPr>
+          <p:cNvPr id="14" name="Rounded Rectangle 13"/>
+          <p:cNvSpPr/>
+          <p:nvPr/>
+        </p:nvSpPr>
+        <p:spPr>
+          <a:xfrm>
+            <a:off x="1600200" y="1627632"/>
+            <a:ext cx="1280160" cy="347472"/>
           </a:xfrm>
           <a:prstGeom prst="roundRect">
             <a:avLst/>
@@ -4615,14 +6082,14 @@
       </p:sp>
       <p:sp>
         <p:nvSpPr>
-          <p:cNvPr id="7" name="TextBox 6"/>
+          <p:cNvPr id="15" name="TextBox 14"/>
           <p:cNvSpPr txBox="1"/>
           <p:nvPr/>
         </p:nvSpPr>
         <p:spPr>
           <a:xfrm>
-            <a:off x="4953304" y="521208"/>
-            <a:ext cx="2286000" cy="384048"/>
+            <a:off x="1600200" y="1645920"/>
+            <a:ext cx="1280160" cy="310896"/>
           </a:xfrm>
           <a:prstGeom prst="rect">
             <a:avLst/>
@@ -4647,21 +6114,21 @@
                 </a:solidFill>
                 <a:latin typeface="Microsoft YaHei"/>
               </a:rPr>
-              <a:t>画流程图</a:t>
-            </a:r>
-          </a:p>
-        </p:txBody>
-      </p:sp>
-      <p:sp>
-        <p:nvSpPr>
-          <p:cNvPr id="8" name="TextBox 7"/>
+              <a:t>夸张</a:t>
+            </a:r>
+          </a:p>
+        </p:txBody>
+      </p:sp>
+      <p:sp>
+        <p:nvSpPr>
+          <p:cNvPr id="16" name="TextBox 15"/>
           <p:cNvSpPr txBox="1"/>
           <p:nvPr/>
         </p:nvSpPr>
         <p:spPr>
           <a:xfrm>
-            <a:off x="1371600" y="960120"/>
-            <a:ext cx="9418320" cy="822960"/>
+            <a:off x="3017520" y="1627632"/>
+            <a:ext cx="7498079" cy="658368"/>
           </a:xfrm>
           <a:prstGeom prst="rect">
             <a:avLst/>
@@ -4669,40 +6136,83 @@
           <a:noFill/>
         </p:spPr>
         <p:txBody>
-          <a:bodyPr wrap="square">
+          <a:bodyPr wrap="none">
             <a:spAutoFit/>
           </a:bodyPr>
           <a:lstStyle/>
           <a:p>
-            <a:pPr algn="ctr">
+            <a:pPr algn="l">
               <a:spcAft>
                 <a:spcPts val="1000"/>
               </a:spcAft>
             </a:pPr>
             <a:r>
-              <a:rPr sz="3600" b="1">
+              <a:rPr sz="2100" b="0">
                 <a:solidFill>
-                  <a:srgbClr val="784696"/>
+                  <a:srgbClr val="3C2850"/>
                 </a:solidFill>
                 <a:latin typeface="Microsoft YaHei"/>
               </a:rPr>
-              <a:t>学习任务一</a:t>
-            </a:r>
-          </a:p>
-        </p:txBody>
-      </p:sp>
-      <p:sp>
-        <p:nvSpPr>
-          <p:cNvPr id="9" name="Rectangle 8"/>
+              <a:t>把皇帝爱新衣写到极致：「除非为了炫耀新衣服」</a:t>
+            </a:r>
+          </a:p>
+        </p:txBody>
+      </p:sp>
+      <p:sp>
+        <p:nvSpPr>
+          <p:cNvPr id="17" name="Rectangle 16"/>
           <p:cNvSpPr/>
           <p:nvPr/>
         </p:nvSpPr>
         <p:spPr>
           <a:xfrm>
-            <a:off x="3200400" y="1600200"/>
-            <a:ext cx="5760720" cy="27432"/>
-          </a:xfrm>
-          <a:prstGeom prst="rect">
+            <a:off x="1417320" y="3081527"/>
+            <a:ext cx="9601200" cy="13716"/>
+          </a:xfrm>
+          <a:prstGeom prst="rect">
+            <a:avLst/>
+          </a:prstGeom>
+          <a:solidFill>
+            <a:srgbClr val="D2C8AF"/>
+          </a:solidFill>
+          <a:ln>
+            <a:noFill/>
+          </a:ln>
+        </p:spPr>
+        <p:style>
+          <a:lnRef idx="1">
+            <a:schemeClr val="accent1"/>
+          </a:lnRef>
+          <a:fillRef idx="3">
+            <a:schemeClr val="accent1"/>
+          </a:fillRef>
+          <a:effectRef idx="2">
+            <a:schemeClr val="accent1"/>
+          </a:effectRef>
+          <a:fontRef idx="minor">
+            <a:schemeClr val="lt1"/>
+          </a:fontRef>
+        </p:style>
+        <p:txBody>
+          <a:bodyPr rtlCol="0" anchor="ctr"/>
+          <a:lstStyle/>
+          <a:p>
+            <a:pPr algn="ctr"/>
+          </a:p>
+        </p:txBody>
+      </p:sp>
+      <p:sp>
+        <p:nvSpPr>
+          <p:cNvPr id="18" name="Rounded Rectangle 17"/>
+          <p:cNvSpPr/>
+          <p:nvPr/>
+        </p:nvSpPr>
+        <p:spPr>
+          <a:xfrm>
+            <a:off x="1600200" y="2432303"/>
+            <a:ext cx="1280160" cy="347472"/>
+          </a:xfrm>
+          <a:prstGeom prst="roundRect">
             <a:avLst/>
           </a:prstGeom>
           <a:solidFill>
@@ -4736,25 +6246,101 @@
       </p:sp>
       <p:sp>
         <p:nvSpPr>
-          <p:cNvPr id="10" name="Rounded Rectangle 9"/>
+          <p:cNvPr id="19" name="TextBox 18"/>
+          <p:cNvSpPr txBox="1"/>
+          <p:nvPr/>
+        </p:nvSpPr>
+        <p:spPr>
+          <a:xfrm>
+            <a:off x="1600200" y="2450591"/>
+            <a:ext cx="1280160" cy="310896"/>
+          </a:xfrm>
+          <a:prstGeom prst="rect">
+            <a:avLst/>
+          </a:prstGeom>
+          <a:noFill/>
+        </p:spPr>
+        <p:txBody>
+          <a:bodyPr wrap="none">
+            <a:spAutoFit/>
+          </a:bodyPr>
+          <a:lstStyle/>
+          <a:p>
+            <a:pPr algn="ctr">
+              <a:spcAft>
+                <a:spcPts val="1000"/>
+              </a:spcAft>
+            </a:pPr>
+            <a:r>
+              <a:rPr sz="1800" b="1">
+                <a:solidFill>
+                  <a:srgbClr val="3C2850"/>
+                </a:solidFill>
+                <a:latin typeface="Microsoft YaHei"/>
+              </a:rPr>
+              <a:t>反讽</a:t>
+            </a:r>
+          </a:p>
+        </p:txBody>
+      </p:sp>
+      <p:sp>
+        <p:nvSpPr>
+          <p:cNvPr id="20" name="TextBox 19"/>
+          <p:cNvSpPr txBox="1"/>
+          <p:nvPr/>
+        </p:nvSpPr>
+        <p:spPr>
+          <a:xfrm>
+            <a:off x="3017520" y="2432303"/>
+            <a:ext cx="7498079" cy="658368"/>
+          </a:xfrm>
+          <a:prstGeom prst="rect">
+            <a:avLst/>
+          </a:prstGeom>
+          <a:noFill/>
+        </p:spPr>
+        <p:txBody>
+          <a:bodyPr wrap="none">
+            <a:spAutoFit/>
+          </a:bodyPr>
+          <a:lstStyle/>
+          <a:p>
+            <a:pPr algn="l">
+              <a:spcAft>
+                <a:spcPts val="1000"/>
+              </a:spcAft>
+            </a:pPr>
+            <a:r>
+              <a:rPr sz="2100" b="0">
+                <a:solidFill>
+                  <a:srgbClr val="3C2850"/>
+                </a:solidFill>
+                <a:latin typeface="Microsoft YaHei"/>
+              </a:rPr>
+              <a:t>说「看见了」其实什么也没看见，讽刺虚伪</a:t>
+            </a:r>
+          </a:p>
+        </p:txBody>
+      </p:sp>
+      <p:sp>
+        <p:nvSpPr>
+          <p:cNvPr id="21" name="Rectangle 20"/>
           <p:cNvSpPr/>
           <p:nvPr/>
         </p:nvSpPr>
         <p:spPr>
           <a:xfrm>
-            <a:off x="1295704" y="1645920"/>
-            <a:ext cx="9601200" cy="2240280"/>
-          </a:xfrm>
-          <a:prstGeom prst="roundRect">
+            <a:off x="1417320" y="3886200"/>
+            <a:ext cx="9601200" cy="13716"/>
+          </a:xfrm>
+          <a:prstGeom prst="rect">
             <a:avLst/>
           </a:prstGeom>
           <a:solidFill>
-            <a:srgbClr val="FCF8FF"/>
+            <a:srgbClr val="D2C8AF"/>
           </a:solidFill>
-          <a:ln w="19050">
-            <a:solidFill>
-              <a:srgbClr val="C8AADC"/>
-            </a:solidFill>
+          <a:ln>
+            <a:noFill/>
           </a:ln>
         </p:spPr>
         <p:style>
@@ -4781,20 +6367,20 @@
       </p:sp>
       <p:sp>
         <p:nvSpPr>
-          <p:cNvPr id="11" name="Oval 10"/>
+          <p:cNvPr id="22" name="Rounded Rectangle 21"/>
           <p:cNvSpPr/>
           <p:nvPr/>
         </p:nvSpPr>
         <p:spPr>
           <a:xfrm>
-            <a:off x="2255824" y="1828800"/>
-            <a:ext cx="384048" cy="384048"/>
-          </a:xfrm>
-          <a:prstGeom prst="ellipse">
+            <a:off x="1600200" y="3236976"/>
+            <a:ext cx="1280160" cy="347472"/>
+          </a:xfrm>
+          <a:prstGeom prst="roundRect">
             <a:avLst/>
           </a:prstGeom>
           <a:solidFill>
-            <a:srgbClr val="784696"/>
+            <a:srgbClr val="C8AADC"/>
           </a:solidFill>
           <a:ln>
             <a:noFill/>
@@ -4824,14 +6410,14 @@
       </p:sp>
       <p:sp>
         <p:nvSpPr>
-          <p:cNvPr id="12" name="TextBox 11"/>
+          <p:cNvPr id="23" name="TextBox 22"/>
           <p:cNvSpPr txBox="1"/>
           <p:nvPr/>
         </p:nvSpPr>
         <p:spPr>
           <a:xfrm>
-            <a:off x="2255824" y="1847088"/>
-            <a:ext cx="384048" cy="365760"/>
+            <a:off x="1600200" y="3255264"/>
+            <a:ext cx="1280160" cy="310896"/>
           </a:xfrm>
           <a:prstGeom prst="rect">
             <a:avLst/>
@@ -4850,27 +6436,27 @@
               </a:spcAft>
             </a:pPr>
             <a:r>
-              <a:rPr sz="1600" b="1">
+              <a:rPr sz="1800" b="1">
                 <a:solidFill>
-                  <a:srgbClr val="FFFFFF"/>
+                  <a:srgbClr val="3C2850"/>
                 </a:solidFill>
                 <a:latin typeface="Microsoft YaHei"/>
               </a:rPr>
-              <a:t>1</a:t>
-            </a:r>
-          </a:p>
-        </p:txBody>
-      </p:sp>
-      <p:sp>
-        <p:nvSpPr>
-          <p:cNvPr id="13" name="TextBox 12"/>
+              <a:t>对比</a:t>
+            </a:r>
+          </a:p>
+        </p:txBody>
+      </p:sp>
+      <p:sp>
+        <p:nvSpPr>
+          <p:cNvPr id="24" name="TextBox 23"/>
           <p:cNvSpPr txBox="1"/>
           <p:nvPr/>
         </p:nvSpPr>
         <p:spPr>
           <a:xfrm>
-            <a:off x="2758744" y="1810512"/>
-            <a:ext cx="7772400" cy="502920"/>
+            <a:off x="3017520" y="3236976"/>
+            <a:ext cx="7498079" cy="658368"/>
           </a:xfrm>
           <a:prstGeom prst="rect">
             <a:avLst/>
@@ -4889,33 +6475,33 @@
               </a:spcAft>
             </a:pPr>
             <a:r>
-              <a:rPr sz="2400" b="0">
+              <a:rPr sz="2100" b="0">
                 <a:solidFill>
                   <a:srgbClr val="3C2850"/>
                 </a:solidFill>
                 <a:latin typeface="Microsoft YaHei"/>
               </a:rPr>
-              <a:t>快速阅读，每读完一段记下「谁做了什么」</a:t>
-            </a:r>
-          </a:p>
-        </p:txBody>
-      </p:sp>
-      <p:sp>
-        <p:nvSpPr>
-          <p:cNvPr id="14" name="Oval 13"/>
+              <a:t>大人的怯懦 vs 孩子的天真诚实</a:t>
+            </a:r>
+          </a:p>
+        </p:txBody>
+      </p:sp>
+      <p:sp>
+        <p:nvSpPr>
+          <p:cNvPr id="25" name="Rectangle 24"/>
           <p:cNvSpPr/>
           <p:nvPr/>
         </p:nvSpPr>
         <p:spPr>
           <a:xfrm>
-            <a:off x="2255824" y="2395728"/>
-            <a:ext cx="384048" cy="384048"/>
-          </a:xfrm>
-          <a:prstGeom prst="ellipse">
+            <a:off x="1417320" y="4690872"/>
+            <a:ext cx="9601200" cy="13716"/>
+          </a:xfrm>
+          <a:prstGeom prst="rect">
             <a:avLst/>
           </a:prstGeom>
           <a:solidFill>
-            <a:srgbClr val="784696"/>
+            <a:srgbClr val="D2C8AF"/>
           </a:solidFill>
           <a:ln>
             <a:noFill/>
@@ -4945,14 +6531,57 @@
       </p:sp>
       <p:sp>
         <p:nvSpPr>
-          <p:cNvPr id="15" name="TextBox 14"/>
+          <p:cNvPr id="26" name="Rounded Rectangle 25"/>
+          <p:cNvSpPr/>
+          <p:nvPr/>
+        </p:nvSpPr>
+        <p:spPr>
+          <a:xfrm>
+            <a:off x="1600200" y="4041648"/>
+            <a:ext cx="1280160" cy="347472"/>
+          </a:xfrm>
+          <a:prstGeom prst="roundRect">
+            <a:avLst/>
+          </a:prstGeom>
+          <a:solidFill>
+            <a:srgbClr val="C8AADC"/>
+          </a:solidFill>
+          <a:ln>
+            <a:noFill/>
+          </a:ln>
+        </p:spPr>
+        <p:style>
+          <a:lnRef idx="1">
+            <a:schemeClr val="accent1"/>
+          </a:lnRef>
+          <a:fillRef idx="3">
+            <a:schemeClr val="accent1"/>
+          </a:fillRef>
+          <a:effectRef idx="2">
+            <a:schemeClr val="accent1"/>
+          </a:effectRef>
+          <a:fontRef idx="minor">
+            <a:schemeClr val="lt1"/>
+          </a:fontRef>
+        </p:style>
+        <p:txBody>
+          <a:bodyPr rtlCol="0" anchor="ctr"/>
+          <a:lstStyle/>
+          <a:p>
+            <a:pPr algn="ctr"/>
+          </a:p>
+        </p:txBody>
+      </p:sp>
+      <p:sp>
+        <p:nvSpPr>
+          <p:cNvPr id="27" name="TextBox 26"/>
           <p:cNvSpPr txBox="1"/>
           <p:nvPr/>
         </p:nvSpPr>
         <p:spPr>
           <a:xfrm>
-            <a:off x="2255824" y="2414016"/>
-            <a:ext cx="384048" cy="365760"/>
+            <a:off x="1600200" y="4059936"/>
+            <a:ext cx="1280160" cy="310896"/>
           </a:xfrm>
           <a:prstGeom prst="rect">
             <a:avLst/>
@@ -4971,27 +6600,27 @@
               </a:spcAft>
             </a:pPr>
             <a:r>
-              <a:rPr sz="1600" b="1">
+              <a:rPr sz="1800" b="1">
                 <a:solidFill>
-                  <a:srgbClr val="FFFFFF"/>
+                  <a:srgbClr val="3C2850"/>
                 </a:solidFill>
                 <a:latin typeface="Microsoft YaHei"/>
               </a:rPr>
-              <a:t>2</a:t>
-            </a:r>
-          </a:p>
-        </p:txBody>
-      </p:sp>
-      <p:sp>
-        <p:nvSpPr>
-          <p:cNvPr id="16" name="TextBox 15"/>
+              <a:t>反复</a:t>
+            </a:r>
+          </a:p>
+        </p:txBody>
+      </p:sp>
+      <p:sp>
+        <p:nvSpPr>
+          <p:cNvPr id="28" name="TextBox 27"/>
           <p:cNvSpPr txBox="1"/>
           <p:nvPr/>
         </p:nvSpPr>
         <p:spPr>
           <a:xfrm>
-            <a:off x="2758744" y="2377440"/>
-            <a:ext cx="7772400" cy="502920"/>
+            <a:off x="3017520" y="4041648"/>
+            <a:ext cx="7498079" cy="658368"/>
           </a:xfrm>
           <a:prstGeom prst="rect">
             <a:avLst/>
@@ -5010,134 +6639,13 @@
               </a:spcAft>
             </a:pPr>
             <a:r>
-              <a:rPr sz="2400" b="0">
+              <a:rPr sz="2100" b="0">
                 <a:solidFill>
                   <a:srgbClr val="3C2850"/>
                 </a:solidFill>
                 <a:latin typeface="Microsoft YaHei"/>
               </a:rPr>
-              <a:t>用箭头串联骗局全过程</a:t>
-            </a:r>
-          </a:p>
-        </p:txBody>
-      </p:sp>
-      <p:sp>
-        <p:nvSpPr>
-          <p:cNvPr id="17" name="Oval 16"/>
-          <p:cNvSpPr/>
-          <p:nvPr/>
-        </p:nvSpPr>
-        <p:spPr>
-          <a:xfrm>
-            <a:off x="2255824" y="2962656"/>
-            <a:ext cx="384048" cy="384048"/>
-          </a:xfrm>
-          <a:prstGeom prst="ellipse">
-            <a:avLst/>
-          </a:prstGeom>
-          <a:solidFill>
-            <a:srgbClr val="784696"/>
-          </a:solidFill>
-          <a:ln>
-            <a:noFill/>
-          </a:ln>
-        </p:spPr>
-        <p:style>
-          <a:lnRef idx="1">
-            <a:schemeClr val="accent1"/>
-          </a:lnRef>
-          <a:fillRef idx="3">
-            <a:schemeClr val="accent1"/>
-          </a:fillRef>
-          <a:effectRef idx="2">
-            <a:schemeClr val="accent1"/>
-          </a:effectRef>
-          <a:fontRef idx="minor">
-            <a:schemeClr val="lt1"/>
-          </a:fontRef>
-        </p:style>
-        <p:txBody>
-          <a:bodyPr rtlCol="0" anchor="ctr"/>
-          <a:lstStyle/>
-          <a:p>
-            <a:pPr algn="ctr"/>
-          </a:p>
-        </p:txBody>
-      </p:sp>
-      <p:sp>
-        <p:nvSpPr>
-          <p:cNvPr id="18" name="TextBox 17"/>
-          <p:cNvSpPr txBox="1"/>
-          <p:nvPr/>
-        </p:nvSpPr>
-        <p:spPr>
-          <a:xfrm>
-            <a:off x="2255824" y="2980944"/>
-            <a:ext cx="384048" cy="365760"/>
-          </a:xfrm>
-          <a:prstGeom prst="rect">
-            <a:avLst/>
-          </a:prstGeom>
-          <a:noFill/>
-        </p:spPr>
-        <p:txBody>
-          <a:bodyPr wrap="none">
-            <a:spAutoFit/>
-          </a:bodyPr>
-          <a:lstStyle/>
-          <a:p>
-            <a:pPr algn="ctr">
-              <a:spcAft>
-                <a:spcPts val="1000"/>
-              </a:spcAft>
-            </a:pPr>
-            <a:r>
-              <a:rPr sz="1600" b="1">
-                <a:solidFill>
-                  <a:srgbClr val="FFFFFF"/>
-                </a:solidFill>
-                <a:latin typeface="Microsoft YaHei"/>
-              </a:rPr>
-              <a:t>3</a:t>
-            </a:r>
-          </a:p>
-        </p:txBody>
-      </p:sp>
-      <p:sp>
-        <p:nvSpPr>
-          <p:cNvPr id="19" name="TextBox 18"/>
-          <p:cNvSpPr txBox="1"/>
-          <p:nvPr/>
-        </p:nvSpPr>
-        <p:spPr>
-          <a:xfrm>
-            <a:off x="2758744" y="2944368"/>
-            <a:ext cx="7772400" cy="502920"/>
-          </a:xfrm>
-          <a:prstGeom prst="rect">
-            <a:avLst/>
-          </a:prstGeom>
-          <a:noFill/>
-        </p:spPr>
-        <p:txBody>
-          <a:bodyPr wrap="none">
-            <a:spAutoFit/>
-          </a:bodyPr>
-          <a:lstStyle/>
-          <a:p>
-            <a:pPr algn="l">
-              <a:spcAft>
-                <a:spcPts val="1000"/>
-              </a:spcAft>
-            </a:pPr>
-            <a:r>
-              <a:rPr sz="2400" b="0">
-                <a:solidFill>
-                  <a:srgbClr val="3C2850"/>
-                </a:solidFill>
-                <a:latin typeface="Microsoft YaHei"/>
-              </a:rPr>
-              <a:t>骗子谎言 → 大臣附和 → 游行 → 孩子说真话</a:t>
+              <a:t>「我什么也没有看见」反复出现，强化讽刺效果</a:t>
             </a:r>
           </a:p>
         </p:txBody>
@@ -5283,8 +6791,342 @@
         </p:nvSpPr>
         <p:spPr>
           <a:xfrm>
-            <a:off x="4953304" y="502920"/>
-            <a:ext cx="2286000" cy="411480"/>
+            <a:off x="502920" y="384048"/>
+            <a:ext cx="2011680" cy="384048"/>
+          </a:xfrm>
+          <a:prstGeom prst="roundRect">
+            <a:avLst/>
+          </a:prstGeom>
+          <a:solidFill>
+            <a:srgbClr val="784696"/>
+          </a:solidFill>
+          <a:ln>
+            <a:noFill/>
+          </a:ln>
+        </p:spPr>
+        <p:style>
+          <a:lnRef idx="1">
+            <a:schemeClr val="accent1"/>
+          </a:lnRef>
+          <a:fillRef idx="3">
+            <a:schemeClr val="accent1"/>
+          </a:fillRef>
+          <a:effectRef idx="2">
+            <a:schemeClr val="accent1"/>
+          </a:effectRef>
+          <a:fontRef idx="minor">
+            <a:schemeClr val="lt1"/>
+          </a:fontRef>
+        </p:style>
+        <p:txBody>
+          <a:bodyPr rtlCol="0" anchor="ctr"/>
+          <a:lstStyle/>
+          <a:p>
+            <a:pPr algn="ctr"/>
+          </a:p>
+        </p:txBody>
+      </p:sp>
+      <p:sp>
+        <p:nvSpPr>
+          <p:cNvPr id="7" name="TextBox 6"/>
+          <p:cNvSpPr txBox="1"/>
+          <p:nvPr/>
+        </p:nvSpPr>
+        <p:spPr>
+          <a:xfrm>
+            <a:off x="502920" y="402336"/>
+            <a:ext cx="2011680" cy="347472"/>
+          </a:xfrm>
+          <a:prstGeom prst="rect">
+            <a:avLst/>
+          </a:prstGeom>
+          <a:noFill/>
+        </p:spPr>
+        <p:txBody>
+          <a:bodyPr wrap="none">
+            <a:spAutoFit/>
+          </a:bodyPr>
+          <a:lstStyle/>
+          <a:p>
+            <a:pPr algn="ctr">
+              <a:spcAft>
+                <a:spcPts val="1000"/>
+              </a:spcAft>
+            </a:pPr>
+            <a:r>
+              <a:rPr sz="1600" b="1">
+                <a:solidFill>
+                  <a:srgbClr val="FFFFFF"/>
+                </a:solidFill>
+                <a:latin typeface="Microsoft YaHei"/>
+              </a:rPr>
+              <a:t>主题笔记</a:t>
+            </a:r>
+          </a:p>
+        </p:txBody>
+      </p:sp>
+      <p:sp>
+        <p:nvSpPr>
+          <p:cNvPr id="8" name="TextBox 7"/>
+          <p:cNvSpPr txBox="1"/>
+          <p:nvPr/>
+        </p:nvSpPr>
+        <p:spPr>
+          <a:xfrm>
+            <a:off x="1371600" y="384048"/>
+            <a:ext cx="9418320" cy="822960"/>
+          </a:xfrm>
+          <a:prstGeom prst="rect">
+            <a:avLst/>
+          </a:prstGeom>
+          <a:noFill/>
+        </p:spPr>
+        <p:txBody>
+          <a:bodyPr wrap="square">
+            <a:spAutoFit/>
+          </a:bodyPr>
+          <a:lstStyle/>
+          <a:p>
+            <a:pPr algn="ctr">
+              <a:spcAft>
+                <a:spcPts val="1000"/>
+              </a:spcAft>
+            </a:pPr>
+            <a:r>
+              <a:rPr sz="3400" b="1">
+                <a:solidFill>
+                  <a:srgbClr val="784696"/>
+                </a:solidFill>
+                <a:latin typeface="Microsoft YaHei"/>
+              </a:rPr>
+              <a:t>主题理解</a:t>
+            </a:r>
+          </a:p>
+        </p:txBody>
+      </p:sp>
+      <p:sp>
+        <p:nvSpPr>
+          <p:cNvPr id="9" name="Rounded Rectangle 8"/>
+          <p:cNvSpPr/>
+          <p:nvPr/>
+        </p:nvSpPr>
+        <p:spPr>
+          <a:xfrm>
+            <a:off x="1067104" y="1143000"/>
+            <a:ext cx="10058400" cy="3721608"/>
+          </a:xfrm>
+          <a:prstGeom prst="roundRect">
+            <a:avLst/>
+          </a:prstGeom>
+          <a:solidFill>
+            <a:srgbClr val="FFFCEB"/>
+          </a:solidFill>
+          <a:ln w="25400">
+            <a:solidFill>
+              <a:srgbClr val="825AA0"/>
+            </a:solidFill>
+          </a:ln>
+        </p:spPr>
+        <p:style>
+          <a:lnRef idx="1">
+            <a:schemeClr val="accent1"/>
+          </a:lnRef>
+          <a:fillRef idx="3">
+            <a:schemeClr val="accent1"/>
+          </a:fillRef>
+          <a:effectRef idx="2">
+            <a:schemeClr val="accent1"/>
+          </a:effectRef>
+          <a:fontRef idx="minor">
+            <a:schemeClr val="lt1"/>
+          </a:fontRef>
+        </p:style>
+        <p:txBody>
+          <a:bodyPr rtlCol="0" anchor="ctr"/>
+          <a:lstStyle/>
+          <a:p>
+            <a:pPr algn="ctr"/>
+          </a:p>
+        </p:txBody>
+      </p:sp>
+      <p:sp>
+        <p:nvSpPr>
+          <p:cNvPr id="10" name="Rectangle 9"/>
+          <p:cNvSpPr/>
+          <p:nvPr/>
+        </p:nvSpPr>
+        <p:spPr>
+          <a:xfrm>
+            <a:off x="1067104" y="1143000"/>
+            <a:ext cx="10058400" cy="384048"/>
+          </a:xfrm>
+          <a:prstGeom prst="rect">
+            <a:avLst/>
+          </a:prstGeom>
+          <a:solidFill>
+            <a:srgbClr val="784696"/>
+          </a:solidFill>
+          <a:ln>
+            <a:noFill/>
+          </a:ln>
+        </p:spPr>
+        <p:style>
+          <a:lnRef idx="1">
+            <a:schemeClr val="accent1"/>
+          </a:lnRef>
+          <a:fillRef idx="3">
+            <a:schemeClr val="accent1"/>
+          </a:fillRef>
+          <a:effectRef idx="2">
+            <a:schemeClr val="accent1"/>
+          </a:effectRef>
+          <a:fontRef idx="minor">
+            <a:schemeClr val="lt1"/>
+          </a:fontRef>
+        </p:style>
+        <p:txBody>
+          <a:bodyPr rtlCol="0" anchor="ctr"/>
+          <a:lstStyle/>
+          <a:p>
+            <a:pPr algn="ctr"/>
+          </a:p>
+        </p:txBody>
+      </p:sp>
+      <p:sp>
+        <p:nvSpPr>
+          <p:cNvPr id="11" name="TextBox 10"/>
+          <p:cNvSpPr txBox="1"/>
+          <p:nvPr/>
+        </p:nvSpPr>
+        <p:spPr>
+          <a:xfrm>
+            <a:off x="1067104" y="1179576"/>
+            <a:ext cx="10058400" cy="347472"/>
+          </a:xfrm>
+          <a:prstGeom prst="rect">
+            <a:avLst/>
+          </a:prstGeom>
+          <a:noFill/>
+        </p:spPr>
+        <p:txBody>
+          <a:bodyPr wrap="none">
+            <a:spAutoFit/>
+          </a:bodyPr>
+          <a:lstStyle/>
+          <a:p>
+            <a:pPr algn="ctr">
+              <a:spcAft>
+                <a:spcPts val="1000"/>
+              </a:spcAft>
+            </a:pPr>
+            <a:r>
+              <a:rPr sz="1800" b="1">
+                <a:solidFill>
+                  <a:srgbClr val="FFFFFF"/>
+                </a:solidFill>
+                <a:latin typeface="Microsoft YaHei"/>
+              </a:rPr>
+              <a:t>📝  课堂笔记  —  请摘抄要点</a:t>
+            </a:r>
+          </a:p>
+        </p:txBody>
+      </p:sp>
+      <p:sp>
+        <p:nvSpPr>
+          <p:cNvPr id="12" name="Rectangle 11"/>
+          <p:cNvSpPr/>
+          <p:nvPr/>
+        </p:nvSpPr>
+        <p:spPr>
+          <a:xfrm>
+            <a:off x="1570024" y="1527048"/>
+            <a:ext cx="27432" cy="3337560"/>
+          </a:xfrm>
+          <a:prstGeom prst="rect">
+            <a:avLst/>
+          </a:prstGeom>
+          <a:solidFill>
+            <a:srgbClr val="DC5050"/>
+          </a:solidFill>
+          <a:ln>
+            <a:noFill/>
+          </a:ln>
+        </p:spPr>
+        <p:style>
+          <a:lnRef idx="1">
+            <a:schemeClr val="accent1"/>
+          </a:lnRef>
+          <a:fillRef idx="3">
+            <a:schemeClr val="accent1"/>
+          </a:fillRef>
+          <a:effectRef idx="2">
+            <a:schemeClr val="accent1"/>
+          </a:effectRef>
+          <a:fontRef idx="minor">
+            <a:schemeClr val="lt1"/>
+          </a:fontRef>
+        </p:style>
+        <p:txBody>
+          <a:bodyPr rtlCol="0" anchor="ctr"/>
+          <a:lstStyle/>
+          <a:p>
+            <a:pPr algn="ctr"/>
+          </a:p>
+        </p:txBody>
+      </p:sp>
+      <p:sp>
+        <p:nvSpPr>
+          <p:cNvPr id="13" name="Rectangle 12"/>
+          <p:cNvSpPr/>
+          <p:nvPr/>
+        </p:nvSpPr>
+        <p:spPr>
+          <a:xfrm>
+            <a:off x="1417320" y="2276856"/>
+            <a:ext cx="9601200" cy="13716"/>
+          </a:xfrm>
+          <a:prstGeom prst="rect">
+            <a:avLst/>
+          </a:prstGeom>
+          <a:solidFill>
+            <a:srgbClr val="D2C8AF"/>
+          </a:solidFill>
+          <a:ln>
+            <a:noFill/>
+          </a:ln>
+        </p:spPr>
+        <p:style>
+          <a:lnRef idx="1">
+            <a:schemeClr val="accent1"/>
+          </a:lnRef>
+          <a:fillRef idx="3">
+            <a:schemeClr val="accent1"/>
+          </a:fillRef>
+          <a:effectRef idx="2">
+            <a:schemeClr val="accent1"/>
+          </a:effectRef>
+          <a:fontRef idx="minor">
+            <a:schemeClr val="lt1"/>
+          </a:fontRef>
+        </p:style>
+        <p:txBody>
+          <a:bodyPr rtlCol="0" anchor="ctr"/>
+          <a:lstStyle/>
+          <a:p>
+            <a:pPr algn="ctr"/>
+          </a:p>
+        </p:txBody>
+      </p:sp>
+      <p:sp>
+        <p:nvSpPr>
+          <p:cNvPr id="14" name="Rounded Rectangle 13"/>
+          <p:cNvSpPr/>
+          <p:nvPr/>
+        </p:nvSpPr>
+        <p:spPr>
+          <a:xfrm>
+            <a:off x="1600200" y="1627632"/>
+            <a:ext cx="1444752" cy="347472"/>
           </a:xfrm>
           <a:prstGeom prst="roundRect">
             <a:avLst/>
@@ -5320,14 +7162,14 @@
       </p:sp>
       <p:sp>
         <p:nvSpPr>
-          <p:cNvPr id="7" name="TextBox 6"/>
+          <p:cNvPr id="15" name="TextBox 14"/>
           <p:cNvSpPr txBox="1"/>
           <p:nvPr/>
         </p:nvSpPr>
         <p:spPr>
           <a:xfrm>
-            <a:off x="4953304" y="521208"/>
-            <a:ext cx="2286000" cy="384048"/>
+            <a:off x="1600200" y="1645920"/>
+            <a:ext cx="1444752" cy="310896"/>
           </a:xfrm>
           <a:prstGeom prst="rect">
             <a:avLst/>
@@ -5352,21 +7194,21 @@
                 </a:solidFill>
                 <a:latin typeface="Microsoft YaHei"/>
               </a:rPr>
-              <a:t>拆心理机关</a:t>
-            </a:r>
-          </a:p>
-        </p:txBody>
-      </p:sp>
-      <p:sp>
-        <p:nvSpPr>
-          <p:cNvPr id="8" name="TextBox 7"/>
+              <a:t>心理机制</a:t>
+            </a:r>
+          </a:p>
+        </p:txBody>
+      </p:sp>
+      <p:sp>
+        <p:nvSpPr>
+          <p:cNvPr id="16" name="TextBox 15"/>
           <p:cNvSpPr txBox="1"/>
           <p:nvPr/>
         </p:nvSpPr>
         <p:spPr>
           <a:xfrm>
-            <a:off x="1371600" y="960120"/>
-            <a:ext cx="9418320" cy="822960"/>
+            <a:off x="3182112" y="1627632"/>
+            <a:ext cx="7333488" cy="658368"/>
           </a:xfrm>
           <a:prstGeom prst="rect">
             <a:avLst/>
@@ -5374,40 +7216,83 @@
           <a:noFill/>
         </p:spPr>
         <p:txBody>
-          <a:bodyPr wrap="square">
+          <a:bodyPr wrap="none">
             <a:spAutoFit/>
           </a:bodyPr>
           <a:lstStyle/>
           <a:p>
-            <a:pPr algn="ctr">
+            <a:pPr algn="l">
               <a:spcAft>
                 <a:spcPts val="1000"/>
               </a:spcAft>
             </a:pPr>
             <a:r>
-              <a:rPr sz="3600" b="1">
+              <a:rPr sz="2100" b="0">
                 <a:solidFill>
-                  <a:srgbClr val="784696"/>
+                  <a:srgbClr val="3C2850"/>
                 </a:solidFill>
                 <a:latin typeface="Microsoft YaHei"/>
               </a:rPr>
-              <a:t>学习任务二</a:t>
-            </a:r>
-          </a:p>
-        </p:txBody>
-      </p:sp>
-      <p:sp>
-        <p:nvSpPr>
-          <p:cNvPr id="9" name="Rectangle 8"/>
+              <a:t>害怕被认为「不聪明」或「不称职」而丢失地位</a:t>
+            </a:r>
+          </a:p>
+        </p:txBody>
+      </p:sp>
+      <p:sp>
+        <p:nvSpPr>
+          <p:cNvPr id="17" name="Rectangle 16"/>
           <p:cNvSpPr/>
           <p:nvPr/>
         </p:nvSpPr>
         <p:spPr>
           <a:xfrm>
-            <a:off x="3200400" y="1600200"/>
-            <a:ext cx="5760720" cy="27432"/>
-          </a:xfrm>
-          <a:prstGeom prst="rect">
+            <a:off x="1417320" y="3081527"/>
+            <a:ext cx="9601200" cy="13716"/>
+          </a:xfrm>
+          <a:prstGeom prst="rect">
+            <a:avLst/>
+          </a:prstGeom>
+          <a:solidFill>
+            <a:srgbClr val="D2C8AF"/>
+          </a:solidFill>
+          <a:ln>
+            <a:noFill/>
+          </a:ln>
+        </p:spPr>
+        <p:style>
+          <a:lnRef idx="1">
+            <a:schemeClr val="accent1"/>
+          </a:lnRef>
+          <a:fillRef idx="3">
+            <a:schemeClr val="accent1"/>
+          </a:fillRef>
+          <a:effectRef idx="2">
+            <a:schemeClr val="accent1"/>
+          </a:effectRef>
+          <a:fontRef idx="minor">
+            <a:schemeClr val="lt1"/>
+          </a:fontRef>
+        </p:style>
+        <p:txBody>
+          <a:bodyPr rtlCol="0" anchor="ctr"/>
+          <a:lstStyle/>
+          <a:p>
+            <a:pPr algn="ctr"/>
+          </a:p>
+        </p:txBody>
+      </p:sp>
+      <p:sp>
+        <p:nvSpPr>
+          <p:cNvPr id="18" name="Rounded Rectangle 17"/>
+          <p:cNvSpPr/>
+          <p:nvPr/>
+        </p:nvSpPr>
+        <p:spPr>
+          <a:xfrm>
+            <a:off x="1600200" y="2432303"/>
+            <a:ext cx="1444752" cy="347472"/>
+          </a:xfrm>
+          <a:prstGeom prst="roundRect">
             <a:avLst/>
           </a:prstGeom>
           <a:solidFill>
@@ -5441,25 +7326,101 @@
       </p:sp>
       <p:sp>
         <p:nvSpPr>
-          <p:cNvPr id="10" name="Rounded Rectangle 9"/>
+          <p:cNvPr id="19" name="TextBox 18"/>
+          <p:cNvSpPr txBox="1"/>
+          <p:nvPr/>
+        </p:nvSpPr>
+        <p:spPr>
+          <a:xfrm>
+            <a:off x="1600200" y="2450591"/>
+            <a:ext cx="1444752" cy="310896"/>
+          </a:xfrm>
+          <a:prstGeom prst="rect">
+            <a:avLst/>
+          </a:prstGeom>
+          <a:noFill/>
+        </p:spPr>
+        <p:txBody>
+          <a:bodyPr wrap="none">
+            <a:spAutoFit/>
+          </a:bodyPr>
+          <a:lstStyle/>
+          <a:p>
+            <a:pPr algn="ctr">
+              <a:spcAft>
+                <a:spcPts val="1000"/>
+              </a:spcAft>
+            </a:pPr>
+            <a:r>
+              <a:rPr sz="1800" b="1">
+                <a:solidFill>
+                  <a:srgbClr val="3C2850"/>
+                </a:solidFill>
+                <a:latin typeface="Microsoft YaHei"/>
+              </a:rPr>
+              <a:t>社会批判</a:t>
+            </a:r>
+          </a:p>
+        </p:txBody>
+      </p:sp>
+      <p:sp>
+        <p:nvSpPr>
+          <p:cNvPr id="20" name="TextBox 19"/>
+          <p:cNvSpPr txBox="1"/>
+          <p:nvPr/>
+        </p:nvSpPr>
+        <p:spPr>
+          <a:xfrm>
+            <a:off x="3182112" y="2432303"/>
+            <a:ext cx="7333488" cy="658368"/>
+          </a:xfrm>
+          <a:prstGeom prst="rect">
+            <a:avLst/>
+          </a:prstGeom>
+          <a:noFill/>
+        </p:spPr>
+        <p:txBody>
+          <a:bodyPr wrap="none">
+            <a:spAutoFit/>
+          </a:bodyPr>
+          <a:lstStyle/>
+          <a:p>
+            <a:pPr algn="l">
+              <a:spcAft>
+                <a:spcPts val="1000"/>
+              </a:spcAft>
+            </a:pPr>
+            <a:r>
+              <a:rPr sz="2100" b="0">
+                <a:solidFill>
+                  <a:srgbClr val="3C2850"/>
+                </a:solidFill>
+                <a:latin typeface="Microsoft YaHei"/>
+              </a:rPr>
+              <a:t>讽刺盲从权威、虚伪逢迎的官场风气</a:t>
+            </a:r>
+          </a:p>
+        </p:txBody>
+      </p:sp>
+      <p:sp>
+        <p:nvSpPr>
+          <p:cNvPr id="21" name="Rectangle 20"/>
           <p:cNvSpPr/>
           <p:nvPr/>
         </p:nvSpPr>
         <p:spPr>
           <a:xfrm>
-            <a:off x="1295704" y="1645920"/>
-            <a:ext cx="9601200" cy="2240280"/>
-          </a:xfrm>
-          <a:prstGeom prst="roundRect">
+            <a:off x="1417320" y="3886200"/>
+            <a:ext cx="9601200" cy="13716"/>
+          </a:xfrm>
+          <a:prstGeom prst="rect">
             <a:avLst/>
           </a:prstGeom>
           <a:solidFill>
-            <a:srgbClr val="FCF8FF"/>
+            <a:srgbClr val="D2C8AF"/>
           </a:solidFill>
-          <a:ln w="19050">
-            <a:solidFill>
-              <a:srgbClr val="C8AADC"/>
-            </a:solidFill>
+          <a:ln>
+            <a:noFill/>
           </a:ln>
         </p:spPr>
         <p:style>
@@ -5486,20 +7447,20 @@
       </p:sp>
       <p:sp>
         <p:nvSpPr>
-          <p:cNvPr id="11" name="Oval 10"/>
+          <p:cNvPr id="22" name="Rounded Rectangle 21"/>
           <p:cNvSpPr/>
           <p:nvPr/>
         </p:nvSpPr>
         <p:spPr>
           <a:xfrm>
-            <a:off x="2255824" y="1828800"/>
-            <a:ext cx="384048" cy="384048"/>
-          </a:xfrm>
-          <a:prstGeom prst="ellipse">
+            <a:off x="1600200" y="3236976"/>
+            <a:ext cx="1444752" cy="347472"/>
+          </a:xfrm>
+          <a:prstGeom prst="roundRect">
             <a:avLst/>
           </a:prstGeom>
           <a:solidFill>
-            <a:srgbClr val="784696"/>
+            <a:srgbClr val="C8AADC"/>
           </a:solidFill>
           <a:ln>
             <a:noFill/>
@@ -5529,14 +7490,14 @@
       </p:sp>
       <p:sp>
         <p:nvSpPr>
-          <p:cNvPr id="12" name="TextBox 11"/>
+          <p:cNvPr id="23" name="TextBox 22"/>
           <p:cNvSpPr txBox="1"/>
           <p:nvPr/>
         </p:nvSpPr>
         <p:spPr>
           <a:xfrm>
-            <a:off x="2255824" y="1847088"/>
-            <a:ext cx="384048" cy="365760"/>
+            <a:off x="1600200" y="3255264"/>
+            <a:ext cx="1444752" cy="310896"/>
           </a:xfrm>
           <a:prstGeom prst="rect">
             <a:avLst/>
@@ -5555,27 +7516,27 @@
               </a:spcAft>
             </a:pPr>
             <a:r>
-              <a:rPr sz="1600" b="1">
+              <a:rPr sz="1800" b="1">
                 <a:solidFill>
-                  <a:srgbClr val="FFFFFF"/>
+                  <a:srgbClr val="3C2850"/>
                 </a:solidFill>
                 <a:latin typeface="Microsoft YaHei"/>
               </a:rPr>
-              <a:t>1</a:t>
-            </a:r>
-          </a:p>
-        </p:txBody>
-      </p:sp>
-      <p:sp>
-        <p:nvSpPr>
-          <p:cNvPr id="13" name="TextBox 12"/>
+              <a:t>孩子作用</a:t>
+            </a:r>
+          </a:p>
+        </p:txBody>
+      </p:sp>
+      <p:sp>
+        <p:nvSpPr>
+          <p:cNvPr id="24" name="TextBox 23"/>
           <p:cNvSpPr txBox="1"/>
           <p:nvPr/>
         </p:nvSpPr>
         <p:spPr>
           <a:xfrm>
-            <a:off x="2758744" y="1810512"/>
-            <a:ext cx="7772400" cy="502920"/>
+            <a:off x="3182112" y="3236976"/>
+            <a:ext cx="7333488" cy="658368"/>
           </a:xfrm>
           <a:prstGeom prst="rect">
             <a:avLst/>
@@ -5594,33 +7555,33 @@
               </a:spcAft>
             </a:pPr>
             <a:r>
-              <a:rPr sz="2400" b="0">
+              <a:rPr sz="2100" b="0">
                 <a:solidFill>
                   <a:srgbClr val="3C2850"/>
                 </a:solidFill>
                 <a:latin typeface="Microsoft YaHei"/>
               </a:rPr>
-              <a:t>勾画老大臣、官员、皇帝的心理和语言</a:t>
-            </a:r>
-          </a:p>
-        </p:txBody>
-      </p:sp>
-      <p:sp>
-        <p:nvSpPr>
-          <p:cNvPr id="14" name="Oval 13"/>
+              <a:t>天真不受虚假规则束缚，一语道破真相</a:t>
+            </a:r>
+          </a:p>
+        </p:txBody>
+      </p:sp>
+      <p:sp>
+        <p:nvSpPr>
+          <p:cNvPr id="25" name="Rectangle 24"/>
           <p:cNvSpPr/>
           <p:nvPr/>
         </p:nvSpPr>
         <p:spPr>
           <a:xfrm>
-            <a:off x="2255824" y="2395728"/>
-            <a:ext cx="384048" cy="384048"/>
-          </a:xfrm>
-          <a:prstGeom prst="ellipse">
+            <a:off x="1417320" y="4690872"/>
+            <a:ext cx="9601200" cy="13716"/>
+          </a:xfrm>
+          <a:prstGeom prst="rect">
             <a:avLst/>
           </a:prstGeom>
           <a:solidFill>
-            <a:srgbClr val="784696"/>
+            <a:srgbClr val="D2C8AF"/>
           </a:solidFill>
           <a:ln>
             <a:noFill/>
@@ -5650,14 +7611,57 @@
       </p:sp>
       <p:sp>
         <p:nvSpPr>
-          <p:cNvPr id="15" name="TextBox 14"/>
+          <p:cNvPr id="26" name="Rounded Rectangle 25"/>
+          <p:cNvSpPr/>
+          <p:nvPr/>
+        </p:nvSpPr>
+        <p:spPr>
+          <a:xfrm>
+            <a:off x="1600200" y="4041648"/>
+            <a:ext cx="1444752" cy="347472"/>
+          </a:xfrm>
+          <a:prstGeom prst="roundRect">
+            <a:avLst/>
+          </a:prstGeom>
+          <a:solidFill>
+            <a:srgbClr val="C8AADC"/>
+          </a:solidFill>
+          <a:ln>
+            <a:noFill/>
+          </a:ln>
+        </p:spPr>
+        <p:style>
+          <a:lnRef idx="1">
+            <a:schemeClr val="accent1"/>
+          </a:lnRef>
+          <a:fillRef idx="3">
+            <a:schemeClr val="accent1"/>
+          </a:fillRef>
+          <a:effectRef idx="2">
+            <a:schemeClr val="accent1"/>
+          </a:effectRef>
+          <a:fontRef idx="minor">
+            <a:schemeClr val="lt1"/>
+          </a:fontRef>
+        </p:style>
+        <p:txBody>
+          <a:bodyPr rtlCol="0" anchor="ctr"/>
+          <a:lstStyle/>
+          <a:p>
+            <a:pPr algn="ctr"/>
+          </a:p>
+        </p:txBody>
+      </p:sp>
+      <p:sp>
+        <p:nvSpPr>
+          <p:cNvPr id="27" name="TextBox 26"/>
           <p:cNvSpPr txBox="1"/>
           <p:nvPr/>
         </p:nvSpPr>
         <p:spPr>
           <a:xfrm>
-            <a:off x="2255824" y="2414016"/>
-            <a:ext cx="384048" cy="365760"/>
+            <a:off x="1600200" y="4059936"/>
+            <a:ext cx="1444752" cy="310896"/>
           </a:xfrm>
           <a:prstGeom prst="rect">
             <a:avLst/>
@@ -5676,27 +7680,27 @@
               </a:spcAft>
             </a:pPr>
             <a:r>
-              <a:rPr sz="1600" b="1">
+              <a:rPr sz="1800" b="1">
                 <a:solidFill>
-                  <a:srgbClr val="FFFFFF"/>
+                  <a:srgbClr val="3C2850"/>
                 </a:solidFill>
                 <a:latin typeface="Microsoft YaHei"/>
               </a:rPr>
-              <a:t>2</a:t>
-            </a:r>
-          </a:p>
-        </p:txBody>
-      </p:sp>
-      <p:sp>
-        <p:nvSpPr>
-          <p:cNvPr id="16" name="TextBox 15"/>
+              <a:t>策展主题</a:t>
+            </a:r>
+          </a:p>
+        </p:txBody>
+      </p:sp>
+      <p:sp>
+        <p:nvSpPr>
+          <p:cNvPr id="28" name="TextBox 27"/>
           <p:cNvSpPr txBox="1"/>
           <p:nvPr/>
         </p:nvSpPr>
         <p:spPr>
           <a:xfrm>
-            <a:off x="2758744" y="2377440"/>
-            <a:ext cx="7772400" cy="502920"/>
+            <a:off x="3182112" y="4041648"/>
+            <a:ext cx="7333488" cy="658368"/>
           </a:xfrm>
           <a:prstGeom prst="rect">
             <a:avLst/>
@@ -5715,134 +7719,13 @@
               </a:spcAft>
             </a:pPr>
             <a:r>
-              <a:rPr sz="2400" b="0">
+              <a:rPr sz="2100" b="0">
                 <a:solidFill>
                   <a:srgbClr val="3C2850"/>
                 </a:solidFill>
                 <a:latin typeface="Microsoft YaHei"/>
               </a:rPr>
-              <a:t>品味夸张语句的讽刺效果</a:t>
-            </a:r>
-          </a:p>
-        </p:txBody>
-      </p:sp>
-      <p:sp>
-        <p:nvSpPr>
-          <p:cNvPr id="17" name="Oval 16"/>
-          <p:cNvSpPr/>
-          <p:nvPr/>
-        </p:nvSpPr>
-        <p:spPr>
-          <a:xfrm>
-            <a:off x="2255824" y="2962656"/>
-            <a:ext cx="384048" cy="384048"/>
-          </a:xfrm>
-          <a:prstGeom prst="ellipse">
-            <a:avLst/>
-          </a:prstGeom>
-          <a:solidFill>
-            <a:srgbClr val="784696"/>
-          </a:solidFill>
-          <a:ln>
-            <a:noFill/>
-          </a:ln>
-        </p:spPr>
-        <p:style>
-          <a:lnRef idx="1">
-            <a:schemeClr val="accent1"/>
-          </a:lnRef>
-          <a:fillRef idx="3">
-            <a:schemeClr val="accent1"/>
-          </a:fillRef>
-          <a:effectRef idx="2">
-            <a:schemeClr val="accent1"/>
-          </a:effectRef>
-          <a:fontRef idx="minor">
-            <a:schemeClr val="lt1"/>
-          </a:fontRef>
-        </p:style>
-        <p:txBody>
-          <a:bodyPr rtlCol="0" anchor="ctr"/>
-          <a:lstStyle/>
-          <a:p>
-            <a:pPr algn="ctr"/>
-          </a:p>
-        </p:txBody>
-      </p:sp>
-      <p:sp>
-        <p:nvSpPr>
-          <p:cNvPr id="18" name="TextBox 17"/>
-          <p:cNvSpPr txBox="1"/>
-          <p:nvPr/>
-        </p:nvSpPr>
-        <p:spPr>
-          <a:xfrm>
-            <a:off x="2255824" y="2980944"/>
-            <a:ext cx="384048" cy="365760"/>
-          </a:xfrm>
-          <a:prstGeom prst="rect">
-            <a:avLst/>
-          </a:prstGeom>
-          <a:noFill/>
-        </p:spPr>
-        <p:txBody>
-          <a:bodyPr wrap="none">
-            <a:spAutoFit/>
-          </a:bodyPr>
-          <a:lstStyle/>
-          <a:p>
-            <a:pPr algn="ctr">
-              <a:spcAft>
-                <a:spcPts val="1000"/>
-              </a:spcAft>
-            </a:pPr>
-            <a:r>
-              <a:rPr sz="1600" b="1">
-                <a:solidFill>
-                  <a:srgbClr val="FFFFFF"/>
-                </a:solidFill>
-                <a:latin typeface="Microsoft YaHei"/>
-              </a:rPr>
-              <a:t>3</a:t>
-            </a:r>
-          </a:p>
-        </p:txBody>
-      </p:sp>
-      <p:sp>
-        <p:nvSpPr>
-          <p:cNvPr id="19" name="TextBox 18"/>
-          <p:cNvSpPr txBox="1"/>
-          <p:nvPr/>
-        </p:nvSpPr>
-        <p:spPr>
-          <a:xfrm>
-            <a:off x="2758744" y="2944368"/>
-            <a:ext cx="7772400" cy="502920"/>
-          </a:xfrm>
-          <a:prstGeom prst="rect">
-            <a:avLst/>
-          </a:prstGeom>
-          <a:noFill/>
-        </p:spPr>
-        <p:txBody>
-          <a:bodyPr wrap="none">
-            <a:spAutoFit/>
-          </a:bodyPr>
-          <a:lstStyle/>
-          <a:p>
-            <a:pPr algn="l">
-              <a:spcAft>
-                <a:spcPts val="1000"/>
-              </a:spcAft>
-            </a:pPr>
-            <a:r>
-              <a:rPr sz="2400" b="0">
-                <a:solidFill>
-                  <a:srgbClr val="3C2850"/>
-                </a:solidFill>
-                <a:latin typeface="Microsoft YaHei"/>
-              </a:rPr>
-              <a:t>完成人物分析卡（证据—特点—作用）</a:t>
+              <a:t>面对虚假，要敢于说真话，不做沉默的大多数</a:t>
             </a:r>
           </a:p>
         </p:txBody>
@@ -5988,7 +7871,89 @@
         </p:nvSpPr>
         <p:spPr>
           <a:xfrm>
-            <a:off x="4953304" y="1005840"/>
+            <a:off x="502920" y="384048"/>
+            <a:ext cx="2011680" cy="384048"/>
+          </a:xfrm>
+          <a:prstGeom prst="roundRect">
+            <a:avLst/>
+          </a:prstGeom>
+          <a:solidFill>
+            <a:srgbClr val="3C9664"/>
+          </a:solidFill>
+          <a:ln>
+            <a:noFill/>
+          </a:ln>
+        </p:spPr>
+        <p:style>
+          <a:lnRef idx="1">
+            <a:schemeClr val="accent1"/>
+          </a:lnRef>
+          <a:fillRef idx="3">
+            <a:schemeClr val="accent1"/>
+          </a:fillRef>
+          <a:effectRef idx="2">
+            <a:schemeClr val="accent1"/>
+          </a:effectRef>
+          <a:fontRef idx="minor">
+            <a:schemeClr val="lt1"/>
+          </a:fontRef>
+        </p:style>
+        <p:txBody>
+          <a:bodyPr rtlCol="0" anchor="ctr"/>
+          <a:lstStyle/>
+          <a:p>
+            <a:pPr algn="ctr"/>
+          </a:p>
+        </p:txBody>
+      </p:sp>
+      <p:sp>
+        <p:nvSpPr>
+          <p:cNvPr id="7" name="TextBox 6"/>
+          <p:cNvSpPr txBox="1"/>
+          <p:nvPr/>
+        </p:nvSpPr>
+        <p:spPr>
+          <a:xfrm>
+            <a:off x="502920" y="402336"/>
+            <a:ext cx="2011680" cy="347472"/>
+          </a:xfrm>
+          <a:prstGeom prst="rect">
+            <a:avLst/>
+          </a:prstGeom>
+          <a:noFill/>
+        </p:spPr>
+        <p:txBody>
+          <a:bodyPr wrap="none">
+            <a:spAutoFit/>
+          </a:bodyPr>
+          <a:lstStyle/>
+          <a:p>
+            <a:pPr algn="ctr">
+              <a:spcAft>
+                <a:spcPts val="1000"/>
+              </a:spcAft>
+            </a:pPr>
+            <a:r>
+              <a:rPr sz="1600" b="1">
+                <a:solidFill>
+                  <a:srgbClr val="FFFFFF"/>
+                </a:solidFill>
+                <a:latin typeface="Microsoft YaHei"/>
+              </a:rPr>
+              <a:t>课堂活动</a:t>
+            </a:r>
+          </a:p>
+        </p:txBody>
+      </p:sp>
+      <p:sp>
+        <p:nvSpPr>
+          <p:cNvPr id="8" name="Rounded Rectangle 7"/>
+          <p:cNvSpPr/>
+          <p:nvPr/>
+        </p:nvSpPr>
+        <p:spPr>
+          <a:xfrm>
+            <a:off x="4953304" y="502920"/>
             <a:ext cx="2286000" cy="411480"/>
           </a:xfrm>
           <a:prstGeom prst="roundRect">
@@ -6025,13 +7990,13 @@
       </p:sp>
       <p:sp>
         <p:nvSpPr>
-          <p:cNvPr id="7" name="TextBox 6"/>
+          <p:cNvPr id="9" name="TextBox 8"/>
           <p:cNvSpPr txBox="1"/>
           <p:nvPr/>
         </p:nvSpPr>
         <p:spPr>
           <a:xfrm>
-            <a:off x="4953304" y="1024128"/>
+            <a:off x="4953304" y="521208"/>
             <a:ext cx="2286000" cy="384048"/>
           </a:xfrm>
           <a:prstGeom prst="rect">
@@ -6057,20 +8022,20 @@
                 </a:solidFill>
                 <a:latin typeface="Microsoft YaHei"/>
               </a:rPr>
-              <a:t>想一想</a:t>
-            </a:r>
-          </a:p>
-        </p:txBody>
-      </p:sp>
-      <p:sp>
-        <p:nvSpPr>
-          <p:cNvPr id="8" name="TextBox 7"/>
+              <a:t>课堂活动</a:t>
+            </a:r>
+          </a:p>
+        </p:txBody>
+      </p:sp>
+      <p:sp>
+        <p:nvSpPr>
+          <p:cNvPr id="10" name="TextBox 9"/>
           <p:cNvSpPr txBox="1"/>
           <p:nvPr/>
         </p:nvSpPr>
         <p:spPr>
           <a:xfrm>
-            <a:off x="1371600" y="1600200"/>
+            <a:off x="1371600" y="960120"/>
             <a:ext cx="9418320" cy="822960"/>
           </a:xfrm>
           <a:prstGeom prst="rect">
@@ -6090,26 +8055,26 @@
               </a:spcAft>
             </a:pPr>
             <a:r>
-              <a:rPr sz="3200" b="1">
+              <a:rPr sz="3600" b="1">
                 <a:solidFill>
                   <a:srgbClr val="784696"/>
                 </a:solidFill>
                 <a:latin typeface="Microsoft YaHei"/>
               </a:rPr>
-              <a:t>人们都不敢说自己看不见，这是为什么？</a:t>
-            </a:r>
-          </a:p>
-        </p:txBody>
-      </p:sp>
-      <p:sp>
-        <p:nvSpPr>
-          <p:cNvPr id="9" name="Rectangle 8"/>
+              <a:t>学习任务</a:t>
+            </a:r>
+          </a:p>
+        </p:txBody>
+      </p:sp>
+      <p:sp>
+        <p:nvSpPr>
+          <p:cNvPr id="11" name="Rectangle 10"/>
           <p:cNvSpPr/>
           <p:nvPr/>
         </p:nvSpPr>
         <p:spPr>
           <a:xfrm>
-            <a:off x="3200400" y="4389120"/>
+            <a:off x="3200400" y="1600200"/>
             <a:ext cx="5760720" cy="27432"/>
           </a:xfrm>
           <a:prstGeom prst="rect">
@@ -6146,14 +8111,102 @@
       </p:sp>
       <p:sp>
         <p:nvSpPr>
-          <p:cNvPr id="10" name="TextBox 9"/>
+          <p:cNvPr id="12" name="Rounded Rectangle 11"/>
+          <p:cNvSpPr/>
+          <p:nvPr/>
+        </p:nvSpPr>
+        <p:spPr>
+          <a:xfrm>
+            <a:off x="1295704" y="1645920"/>
+            <a:ext cx="9601200" cy="2112264"/>
+          </a:xfrm>
+          <a:prstGeom prst="roundRect">
+            <a:avLst/>
+          </a:prstGeom>
+          <a:solidFill>
+            <a:srgbClr val="FCF8FF"/>
+          </a:solidFill>
+          <a:ln w="19050">
+            <a:solidFill>
+              <a:srgbClr val="C8AADC"/>
+            </a:solidFill>
+          </a:ln>
+        </p:spPr>
+        <p:style>
+          <a:lnRef idx="1">
+            <a:schemeClr val="accent1"/>
+          </a:lnRef>
+          <a:fillRef idx="3">
+            <a:schemeClr val="accent1"/>
+          </a:fillRef>
+          <a:effectRef idx="2">
+            <a:schemeClr val="accent1"/>
+          </a:effectRef>
+          <a:fontRef idx="minor">
+            <a:schemeClr val="lt1"/>
+          </a:fontRef>
+        </p:style>
+        <p:txBody>
+          <a:bodyPr rtlCol="0" anchor="ctr"/>
+          <a:lstStyle/>
+          <a:p>
+            <a:pPr algn="ctr"/>
+          </a:p>
+        </p:txBody>
+      </p:sp>
+      <p:sp>
+        <p:nvSpPr>
+          <p:cNvPr id="13" name="Oval 12"/>
+          <p:cNvSpPr/>
+          <p:nvPr/>
+        </p:nvSpPr>
+        <p:spPr>
+          <a:xfrm>
+            <a:off x="2255824" y="1828800"/>
+            <a:ext cx="347472" cy="347472"/>
+          </a:xfrm>
+          <a:prstGeom prst="ellipse">
+            <a:avLst/>
+          </a:prstGeom>
+          <a:solidFill>
+            <a:srgbClr val="784696"/>
+          </a:solidFill>
+          <a:ln>
+            <a:noFill/>
+          </a:ln>
+        </p:spPr>
+        <p:style>
+          <a:lnRef idx="1">
+            <a:schemeClr val="accent1"/>
+          </a:lnRef>
+          <a:fillRef idx="3">
+            <a:schemeClr val="accent1"/>
+          </a:fillRef>
+          <a:effectRef idx="2">
+            <a:schemeClr val="accent1"/>
+          </a:effectRef>
+          <a:fontRef idx="minor">
+            <a:schemeClr val="lt1"/>
+          </a:fontRef>
+        </p:style>
+        <p:txBody>
+          <a:bodyPr rtlCol="0" anchor="ctr"/>
+          <a:lstStyle/>
+          <a:p>
+            <a:pPr algn="ctr"/>
+          </a:p>
+        </p:txBody>
+      </p:sp>
+      <p:sp>
+        <p:nvSpPr>
+          <p:cNvPr id="14" name="TextBox 13"/>
           <p:cNvSpPr txBox="1"/>
           <p:nvPr/>
         </p:nvSpPr>
         <p:spPr>
           <a:xfrm>
-            <a:off x="1828800" y="4663440"/>
-            <a:ext cx="8503920" cy="914400"/>
+            <a:off x="2255824" y="1847088"/>
+            <a:ext cx="347472" cy="329184"/>
           </a:xfrm>
           <a:prstGeom prst="rect">
             <a:avLst/>
@@ -6172,13 +8225,294 @@
               </a:spcAft>
             </a:pPr>
             <a:r>
-              <a:rPr sz="2200" b="0">
+              <a:rPr sz="1400" b="1">
                 <a:solidFill>
-                  <a:srgbClr val="784696"/>
+                  <a:srgbClr val="FFFFFF"/>
                 </a:solidFill>
                 <a:latin typeface="Microsoft YaHei"/>
               </a:rPr>
-              <a:t>思考：他们共同害怕失去什么？</a:t>
+              <a:t>1</a:t>
+            </a:r>
+          </a:p>
+        </p:txBody>
+      </p:sp>
+      <p:sp>
+        <p:nvSpPr>
+          <p:cNvPr id="15" name="TextBox 14"/>
+          <p:cNvSpPr txBox="1"/>
+          <p:nvPr/>
+        </p:nvSpPr>
+        <p:spPr>
+          <a:xfrm>
+            <a:off x="2713024" y="1810512"/>
+            <a:ext cx="7863840" cy="457200"/>
+          </a:xfrm>
+          <a:prstGeom prst="rect">
+            <a:avLst/>
+          </a:prstGeom>
+          <a:noFill/>
+        </p:spPr>
+        <p:txBody>
+          <a:bodyPr wrap="none">
+            <a:spAutoFit/>
+          </a:bodyPr>
+          <a:lstStyle/>
+          <a:p>
+            <a:pPr algn="l">
+              <a:spcAft>
+                <a:spcPts val="1000"/>
+              </a:spcAft>
+            </a:pPr>
+            <a:r>
+              <a:rPr sz="2400" b="0">
+                <a:solidFill>
+                  <a:srgbClr val="3C2850"/>
+                </a:solidFill>
+                <a:latin typeface="Microsoft YaHei"/>
+              </a:rPr>
+              <a:t>画骗局流程图，用箭头串联各环节</a:t>
+            </a:r>
+          </a:p>
+        </p:txBody>
+      </p:sp>
+      <p:sp>
+        <p:nvSpPr>
+          <p:cNvPr id="16" name="Oval 15"/>
+          <p:cNvSpPr/>
+          <p:nvPr/>
+        </p:nvSpPr>
+        <p:spPr>
+          <a:xfrm>
+            <a:off x="2255824" y="2395728"/>
+            <a:ext cx="347472" cy="347472"/>
+          </a:xfrm>
+          <a:prstGeom prst="ellipse">
+            <a:avLst/>
+          </a:prstGeom>
+          <a:solidFill>
+            <a:srgbClr val="784696"/>
+          </a:solidFill>
+          <a:ln>
+            <a:noFill/>
+          </a:ln>
+        </p:spPr>
+        <p:style>
+          <a:lnRef idx="1">
+            <a:schemeClr val="accent1"/>
+          </a:lnRef>
+          <a:fillRef idx="3">
+            <a:schemeClr val="accent1"/>
+          </a:fillRef>
+          <a:effectRef idx="2">
+            <a:schemeClr val="accent1"/>
+          </a:effectRef>
+          <a:fontRef idx="minor">
+            <a:schemeClr val="lt1"/>
+          </a:fontRef>
+        </p:style>
+        <p:txBody>
+          <a:bodyPr rtlCol="0" anchor="ctr"/>
+          <a:lstStyle/>
+          <a:p>
+            <a:pPr algn="ctr"/>
+          </a:p>
+        </p:txBody>
+      </p:sp>
+      <p:sp>
+        <p:nvSpPr>
+          <p:cNvPr id="17" name="TextBox 16"/>
+          <p:cNvSpPr txBox="1"/>
+          <p:nvPr/>
+        </p:nvSpPr>
+        <p:spPr>
+          <a:xfrm>
+            <a:off x="2255824" y="2414016"/>
+            <a:ext cx="347472" cy="329184"/>
+          </a:xfrm>
+          <a:prstGeom prst="rect">
+            <a:avLst/>
+          </a:prstGeom>
+          <a:noFill/>
+        </p:spPr>
+        <p:txBody>
+          <a:bodyPr wrap="none">
+            <a:spAutoFit/>
+          </a:bodyPr>
+          <a:lstStyle/>
+          <a:p>
+            <a:pPr algn="ctr">
+              <a:spcAft>
+                <a:spcPts val="1000"/>
+              </a:spcAft>
+            </a:pPr>
+            <a:r>
+              <a:rPr sz="1400" b="1">
+                <a:solidFill>
+                  <a:srgbClr val="FFFFFF"/>
+                </a:solidFill>
+                <a:latin typeface="Microsoft YaHei"/>
+              </a:rPr>
+              <a:t>2</a:t>
+            </a:r>
+          </a:p>
+        </p:txBody>
+      </p:sp>
+      <p:sp>
+        <p:nvSpPr>
+          <p:cNvPr id="18" name="TextBox 17"/>
+          <p:cNvSpPr txBox="1"/>
+          <p:nvPr/>
+        </p:nvSpPr>
+        <p:spPr>
+          <a:xfrm>
+            <a:off x="2713024" y="2377440"/>
+            <a:ext cx="7863840" cy="457200"/>
+          </a:xfrm>
+          <a:prstGeom prst="rect">
+            <a:avLst/>
+          </a:prstGeom>
+          <a:noFill/>
+        </p:spPr>
+        <p:txBody>
+          <a:bodyPr wrap="none">
+            <a:spAutoFit/>
+          </a:bodyPr>
+          <a:lstStyle/>
+          <a:p>
+            <a:pPr algn="l">
+              <a:spcAft>
+                <a:spcPts val="1000"/>
+              </a:spcAft>
+            </a:pPr>
+            <a:r>
+              <a:rPr sz="2400" b="0">
+                <a:solidFill>
+                  <a:srgbClr val="3C2850"/>
+                </a:solidFill>
+                <a:latin typeface="Microsoft YaHei"/>
+              </a:rPr>
+              <a:t>勾画老大臣、官员、皇帝的心理和语言</a:t>
+            </a:r>
+          </a:p>
+        </p:txBody>
+      </p:sp>
+      <p:sp>
+        <p:nvSpPr>
+          <p:cNvPr id="19" name="Oval 18"/>
+          <p:cNvSpPr/>
+          <p:nvPr/>
+        </p:nvSpPr>
+        <p:spPr>
+          <a:xfrm>
+            <a:off x="2255824" y="2962656"/>
+            <a:ext cx="347472" cy="347472"/>
+          </a:xfrm>
+          <a:prstGeom prst="ellipse">
+            <a:avLst/>
+          </a:prstGeom>
+          <a:solidFill>
+            <a:srgbClr val="784696"/>
+          </a:solidFill>
+          <a:ln>
+            <a:noFill/>
+          </a:ln>
+        </p:spPr>
+        <p:style>
+          <a:lnRef idx="1">
+            <a:schemeClr val="accent1"/>
+          </a:lnRef>
+          <a:fillRef idx="3">
+            <a:schemeClr val="accent1"/>
+          </a:fillRef>
+          <a:effectRef idx="2">
+            <a:schemeClr val="accent1"/>
+          </a:effectRef>
+          <a:fontRef idx="minor">
+            <a:schemeClr val="lt1"/>
+          </a:fontRef>
+        </p:style>
+        <p:txBody>
+          <a:bodyPr rtlCol="0" anchor="ctr"/>
+          <a:lstStyle/>
+          <a:p>
+            <a:pPr algn="ctr"/>
+          </a:p>
+        </p:txBody>
+      </p:sp>
+      <p:sp>
+        <p:nvSpPr>
+          <p:cNvPr id="20" name="TextBox 19"/>
+          <p:cNvSpPr txBox="1"/>
+          <p:nvPr/>
+        </p:nvSpPr>
+        <p:spPr>
+          <a:xfrm>
+            <a:off x="2255824" y="2980944"/>
+            <a:ext cx="347472" cy="329184"/>
+          </a:xfrm>
+          <a:prstGeom prst="rect">
+            <a:avLst/>
+          </a:prstGeom>
+          <a:noFill/>
+        </p:spPr>
+        <p:txBody>
+          <a:bodyPr wrap="none">
+            <a:spAutoFit/>
+          </a:bodyPr>
+          <a:lstStyle/>
+          <a:p>
+            <a:pPr algn="ctr">
+              <a:spcAft>
+                <a:spcPts val="1000"/>
+              </a:spcAft>
+            </a:pPr>
+            <a:r>
+              <a:rPr sz="1400" b="1">
+                <a:solidFill>
+                  <a:srgbClr val="FFFFFF"/>
+                </a:solidFill>
+                <a:latin typeface="Microsoft YaHei"/>
+              </a:rPr>
+              <a:t>3</a:t>
+            </a:r>
+          </a:p>
+        </p:txBody>
+      </p:sp>
+      <p:sp>
+        <p:nvSpPr>
+          <p:cNvPr id="21" name="TextBox 20"/>
+          <p:cNvSpPr txBox="1"/>
+          <p:nvPr/>
+        </p:nvSpPr>
+        <p:spPr>
+          <a:xfrm>
+            <a:off x="2713024" y="2944368"/>
+            <a:ext cx="7863840" cy="457200"/>
+          </a:xfrm>
+          <a:prstGeom prst="rect">
+            <a:avLst/>
+          </a:prstGeom>
+          <a:noFill/>
+        </p:spPr>
+        <p:txBody>
+          <a:bodyPr wrap="none">
+            <a:spAutoFit/>
+          </a:bodyPr>
+          <a:lstStyle/>
+          <a:p>
+            <a:pPr algn="l">
+              <a:spcAft>
+                <a:spcPts val="1000"/>
+              </a:spcAft>
+            </a:pPr>
+            <a:r>
+              <a:rPr sz="2400" b="0">
+                <a:solidFill>
+                  <a:srgbClr val="3C2850"/>
+                </a:solidFill>
+                <a:latin typeface="Microsoft YaHei"/>
+              </a:rPr>
+              <a:t>完成人物分析卡（证据—特点—作用）</a:t>
             </a:r>
           </a:p>
         </p:txBody>
@@ -6324,6 +8658,88 @@
         </p:nvSpPr>
         <p:spPr>
           <a:xfrm>
+            <a:off x="502920" y="384048"/>
+            <a:ext cx="2011680" cy="384048"/>
+          </a:xfrm>
+          <a:prstGeom prst="roundRect">
+            <a:avLst/>
+          </a:prstGeom>
+          <a:solidFill>
+            <a:srgbClr val="3C9664"/>
+          </a:solidFill>
+          <a:ln>
+            <a:noFill/>
+          </a:ln>
+        </p:spPr>
+        <p:style>
+          <a:lnRef idx="1">
+            <a:schemeClr val="accent1"/>
+          </a:lnRef>
+          <a:fillRef idx="3">
+            <a:schemeClr val="accent1"/>
+          </a:fillRef>
+          <a:effectRef idx="2">
+            <a:schemeClr val="accent1"/>
+          </a:effectRef>
+          <a:fontRef idx="minor">
+            <a:schemeClr val="lt1"/>
+          </a:fontRef>
+        </p:style>
+        <p:txBody>
+          <a:bodyPr rtlCol="0" anchor="ctr"/>
+          <a:lstStyle/>
+          <a:p>
+            <a:pPr algn="ctr"/>
+          </a:p>
+        </p:txBody>
+      </p:sp>
+      <p:sp>
+        <p:nvSpPr>
+          <p:cNvPr id="7" name="TextBox 6"/>
+          <p:cNvSpPr txBox="1"/>
+          <p:nvPr/>
+        </p:nvSpPr>
+        <p:spPr>
+          <a:xfrm>
+            <a:off x="502920" y="402336"/>
+            <a:ext cx="2011680" cy="347472"/>
+          </a:xfrm>
+          <a:prstGeom prst="rect">
+            <a:avLst/>
+          </a:prstGeom>
+          <a:noFill/>
+        </p:spPr>
+        <p:txBody>
+          <a:bodyPr wrap="none">
+            <a:spAutoFit/>
+          </a:bodyPr>
+          <a:lstStyle/>
+          <a:p>
+            <a:pPr algn="ctr">
+              <a:spcAft>
+                <a:spcPts val="1000"/>
+              </a:spcAft>
+            </a:pPr>
+            <a:r>
+              <a:rPr sz="1600" b="1">
+                <a:solidFill>
+                  <a:srgbClr val="FFFFFF"/>
+                </a:solidFill>
+                <a:latin typeface="Microsoft YaHei"/>
+              </a:rPr>
+              <a:t>课堂活动</a:t>
+            </a:r>
+          </a:p>
+        </p:txBody>
+      </p:sp>
+      <p:sp>
+        <p:nvSpPr>
+          <p:cNvPr id="8" name="Rounded Rectangle 7"/>
+          <p:cNvSpPr/>
+          <p:nvPr/>
+        </p:nvSpPr>
+        <p:spPr>
+          <a:xfrm>
             <a:off x="4953304" y="502920"/>
             <a:ext cx="2286000" cy="411480"/>
           </a:xfrm>
@@ -6361,7 +8777,7 @@
       </p:sp>
       <p:sp>
         <p:nvSpPr>
-          <p:cNvPr id="7" name="TextBox 6"/>
+          <p:cNvPr id="9" name="TextBox 8"/>
           <p:cNvSpPr txBox="1"/>
           <p:nvPr/>
         </p:nvSpPr>
@@ -6393,14 +8809,14 @@
                 </a:solidFill>
                 <a:latin typeface="Microsoft YaHei"/>
               </a:rPr>
-              <a:t>学会判断</a:t>
-            </a:r>
-          </a:p>
-        </p:txBody>
-      </p:sp>
-      <p:sp>
-        <p:nvSpPr>
-          <p:cNvPr id="8" name="TextBox 7"/>
+              <a:t>回顾收获</a:t>
+            </a:r>
+          </a:p>
+        </p:txBody>
+      </p:sp>
+      <p:sp>
+        <p:nvSpPr>
+          <p:cNvPr id="10" name="TextBox 9"/>
           <p:cNvSpPr txBox="1"/>
           <p:nvPr/>
         </p:nvSpPr>
@@ -6432,14 +8848,14 @@
                 </a:solidFill>
                 <a:latin typeface="Microsoft YaHei"/>
               </a:rPr>
-              <a:t>学习任务三</a:t>
-            </a:r>
-          </a:p>
-        </p:txBody>
-      </p:sp>
-      <p:sp>
-        <p:nvSpPr>
-          <p:cNvPr id="9" name="Rectangle 8"/>
+              <a:t>课堂小结</a:t>
+            </a:r>
+          </a:p>
+        </p:txBody>
+      </p:sp>
+      <p:sp>
+        <p:nvSpPr>
+          <p:cNvPr id="11" name="Rectangle 10"/>
           <p:cNvSpPr/>
           <p:nvPr/>
         </p:nvSpPr>
@@ -6482,14 +8898,14 @@
       </p:sp>
       <p:sp>
         <p:nvSpPr>
-          <p:cNvPr id="10" name="Rounded Rectangle 9"/>
+          <p:cNvPr id="12" name="Rounded Rectangle 11"/>
           <p:cNvSpPr/>
           <p:nvPr/>
         </p:nvSpPr>
         <p:spPr>
           <a:xfrm>
             <a:off x="1295704" y="1645920"/>
-            <a:ext cx="9601200" cy="2240280"/>
+            <a:ext cx="9601200" cy="1837944"/>
           </a:xfrm>
           <a:prstGeom prst="roundRect">
             <a:avLst/>
@@ -6527,14 +8943,14 @@
       </p:sp>
       <p:sp>
         <p:nvSpPr>
-          <p:cNvPr id="11" name="Oval 10"/>
+          <p:cNvPr id="13" name="Oval 12"/>
           <p:cNvSpPr/>
           <p:nvPr/>
         </p:nvSpPr>
         <p:spPr>
           <a:xfrm>
             <a:off x="2255824" y="1828800"/>
-            <a:ext cx="384048" cy="384048"/>
+            <a:ext cx="347472" cy="347472"/>
           </a:xfrm>
           <a:prstGeom prst="ellipse">
             <a:avLst/>
@@ -6570,14 +8986,14 @@
       </p:sp>
       <p:sp>
         <p:nvSpPr>
-          <p:cNvPr id="12" name="TextBox 11"/>
+          <p:cNvPr id="14" name="TextBox 13"/>
           <p:cNvSpPr txBox="1"/>
           <p:nvPr/>
         </p:nvSpPr>
         <p:spPr>
           <a:xfrm>
             <a:off x="2255824" y="1847088"/>
-            <a:ext cx="384048" cy="365760"/>
+            <a:ext cx="347472" cy="329184"/>
           </a:xfrm>
           <a:prstGeom prst="rect">
             <a:avLst/>
@@ -6596,7 +9012,7 @@
               </a:spcAft>
             </a:pPr>
             <a:r>
-              <a:rPr sz="1600" b="1">
+              <a:rPr sz="1400" b="1">
                 <a:solidFill>
                   <a:srgbClr val="FFFFFF"/>
                 </a:solidFill>
@@ -6609,14 +9025,14 @@
       </p:sp>
       <p:sp>
         <p:nvSpPr>
-          <p:cNvPr id="13" name="TextBox 12"/>
+          <p:cNvPr id="15" name="TextBox 14"/>
           <p:cNvSpPr txBox="1"/>
           <p:nvPr/>
         </p:nvSpPr>
         <p:spPr>
           <a:xfrm>
-            <a:off x="2758744" y="1810512"/>
-            <a:ext cx="7772400" cy="502920"/>
+            <a:off x="2713024" y="1810512"/>
+            <a:ext cx="7863840" cy="457200"/>
           </a:xfrm>
           <a:prstGeom prst="rect">
             <a:avLst/>
@@ -6635,27 +9051,27 @@
               </a:spcAft>
             </a:pPr>
             <a:r>
-              <a:rPr sz="2400" b="0">
+              <a:rPr sz="2200" b="0">
                 <a:solidFill>
                   <a:srgbClr val="3C2850"/>
                 </a:solidFill>
                 <a:latin typeface="Microsoft YaHei"/>
               </a:rPr>
-              <a:t>完成课后「思考·探究·积累」三道思考题</a:t>
-            </a:r>
-          </a:p>
-        </p:txBody>
-      </p:sp>
-      <p:sp>
-        <p:nvSpPr>
-          <p:cNvPr id="14" name="Oval 13"/>
+              <a:t>夸张+反讽+对比，让笑声指向盲从与虚伪</a:t>
+            </a:r>
+          </a:p>
+        </p:txBody>
+      </p:sp>
+      <p:sp>
+        <p:nvSpPr>
+          <p:cNvPr id="16" name="Oval 15"/>
           <p:cNvSpPr/>
           <p:nvPr/>
         </p:nvSpPr>
         <p:spPr>
           <a:xfrm>
-            <a:off x="2255824" y="2395728"/>
-            <a:ext cx="384048" cy="384048"/>
+            <a:off x="2255824" y="2304288"/>
+            <a:ext cx="347472" cy="347472"/>
           </a:xfrm>
           <a:prstGeom prst="ellipse">
             <a:avLst/>
@@ -6691,14 +9107,14 @@
       </p:sp>
       <p:sp>
         <p:nvSpPr>
-          <p:cNvPr id="15" name="TextBox 14"/>
+          <p:cNvPr id="17" name="TextBox 16"/>
           <p:cNvSpPr txBox="1"/>
           <p:nvPr/>
         </p:nvSpPr>
         <p:spPr>
           <a:xfrm>
-            <a:off x="2255824" y="2414016"/>
-            <a:ext cx="384048" cy="365760"/>
+            <a:off x="2255824" y="2322576"/>
+            <a:ext cx="347472" cy="329184"/>
           </a:xfrm>
           <a:prstGeom prst="rect">
             <a:avLst/>
@@ -6717,7 +9133,7 @@
               </a:spcAft>
             </a:pPr>
             <a:r>
-              <a:rPr sz="1600" b="1">
+              <a:rPr sz="1400" b="1">
                 <a:solidFill>
                   <a:srgbClr val="FFFFFF"/>
                 </a:solidFill>
@@ -6730,14 +9146,14 @@
       </p:sp>
       <p:sp>
         <p:nvSpPr>
-          <p:cNvPr id="16" name="TextBox 15"/>
+          <p:cNvPr id="18" name="TextBox 17"/>
           <p:cNvSpPr txBox="1"/>
           <p:nvPr/>
         </p:nvSpPr>
         <p:spPr>
           <a:xfrm>
-            <a:off x="2758744" y="2377440"/>
-            <a:ext cx="7772400" cy="502920"/>
+            <a:off x="2713024" y="2286000"/>
+            <a:ext cx="7863840" cy="457200"/>
           </a:xfrm>
           <a:prstGeom prst="rect">
             <a:avLst/>
@@ -6756,27 +9172,27 @@
               </a:spcAft>
             </a:pPr>
             <a:r>
-              <a:rPr sz="2400" b="0">
+              <a:rPr sz="2200" b="0">
                 <a:solidFill>
                   <a:srgbClr val="3C2850"/>
                 </a:solidFill>
                 <a:latin typeface="Microsoft YaHei"/>
               </a:rPr>
-              <a:t>联系生活：你有没有「随大流」的经历？</a:t>
-            </a:r>
-          </a:p>
-        </p:txBody>
-      </p:sp>
-      <p:sp>
-        <p:nvSpPr>
-          <p:cNvPr id="17" name="Oval 16"/>
+              <a:t>「新装」是谎言，更是照见人性的镜子</a:t>
+            </a:r>
+          </a:p>
+        </p:txBody>
+      </p:sp>
+      <p:sp>
+        <p:nvSpPr>
+          <p:cNvPr id="19" name="Oval 18"/>
           <p:cNvSpPr/>
           <p:nvPr/>
         </p:nvSpPr>
         <p:spPr>
           <a:xfrm>
-            <a:off x="2255824" y="2962656"/>
-            <a:ext cx="384048" cy="384048"/>
+            <a:off x="2255824" y="2779776"/>
+            <a:ext cx="347472" cy="347472"/>
           </a:xfrm>
           <a:prstGeom prst="ellipse">
             <a:avLst/>
@@ -6812,14 +9228,14 @@
       </p:sp>
       <p:sp>
         <p:nvSpPr>
-          <p:cNvPr id="18" name="TextBox 17"/>
+          <p:cNvPr id="20" name="TextBox 19"/>
           <p:cNvSpPr txBox="1"/>
           <p:nvPr/>
         </p:nvSpPr>
         <p:spPr>
           <a:xfrm>
-            <a:off x="2255824" y="2980944"/>
-            <a:ext cx="384048" cy="365760"/>
+            <a:off x="2255824" y="2798064"/>
+            <a:ext cx="347472" cy="329184"/>
           </a:xfrm>
           <a:prstGeom prst="rect">
             <a:avLst/>
@@ -6838,7 +9254,7 @@
               </a:spcAft>
             </a:pPr>
             <a:r>
-              <a:rPr sz="1600" b="1">
+              <a:rPr sz="1400" b="1">
                 <a:solidFill>
                   <a:srgbClr val="FFFFFF"/>
                 </a:solidFill>
@@ -6851,14 +9267,14 @@
       </p:sp>
       <p:sp>
         <p:nvSpPr>
-          <p:cNvPr id="19" name="TextBox 18"/>
+          <p:cNvPr id="21" name="TextBox 20"/>
           <p:cNvSpPr txBox="1"/>
           <p:nvPr/>
         </p:nvSpPr>
         <p:spPr>
           <a:xfrm>
-            <a:off x="2758744" y="2944368"/>
-            <a:ext cx="7772400" cy="502920"/>
+            <a:off x="2713024" y="2761488"/>
+            <a:ext cx="7863840" cy="457200"/>
           </a:xfrm>
           <a:prstGeom prst="rect">
             <a:avLst/>
@@ -6877,13 +9293,13 @@
               </a:spcAft>
             </a:pPr>
             <a:r>
-              <a:rPr sz="2400" b="0">
+              <a:rPr sz="2200" b="0">
                 <a:solidFill>
                   <a:srgbClr val="3C2850"/>
                 </a:solidFill>
                 <a:latin typeface="Microsoft YaHei"/>
               </a:rPr>
-              <a:t>策展主题二：面对虚假，要敢于说真话</a:t>
+              <a:t>策展主题二：真实与虚假</a:t>
             </a:r>
           </a:p>
         </p:txBody>
@@ -7029,6 +9445,88 @@
         </p:nvSpPr>
         <p:spPr>
           <a:xfrm>
+            <a:off x="502920" y="384048"/>
+            <a:ext cx="2011680" cy="384048"/>
+          </a:xfrm>
+          <a:prstGeom prst="roundRect">
+            <a:avLst/>
+          </a:prstGeom>
+          <a:solidFill>
+            <a:srgbClr val="3C9664"/>
+          </a:solidFill>
+          <a:ln>
+            <a:noFill/>
+          </a:ln>
+        </p:spPr>
+        <p:style>
+          <a:lnRef idx="1">
+            <a:schemeClr val="accent1"/>
+          </a:lnRef>
+          <a:fillRef idx="3">
+            <a:schemeClr val="accent1"/>
+          </a:fillRef>
+          <a:effectRef idx="2">
+            <a:schemeClr val="accent1"/>
+          </a:effectRef>
+          <a:fontRef idx="minor">
+            <a:schemeClr val="lt1"/>
+          </a:fontRef>
+        </p:style>
+        <p:txBody>
+          <a:bodyPr rtlCol="0" anchor="ctr"/>
+          <a:lstStyle/>
+          <a:p>
+            <a:pPr algn="ctr"/>
+          </a:p>
+        </p:txBody>
+      </p:sp>
+      <p:sp>
+        <p:nvSpPr>
+          <p:cNvPr id="7" name="TextBox 6"/>
+          <p:cNvSpPr txBox="1"/>
+          <p:nvPr/>
+        </p:nvSpPr>
+        <p:spPr>
+          <a:xfrm>
+            <a:off x="502920" y="402336"/>
+            <a:ext cx="2011680" cy="347472"/>
+          </a:xfrm>
+          <a:prstGeom prst="rect">
+            <a:avLst/>
+          </a:prstGeom>
+          <a:noFill/>
+        </p:spPr>
+        <p:txBody>
+          <a:bodyPr wrap="none">
+            <a:spAutoFit/>
+          </a:bodyPr>
+          <a:lstStyle/>
+          <a:p>
+            <a:pPr algn="ctr">
+              <a:spcAft>
+                <a:spcPts val="1000"/>
+              </a:spcAft>
+            </a:pPr>
+            <a:r>
+              <a:rPr sz="1600" b="1">
+                <a:solidFill>
+                  <a:srgbClr val="FFFFFF"/>
+                </a:solidFill>
+                <a:latin typeface="Microsoft YaHei"/>
+              </a:rPr>
+              <a:t>课堂活动</a:t>
+            </a:r>
+          </a:p>
+        </p:txBody>
+      </p:sp>
+      <p:sp>
+        <p:nvSpPr>
+          <p:cNvPr id="8" name="Rounded Rectangle 7"/>
+          <p:cNvSpPr/>
+          <p:nvPr/>
+        </p:nvSpPr>
+        <p:spPr>
+          <a:xfrm>
             <a:off x="4953304" y="502920"/>
             <a:ext cx="2286000" cy="411480"/>
           </a:xfrm>
@@ -7066,7 +9564,7 @@
       </p:sp>
       <p:sp>
         <p:nvSpPr>
-          <p:cNvPr id="7" name="TextBox 6"/>
+          <p:cNvPr id="9" name="TextBox 8"/>
           <p:cNvSpPr txBox="1"/>
           <p:nvPr/>
         </p:nvSpPr>
@@ -7098,14 +9596,14 @@
                 </a:solidFill>
                 <a:latin typeface="Microsoft YaHei"/>
               </a:rPr>
-              <a:t>回顾收获</a:t>
-            </a:r>
-          </a:p>
-        </p:txBody>
-      </p:sp>
-      <p:sp>
-        <p:nvSpPr>
-          <p:cNvPr id="8" name="TextBox 7"/>
+              <a:t>课后延伸</a:t>
+            </a:r>
+          </a:p>
+        </p:txBody>
+      </p:sp>
+      <p:sp>
+        <p:nvSpPr>
+          <p:cNvPr id="10" name="TextBox 9"/>
           <p:cNvSpPr txBox="1"/>
           <p:nvPr/>
         </p:nvSpPr>
@@ -7137,14 +9635,14 @@
                 </a:solidFill>
                 <a:latin typeface="Microsoft YaHei"/>
               </a:rPr>
-              <a:t>课堂小结</a:t>
-            </a:r>
-          </a:p>
-        </p:txBody>
-      </p:sp>
-      <p:sp>
-        <p:nvSpPr>
-          <p:cNvPr id="9" name="Rectangle 8"/>
+              <a:t>课后作业</a:t>
+            </a:r>
+          </a:p>
+        </p:txBody>
+      </p:sp>
+      <p:sp>
+        <p:nvSpPr>
+          <p:cNvPr id="11" name="Rectangle 10"/>
           <p:cNvSpPr/>
           <p:nvPr/>
         </p:nvSpPr>
@@ -7187,14 +9685,14 @@
       </p:sp>
       <p:sp>
         <p:nvSpPr>
-          <p:cNvPr id="10" name="Rounded Rectangle 9"/>
+          <p:cNvPr id="12" name="Rounded Rectangle 11"/>
           <p:cNvSpPr/>
           <p:nvPr/>
         </p:nvSpPr>
         <p:spPr>
           <a:xfrm>
             <a:off x="1295704" y="1645920"/>
-            <a:ext cx="9601200" cy="2240280"/>
+            <a:ext cx="9601200" cy="1545336"/>
           </a:xfrm>
           <a:prstGeom prst="roundRect">
             <a:avLst/>
@@ -7232,14 +9730,14 @@
       </p:sp>
       <p:sp>
         <p:nvSpPr>
-          <p:cNvPr id="11" name="Oval 10"/>
+          <p:cNvPr id="13" name="Oval 12"/>
           <p:cNvSpPr/>
           <p:nvPr/>
         </p:nvSpPr>
         <p:spPr>
           <a:xfrm>
             <a:off x="2255824" y="1828800"/>
-            <a:ext cx="384048" cy="384048"/>
+            <a:ext cx="347472" cy="347472"/>
           </a:xfrm>
           <a:prstGeom prst="ellipse">
             <a:avLst/>
@@ -7275,14 +9773,14 @@
       </p:sp>
       <p:sp>
         <p:nvSpPr>
-          <p:cNvPr id="12" name="TextBox 11"/>
+          <p:cNvPr id="14" name="TextBox 13"/>
           <p:cNvSpPr txBox="1"/>
           <p:nvPr/>
         </p:nvSpPr>
         <p:spPr>
           <a:xfrm>
             <a:off x="2255824" y="1847088"/>
-            <a:ext cx="384048" cy="365760"/>
+            <a:ext cx="347472" cy="329184"/>
           </a:xfrm>
           <a:prstGeom prst="rect">
             <a:avLst/>
@@ -7301,7 +9799,7 @@
               </a:spcAft>
             </a:pPr>
             <a:r>
-              <a:rPr sz="1600" b="1">
+              <a:rPr sz="1400" b="1">
                 <a:solidFill>
                   <a:srgbClr val="FFFFFF"/>
                 </a:solidFill>
@@ -7314,14 +9812,14 @@
       </p:sp>
       <p:sp>
         <p:nvSpPr>
-          <p:cNvPr id="13" name="TextBox 12"/>
+          <p:cNvPr id="15" name="TextBox 14"/>
           <p:cNvSpPr txBox="1"/>
           <p:nvPr/>
         </p:nvSpPr>
         <p:spPr>
           <a:xfrm>
-            <a:off x="2758744" y="1810512"/>
-            <a:ext cx="7772400" cy="502920"/>
+            <a:off x="2713024" y="1810512"/>
+            <a:ext cx="7863840" cy="457200"/>
           </a:xfrm>
           <a:prstGeom prst="rect">
             <a:avLst/>
@@ -7346,21 +9844,21 @@
                 </a:solidFill>
                 <a:latin typeface="Microsoft YaHei"/>
               </a:rPr>
-              <a:t>夸张、重复、反差制造笑声，指向盲从与虚伪</a:t>
-            </a:r>
-          </a:p>
-        </p:txBody>
-      </p:sp>
-      <p:sp>
-        <p:nvSpPr>
-          <p:cNvPr id="14" name="Oval 13"/>
+              <a:t>必做：用150字概括故事</a:t>
+            </a:r>
+          </a:p>
+        </p:txBody>
+      </p:sp>
+      <p:sp>
+        <p:nvSpPr>
+          <p:cNvPr id="16" name="Oval 15"/>
           <p:cNvSpPr/>
           <p:nvPr/>
         </p:nvSpPr>
         <p:spPr>
           <a:xfrm>
             <a:off x="2255824" y="2395728"/>
-            <a:ext cx="384048" cy="384048"/>
+            <a:ext cx="347472" cy="347472"/>
           </a:xfrm>
           <a:prstGeom prst="ellipse">
             <a:avLst/>
@@ -7396,14 +9894,14 @@
       </p:sp>
       <p:sp>
         <p:nvSpPr>
-          <p:cNvPr id="15" name="TextBox 14"/>
+          <p:cNvPr id="17" name="TextBox 16"/>
           <p:cNvSpPr txBox="1"/>
           <p:nvPr/>
         </p:nvSpPr>
         <p:spPr>
           <a:xfrm>
             <a:off x="2255824" y="2414016"/>
-            <a:ext cx="384048" cy="365760"/>
+            <a:ext cx="347472" cy="329184"/>
           </a:xfrm>
           <a:prstGeom prst="rect">
             <a:avLst/>
@@ -7422,7 +9920,7 @@
               </a:spcAft>
             </a:pPr>
             <a:r>
-              <a:rPr sz="1600" b="1">
+              <a:rPr sz="1400" b="1">
                 <a:solidFill>
                   <a:srgbClr val="FFFFFF"/>
                 </a:solidFill>
@@ -7435,719 +9933,14 @@
       </p:sp>
       <p:sp>
         <p:nvSpPr>
-          <p:cNvPr id="16" name="TextBox 15"/>
-          <p:cNvSpPr txBox="1"/>
-          <p:nvPr/>
-        </p:nvSpPr>
-        <p:spPr>
-          <a:xfrm>
-            <a:off x="2758744" y="2377440"/>
-            <a:ext cx="7772400" cy="502920"/>
-          </a:xfrm>
-          <a:prstGeom prst="rect">
-            <a:avLst/>
-          </a:prstGeom>
-          <a:noFill/>
-        </p:spPr>
-        <p:txBody>
-          <a:bodyPr wrap="none">
-            <a:spAutoFit/>
-          </a:bodyPr>
-          <a:lstStyle/>
-          <a:p>
-            <a:pPr algn="l">
-              <a:spcAft>
-                <a:spcPts val="1000"/>
-              </a:spcAft>
-            </a:pPr>
-            <a:r>
-              <a:rPr sz="2400" b="0">
-                <a:solidFill>
-                  <a:srgbClr val="3C2850"/>
-                </a:solidFill>
-                <a:latin typeface="Microsoft YaHei"/>
-              </a:rPr>
-              <a:t>孩子的天真，是不被虚假规则束缚的诚实</a:t>
-            </a:r>
-          </a:p>
-        </p:txBody>
-      </p:sp>
-      <p:sp>
-        <p:nvSpPr>
-          <p:cNvPr id="17" name="Oval 16"/>
-          <p:cNvSpPr/>
-          <p:nvPr/>
-        </p:nvSpPr>
-        <p:spPr>
-          <a:xfrm>
-            <a:off x="2255824" y="2962656"/>
-            <a:ext cx="384048" cy="384048"/>
-          </a:xfrm>
-          <a:prstGeom prst="ellipse">
-            <a:avLst/>
-          </a:prstGeom>
-          <a:solidFill>
-            <a:srgbClr val="784696"/>
-          </a:solidFill>
-          <a:ln>
-            <a:noFill/>
-          </a:ln>
-        </p:spPr>
-        <p:style>
-          <a:lnRef idx="1">
-            <a:schemeClr val="accent1"/>
-          </a:lnRef>
-          <a:fillRef idx="3">
-            <a:schemeClr val="accent1"/>
-          </a:fillRef>
-          <a:effectRef idx="2">
-            <a:schemeClr val="accent1"/>
-          </a:effectRef>
-          <a:fontRef idx="minor">
-            <a:schemeClr val="lt1"/>
-          </a:fontRef>
-        </p:style>
-        <p:txBody>
-          <a:bodyPr rtlCol="0" anchor="ctr"/>
-          <a:lstStyle/>
-          <a:p>
-            <a:pPr algn="ctr"/>
-          </a:p>
-        </p:txBody>
-      </p:sp>
-      <p:sp>
-        <p:nvSpPr>
           <p:cNvPr id="18" name="TextBox 17"/>
           <p:cNvSpPr txBox="1"/>
           <p:nvPr/>
         </p:nvSpPr>
         <p:spPr>
           <a:xfrm>
-            <a:off x="2255824" y="2980944"/>
-            <a:ext cx="384048" cy="365760"/>
-          </a:xfrm>
-          <a:prstGeom prst="rect">
-            <a:avLst/>
-          </a:prstGeom>
-          <a:noFill/>
-        </p:spPr>
-        <p:txBody>
-          <a:bodyPr wrap="none">
-            <a:spAutoFit/>
-          </a:bodyPr>
-          <a:lstStyle/>
-          <a:p>
-            <a:pPr algn="ctr">
-              <a:spcAft>
-                <a:spcPts val="1000"/>
-              </a:spcAft>
-            </a:pPr>
-            <a:r>
-              <a:rPr sz="1600" b="1">
-                <a:solidFill>
-                  <a:srgbClr val="FFFFFF"/>
-                </a:solidFill>
-                <a:latin typeface="Microsoft YaHei"/>
-              </a:rPr>
-              <a:t>3</a:t>
-            </a:r>
-          </a:p>
-        </p:txBody>
-      </p:sp>
-      <p:sp>
-        <p:nvSpPr>
-          <p:cNvPr id="19" name="TextBox 18"/>
-          <p:cNvSpPr txBox="1"/>
-          <p:nvPr/>
-        </p:nvSpPr>
-        <p:spPr>
-          <a:xfrm>
-            <a:off x="2758744" y="2944368"/>
-            <a:ext cx="7772400" cy="502920"/>
-          </a:xfrm>
-          <a:prstGeom prst="rect">
-            <a:avLst/>
-          </a:prstGeom>
-          <a:noFill/>
-        </p:spPr>
-        <p:txBody>
-          <a:bodyPr wrap="none">
-            <a:spAutoFit/>
-          </a:bodyPr>
-          <a:lstStyle/>
-          <a:p>
-            <a:pPr algn="l">
-              <a:spcAft>
-                <a:spcPts val="1000"/>
-              </a:spcAft>
-            </a:pPr>
-            <a:r>
-              <a:rPr sz="2400" b="0">
-                <a:solidFill>
-                  <a:srgbClr val="3C2850"/>
-                </a:solidFill>
-                <a:latin typeface="Microsoft YaHei"/>
-              </a:rPr>
-              <a:t>策展主题：真实与虚假</a:t>
-            </a:r>
-          </a:p>
-        </p:txBody>
-      </p:sp>
-    </p:spTree>
-  </p:cSld>
-  <p:clrMapOvr>
-    <a:masterClrMapping/>
-  </p:clrMapOvr>
-</p:sld>
-</file>
-
-<file path=ppt/slides/slide9.xml><?xml version="1.0" encoding="utf-8"?>
-<p:sld xmlns:a="http://schemas.openxmlformats.org/drawingml/2006/main" xmlns:p="http://schemas.openxmlformats.org/presentationml/2006/main" xmlns:r="http://schemas.openxmlformats.org/officeDocument/2006/relationships">
-  <p:cSld>
-    <p:spTree>
-      <p:nvGrpSpPr>
-        <p:cNvPr id="1" name=""/>
-        <p:cNvGrpSpPr/>
-        <p:nvPr/>
-      </p:nvGrpSpPr>
-      <p:grpSpPr/>
-      <p:pic>
-        <p:nvPicPr>
-          <p:cNvPr id="2" name="Picture 1" descr="bg_emperor.png"/>
-          <p:cNvPicPr>
-            <a:picLocks noChangeAspect="1"/>
-          </p:cNvPicPr>
-          <p:nvPr/>
-        </p:nvPicPr>
-        <p:blipFill>
-          <a:blip r:embed="rId2"/>
-          <a:stretch>
-            <a:fillRect/>
-          </a:stretch>
-        </p:blipFill>
-        <p:spPr>
-          <a:xfrm>
-            <a:off x="0" y="0"/>
-            <a:ext cx="12191695" cy="6858000"/>
-          </a:xfrm>
-          <a:prstGeom prst="rect">
-            <a:avLst/>
-          </a:prstGeom>
-        </p:spPr>
-      </p:pic>
-      <p:sp>
-        <p:nvSpPr>
-          <p:cNvPr id="3" name="Rectangle 2"/>
-          <p:cNvSpPr/>
-          <p:nvPr/>
-        </p:nvSpPr>
-        <p:spPr>
-          <a:xfrm>
-            <a:off x="292608" y="274320"/>
-            <a:ext cx="11594592" cy="6300216"/>
-          </a:xfrm>
-          <a:prstGeom prst="rect">
-            <a:avLst/>
-          </a:prstGeom>
-          <a:noFill/>
-          <a:ln w="31750">
-            <a:solidFill>
-              <a:srgbClr val="825AA0"/>
-            </a:solidFill>
-          </a:ln>
-        </p:spPr>
-        <p:style>
-          <a:lnRef idx="1">
-            <a:schemeClr val="accent1"/>
-          </a:lnRef>
-          <a:fillRef idx="3">
-            <a:schemeClr val="accent1"/>
-          </a:fillRef>
-          <a:effectRef idx="2">
-            <a:schemeClr val="accent1"/>
-          </a:effectRef>
-          <a:fontRef idx="minor">
-            <a:schemeClr val="lt1"/>
-          </a:fontRef>
-        </p:style>
-        <p:txBody>
-          <a:bodyPr rtlCol="0" anchor="ctr"/>
-          <a:lstStyle/>
-          <a:p>
-            <a:pPr algn="ctr"/>
-          </a:p>
-        </p:txBody>
-      </p:sp>
-      <p:pic>
-        <p:nvPicPr>
-          <p:cNvPr id="4" name="Picture 3" descr="corner_emperor_tl.png"/>
-          <p:cNvPicPr>
-            <a:picLocks noChangeAspect="1"/>
-          </p:cNvPicPr>
-          <p:nvPr/>
-        </p:nvPicPr>
-        <p:blipFill>
-          <a:blip r:embed="rId3"/>
-          <a:stretch>
-            <a:fillRect/>
-          </a:stretch>
-        </p:blipFill>
-        <p:spPr>
-          <a:xfrm>
-            <a:off x="-45720" y="-45720"/>
-            <a:ext cx="2011680" cy="2011680"/>
-          </a:xfrm>
-          <a:prstGeom prst="rect">
-            <a:avLst/>
-          </a:prstGeom>
-        </p:spPr>
-      </p:pic>
-      <p:pic>
-        <p:nvPicPr>
-          <p:cNvPr id="5" name="Picture 4" descr="corner_emperor_tr.png"/>
-          <p:cNvPicPr>
-            <a:picLocks noChangeAspect="1"/>
-          </p:cNvPicPr>
-          <p:nvPr/>
-        </p:nvPicPr>
-        <p:blipFill>
-          <a:blip r:embed="rId4"/>
-          <a:stretch>
-            <a:fillRect/>
-          </a:stretch>
-        </p:blipFill>
-        <p:spPr>
-          <a:xfrm>
-            <a:off x="9875520" y="-45720"/>
-            <a:ext cx="2011680" cy="2011680"/>
-          </a:xfrm>
-          <a:prstGeom prst="rect">
-            <a:avLst/>
-          </a:prstGeom>
-        </p:spPr>
-      </p:pic>
-      <p:sp>
-        <p:nvSpPr>
-          <p:cNvPr id="6" name="Rounded Rectangle 5"/>
-          <p:cNvSpPr/>
-          <p:nvPr/>
-        </p:nvSpPr>
-        <p:spPr>
-          <a:xfrm>
-            <a:off x="4953304" y="502920"/>
-            <a:ext cx="2286000" cy="411480"/>
-          </a:xfrm>
-          <a:prstGeom prst="roundRect">
-            <a:avLst/>
-          </a:prstGeom>
-          <a:solidFill>
-            <a:srgbClr val="C8AADC"/>
-          </a:solidFill>
-          <a:ln>
-            <a:noFill/>
-          </a:ln>
-        </p:spPr>
-        <p:style>
-          <a:lnRef idx="1">
-            <a:schemeClr val="accent1"/>
-          </a:lnRef>
-          <a:fillRef idx="3">
-            <a:schemeClr val="accent1"/>
-          </a:fillRef>
-          <a:effectRef idx="2">
-            <a:schemeClr val="accent1"/>
-          </a:effectRef>
-          <a:fontRef idx="minor">
-            <a:schemeClr val="lt1"/>
-          </a:fontRef>
-        </p:style>
-        <p:txBody>
-          <a:bodyPr rtlCol="0" anchor="ctr"/>
-          <a:lstStyle/>
-          <a:p>
-            <a:pPr algn="ctr"/>
-          </a:p>
-        </p:txBody>
-      </p:sp>
-      <p:sp>
-        <p:nvSpPr>
-          <p:cNvPr id="7" name="TextBox 6"/>
-          <p:cNvSpPr txBox="1"/>
-          <p:nvPr/>
-        </p:nvSpPr>
-        <p:spPr>
-          <a:xfrm>
-            <a:off x="4953304" y="521208"/>
-            <a:ext cx="2286000" cy="384048"/>
-          </a:xfrm>
-          <a:prstGeom prst="rect">
-            <a:avLst/>
-          </a:prstGeom>
-          <a:noFill/>
-        </p:spPr>
-        <p:txBody>
-          <a:bodyPr wrap="none">
-            <a:spAutoFit/>
-          </a:bodyPr>
-          <a:lstStyle/>
-          <a:p>
-            <a:pPr algn="ctr">
-              <a:spcAft>
-                <a:spcPts val="1000"/>
-              </a:spcAft>
-            </a:pPr>
-            <a:r>
-              <a:rPr sz="1800" b="1">
-                <a:solidFill>
-                  <a:srgbClr val="3C2850"/>
-                </a:solidFill>
-                <a:latin typeface="Microsoft YaHei"/>
-              </a:rPr>
-              <a:t>课后延伸</a:t>
-            </a:r>
-          </a:p>
-        </p:txBody>
-      </p:sp>
-      <p:sp>
-        <p:nvSpPr>
-          <p:cNvPr id="8" name="TextBox 7"/>
-          <p:cNvSpPr txBox="1"/>
-          <p:nvPr/>
-        </p:nvSpPr>
-        <p:spPr>
-          <a:xfrm>
-            <a:off x="1371600" y="960120"/>
-            <a:ext cx="9418320" cy="822960"/>
-          </a:xfrm>
-          <a:prstGeom prst="rect">
-            <a:avLst/>
-          </a:prstGeom>
-          <a:noFill/>
-        </p:spPr>
-        <p:txBody>
-          <a:bodyPr wrap="square">
-            <a:spAutoFit/>
-          </a:bodyPr>
-          <a:lstStyle/>
-          <a:p>
-            <a:pPr algn="ctr">
-              <a:spcAft>
-                <a:spcPts val="1000"/>
-              </a:spcAft>
-            </a:pPr>
-            <a:r>
-              <a:rPr sz="3600" b="1">
-                <a:solidFill>
-                  <a:srgbClr val="784696"/>
-                </a:solidFill>
-                <a:latin typeface="Microsoft YaHei"/>
-              </a:rPr>
-              <a:t>课后作业</a:t>
-            </a:r>
-          </a:p>
-        </p:txBody>
-      </p:sp>
-      <p:sp>
-        <p:nvSpPr>
-          <p:cNvPr id="9" name="Rectangle 8"/>
-          <p:cNvSpPr/>
-          <p:nvPr/>
-        </p:nvSpPr>
-        <p:spPr>
-          <a:xfrm>
-            <a:off x="3200400" y="1600200"/>
-            <a:ext cx="5760720" cy="27432"/>
-          </a:xfrm>
-          <a:prstGeom prst="rect">
-            <a:avLst/>
-          </a:prstGeom>
-          <a:solidFill>
-            <a:srgbClr val="C8AADC"/>
-          </a:solidFill>
-          <a:ln>
-            <a:noFill/>
-          </a:ln>
-        </p:spPr>
-        <p:style>
-          <a:lnRef idx="1">
-            <a:schemeClr val="accent1"/>
-          </a:lnRef>
-          <a:fillRef idx="3">
-            <a:schemeClr val="accent1"/>
-          </a:fillRef>
-          <a:effectRef idx="2">
-            <a:schemeClr val="accent1"/>
-          </a:effectRef>
-          <a:fontRef idx="minor">
-            <a:schemeClr val="lt1"/>
-          </a:fontRef>
-        </p:style>
-        <p:txBody>
-          <a:bodyPr rtlCol="0" anchor="ctr"/>
-          <a:lstStyle/>
-          <a:p>
-            <a:pPr algn="ctr"/>
-          </a:p>
-        </p:txBody>
-      </p:sp>
-      <p:sp>
-        <p:nvSpPr>
-          <p:cNvPr id="10" name="Rounded Rectangle 9"/>
-          <p:cNvSpPr/>
-          <p:nvPr/>
-        </p:nvSpPr>
-        <p:spPr>
-          <a:xfrm>
-            <a:off x="1295704" y="1645920"/>
-            <a:ext cx="9601200" cy="1645920"/>
-          </a:xfrm>
-          <a:prstGeom prst="roundRect">
-            <a:avLst/>
-          </a:prstGeom>
-          <a:solidFill>
-            <a:srgbClr val="FCF8FF"/>
-          </a:solidFill>
-          <a:ln w="19050">
-            <a:solidFill>
-              <a:srgbClr val="C8AADC"/>
-            </a:solidFill>
-          </a:ln>
-        </p:spPr>
-        <p:style>
-          <a:lnRef idx="1">
-            <a:schemeClr val="accent1"/>
-          </a:lnRef>
-          <a:fillRef idx="3">
-            <a:schemeClr val="accent1"/>
-          </a:fillRef>
-          <a:effectRef idx="2">
-            <a:schemeClr val="accent1"/>
-          </a:effectRef>
-          <a:fontRef idx="minor">
-            <a:schemeClr val="lt1"/>
-          </a:fontRef>
-        </p:style>
-        <p:txBody>
-          <a:bodyPr rtlCol="0" anchor="ctr"/>
-          <a:lstStyle/>
-          <a:p>
-            <a:pPr algn="ctr"/>
-          </a:p>
-        </p:txBody>
-      </p:sp>
-      <p:sp>
-        <p:nvSpPr>
-          <p:cNvPr id="11" name="Oval 10"/>
-          <p:cNvSpPr/>
-          <p:nvPr/>
-        </p:nvSpPr>
-        <p:spPr>
-          <a:xfrm>
-            <a:off x="2255824" y="1828800"/>
-            <a:ext cx="384048" cy="384048"/>
-          </a:xfrm>
-          <a:prstGeom prst="ellipse">
-            <a:avLst/>
-          </a:prstGeom>
-          <a:solidFill>
-            <a:srgbClr val="784696"/>
-          </a:solidFill>
-          <a:ln>
-            <a:noFill/>
-          </a:ln>
-        </p:spPr>
-        <p:style>
-          <a:lnRef idx="1">
-            <a:schemeClr val="accent1"/>
-          </a:lnRef>
-          <a:fillRef idx="3">
-            <a:schemeClr val="accent1"/>
-          </a:fillRef>
-          <a:effectRef idx="2">
-            <a:schemeClr val="accent1"/>
-          </a:effectRef>
-          <a:fontRef idx="minor">
-            <a:schemeClr val="lt1"/>
-          </a:fontRef>
-        </p:style>
-        <p:txBody>
-          <a:bodyPr rtlCol="0" anchor="ctr"/>
-          <a:lstStyle/>
-          <a:p>
-            <a:pPr algn="ctr"/>
-          </a:p>
-        </p:txBody>
-      </p:sp>
-      <p:sp>
-        <p:nvSpPr>
-          <p:cNvPr id="12" name="TextBox 11"/>
-          <p:cNvSpPr txBox="1"/>
-          <p:nvPr/>
-        </p:nvSpPr>
-        <p:spPr>
-          <a:xfrm>
-            <a:off x="2255824" y="1847088"/>
-            <a:ext cx="384048" cy="365760"/>
-          </a:xfrm>
-          <a:prstGeom prst="rect">
-            <a:avLst/>
-          </a:prstGeom>
-          <a:noFill/>
-        </p:spPr>
-        <p:txBody>
-          <a:bodyPr wrap="none">
-            <a:spAutoFit/>
-          </a:bodyPr>
-          <a:lstStyle/>
-          <a:p>
-            <a:pPr algn="ctr">
-              <a:spcAft>
-                <a:spcPts val="1000"/>
-              </a:spcAft>
-            </a:pPr>
-            <a:r>
-              <a:rPr sz="1600" b="1">
-                <a:solidFill>
-                  <a:srgbClr val="FFFFFF"/>
-                </a:solidFill>
-                <a:latin typeface="Microsoft YaHei"/>
-              </a:rPr>
-              <a:t>1</a:t>
-            </a:r>
-          </a:p>
-        </p:txBody>
-      </p:sp>
-      <p:sp>
-        <p:nvSpPr>
-          <p:cNvPr id="13" name="TextBox 12"/>
-          <p:cNvSpPr txBox="1"/>
-          <p:nvPr/>
-        </p:nvSpPr>
-        <p:spPr>
-          <a:xfrm>
-            <a:off x="2758744" y="1810512"/>
-            <a:ext cx="7772400" cy="502920"/>
-          </a:xfrm>
-          <a:prstGeom prst="rect">
-            <a:avLst/>
-          </a:prstGeom>
-          <a:noFill/>
-        </p:spPr>
-        <p:txBody>
-          <a:bodyPr wrap="none">
-            <a:spAutoFit/>
-          </a:bodyPr>
-          <a:lstStyle/>
-          <a:p>
-            <a:pPr algn="l">
-              <a:spcAft>
-                <a:spcPts val="1000"/>
-              </a:spcAft>
-            </a:pPr>
-            <a:r>
-              <a:rPr sz="2400" b="0">
-                <a:solidFill>
-                  <a:srgbClr val="3C2850"/>
-                </a:solidFill>
-                <a:latin typeface="Microsoft YaHei"/>
-              </a:rPr>
-              <a:t>必做：用150字概括《皇帝的新装》的故事</a:t>
-            </a:r>
-          </a:p>
-        </p:txBody>
-      </p:sp>
-      <p:sp>
-        <p:nvSpPr>
-          <p:cNvPr id="14" name="Oval 13"/>
-          <p:cNvSpPr/>
-          <p:nvPr/>
-        </p:nvSpPr>
-        <p:spPr>
-          <a:xfrm>
-            <a:off x="2255824" y="2395728"/>
-            <a:ext cx="384048" cy="384048"/>
-          </a:xfrm>
-          <a:prstGeom prst="ellipse">
-            <a:avLst/>
-          </a:prstGeom>
-          <a:solidFill>
-            <a:srgbClr val="784696"/>
-          </a:solidFill>
-          <a:ln>
-            <a:noFill/>
-          </a:ln>
-        </p:spPr>
-        <p:style>
-          <a:lnRef idx="1">
-            <a:schemeClr val="accent1"/>
-          </a:lnRef>
-          <a:fillRef idx="3">
-            <a:schemeClr val="accent1"/>
-          </a:fillRef>
-          <a:effectRef idx="2">
-            <a:schemeClr val="accent1"/>
-          </a:effectRef>
-          <a:fontRef idx="minor">
-            <a:schemeClr val="lt1"/>
-          </a:fontRef>
-        </p:style>
-        <p:txBody>
-          <a:bodyPr rtlCol="0" anchor="ctr"/>
-          <a:lstStyle/>
-          <a:p>
-            <a:pPr algn="ctr"/>
-          </a:p>
-        </p:txBody>
-      </p:sp>
-      <p:sp>
-        <p:nvSpPr>
-          <p:cNvPr id="15" name="TextBox 14"/>
-          <p:cNvSpPr txBox="1"/>
-          <p:nvPr/>
-        </p:nvSpPr>
-        <p:spPr>
-          <a:xfrm>
-            <a:off x="2255824" y="2414016"/>
-            <a:ext cx="384048" cy="365760"/>
-          </a:xfrm>
-          <a:prstGeom prst="rect">
-            <a:avLst/>
-          </a:prstGeom>
-          <a:noFill/>
-        </p:spPr>
-        <p:txBody>
-          <a:bodyPr wrap="none">
-            <a:spAutoFit/>
-          </a:bodyPr>
-          <a:lstStyle/>
-          <a:p>
-            <a:pPr algn="ctr">
-              <a:spcAft>
-                <a:spcPts val="1000"/>
-              </a:spcAft>
-            </a:pPr>
-            <a:r>
-              <a:rPr sz="1600" b="1">
-                <a:solidFill>
-                  <a:srgbClr val="FFFFFF"/>
-                </a:solidFill>
-                <a:latin typeface="Microsoft YaHei"/>
-              </a:rPr>
-              <a:t>2</a:t>
-            </a:r>
-          </a:p>
-        </p:txBody>
-      </p:sp>
-      <p:sp>
-        <p:nvSpPr>
-          <p:cNvPr id="16" name="TextBox 15"/>
-          <p:cNvSpPr txBox="1"/>
-          <p:nvPr/>
-        </p:nvSpPr>
-        <p:spPr>
-          <a:xfrm>
-            <a:off x="2758744" y="2377440"/>
-            <a:ext cx="7772400" cy="502920"/>
+            <a:off x="2713024" y="2377440"/>
+            <a:ext cx="7863840" cy="457200"/>
           </a:xfrm>
           <a:prstGeom prst="rect">
             <a:avLst/>

--- a/第六单元PPT/第22课 皇帝的新装.pptx
+++ b/第六单元PPT/第22课 皇帝的新装.pptx
@@ -13,6 +13,7 @@
     <p:sldId id="261" r:id="rId12"/>
     <p:sldId id="262" r:id="rId13"/>
     <p:sldId id="263" r:id="rId14"/>
+    <p:sldId id="264" r:id="rId15"/>
   </p:sldIdLst>
   <p:sldSz cx="12191695" cy="6858000" type="screen4x3"/>
   <p:notesSz cx="6858000" cy="9144000"/>
@@ -3095,20 +3096,12 @@
         <p:nvPr/>
       </p:nvGrpSpPr>
       <p:grpSpPr/>
-      <p:pic>
-        <p:nvPicPr>
-          <p:cNvPr id="2" name="Picture 1" descr="bg_emperor.png"/>
-          <p:cNvPicPr>
-            <a:picLocks noChangeAspect="1"/>
-          </p:cNvPicPr>
-          <p:nvPr/>
-        </p:nvPicPr>
-        <p:blipFill>
-          <a:blip r:embed="rId2"/>
-          <a:stretch>
-            <a:fillRect/>
-          </a:stretch>
-        </p:blipFill>
+      <p:sp>
+        <p:nvSpPr>
+          <p:cNvPr id="2" name="Rectangle 1"/>
+          <p:cNvSpPr/>
+          <p:nvPr/>
+        </p:nvSpPr>
         <p:spPr>
           <a:xfrm>
             <a:off x="0" y="0"/>
@@ -3117,27 +3110,11 @@
           <a:prstGeom prst="rect">
             <a:avLst/>
           </a:prstGeom>
-        </p:spPr>
-      </p:pic>
-      <p:sp>
-        <p:nvSpPr>
-          <p:cNvPr id="3" name="Rectangle 2"/>
-          <p:cNvSpPr/>
-          <p:nvPr/>
-        </p:nvSpPr>
-        <p:spPr>
-          <a:xfrm>
-            <a:off x="292608" y="274320"/>
-            <a:ext cx="11594592" cy="6300216"/>
-          </a:xfrm>
-          <a:prstGeom prst="rect">
-            <a:avLst/>
-          </a:prstGeom>
-          <a:noFill/>
-          <a:ln w="31750">
-            <a:solidFill>
-              <a:srgbClr val="825AA0"/>
-            </a:solidFill>
+          <a:solidFill>
+            <a:srgbClr val="FFFFFF"/>
+          </a:solidFill>
+          <a:ln>
+            <a:noFill/>
           </a:ln>
         </p:spPr>
         <p:style>
@@ -3162,73 +3139,103 @@
           </a:p>
         </p:txBody>
       </p:sp>
-      <p:pic>
-        <p:nvPicPr>
-          <p:cNvPr id="4" name="Picture 3" descr="corner_emperor_tl.png"/>
-          <p:cNvPicPr>
-            <a:picLocks noChangeAspect="1"/>
-          </p:cNvPicPr>
-          <p:nvPr/>
-        </p:nvPicPr>
-        <p:blipFill>
-          <a:blip r:embed="rId3"/>
-          <a:stretch>
-            <a:fillRect/>
-          </a:stretch>
-        </p:blipFill>
-        <p:spPr>
-          <a:xfrm>
-            <a:off x="-45720" y="-45720"/>
-            <a:ext cx="2011680" cy="2011680"/>
-          </a:xfrm>
-          <a:prstGeom prst="rect">
-            <a:avLst/>
-          </a:prstGeom>
-        </p:spPr>
-      </p:pic>
-      <p:pic>
-        <p:nvPicPr>
-          <p:cNvPr id="5" name="Picture 4" descr="corner_emperor_tr.png"/>
-          <p:cNvPicPr>
-            <a:picLocks noChangeAspect="1"/>
-          </p:cNvPicPr>
-          <p:nvPr/>
-        </p:nvPicPr>
-        <p:blipFill>
-          <a:blip r:embed="rId4"/>
-          <a:stretch>
-            <a:fillRect/>
-          </a:stretch>
-        </p:blipFill>
-        <p:spPr>
-          <a:xfrm>
-            <a:off x="9875520" y="-45720"/>
-            <a:ext cx="2011680" cy="2011680"/>
-          </a:xfrm>
-          <a:prstGeom prst="rect">
-            <a:avLst/>
-          </a:prstGeom>
-        </p:spPr>
-      </p:pic>
-      <p:sp>
-        <p:nvSpPr>
-          <p:cNvPr id="6" name="Rectangle 5"/>
+      <p:sp>
+        <p:nvSpPr>
+          <p:cNvPr id="3" name="TextBox 2"/>
+          <p:cNvSpPr txBox="1"/>
+          <p:nvPr/>
+        </p:nvSpPr>
+        <p:spPr>
+          <a:xfrm>
+            <a:off x="411480" y="320040"/>
+            <a:ext cx="1097280" cy="274320"/>
+          </a:xfrm>
+          <a:prstGeom prst="rect">
+            <a:avLst/>
+          </a:prstGeom>
+          <a:noFill/>
+        </p:spPr>
+        <p:txBody>
+          <a:bodyPr wrap="square" anchor="t">
+            <a:spAutoFit/>
+          </a:bodyPr>
+          <a:lstStyle/>
+          <a:p>
+            <a:pPr algn="l">
+              <a:spcAft>
+                <a:spcPts val="200"/>
+              </a:spcAft>
+            </a:pPr>
+            <a:r>
+              <a:rPr sz="1400" b="1">
+                <a:solidFill>
+                  <a:srgbClr val="000000"/>
+                </a:solidFill>
+                <a:latin typeface="Arial"/>
+              </a:rPr>
+              <a:t>01</a:t>
+            </a:r>
+          </a:p>
+        </p:txBody>
+      </p:sp>
+      <p:sp>
+        <p:nvSpPr>
+          <p:cNvPr id="4" name="TextBox 3"/>
+          <p:cNvSpPr txBox="1"/>
+          <p:nvPr/>
+        </p:nvSpPr>
+        <p:spPr>
+          <a:xfrm>
+            <a:off x="411480" y="914400"/>
+            <a:ext cx="11368735" cy="2377440"/>
+          </a:xfrm>
+          <a:prstGeom prst="rect">
+            <a:avLst/>
+          </a:prstGeom>
+          <a:noFill/>
+        </p:spPr>
+        <p:txBody>
+          <a:bodyPr wrap="square" anchor="ctr">
+            <a:spAutoFit/>
+          </a:bodyPr>
+          <a:lstStyle/>
+          <a:p>
+            <a:pPr algn="ctr">
+              <a:spcAft>
+                <a:spcPts val="200"/>
+              </a:spcAft>
+            </a:pPr>
+            <a:r>
+              <a:rPr sz="7200" b="1">
+                <a:solidFill>
+                  <a:srgbClr val="000000"/>
+                </a:solidFill>
+                <a:latin typeface="Arial"/>
+              </a:rPr>
+              <a:t>皇帝的新装</a:t>
+            </a:r>
+          </a:p>
+        </p:txBody>
+      </p:sp>
+      <p:sp>
+        <p:nvSpPr>
+          <p:cNvPr id="5" name="Rectangle 4"/>
           <p:cNvSpPr/>
           <p:nvPr/>
         </p:nvSpPr>
         <p:spPr>
           <a:xfrm>
-            <a:off x="292608" y="274320"/>
-            <a:ext cx="11594592" cy="6300216"/>
-          </a:xfrm>
-          <a:prstGeom prst="rect">
-            <a:avLst/>
-          </a:prstGeom>
-          <a:noFill/>
-          <a:ln w="31750">
-            <a:solidFill>
-              <a:srgbClr val="825AA0"/>
-            </a:solidFill>
+            <a:off x="1783080" y="3520440"/>
+            <a:ext cx="8625535" cy="502920"/>
+          </a:xfrm>
+          <a:prstGeom prst="rect">
+            <a:avLst/>
+          </a:prstGeom>
+          <a:solidFill>
+            <a:srgbClr val="FFE600"/>
+          </a:solidFill>
+          <a:ln>
+            <a:noFill/>
           </a:ln>
         </p:spPr>
         <p:style>
@@ -3255,44 +3262,79 @@
       </p:sp>
       <p:sp>
         <p:nvSpPr>
-          <p:cNvPr id="7" name="Rectangle 6"/>
-          <p:cNvSpPr/>
-          <p:nvPr/>
-        </p:nvSpPr>
-        <p:spPr>
-          <a:xfrm>
-            <a:off x="347472" y="329184"/>
-            <a:ext cx="11484864" cy="6190488"/>
+          <p:cNvPr id="6" name="TextBox 5"/>
+          <p:cNvSpPr txBox="1"/>
+          <p:nvPr/>
+        </p:nvSpPr>
+        <p:spPr>
+          <a:xfrm>
+            <a:off x="1783080" y="3566160"/>
+            <a:ext cx="8625535" cy="411480"/>
           </a:xfrm>
           <a:prstGeom prst="rect">
             <a:avLst/>
           </a:prstGeom>
           <a:noFill/>
-          <a:ln w="12700">
-            <a:solidFill>
-              <a:srgbClr val="C8AADC"/>
-            </a:solidFill>
-          </a:ln>
-        </p:spPr>
-        <p:style>
-          <a:lnRef idx="1">
-            <a:schemeClr val="accent1"/>
-          </a:lnRef>
-          <a:fillRef idx="3">
-            <a:schemeClr val="accent1"/>
-          </a:fillRef>
-          <a:effectRef idx="2">
-            <a:schemeClr val="accent1"/>
-          </a:effectRef>
-          <a:fontRef idx="minor">
-            <a:schemeClr val="lt1"/>
-          </a:fontRef>
-        </p:style>
-        <p:txBody>
-          <a:bodyPr rtlCol="0" anchor="ctr"/>
-          <a:lstStyle/>
-          <a:p>
-            <a:pPr algn="ctr"/>
+        </p:spPr>
+        <p:txBody>
+          <a:bodyPr wrap="square" anchor="ctr">
+            <a:spAutoFit/>
+          </a:bodyPr>
+          <a:lstStyle/>
+          <a:p>
+            <a:pPr algn="ctr">
+              <a:spcAft>
+                <a:spcPts val="200"/>
+              </a:spcAft>
+            </a:pPr>
+            <a:r>
+              <a:rPr sz="2200" b="1">
+                <a:solidFill>
+                  <a:srgbClr val="000000"/>
+                </a:solidFill>
+                <a:latin typeface="Arial"/>
+              </a:rPr>
+              <a:t>现实的讽刺与人性的镜子</a:t>
+            </a:r>
+          </a:p>
+        </p:txBody>
+      </p:sp>
+      <p:sp>
+        <p:nvSpPr>
+          <p:cNvPr id="7" name="TextBox 6"/>
+          <p:cNvSpPr txBox="1"/>
+          <p:nvPr/>
+        </p:nvSpPr>
+        <p:spPr>
+          <a:xfrm>
+            <a:off x="411480" y="4389120"/>
+            <a:ext cx="11368735" cy="457200"/>
+          </a:xfrm>
+          <a:prstGeom prst="rect">
+            <a:avLst/>
+          </a:prstGeom>
+          <a:noFill/>
+        </p:spPr>
+        <p:txBody>
+          <a:bodyPr wrap="square" anchor="t">
+            <a:spAutoFit/>
+          </a:bodyPr>
+          <a:lstStyle/>
+          <a:p>
+            <a:pPr algn="ctr">
+              <a:spcAft>
+                <a:spcPts val="200"/>
+              </a:spcAft>
+            </a:pPr>
+            <a:r>
+              <a:rPr sz="1600" b="0">
+                <a:solidFill>
+                  <a:srgbClr val="000000"/>
+                </a:solidFill>
+                <a:latin typeface="Arial"/>
+              </a:rPr>
+              <a:t>［丹麦］安徒生  ·  世界儿童文学巨匠</a:t>
+            </a:r>
           </a:p>
         </p:txBody>
       </p:sp>
@@ -3304,8 +3346,8 @@
         </p:nvSpPr>
         <p:spPr>
           <a:xfrm>
-            <a:off x="1371600" y="1828800"/>
-            <a:ext cx="9418320" cy="1828800"/>
+            <a:off x="411480" y="4937760"/>
+            <a:ext cx="11368735" cy="365760"/>
           </a:xfrm>
           <a:prstGeom prst="rect">
             <a:avLst/>
@@ -3313,56 +3355,24 @@
           <a:noFill/>
         </p:spPr>
         <p:txBody>
-          <a:bodyPr wrap="none">
+          <a:bodyPr wrap="square" anchor="t">
             <a:spAutoFit/>
           </a:bodyPr>
           <a:lstStyle/>
           <a:p>
             <a:pPr algn="ctr">
               <a:spcAft>
-                <a:spcPts val="1000"/>
-              </a:spcAft>
-            </a:pPr>
-            <a:r>
-              <a:rPr sz="5200" b="1">
-                <a:solidFill>
-                  <a:srgbClr val="784696"/>
-                </a:solidFill>
-                <a:latin typeface="Microsoft YaHei"/>
-              </a:rPr>
-              <a:t>皇帝的新装</a:t>
-            </a:r>
-          </a:p>
-          <a:p>
-            <a:pPr algn="ctr">
-              <a:spcAft>
-                <a:spcPts val="1000"/>
-              </a:spcAft>
-            </a:pPr>
-            <a:r>
-              <a:rPr sz="2600" b="0">
-                <a:solidFill>
-                  <a:srgbClr val="3C2850"/>
-                </a:solidFill>
-                <a:latin typeface="Microsoft YaHei"/>
-              </a:rPr>
-              <a:t>第22课 · 第四、五课时 · 真实与虚假</a:t>
-            </a:r>
-          </a:p>
-          <a:p>
-            <a:pPr algn="ctr">
-              <a:spcAft>
-                <a:spcPts val="1000"/>
-              </a:spcAft>
-            </a:pPr>
-            <a:r>
-              <a:rPr sz="2000" b="1">
-                <a:solidFill>
-                  <a:srgbClr val="C8AADC"/>
-                </a:solidFill>
-                <a:latin typeface="Microsoft YaHei"/>
-              </a:rPr>
-              <a:t>含课堂笔记 · 2026版</a:t>
+                <a:spcPts val="200"/>
+              </a:spcAft>
+            </a:pPr>
+            <a:r>
+              <a:rPr sz="1400" b="1">
+                <a:solidFill>
+                  <a:srgbClr val="000000"/>
+                </a:solidFill>
+                <a:latin typeface="Arial"/>
+              </a:rPr>
+              <a:t>想象力博物馆 · 真实与虚假</a:t>
             </a:r>
           </a:p>
         </p:txBody>
@@ -3375,14 +3385,14 @@
         </p:nvSpPr>
         <p:spPr>
           <a:xfrm>
-            <a:off x="3200400" y="5029200"/>
-            <a:ext cx="5760720" cy="27432"/>
+            <a:off x="411480" y="5989320"/>
+            <a:ext cx="11368735" cy="25400"/>
           </a:xfrm>
           <a:prstGeom prst="rect">
             <a:avLst/>
           </a:prstGeom>
           <a:solidFill>
-            <a:srgbClr val="C8AADC"/>
+            <a:srgbClr val="000000"/>
           </a:solidFill>
           <a:ln>
             <a:noFill/>
@@ -3428,20 +3438,12 @@
         <p:nvPr/>
       </p:nvGrpSpPr>
       <p:grpSpPr/>
-      <p:pic>
-        <p:nvPicPr>
-          <p:cNvPr id="2" name="Picture 1" descr="bg_emperor.png"/>
-          <p:cNvPicPr>
-            <a:picLocks noChangeAspect="1"/>
-          </p:cNvPicPr>
-          <p:nvPr/>
-        </p:nvPicPr>
-        <p:blipFill>
-          <a:blip r:embed="rId2"/>
-          <a:stretch>
-            <a:fillRect/>
-          </a:stretch>
-        </p:blipFill>
+      <p:sp>
+        <p:nvSpPr>
+          <p:cNvPr id="2" name="Rectangle 1"/>
+          <p:cNvSpPr/>
+          <p:nvPr/>
+        </p:nvSpPr>
         <p:spPr>
           <a:xfrm>
             <a:off x="0" y="0"/>
@@ -3450,27 +3452,11 @@
           <a:prstGeom prst="rect">
             <a:avLst/>
           </a:prstGeom>
-        </p:spPr>
-      </p:pic>
-      <p:sp>
-        <p:nvSpPr>
-          <p:cNvPr id="3" name="Rectangle 2"/>
-          <p:cNvSpPr/>
-          <p:nvPr/>
-        </p:nvSpPr>
-        <p:spPr>
-          <a:xfrm>
-            <a:off x="292608" y="274320"/>
-            <a:ext cx="11594592" cy="6300216"/>
-          </a:xfrm>
-          <a:prstGeom prst="rect">
-            <a:avLst/>
-          </a:prstGeom>
-          <a:noFill/>
-          <a:ln w="31750">
-            <a:solidFill>
-              <a:srgbClr val="825AA0"/>
-            </a:solidFill>
+          <a:solidFill>
+            <a:srgbClr val="FFFFFF"/>
+          </a:solidFill>
+          <a:ln>
+            <a:noFill/>
           </a:ln>
         </p:spPr>
         <p:style>
@@ -3495,70 +3481,100 @@
           </a:p>
         </p:txBody>
       </p:sp>
-      <p:pic>
-        <p:nvPicPr>
-          <p:cNvPr id="4" name="Picture 3" descr="corner_emperor_tl.png"/>
-          <p:cNvPicPr>
-            <a:picLocks noChangeAspect="1"/>
-          </p:cNvPicPr>
-          <p:nvPr/>
-        </p:nvPicPr>
-        <p:blipFill>
-          <a:blip r:embed="rId3"/>
-          <a:stretch>
-            <a:fillRect/>
-          </a:stretch>
-        </p:blipFill>
-        <p:spPr>
-          <a:xfrm>
-            <a:off x="-45720" y="-45720"/>
-            <a:ext cx="2011680" cy="2011680"/>
-          </a:xfrm>
-          <a:prstGeom prst="rect">
-            <a:avLst/>
-          </a:prstGeom>
-        </p:spPr>
-      </p:pic>
-      <p:pic>
-        <p:nvPicPr>
-          <p:cNvPr id="5" name="Picture 4" descr="corner_emperor_tr.png"/>
-          <p:cNvPicPr>
-            <a:picLocks noChangeAspect="1"/>
-          </p:cNvPicPr>
-          <p:nvPr/>
-        </p:nvPicPr>
-        <p:blipFill>
-          <a:blip r:embed="rId4"/>
-          <a:stretch>
-            <a:fillRect/>
-          </a:stretch>
-        </p:blipFill>
-        <p:spPr>
-          <a:xfrm>
-            <a:off x="9875520" y="-45720"/>
-            <a:ext cx="2011680" cy="2011680"/>
-          </a:xfrm>
-          <a:prstGeom prst="rect">
-            <a:avLst/>
-          </a:prstGeom>
-        </p:spPr>
-      </p:pic>
-      <p:sp>
-        <p:nvSpPr>
-          <p:cNvPr id="6" name="Rounded Rectangle 5"/>
+      <p:sp>
+        <p:nvSpPr>
+          <p:cNvPr id="3" name="TextBox 2"/>
+          <p:cNvSpPr txBox="1"/>
+          <p:nvPr/>
+        </p:nvSpPr>
+        <p:spPr>
+          <a:xfrm>
+            <a:off x="411480" y="320040"/>
+            <a:ext cx="1097280" cy="274320"/>
+          </a:xfrm>
+          <a:prstGeom prst="rect">
+            <a:avLst/>
+          </a:prstGeom>
+          <a:noFill/>
+        </p:spPr>
+        <p:txBody>
+          <a:bodyPr wrap="square" anchor="t">
+            <a:spAutoFit/>
+          </a:bodyPr>
+          <a:lstStyle/>
+          <a:p>
+            <a:pPr algn="l">
+              <a:spcAft>
+                <a:spcPts val="200"/>
+              </a:spcAft>
+            </a:pPr>
+            <a:r>
+              <a:rPr sz="1400" b="1">
+                <a:solidFill>
+                  <a:srgbClr val="000000"/>
+                </a:solidFill>
+                <a:latin typeface="Arial"/>
+              </a:rPr>
+              <a:t>02</a:t>
+            </a:r>
+          </a:p>
+        </p:txBody>
+      </p:sp>
+      <p:sp>
+        <p:nvSpPr>
+          <p:cNvPr id="4" name="TextBox 3"/>
+          <p:cNvSpPr txBox="1"/>
+          <p:nvPr/>
+        </p:nvSpPr>
+        <p:spPr>
+          <a:xfrm>
+            <a:off x="411480" y="320040"/>
+            <a:ext cx="11368735" cy="502920"/>
+          </a:xfrm>
+          <a:prstGeom prst="rect">
+            <a:avLst/>
+          </a:prstGeom>
+          <a:noFill/>
+        </p:spPr>
+        <p:txBody>
+          <a:bodyPr wrap="square" anchor="t">
+            <a:spAutoFit/>
+          </a:bodyPr>
+          <a:lstStyle/>
+          <a:p>
+            <a:pPr algn="l">
+              <a:spcAft>
+                <a:spcPts val="200"/>
+              </a:spcAft>
+            </a:pPr>
+            <a:r>
+              <a:rPr sz="2800" b="1">
+                <a:solidFill>
+                  <a:srgbClr val="000000"/>
+                </a:solidFill>
+                <a:latin typeface="Arial"/>
+              </a:rPr>
+              <a:t>单元情境与学习目标</a:t>
+            </a:r>
+          </a:p>
+        </p:txBody>
+      </p:sp>
+      <p:sp>
+        <p:nvSpPr>
+          <p:cNvPr id="5" name="Rectangle 4"/>
           <p:cNvSpPr/>
           <p:nvPr/>
         </p:nvSpPr>
         <p:spPr>
           <a:xfrm>
-            <a:off x="502920" y="384048"/>
-            <a:ext cx="2011680" cy="384048"/>
-          </a:xfrm>
-          <a:prstGeom prst="roundRect">
+            <a:off x="411480" y="868680"/>
+            <a:ext cx="11368735" cy="25400"/>
+          </a:xfrm>
+          <a:prstGeom prst="rect">
             <a:avLst/>
           </a:prstGeom>
           <a:solidFill>
-            <a:srgbClr val="784696"/>
+            <a:srgbClr val="000000"/>
           </a:solidFill>
           <a:ln>
             <a:noFill/>
@@ -3588,102 +3604,24 @@
       </p:sp>
       <p:sp>
         <p:nvSpPr>
-          <p:cNvPr id="7" name="TextBox 6"/>
-          <p:cNvSpPr txBox="1"/>
-          <p:nvPr/>
-        </p:nvSpPr>
-        <p:spPr>
-          <a:xfrm>
-            <a:off x="502920" y="402336"/>
-            <a:ext cx="2011680" cy="347472"/>
-          </a:xfrm>
-          <a:prstGeom prst="rect">
-            <a:avLst/>
-          </a:prstGeom>
-          <a:noFill/>
-        </p:spPr>
-        <p:txBody>
-          <a:bodyPr wrap="none">
-            <a:spAutoFit/>
-          </a:bodyPr>
-          <a:lstStyle/>
-          <a:p>
-            <a:pPr algn="ctr">
-              <a:spcAft>
-                <a:spcPts val="1000"/>
-              </a:spcAft>
-            </a:pPr>
-            <a:r>
-              <a:rPr sz="1600" b="1">
-                <a:solidFill>
-                  <a:srgbClr val="FFFFFF"/>
-                </a:solidFill>
-                <a:latin typeface="Microsoft YaHei"/>
-              </a:rPr>
-              <a:t>知识要点</a:t>
-            </a:r>
-          </a:p>
-        </p:txBody>
-      </p:sp>
-      <p:sp>
-        <p:nvSpPr>
-          <p:cNvPr id="8" name="TextBox 7"/>
-          <p:cNvSpPr txBox="1"/>
-          <p:nvPr/>
-        </p:nvSpPr>
-        <p:spPr>
-          <a:xfrm>
-            <a:off x="1371600" y="384048"/>
-            <a:ext cx="9418320" cy="822960"/>
-          </a:xfrm>
-          <a:prstGeom prst="rect">
-            <a:avLst/>
-          </a:prstGeom>
-          <a:noFill/>
-        </p:spPr>
-        <p:txBody>
-          <a:bodyPr wrap="square">
-            <a:spAutoFit/>
-          </a:bodyPr>
-          <a:lstStyle/>
-          <a:p>
-            <a:pPr algn="ctr">
-              <a:spcAft>
-                <a:spcPts val="1000"/>
-              </a:spcAft>
-            </a:pPr>
-            <a:r>
-              <a:rPr sz="3400" b="1">
-                <a:solidFill>
-                  <a:srgbClr val="784696"/>
-                </a:solidFill>
-                <a:latin typeface="Microsoft YaHei"/>
-              </a:rPr>
-              <a:t>文学常识</a:t>
-            </a:r>
-          </a:p>
-        </p:txBody>
-      </p:sp>
-      <p:sp>
-        <p:nvSpPr>
-          <p:cNvPr id="9" name="Rounded Rectangle 8"/>
+          <p:cNvPr id="6" name="Rectangle 5"/>
           <p:cNvSpPr/>
           <p:nvPr/>
         </p:nvSpPr>
         <p:spPr>
           <a:xfrm>
-            <a:off x="1067104" y="1143000"/>
-            <a:ext cx="10058400" cy="3721608"/>
-          </a:xfrm>
-          <a:prstGeom prst="roundRect">
+            <a:off x="411480" y="1051560"/>
+            <a:ext cx="3200400" cy="2194560"/>
+          </a:xfrm>
+          <a:prstGeom prst="rect">
             <a:avLst/>
           </a:prstGeom>
           <a:solidFill>
-            <a:srgbClr val="FFFCEB"/>
+            <a:srgbClr val="FFFFFF"/>
           </a:solidFill>
           <a:ln w="25400">
             <a:solidFill>
-              <a:srgbClr val="825AA0"/>
+              <a:srgbClr val="000000"/>
             </a:solidFill>
           </a:ln>
         </p:spPr>
@@ -3711,23 +3649,144 @@
       </p:sp>
       <p:sp>
         <p:nvSpPr>
-          <p:cNvPr id="10" name="Rectangle 9"/>
+          <p:cNvPr id="7" name="TextBox 6"/>
+          <p:cNvSpPr txBox="1"/>
+          <p:nvPr/>
+        </p:nvSpPr>
+        <p:spPr>
+          <a:xfrm>
+            <a:off x="548640" y="1188720"/>
+            <a:ext cx="2926080" cy="1920240"/>
+          </a:xfrm>
+          <a:prstGeom prst="rect">
+            <a:avLst/>
+          </a:prstGeom>
+          <a:noFill/>
+        </p:spPr>
+        <p:txBody>
+          <a:bodyPr wrap="square" anchor="t">
+            <a:spAutoFit/>
+          </a:bodyPr>
+          <a:lstStyle/>
+          <a:p>
+            <a:pPr algn="l">
+              <a:spcAft>
+                <a:spcPts val="200"/>
+              </a:spcAft>
+            </a:pPr>
+            <a:r>
+              <a:rPr sz="1400" b="1">
+                <a:solidFill>
+                  <a:srgbClr val="000000"/>
+                </a:solidFill>
+                <a:latin typeface="Arial"/>
+              </a:rPr>
+              <a:t>单元</a:t>
+            </a:r>
+          </a:p>
+          <a:p>
+            <a:pPr algn="l">
+              <a:spcAft>
+                <a:spcPts val="200"/>
+              </a:spcAft>
+            </a:pPr>
+            <a:r>
+              <a:rPr sz="1400" b="1">
+                <a:solidFill>
+                  <a:srgbClr val="000000"/>
+                </a:solidFill>
+                <a:latin typeface="Arial"/>
+              </a:rPr>
+              <a:t>情境</a:t>
+            </a:r>
+          </a:p>
+          <a:p>
+            <a:pPr algn="l">
+              <a:spcAft>
+                <a:spcPts val="200"/>
+              </a:spcAft>
+            </a:pPr>
+            <a:r>
+              <a:rPr sz="600" b="0">
+                <a:solidFill>
+                  <a:srgbClr val="000000"/>
+                </a:solidFill>
+                <a:latin typeface="Arial"/>
+              </a:rPr>
+              <a:t/>
+            </a:r>
+          </a:p>
+          <a:p>
+            <a:pPr algn="l">
+              <a:spcAft>
+                <a:spcPts val="200"/>
+              </a:spcAft>
+            </a:pPr>
+            <a:r>
+              <a:rPr sz="1300" b="0">
+                <a:solidFill>
+                  <a:srgbClr val="000000"/>
+                </a:solidFill>
+                <a:latin typeface="Arial"/>
+              </a:rPr>
+              <a:t>探索想象与现实的交融。</a:t>
+            </a:r>
+          </a:p>
+          <a:p>
+            <a:pPr algn="l">
+              <a:spcAft>
+                <a:spcPts val="200"/>
+              </a:spcAft>
+            </a:pPr>
+            <a:r>
+              <a:rPr sz="1300" b="0">
+                <a:solidFill>
+                  <a:srgbClr val="000000"/>
+                </a:solidFill>
+                <a:latin typeface="Arial"/>
+              </a:rPr>
+              <a:t>在荒诞童话中照见真实，</a:t>
+            </a:r>
+          </a:p>
+          <a:p>
+            <a:pPr algn="l">
+              <a:spcAft>
+                <a:spcPts val="200"/>
+              </a:spcAft>
+            </a:pPr>
+            <a:r>
+              <a:rPr sz="1300" b="0">
+                <a:solidFill>
+                  <a:srgbClr val="000000"/>
+                </a:solidFill>
+                <a:latin typeface="Arial"/>
+              </a:rPr>
+              <a:t>在虚构故事里审视人心。</a:t>
+            </a:r>
+          </a:p>
+        </p:txBody>
+      </p:sp>
+      <p:sp>
+        <p:nvSpPr>
+          <p:cNvPr id="8" name="Rectangle 7"/>
           <p:cNvSpPr/>
           <p:nvPr/>
         </p:nvSpPr>
         <p:spPr>
           <a:xfrm>
-            <a:off x="1067104" y="1143000"/>
-            <a:ext cx="10058400" cy="384048"/>
+            <a:off x="3840480" y="1508760"/>
+            <a:ext cx="4572000" cy="3200400"/>
           </a:xfrm>
           <a:prstGeom prst="rect">
             <a:avLst/>
           </a:prstGeom>
           <a:solidFill>
-            <a:srgbClr val="784696"/>
+            <a:srgbClr val="FFE600"/>
           </a:solidFill>
-          <a:ln>
-            <a:noFill/>
+          <a:ln w="25400">
+            <a:solidFill>
+              <a:srgbClr val="000000"/>
+            </a:solidFill>
           </a:ln>
         </p:spPr>
         <p:style>
@@ -3754,14 +3813,14 @@
       </p:sp>
       <p:sp>
         <p:nvSpPr>
-          <p:cNvPr id="11" name="TextBox 10"/>
+          <p:cNvPr id="9" name="TextBox 8"/>
           <p:cNvSpPr txBox="1"/>
           <p:nvPr/>
         </p:nvSpPr>
         <p:spPr>
           <a:xfrm>
-            <a:off x="1067104" y="1179576"/>
-            <a:ext cx="10058400" cy="347472"/>
+            <a:off x="4023360" y="1691640"/>
+            <a:ext cx="4206240" cy="2834640"/>
           </a:xfrm>
           <a:prstGeom prst="rect">
             <a:avLst/>
@@ -3769,47 +3828,129 @@
           <a:noFill/>
         </p:spPr>
         <p:txBody>
-          <a:bodyPr wrap="none">
+          <a:bodyPr wrap="square" anchor="t">
             <a:spAutoFit/>
           </a:bodyPr>
           <a:lstStyle/>
           <a:p>
-            <a:pPr algn="ctr">
-              <a:spcAft>
-                <a:spcPts val="1000"/>
-              </a:spcAft>
-            </a:pPr>
-            <a:r>
-              <a:rPr sz="1800" b="1">
-                <a:solidFill>
-                  <a:srgbClr val="FFFFFF"/>
-                </a:solidFill>
-                <a:latin typeface="Microsoft YaHei"/>
-              </a:rPr>
-              <a:t>📝  课堂笔记  —  请摘抄要点</a:t>
-            </a:r>
-          </a:p>
-        </p:txBody>
-      </p:sp>
-      <p:sp>
-        <p:nvSpPr>
-          <p:cNvPr id="12" name="Rectangle 11"/>
+            <a:pPr algn="l">
+              <a:spcAft>
+                <a:spcPts val="200"/>
+              </a:spcAft>
+            </a:pPr>
+            <a:r>
+              <a:rPr sz="1600" b="1">
+                <a:solidFill>
+                  <a:srgbClr val="000000"/>
+                </a:solidFill>
+                <a:latin typeface="Arial"/>
+              </a:rPr>
+              <a:t>本课</a:t>
+            </a:r>
+          </a:p>
+          <a:p>
+            <a:pPr algn="l">
+              <a:spcAft>
+                <a:spcPts val="200"/>
+              </a:spcAft>
+            </a:pPr>
+            <a:r>
+              <a:rPr sz="1600" b="1">
+                <a:solidFill>
+                  <a:srgbClr val="000000"/>
+                </a:solidFill>
+                <a:latin typeface="Arial"/>
+              </a:rPr>
+              <a:t>目标</a:t>
+            </a:r>
+          </a:p>
+          <a:p>
+            <a:pPr algn="l">
+              <a:spcAft>
+                <a:spcPts val="200"/>
+              </a:spcAft>
+            </a:pPr>
+            <a:r>
+              <a:rPr sz="800" b="0">
+                <a:solidFill>
+                  <a:srgbClr val="000000"/>
+                </a:solidFill>
+                <a:latin typeface="Arial"/>
+              </a:rPr>
+              <a:t/>
+            </a:r>
+          </a:p>
+          <a:p>
+            <a:pPr algn="l">
+              <a:spcAft>
+                <a:spcPts val="200"/>
+              </a:spcAft>
+            </a:pPr>
+            <a:r>
+              <a:rPr sz="1400" b="1">
+                <a:solidFill>
+                  <a:srgbClr val="000000"/>
+                </a:solidFill>
+                <a:latin typeface="Arial"/>
+              </a:rPr>
+              <a:t>1. 受骗—展骗—穿骗—看骗—揭骗</a:t>
+            </a:r>
+          </a:p>
+          <a:p>
+            <a:pPr algn="l">
+              <a:spcAft>
+                <a:spcPts val="200"/>
+              </a:spcAft>
+            </a:pPr>
+            <a:r>
+              <a:rPr sz="1400" b="1">
+                <a:solidFill>
+                  <a:srgbClr val="000000"/>
+                </a:solidFill>
+                <a:latin typeface="Arial"/>
+              </a:rPr>
+              <a:t>2. 分析皇帝/大臣/百姓/孩子心理</a:t>
+            </a:r>
+          </a:p>
+          <a:p>
+            <a:pPr algn="l">
+              <a:spcAft>
+                <a:spcPts val="200"/>
+              </a:spcAft>
+            </a:pPr>
+            <a:r>
+              <a:rPr sz="1400" b="1">
+                <a:solidFill>
+                  <a:srgbClr val="000000"/>
+                </a:solidFill>
+                <a:latin typeface="Arial"/>
+              </a:rPr>
+              <a:t>3. 理解虚伪与真实的现实对应</a:t>
+            </a:r>
+          </a:p>
+        </p:txBody>
+      </p:sp>
+      <p:sp>
+        <p:nvSpPr>
+          <p:cNvPr id="10" name="Rectangle 9"/>
           <p:cNvSpPr/>
           <p:nvPr/>
         </p:nvSpPr>
         <p:spPr>
           <a:xfrm>
-            <a:off x="1570024" y="1527048"/>
-            <a:ext cx="27432" cy="3337560"/>
+            <a:off x="8641080" y="2148840"/>
+            <a:ext cx="3108960" cy="2560320"/>
           </a:xfrm>
           <a:prstGeom prst="rect">
             <a:avLst/>
           </a:prstGeom>
           <a:solidFill>
-            <a:srgbClr val="DC5050"/>
+            <a:srgbClr val="FFFFFF"/>
           </a:solidFill>
-          <a:ln>
-            <a:noFill/>
+          <a:ln w="25400">
+            <a:solidFill>
+              <a:srgbClr val="000000"/>
+            </a:solidFill>
           </a:ln>
         </p:spPr>
         <p:style>
@@ -3836,100 +3977,14 @@
       </p:sp>
       <p:sp>
         <p:nvSpPr>
-          <p:cNvPr id="13" name="Rectangle 12"/>
-          <p:cNvSpPr/>
-          <p:nvPr/>
-        </p:nvSpPr>
-        <p:spPr>
-          <a:xfrm>
-            <a:off x="1417320" y="2276856"/>
-            <a:ext cx="9601200" cy="13716"/>
-          </a:xfrm>
-          <a:prstGeom prst="rect">
-            <a:avLst/>
-          </a:prstGeom>
-          <a:solidFill>
-            <a:srgbClr val="D2C8AF"/>
-          </a:solidFill>
-          <a:ln>
-            <a:noFill/>
-          </a:ln>
-        </p:spPr>
-        <p:style>
-          <a:lnRef idx="1">
-            <a:schemeClr val="accent1"/>
-          </a:lnRef>
-          <a:fillRef idx="3">
-            <a:schemeClr val="accent1"/>
-          </a:fillRef>
-          <a:effectRef idx="2">
-            <a:schemeClr val="accent1"/>
-          </a:effectRef>
-          <a:fontRef idx="minor">
-            <a:schemeClr val="lt1"/>
-          </a:fontRef>
-        </p:style>
-        <p:txBody>
-          <a:bodyPr rtlCol="0" anchor="ctr"/>
-          <a:lstStyle/>
-          <a:p>
-            <a:pPr algn="ctr"/>
-          </a:p>
-        </p:txBody>
-      </p:sp>
-      <p:sp>
-        <p:nvSpPr>
-          <p:cNvPr id="14" name="Rounded Rectangle 13"/>
-          <p:cNvSpPr/>
-          <p:nvPr/>
-        </p:nvSpPr>
-        <p:spPr>
-          <a:xfrm>
-            <a:off x="1600200" y="1627632"/>
-            <a:ext cx="1280160" cy="347472"/>
-          </a:xfrm>
-          <a:prstGeom prst="roundRect">
-            <a:avLst/>
-          </a:prstGeom>
-          <a:solidFill>
-            <a:srgbClr val="C8AADC"/>
-          </a:solidFill>
-          <a:ln>
-            <a:noFill/>
-          </a:ln>
-        </p:spPr>
-        <p:style>
-          <a:lnRef idx="1">
-            <a:schemeClr val="accent1"/>
-          </a:lnRef>
-          <a:fillRef idx="3">
-            <a:schemeClr val="accent1"/>
-          </a:fillRef>
-          <a:effectRef idx="2">
-            <a:schemeClr val="accent1"/>
-          </a:effectRef>
-          <a:fontRef idx="minor">
-            <a:schemeClr val="lt1"/>
-          </a:fontRef>
-        </p:style>
-        <p:txBody>
-          <a:bodyPr rtlCol="0" anchor="ctr"/>
-          <a:lstStyle/>
-          <a:p>
-            <a:pPr algn="ctr"/>
-          </a:p>
-        </p:txBody>
-      </p:sp>
-      <p:sp>
-        <p:nvSpPr>
-          <p:cNvPr id="15" name="TextBox 14"/>
+          <p:cNvPr id="11" name="TextBox 10"/>
           <p:cNvSpPr txBox="1"/>
           <p:nvPr/>
         </p:nvSpPr>
         <p:spPr>
           <a:xfrm>
-            <a:off x="1600200" y="1645920"/>
-            <a:ext cx="1280160" cy="310896"/>
+            <a:off x="8778240" y="2331720"/>
+            <a:ext cx="2834640" cy="2194560"/>
           </a:xfrm>
           <a:prstGeom prst="rect">
             <a:avLst/>
@@ -3937,38 +3992,118 @@
           <a:noFill/>
         </p:spPr>
         <p:txBody>
-          <a:bodyPr wrap="none">
+          <a:bodyPr wrap="square" anchor="t">
             <a:spAutoFit/>
           </a:bodyPr>
           <a:lstStyle/>
           <a:p>
-            <a:pPr algn="ctr">
-              <a:spcAft>
-                <a:spcPts val="1000"/>
-              </a:spcAft>
-            </a:pPr>
-            <a:r>
-              <a:rPr sz="1800" b="1">
-                <a:solidFill>
-                  <a:srgbClr val="3C2850"/>
-                </a:solidFill>
-                <a:latin typeface="Microsoft YaHei"/>
-              </a:rPr>
-              <a:t>作者</a:t>
-            </a:r>
-          </a:p>
-        </p:txBody>
-      </p:sp>
-      <p:sp>
-        <p:nvSpPr>
-          <p:cNvPr id="16" name="TextBox 15"/>
+            <a:pPr algn="r">
+              <a:spcAft>
+                <a:spcPts val="200"/>
+              </a:spcAft>
+            </a:pPr>
+            <a:r>
+              <a:rPr sz="1400" b="1">
+                <a:solidFill>
+                  <a:srgbClr val="000000"/>
+                </a:solidFill>
+                <a:latin typeface="Arial"/>
+              </a:rPr>
+              <a:t>策展</a:t>
+            </a:r>
+          </a:p>
+          <a:p>
+            <a:pPr algn="r">
+              <a:spcAft>
+                <a:spcPts val="200"/>
+              </a:spcAft>
+            </a:pPr>
+            <a:r>
+              <a:rPr sz="1400" b="1">
+                <a:solidFill>
+                  <a:srgbClr val="000000"/>
+                </a:solidFill>
+                <a:latin typeface="Arial"/>
+              </a:rPr>
+              <a:t>主题</a:t>
+            </a:r>
+          </a:p>
+          <a:p>
+            <a:pPr algn="r">
+              <a:spcAft>
+                <a:spcPts val="200"/>
+              </a:spcAft>
+            </a:pPr>
+            <a:r>
+              <a:rPr sz="600" b="0">
+                <a:solidFill>
+                  <a:srgbClr val="000000"/>
+                </a:solidFill>
+                <a:latin typeface="Arial"/>
+              </a:rPr>
+              <a:t/>
+            </a:r>
+          </a:p>
+          <a:p>
+            <a:pPr algn="r">
+              <a:spcAft>
+                <a:spcPts val="200"/>
+              </a:spcAft>
+            </a:pPr>
+            <a:r>
+              <a:rPr sz="3600" b="1">
+                <a:solidFill>
+                  <a:srgbClr val="000000"/>
+                </a:solidFill>
+                <a:latin typeface="Arial"/>
+              </a:rPr>
+              <a:t>真实</a:t>
+            </a:r>
+          </a:p>
+          <a:p>
+            <a:pPr algn="r">
+              <a:spcAft>
+                <a:spcPts val="200"/>
+              </a:spcAft>
+            </a:pPr>
+            <a:r>
+              <a:rPr sz="2000" b="1">
+                <a:solidFill>
+                  <a:srgbClr val="000000"/>
+                </a:solidFill>
+                <a:latin typeface="Arial"/>
+              </a:rPr>
+              <a:t>与</a:t>
+            </a:r>
+          </a:p>
+          <a:p>
+            <a:pPr algn="r">
+              <a:spcAft>
+                <a:spcPts val="200"/>
+              </a:spcAft>
+            </a:pPr>
+            <a:r>
+              <a:rPr sz="3600" b="1">
+                <a:solidFill>
+                  <a:srgbClr val="000000"/>
+                </a:solidFill>
+                <a:latin typeface="Arial"/>
+              </a:rPr>
+              <a:t>虚假</a:t>
+            </a:r>
+          </a:p>
+        </p:txBody>
+      </p:sp>
+      <p:sp>
+        <p:nvSpPr>
+          <p:cNvPr id="12" name="TextBox 11"/>
           <p:cNvSpPr txBox="1"/>
           <p:nvPr/>
         </p:nvSpPr>
         <p:spPr>
           <a:xfrm>
-            <a:off x="3017520" y="1627632"/>
-            <a:ext cx="7498079" cy="658368"/>
+            <a:off x="411480" y="5029200"/>
+            <a:ext cx="2286000" cy="1371600"/>
           </a:xfrm>
           <a:prstGeom prst="rect">
             <a:avLst/>
@@ -3976,516 +4111,24 @@
           <a:noFill/>
         </p:spPr>
         <p:txBody>
-          <a:bodyPr wrap="none">
+          <a:bodyPr wrap="square" anchor="t">
             <a:spAutoFit/>
           </a:bodyPr>
           <a:lstStyle/>
           <a:p>
             <a:pPr algn="l">
               <a:spcAft>
-                <a:spcPts val="1000"/>
-              </a:spcAft>
-            </a:pPr>
-            <a:r>
-              <a:rPr sz="2100" b="0">
-                <a:solidFill>
-                  <a:srgbClr val="3C2850"/>
-                </a:solidFill>
-                <a:latin typeface="Microsoft YaHei"/>
-              </a:rPr>
-              <a:t>安徒生，丹麦童话作家</a:t>
-            </a:r>
-          </a:p>
-        </p:txBody>
-      </p:sp>
-      <p:sp>
-        <p:nvSpPr>
-          <p:cNvPr id="17" name="Rectangle 16"/>
-          <p:cNvSpPr/>
-          <p:nvPr/>
-        </p:nvSpPr>
-        <p:spPr>
-          <a:xfrm>
-            <a:off x="1417320" y="3081527"/>
-            <a:ext cx="9601200" cy="13716"/>
-          </a:xfrm>
-          <a:prstGeom prst="rect">
-            <a:avLst/>
-          </a:prstGeom>
-          <a:solidFill>
-            <a:srgbClr val="D2C8AF"/>
-          </a:solidFill>
-          <a:ln>
-            <a:noFill/>
-          </a:ln>
-        </p:spPr>
-        <p:style>
-          <a:lnRef idx="1">
-            <a:schemeClr val="accent1"/>
-          </a:lnRef>
-          <a:fillRef idx="3">
-            <a:schemeClr val="accent1"/>
-          </a:fillRef>
-          <a:effectRef idx="2">
-            <a:schemeClr val="accent1"/>
-          </a:effectRef>
-          <a:fontRef idx="minor">
-            <a:schemeClr val="lt1"/>
-          </a:fontRef>
-        </p:style>
-        <p:txBody>
-          <a:bodyPr rtlCol="0" anchor="ctr"/>
-          <a:lstStyle/>
-          <a:p>
-            <a:pPr algn="ctr"/>
-          </a:p>
-        </p:txBody>
-      </p:sp>
-      <p:sp>
-        <p:nvSpPr>
-          <p:cNvPr id="18" name="Rounded Rectangle 17"/>
-          <p:cNvSpPr/>
-          <p:nvPr/>
-        </p:nvSpPr>
-        <p:spPr>
-          <a:xfrm>
-            <a:off x="1600200" y="2432303"/>
-            <a:ext cx="1280160" cy="347472"/>
-          </a:xfrm>
-          <a:prstGeom prst="roundRect">
-            <a:avLst/>
-          </a:prstGeom>
-          <a:solidFill>
-            <a:srgbClr val="C8AADC"/>
-          </a:solidFill>
-          <a:ln>
-            <a:noFill/>
-          </a:ln>
-        </p:spPr>
-        <p:style>
-          <a:lnRef idx="1">
-            <a:schemeClr val="accent1"/>
-          </a:lnRef>
-          <a:fillRef idx="3">
-            <a:schemeClr val="accent1"/>
-          </a:fillRef>
-          <a:effectRef idx="2">
-            <a:schemeClr val="accent1"/>
-          </a:effectRef>
-          <a:fontRef idx="minor">
-            <a:schemeClr val="lt1"/>
-          </a:fontRef>
-        </p:style>
-        <p:txBody>
-          <a:bodyPr rtlCol="0" anchor="ctr"/>
-          <a:lstStyle/>
-          <a:p>
-            <a:pPr algn="ctr"/>
-          </a:p>
-        </p:txBody>
-      </p:sp>
-      <p:sp>
-        <p:nvSpPr>
-          <p:cNvPr id="19" name="TextBox 18"/>
-          <p:cNvSpPr txBox="1"/>
-          <p:nvPr/>
-        </p:nvSpPr>
-        <p:spPr>
-          <a:xfrm>
-            <a:off x="1600200" y="2450591"/>
-            <a:ext cx="1280160" cy="310896"/>
-          </a:xfrm>
-          <a:prstGeom prst="rect">
-            <a:avLst/>
-          </a:prstGeom>
-          <a:noFill/>
-        </p:spPr>
-        <p:txBody>
-          <a:bodyPr wrap="none">
-            <a:spAutoFit/>
-          </a:bodyPr>
-          <a:lstStyle/>
-          <a:p>
-            <a:pPr algn="ctr">
-              <a:spcAft>
-                <a:spcPts val="1000"/>
-              </a:spcAft>
-            </a:pPr>
-            <a:r>
-              <a:rPr sz="1800" b="1">
-                <a:solidFill>
-                  <a:srgbClr val="3C2850"/>
-                </a:solidFill>
-                <a:latin typeface="Microsoft YaHei"/>
-              </a:rPr>
-              <a:t>文体</a:t>
-            </a:r>
-          </a:p>
-        </p:txBody>
-      </p:sp>
-      <p:sp>
-        <p:nvSpPr>
-          <p:cNvPr id="20" name="TextBox 19"/>
-          <p:cNvSpPr txBox="1"/>
-          <p:nvPr/>
-        </p:nvSpPr>
-        <p:spPr>
-          <a:xfrm>
-            <a:off x="3017520" y="2432303"/>
-            <a:ext cx="7498079" cy="658368"/>
-          </a:xfrm>
-          <a:prstGeom prst="rect">
-            <a:avLst/>
-          </a:prstGeom>
-          <a:noFill/>
-        </p:spPr>
-        <p:txBody>
-          <a:bodyPr wrap="none">
-            <a:spAutoFit/>
-          </a:bodyPr>
-          <a:lstStyle/>
-          <a:p>
-            <a:pPr algn="l">
-              <a:spcAft>
-                <a:spcPts val="1000"/>
-              </a:spcAft>
-            </a:pPr>
-            <a:r>
-              <a:rPr sz="2100" b="0">
-                <a:solidFill>
-                  <a:srgbClr val="3C2850"/>
-                </a:solidFill>
-                <a:latin typeface="Microsoft YaHei"/>
-              </a:rPr>
-              <a:t>童话——用虚构故事反映现实生活</a:t>
-            </a:r>
-          </a:p>
-        </p:txBody>
-      </p:sp>
-      <p:sp>
-        <p:nvSpPr>
-          <p:cNvPr id="21" name="Rectangle 20"/>
-          <p:cNvSpPr/>
-          <p:nvPr/>
-        </p:nvSpPr>
-        <p:spPr>
-          <a:xfrm>
-            <a:off x="1417320" y="3886200"/>
-            <a:ext cx="9601200" cy="13716"/>
-          </a:xfrm>
-          <a:prstGeom prst="rect">
-            <a:avLst/>
-          </a:prstGeom>
-          <a:solidFill>
-            <a:srgbClr val="D2C8AF"/>
-          </a:solidFill>
-          <a:ln>
-            <a:noFill/>
-          </a:ln>
-        </p:spPr>
-        <p:style>
-          <a:lnRef idx="1">
-            <a:schemeClr val="accent1"/>
-          </a:lnRef>
-          <a:fillRef idx="3">
-            <a:schemeClr val="accent1"/>
-          </a:fillRef>
-          <a:effectRef idx="2">
-            <a:schemeClr val="accent1"/>
-          </a:effectRef>
-          <a:fontRef idx="minor">
-            <a:schemeClr val="lt1"/>
-          </a:fontRef>
-        </p:style>
-        <p:txBody>
-          <a:bodyPr rtlCol="0" anchor="ctr"/>
-          <a:lstStyle/>
-          <a:p>
-            <a:pPr algn="ctr"/>
-          </a:p>
-        </p:txBody>
-      </p:sp>
-      <p:sp>
-        <p:nvSpPr>
-          <p:cNvPr id="22" name="Rounded Rectangle 21"/>
-          <p:cNvSpPr/>
-          <p:nvPr/>
-        </p:nvSpPr>
-        <p:spPr>
-          <a:xfrm>
-            <a:off x="1600200" y="3236976"/>
-            <a:ext cx="1444752" cy="347472"/>
-          </a:xfrm>
-          <a:prstGeom prst="roundRect">
-            <a:avLst/>
-          </a:prstGeom>
-          <a:solidFill>
-            <a:srgbClr val="C8AADC"/>
-          </a:solidFill>
-          <a:ln>
-            <a:noFill/>
-          </a:ln>
-        </p:spPr>
-        <p:style>
-          <a:lnRef idx="1">
-            <a:schemeClr val="accent1"/>
-          </a:lnRef>
-          <a:fillRef idx="3">
-            <a:schemeClr val="accent1"/>
-          </a:fillRef>
-          <a:effectRef idx="2">
-            <a:schemeClr val="accent1"/>
-          </a:effectRef>
-          <a:fontRef idx="minor">
-            <a:schemeClr val="lt1"/>
-          </a:fontRef>
-        </p:style>
-        <p:txBody>
-          <a:bodyPr rtlCol="0" anchor="ctr"/>
-          <a:lstStyle/>
-          <a:p>
-            <a:pPr algn="ctr"/>
-          </a:p>
-        </p:txBody>
-      </p:sp>
-      <p:sp>
-        <p:nvSpPr>
-          <p:cNvPr id="23" name="TextBox 22"/>
-          <p:cNvSpPr txBox="1"/>
-          <p:nvPr/>
-        </p:nvSpPr>
-        <p:spPr>
-          <a:xfrm>
-            <a:off x="1600200" y="3255264"/>
-            <a:ext cx="1444752" cy="310896"/>
-          </a:xfrm>
-          <a:prstGeom prst="rect">
-            <a:avLst/>
-          </a:prstGeom>
-          <a:noFill/>
-        </p:spPr>
-        <p:txBody>
-          <a:bodyPr wrap="none">
-            <a:spAutoFit/>
-          </a:bodyPr>
-          <a:lstStyle/>
-          <a:p>
-            <a:pPr algn="ctr">
-              <a:spcAft>
-                <a:spcPts val="1000"/>
-              </a:spcAft>
-            </a:pPr>
-            <a:r>
-              <a:rPr sz="1800" b="1">
-                <a:solidFill>
-                  <a:srgbClr val="3C2850"/>
-                </a:solidFill>
-                <a:latin typeface="Microsoft YaHei"/>
-              </a:rPr>
-              <a:t>本文特点</a:t>
-            </a:r>
-          </a:p>
-        </p:txBody>
-      </p:sp>
-      <p:sp>
-        <p:nvSpPr>
-          <p:cNvPr id="24" name="TextBox 23"/>
-          <p:cNvSpPr txBox="1"/>
-          <p:nvPr/>
-        </p:nvSpPr>
-        <p:spPr>
-          <a:xfrm>
-            <a:off x="3182112" y="3236976"/>
-            <a:ext cx="7333488" cy="658368"/>
-          </a:xfrm>
-          <a:prstGeom prst="rect">
-            <a:avLst/>
-          </a:prstGeom>
-          <a:noFill/>
-        </p:spPr>
-        <p:txBody>
-          <a:bodyPr wrap="none">
-            <a:spAutoFit/>
-          </a:bodyPr>
-          <a:lstStyle/>
-          <a:p>
-            <a:pPr algn="l">
-              <a:spcAft>
-                <a:spcPts val="1000"/>
-              </a:spcAft>
-            </a:pPr>
-            <a:r>
-              <a:rPr sz="2100" b="0">
-                <a:solidFill>
-                  <a:srgbClr val="3C2850"/>
-                </a:solidFill>
-                <a:latin typeface="Microsoft YaHei"/>
-              </a:rPr>
-              <a:t>以「新装」为线索，写一个荒唐的骗局</a:t>
-            </a:r>
-          </a:p>
-        </p:txBody>
-      </p:sp>
-      <p:sp>
-        <p:nvSpPr>
-          <p:cNvPr id="25" name="Rectangle 24"/>
-          <p:cNvSpPr/>
-          <p:nvPr/>
-        </p:nvSpPr>
-        <p:spPr>
-          <a:xfrm>
-            <a:off x="1417320" y="4690872"/>
-            <a:ext cx="9601200" cy="13716"/>
-          </a:xfrm>
-          <a:prstGeom prst="rect">
-            <a:avLst/>
-          </a:prstGeom>
-          <a:solidFill>
-            <a:srgbClr val="D2C8AF"/>
-          </a:solidFill>
-          <a:ln>
-            <a:noFill/>
-          </a:ln>
-        </p:spPr>
-        <p:style>
-          <a:lnRef idx="1">
-            <a:schemeClr val="accent1"/>
-          </a:lnRef>
-          <a:fillRef idx="3">
-            <a:schemeClr val="accent1"/>
-          </a:fillRef>
-          <a:effectRef idx="2">
-            <a:schemeClr val="accent1"/>
-          </a:effectRef>
-          <a:fontRef idx="minor">
-            <a:schemeClr val="lt1"/>
-          </a:fontRef>
-        </p:style>
-        <p:txBody>
-          <a:bodyPr rtlCol="0" anchor="ctr"/>
-          <a:lstStyle/>
-          <a:p>
-            <a:pPr algn="ctr"/>
-          </a:p>
-        </p:txBody>
-      </p:sp>
-      <p:sp>
-        <p:nvSpPr>
-          <p:cNvPr id="26" name="Rounded Rectangle 25"/>
-          <p:cNvSpPr/>
-          <p:nvPr/>
-        </p:nvSpPr>
-        <p:spPr>
-          <a:xfrm>
-            <a:off x="1600200" y="4041648"/>
-            <a:ext cx="1444752" cy="347472"/>
-          </a:xfrm>
-          <a:prstGeom prst="roundRect">
-            <a:avLst/>
-          </a:prstGeom>
-          <a:solidFill>
-            <a:srgbClr val="C8AADC"/>
-          </a:solidFill>
-          <a:ln>
-            <a:noFill/>
-          </a:ln>
-        </p:spPr>
-        <p:style>
-          <a:lnRef idx="1">
-            <a:schemeClr val="accent1"/>
-          </a:lnRef>
-          <a:fillRef idx="3">
-            <a:schemeClr val="accent1"/>
-          </a:fillRef>
-          <a:effectRef idx="2">
-            <a:schemeClr val="accent1"/>
-          </a:effectRef>
-          <a:fontRef idx="minor">
-            <a:schemeClr val="lt1"/>
-          </a:fontRef>
-        </p:style>
-        <p:txBody>
-          <a:bodyPr rtlCol="0" anchor="ctr"/>
-          <a:lstStyle/>
-          <a:p>
-            <a:pPr algn="ctr"/>
-          </a:p>
-        </p:txBody>
-      </p:sp>
-      <p:sp>
-        <p:nvSpPr>
-          <p:cNvPr id="27" name="TextBox 26"/>
-          <p:cNvSpPr txBox="1"/>
-          <p:nvPr/>
-        </p:nvSpPr>
-        <p:spPr>
-          <a:xfrm>
-            <a:off x="1600200" y="4059936"/>
-            <a:ext cx="1444752" cy="310896"/>
-          </a:xfrm>
-          <a:prstGeom prst="rect">
-            <a:avLst/>
-          </a:prstGeom>
-          <a:noFill/>
-        </p:spPr>
-        <p:txBody>
-          <a:bodyPr wrap="none">
-            <a:spAutoFit/>
-          </a:bodyPr>
-          <a:lstStyle/>
-          <a:p>
-            <a:pPr algn="ctr">
-              <a:spcAft>
-                <a:spcPts val="1000"/>
-              </a:spcAft>
-            </a:pPr>
-            <a:r>
-              <a:rPr sz="1800" b="1">
-                <a:solidFill>
-                  <a:srgbClr val="3C2850"/>
-                </a:solidFill>
-                <a:latin typeface="Microsoft YaHei"/>
-              </a:rPr>
-              <a:t>核心问题</a:t>
-            </a:r>
-          </a:p>
-        </p:txBody>
-      </p:sp>
-      <p:sp>
-        <p:nvSpPr>
-          <p:cNvPr id="28" name="TextBox 27"/>
-          <p:cNvSpPr txBox="1"/>
-          <p:nvPr/>
-        </p:nvSpPr>
-        <p:spPr>
-          <a:xfrm>
-            <a:off x="3182112" y="4041648"/>
-            <a:ext cx="7333488" cy="658368"/>
-          </a:xfrm>
-          <a:prstGeom prst="rect">
-            <a:avLst/>
-          </a:prstGeom>
-          <a:noFill/>
-        </p:spPr>
-        <p:txBody>
-          <a:bodyPr wrap="none">
-            <a:spAutoFit/>
-          </a:bodyPr>
-          <a:lstStyle/>
-          <a:p>
-            <a:pPr algn="l">
-              <a:spcAft>
-                <a:spcPts val="1000"/>
-              </a:spcAft>
-            </a:pPr>
-            <a:r>
-              <a:rPr sz="2100" b="0">
-                <a:solidFill>
-                  <a:srgbClr val="3C2850"/>
-                </a:solidFill>
-                <a:latin typeface="Microsoft YaHei"/>
-              </a:rPr>
-              <a:t>为什么人们都不敢说自己看不见？</a:t>
+                <a:spcPts val="200"/>
+              </a:spcAft>
+            </a:pPr>
+            <a:r>
+              <a:rPr sz="9600" b="1">
+                <a:solidFill>
+                  <a:srgbClr val="000000"/>
+                </a:solidFill>
+                <a:latin typeface="Arial"/>
+              </a:rPr>
+              <a:t>03</a:t>
             </a:r>
           </a:p>
         </p:txBody>
@@ -4508,20 +4151,12 @@
         <p:nvPr/>
       </p:nvGrpSpPr>
       <p:grpSpPr/>
-      <p:pic>
-        <p:nvPicPr>
-          <p:cNvPr id="2" name="Picture 1" descr="bg_emperor.png"/>
-          <p:cNvPicPr>
-            <a:picLocks noChangeAspect="1"/>
-          </p:cNvPicPr>
-          <p:nvPr/>
-        </p:nvPicPr>
-        <p:blipFill>
-          <a:blip r:embed="rId2"/>
-          <a:stretch>
-            <a:fillRect/>
-          </a:stretch>
-        </p:blipFill>
+      <p:sp>
+        <p:nvSpPr>
+          <p:cNvPr id="2" name="Rectangle 1"/>
+          <p:cNvSpPr/>
+          <p:nvPr/>
+        </p:nvSpPr>
         <p:spPr>
           <a:xfrm>
             <a:off x="0" y="0"/>
@@ -4530,27 +4165,11 @@
           <a:prstGeom prst="rect">
             <a:avLst/>
           </a:prstGeom>
-        </p:spPr>
-      </p:pic>
-      <p:sp>
-        <p:nvSpPr>
-          <p:cNvPr id="3" name="Rectangle 2"/>
-          <p:cNvSpPr/>
-          <p:nvPr/>
-        </p:nvSpPr>
-        <p:spPr>
-          <a:xfrm>
-            <a:off x="292608" y="274320"/>
-            <a:ext cx="11594592" cy="6300216"/>
-          </a:xfrm>
-          <a:prstGeom prst="rect">
-            <a:avLst/>
-          </a:prstGeom>
-          <a:noFill/>
-          <a:ln w="31750">
-            <a:solidFill>
-              <a:srgbClr val="825AA0"/>
-            </a:solidFill>
+          <a:solidFill>
+            <a:srgbClr val="FFFFFF"/>
+          </a:solidFill>
+          <a:ln>
+            <a:noFill/>
           </a:ln>
         </p:spPr>
         <p:style>
@@ -4575,73 +4194,66 @@
           </a:p>
         </p:txBody>
       </p:sp>
-      <p:pic>
-        <p:nvPicPr>
-          <p:cNvPr id="4" name="Picture 3" descr="corner_emperor_tl.png"/>
-          <p:cNvPicPr>
-            <a:picLocks noChangeAspect="1"/>
-          </p:cNvPicPr>
-          <p:nvPr/>
-        </p:nvPicPr>
-        <p:blipFill>
-          <a:blip r:embed="rId3"/>
-          <a:stretch>
-            <a:fillRect/>
-          </a:stretch>
-        </p:blipFill>
-        <p:spPr>
-          <a:xfrm>
-            <a:off x="-45720" y="-45720"/>
-            <a:ext cx="2011680" cy="2011680"/>
-          </a:xfrm>
-          <a:prstGeom prst="rect">
-            <a:avLst/>
-          </a:prstGeom>
-        </p:spPr>
-      </p:pic>
-      <p:pic>
-        <p:nvPicPr>
-          <p:cNvPr id="5" name="Picture 4" descr="corner_emperor_tr.png"/>
-          <p:cNvPicPr>
-            <a:picLocks noChangeAspect="1"/>
-          </p:cNvPicPr>
-          <p:nvPr/>
-        </p:nvPicPr>
-        <p:blipFill>
-          <a:blip r:embed="rId4"/>
-          <a:stretch>
-            <a:fillRect/>
-          </a:stretch>
-        </p:blipFill>
-        <p:spPr>
-          <a:xfrm>
-            <a:off x="9875520" y="-45720"/>
-            <a:ext cx="2011680" cy="2011680"/>
-          </a:xfrm>
-          <a:prstGeom prst="rect">
-            <a:avLst/>
-          </a:prstGeom>
-        </p:spPr>
-      </p:pic>
-      <p:sp>
-        <p:nvSpPr>
-          <p:cNvPr id="6" name="Rounded Rectangle 5"/>
+      <p:sp>
+        <p:nvSpPr>
+          <p:cNvPr id="3" name="TextBox 2"/>
+          <p:cNvSpPr txBox="1"/>
+          <p:nvPr/>
+        </p:nvSpPr>
+        <p:spPr>
+          <a:xfrm>
+            <a:off x="411480" y="320040"/>
+            <a:ext cx="1097280" cy="274320"/>
+          </a:xfrm>
+          <a:prstGeom prst="rect">
+            <a:avLst/>
+          </a:prstGeom>
+          <a:noFill/>
+        </p:spPr>
+        <p:txBody>
+          <a:bodyPr wrap="square" anchor="t">
+            <a:spAutoFit/>
+          </a:bodyPr>
+          <a:lstStyle/>
+          <a:p>
+            <a:pPr algn="l">
+              <a:spcAft>
+                <a:spcPts val="200"/>
+              </a:spcAft>
+            </a:pPr>
+            <a:r>
+              <a:rPr sz="1400" b="1">
+                <a:solidFill>
+                  <a:srgbClr val="000000"/>
+                </a:solidFill>
+                <a:latin typeface="Arial"/>
+              </a:rPr>
+              <a:t>03</a:t>
+            </a:r>
+          </a:p>
+        </p:txBody>
+      </p:sp>
+      <p:sp>
+        <p:nvSpPr>
+          <p:cNvPr id="4" name="Rectangle 3"/>
           <p:cNvSpPr/>
           <p:nvPr/>
         </p:nvSpPr>
         <p:spPr>
           <a:xfrm>
-            <a:off x="502920" y="384048"/>
-            <a:ext cx="2011680" cy="384048"/>
-          </a:xfrm>
-          <a:prstGeom prst="roundRect">
+            <a:off x="411480" y="320040"/>
+            <a:ext cx="11368735" cy="960120"/>
+          </a:xfrm>
+          <a:prstGeom prst="rect">
             <a:avLst/>
           </a:prstGeom>
           <a:solidFill>
-            <a:srgbClr val="784696"/>
+            <a:srgbClr val="FFE600"/>
           </a:solidFill>
-          <a:ln>
-            <a:noFill/>
+          <a:ln w="25400">
+            <a:solidFill>
+              <a:srgbClr val="000000"/>
+            </a:solidFill>
           </a:ln>
         </p:spPr>
         <p:style>
@@ -4668,14 +4280,14 @@
       </p:sp>
       <p:sp>
         <p:nvSpPr>
-          <p:cNvPr id="7" name="TextBox 6"/>
+          <p:cNvPr id="5" name="TextBox 4"/>
           <p:cNvSpPr txBox="1"/>
           <p:nvPr/>
         </p:nvSpPr>
         <p:spPr>
           <a:xfrm>
-            <a:off x="502920" y="402336"/>
-            <a:ext cx="2011680" cy="347472"/>
+            <a:off x="594360" y="457200"/>
+            <a:ext cx="11002975" cy="685800"/>
           </a:xfrm>
           <a:prstGeom prst="rect">
             <a:avLst/>
@@ -4683,88 +4295,47 @@
           <a:noFill/>
         </p:spPr>
         <p:txBody>
-          <a:bodyPr wrap="none">
+          <a:bodyPr wrap="square" anchor="ctr">
             <a:spAutoFit/>
           </a:bodyPr>
           <a:lstStyle/>
           <a:p>
-            <a:pPr algn="ctr">
-              <a:spcAft>
-                <a:spcPts val="1000"/>
-              </a:spcAft>
-            </a:pPr>
-            <a:r>
-              <a:rPr sz="1600" b="1">
-                <a:solidFill>
-                  <a:srgbClr val="FFFFFF"/>
-                </a:solidFill>
-                <a:latin typeface="Microsoft YaHei"/>
-              </a:rPr>
-              <a:t>情节笔记</a:t>
-            </a:r>
-          </a:p>
-        </p:txBody>
-      </p:sp>
-      <p:sp>
-        <p:nvSpPr>
-          <p:cNvPr id="8" name="TextBox 7"/>
-          <p:cNvSpPr txBox="1"/>
-          <p:nvPr/>
-        </p:nvSpPr>
-        <p:spPr>
-          <a:xfrm>
-            <a:off x="1371600" y="384048"/>
-            <a:ext cx="9418320" cy="822960"/>
-          </a:xfrm>
-          <a:prstGeom prst="rect">
-            <a:avLst/>
-          </a:prstGeom>
-          <a:noFill/>
-        </p:spPr>
-        <p:txBody>
-          <a:bodyPr wrap="square">
-            <a:spAutoFit/>
-          </a:bodyPr>
-          <a:lstStyle/>
-          <a:p>
-            <a:pPr algn="ctr">
-              <a:spcAft>
-                <a:spcPts val="1000"/>
-              </a:spcAft>
-            </a:pPr>
-            <a:r>
-              <a:rPr sz="3400" b="1">
-                <a:solidFill>
-                  <a:srgbClr val="784696"/>
-                </a:solidFill>
-                <a:latin typeface="Microsoft YaHei"/>
-              </a:rPr>
-              <a:t>情节结构</a:t>
-            </a:r>
-          </a:p>
-        </p:txBody>
-      </p:sp>
-      <p:sp>
-        <p:nvSpPr>
-          <p:cNvPr id="9" name="Rounded Rectangle 8"/>
+            <a:pPr algn="l">
+              <a:spcAft>
+                <a:spcPts val="200"/>
+              </a:spcAft>
+            </a:pPr>
+            <a:r>
+              <a:rPr sz="2600" b="1">
+                <a:solidFill>
+                  <a:srgbClr val="000000"/>
+                </a:solidFill>
+                <a:latin typeface="Arial"/>
+              </a:rPr>
+              <a:t>艺术手法 · TYPOGRAPHY</a:t>
+            </a:r>
+          </a:p>
+        </p:txBody>
+      </p:sp>
+      <p:sp>
+        <p:nvSpPr>
+          <p:cNvPr id="6" name="Rectangle 5"/>
           <p:cNvSpPr/>
           <p:nvPr/>
         </p:nvSpPr>
         <p:spPr>
           <a:xfrm>
-            <a:off x="1067104" y="1143000"/>
-            <a:ext cx="10058400" cy="3721608"/>
-          </a:xfrm>
-          <a:prstGeom prst="roundRect">
+            <a:off x="411480" y="1325880"/>
+            <a:ext cx="11368735" cy="25400"/>
+          </a:xfrm>
+          <a:prstGeom prst="rect">
             <a:avLst/>
           </a:prstGeom>
           <a:solidFill>
-            <a:srgbClr val="FFFCEB"/>
+            <a:srgbClr val="000000"/>
           </a:solidFill>
-          <a:ln w="25400">
-            <a:solidFill>
-              <a:srgbClr val="825AA0"/>
-            </a:solidFill>
+          <a:ln>
+            <a:noFill/>
           </a:ln>
         </p:spPr>
         <p:style>
@@ -4791,23 +4362,112 @@
       </p:sp>
       <p:sp>
         <p:nvSpPr>
-          <p:cNvPr id="10" name="Rectangle 9"/>
+          <p:cNvPr id="7" name="TextBox 6"/>
+          <p:cNvSpPr txBox="1"/>
+          <p:nvPr/>
+        </p:nvSpPr>
+        <p:spPr>
+          <a:xfrm>
+            <a:off x="411480" y="1508760"/>
+            <a:ext cx="914400" cy="4754880"/>
+          </a:xfrm>
+          <a:prstGeom prst="rect">
+            <a:avLst/>
+          </a:prstGeom>
+          <a:noFill/>
+        </p:spPr>
+        <p:txBody>
+          <a:bodyPr wrap="square" anchor="t">
+            <a:spAutoFit/>
+          </a:bodyPr>
+          <a:lstStyle/>
+          <a:p>
+            <a:pPr algn="ctr">
+              <a:spcAft>
+                <a:spcPts val="200"/>
+              </a:spcAft>
+            </a:pPr>
+            <a:r>
+              <a:rPr sz="4800" b="1">
+                <a:solidFill>
+                  <a:srgbClr val="000000"/>
+                </a:solidFill>
+                <a:latin typeface="Arial"/>
+              </a:rPr>
+              <a:t>手</a:t>
+            </a:r>
+          </a:p>
+          <a:p>
+            <a:pPr algn="ctr">
+              <a:spcAft>
+                <a:spcPts val="200"/>
+              </a:spcAft>
+            </a:pPr>
+            <a:r>
+              <a:rPr sz="4800" b="1">
+                <a:solidFill>
+                  <a:srgbClr val="000000"/>
+                </a:solidFill>
+                <a:latin typeface="Arial"/>
+              </a:rPr>
+              <a:t>法</a:t>
+            </a:r>
+          </a:p>
+          <a:p>
+            <a:pPr algn="ctr">
+              <a:spcAft>
+                <a:spcPts val="200"/>
+              </a:spcAft>
+            </a:pPr>
+            <a:r>
+              <a:rPr sz="4800" b="1">
+                <a:solidFill>
+                  <a:srgbClr val="000000"/>
+                </a:solidFill>
+                <a:latin typeface="Arial"/>
+              </a:rPr>
+              <a:t>四</a:t>
+            </a:r>
+          </a:p>
+          <a:p>
+            <a:pPr algn="ctr">
+              <a:spcAft>
+                <a:spcPts val="200"/>
+              </a:spcAft>
+            </a:pPr>
+            <a:r>
+              <a:rPr sz="4800" b="1">
+                <a:solidFill>
+                  <a:srgbClr val="000000"/>
+                </a:solidFill>
+                <a:latin typeface="Arial"/>
+              </a:rPr>
+              <a:t>式</a:t>
+            </a:r>
+          </a:p>
+        </p:txBody>
+      </p:sp>
+      <p:sp>
+        <p:nvSpPr>
+          <p:cNvPr id="8" name="Rectangle 7"/>
           <p:cNvSpPr/>
           <p:nvPr/>
         </p:nvSpPr>
         <p:spPr>
           <a:xfrm>
-            <a:off x="1067104" y="1143000"/>
-            <a:ext cx="10058400" cy="384048"/>
+            <a:off x="1463040" y="1508760"/>
+            <a:ext cx="7909560" cy="1051560"/>
           </a:xfrm>
           <a:prstGeom prst="rect">
             <a:avLst/>
           </a:prstGeom>
           <a:solidFill>
-            <a:srgbClr val="784696"/>
+            <a:srgbClr val="FFE600"/>
           </a:solidFill>
-          <a:ln>
-            <a:noFill/>
+          <a:ln w="25400">
+            <a:solidFill>
+              <a:srgbClr val="000000"/>
+            </a:solidFill>
           </a:ln>
         </p:spPr>
         <p:style>
@@ -4834,14 +4494,14 @@
       </p:sp>
       <p:sp>
         <p:nvSpPr>
-          <p:cNvPr id="11" name="TextBox 10"/>
+          <p:cNvPr id="9" name="TextBox 8"/>
           <p:cNvSpPr txBox="1"/>
           <p:nvPr/>
         </p:nvSpPr>
         <p:spPr>
           <a:xfrm>
-            <a:off x="1067104" y="1179576"/>
-            <a:ext cx="10058400" cy="347472"/>
+            <a:off x="1600200" y="1618488"/>
+            <a:ext cx="7635240" cy="822960"/>
           </a:xfrm>
           <a:prstGeom prst="rect">
             <a:avLst/>
@@ -4849,47 +4509,65 @@
           <a:noFill/>
         </p:spPr>
         <p:txBody>
-          <a:bodyPr wrap="none">
+          <a:bodyPr wrap="square" anchor="t">
             <a:spAutoFit/>
           </a:bodyPr>
           <a:lstStyle/>
           <a:p>
-            <a:pPr algn="ctr">
-              <a:spcAft>
-                <a:spcPts val="1000"/>
-              </a:spcAft>
-            </a:pPr>
-            <a:r>
-              <a:rPr sz="1800" b="1">
-                <a:solidFill>
-                  <a:srgbClr val="FFFFFF"/>
-                </a:solidFill>
-                <a:latin typeface="Microsoft YaHei"/>
-              </a:rPr>
-              <a:t>📝  课堂笔记  —  请摘抄要点</a:t>
-            </a:r>
-          </a:p>
-        </p:txBody>
-      </p:sp>
-      <p:sp>
-        <p:nvSpPr>
-          <p:cNvPr id="12" name="Rectangle 11"/>
+            <a:pPr algn="l">
+              <a:spcAft>
+                <a:spcPts val="200"/>
+              </a:spcAft>
+            </a:pPr>
+            <a:r>
+              <a:rPr sz="1600" b="1">
+                <a:solidFill>
+                  <a:srgbClr val="000000"/>
+                </a:solidFill>
+                <a:latin typeface="Arial"/>
+              </a:rPr>
+              <a:t>01  夸张</a:t>
+            </a:r>
+          </a:p>
+          <a:p>
+            <a:pPr algn="l">
+              <a:spcAft>
+                <a:spcPts val="200"/>
+              </a:spcAft>
+            </a:pPr>
+            <a:r>
+              <a:rPr sz="1300" b="0">
+                <a:solidFill>
+                  <a:srgbClr val="000000"/>
+                </a:solidFill>
+                <a:latin typeface="Arial"/>
+              </a:rPr>
+              <a:t>「除非为了炫耀新衣服」——爱新衣写到极致</a:t>
+            </a:r>
+          </a:p>
+        </p:txBody>
+      </p:sp>
+      <p:sp>
+        <p:nvSpPr>
+          <p:cNvPr id="10" name="Rectangle 9"/>
           <p:cNvSpPr/>
           <p:nvPr/>
         </p:nvSpPr>
         <p:spPr>
           <a:xfrm>
-            <a:off x="1570024" y="1527048"/>
-            <a:ext cx="27432" cy="3337560"/>
+            <a:off x="1828800" y="2679192"/>
+            <a:ext cx="7543800" cy="1051560"/>
           </a:xfrm>
           <a:prstGeom prst="rect">
             <a:avLst/>
           </a:prstGeom>
           <a:solidFill>
-            <a:srgbClr val="DC5050"/>
+            <a:srgbClr val="FFFFFF"/>
           </a:solidFill>
-          <a:ln>
-            <a:noFill/>
+          <a:ln w="25400">
+            <a:solidFill>
+              <a:srgbClr val="000000"/>
+            </a:solidFill>
           </a:ln>
         </p:spPr>
         <p:style>
@@ -4916,23 +4594,80 @@
       </p:sp>
       <p:sp>
         <p:nvSpPr>
-          <p:cNvPr id="13" name="Rectangle 12"/>
+          <p:cNvPr id="11" name="TextBox 10"/>
+          <p:cNvSpPr txBox="1"/>
+          <p:nvPr/>
+        </p:nvSpPr>
+        <p:spPr>
+          <a:xfrm>
+            <a:off x="1965960" y="2788920"/>
+            <a:ext cx="7269480" cy="822960"/>
+          </a:xfrm>
+          <a:prstGeom prst="rect">
+            <a:avLst/>
+          </a:prstGeom>
+          <a:noFill/>
+        </p:spPr>
+        <p:txBody>
+          <a:bodyPr wrap="square" anchor="t">
+            <a:spAutoFit/>
+          </a:bodyPr>
+          <a:lstStyle/>
+          <a:p>
+            <a:pPr algn="l">
+              <a:spcAft>
+                <a:spcPts val="200"/>
+              </a:spcAft>
+            </a:pPr>
+            <a:r>
+              <a:rPr sz="1600" b="1">
+                <a:solidFill>
+                  <a:srgbClr val="000000"/>
+                </a:solidFill>
+                <a:latin typeface="Arial"/>
+              </a:rPr>
+              <a:t>02  反讽</a:t>
+            </a:r>
+          </a:p>
+          <a:p>
+            <a:pPr algn="l">
+              <a:spcAft>
+                <a:spcPts val="200"/>
+              </a:spcAft>
+            </a:pPr>
+            <a:r>
+              <a:rPr sz="1300" b="0">
+                <a:solidFill>
+                  <a:srgbClr val="000000"/>
+                </a:solidFill>
+                <a:latin typeface="Arial"/>
+              </a:rPr>
+              <a:t>说「看见了」其实什么也没看见</a:t>
+            </a:r>
+          </a:p>
+        </p:txBody>
+      </p:sp>
+      <p:sp>
+        <p:nvSpPr>
+          <p:cNvPr id="12" name="Rectangle 11"/>
           <p:cNvSpPr/>
           <p:nvPr/>
         </p:nvSpPr>
         <p:spPr>
           <a:xfrm>
-            <a:off x="1417320" y="2276856"/>
-            <a:ext cx="9601200" cy="13716"/>
+            <a:off x="2194560" y="3849624"/>
+            <a:ext cx="7178040" cy="1051560"/>
           </a:xfrm>
           <a:prstGeom prst="rect">
             <a:avLst/>
           </a:prstGeom>
           <a:solidFill>
-            <a:srgbClr val="D2C8AF"/>
+            <a:srgbClr val="FFE600"/>
           </a:solidFill>
-          <a:ln>
-            <a:noFill/>
+          <a:ln w="25400">
+            <a:solidFill>
+              <a:srgbClr val="000000"/>
+            </a:solidFill>
           </a:ln>
         </p:spPr>
         <p:style>
@@ -4959,23 +4694,80 @@
       </p:sp>
       <p:sp>
         <p:nvSpPr>
-          <p:cNvPr id="14" name="Rounded Rectangle 13"/>
+          <p:cNvPr id="13" name="TextBox 12"/>
+          <p:cNvSpPr txBox="1"/>
+          <p:nvPr/>
+        </p:nvSpPr>
+        <p:spPr>
+          <a:xfrm>
+            <a:off x="2331720" y="3959352"/>
+            <a:ext cx="6903720" cy="822960"/>
+          </a:xfrm>
+          <a:prstGeom prst="rect">
+            <a:avLst/>
+          </a:prstGeom>
+          <a:noFill/>
+        </p:spPr>
+        <p:txBody>
+          <a:bodyPr wrap="square" anchor="t">
+            <a:spAutoFit/>
+          </a:bodyPr>
+          <a:lstStyle/>
+          <a:p>
+            <a:pPr algn="l">
+              <a:spcAft>
+                <a:spcPts val="200"/>
+              </a:spcAft>
+            </a:pPr>
+            <a:r>
+              <a:rPr sz="1600" b="1">
+                <a:solidFill>
+                  <a:srgbClr val="000000"/>
+                </a:solidFill>
+                <a:latin typeface="Arial"/>
+              </a:rPr>
+              <a:t>03  对比</a:t>
+            </a:r>
+          </a:p>
+          <a:p>
+            <a:pPr algn="l">
+              <a:spcAft>
+                <a:spcPts val="200"/>
+              </a:spcAft>
+            </a:pPr>
+            <a:r>
+              <a:rPr sz="1300" b="0">
+                <a:solidFill>
+                  <a:srgbClr val="000000"/>
+                </a:solidFill>
+                <a:latin typeface="Arial"/>
+              </a:rPr>
+              <a:t>大人怯懦  vs  孩子天真诚实</a:t>
+            </a:r>
+          </a:p>
+        </p:txBody>
+      </p:sp>
+      <p:sp>
+        <p:nvSpPr>
+          <p:cNvPr id="14" name="Rectangle 13"/>
           <p:cNvSpPr/>
           <p:nvPr/>
         </p:nvSpPr>
         <p:spPr>
           <a:xfrm>
-            <a:off x="1600200" y="1627632"/>
-            <a:ext cx="1280160" cy="347472"/>
-          </a:xfrm>
-          <a:prstGeom prst="roundRect">
+            <a:off x="2560320" y="5020056"/>
+            <a:ext cx="6812280" cy="1051560"/>
+          </a:xfrm>
+          <a:prstGeom prst="rect">
             <a:avLst/>
           </a:prstGeom>
           <a:solidFill>
-            <a:srgbClr val="C8AADC"/>
+            <a:srgbClr val="FFFFFF"/>
           </a:solidFill>
-          <a:ln>
-            <a:noFill/>
+          <a:ln w="25400">
+            <a:solidFill>
+              <a:srgbClr val="000000"/>
+            </a:solidFill>
           </a:ln>
         </p:spPr>
         <p:style>
@@ -5008,8 +4800,8 @@
         </p:nvSpPr>
         <p:spPr>
           <a:xfrm>
-            <a:off x="1600200" y="1645920"/>
-            <a:ext cx="1280160" cy="310896"/>
+            <a:off x="2697480" y="5129784"/>
+            <a:ext cx="6537960" cy="822960"/>
           </a:xfrm>
           <a:prstGeom prst="rect">
             <a:avLst/>
@@ -5017,555 +4809,40 @@
           <a:noFill/>
         </p:spPr>
         <p:txBody>
-          <a:bodyPr wrap="none">
+          <a:bodyPr wrap="square" anchor="t">
             <a:spAutoFit/>
           </a:bodyPr>
           <a:lstStyle/>
           <a:p>
-            <a:pPr algn="ctr">
-              <a:spcAft>
-                <a:spcPts val="1000"/>
-              </a:spcAft>
-            </a:pPr>
-            <a:r>
-              <a:rPr sz="1800" b="1">
-                <a:solidFill>
-                  <a:srgbClr val="3C2850"/>
-                </a:solidFill>
-                <a:latin typeface="Microsoft YaHei"/>
-              </a:rPr>
-              <a:t>开端</a:t>
-            </a:r>
-          </a:p>
-        </p:txBody>
-      </p:sp>
-      <p:sp>
-        <p:nvSpPr>
-          <p:cNvPr id="16" name="TextBox 15"/>
-          <p:cNvSpPr txBox="1"/>
-          <p:nvPr/>
-        </p:nvSpPr>
-        <p:spPr>
-          <a:xfrm>
-            <a:off x="3017520" y="1627632"/>
-            <a:ext cx="7498079" cy="658368"/>
-          </a:xfrm>
-          <a:prstGeom prst="rect">
-            <a:avLst/>
-          </a:prstGeom>
-          <a:noFill/>
-        </p:spPr>
-        <p:txBody>
-          <a:bodyPr wrap="none">
-            <a:spAutoFit/>
-          </a:bodyPr>
-          <a:lstStyle/>
-          <a:p>
             <a:pPr algn="l">
               <a:spcAft>
-                <a:spcPts val="1000"/>
-              </a:spcAft>
-            </a:pPr>
-            <a:r>
-              <a:rPr sz="2100" b="0">
-                <a:solidFill>
-                  <a:srgbClr val="3C2850"/>
-                </a:solidFill>
-                <a:latin typeface="Microsoft YaHei"/>
-              </a:rPr>
-              <a:t>两个骗子说能织出只有聪明人才能看见的衣服</a:t>
-            </a:r>
-          </a:p>
-        </p:txBody>
-      </p:sp>
-      <p:sp>
-        <p:nvSpPr>
-          <p:cNvPr id="17" name="Rectangle 16"/>
-          <p:cNvSpPr/>
-          <p:nvPr/>
-        </p:nvSpPr>
-        <p:spPr>
-          <a:xfrm>
-            <a:off x="1417320" y="3081527"/>
-            <a:ext cx="9601200" cy="13716"/>
-          </a:xfrm>
-          <a:prstGeom prst="rect">
-            <a:avLst/>
-          </a:prstGeom>
-          <a:solidFill>
-            <a:srgbClr val="D2C8AF"/>
-          </a:solidFill>
-          <a:ln>
-            <a:noFill/>
-          </a:ln>
-        </p:spPr>
-        <p:style>
-          <a:lnRef idx="1">
-            <a:schemeClr val="accent1"/>
-          </a:lnRef>
-          <a:fillRef idx="3">
-            <a:schemeClr val="accent1"/>
-          </a:fillRef>
-          <a:effectRef idx="2">
-            <a:schemeClr val="accent1"/>
-          </a:effectRef>
-          <a:fontRef idx="minor">
-            <a:schemeClr val="lt1"/>
-          </a:fontRef>
-        </p:style>
-        <p:txBody>
-          <a:bodyPr rtlCol="0" anchor="ctr"/>
-          <a:lstStyle/>
-          <a:p>
-            <a:pPr algn="ctr"/>
-          </a:p>
-        </p:txBody>
-      </p:sp>
-      <p:sp>
-        <p:nvSpPr>
-          <p:cNvPr id="18" name="Rounded Rectangle 17"/>
-          <p:cNvSpPr/>
-          <p:nvPr/>
-        </p:nvSpPr>
-        <p:spPr>
-          <a:xfrm>
-            <a:off x="1600200" y="2432303"/>
-            <a:ext cx="1280160" cy="347472"/>
-          </a:xfrm>
-          <a:prstGeom prst="roundRect">
-            <a:avLst/>
-          </a:prstGeom>
-          <a:solidFill>
-            <a:srgbClr val="C8AADC"/>
-          </a:solidFill>
-          <a:ln>
-            <a:noFill/>
-          </a:ln>
-        </p:spPr>
-        <p:style>
-          <a:lnRef idx="1">
-            <a:schemeClr val="accent1"/>
-          </a:lnRef>
-          <a:fillRef idx="3">
-            <a:schemeClr val="accent1"/>
-          </a:fillRef>
-          <a:effectRef idx="2">
-            <a:schemeClr val="accent1"/>
-          </a:effectRef>
-          <a:fontRef idx="minor">
-            <a:schemeClr val="lt1"/>
-          </a:fontRef>
-        </p:style>
-        <p:txBody>
-          <a:bodyPr rtlCol="0" anchor="ctr"/>
-          <a:lstStyle/>
-          <a:p>
-            <a:pPr algn="ctr"/>
-          </a:p>
-        </p:txBody>
-      </p:sp>
-      <p:sp>
-        <p:nvSpPr>
-          <p:cNvPr id="19" name="TextBox 18"/>
-          <p:cNvSpPr txBox="1"/>
-          <p:nvPr/>
-        </p:nvSpPr>
-        <p:spPr>
-          <a:xfrm>
-            <a:off x="1600200" y="2450591"/>
-            <a:ext cx="1280160" cy="310896"/>
-          </a:xfrm>
-          <a:prstGeom prst="rect">
-            <a:avLst/>
-          </a:prstGeom>
-          <a:noFill/>
-        </p:spPr>
-        <p:txBody>
-          <a:bodyPr wrap="none">
-            <a:spAutoFit/>
-          </a:bodyPr>
-          <a:lstStyle/>
-          <a:p>
-            <a:pPr algn="ctr">
-              <a:spcAft>
-                <a:spcPts val="1000"/>
-              </a:spcAft>
-            </a:pPr>
-            <a:r>
-              <a:rPr sz="1800" b="1">
-                <a:solidFill>
-                  <a:srgbClr val="3C2850"/>
-                </a:solidFill>
-                <a:latin typeface="Microsoft YaHei"/>
-              </a:rPr>
-              <a:t>发展</a:t>
-            </a:r>
-          </a:p>
-        </p:txBody>
-      </p:sp>
-      <p:sp>
-        <p:nvSpPr>
-          <p:cNvPr id="20" name="TextBox 19"/>
-          <p:cNvSpPr txBox="1"/>
-          <p:nvPr/>
-        </p:nvSpPr>
-        <p:spPr>
-          <a:xfrm>
-            <a:off x="3017520" y="2432303"/>
-            <a:ext cx="7498079" cy="658368"/>
-          </a:xfrm>
-          <a:prstGeom prst="rect">
-            <a:avLst/>
-          </a:prstGeom>
-          <a:noFill/>
-        </p:spPr>
-        <p:txBody>
-          <a:bodyPr wrap="none">
-            <a:spAutoFit/>
-          </a:bodyPr>
-          <a:lstStyle/>
+                <a:spcPts val="200"/>
+              </a:spcAft>
+            </a:pPr>
+            <a:r>
+              <a:rPr sz="1600" b="1">
+                <a:solidFill>
+                  <a:srgbClr val="000000"/>
+                </a:solidFill>
+                <a:latin typeface="Arial"/>
+              </a:rPr>
+              <a:t>04  反复</a:t>
+            </a:r>
+          </a:p>
           <a:p>
             <a:pPr algn="l">
               <a:spcAft>
-                <a:spcPts val="1000"/>
-              </a:spcAft>
-            </a:pPr>
-            <a:r>
-              <a:rPr sz="2100" b="0">
-                <a:solidFill>
-                  <a:srgbClr val="3C2850"/>
-                </a:solidFill>
-                <a:latin typeface="Microsoft YaHei"/>
-              </a:rPr>
-              <a:t>皇帝、老大臣、官员先后「看布」，都不敢说真话</a:t>
-            </a:r>
-          </a:p>
-        </p:txBody>
-      </p:sp>
-      <p:sp>
-        <p:nvSpPr>
-          <p:cNvPr id="21" name="Rectangle 20"/>
-          <p:cNvSpPr/>
-          <p:nvPr/>
-        </p:nvSpPr>
-        <p:spPr>
-          <a:xfrm>
-            <a:off x="1417320" y="3886200"/>
-            <a:ext cx="9601200" cy="13716"/>
-          </a:xfrm>
-          <a:prstGeom prst="rect">
-            <a:avLst/>
-          </a:prstGeom>
-          <a:solidFill>
-            <a:srgbClr val="D2C8AF"/>
-          </a:solidFill>
-          <a:ln>
-            <a:noFill/>
-          </a:ln>
-        </p:spPr>
-        <p:style>
-          <a:lnRef idx="1">
-            <a:schemeClr val="accent1"/>
-          </a:lnRef>
-          <a:fillRef idx="3">
-            <a:schemeClr val="accent1"/>
-          </a:fillRef>
-          <a:effectRef idx="2">
-            <a:schemeClr val="accent1"/>
-          </a:effectRef>
-          <a:fontRef idx="minor">
-            <a:schemeClr val="lt1"/>
-          </a:fontRef>
-        </p:style>
-        <p:txBody>
-          <a:bodyPr rtlCol="0" anchor="ctr"/>
-          <a:lstStyle/>
-          <a:p>
-            <a:pPr algn="ctr"/>
-          </a:p>
-        </p:txBody>
-      </p:sp>
-      <p:sp>
-        <p:nvSpPr>
-          <p:cNvPr id="22" name="Rounded Rectangle 21"/>
-          <p:cNvSpPr/>
-          <p:nvPr/>
-        </p:nvSpPr>
-        <p:spPr>
-          <a:xfrm>
-            <a:off x="1600200" y="3236976"/>
-            <a:ext cx="1280160" cy="347472"/>
-          </a:xfrm>
-          <a:prstGeom prst="roundRect">
-            <a:avLst/>
-          </a:prstGeom>
-          <a:solidFill>
-            <a:srgbClr val="C8AADC"/>
-          </a:solidFill>
-          <a:ln>
-            <a:noFill/>
-          </a:ln>
-        </p:spPr>
-        <p:style>
-          <a:lnRef idx="1">
-            <a:schemeClr val="accent1"/>
-          </a:lnRef>
-          <a:fillRef idx="3">
-            <a:schemeClr val="accent1"/>
-          </a:fillRef>
-          <a:effectRef idx="2">
-            <a:schemeClr val="accent1"/>
-          </a:effectRef>
-          <a:fontRef idx="minor">
-            <a:schemeClr val="lt1"/>
-          </a:fontRef>
-        </p:style>
-        <p:txBody>
-          <a:bodyPr rtlCol="0" anchor="ctr"/>
-          <a:lstStyle/>
-          <a:p>
-            <a:pPr algn="ctr"/>
-          </a:p>
-        </p:txBody>
-      </p:sp>
-      <p:sp>
-        <p:nvSpPr>
-          <p:cNvPr id="23" name="TextBox 22"/>
-          <p:cNvSpPr txBox="1"/>
-          <p:nvPr/>
-        </p:nvSpPr>
-        <p:spPr>
-          <a:xfrm>
-            <a:off x="1600200" y="3255264"/>
-            <a:ext cx="1280160" cy="310896"/>
-          </a:xfrm>
-          <a:prstGeom prst="rect">
-            <a:avLst/>
-          </a:prstGeom>
-          <a:noFill/>
-        </p:spPr>
-        <p:txBody>
-          <a:bodyPr wrap="none">
-            <a:spAutoFit/>
-          </a:bodyPr>
-          <a:lstStyle/>
-          <a:p>
-            <a:pPr algn="ctr">
-              <a:spcAft>
-                <a:spcPts val="1000"/>
-              </a:spcAft>
-            </a:pPr>
-            <a:r>
-              <a:rPr sz="1800" b="1">
-                <a:solidFill>
-                  <a:srgbClr val="3C2850"/>
-                </a:solidFill>
-                <a:latin typeface="Microsoft YaHei"/>
-              </a:rPr>
-              <a:t>高潮</a:t>
-            </a:r>
-          </a:p>
-        </p:txBody>
-      </p:sp>
-      <p:sp>
-        <p:nvSpPr>
-          <p:cNvPr id="24" name="TextBox 23"/>
-          <p:cNvSpPr txBox="1"/>
-          <p:nvPr/>
-        </p:nvSpPr>
-        <p:spPr>
-          <a:xfrm>
-            <a:off x="3017520" y="3236976"/>
-            <a:ext cx="7498079" cy="658368"/>
-          </a:xfrm>
-          <a:prstGeom prst="rect">
-            <a:avLst/>
-          </a:prstGeom>
-          <a:noFill/>
-        </p:spPr>
-        <p:txBody>
-          <a:bodyPr wrap="none">
-            <a:spAutoFit/>
-          </a:bodyPr>
-          <a:lstStyle/>
-          <a:p>
-            <a:pPr algn="l">
-              <a:spcAft>
-                <a:spcPts val="1000"/>
-              </a:spcAft>
-            </a:pPr>
-            <a:r>
-              <a:rPr sz="2100" b="0">
-                <a:solidFill>
-                  <a:srgbClr val="3C2850"/>
-                </a:solidFill>
-                <a:latin typeface="Microsoft YaHei"/>
-              </a:rPr>
-              <a:t>皇帝穿上「新装」游行，百姓假装看见</a:t>
-            </a:r>
-          </a:p>
-        </p:txBody>
-      </p:sp>
-      <p:sp>
-        <p:nvSpPr>
-          <p:cNvPr id="25" name="Rectangle 24"/>
-          <p:cNvSpPr/>
-          <p:nvPr/>
-        </p:nvSpPr>
-        <p:spPr>
-          <a:xfrm>
-            <a:off x="1417320" y="4690872"/>
-            <a:ext cx="9601200" cy="13716"/>
-          </a:xfrm>
-          <a:prstGeom prst="rect">
-            <a:avLst/>
-          </a:prstGeom>
-          <a:solidFill>
-            <a:srgbClr val="D2C8AF"/>
-          </a:solidFill>
-          <a:ln>
-            <a:noFill/>
-          </a:ln>
-        </p:spPr>
-        <p:style>
-          <a:lnRef idx="1">
-            <a:schemeClr val="accent1"/>
-          </a:lnRef>
-          <a:fillRef idx="3">
-            <a:schemeClr val="accent1"/>
-          </a:fillRef>
-          <a:effectRef idx="2">
-            <a:schemeClr val="accent1"/>
-          </a:effectRef>
-          <a:fontRef idx="minor">
-            <a:schemeClr val="lt1"/>
-          </a:fontRef>
-        </p:style>
-        <p:txBody>
-          <a:bodyPr rtlCol="0" anchor="ctr"/>
-          <a:lstStyle/>
-          <a:p>
-            <a:pPr algn="ctr"/>
-          </a:p>
-        </p:txBody>
-      </p:sp>
-      <p:sp>
-        <p:nvSpPr>
-          <p:cNvPr id="26" name="Rounded Rectangle 25"/>
-          <p:cNvSpPr/>
-          <p:nvPr/>
-        </p:nvSpPr>
-        <p:spPr>
-          <a:xfrm>
-            <a:off x="1600200" y="4041648"/>
-            <a:ext cx="1280160" cy="347472"/>
-          </a:xfrm>
-          <a:prstGeom prst="roundRect">
-            <a:avLst/>
-          </a:prstGeom>
-          <a:solidFill>
-            <a:srgbClr val="C8AADC"/>
-          </a:solidFill>
-          <a:ln>
-            <a:noFill/>
-          </a:ln>
-        </p:spPr>
-        <p:style>
-          <a:lnRef idx="1">
-            <a:schemeClr val="accent1"/>
-          </a:lnRef>
-          <a:fillRef idx="3">
-            <a:schemeClr val="accent1"/>
-          </a:fillRef>
-          <a:effectRef idx="2">
-            <a:schemeClr val="accent1"/>
-          </a:effectRef>
-          <a:fontRef idx="minor">
-            <a:schemeClr val="lt1"/>
-          </a:fontRef>
-        </p:style>
-        <p:txBody>
-          <a:bodyPr rtlCol="0" anchor="ctr"/>
-          <a:lstStyle/>
-          <a:p>
-            <a:pPr algn="ctr"/>
-          </a:p>
-        </p:txBody>
-      </p:sp>
-      <p:sp>
-        <p:nvSpPr>
-          <p:cNvPr id="27" name="TextBox 26"/>
-          <p:cNvSpPr txBox="1"/>
-          <p:nvPr/>
-        </p:nvSpPr>
-        <p:spPr>
-          <a:xfrm>
-            <a:off x="1600200" y="4059936"/>
-            <a:ext cx="1280160" cy="310896"/>
-          </a:xfrm>
-          <a:prstGeom prst="rect">
-            <a:avLst/>
-          </a:prstGeom>
-          <a:noFill/>
-        </p:spPr>
-        <p:txBody>
-          <a:bodyPr wrap="none">
-            <a:spAutoFit/>
-          </a:bodyPr>
-          <a:lstStyle/>
-          <a:p>
-            <a:pPr algn="ctr">
-              <a:spcAft>
-                <a:spcPts val="1000"/>
-              </a:spcAft>
-            </a:pPr>
-            <a:r>
-              <a:rPr sz="1800" b="1">
-                <a:solidFill>
-                  <a:srgbClr val="3C2850"/>
-                </a:solidFill>
-                <a:latin typeface="Microsoft YaHei"/>
-              </a:rPr>
-              <a:t>结局</a:t>
-            </a:r>
-          </a:p>
-        </p:txBody>
-      </p:sp>
-      <p:sp>
-        <p:nvSpPr>
-          <p:cNvPr id="28" name="TextBox 27"/>
-          <p:cNvSpPr txBox="1"/>
-          <p:nvPr/>
-        </p:nvSpPr>
-        <p:spPr>
-          <a:xfrm>
-            <a:off x="3017520" y="4041648"/>
-            <a:ext cx="7498079" cy="658368"/>
-          </a:xfrm>
-          <a:prstGeom prst="rect">
-            <a:avLst/>
-          </a:prstGeom>
-          <a:noFill/>
-        </p:spPr>
-        <p:txBody>
-          <a:bodyPr wrap="none">
-            <a:spAutoFit/>
-          </a:bodyPr>
-          <a:lstStyle/>
-          <a:p>
-            <a:pPr algn="l">
-              <a:spcAft>
-                <a:spcPts val="1000"/>
-              </a:spcAft>
-            </a:pPr>
-            <a:r>
-              <a:rPr sz="2100" b="0">
-                <a:solidFill>
-                  <a:srgbClr val="3C2850"/>
-                </a:solidFill>
-                <a:latin typeface="Microsoft YaHei"/>
-              </a:rPr>
-              <a:t>小孩子说「他没穿衣服」，百姓跟着说，皇帝仍装模作样</a:t>
+                <a:spcPts val="200"/>
+              </a:spcAft>
+            </a:pPr>
+            <a:r>
+              <a:rPr sz="1300" b="0">
+                <a:solidFill>
+                  <a:srgbClr val="000000"/>
+                </a:solidFill>
+                <a:latin typeface="Arial"/>
+              </a:rPr>
+              <a:t>「我什么也没有看见」强化讽刺</a:t>
             </a:r>
           </a:p>
         </p:txBody>
@@ -5588,20 +4865,12 @@
         <p:nvPr/>
       </p:nvGrpSpPr>
       <p:grpSpPr/>
-      <p:pic>
-        <p:nvPicPr>
-          <p:cNvPr id="2" name="Picture 1" descr="bg_emperor.png"/>
-          <p:cNvPicPr>
-            <a:picLocks noChangeAspect="1"/>
-          </p:cNvPicPr>
-          <p:nvPr/>
-        </p:nvPicPr>
-        <p:blipFill>
-          <a:blip r:embed="rId2"/>
-          <a:stretch>
-            <a:fillRect/>
-          </a:stretch>
-        </p:blipFill>
+      <p:sp>
+        <p:nvSpPr>
+          <p:cNvPr id="2" name="Rectangle 1"/>
+          <p:cNvSpPr/>
+          <p:nvPr/>
+        </p:nvSpPr>
         <p:spPr>
           <a:xfrm>
             <a:off x="0" y="0"/>
@@ -5610,27 +4879,11 @@
           <a:prstGeom prst="rect">
             <a:avLst/>
           </a:prstGeom>
-        </p:spPr>
-      </p:pic>
-      <p:sp>
-        <p:nvSpPr>
-          <p:cNvPr id="3" name="Rectangle 2"/>
-          <p:cNvSpPr/>
-          <p:nvPr/>
-        </p:nvSpPr>
-        <p:spPr>
-          <a:xfrm>
-            <a:off x="292608" y="274320"/>
-            <a:ext cx="11594592" cy="6300216"/>
-          </a:xfrm>
-          <a:prstGeom prst="rect">
-            <a:avLst/>
-          </a:prstGeom>
-          <a:noFill/>
-          <a:ln w="31750">
-            <a:solidFill>
-              <a:srgbClr val="825AA0"/>
-            </a:solidFill>
+          <a:solidFill>
+            <a:srgbClr val="FFFFFF"/>
+          </a:solidFill>
+          <a:ln>
+            <a:noFill/>
           </a:ln>
         </p:spPr>
         <p:style>
@@ -5655,70 +4908,100 @@
           </a:p>
         </p:txBody>
       </p:sp>
-      <p:pic>
-        <p:nvPicPr>
-          <p:cNvPr id="4" name="Picture 3" descr="corner_emperor_tl.png"/>
-          <p:cNvPicPr>
-            <a:picLocks noChangeAspect="1"/>
-          </p:cNvPicPr>
-          <p:nvPr/>
-        </p:nvPicPr>
-        <p:blipFill>
-          <a:blip r:embed="rId3"/>
-          <a:stretch>
-            <a:fillRect/>
-          </a:stretch>
-        </p:blipFill>
-        <p:spPr>
-          <a:xfrm>
-            <a:off x="-45720" y="-45720"/>
-            <a:ext cx="2011680" cy="2011680"/>
-          </a:xfrm>
-          <a:prstGeom prst="rect">
-            <a:avLst/>
-          </a:prstGeom>
-        </p:spPr>
-      </p:pic>
-      <p:pic>
-        <p:nvPicPr>
-          <p:cNvPr id="5" name="Picture 4" descr="corner_emperor_tr.png"/>
-          <p:cNvPicPr>
-            <a:picLocks noChangeAspect="1"/>
-          </p:cNvPicPr>
-          <p:nvPr/>
-        </p:nvPicPr>
-        <p:blipFill>
-          <a:blip r:embed="rId4"/>
-          <a:stretch>
-            <a:fillRect/>
-          </a:stretch>
-        </p:blipFill>
-        <p:spPr>
-          <a:xfrm>
-            <a:off x="9875520" y="-45720"/>
-            <a:ext cx="2011680" cy="2011680"/>
-          </a:xfrm>
-          <a:prstGeom prst="rect">
-            <a:avLst/>
-          </a:prstGeom>
-        </p:spPr>
-      </p:pic>
-      <p:sp>
-        <p:nvSpPr>
-          <p:cNvPr id="6" name="Rounded Rectangle 5"/>
+      <p:sp>
+        <p:nvSpPr>
+          <p:cNvPr id="3" name="TextBox 2"/>
+          <p:cNvSpPr txBox="1"/>
+          <p:nvPr/>
+        </p:nvSpPr>
+        <p:spPr>
+          <a:xfrm>
+            <a:off x="411480" y="320040"/>
+            <a:ext cx="1097280" cy="274320"/>
+          </a:xfrm>
+          <a:prstGeom prst="rect">
+            <a:avLst/>
+          </a:prstGeom>
+          <a:noFill/>
+        </p:spPr>
+        <p:txBody>
+          <a:bodyPr wrap="square" anchor="t">
+            <a:spAutoFit/>
+          </a:bodyPr>
+          <a:lstStyle/>
+          <a:p>
+            <a:pPr algn="l">
+              <a:spcAft>
+                <a:spcPts val="200"/>
+              </a:spcAft>
+            </a:pPr>
+            <a:r>
+              <a:rPr sz="1400" b="1">
+                <a:solidFill>
+                  <a:srgbClr val="000000"/>
+                </a:solidFill>
+                <a:latin typeface="Arial"/>
+              </a:rPr>
+              <a:t>04</a:t>
+            </a:r>
+          </a:p>
+        </p:txBody>
+      </p:sp>
+      <p:sp>
+        <p:nvSpPr>
+          <p:cNvPr id="4" name="TextBox 3"/>
+          <p:cNvSpPr txBox="1"/>
+          <p:nvPr/>
+        </p:nvSpPr>
+        <p:spPr>
+          <a:xfrm>
+            <a:off x="411480" y="320040"/>
+            <a:ext cx="11368735" cy="457200"/>
+          </a:xfrm>
+          <a:prstGeom prst="rect">
+            <a:avLst/>
+          </a:prstGeom>
+          <a:noFill/>
+        </p:spPr>
+        <p:txBody>
+          <a:bodyPr wrap="square" anchor="t">
+            <a:spAutoFit/>
+          </a:bodyPr>
+          <a:lstStyle/>
+          <a:p>
+            <a:pPr algn="l">
+              <a:spcAft>
+                <a:spcPts val="200"/>
+              </a:spcAft>
+            </a:pPr>
+            <a:r>
+              <a:rPr sz="2800" b="1">
+                <a:solidFill>
+                  <a:srgbClr val="000000"/>
+                </a:solidFill>
+                <a:latin typeface="Arial"/>
+              </a:rPr>
+              <a:t>故事推演脉络</a:t>
+            </a:r>
+          </a:p>
+        </p:txBody>
+      </p:sp>
+      <p:sp>
+        <p:nvSpPr>
+          <p:cNvPr id="5" name="Rectangle 4"/>
           <p:cNvSpPr/>
           <p:nvPr/>
         </p:nvSpPr>
         <p:spPr>
           <a:xfrm>
-            <a:off x="502920" y="384048"/>
-            <a:ext cx="2011680" cy="384048"/>
-          </a:xfrm>
-          <a:prstGeom prst="roundRect">
+            <a:off x="411480" y="2560320"/>
+            <a:ext cx="11368735" cy="25400"/>
+          </a:xfrm>
+          <a:prstGeom prst="rect">
             <a:avLst/>
           </a:prstGeom>
           <a:solidFill>
-            <a:srgbClr val="784696"/>
+            <a:srgbClr val="000000"/>
           </a:solidFill>
           <a:ln>
             <a:noFill/>
@@ -5748,102 +5031,24 @@
       </p:sp>
       <p:sp>
         <p:nvSpPr>
-          <p:cNvPr id="7" name="TextBox 6"/>
-          <p:cNvSpPr txBox="1"/>
-          <p:nvPr/>
-        </p:nvSpPr>
-        <p:spPr>
-          <a:xfrm>
-            <a:off x="502920" y="402336"/>
-            <a:ext cx="2011680" cy="347472"/>
-          </a:xfrm>
-          <a:prstGeom prst="rect">
-            <a:avLst/>
-          </a:prstGeom>
-          <a:noFill/>
-        </p:spPr>
-        <p:txBody>
-          <a:bodyPr wrap="none">
-            <a:spAutoFit/>
-          </a:bodyPr>
-          <a:lstStyle/>
-          <a:p>
-            <a:pPr algn="ctr">
-              <a:spcAft>
-                <a:spcPts val="1000"/>
-              </a:spcAft>
-            </a:pPr>
-            <a:r>
-              <a:rPr sz="1600" b="1">
-                <a:solidFill>
-                  <a:srgbClr val="FFFFFF"/>
-                </a:solidFill>
-                <a:latin typeface="Microsoft YaHei"/>
-              </a:rPr>
-              <a:t>手法笔记</a:t>
-            </a:r>
-          </a:p>
-        </p:txBody>
-      </p:sp>
-      <p:sp>
-        <p:nvSpPr>
-          <p:cNvPr id="8" name="TextBox 7"/>
-          <p:cNvSpPr txBox="1"/>
-          <p:nvPr/>
-        </p:nvSpPr>
-        <p:spPr>
-          <a:xfrm>
-            <a:off x="1371600" y="384048"/>
-            <a:ext cx="9418320" cy="822960"/>
-          </a:xfrm>
-          <a:prstGeom prst="rect">
-            <a:avLst/>
-          </a:prstGeom>
-          <a:noFill/>
-        </p:spPr>
-        <p:txBody>
-          <a:bodyPr wrap="square">
-            <a:spAutoFit/>
-          </a:bodyPr>
-          <a:lstStyle/>
-          <a:p>
-            <a:pPr algn="ctr">
-              <a:spcAft>
-                <a:spcPts val="1000"/>
-              </a:spcAft>
-            </a:pPr>
-            <a:r>
-              <a:rPr sz="3400" b="1">
-                <a:solidFill>
-                  <a:srgbClr val="784696"/>
-                </a:solidFill>
-                <a:latin typeface="Microsoft YaHei"/>
-              </a:rPr>
-              <a:t>艺术手法</a:t>
-            </a:r>
-          </a:p>
-        </p:txBody>
-      </p:sp>
-      <p:sp>
-        <p:nvSpPr>
-          <p:cNvPr id="9" name="Rounded Rectangle 8"/>
+          <p:cNvPr id="6" name="Rectangle 5"/>
           <p:cNvSpPr/>
           <p:nvPr/>
         </p:nvSpPr>
         <p:spPr>
           <a:xfrm>
-            <a:off x="1067104" y="1143000"/>
-            <a:ext cx="10058400" cy="3721608"/>
-          </a:xfrm>
-          <a:prstGeom prst="roundRect">
+            <a:off x="1181688" y="2450592"/>
+            <a:ext cx="320040" cy="320040"/>
+          </a:xfrm>
+          <a:prstGeom prst="rect">
             <a:avLst/>
           </a:prstGeom>
           <a:solidFill>
-            <a:srgbClr val="FFFCEB"/>
+            <a:srgbClr val="FFFFFF"/>
           </a:solidFill>
           <a:ln w="25400">
             <a:solidFill>
-              <a:srgbClr val="825AA0"/>
+              <a:srgbClr val="000000"/>
             </a:solidFill>
           </a:ln>
         </p:spPr>
@@ -5871,23 +5076,103 @@
       </p:sp>
       <p:sp>
         <p:nvSpPr>
-          <p:cNvPr id="10" name="Rectangle 9"/>
+          <p:cNvPr id="7" name="TextBox 6"/>
+          <p:cNvSpPr txBox="1"/>
+          <p:nvPr/>
+        </p:nvSpPr>
+        <p:spPr>
+          <a:xfrm>
+            <a:off x="411480" y="1188720"/>
+            <a:ext cx="2200595" cy="1097280"/>
+          </a:xfrm>
+          <a:prstGeom prst="rect">
+            <a:avLst/>
+          </a:prstGeom>
+          <a:noFill/>
+        </p:spPr>
+        <p:txBody>
+          <a:bodyPr wrap="square" anchor="t">
+            <a:spAutoFit/>
+          </a:bodyPr>
+          <a:lstStyle/>
+          <a:p>
+            <a:pPr algn="ctr">
+              <a:spcAft>
+                <a:spcPts val="200"/>
+              </a:spcAft>
+            </a:pPr>
+            <a:r>
+              <a:rPr sz="1400" b="1">
+                <a:solidFill>
+                  <a:srgbClr val="000000"/>
+                </a:solidFill>
+                <a:latin typeface="Arial"/>
+              </a:rPr>
+              <a:t>骗子做衣</a:t>
+            </a:r>
+          </a:p>
+        </p:txBody>
+      </p:sp>
+      <p:sp>
+        <p:nvSpPr>
+          <p:cNvPr id="8" name="TextBox 7"/>
+          <p:cNvSpPr txBox="1"/>
+          <p:nvPr/>
+        </p:nvSpPr>
+        <p:spPr>
+          <a:xfrm>
+            <a:off x="411480" y="2788920"/>
+            <a:ext cx="2200595" cy="320040"/>
+          </a:xfrm>
+          <a:prstGeom prst="rect">
+            <a:avLst/>
+          </a:prstGeom>
+          <a:noFill/>
+        </p:spPr>
+        <p:txBody>
+          <a:bodyPr wrap="square" anchor="t">
+            <a:spAutoFit/>
+          </a:bodyPr>
+          <a:lstStyle/>
+          <a:p>
+            <a:pPr algn="ctr">
+              <a:spcAft>
+                <a:spcPts val="200"/>
+              </a:spcAft>
+            </a:pPr>
+            <a:r>
+              <a:rPr sz="1100" b="1">
+                <a:solidFill>
+                  <a:srgbClr val="000000"/>
+                </a:solidFill>
+                <a:latin typeface="Arial"/>
+              </a:rPr>
+              <a:t>01</a:t>
+            </a:r>
+          </a:p>
+        </p:txBody>
+      </p:sp>
+      <p:sp>
+        <p:nvSpPr>
+          <p:cNvPr id="9" name="Rectangle 8"/>
           <p:cNvSpPr/>
           <p:nvPr/>
         </p:nvSpPr>
         <p:spPr>
           <a:xfrm>
-            <a:off x="1067104" y="1143000"/>
-            <a:ext cx="10058400" cy="384048"/>
+            <a:off x="3382283" y="2450592"/>
+            <a:ext cx="320040" cy="320040"/>
           </a:xfrm>
           <a:prstGeom prst="rect">
             <a:avLst/>
           </a:prstGeom>
           <a:solidFill>
-            <a:srgbClr val="784696"/>
+            <a:srgbClr val="FFFFFF"/>
           </a:solidFill>
-          <a:ln>
-            <a:noFill/>
+          <a:ln w="25400">
+            <a:solidFill>
+              <a:srgbClr val="000000"/>
+            </a:solidFill>
           </a:ln>
         </p:spPr>
         <p:style>
@@ -5914,14 +5199,53 @@
       </p:sp>
       <p:sp>
         <p:nvSpPr>
+          <p:cNvPr id="10" name="TextBox 9"/>
+          <p:cNvSpPr txBox="1"/>
+          <p:nvPr/>
+        </p:nvSpPr>
+        <p:spPr>
+          <a:xfrm>
+            <a:off x="2612075" y="1188720"/>
+            <a:ext cx="2200595" cy="1097280"/>
+          </a:xfrm>
+          <a:prstGeom prst="rect">
+            <a:avLst/>
+          </a:prstGeom>
+          <a:noFill/>
+        </p:spPr>
+        <p:txBody>
+          <a:bodyPr wrap="square" anchor="t">
+            <a:spAutoFit/>
+          </a:bodyPr>
+          <a:lstStyle/>
+          <a:p>
+            <a:pPr algn="ctr">
+              <a:spcAft>
+                <a:spcPts val="200"/>
+              </a:spcAft>
+            </a:pPr>
+            <a:r>
+              <a:rPr sz="1400" b="1">
+                <a:solidFill>
+                  <a:srgbClr val="000000"/>
+                </a:solidFill>
+                <a:latin typeface="Arial"/>
+              </a:rPr>
+              <a:t>大臣探访</a:t>
+            </a:r>
+          </a:p>
+        </p:txBody>
+      </p:sp>
+      <p:sp>
+        <p:nvSpPr>
           <p:cNvPr id="11" name="TextBox 10"/>
           <p:cNvSpPr txBox="1"/>
           <p:nvPr/>
         </p:nvSpPr>
         <p:spPr>
           <a:xfrm>
-            <a:off x="1067104" y="1179576"/>
-            <a:ext cx="10058400" cy="347472"/>
+            <a:off x="2612075" y="2788920"/>
+            <a:ext cx="2200595" cy="320040"/>
           </a:xfrm>
           <a:prstGeom prst="rect">
             <a:avLst/>
@@ -5929,24 +5253,24 @@
           <a:noFill/>
         </p:spPr>
         <p:txBody>
-          <a:bodyPr wrap="none">
+          <a:bodyPr wrap="square" anchor="t">
             <a:spAutoFit/>
           </a:bodyPr>
           <a:lstStyle/>
           <a:p>
             <a:pPr algn="ctr">
               <a:spcAft>
-                <a:spcPts val="1000"/>
-              </a:spcAft>
-            </a:pPr>
-            <a:r>
-              <a:rPr sz="1800" b="1">
-                <a:solidFill>
-                  <a:srgbClr val="FFFFFF"/>
-                </a:solidFill>
-                <a:latin typeface="Microsoft YaHei"/>
-              </a:rPr>
-              <a:t>📝  课堂笔记  —  请摘抄要点</a:t>
+                <a:spcPts val="200"/>
+              </a:spcAft>
+            </a:pPr>
+            <a:r>
+              <a:rPr sz="1100" b="1">
+                <a:solidFill>
+                  <a:srgbClr val="000000"/>
+                </a:solidFill>
+                <a:latin typeface="Arial"/>
+              </a:rPr>
+              <a:t>02</a:t>
             </a:r>
           </a:p>
         </p:txBody>
@@ -5959,17 +5283,19 @@
         </p:nvSpPr>
         <p:spPr>
           <a:xfrm>
-            <a:off x="1570024" y="1527048"/>
-            <a:ext cx="27432" cy="3337560"/>
+            <a:off x="5582878" y="2450592"/>
+            <a:ext cx="320040" cy="320040"/>
           </a:xfrm>
           <a:prstGeom prst="rect">
             <a:avLst/>
           </a:prstGeom>
           <a:solidFill>
-            <a:srgbClr val="DC5050"/>
+            <a:srgbClr val="FFFFFF"/>
           </a:solidFill>
-          <a:ln>
-            <a:noFill/>
+          <a:ln w="25400">
+            <a:solidFill>
+              <a:srgbClr val="000000"/>
+            </a:solidFill>
           </a:ln>
         </p:spPr>
         <p:style>
@@ -5996,23 +5322,103 @@
       </p:sp>
       <p:sp>
         <p:nvSpPr>
-          <p:cNvPr id="13" name="Rectangle 12"/>
+          <p:cNvPr id="13" name="TextBox 12"/>
+          <p:cNvSpPr txBox="1"/>
+          <p:nvPr/>
+        </p:nvSpPr>
+        <p:spPr>
+          <a:xfrm>
+            <a:off x="4812670" y="1188720"/>
+            <a:ext cx="2200595" cy="1097280"/>
+          </a:xfrm>
+          <a:prstGeom prst="rect">
+            <a:avLst/>
+          </a:prstGeom>
+          <a:noFill/>
+        </p:spPr>
+        <p:txBody>
+          <a:bodyPr wrap="square" anchor="t">
+            <a:spAutoFit/>
+          </a:bodyPr>
+          <a:lstStyle/>
+          <a:p>
+            <a:pPr algn="ctr">
+              <a:spcAft>
+                <a:spcPts val="200"/>
+              </a:spcAft>
+            </a:pPr>
+            <a:r>
+              <a:rPr sz="1400" b="1">
+                <a:solidFill>
+                  <a:srgbClr val="000000"/>
+                </a:solidFill>
+                <a:latin typeface="Arial"/>
+              </a:rPr>
+              <a:t>皇帝试穿</a:t>
+            </a:r>
+          </a:p>
+        </p:txBody>
+      </p:sp>
+      <p:sp>
+        <p:nvSpPr>
+          <p:cNvPr id="14" name="TextBox 13"/>
+          <p:cNvSpPr txBox="1"/>
+          <p:nvPr/>
+        </p:nvSpPr>
+        <p:spPr>
+          <a:xfrm>
+            <a:off x="4812670" y="2788920"/>
+            <a:ext cx="2200595" cy="320040"/>
+          </a:xfrm>
+          <a:prstGeom prst="rect">
+            <a:avLst/>
+          </a:prstGeom>
+          <a:noFill/>
+        </p:spPr>
+        <p:txBody>
+          <a:bodyPr wrap="square" anchor="t">
+            <a:spAutoFit/>
+          </a:bodyPr>
+          <a:lstStyle/>
+          <a:p>
+            <a:pPr algn="ctr">
+              <a:spcAft>
+                <a:spcPts val="200"/>
+              </a:spcAft>
+            </a:pPr>
+            <a:r>
+              <a:rPr sz="1100" b="1">
+                <a:solidFill>
+                  <a:srgbClr val="000000"/>
+                </a:solidFill>
+                <a:latin typeface="Arial"/>
+              </a:rPr>
+              <a:t>03</a:t>
+            </a:r>
+          </a:p>
+        </p:txBody>
+      </p:sp>
+      <p:sp>
+        <p:nvSpPr>
+          <p:cNvPr id="15" name="Rectangle 14"/>
           <p:cNvSpPr/>
           <p:nvPr/>
         </p:nvSpPr>
         <p:spPr>
           <a:xfrm>
-            <a:off x="1417320" y="2276856"/>
-            <a:ext cx="9601200" cy="13716"/>
+            <a:off x="7783473" y="2450592"/>
+            <a:ext cx="320040" cy="320040"/>
           </a:xfrm>
           <a:prstGeom prst="rect">
             <a:avLst/>
           </a:prstGeom>
           <a:solidFill>
-            <a:srgbClr val="D2C8AF"/>
+            <a:srgbClr val="FFFFFF"/>
           </a:solidFill>
-          <a:ln>
-            <a:noFill/>
+          <a:ln w="25400">
+            <a:solidFill>
+              <a:srgbClr val="000000"/>
+            </a:solidFill>
           </a:ln>
         </p:spPr>
         <p:style>
@@ -6039,23 +5445,103 @@
       </p:sp>
       <p:sp>
         <p:nvSpPr>
-          <p:cNvPr id="14" name="Rounded Rectangle 13"/>
+          <p:cNvPr id="16" name="TextBox 15"/>
+          <p:cNvSpPr txBox="1"/>
+          <p:nvPr/>
+        </p:nvSpPr>
+        <p:spPr>
+          <a:xfrm>
+            <a:off x="7013265" y="1188720"/>
+            <a:ext cx="2200595" cy="1097280"/>
+          </a:xfrm>
+          <a:prstGeom prst="rect">
+            <a:avLst/>
+          </a:prstGeom>
+          <a:noFill/>
+        </p:spPr>
+        <p:txBody>
+          <a:bodyPr wrap="square" anchor="t">
+            <a:spAutoFit/>
+          </a:bodyPr>
+          <a:lstStyle/>
+          <a:p>
+            <a:pPr algn="ctr">
+              <a:spcAft>
+                <a:spcPts val="200"/>
+              </a:spcAft>
+            </a:pPr>
+            <a:r>
+              <a:rPr sz="1400" b="1">
+                <a:solidFill>
+                  <a:srgbClr val="000000"/>
+                </a:solidFill>
+                <a:latin typeface="Arial"/>
+              </a:rPr>
+              <a:t>游行大典</a:t>
+            </a:r>
+          </a:p>
+        </p:txBody>
+      </p:sp>
+      <p:sp>
+        <p:nvSpPr>
+          <p:cNvPr id="17" name="TextBox 16"/>
+          <p:cNvSpPr txBox="1"/>
+          <p:nvPr/>
+        </p:nvSpPr>
+        <p:spPr>
+          <a:xfrm>
+            <a:off x="7013265" y="2788920"/>
+            <a:ext cx="2200595" cy="320040"/>
+          </a:xfrm>
+          <a:prstGeom prst="rect">
+            <a:avLst/>
+          </a:prstGeom>
+          <a:noFill/>
+        </p:spPr>
+        <p:txBody>
+          <a:bodyPr wrap="square" anchor="t">
+            <a:spAutoFit/>
+          </a:bodyPr>
+          <a:lstStyle/>
+          <a:p>
+            <a:pPr algn="ctr">
+              <a:spcAft>
+                <a:spcPts val="200"/>
+              </a:spcAft>
+            </a:pPr>
+            <a:r>
+              <a:rPr sz="1100" b="1">
+                <a:solidFill>
+                  <a:srgbClr val="000000"/>
+                </a:solidFill>
+                <a:latin typeface="Arial"/>
+              </a:rPr>
+              <a:t>04</a:t>
+            </a:r>
+          </a:p>
+        </p:txBody>
+      </p:sp>
+      <p:sp>
+        <p:nvSpPr>
+          <p:cNvPr id="18" name="Rectangle 17"/>
           <p:cNvSpPr/>
           <p:nvPr/>
         </p:nvSpPr>
         <p:spPr>
           <a:xfrm>
-            <a:off x="1600200" y="1627632"/>
-            <a:ext cx="1280160" cy="347472"/>
-          </a:xfrm>
-          <a:prstGeom prst="roundRect">
+            <a:off x="9984068" y="2450592"/>
+            <a:ext cx="320040" cy="320040"/>
+          </a:xfrm>
+          <a:prstGeom prst="rect">
             <a:avLst/>
           </a:prstGeom>
           <a:solidFill>
-            <a:srgbClr val="C8AADC"/>
+            <a:srgbClr val="FFE600"/>
           </a:solidFill>
-          <a:ln>
-            <a:noFill/>
+          <a:ln w="25400">
+            <a:solidFill>
+              <a:srgbClr val="000000"/>
+            </a:solidFill>
           </a:ln>
         </p:spPr>
         <p:style>
@@ -6082,14 +5568,14 @@
       </p:sp>
       <p:sp>
         <p:nvSpPr>
-          <p:cNvPr id="15" name="TextBox 14"/>
+          <p:cNvPr id="19" name="TextBox 18"/>
           <p:cNvSpPr txBox="1"/>
           <p:nvPr/>
         </p:nvSpPr>
         <p:spPr>
           <a:xfrm>
-            <a:off x="1600200" y="1645920"/>
-            <a:ext cx="1280160" cy="310896"/>
+            <a:off x="9213860" y="1188720"/>
+            <a:ext cx="2200595" cy="1097280"/>
           </a:xfrm>
           <a:prstGeom prst="rect">
             <a:avLst/>
@@ -6097,38 +5583,38 @@
           <a:noFill/>
         </p:spPr>
         <p:txBody>
-          <a:bodyPr wrap="none">
+          <a:bodyPr wrap="square" anchor="t">
             <a:spAutoFit/>
           </a:bodyPr>
           <a:lstStyle/>
           <a:p>
             <a:pPr algn="ctr">
               <a:spcAft>
-                <a:spcPts val="1000"/>
-              </a:spcAft>
-            </a:pPr>
-            <a:r>
-              <a:rPr sz="1800" b="1">
-                <a:solidFill>
-                  <a:srgbClr val="3C2850"/>
-                </a:solidFill>
-                <a:latin typeface="Microsoft YaHei"/>
-              </a:rPr>
-              <a:t>夸张</a:t>
-            </a:r>
-          </a:p>
-        </p:txBody>
-      </p:sp>
-      <p:sp>
-        <p:nvSpPr>
-          <p:cNvPr id="16" name="TextBox 15"/>
+                <a:spcPts val="200"/>
+              </a:spcAft>
+            </a:pPr>
+            <a:r>
+              <a:rPr sz="1400" b="1">
+                <a:solidFill>
+                  <a:srgbClr val="000000"/>
+                </a:solidFill>
+                <a:latin typeface="Arial"/>
+              </a:rPr>
+              <a:t>小孩揭穿</a:t>
+            </a:r>
+          </a:p>
+        </p:txBody>
+      </p:sp>
+      <p:sp>
+        <p:nvSpPr>
+          <p:cNvPr id="20" name="TextBox 19"/>
           <p:cNvSpPr txBox="1"/>
           <p:nvPr/>
         </p:nvSpPr>
         <p:spPr>
           <a:xfrm>
-            <a:off x="3017520" y="1627632"/>
-            <a:ext cx="7498079" cy="658368"/>
+            <a:off x="9213860" y="2788920"/>
+            <a:ext cx="2200595" cy="320040"/>
           </a:xfrm>
           <a:prstGeom prst="rect">
             <a:avLst/>
@@ -6136,47 +5622,49 @@
           <a:noFill/>
         </p:spPr>
         <p:txBody>
-          <a:bodyPr wrap="none">
+          <a:bodyPr wrap="square" anchor="t">
             <a:spAutoFit/>
           </a:bodyPr>
           <a:lstStyle/>
           <a:p>
-            <a:pPr algn="l">
-              <a:spcAft>
-                <a:spcPts val="1000"/>
-              </a:spcAft>
-            </a:pPr>
-            <a:r>
-              <a:rPr sz="2100" b="0">
-                <a:solidFill>
-                  <a:srgbClr val="3C2850"/>
-                </a:solidFill>
-                <a:latin typeface="Microsoft YaHei"/>
-              </a:rPr>
-              <a:t>把皇帝爱新衣写到极致：「除非为了炫耀新衣服」</a:t>
-            </a:r>
-          </a:p>
-        </p:txBody>
-      </p:sp>
-      <p:sp>
-        <p:nvSpPr>
-          <p:cNvPr id="17" name="Rectangle 16"/>
+            <a:pPr algn="ctr">
+              <a:spcAft>
+                <a:spcPts val="200"/>
+              </a:spcAft>
+            </a:pPr>
+            <a:r>
+              <a:rPr sz="1100" b="1">
+                <a:solidFill>
+                  <a:srgbClr val="000000"/>
+                </a:solidFill>
+                <a:latin typeface="Arial"/>
+              </a:rPr>
+              <a:t>05</a:t>
+            </a:r>
+          </a:p>
+        </p:txBody>
+      </p:sp>
+      <p:sp>
+        <p:nvSpPr>
+          <p:cNvPr id="21" name="Rectangle 20"/>
           <p:cNvSpPr/>
           <p:nvPr/>
         </p:nvSpPr>
         <p:spPr>
           <a:xfrm>
-            <a:off x="1417320" y="3081527"/>
-            <a:ext cx="9601200" cy="13716"/>
+            <a:off x="411480" y="3840480"/>
+            <a:ext cx="11368735" cy="1234440"/>
           </a:xfrm>
           <a:prstGeom prst="rect">
             <a:avLst/>
           </a:prstGeom>
           <a:solidFill>
-            <a:srgbClr val="D2C8AF"/>
+            <a:srgbClr val="FFFFFF"/>
           </a:solidFill>
-          <a:ln>
-            <a:noFill/>
+          <a:ln w="25400">
+            <a:solidFill>
+              <a:srgbClr val="000000"/>
+            </a:solidFill>
           </a:ln>
         </p:spPr>
         <p:style>
@@ -6203,57 +5691,14 @@
       </p:sp>
       <p:sp>
         <p:nvSpPr>
-          <p:cNvPr id="18" name="Rounded Rectangle 17"/>
-          <p:cNvSpPr/>
-          <p:nvPr/>
-        </p:nvSpPr>
-        <p:spPr>
-          <a:xfrm>
-            <a:off x="1600200" y="2432303"/>
-            <a:ext cx="1280160" cy="347472"/>
-          </a:xfrm>
-          <a:prstGeom prst="roundRect">
-            <a:avLst/>
-          </a:prstGeom>
-          <a:solidFill>
-            <a:srgbClr val="C8AADC"/>
-          </a:solidFill>
-          <a:ln>
-            <a:noFill/>
-          </a:ln>
-        </p:spPr>
-        <p:style>
-          <a:lnRef idx="1">
-            <a:schemeClr val="accent1"/>
-          </a:lnRef>
-          <a:fillRef idx="3">
-            <a:schemeClr val="accent1"/>
-          </a:fillRef>
-          <a:effectRef idx="2">
-            <a:schemeClr val="accent1"/>
-          </a:effectRef>
-          <a:fontRef idx="minor">
-            <a:schemeClr val="lt1"/>
-          </a:fontRef>
-        </p:style>
-        <p:txBody>
-          <a:bodyPr rtlCol="0" anchor="ctr"/>
-          <a:lstStyle/>
-          <a:p>
-            <a:pPr algn="ctr"/>
-          </a:p>
-        </p:txBody>
-      </p:sp>
-      <p:sp>
-        <p:nvSpPr>
-          <p:cNvPr id="19" name="TextBox 18"/>
+          <p:cNvPr id="22" name="TextBox 21"/>
           <p:cNvSpPr txBox="1"/>
           <p:nvPr/>
         </p:nvSpPr>
         <p:spPr>
           <a:xfrm>
-            <a:off x="1600200" y="2450591"/>
-            <a:ext cx="1280160" cy="310896"/>
+            <a:off x="594360" y="3977639"/>
+            <a:ext cx="11002975" cy="960120"/>
           </a:xfrm>
           <a:prstGeom prst="rect">
             <a:avLst/>
@@ -6261,38 +5706,70 @@
           <a:noFill/>
         </p:spPr>
         <p:txBody>
-          <a:bodyPr wrap="none">
+          <a:bodyPr wrap="square" anchor="t">
             <a:spAutoFit/>
           </a:bodyPr>
           <a:lstStyle/>
           <a:p>
-            <a:pPr algn="ctr">
-              <a:spcAft>
-                <a:spcPts val="1000"/>
-              </a:spcAft>
-            </a:pPr>
-            <a:r>
-              <a:rPr sz="1800" b="1">
-                <a:solidFill>
-                  <a:srgbClr val="3C2850"/>
-                </a:solidFill>
-                <a:latin typeface="Microsoft YaHei"/>
-              </a:rPr>
-              <a:t>反讽</a:t>
-            </a:r>
-          </a:p>
-        </p:txBody>
-      </p:sp>
-      <p:sp>
-        <p:nvSpPr>
-          <p:cNvPr id="20" name="TextBox 19"/>
+            <a:pPr algn="l">
+              <a:spcAft>
+                <a:spcPts val="200"/>
+              </a:spcAft>
+            </a:pPr>
+            <a:r>
+              <a:rPr sz="1400" b="1">
+                <a:solidFill>
+                  <a:srgbClr val="000000"/>
+                </a:solidFill>
+                <a:latin typeface="Arial"/>
+              </a:rPr>
+              <a:t>核心矛盾</a:t>
+            </a:r>
+          </a:p>
+          <a:p>
+            <a:pPr algn="l">
+              <a:spcAft>
+                <a:spcPts val="200"/>
+              </a:spcAft>
+            </a:pPr>
+            <a:r>
+              <a:rPr sz="2200" b="1">
+                <a:solidFill>
+                  <a:srgbClr val="000000"/>
+                </a:solidFill>
+                <a:latin typeface="Arial"/>
+              </a:rPr>
+              <a:t>虚荣心  VS  真实事实</a:t>
+            </a:r>
+          </a:p>
+          <a:p>
+            <a:pPr algn="l">
+              <a:spcAft>
+                <a:spcPts val="200"/>
+              </a:spcAft>
+            </a:pPr>
+            <a:r>
+              <a:rPr sz="1400" b="0">
+                <a:solidFill>
+                  <a:srgbClr val="000000"/>
+                </a:solidFill>
+                <a:latin typeface="Arial"/>
+              </a:rPr>
+              <a:t>谎言因「承认看不见」运转  ·  真话因「孩子无畏」刺破</a:t>
+            </a:r>
+          </a:p>
+        </p:txBody>
+      </p:sp>
+      <p:sp>
+        <p:nvSpPr>
+          <p:cNvPr id="23" name="TextBox 22"/>
           <p:cNvSpPr txBox="1"/>
           <p:nvPr/>
         </p:nvSpPr>
         <p:spPr>
           <a:xfrm>
-            <a:off x="3017520" y="2432303"/>
-            <a:ext cx="7498079" cy="658368"/>
+            <a:off x="9098280" y="914400"/>
+            <a:ext cx="2286000" cy="1097280"/>
           </a:xfrm>
           <a:prstGeom prst="rect">
             <a:avLst/>
@@ -6300,352 +5777,24 @@
           <a:noFill/>
         </p:spPr>
         <p:txBody>
-          <a:bodyPr wrap="none">
+          <a:bodyPr wrap="square" anchor="t">
             <a:spAutoFit/>
           </a:bodyPr>
           <a:lstStyle/>
           <a:p>
-            <a:pPr algn="l">
-              <a:spcAft>
-                <a:spcPts val="1000"/>
-              </a:spcAft>
-            </a:pPr>
-            <a:r>
-              <a:rPr sz="2100" b="0">
-                <a:solidFill>
-                  <a:srgbClr val="3C2850"/>
-                </a:solidFill>
-                <a:latin typeface="Microsoft YaHei"/>
-              </a:rPr>
-              <a:t>说「看见了」其实什么也没看见，讽刺虚伪</a:t>
-            </a:r>
-          </a:p>
-        </p:txBody>
-      </p:sp>
-      <p:sp>
-        <p:nvSpPr>
-          <p:cNvPr id="21" name="Rectangle 20"/>
-          <p:cNvSpPr/>
-          <p:nvPr/>
-        </p:nvSpPr>
-        <p:spPr>
-          <a:xfrm>
-            <a:off x="1417320" y="3886200"/>
-            <a:ext cx="9601200" cy="13716"/>
-          </a:xfrm>
-          <a:prstGeom prst="rect">
-            <a:avLst/>
-          </a:prstGeom>
-          <a:solidFill>
-            <a:srgbClr val="D2C8AF"/>
-          </a:solidFill>
-          <a:ln>
-            <a:noFill/>
-          </a:ln>
-        </p:spPr>
-        <p:style>
-          <a:lnRef idx="1">
-            <a:schemeClr val="accent1"/>
-          </a:lnRef>
-          <a:fillRef idx="3">
-            <a:schemeClr val="accent1"/>
-          </a:fillRef>
-          <a:effectRef idx="2">
-            <a:schemeClr val="accent1"/>
-          </a:effectRef>
-          <a:fontRef idx="minor">
-            <a:schemeClr val="lt1"/>
-          </a:fontRef>
-        </p:style>
-        <p:txBody>
-          <a:bodyPr rtlCol="0" anchor="ctr"/>
-          <a:lstStyle/>
-          <a:p>
-            <a:pPr algn="ctr"/>
-          </a:p>
-        </p:txBody>
-      </p:sp>
-      <p:sp>
-        <p:nvSpPr>
-          <p:cNvPr id="22" name="Rounded Rectangle 21"/>
-          <p:cNvSpPr/>
-          <p:nvPr/>
-        </p:nvSpPr>
-        <p:spPr>
-          <a:xfrm>
-            <a:off x="1600200" y="3236976"/>
-            <a:ext cx="1280160" cy="347472"/>
-          </a:xfrm>
-          <a:prstGeom prst="roundRect">
-            <a:avLst/>
-          </a:prstGeom>
-          <a:solidFill>
-            <a:srgbClr val="C8AADC"/>
-          </a:solidFill>
-          <a:ln>
-            <a:noFill/>
-          </a:ln>
-        </p:spPr>
-        <p:style>
-          <a:lnRef idx="1">
-            <a:schemeClr val="accent1"/>
-          </a:lnRef>
-          <a:fillRef idx="3">
-            <a:schemeClr val="accent1"/>
-          </a:fillRef>
-          <a:effectRef idx="2">
-            <a:schemeClr val="accent1"/>
-          </a:effectRef>
-          <a:fontRef idx="minor">
-            <a:schemeClr val="lt1"/>
-          </a:fontRef>
-        </p:style>
-        <p:txBody>
-          <a:bodyPr rtlCol="0" anchor="ctr"/>
-          <a:lstStyle/>
-          <a:p>
-            <a:pPr algn="ctr"/>
-          </a:p>
-        </p:txBody>
-      </p:sp>
-      <p:sp>
-        <p:nvSpPr>
-          <p:cNvPr id="23" name="TextBox 22"/>
-          <p:cNvSpPr txBox="1"/>
-          <p:nvPr/>
-        </p:nvSpPr>
-        <p:spPr>
-          <a:xfrm>
-            <a:off x="1600200" y="3255264"/>
-            <a:ext cx="1280160" cy="310896"/>
-          </a:xfrm>
-          <a:prstGeom prst="rect">
-            <a:avLst/>
-          </a:prstGeom>
-          <a:noFill/>
-        </p:spPr>
-        <p:txBody>
-          <a:bodyPr wrap="none">
-            <a:spAutoFit/>
-          </a:bodyPr>
-          <a:lstStyle/>
-          <a:p>
-            <a:pPr algn="ctr">
-              <a:spcAft>
-                <a:spcPts val="1000"/>
-              </a:spcAft>
-            </a:pPr>
-            <a:r>
-              <a:rPr sz="1800" b="1">
-                <a:solidFill>
-                  <a:srgbClr val="3C2850"/>
-                </a:solidFill>
-                <a:latin typeface="Microsoft YaHei"/>
-              </a:rPr>
-              <a:t>对比</a:t>
-            </a:r>
-          </a:p>
-        </p:txBody>
-      </p:sp>
-      <p:sp>
-        <p:nvSpPr>
-          <p:cNvPr id="24" name="TextBox 23"/>
-          <p:cNvSpPr txBox="1"/>
-          <p:nvPr/>
-        </p:nvSpPr>
-        <p:spPr>
-          <a:xfrm>
-            <a:off x="3017520" y="3236976"/>
-            <a:ext cx="7498079" cy="658368"/>
-          </a:xfrm>
-          <a:prstGeom prst="rect">
-            <a:avLst/>
-          </a:prstGeom>
-          <a:noFill/>
-        </p:spPr>
-        <p:txBody>
-          <a:bodyPr wrap="none">
-            <a:spAutoFit/>
-          </a:bodyPr>
-          <a:lstStyle/>
-          <a:p>
-            <a:pPr algn="l">
-              <a:spcAft>
-                <a:spcPts val="1000"/>
-              </a:spcAft>
-            </a:pPr>
-            <a:r>
-              <a:rPr sz="2100" b="0">
-                <a:solidFill>
-                  <a:srgbClr val="3C2850"/>
-                </a:solidFill>
-                <a:latin typeface="Microsoft YaHei"/>
-              </a:rPr>
-              <a:t>大人的怯懦 vs 孩子的天真诚实</a:t>
-            </a:r>
-          </a:p>
-        </p:txBody>
-      </p:sp>
-      <p:sp>
-        <p:nvSpPr>
-          <p:cNvPr id="25" name="Rectangle 24"/>
-          <p:cNvSpPr/>
-          <p:nvPr/>
-        </p:nvSpPr>
-        <p:spPr>
-          <a:xfrm>
-            <a:off x="1417320" y="4690872"/>
-            <a:ext cx="9601200" cy="13716"/>
-          </a:xfrm>
-          <a:prstGeom prst="rect">
-            <a:avLst/>
-          </a:prstGeom>
-          <a:solidFill>
-            <a:srgbClr val="D2C8AF"/>
-          </a:solidFill>
-          <a:ln>
-            <a:noFill/>
-          </a:ln>
-        </p:spPr>
-        <p:style>
-          <a:lnRef idx="1">
-            <a:schemeClr val="accent1"/>
-          </a:lnRef>
-          <a:fillRef idx="3">
-            <a:schemeClr val="accent1"/>
-          </a:fillRef>
-          <a:effectRef idx="2">
-            <a:schemeClr val="accent1"/>
-          </a:effectRef>
-          <a:fontRef idx="minor">
-            <a:schemeClr val="lt1"/>
-          </a:fontRef>
-        </p:style>
-        <p:txBody>
-          <a:bodyPr rtlCol="0" anchor="ctr"/>
-          <a:lstStyle/>
-          <a:p>
-            <a:pPr algn="ctr"/>
-          </a:p>
-        </p:txBody>
-      </p:sp>
-      <p:sp>
-        <p:nvSpPr>
-          <p:cNvPr id="26" name="Rounded Rectangle 25"/>
-          <p:cNvSpPr/>
-          <p:nvPr/>
-        </p:nvSpPr>
-        <p:spPr>
-          <a:xfrm>
-            <a:off x="1600200" y="4041648"/>
-            <a:ext cx="1280160" cy="347472"/>
-          </a:xfrm>
-          <a:prstGeom prst="roundRect">
-            <a:avLst/>
-          </a:prstGeom>
-          <a:solidFill>
-            <a:srgbClr val="C8AADC"/>
-          </a:solidFill>
-          <a:ln>
-            <a:noFill/>
-          </a:ln>
-        </p:spPr>
-        <p:style>
-          <a:lnRef idx="1">
-            <a:schemeClr val="accent1"/>
-          </a:lnRef>
-          <a:fillRef idx="3">
-            <a:schemeClr val="accent1"/>
-          </a:fillRef>
-          <a:effectRef idx="2">
-            <a:schemeClr val="accent1"/>
-          </a:effectRef>
-          <a:fontRef idx="minor">
-            <a:schemeClr val="lt1"/>
-          </a:fontRef>
-        </p:style>
-        <p:txBody>
-          <a:bodyPr rtlCol="0" anchor="ctr"/>
-          <a:lstStyle/>
-          <a:p>
-            <a:pPr algn="ctr"/>
-          </a:p>
-        </p:txBody>
-      </p:sp>
-      <p:sp>
-        <p:nvSpPr>
-          <p:cNvPr id="27" name="TextBox 26"/>
-          <p:cNvSpPr txBox="1"/>
-          <p:nvPr/>
-        </p:nvSpPr>
-        <p:spPr>
-          <a:xfrm>
-            <a:off x="1600200" y="4059936"/>
-            <a:ext cx="1280160" cy="310896"/>
-          </a:xfrm>
-          <a:prstGeom prst="rect">
-            <a:avLst/>
-          </a:prstGeom>
-          <a:noFill/>
-        </p:spPr>
-        <p:txBody>
-          <a:bodyPr wrap="none">
-            <a:spAutoFit/>
-          </a:bodyPr>
-          <a:lstStyle/>
-          <a:p>
-            <a:pPr algn="ctr">
-              <a:spcAft>
-                <a:spcPts val="1000"/>
-              </a:spcAft>
-            </a:pPr>
-            <a:r>
-              <a:rPr sz="1800" b="1">
-                <a:solidFill>
-                  <a:srgbClr val="3C2850"/>
-                </a:solidFill>
-                <a:latin typeface="Microsoft YaHei"/>
-              </a:rPr>
-              <a:t>反复</a:t>
-            </a:r>
-          </a:p>
-        </p:txBody>
-      </p:sp>
-      <p:sp>
-        <p:nvSpPr>
-          <p:cNvPr id="28" name="TextBox 27"/>
-          <p:cNvSpPr txBox="1"/>
-          <p:nvPr/>
-        </p:nvSpPr>
-        <p:spPr>
-          <a:xfrm>
-            <a:off x="3017520" y="4041648"/>
-            <a:ext cx="7498079" cy="658368"/>
-          </a:xfrm>
-          <a:prstGeom prst="rect">
-            <a:avLst/>
-          </a:prstGeom>
-          <a:noFill/>
-        </p:spPr>
-        <p:txBody>
-          <a:bodyPr wrap="none">
-            <a:spAutoFit/>
-          </a:bodyPr>
-          <a:lstStyle/>
-          <a:p>
-            <a:pPr algn="l">
-              <a:spcAft>
-                <a:spcPts val="1000"/>
-              </a:spcAft>
-            </a:pPr>
-            <a:r>
-              <a:rPr sz="2100" b="0">
-                <a:solidFill>
-                  <a:srgbClr val="3C2850"/>
-                </a:solidFill>
-                <a:latin typeface="Microsoft YaHei"/>
-              </a:rPr>
-              <a:t>「我什么也没有看见」反复出现，强化讽刺效果</a:t>
+            <a:pPr algn="r">
+              <a:spcAft>
+                <a:spcPts val="200"/>
+              </a:spcAft>
+            </a:pPr>
+            <a:r>
+              <a:rPr sz="12000" b="1">
+                <a:solidFill>
+                  <a:srgbClr val="FFE600"/>
+                </a:solidFill>
+                <a:latin typeface="Arial"/>
+              </a:rPr>
+              <a:t>5</a:t>
             </a:r>
           </a:p>
         </p:txBody>
@@ -6668,20 +5817,12 @@
         <p:nvPr/>
       </p:nvGrpSpPr>
       <p:grpSpPr/>
-      <p:pic>
-        <p:nvPicPr>
-          <p:cNvPr id="2" name="Picture 1" descr="bg_emperor.png"/>
-          <p:cNvPicPr>
-            <a:picLocks noChangeAspect="1"/>
-          </p:cNvPicPr>
-          <p:nvPr/>
-        </p:nvPicPr>
-        <p:blipFill>
-          <a:blip r:embed="rId2"/>
-          <a:stretch>
-            <a:fillRect/>
-          </a:stretch>
-        </p:blipFill>
+      <p:sp>
+        <p:nvSpPr>
+          <p:cNvPr id="2" name="Rectangle 1"/>
+          <p:cNvSpPr/>
+          <p:nvPr/>
+        </p:nvSpPr>
         <p:spPr>
           <a:xfrm>
             <a:off x="0" y="0"/>
@@ -6690,27 +5831,11 @@
           <a:prstGeom prst="rect">
             <a:avLst/>
           </a:prstGeom>
-        </p:spPr>
-      </p:pic>
-      <p:sp>
-        <p:nvSpPr>
-          <p:cNvPr id="3" name="Rectangle 2"/>
-          <p:cNvSpPr/>
-          <p:nvPr/>
-        </p:nvSpPr>
-        <p:spPr>
-          <a:xfrm>
-            <a:off x="292608" y="274320"/>
-            <a:ext cx="11594592" cy="6300216"/>
-          </a:xfrm>
-          <a:prstGeom prst="rect">
-            <a:avLst/>
-          </a:prstGeom>
-          <a:noFill/>
-          <a:ln w="31750">
-            <a:solidFill>
-              <a:srgbClr val="825AA0"/>
-            </a:solidFill>
+          <a:solidFill>
+            <a:srgbClr val="FFFFFF"/>
+          </a:solidFill>
+          <a:ln>
+            <a:noFill/>
           </a:ln>
         </p:spPr>
         <p:style>
@@ -6735,73 +5860,144 @@
           </a:p>
         </p:txBody>
       </p:sp>
-      <p:pic>
-        <p:nvPicPr>
-          <p:cNvPr id="4" name="Picture 3" descr="corner_emperor_tl.png"/>
-          <p:cNvPicPr>
-            <a:picLocks noChangeAspect="1"/>
-          </p:cNvPicPr>
-          <p:nvPr/>
-        </p:nvPicPr>
-        <p:blipFill>
-          <a:blip r:embed="rId3"/>
-          <a:stretch>
-            <a:fillRect/>
-          </a:stretch>
-        </p:blipFill>
-        <p:spPr>
-          <a:xfrm>
-            <a:off x="-45720" y="-45720"/>
-            <a:ext cx="2011680" cy="2011680"/>
-          </a:xfrm>
-          <a:prstGeom prst="rect">
-            <a:avLst/>
-          </a:prstGeom>
-        </p:spPr>
-      </p:pic>
-      <p:pic>
-        <p:nvPicPr>
-          <p:cNvPr id="5" name="Picture 4" descr="corner_emperor_tr.png"/>
-          <p:cNvPicPr>
-            <a:picLocks noChangeAspect="1"/>
-          </p:cNvPicPr>
-          <p:nvPr/>
-        </p:nvPicPr>
-        <p:blipFill>
-          <a:blip r:embed="rId4"/>
-          <a:stretch>
-            <a:fillRect/>
-          </a:stretch>
-        </p:blipFill>
-        <p:spPr>
-          <a:xfrm>
-            <a:off x="9875520" y="-45720"/>
-            <a:ext cx="2011680" cy="2011680"/>
-          </a:xfrm>
-          <a:prstGeom prst="rect">
-            <a:avLst/>
-          </a:prstGeom>
-        </p:spPr>
-      </p:pic>
-      <p:sp>
-        <p:nvSpPr>
-          <p:cNvPr id="6" name="Rounded Rectangle 5"/>
+      <p:sp>
+        <p:nvSpPr>
+          <p:cNvPr id="3" name="TextBox 2"/>
+          <p:cNvSpPr txBox="1"/>
+          <p:nvPr/>
+        </p:nvSpPr>
+        <p:spPr>
+          <a:xfrm>
+            <a:off x="411480" y="320040"/>
+            <a:ext cx="1097280" cy="274320"/>
+          </a:xfrm>
+          <a:prstGeom prst="rect">
+            <a:avLst/>
+          </a:prstGeom>
+          <a:noFill/>
+        </p:spPr>
+        <p:txBody>
+          <a:bodyPr wrap="square" anchor="t">
+            <a:spAutoFit/>
+          </a:bodyPr>
+          <a:lstStyle/>
+          <a:p>
+            <a:pPr algn="l">
+              <a:spcAft>
+                <a:spcPts val="200"/>
+              </a:spcAft>
+            </a:pPr>
+            <a:r>
+              <a:rPr sz="1400" b="1">
+                <a:solidFill>
+                  <a:srgbClr val="000000"/>
+                </a:solidFill>
+                <a:latin typeface="Arial"/>
+              </a:rPr>
+              <a:t>05</a:t>
+            </a:r>
+          </a:p>
+        </p:txBody>
+      </p:sp>
+      <p:sp>
+        <p:nvSpPr>
+          <p:cNvPr id="4" name="TextBox 3"/>
+          <p:cNvSpPr txBox="1"/>
+          <p:nvPr/>
+        </p:nvSpPr>
+        <p:spPr>
+          <a:xfrm>
+            <a:off x="411480" y="320040"/>
+            <a:ext cx="5486400" cy="457200"/>
+          </a:xfrm>
+          <a:prstGeom prst="rect">
+            <a:avLst/>
+          </a:prstGeom>
+          <a:noFill/>
+        </p:spPr>
+        <p:txBody>
+          <a:bodyPr wrap="square" anchor="t">
+            <a:spAutoFit/>
+          </a:bodyPr>
+          <a:lstStyle/>
+          <a:p>
+            <a:pPr algn="l">
+              <a:spcAft>
+                <a:spcPts val="200"/>
+              </a:spcAft>
+            </a:pPr>
+            <a:r>
+              <a:rPr sz="2800" b="1">
+                <a:solidFill>
+                  <a:srgbClr val="000000"/>
+                </a:solidFill>
+                <a:latin typeface="Arial"/>
+              </a:rPr>
+              <a:t>人物图鉴</a:t>
+            </a:r>
+          </a:p>
+        </p:txBody>
+      </p:sp>
+      <p:sp>
+        <p:nvSpPr>
+          <p:cNvPr id="5" name="TextBox 4"/>
+          <p:cNvSpPr txBox="1"/>
+          <p:nvPr/>
+        </p:nvSpPr>
+        <p:spPr>
+          <a:xfrm>
+            <a:off x="8183880" y="182880"/>
+            <a:ext cx="3200400" cy="1645920"/>
+          </a:xfrm>
+          <a:prstGeom prst="rect">
+            <a:avLst/>
+          </a:prstGeom>
+          <a:noFill/>
+        </p:spPr>
+        <p:txBody>
+          <a:bodyPr wrap="square" anchor="t">
+            <a:spAutoFit/>
+          </a:bodyPr>
+          <a:lstStyle/>
+          <a:p>
+            <a:pPr algn="r">
+              <a:spcAft>
+                <a:spcPts val="200"/>
+              </a:spcAft>
+            </a:pPr>
+            <a:r>
+              <a:rPr sz="11000" b="1">
+                <a:solidFill>
+                  <a:srgbClr val="000000"/>
+                </a:solidFill>
+                <a:latin typeface="Arial"/>
+              </a:rPr>
+              <a:t>03</a:t>
+            </a:r>
+          </a:p>
+        </p:txBody>
+      </p:sp>
+      <p:sp>
+        <p:nvSpPr>
+          <p:cNvPr id="6" name="Rectangle 5"/>
           <p:cNvSpPr/>
           <p:nvPr/>
         </p:nvSpPr>
         <p:spPr>
           <a:xfrm>
-            <a:off x="502920" y="384048"/>
-            <a:ext cx="2011680" cy="384048"/>
-          </a:xfrm>
-          <a:prstGeom prst="roundRect">
+            <a:off x="411480" y="1234440"/>
+            <a:ext cx="3520440" cy="5029200"/>
+          </a:xfrm>
+          <a:prstGeom prst="rect">
             <a:avLst/>
           </a:prstGeom>
           <a:solidFill>
-            <a:srgbClr val="784696"/>
+            <a:srgbClr val="FFFFFF"/>
           </a:solidFill>
-          <a:ln>
-            <a:noFill/>
+          <a:ln w="25400">
+            <a:solidFill>
+              <a:srgbClr val="000000"/>
+            </a:solidFill>
           </a:ln>
         </p:spPr>
         <p:style>
@@ -6834,8 +6030,8 @@
         </p:nvSpPr>
         <p:spPr>
           <a:xfrm>
-            <a:off x="502920" y="402336"/>
-            <a:ext cx="2011680" cy="347472"/>
+            <a:off x="548640" y="1417320"/>
+            <a:ext cx="3246120" cy="640080"/>
           </a:xfrm>
           <a:prstGeom prst="rect">
             <a:avLst/>
@@ -6843,88 +6039,47 @@
           <a:noFill/>
         </p:spPr>
         <p:txBody>
-          <a:bodyPr wrap="none">
+          <a:bodyPr wrap="square" anchor="t">
             <a:spAutoFit/>
           </a:bodyPr>
           <a:lstStyle/>
           <a:p>
-            <a:pPr algn="ctr">
-              <a:spcAft>
-                <a:spcPts val="1000"/>
-              </a:spcAft>
-            </a:pPr>
-            <a:r>
-              <a:rPr sz="1600" b="1">
-                <a:solidFill>
-                  <a:srgbClr val="FFFFFF"/>
-                </a:solidFill>
-                <a:latin typeface="Microsoft YaHei"/>
-              </a:rPr>
-              <a:t>主题笔记</a:t>
-            </a:r>
-          </a:p>
-        </p:txBody>
-      </p:sp>
-      <p:sp>
-        <p:nvSpPr>
-          <p:cNvPr id="8" name="TextBox 7"/>
-          <p:cNvSpPr txBox="1"/>
-          <p:nvPr/>
-        </p:nvSpPr>
-        <p:spPr>
-          <a:xfrm>
-            <a:off x="1371600" y="384048"/>
-            <a:ext cx="9418320" cy="822960"/>
-          </a:xfrm>
-          <a:prstGeom prst="rect">
-            <a:avLst/>
-          </a:prstGeom>
-          <a:noFill/>
-        </p:spPr>
-        <p:txBody>
-          <a:bodyPr wrap="square">
-            <a:spAutoFit/>
-          </a:bodyPr>
-          <a:lstStyle/>
-          <a:p>
-            <a:pPr algn="ctr">
-              <a:spcAft>
-                <a:spcPts val="1000"/>
-              </a:spcAft>
-            </a:pPr>
-            <a:r>
-              <a:rPr sz="3400" b="1">
-                <a:solidFill>
-                  <a:srgbClr val="784696"/>
-                </a:solidFill>
-                <a:latin typeface="Microsoft YaHei"/>
-              </a:rPr>
-              <a:t>主题理解</a:t>
-            </a:r>
-          </a:p>
-        </p:txBody>
-      </p:sp>
-      <p:sp>
-        <p:nvSpPr>
-          <p:cNvPr id="9" name="Rounded Rectangle 8"/>
+            <a:pPr algn="l">
+              <a:spcAft>
+                <a:spcPts val="200"/>
+              </a:spcAft>
+            </a:pPr>
+            <a:r>
+              <a:rPr sz="2400" b="1">
+                <a:solidFill>
+                  <a:srgbClr val="000000"/>
+                </a:solidFill>
+                <a:latin typeface="Arial"/>
+              </a:rPr>
+              <a:t>皇帝</a:t>
+            </a:r>
+          </a:p>
+        </p:txBody>
+      </p:sp>
+      <p:sp>
+        <p:nvSpPr>
+          <p:cNvPr id="8" name="Rectangle 7"/>
           <p:cNvSpPr/>
           <p:nvPr/>
         </p:nvSpPr>
         <p:spPr>
           <a:xfrm>
-            <a:off x="1067104" y="1143000"/>
-            <a:ext cx="10058400" cy="3721608"/>
-          </a:xfrm>
-          <a:prstGeom prst="roundRect">
+            <a:off x="548640" y="2148840"/>
+            <a:ext cx="3246120" cy="25400"/>
+          </a:xfrm>
+          <a:prstGeom prst="rect">
             <a:avLst/>
           </a:prstGeom>
           <a:solidFill>
-            <a:srgbClr val="FFFCEB"/>
+            <a:srgbClr val="000000"/>
           </a:solidFill>
-          <a:ln w="25400">
-            <a:solidFill>
-              <a:srgbClr val="825AA0"/>
-            </a:solidFill>
+          <a:ln>
+            <a:noFill/>
           </a:ln>
         </p:spPr>
         <p:style>
@@ -6951,23 +6106,128 @@
       </p:sp>
       <p:sp>
         <p:nvSpPr>
+          <p:cNvPr id="9" name="TextBox 8"/>
+          <p:cNvSpPr txBox="1"/>
+          <p:nvPr/>
+        </p:nvSpPr>
+        <p:spPr>
+          <a:xfrm>
+            <a:off x="548640" y="2331720"/>
+            <a:ext cx="3246120" cy="3657600"/>
+          </a:xfrm>
+          <a:prstGeom prst="rect">
+            <a:avLst/>
+          </a:prstGeom>
+          <a:noFill/>
+        </p:spPr>
+        <p:txBody>
+          <a:bodyPr wrap="square" anchor="t">
+            <a:spAutoFit/>
+          </a:bodyPr>
+          <a:lstStyle/>
+          <a:p>
+            <a:pPr algn="l">
+              <a:spcAft>
+                <a:spcPts val="200"/>
+              </a:spcAft>
+            </a:pPr>
+            <a:r>
+              <a:rPr sz="1200" b="1">
+                <a:solidFill>
+                  <a:srgbClr val="000000"/>
+                </a:solidFill>
+                <a:latin typeface="Arial"/>
+              </a:rPr>
+              <a:t>性格</a:t>
+            </a:r>
+          </a:p>
+          <a:p>
+            <a:pPr algn="l">
+              <a:spcAft>
+                <a:spcPts val="200"/>
+              </a:spcAft>
+            </a:pPr>
+            <a:r>
+              <a:rPr sz="1400" b="0">
+                <a:solidFill>
+                  <a:srgbClr val="000000"/>
+                </a:solidFill>
+                <a:latin typeface="Arial"/>
+              </a:rPr>
+              <a:t>极致虚荣、愚蠢自私</a:t>
+            </a:r>
+          </a:p>
+          <a:p>
+            <a:pPr algn="l">
+              <a:spcAft>
+                <a:spcPts val="200"/>
+              </a:spcAft>
+            </a:pPr>
+            <a:r>
+              <a:rPr sz="600" b="0">
+                <a:solidFill>
+                  <a:srgbClr val="000000"/>
+                </a:solidFill>
+                <a:latin typeface="Arial"/>
+              </a:rPr>
+              <a:t/>
+            </a:r>
+          </a:p>
+          <a:p>
+            <a:pPr algn="l">
+              <a:spcAft>
+                <a:spcPts val="200"/>
+              </a:spcAft>
+            </a:pPr>
+            <a:r>
+              <a:rPr sz="1200" b="1">
+                <a:solidFill>
+                  <a:srgbClr val="000000"/>
+                </a:solidFill>
+                <a:latin typeface="Arial"/>
+              </a:rPr>
+              <a:t>心理</a:t>
+            </a:r>
+          </a:p>
+          <a:p>
+            <a:pPr algn="l">
+              <a:spcAft>
+                <a:spcPts val="200"/>
+              </a:spcAft>
+            </a:pPr>
+            <a:r>
+              <a:rPr sz="1400" b="0">
+                <a:solidFill>
+                  <a:srgbClr val="000000"/>
+                </a:solidFill>
+                <a:latin typeface="Arial"/>
+              </a:rPr>
+              <a:t>怕被认为不聪明、不称职</a:t>
+            </a:r>
+          </a:p>
+        </p:txBody>
+      </p:sp>
+      <p:sp>
+        <p:nvSpPr>
           <p:cNvPr id="10" name="Rectangle 9"/>
           <p:cNvSpPr/>
           <p:nvPr/>
         </p:nvSpPr>
         <p:spPr>
           <a:xfrm>
-            <a:off x="1067104" y="1143000"/>
-            <a:ext cx="10058400" cy="384048"/>
+            <a:off x="4114800" y="1234440"/>
+            <a:ext cx="3520440" cy="5029200"/>
           </a:xfrm>
           <a:prstGeom prst="rect">
             <a:avLst/>
           </a:prstGeom>
           <a:solidFill>
-            <a:srgbClr val="784696"/>
+            <a:srgbClr val="FFE600"/>
           </a:solidFill>
-          <a:ln>
-            <a:noFill/>
+          <a:ln w="25400">
+            <a:solidFill>
+              <a:srgbClr val="000000"/>
+            </a:solidFill>
           </a:ln>
         </p:spPr>
         <p:style>
@@ -7000,8 +6260,8 @@
         </p:nvSpPr>
         <p:spPr>
           <a:xfrm>
-            <a:off x="1067104" y="1179576"/>
-            <a:ext cx="10058400" cy="347472"/>
+            <a:off x="4251960" y="1417320"/>
+            <a:ext cx="3246120" cy="640080"/>
           </a:xfrm>
           <a:prstGeom prst="rect">
             <a:avLst/>
@@ -7009,24 +6269,24 @@
           <a:noFill/>
         </p:spPr>
         <p:txBody>
-          <a:bodyPr wrap="none">
+          <a:bodyPr wrap="square" anchor="t">
             <a:spAutoFit/>
           </a:bodyPr>
           <a:lstStyle/>
           <a:p>
-            <a:pPr algn="ctr">
-              <a:spcAft>
-                <a:spcPts val="1000"/>
-              </a:spcAft>
-            </a:pPr>
-            <a:r>
-              <a:rPr sz="1800" b="1">
-                <a:solidFill>
-                  <a:srgbClr val="FFFFFF"/>
-                </a:solidFill>
-                <a:latin typeface="Microsoft YaHei"/>
-              </a:rPr>
-              <a:t>📝  课堂笔记  —  请摘抄要点</a:t>
+            <a:pPr algn="l">
+              <a:spcAft>
+                <a:spcPts val="200"/>
+              </a:spcAft>
+            </a:pPr>
+            <a:r>
+              <a:rPr sz="2400" b="1">
+                <a:solidFill>
+                  <a:srgbClr val="000000"/>
+                </a:solidFill>
+                <a:latin typeface="Arial"/>
+              </a:rPr>
+              <a:t>大臣们</a:t>
             </a:r>
           </a:p>
         </p:txBody>
@@ -7039,14 +6299,14 @@
         </p:nvSpPr>
         <p:spPr>
           <a:xfrm>
-            <a:off x="1570024" y="1527048"/>
-            <a:ext cx="27432" cy="3337560"/>
+            <a:off x="4251960" y="2148840"/>
+            <a:ext cx="3246120" cy="25400"/>
           </a:xfrm>
           <a:prstGeom prst="rect">
             <a:avLst/>
           </a:prstGeom>
           <a:solidFill>
-            <a:srgbClr val="DC5050"/>
+            <a:srgbClr val="000000"/>
           </a:solidFill>
           <a:ln>
             <a:noFill/>
@@ -7076,23 +6336,128 @@
       </p:sp>
       <p:sp>
         <p:nvSpPr>
-          <p:cNvPr id="13" name="Rectangle 12"/>
+          <p:cNvPr id="13" name="TextBox 12"/>
+          <p:cNvSpPr txBox="1"/>
+          <p:nvPr/>
+        </p:nvSpPr>
+        <p:spPr>
+          <a:xfrm>
+            <a:off x="4251960" y="2331720"/>
+            <a:ext cx="3246120" cy="3657600"/>
+          </a:xfrm>
+          <a:prstGeom prst="rect">
+            <a:avLst/>
+          </a:prstGeom>
+          <a:noFill/>
+        </p:spPr>
+        <p:txBody>
+          <a:bodyPr wrap="square" anchor="t">
+            <a:spAutoFit/>
+          </a:bodyPr>
+          <a:lstStyle/>
+          <a:p>
+            <a:pPr algn="l">
+              <a:spcAft>
+                <a:spcPts val="200"/>
+              </a:spcAft>
+            </a:pPr>
+            <a:r>
+              <a:rPr sz="1200" b="1">
+                <a:solidFill>
+                  <a:srgbClr val="000000"/>
+                </a:solidFill>
+                <a:latin typeface="Arial"/>
+              </a:rPr>
+              <a:t>性格</a:t>
+            </a:r>
+          </a:p>
+          <a:p>
+            <a:pPr algn="l">
+              <a:spcAft>
+                <a:spcPts val="200"/>
+              </a:spcAft>
+            </a:pPr>
+            <a:r>
+              <a:rPr sz="1400" b="0">
+                <a:solidFill>
+                  <a:srgbClr val="000000"/>
+                </a:solidFill>
+                <a:latin typeface="Arial"/>
+              </a:rPr>
+              <a:t>自保阿谀、盲从从众</a:t>
+            </a:r>
+          </a:p>
+          <a:p>
+            <a:pPr algn="l">
+              <a:spcAft>
+                <a:spcPts val="200"/>
+              </a:spcAft>
+            </a:pPr>
+            <a:r>
+              <a:rPr sz="600" b="0">
+                <a:solidFill>
+                  <a:srgbClr val="000000"/>
+                </a:solidFill>
+                <a:latin typeface="Arial"/>
+              </a:rPr>
+              <a:t/>
+            </a:r>
+          </a:p>
+          <a:p>
+            <a:pPr algn="l">
+              <a:spcAft>
+                <a:spcPts val="200"/>
+              </a:spcAft>
+            </a:pPr>
+            <a:r>
+              <a:rPr sz="1200" b="1">
+                <a:solidFill>
+                  <a:srgbClr val="000000"/>
+                </a:solidFill>
+                <a:latin typeface="Arial"/>
+              </a:rPr>
+              <a:t>心理</a:t>
+            </a:r>
+          </a:p>
+          <a:p>
+            <a:pPr algn="l">
+              <a:spcAft>
+                <a:spcPts val="200"/>
+              </a:spcAft>
+            </a:pPr>
+            <a:r>
+              <a:rPr sz="1400" b="0">
+                <a:solidFill>
+                  <a:srgbClr val="000000"/>
+                </a:solidFill>
+                <a:latin typeface="Arial"/>
+              </a:rPr>
+              <a:t>怕失去官位与恩宠</a:t>
+            </a:r>
+          </a:p>
+        </p:txBody>
+      </p:sp>
+      <p:sp>
+        <p:nvSpPr>
+          <p:cNvPr id="14" name="Rectangle 13"/>
           <p:cNvSpPr/>
           <p:nvPr/>
         </p:nvSpPr>
         <p:spPr>
           <a:xfrm>
-            <a:off x="1417320" y="2276856"/>
-            <a:ext cx="9601200" cy="13716"/>
+            <a:off x="7818120" y="1234440"/>
+            <a:ext cx="3520440" cy="5029200"/>
           </a:xfrm>
           <a:prstGeom prst="rect">
             <a:avLst/>
           </a:prstGeom>
           <a:solidFill>
-            <a:srgbClr val="D2C8AF"/>
+            <a:srgbClr val="FFFFFF"/>
           </a:solidFill>
-          <a:ln>
-            <a:noFill/>
+          <a:ln w="25400">
+            <a:solidFill>
+              <a:srgbClr val="000000"/>
+            </a:solidFill>
           </a:ln>
         </p:spPr>
         <p:style>
@@ -7119,20 +6484,59 @@
       </p:sp>
       <p:sp>
         <p:nvSpPr>
-          <p:cNvPr id="14" name="Rounded Rectangle 13"/>
+          <p:cNvPr id="15" name="TextBox 14"/>
+          <p:cNvSpPr txBox="1"/>
+          <p:nvPr/>
+        </p:nvSpPr>
+        <p:spPr>
+          <a:xfrm>
+            <a:off x="7955280" y="1417320"/>
+            <a:ext cx="3246120" cy="640080"/>
+          </a:xfrm>
+          <a:prstGeom prst="rect">
+            <a:avLst/>
+          </a:prstGeom>
+          <a:noFill/>
+        </p:spPr>
+        <p:txBody>
+          <a:bodyPr wrap="square" anchor="t">
+            <a:spAutoFit/>
+          </a:bodyPr>
+          <a:lstStyle/>
+          <a:p>
+            <a:pPr algn="l">
+              <a:spcAft>
+                <a:spcPts val="200"/>
+              </a:spcAft>
+            </a:pPr>
+            <a:r>
+              <a:rPr sz="2400" b="1">
+                <a:solidFill>
+                  <a:srgbClr val="000000"/>
+                </a:solidFill>
+                <a:latin typeface="Arial"/>
+              </a:rPr>
+              <a:t>骗子</a:t>
+            </a:r>
+          </a:p>
+        </p:txBody>
+      </p:sp>
+      <p:sp>
+        <p:nvSpPr>
+          <p:cNvPr id="16" name="Rectangle 15"/>
           <p:cNvSpPr/>
           <p:nvPr/>
         </p:nvSpPr>
         <p:spPr>
           <a:xfrm>
-            <a:off x="1600200" y="1627632"/>
-            <a:ext cx="1444752" cy="347472"/>
-          </a:xfrm>
-          <a:prstGeom prst="roundRect">
+            <a:off x="7955280" y="2148840"/>
+            <a:ext cx="3246120" cy="25400"/>
+          </a:xfrm>
+          <a:prstGeom prst="rect">
             <a:avLst/>
           </a:prstGeom>
           <a:solidFill>
-            <a:srgbClr val="C8AADC"/>
+            <a:srgbClr val="000000"/>
           </a:solidFill>
           <a:ln>
             <a:noFill/>
@@ -7162,14 +6566,14 @@
       </p:sp>
       <p:sp>
         <p:nvSpPr>
-          <p:cNvPr id="15" name="TextBox 14"/>
+          <p:cNvPr id="17" name="TextBox 16"/>
           <p:cNvSpPr txBox="1"/>
           <p:nvPr/>
         </p:nvSpPr>
         <p:spPr>
           <a:xfrm>
-            <a:off x="1600200" y="1645920"/>
-            <a:ext cx="1444752" cy="310896"/>
+            <a:off x="7955280" y="2331720"/>
+            <a:ext cx="3246120" cy="3657600"/>
           </a:xfrm>
           <a:prstGeom prst="rect">
             <a:avLst/>
@@ -7177,555 +6581,88 @@
           <a:noFill/>
         </p:spPr>
         <p:txBody>
-          <a:bodyPr wrap="none">
+          <a:bodyPr wrap="square" anchor="t">
             <a:spAutoFit/>
           </a:bodyPr>
           <a:lstStyle/>
           <a:p>
-            <a:pPr algn="ctr">
-              <a:spcAft>
-                <a:spcPts val="1000"/>
-              </a:spcAft>
-            </a:pPr>
-            <a:r>
-              <a:rPr sz="1800" b="1">
-                <a:solidFill>
-                  <a:srgbClr val="3C2850"/>
-                </a:solidFill>
-                <a:latin typeface="Microsoft YaHei"/>
-              </a:rPr>
-              <a:t>心理机制</a:t>
-            </a:r>
-          </a:p>
-        </p:txBody>
-      </p:sp>
-      <p:sp>
-        <p:nvSpPr>
-          <p:cNvPr id="16" name="TextBox 15"/>
-          <p:cNvSpPr txBox="1"/>
-          <p:nvPr/>
-        </p:nvSpPr>
-        <p:spPr>
-          <a:xfrm>
-            <a:off x="3182112" y="1627632"/>
-            <a:ext cx="7333488" cy="658368"/>
-          </a:xfrm>
-          <a:prstGeom prst="rect">
-            <a:avLst/>
-          </a:prstGeom>
-          <a:noFill/>
-        </p:spPr>
-        <p:txBody>
-          <a:bodyPr wrap="none">
-            <a:spAutoFit/>
-          </a:bodyPr>
-          <a:lstStyle/>
-          <a:p>
             <a:pPr algn="l">
               <a:spcAft>
-                <a:spcPts val="1000"/>
-              </a:spcAft>
-            </a:pPr>
-            <a:r>
-              <a:rPr sz="2100" b="0">
-                <a:solidFill>
-                  <a:srgbClr val="3C2850"/>
-                </a:solidFill>
-                <a:latin typeface="Microsoft YaHei"/>
-              </a:rPr>
-              <a:t>害怕被认为「不聪明」或「不称职」而丢失地位</a:t>
-            </a:r>
-          </a:p>
-        </p:txBody>
-      </p:sp>
-      <p:sp>
-        <p:nvSpPr>
-          <p:cNvPr id="17" name="Rectangle 16"/>
-          <p:cNvSpPr/>
-          <p:nvPr/>
-        </p:nvSpPr>
-        <p:spPr>
-          <a:xfrm>
-            <a:off x="1417320" y="3081527"/>
-            <a:ext cx="9601200" cy="13716"/>
-          </a:xfrm>
-          <a:prstGeom prst="rect">
-            <a:avLst/>
-          </a:prstGeom>
-          <a:solidFill>
-            <a:srgbClr val="D2C8AF"/>
-          </a:solidFill>
-          <a:ln>
-            <a:noFill/>
-          </a:ln>
-        </p:spPr>
-        <p:style>
-          <a:lnRef idx="1">
-            <a:schemeClr val="accent1"/>
-          </a:lnRef>
-          <a:fillRef idx="3">
-            <a:schemeClr val="accent1"/>
-          </a:fillRef>
-          <a:effectRef idx="2">
-            <a:schemeClr val="accent1"/>
-          </a:effectRef>
-          <a:fontRef idx="minor">
-            <a:schemeClr val="lt1"/>
-          </a:fontRef>
-        </p:style>
-        <p:txBody>
-          <a:bodyPr rtlCol="0" anchor="ctr"/>
-          <a:lstStyle/>
-          <a:p>
-            <a:pPr algn="ctr"/>
-          </a:p>
-        </p:txBody>
-      </p:sp>
-      <p:sp>
-        <p:nvSpPr>
-          <p:cNvPr id="18" name="Rounded Rectangle 17"/>
-          <p:cNvSpPr/>
-          <p:nvPr/>
-        </p:nvSpPr>
-        <p:spPr>
-          <a:xfrm>
-            <a:off x="1600200" y="2432303"/>
-            <a:ext cx="1444752" cy="347472"/>
-          </a:xfrm>
-          <a:prstGeom prst="roundRect">
-            <a:avLst/>
-          </a:prstGeom>
-          <a:solidFill>
-            <a:srgbClr val="C8AADC"/>
-          </a:solidFill>
-          <a:ln>
-            <a:noFill/>
-          </a:ln>
-        </p:spPr>
-        <p:style>
-          <a:lnRef idx="1">
-            <a:schemeClr val="accent1"/>
-          </a:lnRef>
-          <a:fillRef idx="3">
-            <a:schemeClr val="accent1"/>
-          </a:fillRef>
-          <a:effectRef idx="2">
-            <a:schemeClr val="accent1"/>
-          </a:effectRef>
-          <a:fontRef idx="minor">
-            <a:schemeClr val="lt1"/>
-          </a:fontRef>
-        </p:style>
-        <p:txBody>
-          <a:bodyPr rtlCol="0" anchor="ctr"/>
-          <a:lstStyle/>
-          <a:p>
-            <a:pPr algn="ctr"/>
-          </a:p>
-        </p:txBody>
-      </p:sp>
-      <p:sp>
-        <p:nvSpPr>
-          <p:cNvPr id="19" name="TextBox 18"/>
-          <p:cNvSpPr txBox="1"/>
-          <p:nvPr/>
-        </p:nvSpPr>
-        <p:spPr>
-          <a:xfrm>
-            <a:off x="1600200" y="2450591"/>
-            <a:ext cx="1444752" cy="310896"/>
-          </a:xfrm>
-          <a:prstGeom prst="rect">
-            <a:avLst/>
-          </a:prstGeom>
-          <a:noFill/>
-        </p:spPr>
-        <p:txBody>
-          <a:bodyPr wrap="none">
-            <a:spAutoFit/>
-          </a:bodyPr>
-          <a:lstStyle/>
-          <a:p>
-            <a:pPr algn="ctr">
-              <a:spcAft>
-                <a:spcPts val="1000"/>
-              </a:spcAft>
-            </a:pPr>
-            <a:r>
-              <a:rPr sz="1800" b="1">
-                <a:solidFill>
-                  <a:srgbClr val="3C2850"/>
-                </a:solidFill>
-                <a:latin typeface="Microsoft YaHei"/>
-              </a:rPr>
-              <a:t>社会批判</a:t>
-            </a:r>
-          </a:p>
-        </p:txBody>
-      </p:sp>
-      <p:sp>
-        <p:nvSpPr>
-          <p:cNvPr id="20" name="TextBox 19"/>
-          <p:cNvSpPr txBox="1"/>
-          <p:nvPr/>
-        </p:nvSpPr>
-        <p:spPr>
-          <a:xfrm>
-            <a:off x="3182112" y="2432303"/>
-            <a:ext cx="7333488" cy="658368"/>
-          </a:xfrm>
-          <a:prstGeom prst="rect">
-            <a:avLst/>
-          </a:prstGeom>
-          <a:noFill/>
-        </p:spPr>
-        <p:txBody>
-          <a:bodyPr wrap="none">
-            <a:spAutoFit/>
-          </a:bodyPr>
-          <a:lstStyle/>
+                <a:spcPts val="200"/>
+              </a:spcAft>
+            </a:pPr>
+            <a:r>
+              <a:rPr sz="1200" b="1">
+                <a:solidFill>
+                  <a:srgbClr val="000000"/>
+                </a:solidFill>
+                <a:latin typeface="Arial"/>
+              </a:rPr>
+              <a:t>性格</a:t>
+            </a:r>
+          </a:p>
           <a:p>
             <a:pPr algn="l">
               <a:spcAft>
-                <a:spcPts val="1000"/>
-              </a:spcAft>
-            </a:pPr>
-            <a:r>
-              <a:rPr sz="2100" b="0">
-                <a:solidFill>
-                  <a:srgbClr val="3C2850"/>
-                </a:solidFill>
-                <a:latin typeface="Microsoft YaHei"/>
-              </a:rPr>
-              <a:t>讽刺盲从权威、虚伪逢迎的官场风气</a:t>
-            </a:r>
-          </a:p>
-        </p:txBody>
-      </p:sp>
-      <p:sp>
-        <p:nvSpPr>
-          <p:cNvPr id="21" name="Rectangle 20"/>
-          <p:cNvSpPr/>
-          <p:nvPr/>
-        </p:nvSpPr>
-        <p:spPr>
-          <a:xfrm>
-            <a:off x="1417320" y="3886200"/>
-            <a:ext cx="9601200" cy="13716"/>
-          </a:xfrm>
-          <a:prstGeom prst="rect">
-            <a:avLst/>
-          </a:prstGeom>
-          <a:solidFill>
-            <a:srgbClr val="D2C8AF"/>
-          </a:solidFill>
-          <a:ln>
-            <a:noFill/>
-          </a:ln>
-        </p:spPr>
-        <p:style>
-          <a:lnRef idx="1">
-            <a:schemeClr val="accent1"/>
-          </a:lnRef>
-          <a:fillRef idx="3">
-            <a:schemeClr val="accent1"/>
-          </a:fillRef>
-          <a:effectRef idx="2">
-            <a:schemeClr val="accent1"/>
-          </a:effectRef>
-          <a:fontRef idx="minor">
-            <a:schemeClr val="lt1"/>
-          </a:fontRef>
-        </p:style>
-        <p:txBody>
-          <a:bodyPr rtlCol="0" anchor="ctr"/>
-          <a:lstStyle/>
-          <a:p>
-            <a:pPr algn="ctr"/>
-          </a:p>
-        </p:txBody>
-      </p:sp>
-      <p:sp>
-        <p:nvSpPr>
-          <p:cNvPr id="22" name="Rounded Rectangle 21"/>
-          <p:cNvSpPr/>
-          <p:nvPr/>
-        </p:nvSpPr>
-        <p:spPr>
-          <a:xfrm>
-            <a:off x="1600200" y="3236976"/>
-            <a:ext cx="1444752" cy="347472"/>
-          </a:xfrm>
-          <a:prstGeom prst="roundRect">
-            <a:avLst/>
-          </a:prstGeom>
-          <a:solidFill>
-            <a:srgbClr val="C8AADC"/>
-          </a:solidFill>
-          <a:ln>
-            <a:noFill/>
-          </a:ln>
-        </p:spPr>
-        <p:style>
-          <a:lnRef idx="1">
-            <a:schemeClr val="accent1"/>
-          </a:lnRef>
-          <a:fillRef idx="3">
-            <a:schemeClr val="accent1"/>
-          </a:fillRef>
-          <a:effectRef idx="2">
-            <a:schemeClr val="accent1"/>
-          </a:effectRef>
-          <a:fontRef idx="minor">
-            <a:schemeClr val="lt1"/>
-          </a:fontRef>
-        </p:style>
-        <p:txBody>
-          <a:bodyPr rtlCol="0" anchor="ctr"/>
-          <a:lstStyle/>
-          <a:p>
-            <a:pPr algn="ctr"/>
-          </a:p>
-        </p:txBody>
-      </p:sp>
-      <p:sp>
-        <p:nvSpPr>
-          <p:cNvPr id="23" name="TextBox 22"/>
-          <p:cNvSpPr txBox="1"/>
-          <p:nvPr/>
-        </p:nvSpPr>
-        <p:spPr>
-          <a:xfrm>
-            <a:off x="1600200" y="3255264"/>
-            <a:ext cx="1444752" cy="310896"/>
-          </a:xfrm>
-          <a:prstGeom prst="rect">
-            <a:avLst/>
-          </a:prstGeom>
-          <a:noFill/>
-        </p:spPr>
-        <p:txBody>
-          <a:bodyPr wrap="none">
-            <a:spAutoFit/>
-          </a:bodyPr>
-          <a:lstStyle/>
-          <a:p>
-            <a:pPr algn="ctr">
-              <a:spcAft>
-                <a:spcPts val="1000"/>
-              </a:spcAft>
-            </a:pPr>
-            <a:r>
-              <a:rPr sz="1800" b="1">
-                <a:solidFill>
-                  <a:srgbClr val="3C2850"/>
-                </a:solidFill>
-                <a:latin typeface="Microsoft YaHei"/>
-              </a:rPr>
-              <a:t>孩子作用</a:t>
-            </a:r>
-          </a:p>
-        </p:txBody>
-      </p:sp>
-      <p:sp>
-        <p:nvSpPr>
-          <p:cNvPr id="24" name="TextBox 23"/>
-          <p:cNvSpPr txBox="1"/>
-          <p:nvPr/>
-        </p:nvSpPr>
-        <p:spPr>
-          <a:xfrm>
-            <a:off x="3182112" y="3236976"/>
-            <a:ext cx="7333488" cy="658368"/>
-          </a:xfrm>
-          <a:prstGeom prst="rect">
-            <a:avLst/>
-          </a:prstGeom>
-          <a:noFill/>
-        </p:spPr>
-        <p:txBody>
-          <a:bodyPr wrap="none">
-            <a:spAutoFit/>
-          </a:bodyPr>
-          <a:lstStyle/>
+                <a:spcPts val="200"/>
+              </a:spcAft>
+            </a:pPr>
+            <a:r>
+              <a:rPr sz="1400" b="0">
+                <a:solidFill>
+                  <a:srgbClr val="000000"/>
+                </a:solidFill>
+                <a:latin typeface="Arial"/>
+              </a:rPr>
+              <a:t>狡黠敏锐、利用弱点</a:t>
+            </a:r>
+          </a:p>
           <a:p>
             <a:pPr algn="l">
               <a:spcAft>
-                <a:spcPts val="1000"/>
-              </a:spcAft>
-            </a:pPr>
-            <a:r>
-              <a:rPr sz="2100" b="0">
-                <a:solidFill>
-                  <a:srgbClr val="3C2850"/>
-                </a:solidFill>
-                <a:latin typeface="Microsoft YaHei"/>
-              </a:rPr>
-              <a:t>天真不受虚假规则束缚，一语道破真相</a:t>
-            </a:r>
-          </a:p>
-        </p:txBody>
-      </p:sp>
-      <p:sp>
-        <p:nvSpPr>
-          <p:cNvPr id="25" name="Rectangle 24"/>
-          <p:cNvSpPr/>
-          <p:nvPr/>
-        </p:nvSpPr>
-        <p:spPr>
-          <a:xfrm>
-            <a:off x="1417320" y="4690872"/>
-            <a:ext cx="9601200" cy="13716"/>
-          </a:xfrm>
-          <a:prstGeom prst="rect">
-            <a:avLst/>
-          </a:prstGeom>
-          <a:solidFill>
-            <a:srgbClr val="D2C8AF"/>
-          </a:solidFill>
-          <a:ln>
-            <a:noFill/>
-          </a:ln>
-        </p:spPr>
-        <p:style>
-          <a:lnRef idx="1">
-            <a:schemeClr val="accent1"/>
-          </a:lnRef>
-          <a:fillRef idx="3">
-            <a:schemeClr val="accent1"/>
-          </a:fillRef>
-          <a:effectRef idx="2">
-            <a:schemeClr val="accent1"/>
-          </a:effectRef>
-          <a:fontRef idx="minor">
-            <a:schemeClr val="lt1"/>
-          </a:fontRef>
-        </p:style>
-        <p:txBody>
-          <a:bodyPr rtlCol="0" anchor="ctr"/>
-          <a:lstStyle/>
-          <a:p>
-            <a:pPr algn="ctr"/>
-          </a:p>
-        </p:txBody>
-      </p:sp>
-      <p:sp>
-        <p:nvSpPr>
-          <p:cNvPr id="26" name="Rounded Rectangle 25"/>
-          <p:cNvSpPr/>
-          <p:nvPr/>
-        </p:nvSpPr>
-        <p:spPr>
-          <a:xfrm>
-            <a:off x="1600200" y="4041648"/>
-            <a:ext cx="1444752" cy="347472"/>
-          </a:xfrm>
-          <a:prstGeom prst="roundRect">
-            <a:avLst/>
-          </a:prstGeom>
-          <a:solidFill>
-            <a:srgbClr val="C8AADC"/>
-          </a:solidFill>
-          <a:ln>
-            <a:noFill/>
-          </a:ln>
-        </p:spPr>
-        <p:style>
-          <a:lnRef idx="1">
-            <a:schemeClr val="accent1"/>
-          </a:lnRef>
-          <a:fillRef idx="3">
-            <a:schemeClr val="accent1"/>
-          </a:fillRef>
-          <a:effectRef idx="2">
-            <a:schemeClr val="accent1"/>
-          </a:effectRef>
-          <a:fontRef idx="minor">
-            <a:schemeClr val="lt1"/>
-          </a:fontRef>
-        </p:style>
-        <p:txBody>
-          <a:bodyPr rtlCol="0" anchor="ctr"/>
-          <a:lstStyle/>
-          <a:p>
-            <a:pPr algn="ctr"/>
-          </a:p>
-        </p:txBody>
-      </p:sp>
-      <p:sp>
-        <p:nvSpPr>
-          <p:cNvPr id="27" name="TextBox 26"/>
-          <p:cNvSpPr txBox="1"/>
-          <p:nvPr/>
-        </p:nvSpPr>
-        <p:spPr>
-          <a:xfrm>
-            <a:off x="1600200" y="4059936"/>
-            <a:ext cx="1444752" cy="310896"/>
-          </a:xfrm>
-          <a:prstGeom prst="rect">
-            <a:avLst/>
-          </a:prstGeom>
-          <a:noFill/>
-        </p:spPr>
-        <p:txBody>
-          <a:bodyPr wrap="none">
-            <a:spAutoFit/>
-          </a:bodyPr>
-          <a:lstStyle/>
-          <a:p>
-            <a:pPr algn="ctr">
-              <a:spcAft>
-                <a:spcPts val="1000"/>
-              </a:spcAft>
-            </a:pPr>
-            <a:r>
-              <a:rPr sz="1800" b="1">
-                <a:solidFill>
-                  <a:srgbClr val="3C2850"/>
-                </a:solidFill>
-                <a:latin typeface="Microsoft YaHei"/>
-              </a:rPr>
-              <a:t>策展主题</a:t>
-            </a:r>
-          </a:p>
-        </p:txBody>
-      </p:sp>
-      <p:sp>
-        <p:nvSpPr>
-          <p:cNvPr id="28" name="TextBox 27"/>
-          <p:cNvSpPr txBox="1"/>
-          <p:nvPr/>
-        </p:nvSpPr>
-        <p:spPr>
-          <a:xfrm>
-            <a:off x="3182112" y="4041648"/>
-            <a:ext cx="7333488" cy="658368"/>
-          </a:xfrm>
-          <a:prstGeom prst="rect">
-            <a:avLst/>
-          </a:prstGeom>
-          <a:noFill/>
-        </p:spPr>
-        <p:txBody>
-          <a:bodyPr wrap="none">
-            <a:spAutoFit/>
-          </a:bodyPr>
-          <a:lstStyle/>
+                <a:spcPts val="200"/>
+              </a:spcAft>
+            </a:pPr>
+            <a:r>
+              <a:rPr sz="600" b="0">
+                <a:solidFill>
+                  <a:srgbClr val="000000"/>
+                </a:solidFill>
+                <a:latin typeface="Arial"/>
+              </a:rPr>
+              <a:t/>
+            </a:r>
+          </a:p>
           <a:p>
             <a:pPr algn="l">
               <a:spcAft>
-                <a:spcPts val="1000"/>
-              </a:spcAft>
-            </a:pPr>
-            <a:r>
-              <a:rPr sz="2100" b="0">
-                <a:solidFill>
-                  <a:srgbClr val="3C2850"/>
-                </a:solidFill>
-                <a:latin typeface="Microsoft YaHei"/>
-              </a:rPr>
-              <a:t>面对虚假，要敢于说真话，不做沉默的大多数</a:t>
+                <a:spcPts val="200"/>
+              </a:spcAft>
+            </a:pPr>
+            <a:r>
+              <a:rPr sz="1200" b="1">
+                <a:solidFill>
+                  <a:srgbClr val="000000"/>
+                </a:solidFill>
+                <a:latin typeface="Arial"/>
+              </a:rPr>
+              <a:t>心理</a:t>
+            </a:r>
+          </a:p>
+          <a:p>
+            <a:pPr algn="l">
+              <a:spcAft>
+                <a:spcPts val="200"/>
+              </a:spcAft>
+            </a:pPr>
+            <a:r>
+              <a:rPr sz="1400" b="0">
+                <a:solidFill>
+                  <a:srgbClr val="000000"/>
+                </a:solidFill>
+                <a:latin typeface="Arial"/>
+              </a:rPr>
+              <a:t>精准猎杀人性虚荣</a:t>
             </a:r>
           </a:p>
         </p:txBody>
@@ -7748,20 +6685,12 @@
         <p:nvPr/>
       </p:nvGrpSpPr>
       <p:grpSpPr/>
-      <p:pic>
-        <p:nvPicPr>
-          <p:cNvPr id="2" name="Picture 1" descr="bg_emperor.png"/>
-          <p:cNvPicPr>
-            <a:picLocks noChangeAspect="1"/>
-          </p:cNvPicPr>
-          <p:nvPr/>
-        </p:nvPicPr>
-        <p:blipFill>
-          <a:blip r:embed="rId2"/>
-          <a:stretch>
-            <a:fillRect/>
-          </a:stretch>
-        </p:blipFill>
+      <p:sp>
+        <p:nvSpPr>
+          <p:cNvPr id="2" name="Rectangle 1"/>
+          <p:cNvSpPr/>
+          <p:nvPr/>
+        </p:nvSpPr>
         <p:spPr>
           <a:xfrm>
             <a:off x="0" y="0"/>
@@ -7770,27 +6699,11 @@
           <a:prstGeom prst="rect">
             <a:avLst/>
           </a:prstGeom>
-        </p:spPr>
-      </p:pic>
-      <p:sp>
-        <p:nvSpPr>
-          <p:cNvPr id="3" name="Rectangle 2"/>
-          <p:cNvSpPr/>
-          <p:nvPr/>
-        </p:nvSpPr>
-        <p:spPr>
-          <a:xfrm>
-            <a:off x="292608" y="274320"/>
-            <a:ext cx="11594592" cy="6300216"/>
-          </a:xfrm>
-          <a:prstGeom prst="rect">
-            <a:avLst/>
-          </a:prstGeom>
-          <a:noFill/>
-          <a:ln w="31750">
-            <a:solidFill>
-              <a:srgbClr val="825AA0"/>
-            </a:solidFill>
+          <a:solidFill>
+            <a:srgbClr val="FFFFFF"/>
+          </a:solidFill>
+          <a:ln>
+            <a:noFill/>
           </a:ln>
         </p:spPr>
         <p:style>
@@ -7815,73 +6728,183 @@
           </a:p>
         </p:txBody>
       </p:sp>
-      <p:pic>
-        <p:nvPicPr>
-          <p:cNvPr id="4" name="Picture 3" descr="corner_emperor_tl.png"/>
-          <p:cNvPicPr>
-            <a:picLocks noChangeAspect="1"/>
-          </p:cNvPicPr>
-          <p:nvPr/>
-        </p:nvPicPr>
-        <p:blipFill>
-          <a:blip r:embed="rId3"/>
-          <a:stretch>
-            <a:fillRect/>
-          </a:stretch>
-        </p:blipFill>
-        <p:spPr>
-          <a:xfrm>
-            <a:off x="-45720" y="-45720"/>
-            <a:ext cx="2011680" cy="2011680"/>
-          </a:xfrm>
-          <a:prstGeom prst="rect">
-            <a:avLst/>
-          </a:prstGeom>
-        </p:spPr>
-      </p:pic>
-      <p:pic>
-        <p:nvPicPr>
-          <p:cNvPr id="5" name="Picture 4" descr="corner_emperor_tr.png"/>
-          <p:cNvPicPr>
-            <a:picLocks noChangeAspect="1"/>
-          </p:cNvPicPr>
-          <p:nvPr/>
-        </p:nvPicPr>
-        <p:blipFill>
-          <a:blip r:embed="rId4"/>
-          <a:stretch>
-            <a:fillRect/>
-          </a:stretch>
-        </p:blipFill>
-        <p:spPr>
-          <a:xfrm>
-            <a:off x="9875520" y="-45720"/>
-            <a:ext cx="2011680" cy="2011680"/>
-          </a:xfrm>
-          <a:prstGeom prst="rect">
-            <a:avLst/>
-          </a:prstGeom>
-        </p:spPr>
-      </p:pic>
-      <p:sp>
-        <p:nvSpPr>
-          <p:cNvPr id="6" name="Rounded Rectangle 5"/>
+      <p:sp>
+        <p:nvSpPr>
+          <p:cNvPr id="3" name="TextBox 2"/>
+          <p:cNvSpPr txBox="1"/>
+          <p:nvPr/>
+        </p:nvSpPr>
+        <p:spPr>
+          <a:xfrm>
+            <a:off x="411480" y="320040"/>
+            <a:ext cx="1097280" cy="274320"/>
+          </a:xfrm>
+          <a:prstGeom prst="rect">
+            <a:avLst/>
+          </a:prstGeom>
+          <a:noFill/>
+        </p:spPr>
+        <p:txBody>
+          <a:bodyPr wrap="square" anchor="t">
+            <a:spAutoFit/>
+          </a:bodyPr>
+          <a:lstStyle/>
+          <a:p>
+            <a:pPr algn="l">
+              <a:spcAft>
+                <a:spcPts val="200"/>
+              </a:spcAft>
+            </a:pPr>
+            <a:r>
+              <a:rPr sz="1400" b="1">
+                <a:solidFill>
+                  <a:srgbClr val="000000"/>
+                </a:solidFill>
+                <a:latin typeface="Arial"/>
+              </a:rPr>
+              <a:t>06</a:t>
+            </a:r>
+          </a:p>
+        </p:txBody>
+      </p:sp>
+      <p:sp>
+        <p:nvSpPr>
+          <p:cNvPr id="4" name="TextBox 3"/>
+          <p:cNvSpPr txBox="1"/>
+          <p:nvPr/>
+        </p:nvSpPr>
+        <p:spPr>
+          <a:xfrm>
+            <a:off x="411480" y="731520"/>
+            <a:ext cx="3200400" cy="3200400"/>
+          </a:xfrm>
+          <a:prstGeom prst="rect">
+            <a:avLst/>
+          </a:prstGeom>
+          <a:noFill/>
+        </p:spPr>
+        <p:txBody>
+          <a:bodyPr wrap="square" anchor="t">
+            <a:spAutoFit/>
+          </a:bodyPr>
+          <a:lstStyle/>
+          <a:p>
+            <a:pPr algn="ctr">
+              <a:spcAft>
+                <a:spcPts val="200"/>
+              </a:spcAft>
+            </a:pPr>
+            <a:r>
+              <a:rPr sz="20000" b="1">
+                <a:solidFill>
+                  <a:srgbClr val="FFE600"/>
+                </a:solidFill>
+                <a:latin typeface="Arial"/>
+              </a:rPr>
+              <a:t>?</a:t>
+            </a:r>
+          </a:p>
+        </p:txBody>
+      </p:sp>
+      <p:sp>
+        <p:nvSpPr>
+          <p:cNvPr id="5" name="TextBox 4"/>
+          <p:cNvSpPr txBox="1"/>
+          <p:nvPr/>
+        </p:nvSpPr>
+        <p:spPr>
+          <a:xfrm>
+            <a:off x="3886200" y="320040"/>
+            <a:ext cx="7772400" cy="502920"/>
+          </a:xfrm>
+          <a:prstGeom prst="rect">
+            <a:avLst/>
+          </a:prstGeom>
+          <a:noFill/>
+        </p:spPr>
+        <p:txBody>
+          <a:bodyPr wrap="square" anchor="t">
+            <a:spAutoFit/>
+          </a:bodyPr>
+          <a:lstStyle/>
+          <a:p>
+            <a:pPr algn="l">
+              <a:spcAft>
+                <a:spcPts val="200"/>
+              </a:spcAft>
+            </a:pPr>
+            <a:r>
+              <a:rPr sz="2600" b="1">
+                <a:solidFill>
+                  <a:srgbClr val="000000"/>
+                </a:solidFill>
+                <a:latin typeface="Arial"/>
+              </a:rPr>
+              <a:t>关键道具 · 新装</a:t>
+            </a:r>
+          </a:p>
+        </p:txBody>
+      </p:sp>
+      <p:sp>
+        <p:nvSpPr>
+          <p:cNvPr id="6" name="TextBox 5"/>
+          <p:cNvSpPr txBox="1"/>
+          <p:nvPr/>
+        </p:nvSpPr>
+        <p:spPr>
+          <a:xfrm>
+            <a:off x="3886200" y="868680"/>
+            <a:ext cx="7772400" cy="502920"/>
+          </a:xfrm>
+          <a:prstGeom prst="rect">
+            <a:avLst/>
+          </a:prstGeom>
+          <a:noFill/>
+        </p:spPr>
+        <p:txBody>
+          <a:bodyPr wrap="square" anchor="t">
+            <a:spAutoFit/>
+          </a:bodyPr>
+          <a:lstStyle/>
+          <a:p>
+            <a:pPr algn="l">
+              <a:spcAft>
+                <a:spcPts val="200"/>
+              </a:spcAft>
+            </a:pPr>
+            <a:r>
+              <a:rPr sz="1600" b="0">
+                <a:solidFill>
+                  <a:srgbClr val="000000"/>
+                </a:solidFill>
+                <a:latin typeface="Arial"/>
+              </a:rPr>
+              <a:t>不存在的衣服，何以成为人性的「试金石」？</a:t>
+            </a:r>
+          </a:p>
+        </p:txBody>
+      </p:sp>
+      <p:sp>
+        <p:nvSpPr>
+          <p:cNvPr id="7" name="Rectangle 6"/>
           <p:cNvSpPr/>
           <p:nvPr/>
         </p:nvSpPr>
         <p:spPr>
           <a:xfrm>
-            <a:off x="502920" y="384048"/>
-            <a:ext cx="2011680" cy="384048"/>
-          </a:xfrm>
-          <a:prstGeom prst="roundRect">
+            <a:off x="3886200" y="1508760"/>
+            <a:ext cx="3749039" cy="4389120"/>
+          </a:xfrm>
+          <a:prstGeom prst="rect">
             <a:avLst/>
           </a:prstGeom>
           <a:solidFill>
-            <a:srgbClr val="3C9664"/>
+            <a:srgbClr val="FFFFFF"/>
           </a:solidFill>
-          <a:ln>
-            <a:noFill/>
+          <a:ln w="25400">
+            <a:solidFill>
+              <a:srgbClr val="000000"/>
+            </a:solidFill>
           </a:ln>
         </p:spPr>
         <p:style>
@@ -7908,14 +6931,14 @@
       </p:sp>
       <p:sp>
         <p:nvSpPr>
-          <p:cNvPr id="7" name="TextBox 6"/>
+          <p:cNvPr id="8" name="TextBox 7"/>
           <p:cNvSpPr txBox="1"/>
           <p:nvPr/>
         </p:nvSpPr>
         <p:spPr>
           <a:xfrm>
-            <a:off x="502920" y="402336"/>
-            <a:ext cx="2011680" cy="347472"/>
+            <a:off x="4069080" y="1691640"/>
+            <a:ext cx="3383280" cy="4023360"/>
           </a:xfrm>
           <a:prstGeom prst="rect">
             <a:avLst/>
@@ -7923,47 +6946,97 @@
           <a:noFill/>
         </p:spPr>
         <p:txBody>
-          <a:bodyPr wrap="none">
+          <a:bodyPr wrap="square" anchor="t">
             <a:spAutoFit/>
           </a:bodyPr>
           <a:lstStyle/>
           <a:p>
-            <a:pPr algn="ctr">
-              <a:spcAft>
-                <a:spcPts val="1000"/>
-              </a:spcAft>
-            </a:pPr>
-            <a:r>
-              <a:rPr sz="1600" b="1">
-                <a:solidFill>
-                  <a:srgbClr val="FFFFFF"/>
-                </a:solidFill>
-                <a:latin typeface="Microsoft YaHei"/>
-              </a:rPr>
-              <a:t>课堂活动</a:t>
-            </a:r>
-          </a:p>
-        </p:txBody>
-      </p:sp>
-      <p:sp>
-        <p:nvSpPr>
-          <p:cNvPr id="8" name="Rounded Rectangle 7"/>
+            <a:pPr algn="l">
+              <a:spcAft>
+                <a:spcPts val="200"/>
+              </a:spcAft>
+            </a:pPr>
+            <a:r>
+              <a:rPr sz="1400" b="1">
+                <a:solidFill>
+                  <a:srgbClr val="000000"/>
+                </a:solidFill>
+                <a:latin typeface="Arial"/>
+              </a:rPr>
+              <a:t>特征</a:t>
+            </a:r>
+          </a:p>
+          <a:p>
+            <a:pPr algn="l">
+              <a:spcAft>
+                <a:spcPts val="200"/>
+              </a:spcAft>
+            </a:pPr>
+            <a:r>
+              <a:rPr sz="1300" b="0">
+                <a:solidFill>
+                  <a:srgbClr val="000000"/>
+                </a:solidFill>
+                <a:latin typeface="Arial"/>
+              </a:rPr>
+              <a:t>· 愚蠢或不称职的人看不见</a:t>
+            </a:r>
+          </a:p>
+          <a:p>
+            <a:pPr algn="l">
+              <a:spcAft>
+                <a:spcPts val="200"/>
+              </a:spcAft>
+            </a:pPr>
+            <a:r>
+              <a:rPr sz="1300" b="0">
+                <a:solidFill>
+                  <a:srgbClr val="000000"/>
+                </a:solidFill>
+                <a:latin typeface="Arial"/>
+              </a:rPr>
+              <a:t>· 检验聪明与称职</a:t>
+            </a:r>
+          </a:p>
+          <a:p>
+            <a:pPr algn="l">
+              <a:spcAft>
+                <a:spcPts val="200"/>
+              </a:spcAft>
+            </a:pPr>
+            <a:r>
+              <a:rPr sz="1300" b="0">
+                <a:solidFill>
+                  <a:srgbClr val="000000"/>
+                </a:solidFill>
+                <a:latin typeface="Arial"/>
+              </a:rPr>
+              <a:t>· 以看不见制造恐惧</a:t>
+            </a:r>
+          </a:p>
+        </p:txBody>
+      </p:sp>
+      <p:sp>
+        <p:nvSpPr>
+          <p:cNvPr id="9" name="Rectangle 8"/>
           <p:cNvSpPr/>
           <p:nvPr/>
         </p:nvSpPr>
         <p:spPr>
           <a:xfrm>
-            <a:off x="4953304" y="502920"/>
-            <a:ext cx="2286000" cy="411480"/>
-          </a:xfrm>
-          <a:prstGeom prst="roundRect">
+            <a:off x="7818120" y="2148840"/>
+            <a:ext cx="3840480" cy="3749039"/>
+          </a:xfrm>
+          <a:prstGeom prst="rect">
             <a:avLst/>
           </a:prstGeom>
           <a:solidFill>
-            <a:srgbClr val="C8AADC"/>
+            <a:srgbClr val="FFE600"/>
           </a:solidFill>
-          <a:ln>
-            <a:noFill/>
+          <a:ln w="25400">
+            <a:solidFill>
+              <a:srgbClr val="000000"/>
+            </a:solidFill>
           </a:ln>
         </p:spPr>
         <p:style>
@@ -7990,14 +7063,14 @@
       </p:sp>
       <p:sp>
         <p:nvSpPr>
-          <p:cNvPr id="9" name="TextBox 8"/>
+          <p:cNvPr id="10" name="TextBox 9"/>
           <p:cNvSpPr txBox="1"/>
           <p:nvPr/>
         </p:nvSpPr>
         <p:spPr>
           <a:xfrm>
-            <a:off x="4953304" y="521208"/>
-            <a:ext cx="2286000" cy="384048"/>
+            <a:off x="8001000" y="2331720"/>
+            <a:ext cx="3474720" cy="3383280"/>
           </a:xfrm>
           <a:prstGeom prst="rect">
             <a:avLst/>
@@ -8005,514 +7078,72 @@
           <a:noFill/>
         </p:spPr>
         <p:txBody>
-          <a:bodyPr wrap="none">
+          <a:bodyPr wrap="square" anchor="t">
             <a:spAutoFit/>
           </a:bodyPr>
           <a:lstStyle/>
           <a:p>
-            <a:pPr algn="ctr">
-              <a:spcAft>
-                <a:spcPts val="1000"/>
-              </a:spcAft>
-            </a:pPr>
-            <a:r>
-              <a:rPr sz="1800" b="1">
-                <a:solidFill>
-                  <a:srgbClr val="3C2850"/>
-                </a:solidFill>
-                <a:latin typeface="Microsoft YaHei"/>
-              </a:rPr>
-              <a:t>课堂活动</a:t>
-            </a:r>
-          </a:p>
-        </p:txBody>
-      </p:sp>
-      <p:sp>
-        <p:nvSpPr>
-          <p:cNvPr id="10" name="TextBox 9"/>
-          <p:cNvSpPr txBox="1"/>
-          <p:nvPr/>
-        </p:nvSpPr>
-        <p:spPr>
-          <a:xfrm>
-            <a:off x="1371600" y="960120"/>
-            <a:ext cx="9418320" cy="822960"/>
-          </a:xfrm>
-          <a:prstGeom prst="rect">
-            <a:avLst/>
-          </a:prstGeom>
-          <a:noFill/>
-        </p:spPr>
-        <p:txBody>
-          <a:bodyPr wrap="square">
-            <a:spAutoFit/>
-          </a:bodyPr>
-          <a:lstStyle/>
-          <a:p>
-            <a:pPr algn="ctr">
-              <a:spcAft>
-                <a:spcPts val="1000"/>
-              </a:spcAft>
-            </a:pPr>
-            <a:r>
-              <a:rPr sz="3600" b="1">
-                <a:solidFill>
-                  <a:srgbClr val="784696"/>
-                </a:solidFill>
-                <a:latin typeface="Microsoft YaHei"/>
-              </a:rPr>
-              <a:t>学习任务</a:t>
-            </a:r>
-          </a:p>
-        </p:txBody>
-      </p:sp>
-      <p:sp>
-        <p:nvSpPr>
-          <p:cNvPr id="11" name="Rectangle 10"/>
-          <p:cNvSpPr/>
-          <p:nvPr/>
-        </p:nvSpPr>
-        <p:spPr>
-          <a:xfrm>
-            <a:off x="3200400" y="1600200"/>
-            <a:ext cx="5760720" cy="27432"/>
-          </a:xfrm>
-          <a:prstGeom prst="rect">
-            <a:avLst/>
-          </a:prstGeom>
-          <a:solidFill>
-            <a:srgbClr val="C8AADC"/>
-          </a:solidFill>
-          <a:ln>
-            <a:noFill/>
-          </a:ln>
-        </p:spPr>
-        <p:style>
-          <a:lnRef idx="1">
-            <a:schemeClr val="accent1"/>
-          </a:lnRef>
-          <a:fillRef idx="3">
-            <a:schemeClr val="accent1"/>
-          </a:fillRef>
-          <a:effectRef idx="2">
-            <a:schemeClr val="accent1"/>
-          </a:effectRef>
-          <a:fontRef idx="minor">
-            <a:schemeClr val="lt1"/>
-          </a:fontRef>
-        </p:style>
-        <p:txBody>
-          <a:bodyPr rtlCol="0" anchor="ctr"/>
-          <a:lstStyle/>
-          <a:p>
-            <a:pPr algn="ctr"/>
-          </a:p>
-        </p:txBody>
-      </p:sp>
-      <p:sp>
-        <p:nvSpPr>
-          <p:cNvPr id="12" name="Rounded Rectangle 11"/>
-          <p:cNvSpPr/>
-          <p:nvPr/>
-        </p:nvSpPr>
-        <p:spPr>
-          <a:xfrm>
-            <a:off x="1295704" y="1645920"/>
-            <a:ext cx="9601200" cy="2112264"/>
-          </a:xfrm>
-          <a:prstGeom prst="roundRect">
-            <a:avLst/>
-          </a:prstGeom>
-          <a:solidFill>
-            <a:srgbClr val="FCF8FF"/>
-          </a:solidFill>
-          <a:ln w="19050">
-            <a:solidFill>
-              <a:srgbClr val="C8AADC"/>
-            </a:solidFill>
-          </a:ln>
-        </p:spPr>
-        <p:style>
-          <a:lnRef idx="1">
-            <a:schemeClr val="accent1"/>
-          </a:lnRef>
-          <a:fillRef idx="3">
-            <a:schemeClr val="accent1"/>
-          </a:fillRef>
-          <a:effectRef idx="2">
-            <a:schemeClr val="accent1"/>
-          </a:effectRef>
-          <a:fontRef idx="minor">
-            <a:schemeClr val="lt1"/>
-          </a:fontRef>
-        </p:style>
-        <p:txBody>
-          <a:bodyPr rtlCol="0" anchor="ctr"/>
-          <a:lstStyle/>
-          <a:p>
-            <a:pPr algn="ctr"/>
-          </a:p>
-        </p:txBody>
-      </p:sp>
-      <p:sp>
-        <p:nvSpPr>
-          <p:cNvPr id="13" name="Oval 12"/>
-          <p:cNvSpPr/>
-          <p:nvPr/>
-        </p:nvSpPr>
-        <p:spPr>
-          <a:xfrm>
-            <a:off x="2255824" y="1828800"/>
-            <a:ext cx="347472" cy="347472"/>
-          </a:xfrm>
-          <a:prstGeom prst="ellipse">
-            <a:avLst/>
-          </a:prstGeom>
-          <a:solidFill>
-            <a:srgbClr val="784696"/>
-          </a:solidFill>
-          <a:ln>
-            <a:noFill/>
-          </a:ln>
-        </p:spPr>
-        <p:style>
-          <a:lnRef idx="1">
-            <a:schemeClr val="accent1"/>
-          </a:lnRef>
-          <a:fillRef idx="3">
-            <a:schemeClr val="accent1"/>
-          </a:fillRef>
-          <a:effectRef idx="2">
-            <a:schemeClr val="accent1"/>
-          </a:effectRef>
-          <a:fontRef idx="minor">
-            <a:schemeClr val="lt1"/>
-          </a:fontRef>
-        </p:style>
-        <p:txBody>
-          <a:bodyPr rtlCol="0" anchor="ctr"/>
-          <a:lstStyle/>
-          <a:p>
-            <a:pPr algn="ctr"/>
-          </a:p>
-        </p:txBody>
-      </p:sp>
-      <p:sp>
-        <p:nvSpPr>
-          <p:cNvPr id="14" name="TextBox 13"/>
-          <p:cNvSpPr txBox="1"/>
-          <p:nvPr/>
-        </p:nvSpPr>
-        <p:spPr>
-          <a:xfrm>
-            <a:off x="2255824" y="1847088"/>
-            <a:ext cx="347472" cy="329184"/>
-          </a:xfrm>
-          <a:prstGeom prst="rect">
-            <a:avLst/>
-          </a:prstGeom>
-          <a:noFill/>
-        </p:spPr>
-        <p:txBody>
-          <a:bodyPr wrap="none">
-            <a:spAutoFit/>
-          </a:bodyPr>
-          <a:lstStyle/>
-          <a:p>
-            <a:pPr algn="ctr">
-              <a:spcAft>
-                <a:spcPts val="1000"/>
+            <a:pPr algn="l">
+              <a:spcAft>
+                <a:spcPts val="200"/>
               </a:spcAft>
             </a:pPr>
             <a:r>
               <a:rPr sz="1400" b="1">
                 <a:solidFill>
-                  <a:srgbClr val="FFFFFF"/>
-                </a:solidFill>
-                <a:latin typeface="Microsoft YaHei"/>
-              </a:rPr>
-              <a:t>1</a:t>
-            </a:r>
-          </a:p>
-        </p:txBody>
-      </p:sp>
-      <p:sp>
-        <p:nvSpPr>
-          <p:cNvPr id="15" name="TextBox 14"/>
-          <p:cNvSpPr txBox="1"/>
-          <p:nvPr/>
-        </p:nvSpPr>
-        <p:spPr>
-          <a:xfrm>
-            <a:off x="2713024" y="1810512"/>
-            <a:ext cx="7863840" cy="457200"/>
-          </a:xfrm>
-          <a:prstGeom prst="rect">
-            <a:avLst/>
-          </a:prstGeom>
-          <a:noFill/>
-        </p:spPr>
-        <p:txBody>
-          <a:bodyPr wrap="none">
-            <a:spAutoFit/>
-          </a:bodyPr>
-          <a:lstStyle/>
+                  <a:srgbClr val="000000"/>
+                </a:solidFill>
+                <a:latin typeface="Arial"/>
+              </a:rPr>
+              <a:t>实质</a:t>
+            </a:r>
+          </a:p>
           <a:p>
             <a:pPr algn="l">
               <a:spcAft>
-                <a:spcPts val="1000"/>
-              </a:spcAft>
-            </a:pPr>
-            <a:r>
-              <a:rPr sz="2400" b="0">
-                <a:solidFill>
-                  <a:srgbClr val="3C2850"/>
-                </a:solidFill>
-                <a:latin typeface="Microsoft YaHei"/>
-              </a:rPr>
-              <a:t>画骗局流程图，用箭头串联各环节</a:t>
-            </a:r>
-          </a:p>
-        </p:txBody>
-      </p:sp>
-      <p:sp>
-        <p:nvSpPr>
-          <p:cNvPr id="16" name="Oval 15"/>
-          <p:cNvSpPr/>
-          <p:nvPr/>
-        </p:nvSpPr>
-        <p:spPr>
-          <a:xfrm>
-            <a:off x="2255824" y="2395728"/>
-            <a:ext cx="347472" cy="347472"/>
-          </a:xfrm>
-          <a:prstGeom prst="ellipse">
-            <a:avLst/>
-          </a:prstGeom>
-          <a:solidFill>
-            <a:srgbClr val="784696"/>
-          </a:solidFill>
-          <a:ln>
-            <a:noFill/>
-          </a:ln>
-        </p:spPr>
-        <p:style>
-          <a:lnRef idx="1">
-            <a:schemeClr val="accent1"/>
-          </a:lnRef>
-          <a:fillRef idx="3">
-            <a:schemeClr val="accent1"/>
-          </a:fillRef>
-          <a:effectRef idx="2">
-            <a:schemeClr val="accent1"/>
-          </a:effectRef>
-          <a:fontRef idx="minor">
-            <a:schemeClr val="lt1"/>
-          </a:fontRef>
-        </p:style>
-        <p:txBody>
-          <a:bodyPr rtlCol="0" anchor="ctr"/>
-          <a:lstStyle/>
-          <a:p>
-            <a:pPr algn="ctr"/>
-          </a:p>
-        </p:txBody>
-      </p:sp>
-      <p:sp>
-        <p:nvSpPr>
-          <p:cNvPr id="17" name="TextBox 16"/>
-          <p:cNvSpPr txBox="1"/>
-          <p:nvPr/>
-        </p:nvSpPr>
-        <p:spPr>
-          <a:xfrm>
-            <a:off x="2255824" y="2414016"/>
-            <a:ext cx="347472" cy="329184"/>
-          </a:xfrm>
-          <a:prstGeom prst="rect">
-            <a:avLst/>
-          </a:prstGeom>
-          <a:noFill/>
-        </p:spPr>
-        <p:txBody>
-          <a:bodyPr wrap="none">
-            <a:spAutoFit/>
-          </a:bodyPr>
-          <a:lstStyle/>
-          <a:p>
-            <a:pPr algn="ctr">
-              <a:spcAft>
-                <a:spcPts val="1000"/>
-              </a:spcAft>
-            </a:pPr>
-            <a:r>
-              <a:rPr sz="1400" b="1">
-                <a:solidFill>
-                  <a:srgbClr val="FFFFFF"/>
-                </a:solidFill>
-                <a:latin typeface="Microsoft YaHei"/>
-              </a:rPr>
-              <a:t>2</a:t>
-            </a:r>
-          </a:p>
-        </p:txBody>
-      </p:sp>
-      <p:sp>
-        <p:nvSpPr>
-          <p:cNvPr id="18" name="TextBox 17"/>
-          <p:cNvSpPr txBox="1"/>
-          <p:nvPr/>
-        </p:nvSpPr>
-        <p:spPr>
-          <a:xfrm>
-            <a:off x="2713024" y="2377440"/>
-            <a:ext cx="7863840" cy="457200"/>
-          </a:xfrm>
-          <a:prstGeom prst="rect">
-            <a:avLst/>
-          </a:prstGeom>
-          <a:noFill/>
-        </p:spPr>
-        <p:txBody>
-          <a:bodyPr wrap="none">
-            <a:spAutoFit/>
-          </a:bodyPr>
-          <a:lstStyle/>
+                <a:spcPts val="200"/>
+              </a:spcAft>
+            </a:pPr>
+            <a:r>
+              <a:rPr sz="1300" b="0">
+                <a:solidFill>
+                  <a:srgbClr val="000000"/>
+                </a:solidFill>
+                <a:latin typeface="Arial"/>
+              </a:rPr>
+              <a:t>· 权力压迫</a:t>
+            </a:r>
+          </a:p>
           <a:p>
             <a:pPr algn="l">
               <a:spcAft>
-                <a:spcPts val="1000"/>
-              </a:spcAft>
-            </a:pPr>
-            <a:r>
-              <a:rPr sz="2400" b="0">
-                <a:solidFill>
-                  <a:srgbClr val="3C2850"/>
-                </a:solidFill>
-                <a:latin typeface="Microsoft YaHei"/>
-              </a:rPr>
-              <a:t>勾画老大臣、官员、皇帝的心理和语言</a:t>
-            </a:r>
-          </a:p>
-        </p:txBody>
-      </p:sp>
-      <p:sp>
-        <p:nvSpPr>
-          <p:cNvPr id="19" name="Oval 18"/>
-          <p:cNvSpPr/>
-          <p:nvPr/>
-        </p:nvSpPr>
-        <p:spPr>
-          <a:xfrm>
-            <a:off x="2255824" y="2962656"/>
-            <a:ext cx="347472" cy="347472"/>
-          </a:xfrm>
-          <a:prstGeom prst="ellipse">
-            <a:avLst/>
-          </a:prstGeom>
-          <a:solidFill>
-            <a:srgbClr val="784696"/>
-          </a:solidFill>
-          <a:ln>
-            <a:noFill/>
-          </a:ln>
-        </p:spPr>
-        <p:style>
-          <a:lnRef idx="1">
-            <a:schemeClr val="accent1"/>
-          </a:lnRef>
-          <a:fillRef idx="3">
-            <a:schemeClr val="accent1"/>
-          </a:fillRef>
-          <a:effectRef idx="2">
-            <a:schemeClr val="accent1"/>
-          </a:effectRef>
-          <a:fontRef idx="minor">
-            <a:schemeClr val="lt1"/>
-          </a:fontRef>
-        </p:style>
-        <p:txBody>
-          <a:bodyPr rtlCol="0" anchor="ctr"/>
-          <a:lstStyle/>
-          <a:p>
-            <a:pPr algn="ctr"/>
-          </a:p>
-        </p:txBody>
-      </p:sp>
-      <p:sp>
-        <p:nvSpPr>
-          <p:cNvPr id="20" name="TextBox 19"/>
-          <p:cNvSpPr txBox="1"/>
-          <p:nvPr/>
-        </p:nvSpPr>
-        <p:spPr>
-          <a:xfrm>
-            <a:off x="2255824" y="2980944"/>
-            <a:ext cx="347472" cy="329184"/>
-          </a:xfrm>
-          <a:prstGeom prst="rect">
-            <a:avLst/>
-          </a:prstGeom>
-          <a:noFill/>
-        </p:spPr>
-        <p:txBody>
-          <a:bodyPr wrap="none">
-            <a:spAutoFit/>
-          </a:bodyPr>
-          <a:lstStyle/>
-          <a:p>
-            <a:pPr algn="ctr">
-              <a:spcAft>
-                <a:spcPts val="1000"/>
-              </a:spcAft>
-            </a:pPr>
-            <a:r>
-              <a:rPr sz="1400" b="1">
-                <a:solidFill>
-                  <a:srgbClr val="FFFFFF"/>
-                </a:solidFill>
-                <a:latin typeface="Microsoft YaHei"/>
-              </a:rPr>
-              <a:t>3</a:t>
-            </a:r>
-          </a:p>
-        </p:txBody>
-      </p:sp>
-      <p:sp>
-        <p:nvSpPr>
-          <p:cNvPr id="21" name="TextBox 20"/>
-          <p:cNvSpPr txBox="1"/>
-          <p:nvPr/>
-        </p:nvSpPr>
-        <p:spPr>
-          <a:xfrm>
-            <a:off x="2713024" y="2944368"/>
-            <a:ext cx="7863840" cy="457200"/>
-          </a:xfrm>
-          <a:prstGeom prst="rect">
-            <a:avLst/>
-          </a:prstGeom>
-          <a:noFill/>
-        </p:spPr>
-        <p:txBody>
-          <a:bodyPr wrap="none">
-            <a:spAutoFit/>
-          </a:bodyPr>
-          <a:lstStyle/>
+                <a:spcPts val="200"/>
+              </a:spcAft>
+            </a:pPr>
+            <a:r>
+              <a:rPr sz="1300" b="0">
+                <a:solidFill>
+                  <a:srgbClr val="000000"/>
+                </a:solidFill>
+                <a:latin typeface="Arial"/>
+              </a:rPr>
+              <a:t>· 群体谎言</a:t>
+            </a:r>
+          </a:p>
           <a:p>
             <a:pPr algn="l">
               <a:spcAft>
-                <a:spcPts val="1000"/>
-              </a:spcAft>
-            </a:pPr>
-            <a:r>
-              <a:rPr sz="2400" b="0">
-                <a:solidFill>
-                  <a:srgbClr val="3C2850"/>
-                </a:solidFill>
-                <a:latin typeface="Microsoft YaHei"/>
-              </a:rPr>
-              <a:t>完成人物分析卡（证据—特点—作用）</a:t>
+                <a:spcPts val="200"/>
+              </a:spcAft>
+            </a:pPr>
+            <a:r>
+              <a:rPr sz="1300" b="1">
+                <a:solidFill>
+                  <a:srgbClr val="000000"/>
+                </a:solidFill>
+                <a:latin typeface="Arial"/>
+              </a:rPr>
+              <a:t>· 虚荣与怯懦的遮羞布</a:t>
             </a:r>
           </a:p>
         </p:txBody>
@@ -8535,20 +7166,12 @@
         <p:nvPr/>
       </p:nvGrpSpPr>
       <p:grpSpPr/>
-      <p:pic>
-        <p:nvPicPr>
-          <p:cNvPr id="2" name="Picture 1" descr="bg_emperor.png"/>
-          <p:cNvPicPr>
-            <a:picLocks noChangeAspect="1"/>
-          </p:cNvPicPr>
-          <p:nvPr/>
-        </p:nvPicPr>
-        <p:blipFill>
-          <a:blip r:embed="rId2"/>
-          <a:stretch>
-            <a:fillRect/>
-          </a:stretch>
-        </p:blipFill>
+      <p:sp>
+        <p:nvSpPr>
+          <p:cNvPr id="2" name="Rectangle 1"/>
+          <p:cNvSpPr/>
+          <p:nvPr/>
+        </p:nvSpPr>
         <p:spPr>
           <a:xfrm>
             <a:off x="0" y="0"/>
@@ -8557,27 +7180,11 @@
           <a:prstGeom prst="rect">
             <a:avLst/>
           </a:prstGeom>
-        </p:spPr>
-      </p:pic>
-      <p:sp>
-        <p:nvSpPr>
-          <p:cNvPr id="3" name="Rectangle 2"/>
-          <p:cNvSpPr/>
-          <p:nvPr/>
-        </p:nvSpPr>
-        <p:spPr>
-          <a:xfrm>
-            <a:off x="292608" y="274320"/>
-            <a:ext cx="11594592" cy="6300216"/>
-          </a:xfrm>
-          <a:prstGeom prst="rect">
-            <a:avLst/>
-          </a:prstGeom>
-          <a:noFill/>
-          <a:ln w="31750">
-            <a:solidFill>
-              <a:srgbClr val="825AA0"/>
-            </a:solidFill>
+          <a:solidFill>
+            <a:srgbClr val="FFFFFF"/>
+          </a:solidFill>
+          <a:ln>
+            <a:noFill/>
           </a:ln>
         </p:spPr>
         <p:style>
@@ -8602,73 +7209,105 @@
           </a:p>
         </p:txBody>
       </p:sp>
-      <p:pic>
-        <p:nvPicPr>
-          <p:cNvPr id="4" name="Picture 3" descr="corner_emperor_tl.png"/>
-          <p:cNvPicPr>
-            <a:picLocks noChangeAspect="1"/>
-          </p:cNvPicPr>
-          <p:nvPr/>
-        </p:nvPicPr>
-        <p:blipFill>
-          <a:blip r:embed="rId3"/>
-          <a:stretch>
-            <a:fillRect/>
-          </a:stretch>
-        </p:blipFill>
-        <p:spPr>
-          <a:xfrm>
-            <a:off x="-45720" y="-45720"/>
-            <a:ext cx="2011680" cy="2011680"/>
-          </a:xfrm>
-          <a:prstGeom prst="rect">
-            <a:avLst/>
-          </a:prstGeom>
-        </p:spPr>
-      </p:pic>
-      <p:pic>
-        <p:nvPicPr>
-          <p:cNvPr id="5" name="Picture 4" descr="corner_emperor_tr.png"/>
-          <p:cNvPicPr>
-            <a:picLocks noChangeAspect="1"/>
-          </p:cNvPicPr>
-          <p:nvPr/>
-        </p:nvPicPr>
-        <p:blipFill>
-          <a:blip r:embed="rId4"/>
-          <a:stretch>
-            <a:fillRect/>
-          </a:stretch>
-        </p:blipFill>
-        <p:spPr>
-          <a:xfrm>
-            <a:off x="9875520" y="-45720"/>
-            <a:ext cx="2011680" cy="2011680"/>
-          </a:xfrm>
-          <a:prstGeom prst="rect">
-            <a:avLst/>
-          </a:prstGeom>
-        </p:spPr>
-      </p:pic>
-      <p:sp>
-        <p:nvSpPr>
-          <p:cNvPr id="6" name="Rounded Rectangle 5"/>
+      <p:sp>
+        <p:nvSpPr>
+          <p:cNvPr id="3" name="TextBox 2"/>
+          <p:cNvSpPr txBox="1"/>
+          <p:nvPr/>
+        </p:nvSpPr>
+        <p:spPr>
+          <a:xfrm>
+            <a:off x="411480" y="320040"/>
+            <a:ext cx="1097280" cy="274320"/>
+          </a:xfrm>
+          <a:prstGeom prst="rect">
+            <a:avLst/>
+          </a:prstGeom>
+          <a:noFill/>
+        </p:spPr>
+        <p:txBody>
+          <a:bodyPr wrap="square" anchor="t">
+            <a:spAutoFit/>
+          </a:bodyPr>
+          <a:lstStyle/>
+          <a:p>
+            <a:pPr algn="l">
+              <a:spcAft>
+                <a:spcPts val="200"/>
+              </a:spcAft>
+            </a:pPr>
+            <a:r>
+              <a:rPr sz="1400" b="1">
+                <a:solidFill>
+                  <a:srgbClr val="000000"/>
+                </a:solidFill>
+                <a:latin typeface="Arial"/>
+              </a:rPr>
+              <a:t>07</a:t>
+            </a:r>
+          </a:p>
+        </p:txBody>
+      </p:sp>
+      <p:sp>
+        <p:nvSpPr>
+          <p:cNvPr id="4" name="TextBox 3"/>
+          <p:cNvSpPr txBox="1"/>
+          <p:nvPr/>
+        </p:nvSpPr>
+        <p:spPr>
+          <a:xfrm>
+            <a:off x="411480" y="320040"/>
+            <a:ext cx="11368735" cy="502920"/>
+          </a:xfrm>
+          <a:prstGeom prst="rect">
+            <a:avLst/>
+          </a:prstGeom>
+          <a:noFill/>
+        </p:spPr>
+        <p:txBody>
+          <a:bodyPr wrap="square" anchor="t">
+            <a:spAutoFit/>
+          </a:bodyPr>
+          <a:lstStyle/>
+          <a:p>
+            <a:pPr algn="ctr">
+              <a:spcAft>
+                <a:spcPts val="200"/>
+              </a:spcAft>
+            </a:pPr>
+            <a:r>
+              <a:rPr sz="2400" b="1">
+                <a:solidFill>
+                  <a:srgbClr val="000000"/>
+                </a:solidFill>
+                <a:latin typeface="Arial"/>
+              </a:rPr>
+              <a:t>为什么只有小孩敢说真话？</a:t>
+            </a:r>
+          </a:p>
+        </p:txBody>
+      </p:sp>
+      <p:sp>
+        <p:nvSpPr>
+          <p:cNvPr id="5" name="Rectangle 4"/>
           <p:cNvSpPr/>
           <p:nvPr/>
         </p:nvSpPr>
         <p:spPr>
           <a:xfrm>
-            <a:off x="502920" y="384048"/>
-            <a:ext cx="2011680" cy="384048"/>
-          </a:xfrm>
-          <a:prstGeom prst="roundRect">
+            <a:off x="411480" y="1051560"/>
+            <a:ext cx="5456992" cy="4389120"/>
+          </a:xfrm>
+          <a:prstGeom prst="rect">
             <a:avLst/>
           </a:prstGeom>
           <a:solidFill>
-            <a:srgbClr val="3C9664"/>
+            <a:srgbClr val="FFFFFF"/>
           </a:solidFill>
-          <a:ln>
-            <a:noFill/>
+          <a:ln w="25400">
+            <a:solidFill>
+              <a:srgbClr val="000000"/>
+            </a:solidFill>
           </a:ln>
         </p:spPr>
         <p:style>
@@ -8695,62 +7334,25 @@
       </p:sp>
       <p:sp>
         <p:nvSpPr>
-          <p:cNvPr id="7" name="TextBox 6"/>
-          <p:cNvSpPr txBox="1"/>
-          <p:nvPr/>
-        </p:nvSpPr>
-        <p:spPr>
-          <a:xfrm>
-            <a:off x="502920" y="402336"/>
-            <a:ext cx="2011680" cy="347472"/>
-          </a:xfrm>
-          <a:prstGeom prst="rect">
-            <a:avLst/>
-          </a:prstGeom>
-          <a:noFill/>
-        </p:spPr>
-        <p:txBody>
-          <a:bodyPr wrap="none">
-            <a:spAutoFit/>
-          </a:bodyPr>
-          <a:lstStyle/>
-          <a:p>
-            <a:pPr algn="ctr">
-              <a:spcAft>
-                <a:spcPts val="1000"/>
-              </a:spcAft>
-            </a:pPr>
-            <a:r>
-              <a:rPr sz="1600" b="1">
-                <a:solidFill>
-                  <a:srgbClr val="FFFFFF"/>
-                </a:solidFill>
-                <a:latin typeface="Microsoft YaHei"/>
-              </a:rPr>
-              <a:t>课堂活动</a:t>
-            </a:r>
-          </a:p>
-        </p:txBody>
-      </p:sp>
-      <p:sp>
-        <p:nvSpPr>
-          <p:cNvPr id="8" name="Rounded Rectangle 7"/>
+          <p:cNvPr id="6" name="Rectangle 5"/>
           <p:cNvSpPr/>
           <p:nvPr/>
         </p:nvSpPr>
         <p:spPr>
           <a:xfrm>
-            <a:off x="4953304" y="502920"/>
-            <a:ext cx="2286000" cy="411480"/>
-          </a:xfrm>
-          <a:prstGeom prst="roundRect">
+            <a:off x="6323222" y="1874519"/>
+            <a:ext cx="5456992" cy="3566160"/>
+          </a:xfrm>
+          <a:prstGeom prst="rect">
             <a:avLst/>
           </a:prstGeom>
           <a:solidFill>
-            <a:srgbClr val="C8AADC"/>
+            <a:srgbClr val="FFE600"/>
           </a:solidFill>
-          <a:ln>
-            <a:noFill/>
+          <a:ln w="25400">
+            <a:solidFill>
+              <a:srgbClr val="000000"/>
+            </a:solidFill>
           </a:ln>
         </p:spPr>
         <p:style>
@@ -8777,14 +7379,156 @@
       </p:sp>
       <p:sp>
         <p:nvSpPr>
+          <p:cNvPr id="7" name="TextBox 6"/>
+          <p:cNvSpPr txBox="1"/>
+          <p:nvPr/>
+        </p:nvSpPr>
+        <p:spPr>
+          <a:xfrm>
+            <a:off x="594360" y="1280160"/>
+            <a:ext cx="5002243" cy="914400"/>
+          </a:xfrm>
+          <a:prstGeom prst="rect">
+            <a:avLst/>
+          </a:prstGeom>
+          <a:noFill/>
+        </p:spPr>
+        <p:txBody>
+          <a:bodyPr wrap="square" anchor="t">
+            <a:spAutoFit/>
+          </a:bodyPr>
+          <a:lstStyle/>
+          <a:p>
+            <a:pPr algn="l">
+              <a:spcAft>
+                <a:spcPts val="200"/>
+              </a:spcAft>
+            </a:pPr>
+            <a:r>
+              <a:rPr sz="3200" b="1">
+                <a:solidFill>
+                  <a:srgbClr val="000000"/>
+                </a:solidFill>
+                <a:latin typeface="Arial"/>
+              </a:rPr>
+              <a:t>成人的世界</a:t>
+            </a:r>
+          </a:p>
+        </p:txBody>
+      </p:sp>
+      <p:sp>
+        <p:nvSpPr>
+          <p:cNvPr id="8" name="TextBox 7"/>
+          <p:cNvSpPr txBox="1"/>
+          <p:nvPr/>
+        </p:nvSpPr>
+        <p:spPr>
+          <a:xfrm>
+            <a:off x="594360" y="2377440"/>
+            <a:ext cx="5002243" cy="2743200"/>
+          </a:xfrm>
+          <a:prstGeom prst="rect">
+            <a:avLst/>
+          </a:prstGeom>
+          <a:noFill/>
+        </p:spPr>
+        <p:txBody>
+          <a:bodyPr wrap="square" anchor="t">
+            <a:spAutoFit/>
+          </a:bodyPr>
+          <a:lstStyle/>
+          <a:p>
+            <a:pPr algn="l">
+              <a:spcAft>
+                <a:spcPts val="200"/>
+              </a:spcAft>
+            </a:pPr>
+            <a:r>
+              <a:rPr sz="1600" b="0">
+                <a:solidFill>
+                  <a:srgbClr val="000000"/>
+                </a:solidFill>
+                <a:latin typeface="Arial"/>
+              </a:rPr>
+              <a:t>· 害怕被嘲笑</a:t>
+            </a:r>
+          </a:p>
+          <a:p>
+            <a:pPr algn="l">
+              <a:spcAft>
+                <a:spcPts val="200"/>
+              </a:spcAft>
+            </a:pPr>
+            <a:r>
+              <a:rPr sz="1600" b="0">
+                <a:solidFill>
+                  <a:srgbClr val="000000"/>
+                </a:solidFill>
+                <a:latin typeface="Arial"/>
+              </a:rPr>
+              <a:t>· 维护虚荣与体面</a:t>
+            </a:r>
+          </a:p>
+          <a:p>
+            <a:pPr algn="l">
+              <a:spcAft>
+                <a:spcPts val="200"/>
+              </a:spcAft>
+            </a:pPr>
+            <a:r>
+              <a:rPr sz="1600" b="1">
+                <a:solidFill>
+                  <a:srgbClr val="000000"/>
+                </a:solidFill>
+                <a:latin typeface="Arial"/>
+              </a:rPr>
+              <a:t>· 沉默成为谎言帮凶</a:t>
+            </a:r>
+          </a:p>
+          <a:p>
+            <a:pPr algn="l">
+              <a:spcAft>
+                <a:spcPts val="200"/>
+              </a:spcAft>
+            </a:pPr>
+            <a:r>
+              <a:rPr sz="800" b="0">
+                <a:solidFill>
+                  <a:srgbClr val="000000"/>
+                </a:solidFill>
+                <a:latin typeface="Arial"/>
+              </a:rPr>
+              <a:t/>
+            </a:r>
+          </a:p>
+          <a:p>
+            <a:pPr algn="l">
+              <a:spcAft>
+                <a:spcPts val="200"/>
+              </a:spcAft>
+            </a:pPr>
+            <a:r>
+              <a:rPr sz="1400" b="0">
+                <a:solidFill>
+                  <a:srgbClr val="000000"/>
+                </a:solidFill>
+                <a:latin typeface="Arial"/>
+              </a:rPr>
+              <a:t>「我什么也没有看见」</a:t>
+            </a:r>
+          </a:p>
+        </p:txBody>
+      </p:sp>
+      <p:sp>
+        <p:nvSpPr>
           <p:cNvPr id="9" name="TextBox 8"/>
           <p:cNvSpPr txBox="1"/>
           <p:nvPr/>
         </p:nvSpPr>
         <p:spPr>
           <a:xfrm>
-            <a:off x="4953304" y="521208"/>
-            <a:ext cx="2286000" cy="384048"/>
+            <a:off x="6550596" y="2148840"/>
+            <a:ext cx="4774868" cy="914400"/>
           </a:xfrm>
           <a:prstGeom prst="rect">
             <a:avLst/>
@@ -8792,24 +7536,24 @@
           <a:noFill/>
         </p:spPr>
         <p:txBody>
-          <a:bodyPr wrap="none">
+          <a:bodyPr wrap="square" anchor="t">
             <a:spAutoFit/>
           </a:bodyPr>
           <a:lstStyle/>
           <a:p>
-            <a:pPr algn="ctr">
-              <a:spcAft>
-                <a:spcPts val="1000"/>
-              </a:spcAft>
-            </a:pPr>
-            <a:r>
-              <a:rPr sz="1800" b="1">
-                <a:solidFill>
-                  <a:srgbClr val="3C2850"/>
-                </a:solidFill>
-                <a:latin typeface="Microsoft YaHei"/>
-              </a:rPr>
-              <a:t>回顾收获</a:t>
+            <a:pPr algn="l">
+              <a:spcAft>
+                <a:spcPts val="200"/>
+              </a:spcAft>
+            </a:pPr>
+            <a:r>
+              <a:rPr sz="3200" b="1">
+                <a:solidFill>
+                  <a:srgbClr val="000000"/>
+                </a:solidFill>
+                <a:latin typeface="Arial"/>
+              </a:rPr>
+              <a:t>孩子的世界</a:t>
             </a:r>
           </a:p>
         </p:txBody>
@@ -8822,8 +7566,8 @@
         </p:nvSpPr>
         <p:spPr>
           <a:xfrm>
-            <a:off x="1371600" y="960120"/>
-            <a:ext cx="9418320" cy="822960"/>
+            <a:off x="6550596" y="3246120"/>
+            <a:ext cx="4774868" cy="2011680"/>
           </a:xfrm>
           <a:prstGeom prst="rect">
             <a:avLst/>
@@ -8831,24 +7575,56 @@
           <a:noFill/>
         </p:spPr>
         <p:txBody>
-          <a:bodyPr wrap="square">
+          <a:bodyPr wrap="square" anchor="t">
             <a:spAutoFit/>
           </a:bodyPr>
           <a:lstStyle/>
           <a:p>
-            <a:pPr algn="ctr">
-              <a:spcAft>
-                <a:spcPts val="1000"/>
-              </a:spcAft>
-            </a:pPr>
-            <a:r>
-              <a:rPr sz="3600" b="1">
-                <a:solidFill>
-                  <a:srgbClr val="784696"/>
-                </a:solidFill>
-                <a:latin typeface="Microsoft YaHei"/>
-              </a:rPr>
-              <a:t>课堂小结</a:t>
+            <a:pPr algn="l">
+              <a:spcAft>
+                <a:spcPts val="200"/>
+              </a:spcAft>
+            </a:pPr>
+            <a:r>
+              <a:rPr sz="1600" b="0">
+                <a:solidFill>
+                  <a:srgbClr val="000000"/>
+                </a:solidFill>
+                <a:latin typeface="Arial"/>
+              </a:rPr>
+              <a:t>· 无畏说真话</a:t>
+            </a:r>
+          </a:p>
+          <a:p>
+            <a:pPr algn="l">
+              <a:spcAft>
+                <a:spcPts val="200"/>
+              </a:spcAft>
+            </a:pPr>
+            <a:r>
+              <a:rPr sz="1600" b="0">
+                <a:solidFill>
+                  <a:srgbClr val="000000"/>
+                </a:solidFill>
+                <a:latin typeface="Arial"/>
+              </a:rPr>
+              <a:t>· 天真实诚</a:t>
+            </a:r>
+          </a:p>
+          <a:p>
+            <a:pPr algn="l">
+              <a:spcAft>
+                <a:spcPts val="200"/>
+              </a:spcAft>
+            </a:pPr>
+            <a:r>
+              <a:rPr sz="1600" b="1">
+                <a:solidFill>
+                  <a:srgbClr val="000000"/>
+                </a:solidFill>
+                <a:latin typeface="Arial"/>
+              </a:rPr>
+              <a:t>· 「他什么衣服也没穿呀」</a:t>
             </a:r>
           </a:p>
         </p:txBody>
@@ -8861,14 +7637,14 @@
         </p:nvSpPr>
         <p:spPr>
           <a:xfrm>
-            <a:off x="3200400" y="1600200"/>
-            <a:ext cx="5760720" cy="27432"/>
+            <a:off x="5440680" y="4754880"/>
+            <a:ext cx="2103120" cy="822960"/>
           </a:xfrm>
           <a:prstGeom prst="rect">
             <a:avLst/>
           </a:prstGeom>
           <a:solidFill>
-            <a:srgbClr val="C8AADC"/>
+            <a:srgbClr val="000000"/>
           </a:solidFill>
           <a:ln>
             <a:noFill/>
@@ -8898,102 +7674,14 @@
       </p:sp>
       <p:sp>
         <p:nvSpPr>
-          <p:cNvPr id="12" name="Rounded Rectangle 11"/>
-          <p:cNvSpPr/>
-          <p:nvPr/>
-        </p:nvSpPr>
-        <p:spPr>
-          <a:xfrm>
-            <a:off x="1295704" y="1645920"/>
-            <a:ext cx="9601200" cy="1837944"/>
-          </a:xfrm>
-          <a:prstGeom prst="roundRect">
-            <a:avLst/>
-          </a:prstGeom>
-          <a:solidFill>
-            <a:srgbClr val="FCF8FF"/>
-          </a:solidFill>
-          <a:ln w="19050">
-            <a:solidFill>
-              <a:srgbClr val="C8AADC"/>
-            </a:solidFill>
-          </a:ln>
-        </p:spPr>
-        <p:style>
-          <a:lnRef idx="1">
-            <a:schemeClr val="accent1"/>
-          </a:lnRef>
-          <a:fillRef idx="3">
-            <a:schemeClr val="accent1"/>
-          </a:fillRef>
-          <a:effectRef idx="2">
-            <a:schemeClr val="accent1"/>
-          </a:effectRef>
-          <a:fontRef idx="minor">
-            <a:schemeClr val="lt1"/>
-          </a:fontRef>
-        </p:style>
-        <p:txBody>
-          <a:bodyPr rtlCol="0" anchor="ctr"/>
-          <a:lstStyle/>
-          <a:p>
-            <a:pPr algn="ctr"/>
-          </a:p>
-        </p:txBody>
-      </p:sp>
-      <p:sp>
-        <p:nvSpPr>
-          <p:cNvPr id="13" name="Oval 12"/>
-          <p:cNvSpPr/>
-          <p:nvPr/>
-        </p:nvSpPr>
-        <p:spPr>
-          <a:xfrm>
-            <a:off x="2255824" y="1828800"/>
-            <a:ext cx="347472" cy="347472"/>
-          </a:xfrm>
-          <a:prstGeom prst="ellipse">
-            <a:avLst/>
-          </a:prstGeom>
-          <a:solidFill>
-            <a:srgbClr val="784696"/>
-          </a:solidFill>
-          <a:ln>
-            <a:noFill/>
-          </a:ln>
-        </p:spPr>
-        <p:style>
-          <a:lnRef idx="1">
-            <a:schemeClr val="accent1"/>
-          </a:lnRef>
-          <a:fillRef idx="3">
-            <a:schemeClr val="accent1"/>
-          </a:fillRef>
-          <a:effectRef idx="2">
-            <a:schemeClr val="accent1"/>
-          </a:effectRef>
-          <a:fontRef idx="minor">
-            <a:schemeClr val="lt1"/>
-          </a:fontRef>
-        </p:style>
-        <p:txBody>
-          <a:bodyPr rtlCol="0" anchor="ctr"/>
-          <a:lstStyle/>
-          <a:p>
-            <a:pPr algn="ctr"/>
-          </a:p>
-        </p:txBody>
-      </p:sp>
-      <p:sp>
-        <p:nvSpPr>
-          <p:cNvPr id="14" name="TextBox 13"/>
+          <p:cNvPr id="12" name="TextBox 11"/>
           <p:cNvSpPr txBox="1"/>
           <p:nvPr/>
         </p:nvSpPr>
         <p:spPr>
           <a:xfrm>
-            <a:off x="2255824" y="1847088"/>
-            <a:ext cx="347472" cy="329184"/>
+            <a:off x="5440680" y="4800600"/>
+            <a:ext cx="2103120" cy="731520"/>
           </a:xfrm>
           <a:prstGeom prst="rect">
             <a:avLst/>
@@ -9001,305 +7689,24 @@
           <a:noFill/>
         </p:spPr>
         <p:txBody>
-          <a:bodyPr wrap="none">
+          <a:bodyPr wrap="square" anchor="ctr">
             <a:spAutoFit/>
           </a:bodyPr>
           <a:lstStyle/>
           <a:p>
             <a:pPr algn="ctr">
               <a:spcAft>
-                <a:spcPts val="1000"/>
-              </a:spcAft>
-            </a:pPr>
-            <a:r>
-              <a:rPr sz="1400" b="1">
+                <a:spcPts val="200"/>
+              </a:spcAft>
+            </a:pPr>
+            <a:r>
+              <a:rPr sz="2800" b="1">
                 <a:solidFill>
                   <a:srgbClr val="FFFFFF"/>
                 </a:solidFill>
-                <a:latin typeface="Microsoft YaHei"/>
-              </a:rPr>
-              <a:t>1</a:t>
-            </a:r>
-          </a:p>
-        </p:txBody>
-      </p:sp>
-      <p:sp>
-        <p:nvSpPr>
-          <p:cNvPr id="15" name="TextBox 14"/>
-          <p:cNvSpPr txBox="1"/>
-          <p:nvPr/>
-        </p:nvSpPr>
-        <p:spPr>
-          <a:xfrm>
-            <a:off x="2713024" y="1810512"/>
-            <a:ext cx="7863840" cy="457200"/>
-          </a:xfrm>
-          <a:prstGeom prst="rect">
-            <a:avLst/>
-          </a:prstGeom>
-          <a:noFill/>
-        </p:spPr>
-        <p:txBody>
-          <a:bodyPr wrap="none">
-            <a:spAutoFit/>
-          </a:bodyPr>
-          <a:lstStyle/>
-          <a:p>
-            <a:pPr algn="l">
-              <a:spcAft>
-                <a:spcPts val="1000"/>
-              </a:spcAft>
-            </a:pPr>
-            <a:r>
-              <a:rPr sz="2200" b="0">
-                <a:solidFill>
-                  <a:srgbClr val="3C2850"/>
-                </a:solidFill>
-                <a:latin typeface="Microsoft YaHei"/>
-              </a:rPr>
-              <a:t>夸张+反讽+对比，让笑声指向盲从与虚伪</a:t>
-            </a:r>
-          </a:p>
-        </p:txBody>
-      </p:sp>
-      <p:sp>
-        <p:nvSpPr>
-          <p:cNvPr id="16" name="Oval 15"/>
-          <p:cNvSpPr/>
-          <p:nvPr/>
-        </p:nvSpPr>
-        <p:spPr>
-          <a:xfrm>
-            <a:off x="2255824" y="2304288"/>
-            <a:ext cx="347472" cy="347472"/>
-          </a:xfrm>
-          <a:prstGeom prst="ellipse">
-            <a:avLst/>
-          </a:prstGeom>
-          <a:solidFill>
-            <a:srgbClr val="784696"/>
-          </a:solidFill>
-          <a:ln>
-            <a:noFill/>
-          </a:ln>
-        </p:spPr>
-        <p:style>
-          <a:lnRef idx="1">
-            <a:schemeClr val="accent1"/>
-          </a:lnRef>
-          <a:fillRef idx="3">
-            <a:schemeClr val="accent1"/>
-          </a:fillRef>
-          <a:effectRef idx="2">
-            <a:schemeClr val="accent1"/>
-          </a:effectRef>
-          <a:fontRef idx="minor">
-            <a:schemeClr val="lt1"/>
-          </a:fontRef>
-        </p:style>
-        <p:txBody>
-          <a:bodyPr rtlCol="0" anchor="ctr"/>
-          <a:lstStyle/>
-          <a:p>
-            <a:pPr algn="ctr"/>
-          </a:p>
-        </p:txBody>
-      </p:sp>
-      <p:sp>
-        <p:nvSpPr>
-          <p:cNvPr id="17" name="TextBox 16"/>
-          <p:cNvSpPr txBox="1"/>
-          <p:nvPr/>
-        </p:nvSpPr>
-        <p:spPr>
-          <a:xfrm>
-            <a:off x="2255824" y="2322576"/>
-            <a:ext cx="347472" cy="329184"/>
-          </a:xfrm>
-          <a:prstGeom prst="rect">
-            <a:avLst/>
-          </a:prstGeom>
-          <a:noFill/>
-        </p:spPr>
-        <p:txBody>
-          <a:bodyPr wrap="none">
-            <a:spAutoFit/>
-          </a:bodyPr>
-          <a:lstStyle/>
-          <a:p>
-            <a:pPr algn="ctr">
-              <a:spcAft>
-                <a:spcPts val="1000"/>
-              </a:spcAft>
-            </a:pPr>
-            <a:r>
-              <a:rPr sz="1400" b="1">
-                <a:solidFill>
-                  <a:srgbClr val="FFFFFF"/>
-                </a:solidFill>
-                <a:latin typeface="Microsoft YaHei"/>
-              </a:rPr>
-              <a:t>2</a:t>
-            </a:r>
-          </a:p>
-        </p:txBody>
-      </p:sp>
-      <p:sp>
-        <p:nvSpPr>
-          <p:cNvPr id="18" name="TextBox 17"/>
-          <p:cNvSpPr txBox="1"/>
-          <p:nvPr/>
-        </p:nvSpPr>
-        <p:spPr>
-          <a:xfrm>
-            <a:off x="2713024" y="2286000"/>
-            <a:ext cx="7863840" cy="457200"/>
-          </a:xfrm>
-          <a:prstGeom prst="rect">
-            <a:avLst/>
-          </a:prstGeom>
-          <a:noFill/>
-        </p:spPr>
-        <p:txBody>
-          <a:bodyPr wrap="none">
-            <a:spAutoFit/>
-          </a:bodyPr>
-          <a:lstStyle/>
-          <a:p>
-            <a:pPr algn="l">
-              <a:spcAft>
-                <a:spcPts val="1000"/>
-              </a:spcAft>
-            </a:pPr>
-            <a:r>
-              <a:rPr sz="2200" b="0">
-                <a:solidFill>
-                  <a:srgbClr val="3C2850"/>
-                </a:solidFill>
-                <a:latin typeface="Microsoft YaHei"/>
-              </a:rPr>
-              <a:t>「新装」是谎言，更是照见人性的镜子</a:t>
-            </a:r>
-          </a:p>
-        </p:txBody>
-      </p:sp>
-      <p:sp>
-        <p:nvSpPr>
-          <p:cNvPr id="19" name="Oval 18"/>
-          <p:cNvSpPr/>
-          <p:nvPr/>
-        </p:nvSpPr>
-        <p:spPr>
-          <a:xfrm>
-            <a:off x="2255824" y="2779776"/>
-            <a:ext cx="347472" cy="347472"/>
-          </a:xfrm>
-          <a:prstGeom prst="ellipse">
-            <a:avLst/>
-          </a:prstGeom>
-          <a:solidFill>
-            <a:srgbClr val="784696"/>
-          </a:solidFill>
-          <a:ln>
-            <a:noFill/>
-          </a:ln>
-        </p:spPr>
-        <p:style>
-          <a:lnRef idx="1">
-            <a:schemeClr val="accent1"/>
-          </a:lnRef>
-          <a:fillRef idx="3">
-            <a:schemeClr val="accent1"/>
-          </a:fillRef>
-          <a:effectRef idx="2">
-            <a:schemeClr val="accent1"/>
-          </a:effectRef>
-          <a:fontRef idx="minor">
-            <a:schemeClr val="lt1"/>
-          </a:fontRef>
-        </p:style>
-        <p:txBody>
-          <a:bodyPr rtlCol="0" anchor="ctr"/>
-          <a:lstStyle/>
-          <a:p>
-            <a:pPr algn="ctr"/>
-          </a:p>
-        </p:txBody>
-      </p:sp>
-      <p:sp>
-        <p:nvSpPr>
-          <p:cNvPr id="20" name="TextBox 19"/>
-          <p:cNvSpPr txBox="1"/>
-          <p:nvPr/>
-        </p:nvSpPr>
-        <p:spPr>
-          <a:xfrm>
-            <a:off x="2255824" y="2798064"/>
-            <a:ext cx="347472" cy="329184"/>
-          </a:xfrm>
-          <a:prstGeom prst="rect">
-            <a:avLst/>
-          </a:prstGeom>
-          <a:noFill/>
-        </p:spPr>
-        <p:txBody>
-          <a:bodyPr wrap="none">
-            <a:spAutoFit/>
-          </a:bodyPr>
-          <a:lstStyle/>
-          <a:p>
-            <a:pPr algn="ctr">
-              <a:spcAft>
-                <a:spcPts val="1000"/>
-              </a:spcAft>
-            </a:pPr>
-            <a:r>
-              <a:rPr sz="1400" b="1">
-                <a:solidFill>
-                  <a:srgbClr val="FFFFFF"/>
-                </a:solidFill>
-                <a:latin typeface="Microsoft YaHei"/>
-              </a:rPr>
-              <a:t>3</a:t>
-            </a:r>
-          </a:p>
-        </p:txBody>
-      </p:sp>
-      <p:sp>
-        <p:nvSpPr>
-          <p:cNvPr id="21" name="TextBox 20"/>
-          <p:cNvSpPr txBox="1"/>
-          <p:nvPr/>
-        </p:nvSpPr>
-        <p:spPr>
-          <a:xfrm>
-            <a:off x="2713024" y="2761488"/>
-            <a:ext cx="7863840" cy="457200"/>
-          </a:xfrm>
-          <a:prstGeom prst="rect">
-            <a:avLst/>
-          </a:prstGeom>
-          <a:noFill/>
-        </p:spPr>
-        <p:txBody>
-          <a:bodyPr wrap="none">
-            <a:spAutoFit/>
-          </a:bodyPr>
-          <a:lstStyle/>
-          <a:p>
-            <a:pPr algn="l">
-              <a:spcAft>
-                <a:spcPts val="1000"/>
-              </a:spcAft>
-            </a:pPr>
-            <a:r>
-              <a:rPr sz="2200" b="0">
-                <a:solidFill>
-                  <a:srgbClr val="3C2850"/>
-                </a:solidFill>
-                <a:latin typeface="Microsoft YaHei"/>
-              </a:rPr>
-              <a:t>策展主题二：真实与虚假</a:t>
+                <a:latin typeface="Arial"/>
+              </a:rPr>
+              <a:t>VS</a:t>
             </a:r>
           </a:p>
         </p:txBody>
@@ -9322,20 +7729,12 @@
         <p:nvPr/>
       </p:nvGrpSpPr>
       <p:grpSpPr/>
-      <p:pic>
-        <p:nvPicPr>
-          <p:cNvPr id="2" name="Picture 1" descr="bg_emperor.png"/>
-          <p:cNvPicPr>
-            <a:picLocks noChangeAspect="1"/>
-          </p:cNvPicPr>
-          <p:nvPr/>
-        </p:nvPicPr>
-        <p:blipFill>
-          <a:blip r:embed="rId2"/>
-          <a:stretch>
-            <a:fillRect/>
-          </a:stretch>
-        </p:blipFill>
+      <p:sp>
+        <p:nvSpPr>
+          <p:cNvPr id="2" name="Rectangle 1"/>
+          <p:cNvSpPr/>
+          <p:nvPr/>
+        </p:nvSpPr>
         <p:spPr>
           <a:xfrm>
             <a:off x="0" y="0"/>
@@ -9344,27 +7743,11 @@
           <a:prstGeom prst="rect">
             <a:avLst/>
           </a:prstGeom>
-        </p:spPr>
-      </p:pic>
-      <p:sp>
-        <p:nvSpPr>
-          <p:cNvPr id="3" name="Rectangle 2"/>
-          <p:cNvSpPr/>
-          <p:nvPr/>
-        </p:nvSpPr>
-        <p:spPr>
-          <a:xfrm>
-            <a:off x="292608" y="274320"/>
-            <a:ext cx="11594592" cy="6300216"/>
-          </a:xfrm>
-          <a:prstGeom prst="rect">
-            <a:avLst/>
-          </a:prstGeom>
-          <a:noFill/>
-          <a:ln w="31750">
-            <a:solidFill>
-              <a:srgbClr val="825AA0"/>
-            </a:solidFill>
+          <a:solidFill>
+            <a:srgbClr val="FFFFFF"/>
+          </a:solidFill>
+          <a:ln>
+            <a:noFill/>
           </a:ln>
         </p:spPr>
         <p:style>
@@ -9389,73 +7772,144 @@
           </a:p>
         </p:txBody>
       </p:sp>
-      <p:pic>
-        <p:nvPicPr>
-          <p:cNvPr id="4" name="Picture 3" descr="corner_emperor_tl.png"/>
-          <p:cNvPicPr>
-            <a:picLocks noChangeAspect="1"/>
-          </p:cNvPicPr>
-          <p:nvPr/>
-        </p:nvPicPr>
-        <p:blipFill>
-          <a:blip r:embed="rId3"/>
-          <a:stretch>
-            <a:fillRect/>
-          </a:stretch>
-        </p:blipFill>
-        <p:spPr>
-          <a:xfrm>
-            <a:off x="-45720" y="-45720"/>
-            <a:ext cx="2011680" cy="2011680"/>
-          </a:xfrm>
-          <a:prstGeom prst="rect">
-            <a:avLst/>
-          </a:prstGeom>
-        </p:spPr>
-      </p:pic>
-      <p:pic>
-        <p:nvPicPr>
-          <p:cNvPr id="5" name="Picture 4" descr="corner_emperor_tr.png"/>
-          <p:cNvPicPr>
-            <a:picLocks noChangeAspect="1"/>
-          </p:cNvPicPr>
-          <p:nvPr/>
-        </p:nvPicPr>
-        <p:blipFill>
-          <a:blip r:embed="rId4"/>
-          <a:stretch>
-            <a:fillRect/>
-          </a:stretch>
-        </p:blipFill>
-        <p:spPr>
-          <a:xfrm>
-            <a:off x="9875520" y="-45720"/>
-            <a:ext cx="2011680" cy="2011680"/>
-          </a:xfrm>
-          <a:prstGeom prst="rect">
-            <a:avLst/>
-          </a:prstGeom>
-        </p:spPr>
-      </p:pic>
-      <p:sp>
-        <p:nvSpPr>
-          <p:cNvPr id="6" name="Rounded Rectangle 5"/>
+      <p:sp>
+        <p:nvSpPr>
+          <p:cNvPr id="3" name="TextBox 2"/>
+          <p:cNvSpPr txBox="1"/>
+          <p:nvPr/>
+        </p:nvSpPr>
+        <p:spPr>
+          <a:xfrm>
+            <a:off x="411480" y="320040"/>
+            <a:ext cx="1097280" cy="274320"/>
+          </a:xfrm>
+          <a:prstGeom prst="rect">
+            <a:avLst/>
+          </a:prstGeom>
+          <a:noFill/>
+        </p:spPr>
+        <p:txBody>
+          <a:bodyPr wrap="square" anchor="t">
+            <a:spAutoFit/>
+          </a:bodyPr>
+          <a:lstStyle/>
+          <a:p>
+            <a:pPr algn="l">
+              <a:spcAft>
+                <a:spcPts val="200"/>
+              </a:spcAft>
+            </a:pPr>
+            <a:r>
+              <a:rPr sz="1400" b="1">
+                <a:solidFill>
+                  <a:srgbClr val="000000"/>
+                </a:solidFill>
+                <a:latin typeface="Arial"/>
+              </a:rPr>
+              <a:t>08</a:t>
+            </a:r>
+          </a:p>
+        </p:txBody>
+      </p:sp>
+      <p:sp>
+        <p:nvSpPr>
+          <p:cNvPr id="4" name="TextBox 3"/>
+          <p:cNvSpPr txBox="1"/>
+          <p:nvPr/>
+        </p:nvSpPr>
+        <p:spPr>
+          <a:xfrm>
+            <a:off x="411480" y="320040"/>
+            <a:ext cx="4572000" cy="457200"/>
+          </a:xfrm>
+          <a:prstGeom prst="rect">
+            <a:avLst/>
+          </a:prstGeom>
+          <a:noFill/>
+        </p:spPr>
+        <p:txBody>
+          <a:bodyPr wrap="square" anchor="t">
+            <a:spAutoFit/>
+          </a:bodyPr>
+          <a:lstStyle/>
+          <a:p>
+            <a:pPr algn="l">
+              <a:spcAft>
+                <a:spcPts val="200"/>
+              </a:spcAft>
+            </a:pPr>
+            <a:r>
+              <a:rPr sz="2800" b="1">
+                <a:solidFill>
+                  <a:srgbClr val="000000"/>
+                </a:solidFill>
+                <a:latin typeface="Arial"/>
+              </a:rPr>
+              <a:t>想象力的构建</a:t>
+            </a:r>
+          </a:p>
+        </p:txBody>
+      </p:sp>
+      <p:sp>
+        <p:nvSpPr>
+          <p:cNvPr id="5" name="TextBox 4"/>
+          <p:cNvSpPr txBox="1"/>
+          <p:nvPr/>
+        </p:nvSpPr>
+        <p:spPr>
+          <a:xfrm>
+            <a:off x="7726680" y="137160"/>
+            <a:ext cx="3657600" cy="1371600"/>
+          </a:xfrm>
+          <a:prstGeom prst="rect">
+            <a:avLst/>
+          </a:prstGeom>
+          <a:noFill/>
+        </p:spPr>
+        <p:txBody>
+          <a:bodyPr wrap="square" anchor="t">
+            <a:spAutoFit/>
+          </a:bodyPr>
+          <a:lstStyle/>
+          <a:p>
+            <a:pPr algn="r">
+              <a:spcAft>
+                <a:spcPts val="200"/>
+              </a:spcAft>
+            </a:pPr>
+            <a:r>
+              <a:rPr sz="7200" b="1">
+                <a:solidFill>
+                  <a:srgbClr val="FFE600"/>
+                </a:solidFill>
+                <a:latin typeface="Arial"/>
+              </a:rPr>
+              <a:t>100%</a:t>
+            </a:r>
+          </a:p>
+        </p:txBody>
+      </p:sp>
+      <p:sp>
+        <p:nvSpPr>
+          <p:cNvPr id="6" name="Rectangle 5"/>
           <p:cNvSpPr/>
           <p:nvPr/>
         </p:nvSpPr>
         <p:spPr>
           <a:xfrm>
-            <a:off x="502920" y="384048"/>
-            <a:ext cx="2011680" cy="384048"/>
-          </a:xfrm>
-          <a:prstGeom prst="roundRect">
+            <a:off x="411480" y="1005840"/>
+            <a:ext cx="8229600" cy="1417320"/>
+          </a:xfrm>
+          <a:prstGeom prst="rect">
             <a:avLst/>
           </a:prstGeom>
           <a:solidFill>
-            <a:srgbClr val="3C9664"/>
+            <a:srgbClr val="FFFFFF"/>
           </a:solidFill>
-          <a:ln>
-            <a:noFill/>
+          <a:ln w="25400">
+            <a:solidFill>
+              <a:srgbClr val="000000"/>
+            </a:solidFill>
           </a:ln>
         </p:spPr>
         <p:style>
@@ -9488,8 +7942,8 @@
         </p:nvSpPr>
         <p:spPr>
           <a:xfrm>
-            <a:off x="502920" y="402336"/>
-            <a:ext cx="2011680" cy="347472"/>
+            <a:off x="594360" y="1143000"/>
+            <a:ext cx="2286000" cy="1097280"/>
           </a:xfrm>
           <a:prstGeom prst="rect">
             <a:avLst/>
@@ -9497,47 +7951,88 @@
           <a:noFill/>
         </p:spPr>
         <p:txBody>
-          <a:bodyPr wrap="none">
+          <a:bodyPr wrap="square" anchor="t">
             <a:spAutoFit/>
           </a:bodyPr>
           <a:lstStyle/>
           <a:p>
-            <a:pPr algn="ctr">
-              <a:spcAft>
-                <a:spcPts val="1000"/>
-              </a:spcAft>
-            </a:pPr>
-            <a:r>
-              <a:rPr sz="1600" b="1">
-                <a:solidFill>
-                  <a:srgbClr val="FFFFFF"/>
-                </a:solidFill>
-                <a:latin typeface="Microsoft YaHei"/>
-              </a:rPr>
-              <a:t>课堂活动</a:t>
-            </a:r>
-          </a:p>
-        </p:txBody>
-      </p:sp>
-      <p:sp>
-        <p:nvSpPr>
-          <p:cNvPr id="8" name="Rounded Rectangle 7"/>
+            <a:pPr algn="l">
+              <a:spcAft>
+                <a:spcPts val="200"/>
+              </a:spcAft>
+            </a:pPr>
+            <a:r>
+              <a:rPr sz="1800" b="1">
+                <a:solidFill>
+                  <a:srgbClr val="000000"/>
+                </a:solidFill>
+                <a:latin typeface="Arial"/>
+              </a:rPr>
+              <a:t>现实基础</a:t>
+            </a:r>
+          </a:p>
+        </p:txBody>
+      </p:sp>
+      <p:sp>
+        <p:nvSpPr>
+          <p:cNvPr id="8" name="TextBox 7"/>
+          <p:cNvSpPr txBox="1"/>
+          <p:nvPr/>
+        </p:nvSpPr>
+        <p:spPr>
+          <a:xfrm>
+            <a:off x="2971800" y="1325880"/>
+            <a:ext cx="5486400" cy="914400"/>
+          </a:xfrm>
+          <a:prstGeom prst="rect">
+            <a:avLst/>
+          </a:prstGeom>
+          <a:noFill/>
+        </p:spPr>
+        <p:txBody>
+          <a:bodyPr wrap="square" anchor="t">
+            <a:spAutoFit/>
+          </a:bodyPr>
+          <a:lstStyle/>
+          <a:p>
+            <a:pPr algn="l">
+              <a:spcAft>
+                <a:spcPts val="200"/>
+              </a:spcAft>
+            </a:pPr>
+            <a:r>
+              <a:rPr sz="1500" b="0">
+                <a:solidFill>
+                  <a:srgbClr val="000000"/>
+                </a:solidFill>
+                <a:latin typeface="Arial"/>
+              </a:rPr>
+              <a:t>社会上的虚伪现象与谄媚风气</a:t>
+            </a:r>
+          </a:p>
+        </p:txBody>
+      </p:sp>
+      <p:sp>
+        <p:nvSpPr>
+          <p:cNvPr id="9" name="Rectangle 8"/>
           <p:cNvSpPr/>
           <p:nvPr/>
         </p:nvSpPr>
         <p:spPr>
           <a:xfrm>
-            <a:off x="4953304" y="502920"/>
-            <a:ext cx="2286000" cy="411480"/>
-          </a:xfrm>
-          <a:prstGeom prst="roundRect">
+            <a:off x="411480" y="2606040"/>
+            <a:ext cx="9601200" cy="1417320"/>
+          </a:xfrm>
+          <a:prstGeom prst="rect">
             <a:avLst/>
           </a:prstGeom>
           <a:solidFill>
-            <a:srgbClr val="C8AADC"/>
+            <a:srgbClr val="FFE600"/>
           </a:solidFill>
-          <a:ln>
-            <a:noFill/>
+          <a:ln w="25400">
+            <a:solidFill>
+              <a:srgbClr val="000000"/>
+            </a:solidFill>
           </a:ln>
         </p:spPr>
         <p:style>
@@ -9564,14 +8059,14 @@
       </p:sp>
       <p:sp>
         <p:nvSpPr>
-          <p:cNvPr id="9" name="TextBox 8"/>
+          <p:cNvPr id="10" name="TextBox 9"/>
           <p:cNvSpPr txBox="1"/>
           <p:nvPr/>
         </p:nvSpPr>
         <p:spPr>
           <a:xfrm>
-            <a:off x="4953304" y="521208"/>
-            <a:ext cx="2286000" cy="384048"/>
+            <a:off x="594360" y="2743200"/>
+            <a:ext cx="2286000" cy="1097280"/>
           </a:xfrm>
           <a:prstGeom prst="rect">
             <a:avLst/>
@@ -9579,38 +8074,38 @@
           <a:noFill/>
         </p:spPr>
         <p:txBody>
-          <a:bodyPr wrap="none">
+          <a:bodyPr wrap="square" anchor="t">
             <a:spAutoFit/>
           </a:bodyPr>
           <a:lstStyle/>
           <a:p>
-            <a:pPr algn="ctr">
-              <a:spcAft>
-                <a:spcPts val="1000"/>
+            <a:pPr algn="l">
+              <a:spcAft>
+                <a:spcPts val="200"/>
               </a:spcAft>
             </a:pPr>
             <a:r>
               <a:rPr sz="1800" b="1">
                 <a:solidFill>
-                  <a:srgbClr val="3C2850"/>
-                </a:solidFill>
-                <a:latin typeface="Microsoft YaHei"/>
-              </a:rPr>
-              <a:t>课后延伸</a:t>
-            </a:r>
-          </a:p>
-        </p:txBody>
-      </p:sp>
-      <p:sp>
-        <p:nvSpPr>
-          <p:cNvPr id="10" name="TextBox 9"/>
+                  <a:srgbClr val="000000"/>
+                </a:solidFill>
+                <a:latin typeface="Arial"/>
+              </a:rPr>
+              <a:t>夸张想象</a:t>
+            </a:r>
+          </a:p>
+        </p:txBody>
+      </p:sp>
+      <p:sp>
+        <p:nvSpPr>
+          <p:cNvPr id="11" name="TextBox 10"/>
           <p:cNvSpPr txBox="1"/>
           <p:nvPr/>
         </p:nvSpPr>
         <p:spPr>
           <a:xfrm>
-            <a:off x="1371600" y="960120"/>
-            <a:ext cx="9418320" cy="822960"/>
+            <a:off x="2971800" y="2926080"/>
+            <a:ext cx="6858000" cy="914400"/>
           </a:xfrm>
           <a:prstGeom prst="rect">
             <a:avLst/>
@@ -9618,47 +8113,49 @@
           <a:noFill/>
         </p:spPr>
         <p:txBody>
-          <a:bodyPr wrap="square">
+          <a:bodyPr wrap="square" anchor="t">
             <a:spAutoFit/>
           </a:bodyPr>
           <a:lstStyle/>
           <a:p>
-            <a:pPr algn="ctr">
-              <a:spcAft>
-                <a:spcPts val="1000"/>
-              </a:spcAft>
-            </a:pPr>
-            <a:r>
-              <a:rPr sz="3600" b="1">
-                <a:solidFill>
-                  <a:srgbClr val="784696"/>
-                </a:solidFill>
-                <a:latin typeface="Microsoft YaHei"/>
-              </a:rPr>
-              <a:t>课后作业</a:t>
-            </a:r>
-          </a:p>
-        </p:txBody>
-      </p:sp>
-      <p:sp>
-        <p:nvSpPr>
-          <p:cNvPr id="11" name="Rectangle 10"/>
+            <a:pPr algn="l">
+              <a:spcAft>
+                <a:spcPts val="200"/>
+              </a:spcAft>
+            </a:pPr>
+            <a:r>
+              <a:rPr sz="1500" b="0">
+                <a:solidFill>
+                  <a:srgbClr val="000000"/>
+                </a:solidFill>
+                <a:latin typeface="Arial"/>
+              </a:rPr>
+              <a:t>将「虚伪」实体化为「不存在的衣服」</a:t>
+            </a:r>
+          </a:p>
+        </p:txBody>
+      </p:sp>
+      <p:sp>
+        <p:nvSpPr>
+          <p:cNvPr id="12" name="Rectangle 11"/>
           <p:cNvSpPr/>
           <p:nvPr/>
         </p:nvSpPr>
         <p:spPr>
           <a:xfrm>
-            <a:off x="3200400" y="1600200"/>
-            <a:ext cx="5760720" cy="27432"/>
+            <a:off x="411480" y="4206240"/>
+            <a:ext cx="8229600" cy="1417320"/>
           </a:xfrm>
           <a:prstGeom prst="rect">
             <a:avLst/>
           </a:prstGeom>
           <a:solidFill>
-            <a:srgbClr val="C8AADC"/>
+            <a:srgbClr val="FFFFFF"/>
           </a:solidFill>
-          <a:ln>
-            <a:noFill/>
+          <a:ln w="25400">
+            <a:solidFill>
+              <a:srgbClr val="000000"/>
+            </a:solidFill>
           </a:ln>
         </p:spPr>
         <p:style>
@@ -9685,25 +8182,101 @@
       </p:sp>
       <p:sp>
         <p:nvSpPr>
-          <p:cNvPr id="12" name="Rounded Rectangle 11"/>
+          <p:cNvPr id="13" name="TextBox 12"/>
+          <p:cNvSpPr txBox="1"/>
+          <p:nvPr/>
+        </p:nvSpPr>
+        <p:spPr>
+          <a:xfrm>
+            <a:off x="594360" y="4343400"/>
+            <a:ext cx="2286000" cy="1097280"/>
+          </a:xfrm>
+          <a:prstGeom prst="rect">
+            <a:avLst/>
+          </a:prstGeom>
+          <a:noFill/>
+        </p:spPr>
+        <p:txBody>
+          <a:bodyPr wrap="square" anchor="t">
+            <a:spAutoFit/>
+          </a:bodyPr>
+          <a:lstStyle/>
+          <a:p>
+            <a:pPr algn="l">
+              <a:spcAft>
+                <a:spcPts val="200"/>
+              </a:spcAft>
+            </a:pPr>
+            <a:r>
+              <a:rPr sz="1800" b="1">
+                <a:solidFill>
+                  <a:srgbClr val="000000"/>
+                </a:solidFill>
+                <a:latin typeface="Arial"/>
+              </a:rPr>
+              <a:t>逻辑</a:t>
+            </a:r>
+          </a:p>
+        </p:txBody>
+      </p:sp>
+      <p:sp>
+        <p:nvSpPr>
+          <p:cNvPr id="14" name="TextBox 13"/>
+          <p:cNvSpPr txBox="1"/>
+          <p:nvPr/>
+        </p:nvSpPr>
+        <p:spPr>
+          <a:xfrm>
+            <a:off x="2971800" y="4526280"/>
+            <a:ext cx="5486400" cy="914400"/>
+          </a:xfrm>
+          <a:prstGeom prst="rect">
+            <a:avLst/>
+          </a:prstGeom>
+          <a:noFill/>
+        </p:spPr>
+        <p:txBody>
+          <a:bodyPr wrap="square" anchor="t">
+            <a:spAutoFit/>
+          </a:bodyPr>
+          <a:lstStyle/>
+          <a:p>
+            <a:pPr algn="l">
+              <a:spcAft>
+                <a:spcPts val="200"/>
+              </a:spcAft>
+            </a:pPr>
+            <a:r>
+              <a:rPr sz="1500" b="0">
+                <a:solidFill>
+                  <a:srgbClr val="000000"/>
+                </a:solidFill>
+                <a:latin typeface="Arial"/>
+              </a:rPr>
+              <a:t>人人害怕承认 → 谎言完美运转</a:t>
+            </a:r>
+          </a:p>
+        </p:txBody>
+      </p:sp>
+      <p:sp>
+        <p:nvSpPr>
+          <p:cNvPr id="15" name="Rectangle 14"/>
           <p:cNvSpPr/>
           <p:nvPr/>
         </p:nvSpPr>
         <p:spPr>
           <a:xfrm>
-            <a:off x="1295704" y="1645920"/>
-            <a:ext cx="9601200" cy="1545336"/>
-          </a:xfrm>
-          <a:prstGeom prst="roundRect">
+            <a:off x="411480" y="5806440"/>
+            <a:ext cx="11368735" cy="685800"/>
+          </a:xfrm>
+          <a:prstGeom prst="rect">
             <a:avLst/>
           </a:prstGeom>
           <a:solidFill>
-            <a:srgbClr val="FCF8FF"/>
+            <a:srgbClr val="000000"/>
           </a:solidFill>
-          <a:ln w="19050">
-            <a:solidFill>
-              <a:srgbClr val="C8AADC"/>
-            </a:solidFill>
+          <a:ln>
+            <a:noFill/>
           </a:ln>
         </p:spPr>
         <p:style>
@@ -9730,20 +8303,77 @@
       </p:sp>
       <p:sp>
         <p:nvSpPr>
-          <p:cNvPr id="13" name="Oval 12"/>
+          <p:cNvPr id="16" name="TextBox 15"/>
+          <p:cNvSpPr txBox="1"/>
+          <p:nvPr/>
+        </p:nvSpPr>
+        <p:spPr>
+          <a:xfrm>
+            <a:off x="594360" y="5897880"/>
+            <a:ext cx="11002975" cy="502920"/>
+          </a:xfrm>
+          <a:prstGeom prst="rect">
+            <a:avLst/>
+          </a:prstGeom>
+          <a:noFill/>
+        </p:spPr>
+        <p:txBody>
+          <a:bodyPr wrap="square" anchor="ctr">
+            <a:spAutoFit/>
+          </a:bodyPr>
+          <a:lstStyle/>
+          <a:p>
+            <a:pPr algn="ctr">
+              <a:spcAft>
+                <a:spcPts val="200"/>
+              </a:spcAft>
+            </a:pPr>
+            <a:r>
+              <a:rPr sz="1800" b="1">
+                <a:solidFill>
+                  <a:srgbClr val="FFFFFF"/>
+                </a:solidFill>
+                <a:latin typeface="Arial"/>
+              </a:rPr>
+              <a:t>想象源于现实，夸张服务于讽刺。</a:t>
+            </a:r>
+          </a:p>
+        </p:txBody>
+      </p:sp>
+    </p:spTree>
+  </p:cSld>
+  <p:clrMapOvr>
+    <a:masterClrMapping/>
+  </p:clrMapOvr>
+</p:sld>
+</file>
+
+<file path=ppt/slides/slide9.xml><?xml version="1.0" encoding="utf-8"?>
+<p:sld xmlns:a="http://schemas.openxmlformats.org/drawingml/2006/main" xmlns:p="http://schemas.openxmlformats.org/presentationml/2006/main" xmlns:r="http://schemas.openxmlformats.org/officeDocument/2006/relationships">
+  <p:cSld>
+    <p:spTree>
+      <p:nvGrpSpPr>
+        <p:cNvPr id="1" name=""/>
+        <p:cNvGrpSpPr/>
+        <p:nvPr/>
+      </p:nvGrpSpPr>
+      <p:grpSpPr/>
+      <p:sp>
+        <p:nvSpPr>
+          <p:cNvPr id="2" name="Rectangle 1"/>
           <p:cNvSpPr/>
           <p:nvPr/>
         </p:nvSpPr>
         <p:spPr>
           <a:xfrm>
-            <a:off x="2255824" y="1828800"/>
-            <a:ext cx="347472" cy="347472"/>
-          </a:xfrm>
-          <a:prstGeom prst="ellipse">
+            <a:off x="0" y="0"/>
+            <a:ext cx="12191695" cy="6858000"/>
+          </a:xfrm>
+          <a:prstGeom prst="rect">
             <a:avLst/>
           </a:prstGeom>
           <a:solidFill>
-            <a:srgbClr val="784696"/>
+            <a:srgbClr val="FFFFFF"/>
           </a:solidFill>
           <a:ln>
             <a:noFill/>
@@ -9773,14 +8403,14 @@
       </p:sp>
       <p:sp>
         <p:nvSpPr>
-          <p:cNvPr id="14" name="TextBox 13"/>
+          <p:cNvPr id="3" name="TextBox 2"/>
           <p:cNvSpPr txBox="1"/>
           <p:nvPr/>
         </p:nvSpPr>
         <p:spPr>
           <a:xfrm>
-            <a:off x="2255824" y="1847088"/>
-            <a:ext cx="347472" cy="329184"/>
+            <a:off x="411480" y="320040"/>
+            <a:ext cx="1097280" cy="274320"/>
           </a:xfrm>
           <a:prstGeom prst="rect">
             <a:avLst/>
@@ -9788,38 +8418,38 @@
           <a:noFill/>
         </p:spPr>
         <p:txBody>
-          <a:bodyPr wrap="none">
+          <a:bodyPr wrap="square" anchor="t">
             <a:spAutoFit/>
           </a:bodyPr>
           <a:lstStyle/>
           <a:p>
-            <a:pPr algn="ctr">
-              <a:spcAft>
-                <a:spcPts val="1000"/>
+            <a:pPr algn="l">
+              <a:spcAft>
+                <a:spcPts val="200"/>
               </a:spcAft>
             </a:pPr>
             <a:r>
               <a:rPr sz="1400" b="1">
                 <a:solidFill>
-                  <a:srgbClr val="FFFFFF"/>
-                </a:solidFill>
-                <a:latin typeface="Microsoft YaHei"/>
-              </a:rPr>
-              <a:t>1</a:t>
-            </a:r>
-          </a:p>
-        </p:txBody>
-      </p:sp>
-      <p:sp>
-        <p:nvSpPr>
-          <p:cNvPr id="15" name="TextBox 14"/>
+                  <a:srgbClr val="000000"/>
+                </a:solidFill>
+                <a:latin typeface="Arial"/>
+              </a:rPr>
+              <a:t>09</a:t>
+            </a:r>
+          </a:p>
+        </p:txBody>
+      </p:sp>
+      <p:sp>
+        <p:nvSpPr>
+          <p:cNvPr id="4" name="TextBox 3"/>
           <p:cNvSpPr txBox="1"/>
           <p:nvPr/>
         </p:nvSpPr>
         <p:spPr>
           <a:xfrm>
-            <a:off x="2713024" y="1810512"/>
-            <a:ext cx="7863840" cy="457200"/>
+            <a:off x="7269480" y="182880"/>
+            <a:ext cx="4114800" cy="2011680"/>
           </a:xfrm>
           <a:prstGeom prst="rect">
             <a:avLst/>
@@ -9827,47 +8457,88 @@
           <a:noFill/>
         </p:spPr>
         <p:txBody>
-          <a:bodyPr wrap="none">
+          <a:bodyPr wrap="square" anchor="t">
             <a:spAutoFit/>
           </a:bodyPr>
           <a:lstStyle/>
           <a:p>
+            <a:pPr algn="r">
+              <a:spcAft>
+                <a:spcPts val="200"/>
+              </a:spcAft>
+            </a:pPr>
+            <a:r>
+              <a:rPr sz="14000" b="1">
+                <a:solidFill>
+                  <a:srgbClr val="FFE600"/>
+                </a:solidFill>
+                <a:latin typeface="Arial"/>
+              </a:rPr>
+              <a:t>200</a:t>
+            </a:r>
+          </a:p>
+        </p:txBody>
+      </p:sp>
+      <p:sp>
+        <p:nvSpPr>
+          <p:cNvPr id="5" name="TextBox 4"/>
+          <p:cNvSpPr txBox="1"/>
+          <p:nvPr/>
+        </p:nvSpPr>
+        <p:spPr>
+          <a:xfrm>
+            <a:off x="411480" y="320040"/>
+            <a:ext cx="5943600" cy="502920"/>
+          </a:xfrm>
+          <a:prstGeom prst="rect">
+            <a:avLst/>
+          </a:prstGeom>
+          <a:noFill/>
+        </p:spPr>
+        <p:txBody>
+          <a:bodyPr wrap="square" anchor="t">
+            <a:spAutoFit/>
+          </a:bodyPr>
+          <a:lstStyle/>
+          <a:p>
             <a:pPr algn="l">
               <a:spcAft>
-                <a:spcPts val="1000"/>
-              </a:spcAft>
-            </a:pPr>
-            <a:r>
-              <a:rPr sz="2400" b="0">
-                <a:solidFill>
-                  <a:srgbClr val="3C2850"/>
-                </a:solidFill>
-                <a:latin typeface="Microsoft YaHei"/>
-              </a:rPr>
-              <a:t>必做：用150字概括故事</a:t>
-            </a:r>
-          </a:p>
-        </p:txBody>
-      </p:sp>
-      <p:sp>
-        <p:nvSpPr>
-          <p:cNvPr id="16" name="Oval 15"/>
+                <a:spcPts val="200"/>
+              </a:spcAft>
+            </a:pPr>
+            <a:r>
+              <a:rPr sz="3200" b="1">
+                <a:solidFill>
+                  <a:srgbClr val="000000"/>
+                </a:solidFill>
+                <a:latin typeface="Arial"/>
+              </a:rPr>
+              <a:t>写作任务</a:t>
+            </a:r>
+          </a:p>
+        </p:txBody>
+      </p:sp>
+      <p:sp>
+        <p:nvSpPr>
+          <p:cNvPr id="6" name="Rectangle 5"/>
           <p:cNvSpPr/>
           <p:nvPr/>
         </p:nvSpPr>
         <p:spPr>
           <a:xfrm>
-            <a:off x="2255824" y="2395728"/>
-            <a:ext cx="347472" cy="347472"/>
-          </a:xfrm>
-          <a:prstGeom prst="ellipse">
+            <a:off x="411480" y="960120"/>
+            <a:ext cx="6583680" cy="5303520"/>
+          </a:xfrm>
+          <a:prstGeom prst="rect">
             <a:avLst/>
           </a:prstGeom>
           <a:solidFill>
-            <a:srgbClr val="784696"/>
+            <a:srgbClr val="FFFFFF"/>
           </a:solidFill>
-          <a:ln>
-            <a:noFill/>
+          <a:ln w="25400">
+            <a:solidFill>
+              <a:srgbClr val="000000"/>
+            </a:solidFill>
           </a:ln>
         </p:spPr>
         <p:style>
@@ -9894,14 +8565,14 @@
       </p:sp>
       <p:sp>
         <p:nvSpPr>
-          <p:cNvPr id="17" name="TextBox 16"/>
+          <p:cNvPr id="7" name="TextBox 6"/>
           <p:cNvSpPr txBox="1"/>
           <p:nvPr/>
         </p:nvSpPr>
         <p:spPr>
           <a:xfrm>
-            <a:off x="2255824" y="2414016"/>
-            <a:ext cx="347472" cy="329184"/>
+            <a:off x="640080" y="1143000"/>
+            <a:ext cx="6126480" cy="4937760"/>
           </a:xfrm>
           <a:prstGeom prst="rect">
             <a:avLst/>
@@ -9909,38 +8580,211 @@
           <a:noFill/>
         </p:spPr>
         <p:txBody>
-          <a:bodyPr wrap="none">
+          <a:bodyPr wrap="square" anchor="t">
             <a:spAutoFit/>
           </a:bodyPr>
           <a:lstStyle/>
           <a:p>
-            <a:pPr algn="ctr">
-              <a:spcAft>
-                <a:spcPts val="1000"/>
+            <a:pPr algn="l">
+              <a:spcAft>
+                <a:spcPts val="200"/>
               </a:spcAft>
             </a:pPr>
             <a:r>
               <a:rPr sz="1400" b="1">
                 <a:solidFill>
-                  <a:srgbClr val="FFFFFF"/>
-                </a:solidFill>
-                <a:latin typeface="Microsoft YaHei"/>
-              </a:rPr>
-              <a:t>2</a:t>
-            </a:r>
-          </a:p>
-        </p:txBody>
-      </p:sp>
-      <p:sp>
-        <p:nvSpPr>
-          <p:cNvPr id="18" name="TextBox 17"/>
+                  <a:srgbClr val="000000"/>
+                </a:solidFill>
+                <a:latin typeface="Arial"/>
+              </a:rPr>
+              <a:t>任务</a:t>
+            </a:r>
+          </a:p>
+          <a:p>
+            <a:pPr algn="l">
+              <a:spcAft>
+                <a:spcPts val="200"/>
+              </a:spcAft>
+            </a:pPr>
+            <a:r>
+              <a:rPr sz="1600" b="1">
+                <a:solidFill>
+                  <a:srgbClr val="000000"/>
+                </a:solidFill>
+                <a:latin typeface="Arial"/>
+              </a:rPr>
+              <a:t>为《皇帝的新装》续写一个 200 字结尾。</a:t>
+            </a:r>
+          </a:p>
+          <a:p>
+            <a:pPr algn="l">
+              <a:spcAft>
+                <a:spcPts val="200"/>
+              </a:spcAft>
+            </a:pPr>
+            <a:r>
+              <a:rPr sz="1000" b="0">
+                <a:solidFill>
+                  <a:srgbClr val="000000"/>
+                </a:solidFill>
+                <a:latin typeface="Arial"/>
+              </a:rPr>
+              <a:t/>
+            </a:r>
+          </a:p>
+          <a:p>
+            <a:pPr algn="l">
+              <a:spcAft>
+                <a:spcPts val="200"/>
+              </a:spcAft>
+            </a:pPr>
+            <a:r>
+              <a:rPr sz="1400" b="1">
+                <a:solidFill>
+                  <a:srgbClr val="000000"/>
+                </a:solidFill>
+                <a:latin typeface="Arial"/>
+              </a:rPr>
+              <a:t>提示</a:t>
+            </a:r>
+          </a:p>
+          <a:p>
+            <a:pPr algn="l">
+              <a:spcAft>
+                <a:spcPts val="200"/>
+              </a:spcAft>
+            </a:pPr>
+            <a:r>
+              <a:rPr sz="1400" b="0">
+                <a:solidFill>
+                  <a:srgbClr val="000000"/>
+                </a:solidFill>
+                <a:latin typeface="Arial"/>
+              </a:rPr>
+              <a:t>游行结束后，皇帝回宫会发生什么？</a:t>
+            </a:r>
+          </a:p>
+          <a:p>
+            <a:pPr algn="l">
+              <a:spcAft>
+                <a:spcPts val="200"/>
+              </a:spcAft>
+            </a:pPr>
+            <a:r>
+              <a:rPr sz="1400" b="0">
+                <a:solidFill>
+                  <a:srgbClr val="000000"/>
+                </a:solidFill>
+                <a:latin typeface="Arial"/>
+              </a:rPr>
+              <a:t>大臣们会怎么做？百姓如何议论？</a:t>
+            </a:r>
+          </a:p>
+          <a:p>
+            <a:pPr algn="l">
+              <a:spcAft>
+                <a:spcPts val="200"/>
+              </a:spcAft>
+            </a:pPr>
+            <a:r>
+              <a:rPr sz="1000" b="0">
+                <a:solidFill>
+                  <a:srgbClr val="000000"/>
+                </a:solidFill>
+                <a:latin typeface="Arial"/>
+              </a:rPr>
+              <a:t/>
+            </a:r>
+          </a:p>
+          <a:p>
+            <a:pPr algn="l">
+              <a:spcAft>
+                <a:spcPts val="200"/>
+              </a:spcAft>
+            </a:pPr>
+            <a:r>
+              <a:rPr sz="1400" b="1">
+                <a:solidFill>
+                  <a:srgbClr val="000000"/>
+                </a:solidFill>
+                <a:latin typeface="Arial"/>
+              </a:rPr>
+              <a:t>要求</a:t>
+            </a:r>
+          </a:p>
+          <a:p>
+            <a:pPr algn="l">
+              <a:spcAft>
+                <a:spcPts val="200"/>
+              </a:spcAft>
+            </a:pPr>
+            <a:r>
+              <a:rPr sz="1400" b="0">
+                <a:solidFill>
+                  <a:srgbClr val="000000"/>
+                </a:solidFill>
+                <a:latin typeface="Arial"/>
+              </a:rPr>
+              <a:t>符合人物性格逻辑，具有讽刺效果。</a:t>
+            </a:r>
+          </a:p>
+        </p:txBody>
+      </p:sp>
+      <p:sp>
+        <p:nvSpPr>
+          <p:cNvPr id="8" name="Rectangle 7"/>
+          <p:cNvSpPr/>
+          <p:nvPr/>
+        </p:nvSpPr>
+        <p:spPr>
+          <a:xfrm>
+            <a:off x="7269480" y="2560320"/>
+            <a:ext cx="4480560" cy="3703320"/>
+          </a:xfrm>
+          <a:prstGeom prst="rect">
+            <a:avLst/>
+          </a:prstGeom>
+          <a:solidFill>
+            <a:srgbClr val="FFE600"/>
+          </a:solidFill>
+          <a:ln w="25400">
+            <a:solidFill>
+              <a:srgbClr val="000000"/>
+            </a:solidFill>
+          </a:ln>
+        </p:spPr>
+        <p:style>
+          <a:lnRef idx="1">
+            <a:schemeClr val="accent1"/>
+          </a:lnRef>
+          <a:fillRef idx="3">
+            <a:schemeClr val="accent1"/>
+          </a:fillRef>
+          <a:effectRef idx="2">
+            <a:schemeClr val="accent1"/>
+          </a:effectRef>
+          <a:fontRef idx="minor">
+            <a:schemeClr val="lt1"/>
+          </a:fontRef>
+        </p:style>
+        <p:txBody>
+          <a:bodyPr rtlCol="0" anchor="ctr"/>
+          <a:lstStyle/>
+          <a:p>
+            <a:pPr algn="ctr"/>
+          </a:p>
+        </p:txBody>
+      </p:sp>
+      <p:sp>
+        <p:nvSpPr>
+          <p:cNvPr id="9" name="TextBox 8"/>
           <p:cNvSpPr txBox="1"/>
           <p:nvPr/>
         </p:nvSpPr>
         <p:spPr>
           <a:xfrm>
-            <a:off x="2713024" y="2377440"/>
-            <a:ext cx="7863840" cy="457200"/>
+            <a:off x="7452360" y="2743200"/>
+            <a:ext cx="4114800" cy="3383280"/>
           </a:xfrm>
           <a:prstGeom prst="rect">
             <a:avLst/>
@@ -9948,24 +8792,120 @@
           <a:noFill/>
         </p:spPr>
         <p:txBody>
-          <a:bodyPr wrap="none">
+          <a:bodyPr wrap="square" anchor="t">
             <a:spAutoFit/>
           </a:bodyPr>
           <a:lstStyle/>
           <a:p>
-            <a:pPr algn="l">
-              <a:spcAft>
-                <a:spcPts val="1000"/>
-              </a:spcAft>
-            </a:pPr>
-            <a:r>
-              <a:rPr sz="2400" b="0">
-                <a:solidFill>
-                  <a:srgbClr val="3C2850"/>
-                </a:solidFill>
-                <a:latin typeface="Microsoft YaHei"/>
-              </a:rPr>
-              <a:t>情境：班级群流传「震惊」消息，你会怎么做？（50字）</a:t>
+            <a:pPr algn="ctr">
+              <a:spcAft>
+                <a:spcPts val="200"/>
+              </a:spcAft>
+            </a:pPr>
+            <a:r>
+              <a:rPr sz="1400" b="1">
+                <a:solidFill>
+                  <a:srgbClr val="000000"/>
+                </a:solidFill>
+                <a:latin typeface="Arial"/>
+              </a:rPr>
+              <a:t>WORDS</a:t>
+            </a:r>
+          </a:p>
+          <a:p>
+            <a:pPr algn="ctr">
+              <a:spcAft>
+                <a:spcPts val="200"/>
+              </a:spcAft>
+            </a:pPr>
+            <a:r>
+              <a:rPr sz="600" b="0">
+                <a:solidFill>
+                  <a:srgbClr val="000000"/>
+                </a:solidFill>
+                <a:latin typeface="Arial"/>
+              </a:rPr>
+              <a:t/>
+            </a:r>
+          </a:p>
+          <a:p>
+            <a:pPr algn="ctr">
+              <a:spcAft>
+                <a:spcPts val="200"/>
+              </a:spcAft>
+            </a:pPr>
+            <a:r>
+              <a:rPr sz="3600" b="1">
+                <a:solidFill>
+                  <a:srgbClr val="000000"/>
+                </a:solidFill>
+                <a:latin typeface="Arial"/>
+              </a:rPr>
+              <a:t>续写</a:t>
+            </a:r>
+          </a:p>
+          <a:p>
+            <a:pPr algn="ctr">
+              <a:spcAft>
+                <a:spcPts val="200"/>
+              </a:spcAft>
+            </a:pPr>
+            <a:r>
+              <a:rPr sz="600" b="0">
+                <a:solidFill>
+                  <a:srgbClr val="000000"/>
+                </a:solidFill>
+                <a:latin typeface="Arial"/>
+              </a:rPr>
+              <a:t/>
+            </a:r>
+          </a:p>
+          <a:p>
+            <a:pPr algn="ctr">
+              <a:spcAft>
+                <a:spcPts val="200"/>
+              </a:spcAft>
+            </a:pPr>
+            <a:r>
+              <a:rPr sz="3600" b="1">
+                <a:solidFill>
+                  <a:srgbClr val="000000"/>
+                </a:solidFill>
+                <a:latin typeface="Arial"/>
+              </a:rPr>
+              <a:t>讽刺</a:t>
+            </a:r>
+          </a:p>
+          <a:p>
+            <a:pPr algn="ctr">
+              <a:spcAft>
+                <a:spcPts val="200"/>
+              </a:spcAft>
+            </a:pPr>
+            <a:r>
+              <a:rPr sz="600" b="0">
+                <a:solidFill>
+                  <a:srgbClr val="000000"/>
+                </a:solidFill>
+                <a:latin typeface="Arial"/>
+              </a:rPr>
+              <a:t/>
+            </a:r>
+          </a:p>
+          <a:p>
+            <a:pPr algn="ctr">
+              <a:spcAft>
+                <a:spcPts val="200"/>
+              </a:spcAft>
+            </a:pPr>
+            <a:r>
+              <a:rPr sz="3600" b="1">
+                <a:solidFill>
+                  <a:srgbClr val="000000"/>
+                </a:solidFill>
+                <a:latin typeface="Arial"/>
+              </a:rPr>
+              <a:t>逻辑</a:t>
             </a:r>
           </a:p>
         </p:txBody>
